--- a/Bases de Datos II/Clases/Clase 2 - Administracion de bases de datos/Presentacion.pptx
+++ b/Bases de Datos II/Clases/Clase 2 - Administracion de bases de datos/Presentacion.pptx
@@ -53,6 +53,10 @@
     <p:sldId id="301" r:id="rId52"/>
     <p:sldId id="302" r:id="rId53"/>
     <p:sldId id="303" r:id="rId54"/>
+    <p:sldId id="304" r:id="rId55"/>
+    <p:sldId id="305" r:id="rId56"/>
+    <p:sldId id="306" r:id="rId57"/>
+    <p:sldId id="307" r:id="rId58"/>
   </p:sldIdLst>
   <p:sldSz cx="12191695" cy="6858000" type="screen4x3"/>
   <p:notesSz cx="6858000" cy="9144000"/>
@@ -12349,7 +12353,7 @@
                 </a:solidFill>
                 <a:latin typeface="Calibri"/>
               </a:rPr>
-              <a:t>Minimo privilegio, en concreto</a:t>
+              <a:t>Crear el rol y otorgar solo lo que el cargo usa</a:t>
             </a:r>
           </a:p>
         </p:txBody>
@@ -12363,7 +12367,7 @@
         <p:spPr>
           <a:xfrm>
             <a:off x="457200" y="1261872"/>
-            <a:ext cx="5478627" cy="5093208"/>
+            <a:ext cx="11277295" cy="5093208"/>
           </a:xfrm>
           <a:prstGeom prst="roundRect">
             <a:avLst>
@@ -12371,7 +12375,7 @@
             </a:avLst>
           </a:prstGeom>
           <a:solidFill>
-            <a:srgbClr val="FBE4E4"/>
+            <a:srgbClr val="1E2A38"/>
           </a:solidFill>
           <a:ln>
             <a:noFill/>
@@ -12408,215 +12412,7 @@
         <p:spPr>
           <a:xfrm>
             <a:off x="457200" y="1261872"/>
-            <a:ext cx="5478627" cy="502920"/>
-          </a:xfrm>
-          <a:prstGeom prst="rect">
-            <a:avLst/>
-          </a:prstGeom>
-          <a:solidFill>
-            <a:srgbClr val="A02030"/>
-          </a:solidFill>
-          <a:ln>
-            <a:noFill/>
-          </a:ln>
-        </p:spPr>
-        <p:style>
-          <a:lnRef idx="1">
-            <a:schemeClr val="accent1"/>
-          </a:lnRef>
-          <a:fillRef idx="3">
-            <a:schemeClr val="accent1"/>
-          </a:fillRef>
-          <a:effectRef idx="2">
-            <a:schemeClr val="accent1"/>
-          </a:effectRef>
-          <a:fontRef idx="minor">
-            <a:schemeClr val="lt1"/>
-          </a:fontRef>
-        </p:style>
-        <p:txBody>
-          <a:bodyPr rtlCol="0" anchor="ctr"/>
-          <a:lstStyle/>
-          <a:p>
-            <a:pPr algn="ctr"/>
-          </a:p>
-        </p:txBody>
-      </p:sp>
-      <p:sp>
-        <p:nvSpPr>
-          <p:cNvPr id="7" name="TextBox 6"/>
-          <p:cNvSpPr txBox="1"/>
-          <p:nvPr/>
-        </p:nvSpPr>
-        <p:spPr>
-          <a:xfrm>
-            <a:off x="594360" y="1353312"/>
-            <a:ext cx="5204307" cy="365760"/>
-          </a:xfrm>
-          <a:prstGeom prst="rect">
-            <a:avLst/>
-          </a:prstGeom>
-          <a:noFill/>
-        </p:spPr>
-        <p:txBody>
-          <a:bodyPr wrap="square" anchor="ctr"/>
-          <a:lstStyle/>
-          <a:p>
-            <a:pPr algn="ctr"/>
-            <a:r>
-              <a:rPr sz="1600" b="1" i="0">
-                <a:solidFill>
-                  <a:srgbClr val="FFFFFF"/>
-                </a:solidFill>
-                <a:latin typeface="Calibri"/>
-              </a:rPr>
-              <a:t>Lo que suele pasar</a:t>
-            </a:r>
-          </a:p>
-        </p:txBody>
-      </p:sp>
-      <p:sp>
-        <p:nvSpPr>
-          <p:cNvPr id="8" name="TextBox 7"/>
-          <p:cNvSpPr txBox="1"/>
-          <p:nvPr/>
-        </p:nvSpPr>
-        <p:spPr>
-          <a:xfrm>
-            <a:off x="621792" y="1901952"/>
-            <a:ext cx="5158587" cy="4498848"/>
-          </a:xfrm>
-          <a:prstGeom prst="rect">
-            <a:avLst/>
-          </a:prstGeom>
-          <a:noFill/>
-        </p:spPr>
-        <p:txBody>
-          <a:bodyPr wrap="square">
-            <a:spAutoFit/>
-          </a:bodyPr>
-          <a:lstStyle/>
-          <a:p>
-            <a:pPr>
-              <a:spcAft>
-                <a:spcPts val="800"/>
-              </a:spcAft>
-            </a:pPr>
-            <a:r>
-              <a:rPr sz="1500" b="0" i="0">
-                <a:solidFill>
-                  <a:srgbClr val="333333"/>
-                </a:solidFill>
-                <a:latin typeface="Calibri"/>
-              </a:rPr>
-              <a:t>–   Un solo usuario «admin» que todos comparten</a:t>
-            </a:r>
-          </a:p>
-          <a:p>
-            <a:pPr>
-              <a:spcAft>
-                <a:spcPts val="800"/>
-              </a:spcAft>
-            </a:pPr>
-            <a:r>
-              <a:rPr sz="1500" b="0" i="0">
-                <a:solidFill>
-                  <a:srgbClr val="333333"/>
-                </a:solidFill>
-                <a:latin typeface="Calibri"/>
-              </a:rPr>
-              <a:t>–   GRANT ALL 'para que no falle nada'</a:t>
-            </a:r>
-          </a:p>
-          <a:p>
-            <a:pPr>
-              <a:spcAft>
-                <a:spcPts val="800"/>
-              </a:spcAft>
-            </a:pPr>
-            <a:r>
-              <a:rPr sz="1500" b="0" i="0">
-                <a:solidFill>
-                  <a:srgbClr val="333333"/>
-                </a:solidFill>
-                <a:latin typeface="Calibri"/>
-              </a:rPr>
-              <a:t>–   Nadie sabe quien borro que (sin trazabilidad)</a:t>
-            </a:r>
-          </a:p>
-          <a:p>
-            <a:pPr>
-              <a:spcAft>
-                <a:spcPts val="800"/>
-              </a:spcAft>
-            </a:pPr>
-            <a:r>
-              <a:rPr sz="1500" b="0" i="0">
-                <a:solidFill>
-                  <a:srgbClr val="333333"/>
-                </a:solidFill>
-                <a:latin typeface="Calibri"/>
-              </a:rPr>
-              <a:t>–   Se van del cargo y la cuenta sigue viva</a:t>
-            </a:r>
-          </a:p>
-        </p:txBody>
-      </p:sp>
-      <p:sp>
-        <p:nvSpPr>
-          <p:cNvPr id="9" name="Rounded Rectangle 8"/>
-          <p:cNvSpPr/>
-          <p:nvPr/>
-        </p:nvSpPr>
-        <p:spPr>
-          <a:xfrm>
-            <a:off x="6255867" y="1261872"/>
-            <a:ext cx="5478627" cy="5093208"/>
-          </a:xfrm>
-          <a:prstGeom prst="roundRect">
-            <a:avLst>
-              <a:gd name="adj" fmla="val 12000"/>
-            </a:avLst>
-          </a:prstGeom>
-          <a:solidFill>
-            <a:srgbClr val="E8F4FA"/>
-          </a:solidFill>
-          <a:ln>
-            <a:noFill/>
-          </a:ln>
-        </p:spPr>
-        <p:style>
-          <a:lnRef idx="1">
-            <a:schemeClr val="accent1"/>
-          </a:lnRef>
-          <a:fillRef idx="3">
-            <a:schemeClr val="accent1"/>
-          </a:fillRef>
-          <a:effectRef idx="2">
-            <a:schemeClr val="accent1"/>
-          </a:effectRef>
-          <a:fontRef idx="minor">
-            <a:schemeClr val="lt1"/>
-          </a:fontRef>
-        </p:style>
-        <p:txBody>
-          <a:bodyPr rtlCol="0" anchor="ctr"/>
-          <a:lstStyle/>
-          <a:p>
-            <a:pPr algn="ctr"/>
-          </a:p>
-        </p:txBody>
-      </p:sp>
-      <p:sp>
-        <p:nvSpPr>
-          <p:cNvPr id="10" name="Rectangle 9"/>
-          <p:cNvSpPr/>
-          <p:nvPr/>
-        </p:nvSpPr>
-        <p:spPr>
-          <a:xfrm>
-            <a:off x="6255867" y="1261872"/>
-            <a:ext cx="5478627" cy="502920"/>
+            <a:ext cx="11277295" cy="320040"/>
           </a:xfrm>
           <a:prstGeom prst="rect">
             <a:avLst/>
@@ -12652,14 +12448,14 @@
       </p:sp>
       <p:sp>
         <p:nvSpPr>
-          <p:cNvPr id="11" name="TextBox 10"/>
+          <p:cNvPr id="7" name="TextBox 6"/>
           <p:cNvSpPr txBox="1"/>
           <p:nvPr/>
         </p:nvSpPr>
         <p:spPr>
           <a:xfrm>
-            <a:off x="6393027" y="1353312"/>
-            <a:ext cx="5204307" cy="365760"/>
+            <a:off x="685800" y="1307592"/>
+            <a:ext cx="10820095" cy="256032"/>
           </a:xfrm>
           <a:prstGeom prst="rect">
             <a:avLst/>
@@ -12670,29 +12466,28 @@
           <a:bodyPr wrap="square" anchor="ctr"/>
           <a:lstStyle/>
           <a:p>
-            <a:pPr algn="ctr"/>
-            <a:r>
-              <a:rPr sz="1600" b="1" i="0">
-                <a:solidFill>
-                  <a:srgbClr val="FFFFFF"/>
-                </a:solidFill>
-                <a:latin typeface="Calibri"/>
-              </a:rPr>
-              <a:t>Lo que pide el taller</a:t>
-            </a:r>
-          </a:p>
-        </p:txBody>
-      </p:sp>
-      <p:sp>
-        <p:nvSpPr>
-          <p:cNvPr id="12" name="TextBox 11"/>
+            <a:r>
+              <a:rPr sz="1000" b="1" i="0">
+                <a:solidFill>
+                  <a:srgbClr val="269CCB"/>
+                </a:solidFill>
+                <a:latin typeface="Calibri"/>
+              </a:rPr>
+              <a:t>● ● ●</a:t>
+            </a:r>
+          </a:p>
+        </p:txBody>
+      </p:sp>
+      <p:sp>
+        <p:nvSpPr>
+          <p:cNvPr id="8" name="TextBox 7"/>
           <p:cNvSpPr txBox="1"/>
           <p:nvPr/>
         </p:nvSpPr>
         <p:spPr>
           <a:xfrm>
-            <a:off x="6420459" y="1901952"/>
-            <a:ext cx="5158587" cy="4498848"/>
+            <a:off x="777240" y="1719072"/>
+            <a:ext cx="10637215" cy="4453128"/>
           </a:xfrm>
           <a:prstGeom prst="rect">
             <a:avLst/>
@@ -12707,72 +12502,168 @@
           <a:p>
             <a:pPr>
               <a:spcAft>
-                <a:spcPts val="800"/>
+                <a:spcPts val="400"/>
               </a:spcAft>
             </a:pPr>
             <a:r>
-              <a:rPr sz="1500" b="0" i="0">
-                <a:solidFill>
-                  <a:srgbClr val="333333"/>
-                </a:solidFill>
-                <a:latin typeface="Calibri"/>
-              </a:rPr>
-              <a:t>–   4 roles: admin_bd · recepcion · veterinario_rol · auditor</a:t>
+              <a:rPr sz="1400" b="0" i="0">
+                <a:solidFill>
+                  <a:srgbClr val="FFFFFF"/>
+                </a:solidFill>
+                <a:latin typeface="Calibri"/>
+              </a:rPr>
+              <a:t>-- En PostgreSQL usuario y rol son lo mismo: LOGIN es lo que los distingue.</a:t>
             </a:r>
           </a:p>
           <a:p>
             <a:pPr>
               <a:spcAft>
-                <a:spcPts val="800"/>
+                <a:spcPts val="400"/>
               </a:spcAft>
             </a:pPr>
             <a:r>
-              <a:rPr sz="1500" b="0" i="0">
-                <a:solidFill>
-                  <a:srgbClr val="333333"/>
-                </a:solidFill>
-                <a:latin typeface="Calibri"/>
-              </a:rPr>
-              <a:t>–   Privilegio por objeto y operacion (matriz)</a:t>
+              <a:rPr sz="1400" b="0" i="0">
+                <a:solidFill>
+                  <a:srgbClr val="FFFFFF"/>
+                </a:solidFill>
+                <a:latin typeface="Calibri"/>
+              </a:rPr>
+              <a:t>CREATE ROLE recepcion LOGIN PASSWORD 'cambiar_en_produccion';</a:t>
             </a:r>
           </a:p>
           <a:p>
             <a:pPr>
               <a:spcAft>
-                <a:spcPts val="800"/>
+                <a:spcPts val="400"/>
               </a:spcAft>
             </a:pPr>
             <a:r>
-              <a:rPr sz="1500" b="0" i="0">
-                <a:solidFill>
-                  <a:srgbClr val="333333"/>
-                </a:solidFill>
-                <a:latin typeface="Calibri"/>
-              </a:rPr>
-              <a:t>–   recepcion nunca hace DELETE: cancelar es UPDATE</a:t>
+              <a:rPr sz="1400" b="0" i="0">
+                <a:solidFill>
+                  <a:srgbClr val="FFFFFF"/>
+                </a:solidFill>
+                <a:latin typeface="Calibri"/>
+              </a:rPr>
+              <a:t>CREATE ROLE veterinario_rol NOLOGIN;   -- rol de permisos, no de acceso</a:t>
             </a:r>
           </a:p>
           <a:p>
             <a:pPr>
               <a:spcAft>
-                <a:spcPts val="800"/>
+                <a:spcPts val="400"/>
               </a:spcAft>
             </a:pPr>
             <a:r>
-              <a:rPr sz="1500" b="0" i="0">
-                <a:solidFill>
-                  <a:srgbClr val="333333"/>
-                </a:solidFill>
-                <a:latin typeface="Calibri"/>
-              </a:rPr>
-              <a:t>–   Politica de baja: revocacion el mismo dia</a:t>
-            </a:r>
-          </a:p>
-        </p:txBody>
-      </p:sp>
-      <p:sp>
-        <p:nvSpPr>
-          <p:cNvPr id="13" name="TextBox 12"/>
+              <a:rPr sz="1400" b="0" i="0">
+                <a:solidFill>
+                  <a:srgbClr val="FFFFFF"/>
+                </a:solidFill>
+                <a:latin typeface="Calibri"/>
+              </a:rPr>
+              <a:t/>
+            </a:r>
+          </a:p>
+          <a:p>
+            <a:pPr>
+              <a:spcAft>
+                <a:spcPts val="400"/>
+              </a:spcAft>
+            </a:pPr>
+            <a:r>
+              <a:rPr sz="1400" b="0" i="0">
+                <a:solidFill>
+                  <a:srgbClr val="FFFFFF"/>
+                </a:solidFill>
+                <a:latin typeface="Calibri"/>
+              </a:rPr>
+              <a:t>-- La recepcionista agenda: no lee historias clinicas ni toca facturas.</a:t>
+            </a:r>
+          </a:p>
+          <a:p>
+            <a:pPr>
+              <a:spcAft>
+                <a:spcPts val="400"/>
+              </a:spcAft>
+            </a:pPr>
+            <a:r>
+              <a:rPr sz="1400" b="0" i="0">
+                <a:solidFill>
+                  <a:srgbClr val="FFFFFF"/>
+                </a:solidFill>
+                <a:latin typeface="Calibri"/>
+              </a:rPr>
+              <a:t>GRANT SELECT, INSERT, UPDATE ON cita    TO recepcion;</a:t>
+            </a:r>
+          </a:p>
+          <a:p>
+            <a:pPr>
+              <a:spcAft>
+                <a:spcPts val="400"/>
+              </a:spcAft>
+            </a:pPr>
+            <a:r>
+              <a:rPr sz="1400" b="0" i="0">
+                <a:solidFill>
+                  <a:srgbClr val="FFFFFF"/>
+                </a:solidFill>
+                <a:latin typeface="Calibri"/>
+              </a:rPr>
+              <a:t>GRANT SELECT                 ON mascota TO recepcion;</a:t>
+            </a:r>
+          </a:p>
+          <a:p>
+            <a:pPr>
+              <a:spcAft>
+                <a:spcPts val="400"/>
+              </a:spcAft>
+            </a:pPr>
+            <a:r>
+              <a:rPr sz="1400" b="0" i="0">
+                <a:solidFill>
+                  <a:srgbClr val="FFFFFF"/>
+                </a:solidFill>
+                <a:latin typeface="Calibri"/>
+              </a:rPr>
+              <a:t>GRANT SELECT                 ON dueno   TO recepcion;</a:t>
+            </a:r>
+          </a:p>
+          <a:p>
+            <a:pPr>
+              <a:spcAft>
+                <a:spcPts val="400"/>
+              </a:spcAft>
+            </a:pPr>
+            <a:r>
+              <a:rPr sz="1400" b="0" i="0">
+                <a:solidFill>
+                  <a:srgbClr val="FFFFFF"/>
+                </a:solidFill>
+                <a:latin typeface="Calibri"/>
+              </a:rPr>
+              <a:t>GRANT USAGE, SELECT ON SEQUENCE cita_id_cita_seq TO recepcion;</a:t>
+            </a:r>
+          </a:p>
+          <a:p>
+            <a:pPr>
+              <a:spcAft>
+                <a:spcPts val="400"/>
+              </a:spcAft>
+            </a:pPr>
+            <a:r>
+              <a:rPr sz="1400" b="0" i="0">
+                <a:solidFill>
+                  <a:srgbClr val="FFFFFF"/>
+                </a:solidFill>
+                <a:latin typeface="Calibri"/>
+              </a:rPr>
+              <a:t>-- Sin USAGE en la secuencia, el INSERT falla: el SERIAL la necesita.</a:t>
+            </a:r>
+          </a:p>
+        </p:txBody>
+      </p:sp>
+      <p:sp>
+        <p:nvSpPr>
+          <p:cNvPr id="9" name="TextBox 8"/>
           <p:cNvSpPr txBox="1"/>
           <p:nvPr/>
         </p:nvSpPr>
@@ -12946,7 +12837,7 @@
                 </a:solidFill>
                 <a:latin typeface="Calibri"/>
               </a:rPr>
-              <a:t>Reducir la superficie: vista y privilegio por columna</a:t>
+              <a:t>REVOKE, y los dos que hacen dano en silencio</a:t>
             </a:r>
           </a:p>
         </p:txBody>
@@ -12960,7 +12851,7 @@
         <p:spPr>
           <a:xfrm>
             <a:off x="457200" y="1261872"/>
-            <a:ext cx="11277295" cy="4773168"/>
+            <a:ext cx="11277295" cy="5093208"/>
           </a:xfrm>
           <a:prstGeom prst="roundRect">
             <a:avLst>
@@ -13080,7 +12971,7 @@
         <p:spPr>
           <a:xfrm>
             <a:off x="777240" y="1719072"/>
-            <a:ext cx="10637215" cy="4133087"/>
+            <a:ext cx="10637215" cy="4453128"/>
           </a:xfrm>
           <a:prstGeom prst="rect">
             <a:avLst/>
@@ -13105,7 +12996,7 @@
                 </a:solidFill>
                 <a:latin typeface="Calibri"/>
               </a:rPr>
-              <a:t>-- 1) La vista deja fuera el email y las citas canceladas</a:t>
+              <a:t>REVOKE UPDATE ON cita FROM recepcion;   -- quitar es tan explicito como dar</a:t>
             </a:r>
           </a:p>
           <a:p>
@@ -13121,7 +13012,7 @@
                 </a:solidFill>
                 <a:latin typeface="Calibri"/>
               </a:rPr>
-              <a:t>CREATE VIEW v_agenda_recepcion AS</a:t>
+              <a:t/>
             </a:r>
           </a:p>
           <a:p>
@@ -13137,7 +13028,7 @@
                 </a:solidFill>
                 <a:latin typeface="Calibri"/>
               </a:rPr>
-              <a:t>SELECT c.id_cita, c.fecha_hora, d.nombre AS dueno, d.telefono</a:t>
+              <a:t>-- PUBLIC es todo el mundo, presente y futuro. Casi nunca es lo que se quiere.</a:t>
             </a:r>
           </a:p>
           <a:p>
@@ -13153,7 +13044,7 @@
                 </a:solidFill>
                 <a:latin typeface="Calibri"/>
               </a:rPr>
-              <a:t>  FROM cita c JOIN mascota m ON m.id_mascota = c.id_mascota</a:t>
+              <a:t>REVOKE ALL ON consulta FROM PUBLIC;</a:t>
             </a:r>
           </a:p>
           <a:p>
@@ -13169,7 +13060,7 @@
                 </a:solidFill>
                 <a:latin typeface="Calibri"/>
               </a:rPr>
-              <a:t>  JOIN dueno d ON d.id_dueno = m.id_dueno</a:t>
+              <a:t/>
             </a:r>
           </a:p>
           <a:p>
@@ -13185,7 +13076,7 @@
                 </a:solidFill>
                 <a:latin typeface="Calibri"/>
               </a:rPr>
-              <a:t> WHERE c.estado &lt;&gt; 'CANCELADA';</a:t>
+              <a:t>-- WITH GRANT OPTION deja que el que recibe vuelva a otorgar.</a:t>
             </a:r>
           </a:p>
           <a:p>
@@ -13201,7 +13092,7 @@
                 </a:solidFill>
                 <a:latin typeface="Calibri"/>
               </a:rPr>
-              <a:t>GRANT SELECT ON v_agenda_recepcion TO recepcion;</a:t>
+              <a:t>GRANT SELECT ON cita TO auditor WITH GRANT OPTION;</a:t>
             </a:r>
           </a:p>
           <a:p>
@@ -13217,7 +13108,7 @@
                 </a:solidFill>
                 <a:latin typeface="Calibri"/>
               </a:rPr>
-              <a:t>REVOKE SELECT ON dueno FROM recepcion;   -- solo llega por la vista</a:t>
+              <a:t>-- auditor puede ahora hacer: GRANT SELECT ON cita TO cualquiera;</a:t>
             </a:r>
           </a:p>
           <a:p>
@@ -13233,7 +13124,7 @@
                 </a:solidFill>
                 <a:latin typeface="Calibri"/>
               </a:rPr>
-              <a:t/>
+              <a:t>-- Para deshacerlo hay que arrastrar lo que el concedio:</a:t>
             </a:r>
           </a:p>
           <a:p>
@@ -13249,23 +13140,7 @@
                 </a:solidFill>
                 <a:latin typeface="Calibri"/>
               </a:rPr>
-              <a:t>-- 2) O se recorta la tabla columna por columna</a:t>
-            </a:r>
-          </a:p>
-          <a:p>
-            <a:pPr>
-              <a:spcAft>
-                <a:spcPts val="400"/>
-              </a:spcAft>
-            </a:pPr>
-            <a:r>
-              <a:rPr sz="1400" b="0" i="0">
-                <a:solidFill>
-                  <a:srgbClr val="FFFFFF"/>
-                </a:solidFill>
-                <a:latin typeface="Calibri"/>
-              </a:rPr>
-              <a:t>GRANT SELECT (id_dueno, nombre) ON dueno TO veterinario_rol;</a:t>
+              <a:t>REVOKE SELECT ON cita FROM auditor CASCADE;</a:t>
             </a:r>
           </a:p>
         </p:txBody>
@@ -13273,41 +13148,6 @@
       <p:sp>
         <p:nvSpPr>
           <p:cNvPr id="9" name="TextBox 8"/>
-          <p:cNvSpPr txBox="1"/>
-          <p:nvPr/>
-        </p:nvSpPr>
-        <p:spPr>
-          <a:xfrm>
-            <a:off x="457200" y="6080760"/>
-            <a:ext cx="11277295" cy="320040"/>
-          </a:xfrm>
-          <a:prstGeom prst="rect">
-            <a:avLst/>
-          </a:prstGeom>
-          <a:noFill/>
-        </p:spPr>
-        <p:txBody>
-          <a:bodyPr wrap="square">
-            <a:spAutoFit/>
-          </a:bodyPr>
-          <a:lstStyle/>
-          <a:p>
-            <a:pPr algn="ctr"/>
-            <a:r>
-              <a:rPr sz="1200" b="0" i="1">
-                <a:solidFill>
-                  <a:srgbClr val="666666"/>
-                </a:solidFill>
-                <a:latin typeface="Calibri"/>
-              </a:rPr>
-              <a:t>Un GRANT no es todo-o-nada: la vista recorta filas y columnas, y el privilegio por columna recorta columnas sin crear objeto nuevo.</a:t>
-            </a:r>
-          </a:p>
-        </p:txBody>
-      </p:sp>
-      <p:sp>
-        <p:nvSpPr>
-          <p:cNvPr id="10" name="TextBox 9"/>
           <p:cNvSpPr txBox="1"/>
           <p:nvPr/>
         </p:nvSpPr>
@@ -13375,7 +13215,7 @@
         <p:spPr>
           <a:xfrm>
             <a:off x="0" y="0"/>
-            <a:ext cx="12191695" cy="1170432"/>
+            <a:ext cx="12191695" cy="960120"/>
           </a:xfrm>
           <a:prstGeom prst="rect">
             <a:avLst/>
@@ -13417,7 +13257,7 @@
         </p:nvSpPr>
         <p:spPr>
           <a:xfrm>
-            <a:off x="0" y="1170432"/>
+            <a:off x="0" y="960120"/>
             <a:ext cx="12191695" cy="41148"/>
           </a:xfrm>
           <a:prstGeom prst="rect">
@@ -13461,7 +13301,7 @@
         <p:spPr>
           <a:xfrm>
             <a:off x="457200" y="164592"/>
-            <a:ext cx="11277295" cy="384048"/>
+            <a:ext cx="11277295" cy="502920"/>
           </a:xfrm>
           <a:prstGeom prst="rect">
             <a:avLst/>
@@ -13481,21 +13321,141 @@
                 </a:solidFill>
                 <a:latin typeface="Calibri"/>
               </a:rPr>
-              <a:t>Ciclo de vida de una cuenta: alta, cambio, baja, revision</a:t>
-            </a:r>
-          </a:p>
-        </p:txBody>
-      </p:sp>
-      <p:sp>
-        <p:nvSpPr>
-          <p:cNvPr id="5" name="TextBox 4"/>
+              <a:t>Cuando el GRANT sobra: vista y privilegio por columna</a:t>
+            </a:r>
+          </a:p>
+        </p:txBody>
+      </p:sp>
+      <p:sp>
+        <p:nvSpPr>
+          <p:cNvPr id="5" name="Rounded Rectangle 4"/>
+          <p:cNvSpPr/>
+          <p:nvPr/>
+        </p:nvSpPr>
+        <p:spPr>
+          <a:xfrm>
+            <a:off x="457200" y="1261872"/>
+            <a:ext cx="11277295" cy="5093208"/>
+          </a:xfrm>
+          <a:prstGeom prst="roundRect">
+            <a:avLst>
+              <a:gd name="adj" fmla="val 12000"/>
+            </a:avLst>
+          </a:prstGeom>
+          <a:solidFill>
+            <a:srgbClr val="1E2A38"/>
+          </a:solidFill>
+          <a:ln>
+            <a:noFill/>
+          </a:ln>
+        </p:spPr>
+        <p:style>
+          <a:lnRef idx="1">
+            <a:schemeClr val="accent1"/>
+          </a:lnRef>
+          <a:fillRef idx="3">
+            <a:schemeClr val="accent1"/>
+          </a:fillRef>
+          <a:effectRef idx="2">
+            <a:schemeClr val="accent1"/>
+          </a:effectRef>
+          <a:fontRef idx="minor">
+            <a:schemeClr val="lt1"/>
+          </a:fontRef>
+        </p:style>
+        <p:txBody>
+          <a:bodyPr rtlCol="0" anchor="ctr"/>
+          <a:lstStyle/>
+          <a:p>
+            <a:pPr algn="ctr"/>
+          </a:p>
+        </p:txBody>
+      </p:sp>
+      <p:sp>
+        <p:nvSpPr>
+          <p:cNvPr id="6" name="Rectangle 5"/>
+          <p:cNvSpPr/>
+          <p:nvPr/>
+        </p:nvSpPr>
+        <p:spPr>
+          <a:xfrm>
+            <a:off x="457200" y="1261872"/>
+            <a:ext cx="11277295" cy="320040"/>
+          </a:xfrm>
+          <a:prstGeom prst="rect">
+            <a:avLst/>
+          </a:prstGeom>
+          <a:solidFill>
+            <a:srgbClr val="095292"/>
+          </a:solidFill>
+          <a:ln>
+            <a:noFill/>
+          </a:ln>
+        </p:spPr>
+        <p:style>
+          <a:lnRef idx="1">
+            <a:schemeClr val="accent1"/>
+          </a:lnRef>
+          <a:fillRef idx="3">
+            <a:schemeClr val="accent1"/>
+          </a:fillRef>
+          <a:effectRef idx="2">
+            <a:schemeClr val="accent1"/>
+          </a:effectRef>
+          <a:fontRef idx="minor">
+            <a:schemeClr val="lt1"/>
+          </a:fontRef>
+        </p:style>
+        <p:txBody>
+          <a:bodyPr rtlCol="0" anchor="ctr"/>
+          <a:lstStyle/>
+          <a:p>
+            <a:pPr algn="ctr"/>
+          </a:p>
+        </p:txBody>
+      </p:sp>
+      <p:sp>
+        <p:nvSpPr>
+          <p:cNvPr id="7" name="TextBox 6"/>
           <p:cNvSpPr txBox="1"/>
           <p:nvPr/>
         </p:nvSpPr>
         <p:spPr>
           <a:xfrm>
-            <a:off x="457200" y="566928"/>
-            <a:ext cx="11277295" cy="411480"/>
+            <a:off x="685800" y="1307592"/>
+            <a:ext cx="10820095" cy="256032"/>
+          </a:xfrm>
+          <a:prstGeom prst="rect">
+            <a:avLst/>
+          </a:prstGeom>
+          <a:noFill/>
+        </p:spPr>
+        <p:txBody>
+          <a:bodyPr wrap="square" anchor="ctr"/>
+          <a:lstStyle/>
+          <a:p>
+            <a:r>
+              <a:rPr sz="1000" b="1" i="0">
+                <a:solidFill>
+                  <a:srgbClr val="269CCB"/>
+                </a:solidFill>
+                <a:latin typeface="Calibri"/>
+              </a:rPr>
+              <a:t>● ● ●</a:t>
+            </a:r>
+          </a:p>
+        </p:txBody>
+      </p:sp>
+      <p:sp>
+        <p:nvSpPr>
+          <p:cNvPr id="8" name="TextBox 7"/>
+          <p:cNvSpPr txBox="1"/>
+          <p:nvPr/>
+        </p:nvSpPr>
+        <p:spPr>
+          <a:xfrm>
+            <a:off x="777240" y="1719072"/>
+            <a:ext cx="10637215" cy="4453128"/>
           </a:xfrm>
           <a:prstGeom prst="rect">
             <a:avLst/>
@@ -13508,358 +13468,218 @@
           </a:bodyPr>
           <a:lstStyle/>
           <a:p>
-            <a:r>
-              <a:rPr sz="1400" b="0" i="0">
-                <a:solidFill>
-                  <a:srgbClr val="B8D8EE"/>
-                </a:solidFill>
-                <a:latin typeface="Calibri"/>
-              </a:rPr>
-              <a:t>Cada flecha del ciclo es un GRANT o un REVOKE. La politica es lo que le pone responsable y plazo a cada uno: son las 5 secciones del entregable</a:t>
-            </a:r>
-          </a:p>
-        </p:txBody>
-      </p:sp>
-      <p:sp>
-        <p:nvSpPr>
-          <p:cNvPr id="6" name="TextBox 5"/>
-          <p:cNvSpPr txBox="1"/>
-          <p:nvPr/>
-        </p:nvSpPr>
-        <p:spPr>
-          <a:xfrm>
-            <a:off x="457200" y="1380744"/>
-            <a:ext cx="11277295" cy="5020056"/>
-          </a:xfrm>
-          <a:prstGeom prst="rect">
-            <a:avLst/>
-          </a:prstGeom>
-          <a:noFill/>
-        </p:spPr>
-        <p:txBody>
-          <a:bodyPr wrap="square">
-            <a:spAutoFit/>
-          </a:bodyPr>
-          <a:lstStyle/>
-          <a:p>
             <a:pPr>
               <a:spcAft>
-                <a:spcPts val="800"/>
+                <a:spcPts val="400"/>
               </a:spcAft>
             </a:pPr>
             <a:r>
-              <a:rPr sz="2000" b="0" i="0">
-                <a:solidFill>
-                  <a:srgbClr val="333333"/>
-                </a:solidFill>
-                <a:latin typeface="Calibri"/>
-              </a:rPr>
-              <a:t>–   </a:t>
-            </a:r>
-            <a:r>
-              <a:rPr sz="2000" b="1" i="0">
-                <a:solidFill>
-                  <a:srgbClr val="333333"/>
-                </a:solidFill>
-                <a:latin typeface="Calibri"/>
-              </a:rPr>
-              <a:t>1. Alta.</a:t>
-            </a:r>
-            <a:r>
-              <a:rPr sz="2000" b="0" i="0">
-                <a:solidFill>
-                  <a:srgbClr val="333333"/>
-                </a:solidFill>
-                <a:latin typeface="Calibri"/>
-              </a:rPr>
-              <a:t> Quien solicita y quien aprueba; la cuenta nace con </a:t>
-            </a:r>
-            <a:r>
-              <a:rPr sz="2000" b="1" i="0">
-                <a:solidFill>
-                  <a:srgbClr val="333333"/>
-                </a:solidFill>
-                <a:latin typeface="Calibri"/>
-              </a:rPr>
-              <a:t>un solo rol</a:t>
-            </a:r>
-            <a:r>
-              <a:rPr sz="2000" b="0" i="0">
-                <a:solidFill>
-                  <a:srgbClr val="333333"/>
-                </a:solidFill>
-                <a:latin typeface="Calibri"/>
-              </a:rPr>
-              <a:t> y con credencial temporal que caduca en el primer ingreso.</a:t>
+              <a:rPr sz="1400" b="0" i="0">
+                <a:solidFill>
+                  <a:srgbClr val="FFFFFF"/>
+                </a:solidFill>
+                <a:latin typeface="Calibri"/>
+              </a:rPr>
+              <a:t>-- La recepcion necesita la agenda, no el motivo clinico de la consulta.</a:t>
             </a:r>
           </a:p>
           <a:p>
             <a:pPr>
               <a:spcAft>
-                <a:spcPts val="800"/>
+                <a:spcPts val="400"/>
               </a:spcAft>
             </a:pPr>
             <a:r>
-              <a:rPr sz="2000" b="0" i="0">
-                <a:solidFill>
-                  <a:srgbClr val="333333"/>
-                </a:solidFill>
-                <a:latin typeface="Calibri"/>
-              </a:rPr>
-              <a:t>–   </a:t>
-            </a:r>
-            <a:r>
-              <a:rPr sz="2000" b="1" i="0">
-                <a:solidFill>
-                  <a:srgbClr val="333333"/>
-                </a:solidFill>
-                <a:latin typeface="Calibri"/>
-              </a:rPr>
-              <a:t>2. Cambio de rol.</a:t>
-            </a:r>
-            <a:r>
-              <a:rPr sz="2000" b="0" i="0">
-                <a:solidFill>
-                  <a:srgbClr val="333333"/>
-                </a:solidFill>
-                <a:latin typeface="Calibri"/>
-              </a:rPr>
-              <a:t> «GRANT» del nuevo y </a:t>
-            </a:r>
-            <a:r>
-              <a:rPr sz="2000" b="1" i="0">
-                <a:solidFill>
-                  <a:srgbClr val="333333"/>
-                </a:solidFill>
-                <a:latin typeface="Calibri"/>
-              </a:rPr>
-              <a:t>«REVOKE» del anterior</a:t>
-            </a:r>
-            <a:r>
-              <a:rPr sz="2000" b="0" i="0">
-                <a:solidFill>
-                  <a:srgbClr val="333333"/>
-                </a:solidFill>
-                <a:latin typeface="Calibri"/>
-              </a:rPr>
-              <a:t>: los permisos </a:t>
-            </a:r>
-            <a:r>
-              <a:rPr sz="2000" b="1" i="0">
-                <a:solidFill>
-                  <a:srgbClr val="333333"/>
-                </a:solidFill>
-                <a:latin typeface="Calibri"/>
-              </a:rPr>
-              <a:t>no se acumulan</a:t>
-            </a:r>
-            <a:r>
-              <a:rPr sz="2000" b="0" i="0">
-                <a:solidFill>
-                  <a:srgbClr val="333333"/>
-                </a:solidFill>
-                <a:latin typeface="Calibri"/>
-              </a:rPr>
-              <a:t>. Quien pasa de recepcion a auditoria y conserva los dos termina auditando lo que el mismo modifica.</a:t>
+              <a:rPr sz="1400" b="0" i="0">
+                <a:solidFill>
+                  <a:srgbClr val="FFFFFF"/>
+                </a:solidFill>
+                <a:latin typeface="Calibri"/>
+              </a:rPr>
+              <a:t>CREATE VIEW v_agenda_dia AS</a:t>
             </a:r>
           </a:p>
           <a:p>
             <a:pPr>
               <a:spcAft>
-                <a:spcPts val="800"/>
+                <a:spcPts val="400"/>
               </a:spcAft>
             </a:pPr>
             <a:r>
-              <a:rPr sz="2000" b="0" i="0">
-                <a:solidFill>
-                  <a:srgbClr val="333333"/>
-                </a:solidFill>
-                <a:latin typeface="Calibri"/>
-              </a:rPr>
-              <a:t>–   </a:t>
-            </a:r>
-            <a:r>
-              <a:rPr sz="2000" b="1" i="0">
-                <a:solidFill>
-                  <a:srgbClr val="333333"/>
-                </a:solidFill>
-                <a:latin typeface="Calibri"/>
-              </a:rPr>
-              <a:t>3. Baja: el mismo dia.</a:t>
-            </a:r>
-            <a:r>
-              <a:rPr sz="2000" b="0" i="0">
-                <a:solidFill>
-                  <a:srgbClr val="333333"/>
-                </a:solidFill>
-                <a:latin typeface="Calibri"/>
-              </a:rPr>
-              <a:t> Revocar los roles, dejar la cuenta sin login y </a:t>
-            </a:r>
-            <a:r>
-              <a:rPr sz="2000" b="1" i="0">
-                <a:solidFill>
-                  <a:srgbClr val="333333"/>
-                </a:solidFill>
-                <a:latin typeface="Calibri"/>
-              </a:rPr>
-              <a:t>reasignar los objetos antes de borrar el rol</a:t>
-            </a:r>
-            <a:r>
-              <a:rPr sz="2000" b="0" i="0">
-                <a:solidFill>
-                  <a:srgbClr val="333333"/>
-                </a:solidFill>
-                <a:latin typeface="Calibri"/>
-              </a:rPr>
-              <a:t> («REASSIGN OWNED BY ... TO admin_bd»): PostgreSQL no deja hacer «DROP ROLE» de un rol que todavia posee objetos. Lo que esto evita es la </a:t>
-            </a:r>
-            <a:r>
-              <a:rPr sz="2000" b="1" i="0">
-                <a:solidFill>
-                  <a:srgbClr val="333333"/>
-                </a:solidFill>
-                <a:latin typeface="Calibri"/>
-              </a:rPr>
-              <a:t>cuenta huerfana</a:t>
-            </a:r>
-            <a:r>
-              <a:rPr sz="2000" b="0" i="0">
-                <a:solidFill>
-                  <a:srgbClr val="333333"/>
-                </a:solidFill>
-                <a:latin typeface="Calibri"/>
-              </a:rPr>
-              <a:t>.</a:t>
+              <a:rPr sz="1400" b="0" i="0">
+                <a:solidFill>
+                  <a:srgbClr val="FFFFFF"/>
+                </a:solidFill>
+                <a:latin typeface="Calibri"/>
+              </a:rPr>
+              <a:t>SELECT c.id_cita, c.fecha_hora, c.estado,</a:t>
             </a:r>
           </a:p>
           <a:p>
             <a:pPr>
               <a:spcAft>
-                <a:spcPts val="800"/>
+                <a:spcPts val="400"/>
               </a:spcAft>
             </a:pPr>
             <a:r>
-              <a:rPr sz="2000" b="0" i="0">
-                <a:solidFill>
-                  <a:srgbClr val="333333"/>
-                </a:solidFill>
-                <a:latin typeface="Calibri"/>
-              </a:rPr>
-              <a:t>–   </a:t>
-            </a:r>
-            <a:r>
-              <a:rPr sz="2000" b="1" i="0">
-                <a:solidFill>
-                  <a:srgbClr val="333333"/>
-                </a:solidFill>
-                <a:latin typeface="Calibri"/>
-              </a:rPr>
-              <a:t>4. Revision periodica.</a:t>
-            </a:r>
-            <a:r>
-              <a:rPr sz="2000" b="0" i="0">
-                <a:solidFill>
-                  <a:srgbClr val="333333"/>
-                </a:solidFill>
-                <a:latin typeface="Calibri"/>
-              </a:rPr>
-              <a:t> Cada 3 a 6 meses se audita la matriz con «information_schema.role_table_grants», y </a:t>
-            </a:r>
-            <a:r>
-              <a:rPr sz="2000" b="1" i="0">
-                <a:solidFill>
-                  <a:srgbClr val="333333"/>
-                </a:solidFill>
-                <a:latin typeface="Calibri"/>
-              </a:rPr>
-              <a:t>alguien firma</a:t>
-            </a:r>
-            <a:r>
-              <a:rPr sz="2000" b="0" i="0">
-                <a:solidFill>
-                  <a:srgbClr val="333333"/>
-                </a:solidFill>
-                <a:latin typeface="Calibri"/>
-              </a:rPr>
-              <a:t> la evidencia. Sin cuentas compartidas: si tres personas entran como «recepcion1», la auditoria no puede decir quien cancelo la cita.</a:t>
+              <a:rPr sz="1400" b="0" i="0">
+                <a:solidFill>
+                  <a:srgbClr val="FFFFFF"/>
+                </a:solidFill>
+                <a:latin typeface="Calibri"/>
+              </a:rPr>
+              <a:t>       m.nombre AS mascota, d.telefono</a:t>
             </a:r>
           </a:p>
           <a:p>
             <a:pPr>
               <a:spcAft>
-                <a:spcPts val="800"/>
+                <a:spcPts val="400"/>
               </a:spcAft>
             </a:pPr>
             <a:r>
-              <a:rPr sz="2000" b="0" i="0">
-                <a:solidFill>
-                  <a:srgbClr val="333333"/>
-                </a:solidFill>
-                <a:latin typeface="Calibri"/>
-              </a:rPr>
-              <a:t>–   </a:t>
-            </a:r>
-            <a:r>
-              <a:rPr sz="2000" b="1" i="0">
-                <a:solidFill>
-                  <a:srgbClr val="333333"/>
-                </a:solidFill>
-                <a:latin typeface="Calibri"/>
-              </a:rPr>
-              <a:t>5. Probar que el permiso NO esta.</a:t>
-            </a:r>
-            <a:r>
-              <a:rPr sz="2000" b="0" i="0">
-                <a:solidFill>
-                  <a:srgbClr val="333333"/>
-                </a:solidFill>
-                <a:latin typeface="Calibri"/>
-              </a:rPr>
-              <a:t> No hace falta otra conexion (aqui hay un solo usuario con login): «SET ROLE recepcion;» cambia el rol efectivo, y ahi «DELETE FROM cita ...» debe responder </a:t>
-            </a:r>
-            <a:r>
-              <a:rPr sz="2000" b="1" i="0">
-                <a:solidFill>
-                  <a:srgbClr val="333333"/>
-                </a:solidFill>
-                <a:latin typeface="Calibri"/>
-              </a:rPr>
-              <a:t>permission denied</a:t>
-            </a:r>
-            <a:r>
-              <a:rPr sz="2000" b="0" i="0">
-                <a:solidFill>
-                  <a:srgbClr val="333333"/>
-                </a:solidFill>
-                <a:latin typeface="Calibri"/>
-              </a:rPr>
-              <a:t>. Se cierra con «RESET ROLE;». Si el entorno no deja cambiar de rol, se documenta el intento: eso es una </a:t>
-            </a:r>
-            <a:r>
-              <a:rPr sz="2000" b="1" i="0">
-                <a:solidFill>
-                  <a:srgbClr val="333333"/>
-                </a:solidFill>
-                <a:latin typeface="Calibri"/>
-              </a:rPr>
-              <a:t>brecha de verificacion</a:t>
-            </a:r>
-            <a:r>
-              <a:rPr sz="2000" b="0" i="0">
-                <a:solidFill>
-                  <a:srgbClr val="333333"/>
-                </a:solidFill>
-                <a:latin typeface="Calibri"/>
-              </a:rPr>
-              <a:t> del entregable.</a:t>
-            </a:r>
-          </a:p>
-        </p:txBody>
-      </p:sp>
-      <p:sp>
-        <p:nvSpPr>
-          <p:cNvPr id="7" name="TextBox 6"/>
+              <a:rPr sz="1400" b="0" i="0">
+                <a:solidFill>
+                  <a:srgbClr val="FFFFFF"/>
+                </a:solidFill>
+                <a:latin typeface="Calibri"/>
+              </a:rPr>
+              <a:t>FROM cita c</a:t>
+            </a:r>
+          </a:p>
+          <a:p>
+            <a:pPr>
+              <a:spcAft>
+                <a:spcPts val="400"/>
+              </a:spcAft>
+            </a:pPr>
+            <a:r>
+              <a:rPr sz="1400" b="0" i="0">
+                <a:solidFill>
+                  <a:srgbClr val="FFFFFF"/>
+                </a:solidFill>
+                <a:latin typeface="Calibri"/>
+              </a:rPr>
+              <a:t>JOIN mascota m ON m.id_mascota = c.id_mascota</a:t>
+            </a:r>
+          </a:p>
+          <a:p>
+            <a:pPr>
+              <a:spcAft>
+                <a:spcPts val="400"/>
+              </a:spcAft>
+            </a:pPr>
+            <a:r>
+              <a:rPr sz="1400" b="0" i="0">
+                <a:solidFill>
+                  <a:srgbClr val="FFFFFF"/>
+                </a:solidFill>
+                <a:latin typeface="Calibri"/>
+              </a:rPr>
+              <a:t>JOIN dueno   d ON d.id_dueno   = m.id_dueno;</a:t>
+            </a:r>
+          </a:p>
+          <a:p>
+            <a:pPr>
+              <a:spcAft>
+                <a:spcPts val="400"/>
+              </a:spcAft>
+            </a:pPr>
+            <a:r>
+              <a:rPr sz="1400" b="0" i="0">
+                <a:solidFill>
+                  <a:srgbClr val="FFFFFF"/>
+                </a:solidFill>
+                <a:latin typeface="Calibri"/>
+              </a:rPr>
+              <a:t/>
+            </a:r>
+          </a:p>
+          <a:p>
+            <a:pPr>
+              <a:spcAft>
+                <a:spcPts val="400"/>
+              </a:spcAft>
+            </a:pPr>
+            <a:r>
+              <a:rPr sz="1400" b="0" i="0">
+                <a:solidFill>
+                  <a:srgbClr val="FFFFFF"/>
+                </a:solidFill>
+                <a:latin typeface="Calibri"/>
+              </a:rPr>
+              <a:t>GRANT SELECT ON v_agenda_dia TO recepcion;</a:t>
+            </a:r>
+          </a:p>
+          <a:p>
+            <a:pPr>
+              <a:spcAft>
+                <a:spcPts val="400"/>
+              </a:spcAft>
+            </a:pPr>
+            <a:r>
+              <a:rPr sz="1400" b="0" i="0">
+                <a:solidFill>
+                  <a:srgbClr val="FFFFFF"/>
+                </a:solidFill>
+                <a:latin typeface="Calibri"/>
+              </a:rPr>
+              <a:t/>
+            </a:r>
+          </a:p>
+          <a:p>
+            <a:pPr>
+              <a:spcAft>
+                <a:spcPts val="400"/>
+              </a:spcAft>
+            </a:pPr>
+            <a:r>
+              <a:rPr sz="1400" b="0" i="0">
+                <a:solidFill>
+                  <a:srgbClr val="FFFFFF"/>
+                </a:solidFill>
+                <a:latin typeface="Calibri"/>
+              </a:rPr>
+              <a:t>-- O el privilegio acotado a columnas, sin crear objeto nuevo:</a:t>
+            </a:r>
+          </a:p>
+          <a:p>
+            <a:pPr>
+              <a:spcAft>
+                <a:spcPts val="400"/>
+              </a:spcAft>
+            </a:pPr>
+            <a:r>
+              <a:rPr sz="1400" b="0" i="0">
+                <a:solidFill>
+                  <a:srgbClr val="FFFFFF"/>
+                </a:solidFill>
+                <a:latin typeface="Calibri"/>
+              </a:rPr>
+              <a:t>GRANT SELECT (id_mascota, nombre, especie) ON mascota TO recepcion;</a:t>
+            </a:r>
+          </a:p>
+          <a:p>
+            <a:pPr>
+              <a:spcAft>
+                <a:spcPts val="400"/>
+              </a:spcAft>
+            </a:pPr>
+            <a:r>
+              <a:rPr sz="1400" b="0" i="0">
+                <a:solidFill>
+                  <a:srgbClr val="FFFFFF"/>
+                </a:solidFill>
+                <a:latin typeface="Calibri"/>
+              </a:rPr>
+              <a:t>GRANT UPDATE (telefono, email)             ON dueno   TO recepcion;</a:t>
+            </a:r>
+          </a:p>
+        </p:txBody>
+      </p:sp>
+      <p:sp>
+        <p:nvSpPr>
+          <p:cNvPr id="9" name="TextBox 8"/>
           <p:cNvSpPr txBox="1"/>
           <p:nvPr/>
         </p:nvSpPr>
@@ -14033,21 +13853,141 @@
                 </a:solidFill>
                 <a:latin typeface="Calibri"/>
               </a:rPr>
-              <a:t>Demo del dia</a:t>
-            </a:r>
-          </a:p>
-        </p:txBody>
-      </p:sp>
-      <p:sp>
-        <p:nvSpPr>
-          <p:cNvPr id="5" name="TextBox 4"/>
+              <a:t>La matriz como hecho verificable, no como documento</a:t>
+            </a:r>
+          </a:p>
+        </p:txBody>
+      </p:sp>
+      <p:sp>
+        <p:nvSpPr>
+          <p:cNvPr id="5" name="Rounded Rectangle 4"/>
+          <p:cNvSpPr/>
+          <p:nvPr/>
+        </p:nvSpPr>
+        <p:spPr>
+          <a:xfrm>
+            <a:off x="457200" y="1261872"/>
+            <a:ext cx="11277295" cy="5093208"/>
+          </a:xfrm>
+          <a:prstGeom prst="roundRect">
+            <a:avLst>
+              <a:gd name="adj" fmla="val 12000"/>
+            </a:avLst>
+          </a:prstGeom>
+          <a:solidFill>
+            <a:srgbClr val="1E2A38"/>
+          </a:solidFill>
+          <a:ln>
+            <a:noFill/>
+          </a:ln>
+        </p:spPr>
+        <p:style>
+          <a:lnRef idx="1">
+            <a:schemeClr val="accent1"/>
+          </a:lnRef>
+          <a:fillRef idx="3">
+            <a:schemeClr val="accent1"/>
+          </a:fillRef>
+          <a:effectRef idx="2">
+            <a:schemeClr val="accent1"/>
+          </a:effectRef>
+          <a:fontRef idx="minor">
+            <a:schemeClr val="lt1"/>
+          </a:fontRef>
+        </p:style>
+        <p:txBody>
+          <a:bodyPr rtlCol="0" anchor="ctr"/>
+          <a:lstStyle/>
+          <a:p>
+            <a:pPr algn="ctr"/>
+          </a:p>
+        </p:txBody>
+      </p:sp>
+      <p:sp>
+        <p:nvSpPr>
+          <p:cNvPr id="6" name="Rectangle 5"/>
+          <p:cNvSpPr/>
+          <p:nvPr/>
+        </p:nvSpPr>
+        <p:spPr>
+          <a:xfrm>
+            <a:off x="457200" y="1261872"/>
+            <a:ext cx="11277295" cy="320040"/>
+          </a:xfrm>
+          <a:prstGeom prst="rect">
+            <a:avLst/>
+          </a:prstGeom>
+          <a:solidFill>
+            <a:srgbClr val="095292"/>
+          </a:solidFill>
+          <a:ln>
+            <a:noFill/>
+          </a:ln>
+        </p:spPr>
+        <p:style>
+          <a:lnRef idx="1">
+            <a:schemeClr val="accent1"/>
+          </a:lnRef>
+          <a:fillRef idx="3">
+            <a:schemeClr val="accent1"/>
+          </a:fillRef>
+          <a:effectRef idx="2">
+            <a:schemeClr val="accent1"/>
+          </a:effectRef>
+          <a:fontRef idx="minor">
+            <a:schemeClr val="lt1"/>
+          </a:fontRef>
+        </p:style>
+        <p:txBody>
+          <a:bodyPr rtlCol="0" anchor="ctr"/>
+          <a:lstStyle/>
+          <a:p>
+            <a:pPr algn="ctr"/>
+          </a:p>
+        </p:txBody>
+      </p:sp>
+      <p:sp>
+        <p:nvSpPr>
+          <p:cNvPr id="7" name="TextBox 6"/>
           <p:cNvSpPr txBox="1"/>
           <p:nvPr/>
         </p:nvSpPr>
         <p:spPr>
           <a:xfrm>
-            <a:off x="457200" y="1170432"/>
-            <a:ext cx="11277295" cy="5230368"/>
+            <a:off x="685800" y="1307592"/>
+            <a:ext cx="10820095" cy="256032"/>
+          </a:xfrm>
+          <a:prstGeom prst="rect">
+            <a:avLst/>
+          </a:prstGeom>
+          <a:noFill/>
+        </p:spPr>
+        <p:txBody>
+          <a:bodyPr wrap="square" anchor="ctr"/>
+          <a:lstStyle/>
+          <a:p>
+            <a:r>
+              <a:rPr sz="1000" b="1" i="0">
+                <a:solidFill>
+                  <a:srgbClr val="269CCB"/>
+                </a:solidFill>
+                <a:latin typeface="Calibri"/>
+              </a:rPr>
+              <a:t>● ● ●</a:t>
+            </a:r>
+          </a:p>
+        </p:txBody>
+      </p:sp>
+      <p:sp>
+        <p:nvSpPr>
+          <p:cNvPr id="8" name="TextBox 7"/>
+          <p:cNvSpPr txBox="1"/>
+          <p:nvPr/>
+        </p:nvSpPr>
+        <p:spPr>
+          <a:xfrm>
+            <a:off x="777240" y="1719072"/>
+            <a:ext cx="10637215" cy="4453128"/>
           </a:xfrm>
           <a:prstGeom prst="rect">
             <a:avLst/>
@@ -14062,108 +14002,184 @@
           <a:p>
             <a:pPr>
               <a:spcAft>
-                <a:spcPts val="800"/>
+                <a:spcPts val="400"/>
               </a:spcAft>
             </a:pPr>
             <a:r>
-              <a:rPr sz="2000" b="0" i="0">
-                <a:solidFill>
-                  <a:srgbClr val="333333"/>
-                </a:solidFill>
-                <a:latin typeface="Calibri"/>
-              </a:rPr>
-              <a:t>–   </a:t>
-            </a:r>
-            <a:r>
-              <a:rPr sz="2000" b="1" i="0">
-                <a:solidFill>
-                  <a:srgbClr val="333333"/>
-                </a:solidFill>
-                <a:latin typeface="Calibri"/>
-              </a:rPr>
-              <a:t>Herramienta:</a:t>
-            </a:r>
-            <a:r>
-              <a:rPr sz="2000" b="0" i="0">
-                <a:solidFill>
-                  <a:srgbClr val="333333"/>
-                </a:solidFill>
-                <a:latin typeface="Calibri"/>
-              </a:rPr>
-              <a:t> PostgreSQL en el navegador + Google Docs</a:t>
+              <a:rPr sz="1400" b="0" i="0">
+                <a:solidFill>
+                  <a:srgbClr val="FFFFFF"/>
+                </a:solidFill>
+                <a:latin typeface="Calibri"/>
+              </a:rPr>
+              <a:t>-- Lo que el motor dice que concedio, que no siempre es lo que se creia.</a:t>
             </a:r>
           </a:p>
           <a:p>
             <a:pPr>
               <a:spcAft>
-                <a:spcPts val="800"/>
+                <a:spcPts val="400"/>
               </a:spcAft>
             </a:pPr>
             <a:r>
-              <a:rPr sz="2000" b="0" i="0">
-                <a:solidFill>
-                  <a:srgbClr val="333333"/>
-                </a:solidFill>
-                <a:latin typeface="Calibri"/>
-              </a:rPr>
-              <a:t>–   </a:t>
-            </a:r>
-            <a:r>
-              <a:rPr sz="2000" b="1" i="0">
-                <a:solidFill>
-                  <a:srgbClr val="333333"/>
-                </a:solidFill>
-                <a:latin typeface="Calibri"/>
-              </a:rPr>
-              <a:t>Demo:</a:t>
-            </a:r>
-            <a:r>
-              <a:rPr sz="2000" b="0" i="0">
-                <a:solidFill>
-                  <a:srgbClr val="333333"/>
-                </a:solidFill>
-                <a:latin typeface="Calibri"/>
-              </a:rPr>
-              <a:t> Los 4 roles de VetCare con CREATE ROLE/GRANT/REVOKE en la plataforma del curso, verificados con information_schema.role_table_grants.</a:t>
+              <a:rPr sz="1400" b="0" i="0">
+                <a:solidFill>
+                  <a:srgbClr val="FFFFFF"/>
+                </a:solidFill>
+                <a:latin typeface="Calibri"/>
+              </a:rPr>
+              <a:t>SELECT grantee, table_name, privilege_type</a:t>
             </a:r>
           </a:p>
           <a:p>
             <a:pPr>
               <a:spcAft>
-                <a:spcPts val="800"/>
+                <a:spcPts val="400"/>
               </a:spcAft>
             </a:pPr>
             <a:r>
-              <a:rPr sz="2000" b="0" i="0">
-                <a:solidFill>
-                  <a:srgbClr val="333333"/>
-                </a:solidFill>
-                <a:latin typeface="Calibri"/>
-              </a:rPr>
-              <a:t>–   Sigan el mismo dominio VetCare (no inventen otro caso).</a:t>
+              <a:rPr sz="1400" b="0" i="0">
+                <a:solidFill>
+                  <a:srgbClr val="FFFFFF"/>
+                </a:solidFill>
+                <a:latin typeface="Calibri"/>
+              </a:rPr>
+              <a:t>FROM information_schema.role_table_grants</a:t>
             </a:r>
           </a:p>
           <a:p>
             <a:pPr>
               <a:spcAft>
-                <a:spcPts val="800"/>
+                <a:spcPts val="400"/>
               </a:spcAft>
             </a:pPr>
             <a:r>
-              <a:rPr sz="2000" b="0" i="0">
-                <a:solidFill>
-                  <a:srgbClr val="333333"/>
-                </a:solidFill>
-                <a:latin typeface="Calibri"/>
-              </a:rPr>
-              <a:t>–   Al final de la demo: dejar enlace/script compartible al grupo.</a:t>
-            </a:r>
-          </a:p>
-        </p:txBody>
-      </p:sp>
-      <p:sp>
-        <p:nvSpPr>
-          <p:cNvPr id="6" name="TextBox 5"/>
+              <a:rPr sz="1400" b="0" i="0">
+                <a:solidFill>
+                  <a:srgbClr val="FFFFFF"/>
+                </a:solidFill>
+                <a:latin typeface="Calibri"/>
+              </a:rPr>
+              <a:t>WHERE grantee IN ('recepcion','veterinario_rol','auditor')</a:t>
+            </a:r>
+          </a:p>
+          <a:p>
+            <a:pPr>
+              <a:spcAft>
+                <a:spcPts val="400"/>
+              </a:spcAft>
+            </a:pPr>
+            <a:r>
+              <a:rPr sz="1400" b="0" i="0">
+                <a:solidFill>
+                  <a:srgbClr val="FFFFFF"/>
+                </a:solidFill>
+                <a:latin typeface="Calibri"/>
+              </a:rPr>
+              <a:t>ORDER BY grantee, table_name, privilege_type;</a:t>
+            </a:r>
+          </a:p>
+          <a:p>
+            <a:pPr>
+              <a:spcAft>
+                <a:spcPts val="400"/>
+              </a:spcAft>
+            </a:pPr>
+            <a:r>
+              <a:rPr sz="1400" b="0" i="0">
+                <a:solidFill>
+                  <a:srgbClr val="FFFFFF"/>
+                </a:solidFill>
+                <a:latin typeface="Calibri"/>
+              </a:rPr>
+              <a:t/>
+            </a:r>
+          </a:p>
+          <a:p>
+            <a:pPr>
+              <a:spcAft>
+                <a:spcPts val="400"/>
+              </a:spcAft>
+            </a:pPr>
+            <a:r>
+              <a:rPr sz="1400" b="0" i="0">
+                <a:solidFill>
+                  <a:srgbClr val="FFFFFF"/>
+                </a:solidFill>
+                <a:latin typeface="Calibri"/>
+              </a:rPr>
+              <a:t>-- Y los privilegios por columna, que la consulta anterior no muestra:</a:t>
+            </a:r>
+          </a:p>
+          <a:p>
+            <a:pPr>
+              <a:spcAft>
+                <a:spcPts val="400"/>
+              </a:spcAft>
+            </a:pPr>
+            <a:r>
+              <a:rPr sz="1400" b="0" i="0">
+                <a:solidFill>
+                  <a:srgbClr val="FFFFFF"/>
+                </a:solidFill>
+                <a:latin typeface="Calibri"/>
+              </a:rPr>
+              <a:t>SELECT grantee, table_name, column_name, privilege_type</a:t>
+            </a:r>
+          </a:p>
+          <a:p>
+            <a:pPr>
+              <a:spcAft>
+                <a:spcPts val="400"/>
+              </a:spcAft>
+            </a:pPr>
+            <a:r>
+              <a:rPr sz="1400" b="0" i="0">
+                <a:solidFill>
+                  <a:srgbClr val="FFFFFF"/>
+                </a:solidFill>
+                <a:latin typeface="Calibri"/>
+              </a:rPr>
+              <a:t>FROM information_schema.column_privileges</a:t>
+            </a:r>
+          </a:p>
+          <a:p>
+            <a:pPr>
+              <a:spcAft>
+                <a:spcPts val="400"/>
+              </a:spcAft>
+            </a:pPr>
+            <a:r>
+              <a:rPr sz="1400" b="0" i="0">
+                <a:solidFill>
+                  <a:srgbClr val="FFFFFF"/>
+                </a:solidFill>
+                <a:latin typeface="Calibri"/>
+              </a:rPr>
+              <a:t>WHERE grantee = 'recepcion'</a:t>
+            </a:r>
+          </a:p>
+          <a:p>
+            <a:pPr>
+              <a:spcAft>
+                <a:spcPts val="400"/>
+              </a:spcAft>
+            </a:pPr>
+            <a:r>
+              <a:rPr sz="1400" b="0" i="0">
+                <a:solidFill>
+                  <a:srgbClr val="FFFFFF"/>
+                </a:solidFill>
+                <a:latin typeface="Calibri"/>
+              </a:rPr>
+              <a:t>ORDER BY table_name, column_name;</a:t>
+            </a:r>
+          </a:p>
+        </p:txBody>
+      </p:sp>
+      <p:sp>
+        <p:nvSpPr>
+          <p:cNvPr id="9" name="TextBox 8"/>
           <p:cNvSpPr txBox="1"/>
           <p:nvPr/>
         </p:nvSpPr>
@@ -14515,7 +14531,7 @@
         <p:spPr>
           <a:xfrm>
             <a:off x="0" y="0"/>
-            <a:ext cx="12191695" cy="1170432"/>
+            <a:ext cx="12191695" cy="960120"/>
           </a:xfrm>
           <a:prstGeom prst="rect">
             <a:avLst/>
@@ -14557,7 +14573,7 @@
         </p:nvSpPr>
         <p:spPr>
           <a:xfrm>
-            <a:off x="0" y="1170432"/>
+            <a:off x="0" y="960120"/>
             <a:ext cx="12191695" cy="41148"/>
           </a:xfrm>
           <a:prstGeom prst="rect">
@@ -14601,7 +14617,7 @@
         <p:spPr>
           <a:xfrm>
             <a:off x="457200" y="164592"/>
-            <a:ext cx="11277295" cy="384048"/>
+            <a:ext cx="11277295" cy="502920"/>
           </a:xfrm>
           <a:prstGeom prst="rect">
             <a:avLst/>
@@ -14621,55 +14637,21 @@
                 </a:solidFill>
                 <a:latin typeface="Calibri"/>
               </a:rPr>
-              <a:t>Herramientas de hoy</a:t>
-            </a:r>
-          </a:p>
-        </p:txBody>
-      </p:sp>
-      <p:sp>
-        <p:nvSpPr>
-          <p:cNvPr id="5" name="TextBox 4"/>
-          <p:cNvSpPr txBox="1"/>
-          <p:nvPr/>
-        </p:nvSpPr>
-        <p:spPr>
-          <a:xfrm>
-            <a:off x="457200" y="566928"/>
-            <a:ext cx="11277295" cy="411480"/>
-          </a:xfrm>
-          <a:prstGeom prst="rect">
-            <a:avLst/>
-          </a:prstGeom>
-          <a:noFill/>
-        </p:spPr>
-        <p:txBody>
-          <a:bodyPr wrap="square">
-            <a:spAutoFit/>
-          </a:bodyPr>
-          <a:lstStyle/>
-          <a:p>
-            <a:r>
-              <a:rPr sz="1400" b="0" i="0">
-                <a:solidFill>
-                  <a:srgbClr val="B8D8EE"/>
-                </a:solidFill>
-                <a:latin typeface="Calibri"/>
-              </a:rPr>
-              <a:t>Gratis · navegador o free tier</a:t>
-            </a:r>
-          </a:p>
-        </p:txBody>
-      </p:sp>
-      <p:sp>
-        <p:nvSpPr>
-          <p:cNvPr id="6" name="Rounded Rectangle 5"/>
+              <a:t>Minimo privilegio, en concreto</a:t>
+            </a:r>
+          </a:p>
+        </p:txBody>
+      </p:sp>
+      <p:sp>
+        <p:nvSpPr>
+          <p:cNvPr id="5" name="Rounded Rectangle 4"/>
           <p:cNvSpPr/>
           <p:nvPr/>
         </p:nvSpPr>
         <p:spPr>
           <a:xfrm>
-            <a:off x="457200" y="1591056"/>
-            <a:ext cx="3624986" cy="2299716"/>
+            <a:off x="457200" y="1261872"/>
+            <a:ext cx="5478627" cy="5093208"/>
           </a:xfrm>
           <a:prstGeom prst="roundRect">
             <a:avLst>
@@ -14677,7 +14659,7 @@
             </a:avLst>
           </a:prstGeom>
           <a:solidFill>
-            <a:srgbClr val="F2F2F2"/>
+            <a:srgbClr val="FBE4E4"/>
           </a:solidFill>
           <a:ln>
             <a:noFill/>
@@ -14707,14 +14689,222 @@
       </p:sp>
       <p:sp>
         <p:nvSpPr>
-          <p:cNvPr id="7" name="Rectangle 6"/>
+          <p:cNvPr id="6" name="Rectangle 5"/>
           <p:cNvSpPr/>
           <p:nvPr/>
         </p:nvSpPr>
         <p:spPr>
           <a:xfrm>
-            <a:off x="457200" y="1591056"/>
-            <a:ext cx="3624986" cy="64008"/>
+            <a:off x="457200" y="1261872"/>
+            <a:ext cx="5478627" cy="502920"/>
+          </a:xfrm>
+          <a:prstGeom prst="rect">
+            <a:avLst/>
+          </a:prstGeom>
+          <a:solidFill>
+            <a:srgbClr val="A02030"/>
+          </a:solidFill>
+          <a:ln>
+            <a:noFill/>
+          </a:ln>
+        </p:spPr>
+        <p:style>
+          <a:lnRef idx="1">
+            <a:schemeClr val="accent1"/>
+          </a:lnRef>
+          <a:fillRef idx="3">
+            <a:schemeClr val="accent1"/>
+          </a:fillRef>
+          <a:effectRef idx="2">
+            <a:schemeClr val="accent1"/>
+          </a:effectRef>
+          <a:fontRef idx="minor">
+            <a:schemeClr val="lt1"/>
+          </a:fontRef>
+        </p:style>
+        <p:txBody>
+          <a:bodyPr rtlCol="0" anchor="ctr"/>
+          <a:lstStyle/>
+          <a:p>
+            <a:pPr algn="ctr"/>
+          </a:p>
+        </p:txBody>
+      </p:sp>
+      <p:sp>
+        <p:nvSpPr>
+          <p:cNvPr id="7" name="TextBox 6"/>
+          <p:cNvSpPr txBox="1"/>
+          <p:nvPr/>
+        </p:nvSpPr>
+        <p:spPr>
+          <a:xfrm>
+            <a:off x="594360" y="1353312"/>
+            <a:ext cx="5204307" cy="365760"/>
+          </a:xfrm>
+          <a:prstGeom prst="rect">
+            <a:avLst/>
+          </a:prstGeom>
+          <a:noFill/>
+        </p:spPr>
+        <p:txBody>
+          <a:bodyPr wrap="square" anchor="ctr"/>
+          <a:lstStyle/>
+          <a:p>
+            <a:pPr algn="ctr"/>
+            <a:r>
+              <a:rPr sz="1600" b="1" i="0">
+                <a:solidFill>
+                  <a:srgbClr val="FFFFFF"/>
+                </a:solidFill>
+                <a:latin typeface="Calibri"/>
+              </a:rPr>
+              <a:t>Lo que suele pasar</a:t>
+            </a:r>
+          </a:p>
+        </p:txBody>
+      </p:sp>
+      <p:sp>
+        <p:nvSpPr>
+          <p:cNvPr id="8" name="TextBox 7"/>
+          <p:cNvSpPr txBox="1"/>
+          <p:nvPr/>
+        </p:nvSpPr>
+        <p:spPr>
+          <a:xfrm>
+            <a:off x="621792" y="1901952"/>
+            <a:ext cx="5158587" cy="4498848"/>
+          </a:xfrm>
+          <a:prstGeom prst="rect">
+            <a:avLst/>
+          </a:prstGeom>
+          <a:noFill/>
+        </p:spPr>
+        <p:txBody>
+          <a:bodyPr wrap="square">
+            <a:spAutoFit/>
+          </a:bodyPr>
+          <a:lstStyle/>
+          <a:p>
+            <a:pPr>
+              <a:spcAft>
+                <a:spcPts val="800"/>
+              </a:spcAft>
+            </a:pPr>
+            <a:r>
+              <a:rPr sz="1500" b="0" i="0">
+                <a:solidFill>
+                  <a:srgbClr val="333333"/>
+                </a:solidFill>
+                <a:latin typeface="Calibri"/>
+              </a:rPr>
+              <a:t>–   Un solo usuario «admin» que todos comparten</a:t>
+            </a:r>
+          </a:p>
+          <a:p>
+            <a:pPr>
+              <a:spcAft>
+                <a:spcPts val="800"/>
+              </a:spcAft>
+            </a:pPr>
+            <a:r>
+              <a:rPr sz="1500" b="0" i="0">
+                <a:solidFill>
+                  <a:srgbClr val="333333"/>
+                </a:solidFill>
+                <a:latin typeface="Calibri"/>
+              </a:rPr>
+              <a:t>–   GRANT ALL 'para que no falle nada'</a:t>
+            </a:r>
+          </a:p>
+          <a:p>
+            <a:pPr>
+              <a:spcAft>
+                <a:spcPts val="800"/>
+              </a:spcAft>
+            </a:pPr>
+            <a:r>
+              <a:rPr sz="1500" b="0" i="0">
+                <a:solidFill>
+                  <a:srgbClr val="333333"/>
+                </a:solidFill>
+                <a:latin typeface="Calibri"/>
+              </a:rPr>
+              <a:t>–   Nadie sabe quien borro que (sin trazabilidad)</a:t>
+            </a:r>
+          </a:p>
+          <a:p>
+            <a:pPr>
+              <a:spcAft>
+                <a:spcPts val="800"/>
+              </a:spcAft>
+            </a:pPr>
+            <a:r>
+              <a:rPr sz="1500" b="0" i="0">
+                <a:solidFill>
+                  <a:srgbClr val="333333"/>
+                </a:solidFill>
+                <a:latin typeface="Calibri"/>
+              </a:rPr>
+              <a:t>–   Se van del cargo y la cuenta sigue viva</a:t>
+            </a:r>
+          </a:p>
+        </p:txBody>
+      </p:sp>
+      <p:sp>
+        <p:nvSpPr>
+          <p:cNvPr id="9" name="Rounded Rectangle 8"/>
+          <p:cNvSpPr/>
+          <p:nvPr/>
+        </p:nvSpPr>
+        <p:spPr>
+          <a:xfrm>
+            <a:off x="6255867" y="1261872"/>
+            <a:ext cx="5478627" cy="5093208"/>
+          </a:xfrm>
+          <a:prstGeom prst="roundRect">
+            <a:avLst>
+              <a:gd name="adj" fmla="val 12000"/>
+            </a:avLst>
+          </a:prstGeom>
+          <a:solidFill>
+            <a:srgbClr val="E8F4FA"/>
+          </a:solidFill>
+          <a:ln>
+            <a:noFill/>
+          </a:ln>
+        </p:spPr>
+        <p:style>
+          <a:lnRef idx="1">
+            <a:schemeClr val="accent1"/>
+          </a:lnRef>
+          <a:fillRef idx="3">
+            <a:schemeClr val="accent1"/>
+          </a:fillRef>
+          <a:effectRef idx="2">
+            <a:schemeClr val="accent1"/>
+          </a:effectRef>
+          <a:fontRef idx="minor">
+            <a:schemeClr val="lt1"/>
+          </a:fontRef>
+        </p:style>
+        <p:txBody>
+          <a:bodyPr rtlCol="0" anchor="ctr"/>
+          <a:lstStyle/>
+          <a:p>
+            <a:pPr algn="ctr"/>
+          </a:p>
+        </p:txBody>
+      </p:sp>
+      <p:sp>
+        <p:nvSpPr>
+          <p:cNvPr id="10" name="Rectangle 9"/>
+          <p:cNvSpPr/>
+          <p:nvPr/>
+        </p:nvSpPr>
+        <p:spPr>
+          <a:xfrm>
+            <a:off x="6255867" y="1261872"/>
+            <a:ext cx="5478627" cy="502920"/>
           </a:xfrm>
           <a:prstGeom prst="rect">
             <a:avLst/>
@@ -14750,81 +14940,47 @@
       </p:sp>
       <p:sp>
         <p:nvSpPr>
-          <p:cNvPr id="8" name="Rectangle 7"/>
-          <p:cNvSpPr/>
-          <p:nvPr/>
-        </p:nvSpPr>
-        <p:spPr>
-          <a:xfrm>
-            <a:off x="457200" y="1655064"/>
-            <a:ext cx="3624986" cy="27432"/>
-          </a:xfrm>
-          <a:prstGeom prst="rect">
-            <a:avLst/>
-          </a:prstGeom>
-          <a:solidFill>
-            <a:srgbClr val="FFD000"/>
-          </a:solidFill>
-          <a:ln>
-            <a:noFill/>
-          </a:ln>
-        </p:spPr>
-        <p:style>
-          <a:lnRef idx="1">
-            <a:schemeClr val="accent1"/>
-          </a:lnRef>
-          <a:fillRef idx="3">
-            <a:schemeClr val="accent1"/>
-          </a:fillRef>
-          <a:effectRef idx="2">
-            <a:schemeClr val="accent1"/>
-          </a:effectRef>
-          <a:fontRef idx="minor">
-            <a:schemeClr val="lt1"/>
-          </a:fontRef>
-        </p:style>
-        <p:txBody>
-          <a:bodyPr rtlCol="0" anchor="ctr"/>
+          <p:cNvPr id="11" name="TextBox 10"/>
+          <p:cNvSpPr txBox="1"/>
+          <p:nvPr/>
+        </p:nvSpPr>
+        <p:spPr>
+          <a:xfrm>
+            <a:off x="6393027" y="1353312"/>
+            <a:ext cx="5204307" cy="365760"/>
+          </a:xfrm>
+          <a:prstGeom prst="rect">
+            <a:avLst/>
+          </a:prstGeom>
+          <a:noFill/>
+        </p:spPr>
+        <p:txBody>
+          <a:bodyPr wrap="square" anchor="ctr"/>
           <a:lstStyle/>
           <a:p>
             <a:pPr algn="ctr"/>
-          </a:p>
-        </p:txBody>
-      </p:sp>
-      <p:pic>
-        <p:nvPicPr>
-          <p:cNvPr id="9" name="Picture 8" descr="examlab.png"/>
-          <p:cNvPicPr>
-            <a:picLocks noChangeAspect="1"/>
-          </p:cNvPicPr>
-          <p:nvPr/>
-        </p:nvPicPr>
-        <p:blipFill>
-          <a:blip r:embed="rId2"/>
-          <a:stretch>
-            <a:fillRect/>
-          </a:stretch>
-        </p:blipFill>
-        <p:spPr>
-          <a:xfrm>
-            <a:off x="1659331" y="1847087"/>
-            <a:ext cx="1220724" cy="1220724"/>
-          </a:xfrm>
-          <a:prstGeom prst="rect">
-            <a:avLst/>
-          </a:prstGeom>
-        </p:spPr>
-      </p:pic>
-      <p:sp>
-        <p:nvSpPr>
-          <p:cNvPr id="10" name="TextBox 9"/>
+            <a:r>
+              <a:rPr sz="1600" b="1" i="0">
+                <a:solidFill>
+                  <a:srgbClr val="FFFFFF"/>
+                </a:solidFill>
+                <a:latin typeface="Calibri"/>
+              </a:rPr>
+              <a:t>Lo que pide el taller</a:t>
+            </a:r>
+          </a:p>
+        </p:txBody>
+      </p:sp>
+      <p:sp>
+        <p:nvSpPr>
+          <p:cNvPr id="12" name="TextBox 11"/>
           <p:cNvSpPr txBox="1"/>
           <p:nvPr/>
         </p:nvSpPr>
         <p:spPr>
           <a:xfrm>
-            <a:off x="530352" y="3159251"/>
-            <a:ext cx="3478682" cy="621792"/>
+            <a:off x="6420459" y="1901952"/>
+            <a:ext cx="5158587" cy="4498848"/>
           </a:xfrm>
           <a:prstGeom prst="rect">
             <a:avLst/>
@@ -14832,653 +14988,79 @@
           <a:noFill/>
         </p:spPr>
         <p:txBody>
-          <a:bodyPr wrap="square" anchor="t"/>
-          <a:lstStyle/>
-          <a:p>
-            <a:pPr algn="ctr"/>
-            <a:r>
-              <a:rPr sz="1300" b="1" i="0">
-                <a:solidFill>
-                  <a:srgbClr val="095292"/>
-                </a:solidFill>
-                <a:latin typeface="Calibri"/>
-              </a:rPr>
-              <a:t>la plataforma del curso</a:t>
-            </a:r>
-          </a:p>
-          <a:p>
-            <a:pPr algn="ctr">
-              <a:spcBef>
-                <a:spcPts val="200"/>
-              </a:spcBef>
+          <a:bodyPr wrap="square">
+            <a:spAutoFit/>
+          </a:bodyPr>
+          <a:lstStyle/>
+          <a:p>
+            <a:pPr>
+              <a:spcAft>
+                <a:spcPts val="800"/>
+              </a:spcAft>
             </a:pPr>
             <a:r>
-              <a:rPr sz="1000" b="0" i="0">
-                <a:solidFill>
-                  <a:srgbClr val="666666"/>
-                </a:solidFill>
-                <a:latin typeface="Calibri"/>
-              </a:rPr>
-              <a:t>PostgreSQL: aqui corre</a:t>
-            </a:r>
-          </a:p>
-        </p:txBody>
-      </p:sp>
-      <p:sp>
-        <p:nvSpPr>
-          <p:cNvPr id="11" name="Rounded Rectangle 10"/>
-          <p:cNvSpPr/>
-          <p:nvPr/>
-        </p:nvSpPr>
-        <p:spPr>
-          <a:xfrm>
-            <a:off x="4283354" y="1591056"/>
-            <a:ext cx="3624986" cy="2299716"/>
-          </a:xfrm>
-          <a:prstGeom prst="roundRect">
-            <a:avLst>
-              <a:gd name="adj" fmla="val 12000"/>
-            </a:avLst>
-          </a:prstGeom>
-          <a:solidFill>
-            <a:srgbClr val="F2F2F2"/>
-          </a:solidFill>
-          <a:ln>
-            <a:noFill/>
-          </a:ln>
-        </p:spPr>
-        <p:style>
-          <a:lnRef idx="1">
-            <a:schemeClr val="accent1"/>
-          </a:lnRef>
-          <a:fillRef idx="3">
-            <a:schemeClr val="accent1"/>
-          </a:fillRef>
-          <a:effectRef idx="2">
-            <a:schemeClr val="accent1"/>
-          </a:effectRef>
-          <a:fontRef idx="minor">
-            <a:schemeClr val="lt1"/>
-          </a:fontRef>
-        </p:style>
-        <p:txBody>
-          <a:bodyPr rtlCol="0" anchor="ctr"/>
-          <a:lstStyle/>
-          <a:p>
-            <a:pPr algn="ctr"/>
-          </a:p>
-        </p:txBody>
-      </p:sp>
-      <p:sp>
-        <p:nvSpPr>
-          <p:cNvPr id="12" name="Rectangle 11"/>
-          <p:cNvSpPr/>
-          <p:nvPr/>
-        </p:nvSpPr>
-        <p:spPr>
-          <a:xfrm>
-            <a:off x="4283354" y="1591056"/>
-            <a:ext cx="3624986" cy="64008"/>
-          </a:xfrm>
-          <a:prstGeom prst="rect">
-            <a:avLst/>
-          </a:prstGeom>
-          <a:solidFill>
-            <a:srgbClr val="095292"/>
-          </a:solidFill>
-          <a:ln>
-            <a:noFill/>
-          </a:ln>
-        </p:spPr>
-        <p:style>
-          <a:lnRef idx="1">
-            <a:schemeClr val="accent1"/>
-          </a:lnRef>
-          <a:fillRef idx="3">
-            <a:schemeClr val="accent1"/>
-          </a:fillRef>
-          <a:effectRef idx="2">
-            <a:schemeClr val="accent1"/>
-          </a:effectRef>
-          <a:fontRef idx="minor">
-            <a:schemeClr val="lt1"/>
-          </a:fontRef>
-        </p:style>
-        <p:txBody>
-          <a:bodyPr rtlCol="0" anchor="ctr"/>
-          <a:lstStyle/>
-          <a:p>
-            <a:pPr algn="ctr"/>
-          </a:p>
-        </p:txBody>
-      </p:sp>
-      <p:sp>
-        <p:nvSpPr>
-          <p:cNvPr id="13" name="Rectangle 12"/>
-          <p:cNvSpPr/>
-          <p:nvPr/>
-        </p:nvSpPr>
-        <p:spPr>
-          <a:xfrm>
-            <a:off x="4283354" y="1655064"/>
-            <a:ext cx="3624986" cy="27432"/>
-          </a:xfrm>
-          <a:prstGeom prst="rect">
-            <a:avLst/>
-          </a:prstGeom>
-          <a:solidFill>
-            <a:srgbClr val="FFD000"/>
-          </a:solidFill>
-          <a:ln>
-            <a:noFill/>
-          </a:ln>
-        </p:spPr>
-        <p:style>
-          <a:lnRef idx="1">
-            <a:schemeClr val="accent1"/>
-          </a:lnRef>
-          <a:fillRef idx="3">
-            <a:schemeClr val="accent1"/>
-          </a:fillRef>
-          <a:effectRef idx="2">
-            <a:schemeClr val="accent1"/>
-          </a:effectRef>
-          <a:fontRef idx="minor">
-            <a:schemeClr val="lt1"/>
-          </a:fontRef>
-        </p:style>
-        <p:txBody>
-          <a:bodyPr rtlCol="0" anchor="ctr"/>
-          <a:lstStyle/>
-          <a:p>
-            <a:pPr algn="ctr"/>
-          </a:p>
-        </p:txBody>
-      </p:sp>
-      <p:pic>
-        <p:nvPicPr>
-          <p:cNvPr id="14" name="Picture 13" descr="google_docs.png"/>
-          <p:cNvPicPr>
-            <a:picLocks noChangeAspect="1"/>
-          </p:cNvPicPr>
-          <p:nvPr/>
-        </p:nvPicPr>
-        <p:blipFill>
-          <a:blip r:embed="rId3"/>
-          <a:stretch>
-            <a:fillRect/>
-          </a:stretch>
-        </p:blipFill>
-        <p:spPr>
-          <a:xfrm>
-            <a:off x="5485485" y="1847087"/>
-            <a:ext cx="1220724" cy="1220724"/>
-          </a:xfrm>
-          <a:prstGeom prst="rect">
-            <a:avLst/>
-          </a:prstGeom>
-        </p:spPr>
-      </p:pic>
-      <p:sp>
-        <p:nvSpPr>
-          <p:cNvPr id="15" name="TextBox 14"/>
-          <p:cNvSpPr txBox="1"/>
-          <p:nvPr/>
-        </p:nvSpPr>
-        <p:spPr>
-          <a:xfrm>
-            <a:off x="4356506" y="3159251"/>
-            <a:ext cx="3478682" cy="621792"/>
-          </a:xfrm>
-          <a:prstGeom prst="rect">
-            <a:avLst/>
-          </a:prstGeom>
-          <a:noFill/>
-        </p:spPr>
-        <p:txBody>
-          <a:bodyPr wrap="square" anchor="t"/>
-          <a:lstStyle/>
-          <a:p>
-            <a:pPr algn="ctr"/>
-            <a:r>
-              <a:rPr sz="1300" b="1" i="0">
-                <a:solidFill>
-                  <a:srgbClr val="095292"/>
-                </a:solidFill>
-                <a:latin typeface="Calibri"/>
-              </a:rPr>
-              <a:t>Google Docs</a:t>
-            </a:r>
-          </a:p>
-          <a:p>
-            <a:pPr algn="ctr">
-              <a:spcBef>
-                <a:spcPts val="200"/>
-              </a:spcBef>
+              <a:rPr sz="1500" b="0" i="0">
+                <a:solidFill>
+                  <a:srgbClr val="333333"/>
+                </a:solidFill>
+                <a:latin typeface="Calibri"/>
+              </a:rPr>
+              <a:t>–   4 roles: admin_bd · recepcion · veterinario_rol · auditor</a:t>
+            </a:r>
+          </a:p>
+          <a:p>
+            <a:pPr>
+              <a:spcAft>
+                <a:spcPts val="800"/>
+              </a:spcAft>
             </a:pPr>
             <a:r>
-              <a:rPr sz="1000" b="0" i="0">
-                <a:solidFill>
-                  <a:srgbClr val="666666"/>
-                </a:solidFill>
-                <a:latin typeface="Calibri"/>
-              </a:rPr>
-              <a:t>Matriz y politica</a:t>
-            </a:r>
-          </a:p>
-        </p:txBody>
-      </p:sp>
-      <p:sp>
-        <p:nvSpPr>
-          <p:cNvPr id="16" name="Rounded Rectangle 15"/>
-          <p:cNvSpPr/>
-          <p:nvPr/>
-        </p:nvSpPr>
-        <p:spPr>
-          <a:xfrm>
-            <a:off x="8109508" y="1591056"/>
-            <a:ext cx="3624986" cy="2299716"/>
-          </a:xfrm>
-          <a:prstGeom prst="roundRect">
-            <a:avLst>
-              <a:gd name="adj" fmla="val 12000"/>
-            </a:avLst>
-          </a:prstGeom>
-          <a:solidFill>
-            <a:srgbClr val="F2F2F2"/>
-          </a:solidFill>
-          <a:ln>
-            <a:noFill/>
-          </a:ln>
-        </p:spPr>
-        <p:style>
-          <a:lnRef idx="1">
-            <a:schemeClr val="accent1"/>
-          </a:lnRef>
-          <a:fillRef idx="3">
-            <a:schemeClr val="accent1"/>
-          </a:fillRef>
-          <a:effectRef idx="2">
-            <a:schemeClr val="accent1"/>
-          </a:effectRef>
-          <a:fontRef idx="minor">
-            <a:schemeClr val="lt1"/>
-          </a:fontRef>
-        </p:style>
-        <p:txBody>
-          <a:bodyPr rtlCol="0" anchor="ctr"/>
-          <a:lstStyle/>
-          <a:p>
-            <a:pPr algn="ctr"/>
-          </a:p>
-        </p:txBody>
-      </p:sp>
-      <p:sp>
-        <p:nvSpPr>
-          <p:cNvPr id="17" name="Rectangle 16"/>
-          <p:cNvSpPr/>
-          <p:nvPr/>
-        </p:nvSpPr>
-        <p:spPr>
-          <a:xfrm>
-            <a:off x="8109508" y="1591056"/>
-            <a:ext cx="3624986" cy="64008"/>
-          </a:xfrm>
-          <a:prstGeom prst="rect">
-            <a:avLst/>
-          </a:prstGeom>
-          <a:solidFill>
-            <a:srgbClr val="095292"/>
-          </a:solidFill>
-          <a:ln>
-            <a:noFill/>
-          </a:ln>
-        </p:spPr>
-        <p:style>
-          <a:lnRef idx="1">
-            <a:schemeClr val="accent1"/>
-          </a:lnRef>
-          <a:fillRef idx="3">
-            <a:schemeClr val="accent1"/>
-          </a:fillRef>
-          <a:effectRef idx="2">
-            <a:schemeClr val="accent1"/>
-          </a:effectRef>
-          <a:fontRef idx="minor">
-            <a:schemeClr val="lt1"/>
-          </a:fontRef>
-        </p:style>
-        <p:txBody>
-          <a:bodyPr rtlCol="0" anchor="ctr"/>
-          <a:lstStyle/>
-          <a:p>
-            <a:pPr algn="ctr"/>
-          </a:p>
-        </p:txBody>
-      </p:sp>
-      <p:sp>
-        <p:nvSpPr>
-          <p:cNvPr id="18" name="Rectangle 17"/>
-          <p:cNvSpPr/>
-          <p:nvPr/>
-        </p:nvSpPr>
-        <p:spPr>
-          <a:xfrm>
-            <a:off x="8109508" y="1655064"/>
-            <a:ext cx="3624986" cy="27432"/>
-          </a:xfrm>
-          <a:prstGeom prst="rect">
-            <a:avLst/>
-          </a:prstGeom>
-          <a:solidFill>
-            <a:srgbClr val="FFD000"/>
-          </a:solidFill>
-          <a:ln>
-            <a:noFill/>
-          </a:ln>
-        </p:spPr>
-        <p:style>
-          <a:lnRef idx="1">
-            <a:schemeClr val="accent1"/>
-          </a:lnRef>
-          <a:fillRef idx="3">
-            <a:schemeClr val="accent1"/>
-          </a:fillRef>
-          <a:effectRef idx="2">
-            <a:schemeClr val="accent1"/>
-          </a:effectRef>
-          <a:fontRef idx="minor">
-            <a:schemeClr val="lt1"/>
-          </a:fontRef>
-        </p:style>
-        <p:txBody>
-          <a:bodyPr rtlCol="0" anchor="ctr"/>
-          <a:lstStyle/>
-          <a:p>
-            <a:pPr algn="ctr"/>
-          </a:p>
-        </p:txBody>
-      </p:sp>
-      <p:pic>
-        <p:nvPicPr>
-          <p:cNvPr id="19" name="Picture 18" descr="dbfiddle.png"/>
-          <p:cNvPicPr>
-            <a:picLocks noChangeAspect="1"/>
-          </p:cNvPicPr>
-          <p:nvPr/>
-        </p:nvPicPr>
-        <p:blipFill>
-          <a:blip r:embed="rId4"/>
-          <a:stretch>
-            <a:fillRect/>
-          </a:stretch>
-        </p:blipFill>
-        <p:spPr>
-          <a:xfrm>
-            <a:off x="9311640" y="1847087"/>
-            <a:ext cx="1220724" cy="1220724"/>
-          </a:xfrm>
-          <a:prstGeom prst="rect">
-            <a:avLst/>
-          </a:prstGeom>
-        </p:spPr>
-      </p:pic>
-      <p:sp>
-        <p:nvSpPr>
-          <p:cNvPr id="20" name="TextBox 19"/>
-          <p:cNvSpPr txBox="1"/>
-          <p:nvPr/>
-        </p:nvSpPr>
-        <p:spPr>
-          <a:xfrm>
-            <a:off x="8182660" y="3159251"/>
-            <a:ext cx="3478682" cy="621792"/>
-          </a:xfrm>
-          <a:prstGeom prst="rect">
-            <a:avLst/>
-          </a:prstGeom>
-          <a:noFill/>
-        </p:spPr>
-        <p:txBody>
-          <a:bodyPr wrap="square" anchor="t"/>
-          <a:lstStyle/>
-          <a:p>
-            <a:pPr algn="ctr"/>
-            <a:r>
-              <a:rPr sz="1300" b="1" i="0">
-                <a:solidFill>
-                  <a:srgbClr val="095292"/>
-                </a:solidFill>
-                <a:latin typeface="Calibri"/>
-              </a:rPr>
-              <a:t>DB Fiddle</a:t>
-            </a:r>
-          </a:p>
-          <a:p>
-            <a:pPr algn="ctr">
-              <a:spcBef>
-                <a:spcPts val="200"/>
-              </a:spcBef>
+              <a:rPr sz="1500" b="0" i="0">
+                <a:solidFill>
+                  <a:srgbClr val="333333"/>
+                </a:solidFill>
+                <a:latin typeface="Calibri"/>
+              </a:rPr>
+              <a:t>–   Privilegio por objeto y operacion (matriz)</a:t>
+            </a:r>
+          </a:p>
+          <a:p>
+            <a:pPr>
+              <a:spcAft>
+                <a:spcPts val="800"/>
+              </a:spcAft>
             </a:pPr>
             <a:r>
-              <a:rPr sz="1000" b="0" i="0">
-                <a:solidFill>
-                  <a:srgbClr val="666666"/>
-                </a:solidFill>
-                <a:latin typeface="Calibri"/>
-              </a:rPr>
-              <a:t>Alterno: SQL suelto</a:t>
-            </a:r>
-          </a:p>
-        </p:txBody>
-      </p:sp>
-      <p:sp>
-        <p:nvSpPr>
-          <p:cNvPr id="21" name="Rounded Rectangle 20"/>
-          <p:cNvSpPr/>
-          <p:nvPr/>
-        </p:nvSpPr>
-        <p:spPr>
-          <a:xfrm>
-            <a:off x="4283354" y="4055364"/>
-            <a:ext cx="3624986" cy="2299716"/>
-          </a:xfrm>
-          <a:prstGeom prst="roundRect">
-            <a:avLst>
-              <a:gd name="adj" fmla="val 12000"/>
-            </a:avLst>
-          </a:prstGeom>
-          <a:solidFill>
-            <a:srgbClr val="F2F2F2"/>
-          </a:solidFill>
-          <a:ln>
-            <a:noFill/>
-          </a:ln>
-        </p:spPr>
-        <p:style>
-          <a:lnRef idx="1">
-            <a:schemeClr val="accent1"/>
-          </a:lnRef>
-          <a:fillRef idx="3">
-            <a:schemeClr val="accent1"/>
-          </a:fillRef>
-          <a:effectRef idx="2">
-            <a:schemeClr val="accent1"/>
-          </a:effectRef>
-          <a:fontRef idx="minor">
-            <a:schemeClr val="lt1"/>
-          </a:fontRef>
-        </p:style>
-        <p:txBody>
-          <a:bodyPr rtlCol="0" anchor="ctr"/>
-          <a:lstStyle/>
-          <a:p>
-            <a:pPr algn="ctr"/>
-          </a:p>
-        </p:txBody>
-      </p:sp>
-      <p:sp>
-        <p:nvSpPr>
-          <p:cNvPr id="22" name="Rectangle 21"/>
-          <p:cNvSpPr/>
-          <p:nvPr/>
-        </p:nvSpPr>
-        <p:spPr>
-          <a:xfrm>
-            <a:off x="4283354" y="4055364"/>
-            <a:ext cx="3624986" cy="64008"/>
-          </a:xfrm>
-          <a:prstGeom prst="rect">
-            <a:avLst/>
-          </a:prstGeom>
-          <a:solidFill>
-            <a:srgbClr val="095292"/>
-          </a:solidFill>
-          <a:ln>
-            <a:noFill/>
-          </a:ln>
-        </p:spPr>
-        <p:style>
-          <a:lnRef idx="1">
-            <a:schemeClr val="accent1"/>
-          </a:lnRef>
-          <a:fillRef idx="3">
-            <a:schemeClr val="accent1"/>
-          </a:fillRef>
-          <a:effectRef idx="2">
-            <a:schemeClr val="accent1"/>
-          </a:effectRef>
-          <a:fontRef idx="minor">
-            <a:schemeClr val="lt1"/>
-          </a:fontRef>
-        </p:style>
-        <p:txBody>
-          <a:bodyPr rtlCol="0" anchor="ctr"/>
-          <a:lstStyle/>
-          <a:p>
-            <a:pPr algn="ctr"/>
-          </a:p>
-        </p:txBody>
-      </p:sp>
-      <p:sp>
-        <p:nvSpPr>
-          <p:cNvPr id="23" name="Rectangle 22"/>
-          <p:cNvSpPr/>
-          <p:nvPr/>
-        </p:nvSpPr>
-        <p:spPr>
-          <a:xfrm>
-            <a:off x="4283354" y="4119372"/>
-            <a:ext cx="3624986" cy="27432"/>
-          </a:xfrm>
-          <a:prstGeom prst="rect">
-            <a:avLst/>
-          </a:prstGeom>
-          <a:solidFill>
-            <a:srgbClr val="FFD000"/>
-          </a:solidFill>
-          <a:ln>
-            <a:noFill/>
-          </a:ln>
-        </p:spPr>
-        <p:style>
-          <a:lnRef idx="1">
-            <a:schemeClr val="accent1"/>
-          </a:lnRef>
-          <a:fillRef idx="3">
-            <a:schemeClr val="accent1"/>
-          </a:fillRef>
-          <a:effectRef idx="2">
-            <a:schemeClr val="accent1"/>
-          </a:effectRef>
-          <a:fontRef idx="minor">
-            <a:schemeClr val="lt1"/>
-          </a:fontRef>
-        </p:style>
-        <p:txBody>
-          <a:bodyPr rtlCol="0" anchor="ctr"/>
-          <a:lstStyle/>
-          <a:p>
-            <a:pPr algn="ctr"/>
-          </a:p>
-        </p:txBody>
-      </p:sp>
-      <p:pic>
-        <p:nvPicPr>
-          <p:cNvPr id="24" name="Picture 23" descr="oracle_livesql.png"/>
-          <p:cNvPicPr>
-            <a:picLocks noChangeAspect="1"/>
-          </p:cNvPicPr>
-          <p:nvPr/>
-        </p:nvPicPr>
-        <p:blipFill>
-          <a:blip r:embed="rId5"/>
-          <a:stretch>
-            <a:fillRect/>
-          </a:stretch>
-        </p:blipFill>
-        <p:spPr>
-          <a:xfrm>
-            <a:off x="5485485" y="4311396"/>
-            <a:ext cx="1220724" cy="1220724"/>
-          </a:xfrm>
-          <a:prstGeom prst="rect">
-            <a:avLst/>
-          </a:prstGeom>
-        </p:spPr>
-      </p:pic>
-      <p:sp>
-        <p:nvSpPr>
-          <p:cNvPr id="25" name="TextBox 24"/>
-          <p:cNvSpPr txBox="1"/>
-          <p:nvPr/>
-        </p:nvSpPr>
-        <p:spPr>
-          <a:xfrm>
-            <a:off x="4356506" y="5623560"/>
-            <a:ext cx="3478682" cy="621792"/>
-          </a:xfrm>
-          <a:prstGeom prst="rect">
-            <a:avLst/>
-          </a:prstGeom>
-          <a:noFill/>
-        </p:spPr>
-        <p:txBody>
-          <a:bodyPr wrap="square" anchor="t"/>
-          <a:lstStyle/>
-          <a:p>
-            <a:pPr algn="ctr"/>
-            <a:r>
-              <a:rPr sz="1300" b="1" i="0">
-                <a:solidFill>
-                  <a:srgbClr val="095292"/>
-                </a:solidFill>
-                <a:latin typeface="Calibri"/>
-              </a:rPr>
-              <a:t>Oracle Live SQL</a:t>
-            </a:r>
-          </a:p>
-          <a:p>
-            <a:pPr algn="ctr">
-              <a:spcBef>
-                <a:spcPts val="200"/>
-              </a:spcBef>
+              <a:rPr sz="1500" b="0" i="0">
+                <a:solidFill>
+                  <a:srgbClr val="333333"/>
+                </a:solidFill>
+                <a:latin typeface="Calibri"/>
+              </a:rPr>
+              <a:t>–   recepcion nunca hace DELETE: cancelar es UPDATE</a:t>
+            </a:r>
+          </a:p>
+          <a:p>
+            <a:pPr>
+              <a:spcAft>
+                <a:spcPts val="800"/>
+              </a:spcAft>
             </a:pPr>
             <a:r>
-              <a:rPr sz="1000" b="0" i="0">
-                <a:solidFill>
-                  <a:srgbClr val="666666"/>
-                </a:solidFill>
-                <a:latin typeface="Calibri"/>
-              </a:rPr>
-              <a:t>Solo contraste</a:t>
-            </a:r>
-          </a:p>
-        </p:txBody>
-      </p:sp>
-      <p:sp>
-        <p:nvSpPr>
-          <p:cNvPr id="26" name="TextBox 25"/>
+              <a:rPr sz="1500" b="0" i="0">
+                <a:solidFill>
+                  <a:srgbClr val="333333"/>
+                </a:solidFill>
+                <a:latin typeface="Calibri"/>
+              </a:rPr>
+              <a:t>–   Politica de baja: revocacion el mismo dia</a:t>
+            </a:r>
+          </a:p>
+        </p:txBody>
+      </p:sp>
+      <p:sp>
+        <p:nvSpPr>
+          <p:cNvPr id="13" name="TextBox 12"/>
           <p:cNvSpPr txBox="1"/>
           <p:nvPr/>
         </p:nvSpPr>
@@ -15652,21 +15234,141 @@
                 </a:solidFill>
                 <a:latin typeface="Calibri"/>
               </a:rPr>
-              <a:t>Taller PI VetCare — contexto / por que importa</a:t>
-            </a:r>
-          </a:p>
-        </p:txBody>
-      </p:sp>
-      <p:sp>
-        <p:nvSpPr>
-          <p:cNvPr id="5" name="TextBox 4"/>
+              <a:t>Reducir la superficie: vista y privilegio por columna</a:t>
+            </a:r>
+          </a:p>
+        </p:txBody>
+      </p:sp>
+      <p:sp>
+        <p:nvSpPr>
+          <p:cNvPr id="5" name="Rounded Rectangle 4"/>
+          <p:cNvSpPr/>
+          <p:nvPr/>
+        </p:nvSpPr>
+        <p:spPr>
+          <a:xfrm>
+            <a:off x="457200" y="1261872"/>
+            <a:ext cx="11277295" cy="4773168"/>
+          </a:xfrm>
+          <a:prstGeom prst="roundRect">
+            <a:avLst>
+              <a:gd name="adj" fmla="val 12000"/>
+            </a:avLst>
+          </a:prstGeom>
+          <a:solidFill>
+            <a:srgbClr val="1E2A38"/>
+          </a:solidFill>
+          <a:ln>
+            <a:noFill/>
+          </a:ln>
+        </p:spPr>
+        <p:style>
+          <a:lnRef idx="1">
+            <a:schemeClr val="accent1"/>
+          </a:lnRef>
+          <a:fillRef idx="3">
+            <a:schemeClr val="accent1"/>
+          </a:fillRef>
+          <a:effectRef idx="2">
+            <a:schemeClr val="accent1"/>
+          </a:effectRef>
+          <a:fontRef idx="minor">
+            <a:schemeClr val="lt1"/>
+          </a:fontRef>
+        </p:style>
+        <p:txBody>
+          <a:bodyPr rtlCol="0" anchor="ctr"/>
+          <a:lstStyle/>
+          <a:p>
+            <a:pPr algn="ctr"/>
+          </a:p>
+        </p:txBody>
+      </p:sp>
+      <p:sp>
+        <p:nvSpPr>
+          <p:cNvPr id="6" name="Rectangle 5"/>
+          <p:cNvSpPr/>
+          <p:nvPr/>
+        </p:nvSpPr>
+        <p:spPr>
+          <a:xfrm>
+            <a:off x="457200" y="1261872"/>
+            <a:ext cx="11277295" cy="320040"/>
+          </a:xfrm>
+          <a:prstGeom prst="rect">
+            <a:avLst/>
+          </a:prstGeom>
+          <a:solidFill>
+            <a:srgbClr val="095292"/>
+          </a:solidFill>
+          <a:ln>
+            <a:noFill/>
+          </a:ln>
+        </p:spPr>
+        <p:style>
+          <a:lnRef idx="1">
+            <a:schemeClr val="accent1"/>
+          </a:lnRef>
+          <a:fillRef idx="3">
+            <a:schemeClr val="accent1"/>
+          </a:fillRef>
+          <a:effectRef idx="2">
+            <a:schemeClr val="accent1"/>
+          </a:effectRef>
+          <a:fontRef idx="minor">
+            <a:schemeClr val="lt1"/>
+          </a:fontRef>
+        </p:style>
+        <p:txBody>
+          <a:bodyPr rtlCol="0" anchor="ctr"/>
+          <a:lstStyle/>
+          <a:p>
+            <a:pPr algn="ctr"/>
+          </a:p>
+        </p:txBody>
+      </p:sp>
+      <p:sp>
+        <p:nvSpPr>
+          <p:cNvPr id="7" name="TextBox 6"/>
           <p:cNvSpPr txBox="1"/>
           <p:nvPr/>
         </p:nvSpPr>
         <p:spPr>
           <a:xfrm>
-            <a:off x="457200" y="1170432"/>
-            <a:ext cx="11277295" cy="5230368"/>
+            <a:off x="685800" y="1307592"/>
+            <a:ext cx="10820095" cy="256032"/>
+          </a:xfrm>
+          <a:prstGeom prst="rect">
+            <a:avLst/>
+          </a:prstGeom>
+          <a:noFill/>
+        </p:spPr>
+        <p:txBody>
+          <a:bodyPr wrap="square" anchor="ctr"/>
+          <a:lstStyle/>
+          <a:p>
+            <a:r>
+              <a:rPr sz="1000" b="1" i="0">
+                <a:solidFill>
+                  <a:srgbClr val="269CCB"/>
+                </a:solidFill>
+                <a:latin typeface="Calibri"/>
+              </a:rPr>
+              <a:t>● ● ●</a:t>
+            </a:r>
+          </a:p>
+        </p:txBody>
+      </p:sp>
+      <p:sp>
+        <p:nvSpPr>
+          <p:cNvPr id="8" name="TextBox 7"/>
+          <p:cNvSpPr txBox="1"/>
+          <p:nvPr/>
+        </p:nvSpPr>
+        <p:spPr>
+          <a:xfrm>
+            <a:off x="777240" y="1719072"/>
+            <a:ext cx="10637215" cy="4133087"/>
           </a:xfrm>
           <a:prstGeom prst="rect">
             <a:avLst/>
@@ -15681,92 +15383,219 @@
           <a:p>
             <a:pPr>
               <a:spcAft>
-                <a:spcPts val="800"/>
+                <a:spcPts val="400"/>
               </a:spcAft>
             </a:pPr>
             <a:r>
-              <a:rPr sz="2000" b="0" i="0">
-                <a:solidFill>
-                  <a:srgbClr val="333333"/>
-                </a:solidFill>
-                <a:latin typeface="Calibri"/>
-              </a:rPr>
-              <a:t>–   </a:t>
-            </a:r>
-            <a:r>
-              <a:rPr sz="2000" b="1" i="0">
-                <a:solidFill>
-                  <a:srgbClr val="333333"/>
-                </a:solidFill>
-                <a:latin typeface="Calibri"/>
-              </a:rPr>
-              <a:t>Por qué importa al PI:</a:t>
-            </a:r>
-            <a:r>
-              <a:rPr sz="2000" b="0" i="0">
-                <a:solidFill>
-                  <a:srgbClr val="333333"/>
-                </a:solidFill>
-                <a:latin typeface="Calibri"/>
-              </a:rPr>
-              <a:t> la seguridad de VetCare DB es un criterio de la rúbrica, y la evidencia son los roles y su matriz — no una promesa.</a:t>
+              <a:rPr sz="1400" b="0" i="0">
+                <a:solidFill>
+                  <a:srgbClr val="FFFFFF"/>
+                </a:solidFill>
+                <a:latin typeface="Calibri"/>
+              </a:rPr>
+              <a:t>-- 1) La vista deja fuera el email y las citas canceladas</a:t>
             </a:r>
           </a:p>
           <a:p>
             <a:pPr>
               <a:spcAft>
-                <a:spcPts val="800"/>
+                <a:spcPts val="400"/>
               </a:spcAft>
             </a:pPr>
             <a:r>
-              <a:rPr sz="2000" b="0" i="0">
-                <a:solidFill>
-                  <a:srgbClr val="333333"/>
-                </a:solidFill>
-                <a:latin typeface="Calibri"/>
-              </a:rPr>
-              <a:t>–   Mínimo privilegio evita que Recepción borre historia clínica: cancelar una cita es un </a:t>
-            </a:r>
-            <a:r>
-              <a:rPr sz="2000" b="1" i="0">
-                <a:solidFill>
-                  <a:srgbClr val="333333"/>
-                </a:solidFill>
-                <a:latin typeface="Calibri"/>
-              </a:rPr>
-              <a:t>UPDATE de estado</a:t>
-            </a:r>
-            <a:r>
-              <a:rPr sz="2000" b="0" i="0">
-                <a:solidFill>
-                  <a:srgbClr val="333333"/>
-                </a:solidFill>
-                <a:latin typeface="Calibri"/>
-              </a:rPr>
-              <a:t>, nunca un DELETE.</a:t>
+              <a:rPr sz="1400" b="0" i="0">
+                <a:solidFill>
+                  <a:srgbClr val="FFFFFF"/>
+                </a:solidFill>
+                <a:latin typeface="Calibri"/>
+              </a:rPr>
+              <a:t>CREATE VIEW v_agenda_recepcion AS</a:t>
             </a:r>
           </a:p>
           <a:p>
             <a:pPr>
               <a:spcAft>
-                <a:spcPts val="800"/>
+                <a:spcPts val="400"/>
               </a:spcAft>
             </a:pPr>
             <a:r>
-              <a:rPr sz="2000" b="0" i="0">
-                <a:solidFill>
-                  <a:srgbClr val="333333"/>
-                </a:solidFill>
-                <a:latin typeface="Calibri"/>
-              </a:rPr>
-              <a:t>–   Los «GRANT» de hoy corren de verdad y se auditan con «information_schema»: la matriz que entregas tiene que decir lo mismo que ejecutó el motor.</a:t>
-            </a:r>
-          </a:p>
-        </p:txBody>
-      </p:sp>
-      <p:sp>
-        <p:nvSpPr>
-          <p:cNvPr id="6" name="TextBox 5"/>
+              <a:rPr sz="1400" b="0" i="0">
+                <a:solidFill>
+                  <a:srgbClr val="FFFFFF"/>
+                </a:solidFill>
+                <a:latin typeface="Calibri"/>
+              </a:rPr>
+              <a:t>SELECT c.id_cita, c.fecha_hora, d.nombre AS dueno, d.telefono</a:t>
+            </a:r>
+          </a:p>
+          <a:p>
+            <a:pPr>
+              <a:spcAft>
+                <a:spcPts val="400"/>
+              </a:spcAft>
+            </a:pPr>
+            <a:r>
+              <a:rPr sz="1400" b="0" i="0">
+                <a:solidFill>
+                  <a:srgbClr val="FFFFFF"/>
+                </a:solidFill>
+                <a:latin typeface="Calibri"/>
+              </a:rPr>
+              <a:t>  FROM cita c JOIN mascota m ON m.id_mascota = c.id_mascota</a:t>
+            </a:r>
+          </a:p>
+          <a:p>
+            <a:pPr>
+              <a:spcAft>
+                <a:spcPts val="400"/>
+              </a:spcAft>
+            </a:pPr>
+            <a:r>
+              <a:rPr sz="1400" b="0" i="0">
+                <a:solidFill>
+                  <a:srgbClr val="FFFFFF"/>
+                </a:solidFill>
+                <a:latin typeface="Calibri"/>
+              </a:rPr>
+              <a:t>  JOIN dueno d ON d.id_dueno = m.id_dueno</a:t>
+            </a:r>
+          </a:p>
+          <a:p>
+            <a:pPr>
+              <a:spcAft>
+                <a:spcPts val="400"/>
+              </a:spcAft>
+            </a:pPr>
+            <a:r>
+              <a:rPr sz="1400" b="0" i="0">
+                <a:solidFill>
+                  <a:srgbClr val="FFFFFF"/>
+                </a:solidFill>
+                <a:latin typeface="Calibri"/>
+              </a:rPr>
+              <a:t> WHERE c.estado &lt;&gt; 'CANCELADA';</a:t>
+            </a:r>
+          </a:p>
+          <a:p>
+            <a:pPr>
+              <a:spcAft>
+                <a:spcPts val="400"/>
+              </a:spcAft>
+            </a:pPr>
+            <a:r>
+              <a:rPr sz="1400" b="0" i="0">
+                <a:solidFill>
+                  <a:srgbClr val="FFFFFF"/>
+                </a:solidFill>
+                <a:latin typeface="Calibri"/>
+              </a:rPr>
+              <a:t>GRANT SELECT ON v_agenda_recepcion TO recepcion;</a:t>
+            </a:r>
+          </a:p>
+          <a:p>
+            <a:pPr>
+              <a:spcAft>
+                <a:spcPts val="400"/>
+              </a:spcAft>
+            </a:pPr>
+            <a:r>
+              <a:rPr sz="1400" b="0" i="0">
+                <a:solidFill>
+                  <a:srgbClr val="FFFFFF"/>
+                </a:solidFill>
+                <a:latin typeface="Calibri"/>
+              </a:rPr>
+              <a:t>REVOKE SELECT ON dueno FROM recepcion;   -- solo llega por la vista</a:t>
+            </a:r>
+          </a:p>
+          <a:p>
+            <a:pPr>
+              <a:spcAft>
+                <a:spcPts val="400"/>
+              </a:spcAft>
+            </a:pPr>
+            <a:r>
+              <a:rPr sz="1400" b="0" i="0">
+                <a:solidFill>
+                  <a:srgbClr val="FFFFFF"/>
+                </a:solidFill>
+                <a:latin typeface="Calibri"/>
+              </a:rPr>
+              <a:t/>
+            </a:r>
+          </a:p>
+          <a:p>
+            <a:pPr>
+              <a:spcAft>
+                <a:spcPts val="400"/>
+              </a:spcAft>
+            </a:pPr>
+            <a:r>
+              <a:rPr sz="1400" b="0" i="0">
+                <a:solidFill>
+                  <a:srgbClr val="FFFFFF"/>
+                </a:solidFill>
+                <a:latin typeface="Calibri"/>
+              </a:rPr>
+              <a:t>-- 2) O se recorta la tabla columna por columna</a:t>
+            </a:r>
+          </a:p>
+          <a:p>
+            <a:pPr>
+              <a:spcAft>
+                <a:spcPts val="400"/>
+              </a:spcAft>
+            </a:pPr>
+            <a:r>
+              <a:rPr sz="1400" b="0" i="0">
+                <a:solidFill>
+                  <a:srgbClr val="FFFFFF"/>
+                </a:solidFill>
+                <a:latin typeface="Calibri"/>
+              </a:rPr>
+              <a:t>GRANT SELECT (id_dueno, nombre) ON dueno TO veterinario_rol;</a:t>
+            </a:r>
+          </a:p>
+        </p:txBody>
+      </p:sp>
+      <p:sp>
+        <p:nvSpPr>
+          <p:cNvPr id="9" name="TextBox 8"/>
+          <p:cNvSpPr txBox="1"/>
+          <p:nvPr/>
+        </p:nvSpPr>
+        <p:spPr>
+          <a:xfrm>
+            <a:off x="457200" y="6080760"/>
+            <a:ext cx="11277295" cy="320040"/>
+          </a:xfrm>
+          <a:prstGeom prst="rect">
+            <a:avLst/>
+          </a:prstGeom>
+          <a:noFill/>
+        </p:spPr>
+        <p:txBody>
+          <a:bodyPr wrap="square">
+            <a:spAutoFit/>
+          </a:bodyPr>
+          <a:lstStyle/>
+          <a:p>
+            <a:pPr algn="ctr"/>
+            <a:r>
+              <a:rPr sz="1200" b="0" i="1">
+                <a:solidFill>
+                  <a:srgbClr val="666666"/>
+                </a:solidFill>
+                <a:latin typeface="Calibri"/>
+              </a:rPr>
+              <a:t>Un GRANT no es todo-o-nada: la vista recorta filas y columnas, y el privilegio por columna recorta columnas sin crear objeto nuevo.</a:t>
+            </a:r>
+          </a:p>
+        </p:txBody>
+      </p:sp>
+      <p:sp>
+        <p:nvSpPr>
+          <p:cNvPr id="10" name="TextBox 9"/>
           <p:cNvSpPr txBox="1"/>
           <p:nvPr/>
         </p:nvSpPr>
@@ -15834,7 +15663,7 @@
         <p:spPr>
           <a:xfrm>
             <a:off x="0" y="0"/>
-            <a:ext cx="12191695" cy="960120"/>
+            <a:ext cx="12191695" cy="1170432"/>
           </a:xfrm>
           <a:prstGeom prst="rect">
             <a:avLst/>
@@ -15876,7 +15705,7 @@
         </p:nvSpPr>
         <p:spPr>
           <a:xfrm>
-            <a:off x="0" y="960120"/>
+            <a:off x="0" y="1170432"/>
             <a:ext cx="12191695" cy="41148"/>
           </a:xfrm>
           <a:prstGeom prst="rect">
@@ -15920,7 +15749,7 @@
         <p:spPr>
           <a:xfrm>
             <a:off x="457200" y="164592"/>
-            <a:ext cx="11277295" cy="502920"/>
+            <a:ext cx="11277295" cy="384048"/>
           </a:xfrm>
           <a:prstGeom prst="rect">
             <a:avLst/>
@@ -15940,7 +15769,7 @@
                 </a:solidFill>
                 <a:latin typeface="Calibri"/>
               </a:rPr>
-              <a:t>Taller PI VetCare — objetivo y criterios</a:t>
+              <a:t>Ciclo de vida de una cuenta: alta, cambio, baja, revision</a:t>
             </a:r>
           </a:p>
         </p:txBody>
@@ -15953,8 +15782,42 @@
         </p:nvSpPr>
         <p:spPr>
           <a:xfrm>
-            <a:off x="457200" y="1170432"/>
-            <a:ext cx="11277295" cy="5230368"/>
+            <a:off x="457200" y="566928"/>
+            <a:ext cx="11277295" cy="411480"/>
+          </a:xfrm>
+          <a:prstGeom prst="rect">
+            <a:avLst/>
+          </a:prstGeom>
+          <a:noFill/>
+        </p:spPr>
+        <p:txBody>
+          <a:bodyPr wrap="square">
+            <a:spAutoFit/>
+          </a:bodyPr>
+          <a:lstStyle/>
+          <a:p>
+            <a:r>
+              <a:rPr sz="1400" b="0" i="0">
+                <a:solidFill>
+                  <a:srgbClr val="B8D8EE"/>
+                </a:solidFill>
+                <a:latin typeface="Calibri"/>
+              </a:rPr>
+              <a:t>Cada flecha del ciclo es un GRANT o un REVOKE. La politica es lo que le pone responsable y plazo a cada uno: son las 5 secciones del entregable</a:t>
+            </a:r>
+          </a:p>
+        </p:txBody>
+      </p:sp>
+      <p:sp>
+        <p:nvSpPr>
+          <p:cNvPr id="6" name="TextBox 5"/>
+          <p:cNvSpPr txBox="1"/>
+          <p:nvPr/>
+        </p:nvSpPr>
+        <p:spPr>
+          <a:xfrm>
+            <a:off x="457200" y="1380744"/>
+            <a:ext cx="11277295" cy="5020056"/>
           </a:xfrm>
           <a:prstGeom prst="rect">
             <a:avLst/>
@@ -15988,7 +15851,7 @@
                 </a:solidFill>
                 <a:latin typeface="Calibri"/>
               </a:rPr>
-              <a:t>Objetivo:</a:t>
+              <a:t>1. Alta.</a:t>
             </a:r>
             <a:r>
               <a:rPr sz="2000" b="0" i="0">
@@ -15997,7 +15860,25 @@
                 </a:solidFill>
                 <a:latin typeface="Calibri"/>
               </a:rPr>
-              <a:t> Los 4 roles de VetCare creados y verificados, más la matriz rol x objeto y la política de altas y bajas.</a:t>
+              <a:t> Quien solicita y quien aprueba; la cuenta nace con </a:t>
+            </a:r>
+            <a:r>
+              <a:rPr sz="2000" b="1" i="0">
+                <a:solidFill>
+                  <a:srgbClr val="333333"/>
+                </a:solidFill>
+                <a:latin typeface="Calibri"/>
+              </a:rPr>
+              <a:t>un solo rol</a:t>
+            </a:r>
+            <a:r>
+              <a:rPr sz="2000" b="0" i="0">
+                <a:solidFill>
+                  <a:srgbClr val="333333"/>
+                </a:solidFill>
+                <a:latin typeface="Calibri"/>
+              </a:rPr>
+              <a:t> y con credencial temporal que caduca en el primer ingreso.</a:t>
             </a:r>
           </a:p>
           <a:p>
@@ -16022,7 +15903,7 @@
                 </a:solidFill>
                 <a:latin typeface="Calibri"/>
               </a:rPr>
-              <a:t>Exito:</a:t>
+              <a:t>2. Cambio de rol.</a:t>
             </a:r>
             <a:r>
               <a:rPr sz="2000" b="0" i="0">
@@ -16031,7 +15912,43 @@
                 </a:solidFill>
                 <a:latin typeface="Calibri"/>
               </a:rPr>
-              <a:t> Los 4 roles creados, con sus GRANT y el REVOKE explícito de DELETE.</a:t>
+              <a:t> «GRANT» del nuevo y </a:t>
+            </a:r>
+            <a:r>
+              <a:rPr sz="2000" b="1" i="0">
+                <a:solidFill>
+                  <a:srgbClr val="333333"/>
+                </a:solidFill>
+                <a:latin typeface="Calibri"/>
+              </a:rPr>
+              <a:t>«REVOKE» del anterior</a:t>
+            </a:r>
+            <a:r>
+              <a:rPr sz="2000" b="0" i="0">
+                <a:solidFill>
+                  <a:srgbClr val="333333"/>
+                </a:solidFill>
+                <a:latin typeface="Calibri"/>
+              </a:rPr>
+              <a:t>: los permisos </a:t>
+            </a:r>
+            <a:r>
+              <a:rPr sz="2000" b="1" i="0">
+                <a:solidFill>
+                  <a:srgbClr val="333333"/>
+                </a:solidFill>
+                <a:latin typeface="Calibri"/>
+              </a:rPr>
+              <a:t>no se acumulan</a:t>
+            </a:r>
+            <a:r>
+              <a:rPr sz="2000" b="0" i="0">
+                <a:solidFill>
+                  <a:srgbClr val="333333"/>
+                </a:solidFill>
+                <a:latin typeface="Calibri"/>
+              </a:rPr>
+              <a:t>. Quien pasa de recepcion a auditoria y conserva los dos termina auditando lo que el mismo modifica.</a:t>
             </a:r>
           </a:p>
           <a:p>
@@ -16056,7 +15973,7 @@
                 </a:solidFill>
                 <a:latin typeface="Calibri"/>
               </a:rPr>
-              <a:t>Exito:</a:t>
+              <a:t>3. Baja: el mismo dia.</a:t>
             </a:r>
             <a:r>
               <a:rPr sz="2000" b="0" i="0">
@@ -16065,7 +15982,43 @@
                 </a:solidFill>
                 <a:latin typeface="Calibri"/>
               </a:rPr>
-              <a:t> La matriz real consultada con «information_schema.role_table_grants».</a:t>
+              <a:t> Revocar los roles, dejar la cuenta sin login y </a:t>
+            </a:r>
+            <a:r>
+              <a:rPr sz="2000" b="1" i="0">
+                <a:solidFill>
+                  <a:srgbClr val="333333"/>
+                </a:solidFill>
+                <a:latin typeface="Calibri"/>
+              </a:rPr>
+              <a:t>reasignar los objetos antes de borrar el rol</a:t>
+            </a:r>
+            <a:r>
+              <a:rPr sz="2000" b="0" i="0">
+                <a:solidFill>
+                  <a:srgbClr val="333333"/>
+                </a:solidFill>
+                <a:latin typeface="Calibri"/>
+              </a:rPr>
+              <a:t> («REASSIGN OWNED BY ... TO admin_bd»): PostgreSQL no deja hacer «DROP ROLE» de un rol que todavia posee objetos. Lo que esto evita es la </a:t>
+            </a:r>
+            <a:r>
+              <a:rPr sz="2000" b="1" i="0">
+                <a:solidFill>
+                  <a:srgbClr val="333333"/>
+                </a:solidFill>
+                <a:latin typeface="Calibri"/>
+              </a:rPr>
+              <a:t>cuenta huerfana</a:t>
+            </a:r>
+            <a:r>
+              <a:rPr sz="2000" b="0" i="0">
+                <a:solidFill>
+                  <a:srgbClr val="333333"/>
+                </a:solidFill>
+                <a:latin typeface="Calibri"/>
+              </a:rPr>
+              <a:t>.</a:t>
             </a:r>
           </a:p>
           <a:p>
@@ -16090,7 +16043,7 @@
                 </a:solidFill>
                 <a:latin typeface="Calibri"/>
               </a:rPr>
-              <a:t>Exito:</a:t>
+              <a:t>4. Revision periodica.</a:t>
             </a:r>
             <a:r>
               <a:rPr sz="2000" b="0" i="0">
@@ -16099,7 +16052,25 @@
                 </a:solidFill>
                 <a:latin typeface="Calibri"/>
               </a:rPr>
-              <a:t> Vista «v_agenda_recepcion» sin el email + «GRANT SELECT (id_dueno, nombre)».</a:t>
+              <a:t> Cada 3 a 6 meses se audita la matriz con «information_schema.role_table_grants», y </a:t>
+            </a:r>
+            <a:r>
+              <a:rPr sz="2000" b="1" i="0">
+                <a:solidFill>
+                  <a:srgbClr val="333333"/>
+                </a:solidFill>
+                <a:latin typeface="Calibri"/>
+              </a:rPr>
+              <a:t>alguien firma</a:t>
+            </a:r>
+            <a:r>
+              <a:rPr sz="2000" b="0" i="0">
+                <a:solidFill>
+                  <a:srgbClr val="333333"/>
+                </a:solidFill>
+                <a:latin typeface="Calibri"/>
+              </a:rPr>
+              <a:t> la evidencia. Sin cuentas compartidas: si tres personas entran como «recepcion1», la auditoria no puede decir quien cancelo la cita.</a:t>
             </a:r>
           </a:p>
           <a:p>
@@ -16124,7 +16095,7 @@
                 </a:solidFill>
                 <a:latin typeface="Calibri"/>
               </a:rPr>
-              <a:t>Exito:</a:t>
+              <a:t>5. Probar que el permiso NO esta.</a:t>
             </a:r>
             <a:r>
               <a:rPr sz="2000" b="0" i="0">
@@ -16133,15 +16104,17 @@
                 </a:solidFill>
                 <a:latin typeface="Calibri"/>
               </a:rPr>
-              <a:t> Matriz de 10 objetos x 4 roles, sin celdas vacías y consistente con los GRANT.</a:t>
-            </a:r>
-          </a:p>
-          <a:p>
-            <a:pPr>
-              <a:spcAft>
-                <a:spcPts val="800"/>
-              </a:spcAft>
-            </a:pPr>
+              <a:t> No hace falta otra conexion (aqui hay un solo usuario con login): «SET ROLE recepcion;» cambia el rol efectivo, y ahi «DELETE FROM cita ...» debe responder </a:t>
+            </a:r>
+            <a:r>
+              <a:rPr sz="2000" b="1" i="0">
+                <a:solidFill>
+                  <a:srgbClr val="333333"/>
+                </a:solidFill>
+                <a:latin typeface="Calibri"/>
+              </a:rPr>
+              <a:t>permission denied</a:t>
+            </a:r>
             <a:r>
               <a:rPr sz="2000" b="0" i="0">
                 <a:solidFill>
@@ -16149,7 +16122,7 @@
                 </a:solidFill>
                 <a:latin typeface="Calibri"/>
               </a:rPr>
-              <a:t>–   </a:t>
+              <a:t>. Se cierra con «RESET ROLE;». Si el entorno no deja cambiar de rol, se documenta el intento: eso es una </a:t>
             </a:r>
             <a:r>
               <a:rPr sz="2000" b="1" i="0">
@@ -16158,7 +16131,7 @@
                 </a:solidFill>
                 <a:latin typeface="Calibri"/>
               </a:rPr>
-              <a:t>Exito:</a:t>
+              <a:t>brecha de verificacion</a:t>
             </a:r>
             <a:r>
               <a:rPr sz="2000" b="0" i="0">
@@ -16167,48 +16140,14 @@
                 </a:solidFill>
                 <a:latin typeface="Calibri"/>
               </a:rPr>
-              <a:t> Política de 1 página con las 5 secciones, cada una con responsable y plazo.</a:t>
-            </a:r>
-          </a:p>
-          <a:p>
-            <a:pPr>
-              <a:spcAft>
-                <a:spcPts val="800"/>
-              </a:spcAft>
-            </a:pPr>
-            <a:r>
-              <a:rPr sz="2000" b="0" i="0">
-                <a:solidFill>
-                  <a:srgbClr val="333333"/>
-                </a:solidFill>
-                <a:latin typeface="Calibri"/>
-              </a:rPr>
-              <a:t>–   </a:t>
-            </a:r>
-            <a:r>
-              <a:rPr sz="2000" b="1" i="0">
-                <a:solidFill>
-                  <a:srgbClr val="333333"/>
-                </a:solidFill>
-                <a:latin typeface="Calibri"/>
-              </a:rPr>
-              <a:t>Exito:</a:t>
-            </a:r>
-            <a:r>
-              <a:rPr sz="2000" b="0" i="0">
-                <a:solidFill>
-                  <a:srgbClr val="333333"/>
-                </a:solidFill>
-                <a:latin typeface="Calibri"/>
-              </a:rPr>
-              <a:t> Entrega en la fecha que indique el docente.</a:t>
-            </a:r>
-          </a:p>
-        </p:txBody>
-      </p:sp>
-      <p:sp>
-        <p:nvSpPr>
-          <p:cNvPr id="6" name="TextBox 5"/>
+              <a:t> del entregable.</a:t>
+            </a:r>
+          </a:p>
+        </p:txBody>
+      </p:sp>
+      <p:sp>
+        <p:nvSpPr>
+          <p:cNvPr id="7" name="TextBox 6"/>
           <p:cNvSpPr txBox="1"/>
           <p:nvPr/>
         </p:nvSpPr>
@@ -16382,7 +16321,7 @@
                 </a:solidFill>
                 <a:latin typeface="Calibri"/>
               </a:rPr>
-              <a:t>Taller PI VetCare — escenario / datos de partida</a:t>
+              <a:t>Demo del dia</a:t>
             </a:r>
           </a:p>
         </p:txBody>
@@ -16421,7 +16360,25 @@
                 </a:solidFill>
                 <a:latin typeface="Calibri"/>
               </a:rPr>
-              <a:t>–   Esquema de VetCare ya creado y poblado: 8 tablas, y los dos procedimientos («sp_agendar_cita», «sp_facturar») como objetos de la matriz.</a:t>
+              <a:t>–   </a:t>
+            </a:r>
+            <a:r>
+              <a:rPr sz="2000" b="1" i="0">
+                <a:solidFill>
+                  <a:srgbClr val="333333"/>
+                </a:solidFill>
+                <a:latin typeface="Calibri"/>
+              </a:rPr>
+              <a:t>Herramienta:</a:t>
+            </a:r>
+            <a:r>
+              <a:rPr sz="2000" b="0" i="0">
+                <a:solidFill>
+                  <a:srgbClr val="333333"/>
+                </a:solidFill>
+                <a:latin typeface="Calibri"/>
+              </a:rPr>
+              <a:t> PostgreSQL en el navegador + Google Docs</a:t>
             </a:r>
           </a:p>
           <a:p>
@@ -16437,7 +16394,25 @@
                 </a:solidFill>
                 <a:latin typeface="Calibri"/>
               </a:rPr>
-              <a:t>–   Roles a crear: «admin_bd» · «recepcion» · «veterinario_rol» · «auditor» (minúsculas; el del veterinario lleva «_rol» porque «veterinario» ya es una tabla).</a:t>
+              <a:t>–   </a:t>
+            </a:r>
+            <a:r>
+              <a:rPr sz="2000" b="1" i="0">
+                <a:solidFill>
+                  <a:srgbClr val="333333"/>
+                </a:solidFill>
+                <a:latin typeface="Calibri"/>
+              </a:rPr>
+              <a:t>Demo:</a:t>
+            </a:r>
+            <a:r>
+              <a:rPr sz="2000" b="0" i="0">
+                <a:solidFill>
+                  <a:srgbClr val="333333"/>
+                </a:solidFill>
+                <a:latin typeface="Calibri"/>
+              </a:rPr>
+              <a:t> Los 4 roles de VetCare con CREATE ROLE/GRANT/REVOKE en la plataforma del curso, verificados con information_schema.role_table_grants.</a:t>
             </a:r>
           </a:p>
           <a:p>
@@ -16453,25 +16428,7 @@
                 </a:solidFill>
                 <a:latin typeface="Calibri"/>
               </a:rPr>
-              <a:t>–   </a:t>
-            </a:r>
-            <a:r>
-              <a:rPr sz="2000" b="1" i="0">
-                <a:solidFill>
-                  <a:srgbClr val="333333"/>
-                </a:solidFill>
-                <a:latin typeface="Calibri"/>
-              </a:rPr>
-              <a:t>Motor:</a:t>
-            </a:r>
-            <a:r>
-              <a:rPr sz="2000" b="0" i="0">
-                <a:solidFill>
-                  <a:srgbClr val="333333"/>
-                </a:solidFill>
-                <a:latin typeface="Calibri"/>
-              </a:rPr>
-              <a:t> PostgreSQL dentro de la plataforma del curso. Los GRANT son reales, y el permiso negado se comprueba con «SET ROLE» en la misma sesión: no hay una segunda conexión.</a:t>
+              <a:t>–   Sigan el mismo dominio VetCare (no inventen otro caso).</a:t>
             </a:r>
           </a:p>
           <a:p>
@@ -16487,7 +16444,7 @@
                 </a:solidFill>
                 <a:latin typeface="Calibri"/>
               </a:rPr>
-              <a:t>–   La matriz y la política se escriben en Google Docs y se pegan en la plataforma del curso; la plantilla en blanco de las dos está en este documento.</a:t>
+              <a:t>–   Al final de la demo: dejar enlace/script compartible al grupo.</a:t>
             </a:r>
           </a:p>
         </p:txBody>
@@ -16562,7 +16519,7 @@
         <p:spPr>
           <a:xfrm>
             <a:off x="0" y="0"/>
-            <a:ext cx="12191695" cy="960120"/>
+            <a:ext cx="12191695" cy="1170432"/>
           </a:xfrm>
           <a:prstGeom prst="rect">
             <a:avLst/>
@@ -16604,7 +16561,7 @@
         </p:nvSpPr>
         <p:spPr>
           <a:xfrm>
-            <a:off x="0" y="960120"/>
+            <a:off x="0" y="1170432"/>
             <a:ext cx="12191695" cy="41148"/>
           </a:xfrm>
           <a:prstGeom prst="rect">
@@ -16648,7 +16605,7 @@
         <p:spPr>
           <a:xfrm>
             <a:off x="457200" y="164592"/>
-            <a:ext cx="11277295" cy="502920"/>
+            <a:ext cx="11277295" cy="384048"/>
           </a:xfrm>
           <a:prstGeom prst="rect">
             <a:avLst/>
@@ -16668,21 +16625,55 @@
                 </a:solidFill>
                 <a:latin typeface="Calibri"/>
               </a:rPr>
-              <a:t>Taller PI VetCare — pasos guiados</a:t>
-            </a:r>
-          </a:p>
-        </p:txBody>
-      </p:sp>
-      <p:sp>
-        <p:nvSpPr>
-          <p:cNvPr id="5" name="Rounded Rectangle 4"/>
+              <a:t>Herramientas de hoy</a:t>
+            </a:r>
+          </a:p>
+        </p:txBody>
+      </p:sp>
+      <p:sp>
+        <p:nvSpPr>
+          <p:cNvPr id="5" name="TextBox 4"/>
+          <p:cNvSpPr txBox="1"/>
+          <p:nvPr/>
+        </p:nvSpPr>
+        <p:spPr>
+          <a:xfrm>
+            <a:off x="457200" y="566928"/>
+            <a:ext cx="11277295" cy="411480"/>
+          </a:xfrm>
+          <a:prstGeom prst="rect">
+            <a:avLst/>
+          </a:prstGeom>
+          <a:noFill/>
+        </p:spPr>
+        <p:txBody>
+          <a:bodyPr wrap="square">
+            <a:spAutoFit/>
+          </a:bodyPr>
+          <a:lstStyle/>
+          <a:p>
+            <a:r>
+              <a:rPr sz="1400" b="0" i="0">
+                <a:solidFill>
+                  <a:srgbClr val="B8D8EE"/>
+                </a:solidFill>
+                <a:latin typeface="Calibri"/>
+              </a:rPr>
+              <a:t>Gratis · navegador o free tier</a:t>
+            </a:r>
+          </a:p>
+        </p:txBody>
+      </p:sp>
+      <p:sp>
+        <p:nvSpPr>
+          <p:cNvPr id="6" name="Rounded Rectangle 5"/>
           <p:cNvSpPr/>
           <p:nvPr/>
         </p:nvSpPr>
         <p:spPr>
           <a:xfrm>
-            <a:off x="457200" y="1554480"/>
-            <a:ext cx="11277295" cy="1051560"/>
+            <a:off x="457200" y="1591056"/>
+            <a:ext cx="3624986" cy="2299716"/>
           </a:xfrm>
           <a:prstGeom prst="roundRect">
             <a:avLst>
@@ -16720,19 +16711,17 @@
       </p:sp>
       <p:sp>
         <p:nvSpPr>
-          <p:cNvPr id="6" name="Rounded Rectangle 5"/>
+          <p:cNvPr id="7" name="Rectangle 6"/>
           <p:cNvSpPr/>
           <p:nvPr/>
         </p:nvSpPr>
         <p:spPr>
           <a:xfrm>
-            <a:off x="594360" y="1860804"/>
-            <a:ext cx="438912" cy="438912"/>
-          </a:xfrm>
-          <a:prstGeom prst="roundRect">
-            <a:avLst>
-              <a:gd name="adj" fmla="val 12000"/>
-            </a:avLst>
+            <a:off x="457200" y="1591056"/>
+            <a:ext cx="3624986" cy="64008"/>
+          </a:xfrm>
+          <a:prstGeom prst="rect">
+            <a:avLst/>
           </a:prstGeom>
           <a:solidFill>
             <a:srgbClr val="095292"/>
@@ -16765,87 +16754,20 @@
       </p:sp>
       <p:sp>
         <p:nvSpPr>
-          <p:cNvPr id="7" name="TextBox 6"/>
-          <p:cNvSpPr txBox="1"/>
-          <p:nvPr/>
-        </p:nvSpPr>
-        <p:spPr>
-          <a:xfrm>
-            <a:off x="594360" y="1860804"/>
-            <a:ext cx="438912" cy="438912"/>
-          </a:xfrm>
-          <a:prstGeom prst="rect">
-            <a:avLst/>
-          </a:prstGeom>
-          <a:noFill/>
-        </p:spPr>
-        <p:txBody>
-          <a:bodyPr wrap="square" anchor="ctr"/>
-          <a:lstStyle/>
-          <a:p>
-            <a:pPr algn="ctr"/>
-            <a:r>
-              <a:rPr sz="1600" b="1" i="0">
-                <a:solidFill>
-                  <a:srgbClr val="FFFFFF"/>
-                </a:solidFill>
-                <a:latin typeface="Calibri"/>
-              </a:rPr>
-              <a:t>1</a:t>
-            </a:r>
-          </a:p>
-        </p:txBody>
-      </p:sp>
-      <p:sp>
-        <p:nvSpPr>
-          <p:cNvPr id="8" name="TextBox 7"/>
-          <p:cNvSpPr txBox="1"/>
-          <p:nvPr/>
-        </p:nvSpPr>
-        <p:spPr>
-          <a:xfrm>
-            <a:off x="1188720" y="1645920"/>
-            <a:ext cx="10271455" cy="886968"/>
-          </a:xfrm>
-          <a:prstGeom prst="rect">
-            <a:avLst/>
-          </a:prstGeom>
-          <a:noFill/>
-        </p:spPr>
-        <p:txBody>
-          <a:bodyPr wrap="square" anchor="ctr"/>
-          <a:lstStyle/>
-          <a:p>
-            <a:r>
-              <a:rPr sz="1500" b="1" i="0">
-                <a:solidFill>
-                  <a:srgbClr val="095292"/>
-                </a:solidFill>
-                <a:latin typeface="Calibri"/>
-              </a:rPr>
-              <a:t>Crear los 4 roles (admin_bd, recepcion, veterinario_rol, auditor) con GRANT/REVOKE que corran.</a:t>
-            </a:r>
-          </a:p>
-        </p:txBody>
-      </p:sp>
-      <p:sp>
-        <p:nvSpPr>
-          <p:cNvPr id="9" name="Rounded Rectangle 8"/>
+          <p:cNvPr id="8" name="Rectangle 7"/>
           <p:cNvSpPr/>
           <p:nvPr/>
         </p:nvSpPr>
         <p:spPr>
           <a:xfrm>
-            <a:off x="457200" y="2697480"/>
-            <a:ext cx="11277295" cy="1051560"/>
-          </a:xfrm>
-          <a:prstGeom prst="roundRect">
-            <a:avLst>
-              <a:gd name="adj" fmla="val 12000"/>
-            </a:avLst>
+            <a:off x="457200" y="1655064"/>
+            <a:ext cx="3624986" cy="27432"/>
+          </a:xfrm>
+          <a:prstGeom prst="rect">
+            <a:avLst/>
           </a:prstGeom>
           <a:solidFill>
-            <a:srgbClr val="E8F4FA"/>
+            <a:srgbClr val="FFD000"/>
           </a:solidFill>
           <a:ln>
             <a:noFill/>
@@ -16873,21 +16795,137 @@
           </a:p>
         </p:txBody>
       </p:sp>
-      <p:sp>
-        <p:nvSpPr>
-          <p:cNvPr id="10" name="Rounded Rectangle 9"/>
+      <p:pic>
+        <p:nvPicPr>
+          <p:cNvPr id="9" name="Picture 8" descr="examlab.png"/>
+          <p:cNvPicPr>
+            <a:picLocks noChangeAspect="1"/>
+          </p:cNvPicPr>
+          <p:nvPr/>
+        </p:nvPicPr>
+        <p:blipFill>
+          <a:blip r:embed="rId2"/>
+          <a:stretch>
+            <a:fillRect/>
+          </a:stretch>
+        </p:blipFill>
+        <p:spPr>
+          <a:xfrm>
+            <a:off x="1659331" y="1847087"/>
+            <a:ext cx="1220724" cy="1220724"/>
+          </a:xfrm>
+          <a:prstGeom prst="rect">
+            <a:avLst/>
+          </a:prstGeom>
+        </p:spPr>
+      </p:pic>
+      <p:sp>
+        <p:nvSpPr>
+          <p:cNvPr id="10" name="TextBox 9"/>
+          <p:cNvSpPr txBox="1"/>
+          <p:nvPr/>
+        </p:nvSpPr>
+        <p:spPr>
+          <a:xfrm>
+            <a:off x="530352" y="3159251"/>
+            <a:ext cx="3478682" cy="621792"/>
+          </a:xfrm>
+          <a:prstGeom prst="rect">
+            <a:avLst/>
+          </a:prstGeom>
+          <a:noFill/>
+        </p:spPr>
+        <p:txBody>
+          <a:bodyPr wrap="square" anchor="t"/>
+          <a:lstStyle/>
+          <a:p>
+            <a:pPr algn="ctr"/>
+            <a:r>
+              <a:rPr sz="1300" b="1" i="0">
+                <a:solidFill>
+                  <a:srgbClr val="095292"/>
+                </a:solidFill>
+                <a:latin typeface="Calibri"/>
+              </a:rPr>
+              <a:t>la plataforma del curso</a:t>
+            </a:r>
+          </a:p>
+          <a:p>
+            <a:pPr algn="ctr">
+              <a:spcBef>
+                <a:spcPts val="200"/>
+              </a:spcBef>
+            </a:pPr>
+            <a:r>
+              <a:rPr sz="1000" b="0" i="0">
+                <a:solidFill>
+                  <a:srgbClr val="666666"/>
+                </a:solidFill>
+                <a:latin typeface="Calibri"/>
+              </a:rPr>
+              <a:t>PostgreSQL: aqui corre</a:t>
+            </a:r>
+          </a:p>
+        </p:txBody>
+      </p:sp>
+      <p:sp>
+        <p:nvSpPr>
+          <p:cNvPr id="11" name="Rounded Rectangle 10"/>
           <p:cNvSpPr/>
           <p:nvPr/>
         </p:nvSpPr>
         <p:spPr>
           <a:xfrm>
-            <a:off x="594360" y="3003804"/>
-            <a:ext cx="438912" cy="438912"/>
+            <a:off x="4283354" y="1591056"/>
+            <a:ext cx="3624986" cy="2299716"/>
           </a:xfrm>
           <a:prstGeom prst="roundRect">
             <a:avLst>
               <a:gd name="adj" fmla="val 12000"/>
             </a:avLst>
+          </a:prstGeom>
+          <a:solidFill>
+            <a:srgbClr val="F2F2F2"/>
+          </a:solidFill>
+          <a:ln>
+            <a:noFill/>
+          </a:ln>
+        </p:spPr>
+        <p:style>
+          <a:lnRef idx="1">
+            <a:schemeClr val="accent1"/>
+          </a:lnRef>
+          <a:fillRef idx="3">
+            <a:schemeClr val="accent1"/>
+          </a:fillRef>
+          <a:effectRef idx="2">
+            <a:schemeClr val="accent1"/>
+          </a:effectRef>
+          <a:fontRef idx="minor">
+            <a:schemeClr val="lt1"/>
+          </a:fontRef>
+        </p:style>
+        <p:txBody>
+          <a:bodyPr rtlCol="0" anchor="ctr"/>
+          <a:lstStyle/>
+          <a:p>
+            <a:pPr algn="ctr"/>
+          </a:p>
+        </p:txBody>
+      </p:sp>
+      <p:sp>
+        <p:nvSpPr>
+          <p:cNvPr id="12" name="Rectangle 11"/>
+          <p:cNvSpPr/>
+          <p:nvPr/>
+        </p:nvSpPr>
+        <p:spPr>
+          <a:xfrm>
+            <a:off x="4283354" y="1591056"/>
+            <a:ext cx="3624986" cy="64008"/>
+          </a:xfrm>
+          <a:prstGeom prst="rect">
+            <a:avLst/>
           </a:prstGeom>
           <a:solidFill>
             <a:srgbClr val="095292"/>
@@ -16920,14 +16958,81 @@
       </p:sp>
       <p:sp>
         <p:nvSpPr>
-          <p:cNvPr id="11" name="TextBox 10"/>
+          <p:cNvPr id="13" name="Rectangle 12"/>
+          <p:cNvSpPr/>
+          <p:nvPr/>
+        </p:nvSpPr>
+        <p:spPr>
+          <a:xfrm>
+            <a:off x="4283354" y="1655064"/>
+            <a:ext cx="3624986" cy="27432"/>
+          </a:xfrm>
+          <a:prstGeom prst="rect">
+            <a:avLst/>
+          </a:prstGeom>
+          <a:solidFill>
+            <a:srgbClr val="FFD000"/>
+          </a:solidFill>
+          <a:ln>
+            <a:noFill/>
+          </a:ln>
+        </p:spPr>
+        <p:style>
+          <a:lnRef idx="1">
+            <a:schemeClr val="accent1"/>
+          </a:lnRef>
+          <a:fillRef idx="3">
+            <a:schemeClr val="accent1"/>
+          </a:fillRef>
+          <a:effectRef idx="2">
+            <a:schemeClr val="accent1"/>
+          </a:effectRef>
+          <a:fontRef idx="minor">
+            <a:schemeClr val="lt1"/>
+          </a:fontRef>
+        </p:style>
+        <p:txBody>
+          <a:bodyPr rtlCol="0" anchor="ctr"/>
+          <a:lstStyle/>
+          <a:p>
+            <a:pPr algn="ctr"/>
+          </a:p>
+        </p:txBody>
+      </p:sp>
+      <p:pic>
+        <p:nvPicPr>
+          <p:cNvPr id="14" name="Picture 13" descr="google_docs.png"/>
+          <p:cNvPicPr>
+            <a:picLocks noChangeAspect="1"/>
+          </p:cNvPicPr>
+          <p:nvPr/>
+        </p:nvPicPr>
+        <p:blipFill>
+          <a:blip r:embed="rId3"/>
+          <a:stretch>
+            <a:fillRect/>
+          </a:stretch>
+        </p:blipFill>
+        <p:spPr>
+          <a:xfrm>
+            <a:off x="5485485" y="1847087"/>
+            <a:ext cx="1220724" cy="1220724"/>
+          </a:xfrm>
+          <a:prstGeom prst="rect">
+            <a:avLst/>
+          </a:prstGeom>
+        </p:spPr>
+      </p:pic>
+      <p:sp>
+        <p:nvSpPr>
+          <p:cNvPr id="15" name="TextBox 14"/>
           <p:cNvSpPr txBox="1"/>
           <p:nvPr/>
         </p:nvSpPr>
         <p:spPr>
           <a:xfrm>
-            <a:off x="594360" y="3003804"/>
-            <a:ext cx="438912" cy="438912"/>
+            <a:off x="4356506" y="3159251"/>
+            <a:ext cx="3478682" cy="621792"/>
           </a:xfrm>
           <a:prstGeom prst="rect">
             <a:avLst/>
@@ -16935,64 +17040,48 @@
           <a:noFill/>
         </p:spPr>
         <p:txBody>
-          <a:bodyPr wrap="square" anchor="ctr"/>
+          <a:bodyPr wrap="square" anchor="t"/>
           <a:lstStyle/>
           <a:p>
             <a:pPr algn="ctr"/>
             <a:r>
-              <a:rPr sz="1600" b="1" i="0">
-                <a:solidFill>
-                  <a:srgbClr val="FFFFFF"/>
-                </a:solidFill>
-                <a:latin typeface="Calibri"/>
-              </a:rPr>
-              <a:t>2</a:t>
-            </a:r>
-          </a:p>
-        </p:txBody>
-      </p:sp>
-      <p:sp>
-        <p:nvSpPr>
-          <p:cNvPr id="12" name="TextBox 11"/>
-          <p:cNvSpPr txBox="1"/>
-          <p:nvPr/>
-        </p:nvSpPr>
-        <p:spPr>
-          <a:xfrm>
-            <a:off x="1188720" y="2788920"/>
-            <a:ext cx="10271455" cy="886968"/>
-          </a:xfrm>
-          <a:prstGeom prst="rect">
-            <a:avLst/>
-          </a:prstGeom>
-          <a:noFill/>
-        </p:spPr>
-        <p:txBody>
-          <a:bodyPr wrap="square" anchor="ctr"/>
-          <a:lstStyle/>
-          <a:p>
-            <a:r>
-              <a:rPr sz="1500" b="1" i="0">
+              <a:rPr sz="1300" b="1" i="0">
                 <a:solidFill>
                   <a:srgbClr val="095292"/>
                 </a:solidFill>
                 <a:latin typeface="Calibri"/>
               </a:rPr>
-              <a:t>Recortar la superficie: vista v_agenda_recepcion + privilegio por columna sobre dueno.</a:t>
-            </a:r>
-          </a:p>
-        </p:txBody>
-      </p:sp>
-      <p:sp>
-        <p:nvSpPr>
-          <p:cNvPr id="13" name="Rounded Rectangle 12"/>
+              <a:t>Google Docs</a:t>
+            </a:r>
+          </a:p>
+          <a:p>
+            <a:pPr algn="ctr">
+              <a:spcBef>
+                <a:spcPts val="200"/>
+              </a:spcBef>
+            </a:pPr>
+            <a:r>
+              <a:rPr sz="1000" b="0" i="0">
+                <a:solidFill>
+                  <a:srgbClr val="666666"/>
+                </a:solidFill>
+                <a:latin typeface="Calibri"/>
+              </a:rPr>
+              <a:t>Matriz y politica</a:t>
+            </a:r>
+          </a:p>
+        </p:txBody>
+      </p:sp>
+      <p:sp>
+        <p:nvSpPr>
+          <p:cNvPr id="16" name="Rounded Rectangle 15"/>
           <p:cNvSpPr/>
           <p:nvPr/>
         </p:nvSpPr>
         <p:spPr>
           <a:xfrm>
-            <a:off x="457200" y="3840480"/>
-            <a:ext cx="11277295" cy="1051560"/>
+            <a:off x="8109508" y="1591056"/>
+            <a:ext cx="3624986" cy="2299716"/>
           </a:xfrm>
           <a:prstGeom prst="roundRect">
             <a:avLst>
@@ -17030,19 +17119,17 @@
       </p:sp>
       <p:sp>
         <p:nvSpPr>
-          <p:cNvPr id="14" name="Rounded Rectangle 13"/>
+          <p:cNvPr id="17" name="Rectangle 16"/>
           <p:cNvSpPr/>
           <p:nvPr/>
         </p:nvSpPr>
         <p:spPr>
           <a:xfrm>
-            <a:off x="594360" y="4146804"/>
-            <a:ext cx="438912" cy="438912"/>
-          </a:xfrm>
-          <a:prstGeom prst="roundRect">
-            <a:avLst>
-              <a:gd name="adj" fmla="val 12000"/>
-            </a:avLst>
+            <a:off x="8109508" y="1591056"/>
+            <a:ext cx="3624986" cy="64008"/>
+          </a:xfrm>
+          <a:prstGeom prst="rect">
+            <a:avLst/>
           </a:prstGeom>
           <a:solidFill>
             <a:srgbClr val="095292"/>
@@ -17075,87 +17162,20 @@
       </p:sp>
       <p:sp>
         <p:nvSpPr>
-          <p:cNvPr id="15" name="TextBox 14"/>
-          <p:cNvSpPr txBox="1"/>
-          <p:nvPr/>
-        </p:nvSpPr>
-        <p:spPr>
-          <a:xfrm>
-            <a:off x="594360" y="4146804"/>
-            <a:ext cx="438912" cy="438912"/>
-          </a:xfrm>
-          <a:prstGeom prst="rect">
-            <a:avLst/>
-          </a:prstGeom>
-          <a:noFill/>
-        </p:spPr>
-        <p:txBody>
-          <a:bodyPr wrap="square" anchor="ctr"/>
-          <a:lstStyle/>
-          <a:p>
-            <a:pPr algn="ctr"/>
-            <a:r>
-              <a:rPr sz="1600" b="1" i="0">
-                <a:solidFill>
-                  <a:srgbClr val="FFFFFF"/>
-                </a:solidFill>
-                <a:latin typeface="Calibri"/>
-              </a:rPr>
-              <a:t>3</a:t>
-            </a:r>
-          </a:p>
-        </p:txBody>
-      </p:sp>
-      <p:sp>
-        <p:nvSpPr>
-          <p:cNvPr id="16" name="TextBox 15"/>
-          <p:cNvSpPr txBox="1"/>
-          <p:nvPr/>
-        </p:nvSpPr>
-        <p:spPr>
-          <a:xfrm>
-            <a:off x="1188720" y="3931920"/>
-            <a:ext cx="10271455" cy="886968"/>
-          </a:xfrm>
-          <a:prstGeom prst="rect">
-            <a:avLst/>
-          </a:prstGeom>
-          <a:noFill/>
-        </p:spPr>
-        <p:txBody>
-          <a:bodyPr wrap="square" anchor="ctr"/>
-          <a:lstStyle/>
-          <a:p>
-            <a:r>
-              <a:rPr sz="1500" b="1" i="0">
-                <a:solidFill>
-                  <a:srgbClr val="095292"/>
-                </a:solidFill>
-                <a:latin typeface="Calibri"/>
-              </a:rPr>
-              <a:t>Matriz rol x objeto x privilegio de los 10 objetos, justificando privilegio minimo.</a:t>
-            </a:r>
-          </a:p>
-        </p:txBody>
-      </p:sp>
-      <p:sp>
-        <p:nvSpPr>
-          <p:cNvPr id="17" name="Rounded Rectangle 16"/>
+          <p:cNvPr id="18" name="Rectangle 17"/>
           <p:cNvSpPr/>
           <p:nvPr/>
         </p:nvSpPr>
         <p:spPr>
           <a:xfrm>
-            <a:off x="457200" y="4983480"/>
-            <a:ext cx="11277295" cy="1051560"/>
-          </a:xfrm>
-          <a:prstGeom prst="roundRect">
-            <a:avLst>
-              <a:gd name="adj" fmla="val 12000"/>
-            </a:avLst>
+            <a:off x="8109508" y="1655064"/>
+            <a:ext cx="3624986" cy="27432"/>
+          </a:xfrm>
+          <a:prstGeom prst="rect">
+            <a:avLst/>
           </a:prstGeom>
           <a:solidFill>
-            <a:srgbClr val="E8F4FA"/>
+            <a:srgbClr val="FFD000"/>
           </a:solidFill>
           <a:ln>
             <a:noFill/>
@@ -17183,21 +17203,137 @@
           </a:p>
         </p:txBody>
       </p:sp>
-      <p:sp>
-        <p:nvSpPr>
-          <p:cNvPr id="18" name="Rounded Rectangle 17"/>
+      <p:pic>
+        <p:nvPicPr>
+          <p:cNvPr id="19" name="Picture 18" descr="dbfiddle.png"/>
+          <p:cNvPicPr>
+            <a:picLocks noChangeAspect="1"/>
+          </p:cNvPicPr>
+          <p:nvPr/>
+        </p:nvPicPr>
+        <p:blipFill>
+          <a:blip r:embed="rId4"/>
+          <a:stretch>
+            <a:fillRect/>
+          </a:stretch>
+        </p:blipFill>
+        <p:spPr>
+          <a:xfrm>
+            <a:off x="9311640" y="1847087"/>
+            <a:ext cx="1220724" cy="1220724"/>
+          </a:xfrm>
+          <a:prstGeom prst="rect">
+            <a:avLst/>
+          </a:prstGeom>
+        </p:spPr>
+      </p:pic>
+      <p:sp>
+        <p:nvSpPr>
+          <p:cNvPr id="20" name="TextBox 19"/>
+          <p:cNvSpPr txBox="1"/>
+          <p:nvPr/>
+        </p:nvSpPr>
+        <p:spPr>
+          <a:xfrm>
+            <a:off x="8182660" y="3159251"/>
+            <a:ext cx="3478682" cy="621792"/>
+          </a:xfrm>
+          <a:prstGeom prst="rect">
+            <a:avLst/>
+          </a:prstGeom>
+          <a:noFill/>
+        </p:spPr>
+        <p:txBody>
+          <a:bodyPr wrap="square" anchor="t"/>
+          <a:lstStyle/>
+          <a:p>
+            <a:pPr algn="ctr"/>
+            <a:r>
+              <a:rPr sz="1300" b="1" i="0">
+                <a:solidFill>
+                  <a:srgbClr val="095292"/>
+                </a:solidFill>
+                <a:latin typeface="Calibri"/>
+              </a:rPr>
+              <a:t>DB Fiddle</a:t>
+            </a:r>
+          </a:p>
+          <a:p>
+            <a:pPr algn="ctr">
+              <a:spcBef>
+                <a:spcPts val="200"/>
+              </a:spcBef>
+            </a:pPr>
+            <a:r>
+              <a:rPr sz="1000" b="0" i="0">
+                <a:solidFill>
+                  <a:srgbClr val="666666"/>
+                </a:solidFill>
+                <a:latin typeface="Calibri"/>
+              </a:rPr>
+              <a:t>Alterno: SQL suelto</a:t>
+            </a:r>
+          </a:p>
+        </p:txBody>
+      </p:sp>
+      <p:sp>
+        <p:nvSpPr>
+          <p:cNvPr id="21" name="Rounded Rectangle 20"/>
           <p:cNvSpPr/>
           <p:nvPr/>
         </p:nvSpPr>
         <p:spPr>
           <a:xfrm>
-            <a:off x="594360" y="5289804"/>
-            <a:ext cx="438912" cy="438912"/>
+            <a:off x="4283354" y="4055364"/>
+            <a:ext cx="3624986" cy="2299716"/>
           </a:xfrm>
           <a:prstGeom prst="roundRect">
             <a:avLst>
               <a:gd name="adj" fmla="val 12000"/>
             </a:avLst>
+          </a:prstGeom>
+          <a:solidFill>
+            <a:srgbClr val="F2F2F2"/>
+          </a:solidFill>
+          <a:ln>
+            <a:noFill/>
+          </a:ln>
+        </p:spPr>
+        <p:style>
+          <a:lnRef idx="1">
+            <a:schemeClr val="accent1"/>
+          </a:lnRef>
+          <a:fillRef idx="3">
+            <a:schemeClr val="accent1"/>
+          </a:fillRef>
+          <a:effectRef idx="2">
+            <a:schemeClr val="accent1"/>
+          </a:effectRef>
+          <a:fontRef idx="minor">
+            <a:schemeClr val="lt1"/>
+          </a:fontRef>
+        </p:style>
+        <p:txBody>
+          <a:bodyPr rtlCol="0" anchor="ctr"/>
+          <a:lstStyle/>
+          <a:p>
+            <a:pPr algn="ctr"/>
+          </a:p>
+        </p:txBody>
+      </p:sp>
+      <p:sp>
+        <p:nvSpPr>
+          <p:cNvPr id="22" name="Rectangle 21"/>
+          <p:cNvSpPr/>
+          <p:nvPr/>
+        </p:nvSpPr>
+        <p:spPr>
+          <a:xfrm>
+            <a:off x="4283354" y="4055364"/>
+            <a:ext cx="3624986" cy="64008"/>
+          </a:xfrm>
+          <a:prstGeom prst="rect">
+            <a:avLst/>
           </a:prstGeom>
           <a:solidFill>
             <a:srgbClr val="095292"/>
@@ -17230,14 +17366,81 @@
       </p:sp>
       <p:sp>
         <p:nvSpPr>
-          <p:cNvPr id="19" name="TextBox 18"/>
+          <p:cNvPr id="23" name="Rectangle 22"/>
+          <p:cNvSpPr/>
+          <p:nvPr/>
+        </p:nvSpPr>
+        <p:spPr>
+          <a:xfrm>
+            <a:off x="4283354" y="4119372"/>
+            <a:ext cx="3624986" cy="27432"/>
+          </a:xfrm>
+          <a:prstGeom prst="rect">
+            <a:avLst/>
+          </a:prstGeom>
+          <a:solidFill>
+            <a:srgbClr val="FFD000"/>
+          </a:solidFill>
+          <a:ln>
+            <a:noFill/>
+          </a:ln>
+        </p:spPr>
+        <p:style>
+          <a:lnRef idx="1">
+            <a:schemeClr val="accent1"/>
+          </a:lnRef>
+          <a:fillRef idx="3">
+            <a:schemeClr val="accent1"/>
+          </a:fillRef>
+          <a:effectRef idx="2">
+            <a:schemeClr val="accent1"/>
+          </a:effectRef>
+          <a:fontRef idx="minor">
+            <a:schemeClr val="lt1"/>
+          </a:fontRef>
+        </p:style>
+        <p:txBody>
+          <a:bodyPr rtlCol="0" anchor="ctr"/>
+          <a:lstStyle/>
+          <a:p>
+            <a:pPr algn="ctr"/>
+          </a:p>
+        </p:txBody>
+      </p:sp>
+      <p:pic>
+        <p:nvPicPr>
+          <p:cNvPr id="24" name="Picture 23" descr="oracle_livesql.png"/>
+          <p:cNvPicPr>
+            <a:picLocks noChangeAspect="1"/>
+          </p:cNvPicPr>
+          <p:nvPr/>
+        </p:nvPicPr>
+        <p:blipFill>
+          <a:blip r:embed="rId5"/>
+          <a:stretch>
+            <a:fillRect/>
+          </a:stretch>
+        </p:blipFill>
+        <p:spPr>
+          <a:xfrm>
+            <a:off x="5485485" y="4311396"/>
+            <a:ext cx="1220724" cy="1220724"/>
+          </a:xfrm>
+          <a:prstGeom prst="rect">
+            <a:avLst/>
+          </a:prstGeom>
+        </p:spPr>
+      </p:pic>
+      <p:sp>
+        <p:nvSpPr>
+          <p:cNvPr id="25" name="TextBox 24"/>
           <p:cNvSpPr txBox="1"/>
           <p:nvPr/>
         </p:nvSpPr>
         <p:spPr>
           <a:xfrm>
-            <a:off x="594360" y="5289804"/>
-            <a:ext cx="438912" cy="438912"/>
+            <a:off x="4356506" y="5623560"/>
+            <a:ext cx="3478682" cy="621792"/>
           </a:xfrm>
           <a:prstGeom prst="rect">
             <a:avLst/>
@@ -17245,57 +17448,41 @@
           <a:noFill/>
         </p:spPr>
         <p:txBody>
-          <a:bodyPr wrap="square" anchor="ctr"/>
+          <a:bodyPr wrap="square" anchor="t"/>
           <a:lstStyle/>
           <a:p>
             <a:pPr algn="ctr"/>
             <a:r>
-              <a:rPr sz="1600" b="1" i="0">
-                <a:solidFill>
-                  <a:srgbClr val="FFFFFF"/>
-                </a:solidFill>
-                <a:latin typeface="Calibri"/>
-              </a:rPr>
-              <a:t>4</a:t>
-            </a:r>
-          </a:p>
-        </p:txBody>
-      </p:sp>
-      <p:sp>
-        <p:nvSpPr>
-          <p:cNvPr id="20" name="TextBox 19"/>
-          <p:cNvSpPr txBox="1"/>
-          <p:nvPr/>
-        </p:nvSpPr>
-        <p:spPr>
-          <a:xfrm>
-            <a:off x="1188720" y="5074920"/>
-            <a:ext cx="10271455" cy="886968"/>
-          </a:xfrm>
-          <a:prstGeom prst="rect">
-            <a:avLst/>
-          </a:prstGeom>
-          <a:noFill/>
-        </p:spPr>
-        <p:txBody>
-          <a:bodyPr wrap="square" anchor="ctr"/>
-          <a:lstStyle/>
-          <a:p>
-            <a:r>
-              <a:rPr sz="1500" b="1" i="0">
+              <a:rPr sz="1300" b="1" i="0">
                 <a:solidFill>
                   <a:srgbClr val="095292"/>
                 </a:solidFill>
                 <a:latin typeface="Calibri"/>
               </a:rPr>
-              <a:t>Redactar 1 pagina: politica de altas/bajas de usuarios, con la prueba negativa (SET ROLE) corrida y su mensaje de error.</a:t>
-            </a:r>
-          </a:p>
-        </p:txBody>
-      </p:sp>
-      <p:sp>
-        <p:nvSpPr>
-          <p:cNvPr id="21" name="TextBox 20"/>
+              <a:t>Oracle Live SQL</a:t>
+            </a:r>
+          </a:p>
+          <a:p>
+            <a:pPr algn="ctr">
+              <a:spcBef>
+                <a:spcPts val="200"/>
+              </a:spcBef>
+            </a:pPr>
+            <a:r>
+              <a:rPr sz="1000" b="0" i="0">
+                <a:solidFill>
+                  <a:srgbClr val="666666"/>
+                </a:solidFill>
+                <a:latin typeface="Calibri"/>
+              </a:rPr>
+              <a:t>Solo contraste</a:t>
+            </a:r>
+          </a:p>
+        </p:txBody>
+      </p:sp>
+      <p:sp>
+        <p:nvSpPr>
+          <p:cNvPr id="26" name="TextBox 25"/>
           <p:cNvSpPr txBox="1"/>
           <p:nvPr/>
         </p:nvSpPr>
@@ -17469,154 +17656,21 @@
                 </a:solidFill>
                 <a:latin typeface="Calibri"/>
               </a:rPr>
-              <a:t>Taller PI VetCare — pistas (checklist vacio)</a:t>
-            </a:r>
-          </a:p>
-        </p:txBody>
-      </p:sp>
-      <p:sp>
-        <p:nvSpPr>
-          <p:cNvPr id="5" name="Rounded Rectangle 4"/>
-          <p:cNvSpPr/>
-          <p:nvPr/>
-        </p:nvSpPr>
-        <p:spPr>
-          <a:xfrm>
-            <a:off x="457200" y="1261872"/>
-            <a:ext cx="11277295" cy="566928"/>
-          </a:xfrm>
-          <a:prstGeom prst="roundRect">
-            <a:avLst>
-              <a:gd name="adj" fmla="val 12000"/>
-            </a:avLst>
-          </a:prstGeom>
-          <a:solidFill>
-            <a:srgbClr val="F2F2F2"/>
-          </a:solidFill>
-          <a:ln>
-            <a:noFill/>
-          </a:ln>
-        </p:spPr>
-        <p:style>
-          <a:lnRef idx="1">
-            <a:schemeClr val="accent1"/>
-          </a:lnRef>
-          <a:fillRef idx="3">
-            <a:schemeClr val="accent1"/>
-          </a:fillRef>
-          <a:effectRef idx="2">
-            <a:schemeClr val="accent1"/>
-          </a:effectRef>
-          <a:fontRef idx="minor">
-            <a:schemeClr val="lt1"/>
-          </a:fontRef>
-        </p:style>
-        <p:txBody>
-          <a:bodyPr rtlCol="0" anchor="ctr"/>
-          <a:lstStyle/>
-          <a:p>
-            <a:pPr algn="ctr"/>
-          </a:p>
-        </p:txBody>
-      </p:sp>
-      <p:sp>
-        <p:nvSpPr>
-          <p:cNvPr id="6" name="Rectangle 5"/>
-          <p:cNvSpPr/>
-          <p:nvPr/>
-        </p:nvSpPr>
-        <p:spPr>
-          <a:xfrm>
-            <a:off x="640080" y="1408175"/>
-            <a:ext cx="274320" cy="274320"/>
-          </a:xfrm>
-          <a:prstGeom prst="rect">
-            <a:avLst/>
-          </a:prstGeom>
-          <a:solidFill>
-            <a:srgbClr val="FFFFFF"/>
-          </a:solidFill>
-          <a:ln>
-            <a:solidFill>
-              <a:srgbClr val="333333"/>
-            </a:solidFill>
-          </a:ln>
-        </p:spPr>
-        <p:style>
-          <a:lnRef idx="1">
-            <a:schemeClr val="accent1"/>
-          </a:lnRef>
-          <a:fillRef idx="3">
-            <a:schemeClr val="accent1"/>
-          </a:fillRef>
-          <a:effectRef idx="2">
-            <a:schemeClr val="accent1"/>
-          </a:effectRef>
-          <a:fontRef idx="minor">
-            <a:schemeClr val="lt1"/>
-          </a:fontRef>
-        </p:style>
-        <p:txBody>
-          <a:bodyPr rtlCol="0" anchor="ctr"/>
-          <a:lstStyle/>
-          <a:p>
-            <a:pPr algn="ctr"/>
-          </a:p>
-        </p:txBody>
-      </p:sp>
-      <p:sp>
-        <p:nvSpPr>
-          <p:cNvPr id="7" name="Rectangle 6"/>
-          <p:cNvSpPr/>
-          <p:nvPr/>
-        </p:nvSpPr>
-        <p:spPr>
-          <a:xfrm>
-            <a:off x="640080" y="1408175"/>
-            <a:ext cx="73152" cy="274320"/>
-          </a:xfrm>
-          <a:prstGeom prst="rect">
-            <a:avLst/>
-          </a:prstGeom>
-          <a:solidFill>
-            <a:srgbClr val="269CCB"/>
-          </a:solidFill>
-          <a:ln>
-            <a:noFill/>
-          </a:ln>
-        </p:spPr>
-        <p:style>
-          <a:lnRef idx="1">
-            <a:schemeClr val="accent1"/>
-          </a:lnRef>
-          <a:fillRef idx="3">
-            <a:schemeClr val="accent1"/>
-          </a:fillRef>
-          <a:effectRef idx="2">
-            <a:schemeClr val="accent1"/>
-          </a:effectRef>
-          <a:fontRef idx="minor">
-            <a:schemeClr val="lt1"/>
-          </a:fontRef>
-        </p:style>
-        <p:txBody>
-          <a:bodyPr rtlCol="0" anchor="ctr"/>
-          <a:lstStyle/>
-          <a:p>
-            <a:pPr algn="ctr"/>
-          </a:p>
-        </p:txBody>
-      </p:sp>
-      <p:sp>
-        <p:nvSpPr>
-          <p:cNvPr id="8" name="TextBox 7"/>
+              <a:t>Taller PI VetCare — contexto / por que importa</a:t>
+            </a:r>
+          </a:p>
+        </p:txBody>
+      </p:sp>
+      <p:sp>
+        <p:nvSpPr>
+          <p:cNvPr id="5" name="TextBox 4"/>
           <p:cNvSpPr txBox="1"/>
           <p:nvPr/>
         </p:nvSpPr>
         <p:spPr>
           <a:xfrm>
-            <a:off x="1097280" y="1353312"/>
-            <a:ext cx="10362895" cy="402336"/>
+            <a:off x="457200" y="1170432"/>
+            <a:ext cx="11277295" cy="5230368"/>
           </a:xfrm>
           <a:prstGeom prst="rect">
             <a:avLst/>
@@ -17624,849 +17678,99 @@
           <a:noFill/>
         </p:spPr>
         <p:txBody>
-          <a:bodyPr wrap="square" anchor="ctr"/>
-          <a:lstStyle/>
-          <a:p>
-            <a:r>
-              <a:rPr sz="1500" b="0" i="0">
+          <a:bodyPr wrap="square">
+            <a:spAutoFit/>
+          </a:bodyPr>
+          <a:lstStyle/>
+          <a:p>
+            <a:pPr>
+              <a:spcAft>
+                <a:spcPts val="800"/>
+              </a:spcAft>
+            </a:pPr>
+            <a:r>
+              <a:rPr sz="2000" b="0" i="0">
                 <a:solidFill>
                   <a:srgbClr val="333333"/>
                 </a:solidFill>
                 <a:latin typeface="Calibri"/>
               </a:rPr>
-              <a:t>□ ¿Los 4 roles con el nombre exacto, en minúscula y con «veterinario_rol»?</a:t>
-            </a:r>
-          </a:p>
-        </p:txBody>
-      </p:sp>
-      <p:sp>
-        <p:nvSpPr>
-          <p:cNvPr id="9" name="Rounded Rectangle 8"/>
-          <p:cNvSpPr/>
-          <p:nvPr/>
-        </p:nvSpPr>
-        <p:spPr>
-          <a:xfrm>
-            <a:off x="457200" y="1938528"/>
-            <a:ext cx="11277295" cy="566928"/>
-          </a:xfrm>
-          <a:prstGeom prst="roundRect">
-            <a:avLst>
-              <a:gd name="adj" fmla="val 12000"/>
-            </a:avLst>
-          </a:prstGeom>
-          <a:solidFill>
-            <a:srgbClr val="F2F2F2"/>
-          </a:solidFill>
-          <a:ln>
-            <a:noFill/>
-          </a:ln>
-        </p:spPr>
-        <p:style>
-          <a:lnRef idx="1">
-            <a:schemeClr val="accent1"/>
-          </a:lnRef>
-          <a:fillRef idx="3">
-            <a:schemeClr val="accent1"/>
-          </a:fillRef>
-          <a:effectRef idx="2">
-            <a:schemeClr val="accent1"/>
-          </a:effectRef>
-          <a:fontRef idx="minor">
-            <a:schemeClr val="lt1"/>
-          </a:fontRef>
-        </p:style>
-        <p:txBody>
-          <a:bodyPr rtlCol="0" anchor="ctr"/>
-          <a:lstStyle/>
-          <a:p>
-            <a:pPr algn="ctr"/>
-          </a:p>
-        </p:txBody>
-      </p:sp>
-      <p:sp>
-        <p:nvSpPr>
-          <p:cNvPr id="10" name="Rectangle 9"/>
-          <p:cNvSpPr/>
-          <p:nvPr/>
-        </p:nvSpPr>
-        <p:spPr>
-          <a:xfrm>
-            <a:off x="640080" y="2084832"/>
-            <a:ext cx="274320" cy="274320"/>
-          </a:xfrm>
-          <a:prstGeom prst="rect">
-            <a:avLst/>
-          </a:prstGeom>
-          <a:solidFill>
-            <a:srgbClr val="FFFFFF"/>
-          </a:solidFill>
-          <a:ln>
-            <a:solidFill>
-              <a:srgbClr val="333333"/>
-            </a:solidFill>
-          </a:ln>
-        </p:spPr>
-        <p:style>
-          <a:lnRef idx="1">
-            <a:schemeClr val="accent1"/>
-          </a:lnRef>
-          <a:fillRef idx="3">
-            <a:schemeClr val="accent1"/>
-          </a:fillRef>
-          <a:effectRef idx="2">
-            <a:schemeClr val="accent1"/>
-          </a:effectRef>
-          <a:fontRef idx="minor">
-            <a:schemeClr val="lt1"/>
-          </a:fontRef>
-        </p:style>
-        <p:txBody>
-          <a:bodyPr rtlCol="0" anchor="ctr"/>
-          <a:lstStyle/>
-          <a:p>
-            <a:pPr algn="ctr"/>
-          </a:p>
-        </p:txBody>
-      </p:sp>
-      <p:sp>
-        <p:nvSpPr>
-          <p:cNvPr id="11" name="Rectangle 10"/>
-          <p:cNvSpPr/>
-          <p:nvPr/>
-        </p:nvSpPr>
-        <p:spPr>
-          <a:xfrm>
-            <a:off x="640080" y="2084832"/>
-            <a:ext cx="73152" cy="274320"/>
-          </a:xfrm>
-          <a:prstGeom prst="rect">
-            <a:avLst/>
-          </a:prstGeom>
-          <a:solidFill>
-            <a:srgbClr val="269CCB"/>
-          </a:solidFill>
-          <a:ln>
-            <a:noFill/>
-          </a:ln>
-        </p:spPr>
-        <p:style>
-          <a:lnRef idx="1">
-            <a:schemeClr val="accent1"/>
-          </a:lnRef>
-          <a:fillRef idx="3">
-            <a:schemeClr val="accent1"/>
-          </a:fillRef>
-          <a:effectRef idx="2">
-            <a:schemeClr val="accent1"/>
-          </a:effectRef>
-          <a:fontRef idx="minor">
-            <a:schemeClr val="lt1"/>
-          </a:fontRef>
-        </p:style>
-        <p:txBody>
-          <a:bodyPr rtlCol="0" anchor="ctr"/>
-          <a:lstStyle/>
-          <a:p>
-            <a:pPr algn="ctr"/>
-          </a:p>
-        </p:txBody>
-      </p:sp>
-      <p:sp>
-        <p:nvSpPr>
-          <p:cNvPr id="12" name="TextBox 11"/>
-          <p:cNvSpPr txBox="1"/>
-          <p:nvPr/>
-        </p:nvSpPr>
-        <p:spPr>
-          <a:xfrm>
-            <a:off x="1097280" y="2029968"/>
-            <a:ext cx="10362895" cy="402336"/>
-          </a:xfrm>
-          <a:prstGeom prst="rect">
-            <a:avLst/>
-          </a:prstGeom>
-          <a:noFill/>
-        </p:spPr>
-        <p:txBody>
-          <a:bodyPr wrap="square" anchor="ctr"/>
-          <a:lstStyle/>
-          <a:p>
-            <a:r>
-              <a:rPr sz="1500" b="0" i="0">
+              <a:t>–   </a:t>
+            </a:r>
+            <a:r>
+              <a:rPr sz="2000" b="1" i="0">
                 <a:solidFill>
                   <a:srgbClr val="333333"/>
                 </a:solidFill>
                 <a:latin typeface="Calibri"/>
               </a:rPr>
-              <a:t>□ ¿«recepcion» sin DELETE en ninguna tabla, y el REVOKE escrito aunque sea redundante?</a:t>
-            </a:r>
-          </a:p>
-        </p:txBody>
-      </p:sp>
-      <p:sp>
-        <p:nvSpPr>
-          <p:cNvPr id="13" name="Rounded Rectangle 12"/>
-          <p:cNvSpPr/>
-          <p:nvPr/>
-        </p:nvSpPr>
-        <p:spPr>
-          <a:xfrm>
-            <a:off x="457200" y="2615184"/>
-            <a:ext cx="11277295" cy="566928"/>
-          </a:xfrm>
-          <a:prstGeom prst="roundRect">
-            <a:avLst>
-              <a:gd name="adj" fmla="val 12000"/>
-            </a:avLst>
-          </a:prstGeom>
-          <a:solidFill>
-            <a:srgbClr val="F2F2F2"/>
-          </a:solidFill>
-          <a:ln>
-            <a:noFill/>
-          </a:ln>
-        </p:spPr>
-        <p:style>
-          <a:lnRef idx="1">
-            <a:schemeClr val="accent1"/>
-          </a:lnRef>
-          <a:fillRef idx="3">
-            <a:schemeClr val="accent1"/>
-          </a:fillRef>
-          <a:effectRef idx="2">
-            <a:schemeClr val="accent1"/>
-          </a:effectRef>
-          <a:fontRef idx="minor">
-            <a:schemeClr val="lt1"/>
-          </a:fontRef>
-        </p:style>
-        <p:txBody>
-          <a:bodyPr rtlCol="0" anchor="ctr"/>
-          <a:lstStyle/>
-          <a:p>
-            <a:pPr algn="ctr"/>
-          </a:p>
-        </p:txBody>
-      </p:sp>
-      <p:sp>
-        <p:nvSpPr>
-          <p:cNvPr id="14" name="Rectangle 13"/>
-          <p:cNvSpPr/>
-          <p:nvPr/>
-        </p:nvSpPr>
-        <p:spPr>
-          <a:xfrm>
-            <a:off x="640080" y="2761488"/>
-            <a:ext cx="274320" cy="274320"/>
-          </a:xfrm>
-          <a:prstGeom prst="rect">
-            <a:avLst/>
-          </a:prstGeom>
-          <a:solidFill>
-            <a:srgbClr val="FFFFFF"/>
-          </a:solidFill>
-          <a:ln>
-            <a:solidFill>
-              <a:srgbClr val="333333"/>
-            </a:solidFill>
-          </a:ln>
-        </p:spPr>
-        <p:style>
-          <a:lnRef idx="1">
-            <a:schemeClr val="accent1"/>
-          </a:lnRef>
-          <a:fillRef idx="3">
-            <a:schemeClr val="accent1"/>
-          </a:fillRef>
-          <a:effectRef idx="2">
-            <a:schemeClr val="accent1"/>
-          </a:effectRef>
-          <a:fontRef idx="minor">
-            <a:schemeClr val="lt1"/>
-          </a:fontRef>
-        </p:style>
-        <p:txBody>
-          <a:bodyPr rtlCol="0" anchor="ctr"/>
-          <a:lstStyle/>
-          <a:p>
-            <a:pPr algn="ctr"/>
-          </a:p>
-        </p:txBody>
-      </p:sp>
-      <p:sp>
-        <p:nvSpPr>
-          <p:cNvPr id="15" name="Rectangle 14"/>
-          <p:cNvSpPr/>
-          <p:nvPr/>
-        </p:nvSpPr>
-        <p:spPr>
-          <a:xfrm>
-            <a:off x="640080" y="2761488"/>
-            <a:ext cx="73152" cy="274320"/>
-          </a:xfrm>
-          <a:prstGeom prst="rect">
-            <a:avLst/>
-          </a:prstGeom>
-          <a:solidFill>
-            <a:srgbClr val="269CCB"/>
-          </a:solidFill>
-          <a:ln>
-            <a:noFill/>
-          </a:ln>
-        </p:spPr>
-        <p:style>
-          <a:lnRef idx="1">
-            <a:schemeClr val="accent1"/>
-          </a:lnRef>
-          <a:fillRef idx="3">
-            <a:schemeClr val="accent1"/>
-          </a:fillRef>
-          <a:effectRef idx="2">
-            <a:schemeClr val="accent1"/>
-          </a:effectRef>
-          <a:fontRef idx="minor">
-            <a:schemeClr val="lt1"/>
-          </a:fontRef>
-        </p:style>
-        <p:txBody>
-          <a:bodyPr rtlCol="0" anchor="ctr"/>
-          <a:lstStyle/>
-          <a:p>
-            <a:pPr algn="ctr"/>
-          </a:p>
-        </p:txBody>
-      </p:sp>
-      <p:sp>
-        <p:nvSpPr>
-          <p:cNvPr id="16" name="TextBox 15"/>
-          <p:cNvSpPr txBox="1"/>
-          <p:nvPr/>
-        </p:nvSpPr>
-        <p:spPr>
-          <a:xfrm>
-            <a:off x="1097280" y="2706624"/>
-            <a:ext cx="10362895" cy="402336"/>
-          </a:xfrm>
-          <a:prstGeom prst="rect">
-            <a:avLst/>
-          </a:prstGeom>
-          <a:noFill/>
-        </p:spPr>
-        <p:txBody>
-          <a:bodyPr wrap="square" anchor="ctr"/>
-          <a:lstStyle/>
-          <a:p>
-            <a:r>
-              <a:rPr sz="1500" b="0" i="0">
+              <a:t>Por qué importa al PI:</a:t>
+            </a:r>
+            <a:r>
+              <a:rPr sz="2000" b="0" i="0">
                 <a:solidFill>
                   <a:srgbClr val="333333"/>
                 </a:solidFill>
                 <a:latin typeface="Calibri"/>
               </a:rPr>
-              <a:t>□ ¿«auditor» solo con SELECT?</a:t>
-            </a:r>
-          </a:p>
-        </p:txBody>
-      </p:sp>
-      <p:sp>
-        <p:nvSpPr>
-          <p:cNvPr id="17" name="Rounded Rectangle 16"/>
-          <p:cNvSpPr/>
-          <p:nvPr/>
-        </p:nvSpPr>
-        <p:spPr>
-          <a:xfrm>
-            <a:off x="457200" y="3291840"/>
-            <a:ext cx="11277295" cy="566928"/>
-          </a:xfrm>
-          <a:prstGeom prst="roundRect">
-            <a:avLst>
-              <a:gd name="adj" fmla="val 12000"/>
-            </a:avLst>
-          </a:prstGeom>
-          <a:solidFill>
-            <a:srgbClr val="F2F2F2"/>
-          </a:solidFill>
-          <a:ln>
-            <a:noFill/>
-          </a:ln>
-        </p:spPr>
-        <p:style>
-          <a:lnRef idx="1">
-            <a:schemeClr val="accent1"/>
-          </a:lnRef>
-          <a:fillRef idx="3">
-            <a:schemeClr val="accent1"/>
-          </a:fillRef>
-          <a:effectRef idx="2">
-            <a:schemeClr val="accent1"/>
-          </a:effectRef>
-          <a:fontRef idx="minor">
-            <a:schemeClr val="lt1"/>
-          </a:fontRef>
-        </p:style>
-        <p:txBody>
-          <a:bodyPr rtlCol="0" anchor="ctr"/>
-          <a:lstStyle/>
-          <a:p>
-            <a:pPr algn="ctr"/>
-          </a:p>
-        </p:txBody>
-      </p:sp>
-      <p:sp>
-        <p:nvSpPr>
-          <p:cNvPr id="18" name="Rectangle 17"/>
-          <p:cNvSpPr/>
-          <p:nvPr/>
-        </p:nvSpPr>
-        <p:spPr>
-          <a:xfrm>
-            <a:off x="640080" y="3438144"/>
-            <a:ext cx="274320" cy="274320"/>
-          </a:xfrm>
-          <a:prstGeom prst="rect">
-            <a:avLst/>
-          </a:prstGeom>
-          <a:solidFill>
-            <a:srgbClr val="FFFFFF"/>
-          </a:solidFill>
-          <a:ln>
-            <a:solidFill>
-              <a:srgbClr val="333333"/>
-            </a:solidFill>
-          </a:ln>
-        </p:spPr>
-        <p:style>
-          <a:lnRef idx="1">
-            <a:schemeClr val="accent1"/>
-          </a:lnRef>
-          <a:fillRef idx="3">
-            <a:schemeClr val="accent1"/>
-          </a:fillRef>
-          <a:effectRef idx="2">
-            <a:schemeClr val="accent1"/>
-          </a:effectRef>
-          <a:fontRef idx="minor">
-            <a:schemeClr val="lt1"/>
-          </a:fontRef>
-        </p:style>
-        <p:txBody>
-          <a:bodyPr rtlCol="0" anchor="ctr"/>
-          <a:lstStyle/>
-          <a:p>
-            <a:pPr algn="ctr"/>
-          </a:p>
-        </p:txBody>
-      </p:sp>
-      <p:sp>
-        <p:nvSpPr>
-          <p:cNvPr id="19" name="Rectangle 18"/>
-          <p:cNvSpPr/>
-          <p:nvPr/>
-        </p:nvSpPr>
-        <p:spPr>
-          <a:xfrm>
-            <a:off x="640080" y="3438144"/>
-            <a:ext cx="73152" cy="274320"/>
-          </a:xfrm>
-          <a:prstGeom prst="rect">
-            <a:avLst/>
-          </a:prstGeom>
-          <a:solidFill>
-            <a:srgbClr val="269CCB"/>
-          </a:solidFill>
-          <a:ln>
-            <a:noFill/>
-          </a:ln>
-        </p:spPr>
-        <p:style>
-          <a:lnRef idx="1">
-            <a:schemeClr val="accent1"/>
-          </a:lnRef>
-          <a:fillRef idx="3">
-            <a:schemeClr val="accent1"/>
-          </a:fillRef>
-          <a:effectRef idx="2">
-            <a:schemeClr val="accent1"/>
-          </a:effectRef>
-          <a:fontRef idx="minor">
-            <a:schemeClr val="lt1"/>
-          </a:fontRef>
-        </p:style>
-        <p:txBody>
-          <a:bodyPr rtlCol="0" anchor="ctr"/>
-          <a:lstStyle/>
-          <a:p>
-            <a:pPr algn="ctr"/>
-          </a:p>
-        </p:txBody>
-      </p:sp>
-      <p:sp>
-        <p:nvSpPr>
-          <p:cNvPr id="20" name="TextBox 19"/>
-          <p:cNvSpPr txBox="1"/>
-          <p:nvPr/>
-        </p:nvSpPr>
-        <p:spPr>
-          <a:xfrm>
-            <a:off x="1097280" y="3383280"/>
-            <a:ext cx="10362895" cy="402336"/>
-          </a:xfrm>
-          <a:prstGeom prst="rect">
-            <a:avLst/>
-          </a:prstGeom>
-          <a:noFill/>
-        </p:spPr>
-        <p:txBody>
-          <a:bodyPr wrap="square" anchor="ctr"/>
-          <a:lstStyle/>
-          <a:p>
-            <a:r>
-              <a:rPr sz="1500" b="0" i="0">
+              <a:t> la seguridad de VetCare DB es un criterio de la rúbrica, y la evidencia son los roles y su matriz — no una promesa.</a:t>
+            </a:r>
+          </a:p>
+          <a:p>
+            <a:pPr>
+              <a:spcAft>
+                <a:spcPts val="800"/>
+              </a:spcAft>
+            </a:pPr>
+            <a:r>
+              <a:rPr sz="2000" b="0" i="0">
                 <a:solidFill>
                   <a:srgbClr val="333333"/>
                 </a:solidFill>
                 <a:latin typeface="Calibri"/>
               </a:rPr>
-              <a:t>□ ¿La vista deja fuera el email, y «column_privileges» devuelve exactamente 2 filas?</a:t>
-            </a:r>
-          </a:p>
-        </p:txBody>
-      </p:sp>
-      <p:sp>
-        <p:nvSpPr>
-          <p:cNvPr id="21" name="Rounded Rectangle 20"/>
-          <p:cNvSpPr/>
-          <p:nvPr/>
-        </p:nvSpPr>
-        <p:spPr>
-          <a:xfrm>
-            <a:off x="457200" y="3968496"/>
-            <a:ext cx="11277295" cy="566928"/>
-          </a:xfrm>
-          <a:prstGeom prst="roundRect">
-            <a:avLst>
-              <a:gd name="adj" fmla="val 12000"/>
-            </a:avLst>
-          </a:prstGeom>
-          <a:solidFill>
-            <a:srgbClr val="F2F2F2"/>
-          </a:solidFill>
-          <a:ln>
-            <a:noFill/>
-          </a:ln>
-        </p:spPr>
-        <p:style>
-          <a:lnRef idx="1">
-            <a:schemeClr val="accent1"/>
-          </a:lnRef>
-          <a:fillRef idx="3">
-            <a:schemeClr val="accent1"/>
-          </a:fillRef>
-          <a:effectRef idx="2">
-            <a:schemeClr val="accent1"/>
-          </a:effectRef>
-          <a:fontRef idx="minor">
-            <a:schemeClr val="lt1"/>
-          </a:fontRef>
-        </p:style>
-        <p:txBody>
-          <a:bodyPr rtlCol="0" anchor="ctr"/>
-          <a:lstStyle/>
-          <a:p>
-            <a:pPr algn="ctr"/>
-          </a:p>
-        </p:txBody>
-      </p:sp>
-      <p:sp>
-        <p:nvSpPr>
-          <p:cNvPr id="22" name="Rectangle 21"/>
-          <p:cNvSpPr/>
-          <p:nvPr/>
-        </p:nvSpPr>
-        <p:spPr>
-          <a:xfrm>
-            <a:off x="640080" y="4114800"/>
-            <a:ext cx="274320" cy="274320"/>
-          </a:xfrm>
-          <a:prstGeom prst="rect">
-            <a:avLst/>
-          </a:prstGeom>
-          <a:solidFill>
-            <a:srgbClr val="FFFFFF"/>
-          </a:solidFill>
-          <a:ln>
-            <a:solidFill>
-              <a:srgbClr val="333333"/>
-            </a:solidFill>
-          </a:ln>
-        </p:spPr>
-        <p:style>
-          <a:lnRef idx="1">
-            <a:schemeClr val="accent1"/>
-          </a:lnRef>
-          <a:fillRef idx="3">
-            <a:schemeClr val="accent1"/>
-          </a:fillRef>
-          <a:effectRef idx="2">
-            <a:schemeClr val="accent1"/>
-          </a:effectRef>
-          <a:fontRef idx="minor">
-            <a:schemeClr val="lt1"/>
-          </a:fontRef>
-        </p:style>
-        <p:txBody>
-          <a:bodyPr rtlCol="0" anchor="ctr"/>
-          <a:lstStyle/>
-          <a:p>
-            <a:pPr algn="ctr"/>
-          </a:p>
-        </p:txBody>
-      </p:sp>
-      <p:sp>
-        <p:nvSpPr>
-          <p:cNvPr id="23" name="Rectangle 22"/>
-          <p:cNvSpPr/>
-          <p:nvPr/>
-        </p:nvSpPr>
-        <p:spPr>
-          <a:xfrm>
-            <a:off x="640080" y="4114800"/>
-            <a:ext cx="73152" cy="274320"/>
-          </a:xfrm>
-          <a:prstGeom prst="rect">
-            <a:avLst/>
-          </a:prstGeom>
-          <a:solidFill>
-            <a:srgbClr val="269CCB"/>
-          </a:solidFill>
-          <a:ln>
-            <a:noFill/>
-          </a:ln>
-        </p:spPr>
-        <p:style>
-          <a:lnRef idx="1">
-            <a:schemeClr val="accent1"/>
-          </a:lnRef>
-          <a:fillRef idx="3">
-            <a:schemeClr val="accent1"/>
-          </a:fillRef>
-          <a:effectRef idx="2">
-            <a:schemeClr val="accent1"/>
-          </a:effectRef>
-          <a:fontRef idx="minor">
-            <a:schemeClr val="lt1"/>
-          </a:fontRef>
-        </p:style>
-        <p:txBody>
-          <a:bodyPr rtlCol="0" anchor="ctr"/>
-          <a:lstStyle/>
-          <a:p>
-            <a:pPr algn="ctr"/>
-          </a:p>
-        </p:txBody>
-      </p:sp>
-      <p:sp>
-        <p:nvSpPr>
-          <p:cNvPr id="24" name="TextBox 23"/>
-          <p:cNvSpPr txBox="1"/>
-          <p:nvPr/>
-        </p:nvSpPr>
-        <p:spPr>
-          <a:xfrm>
-            <a:off x="1097280" y="4059936"/>
-            <a:ext cx="10362895" cy="402336"/>
-          </a:xfrm>
-          <a:prstGeom prst="rect">
-            <a:avLst/>
-          </a:prstGeom>
-          <a:noFill/>
-        </p:spPr>
-        <p:txBody>
-          <a:bodyPr wrap="square" anchor="ctr"/>
-          <a:lstStyle/>
-          <a:p>
-            <a:r>
-              <a:rPr sz="1500" b="0" i="0">
+              <a:t>–   Mínimo privilegio evita que Recepción borre historia clínica: cancelar una cita es un </a:t>
+            </a:r>
+            <a:r>
+              <a:rPr sz="2000" b="1" i="0">
                 <a:solidFill>
                   <a:srgbClr val="333333"/>
                 </a:solidFill>
                 <a:latin typeface="Calibri"/>
               </a:rPr>
-              <a:t>□ ¿La matriz tiene las 10 filas llenas y los «sp_» con E, no con S ni I?</a:t>
-            </a:r>
-          </a:p>
-        </p:txBody>
-      </p:sp>
-      <p:sp>
-        <p:nvSpPr>
-          <p:cNvPr id="25" name="Rounded Rectangle 24"/>
-          <p:cNvSpPr/>
-          <p:nvPr/>
-        </p:nvSpPr>
-        <p:spPr>
-          <a:xfrm>
-            <a:off x="457200" y="4645152"/>
-            <a:ext cx="11277295" cy="566928"/>
-          </a:xfrm>
-          <a:prstGeom prst="roundRect">
-            <a:avLst>
-              <a:gd name="adj" fmla="val 12000"/>
-            </a:avLst>
-          </a:prstGeom>
-          <a:solidFill>
-            <a:srgbClr val="F2F2F2"/>
-          </a:solidFill>
-          <a:ln>
-            <a:noFill/>
-          </a:ln>
-        </p:spPr>
-        <p:style>
-          <a:lnRef idx="1">
-            <a:schemeClr val="accent1"/>
-          </a:lnRef>
-          <a:fillRef idx="3">
-            <a:schemeClr val="accent1"/>
-          </a:fillRef>
-          <a:effectRef idx="2">
-            <a:schemeClr val="accent1"/>
-          </a:effectRef>
-          <a:fontRef idx="minor">
-            <a:schemeClr val="lt1"/>
-          </a:fontRef>
-        </p:style>
-        <p:txBody>
-          <a:bodyPr rtlCol="0" anchor="ctr"/>
-          <a:lstStyle/>
-          <a:p>
-            <a:pPr algn="ctr"/>
-          </a:p>
-        </p:txBody>
-      </p:sp>
-      <p:sp>
-        <p:nvSpPr>
-          <p:cNvPr id="26" name="Rectangle 25"/>
-          <p:cNvSpPr/>
-          <p:nvPr/>
-        </p:nvSpPr>
-        <p:spPr>
-          <a:xfrm>
-            <a:off x="640080" y="4791456"/>
-            <a:ext cx="274320" cy="274320"/>
-          </a:xfrm>
-          <a:prstGeom prst="rect">
-            <a:avLst/>
-          </a:prstGeom>
-          <a:solidFill>
-            <a:srgbClr val="FFFFFF"/>
-          </a:solidFill>
-          <a:ln>
-            <a:solidFill>
-              <a:srgbClr val="333333"/>
-            </a:solidFill>
-          </a:ln>
-        </p:spPr>
-        <p:style>
-          <a:lnRef idx="1">
-            <a:schemeClr val="accent1"/>
-          </a:lnRef>
-          <a:fillRef idx="3">
-            <a:schemeClr val="accent1"/>
-          </a:fillRef>
-          <a:effectRef idx="2">
-            <a:schemeClr val="accent1"/>
-          </a:effectRef>
-          <a:fontRef idx="minor">
-            <a:schemeClr val="lt1"/>
-          </a:fontRef>
-        </p:style>
-        <p:txBody>
-          <a:bodyPr rtlCol="0" anchor="ctr"/>
-          <a:lstStyle/>
-          <a:p>
-            <a:pPr algn="ctr"/>
-          </a:p>
-        </p:txBody>
-      </p:sp>
-      <p:sp>
-        <p:nvSpPr>
-          <p:cNvPr id="27" name="Rectangle 26"/>
-          <p:cNvSpPr/>
-          <p:nvPr/>
-        </p:nvSpPr>
-        <p:spPr>
-          <a:xfrm>
-            <a:off x="640080" y="4791456"/>
-            <a:ext cx="73152" cy="274320"/>
-          </a:xfrm>
-          <a:prstGeom prst="rect">
-            <a:avLst/>
-          </a:prstGeom>
-          <a:solidFill>
-            <a:srgbClr val="269CCB"/>
-          </a:solidFill>
-          <a:ln>
-            <a:noFill/>
-          </a:ln>
-        </p:spPr>
-        <p:style>
-          <a:lnRef idx="1">
-            <a:schemeClr val="accent1"/>
-          </a:lnRef>
-          <a:fillRef idx="3">
-            <a:schemeClr val="accent1"/>
-          </a:fillRef>
-          <a:effectRef idx="2">
-            <a:schemeClr val="accent1"/>
-          </a:effectRef>
-          <a:fontRef idx="minor">
-            <a:schemeClr val="lt1"/>
-          </a:fontRef>
-        </p:style>
-        <p:txBody>
-          <a:bodyPr rtlCol="0" anchor="ctr"/>
-          <a:lstStyle/>
-          <a:p>
-            <a:pPr algn="ctr"/>
-          </a:p>
-        </p:txBody>
-      </p:sp>
-      <p:sp>
-        <p:nvSpPr>
-          <p:cNvPr id="28" name="TextBox 27"/>
-          <p:cNvSpPr txBox="1"/>
-          <p:nvPr/>
-        </p:nvSpPr>
-        <p:spPr>
-          <a:xfrm>
-            <a:off x="1097280" y="4736592"/>
-            <a:ext cx="10362895" cy="402336"/>
-          </a:xfrm>
-          <a:prstGeom prst="rect">
-            <a:avLst/>
-          </a:prstGeom>
-          <a:noFill/>
-        </p:spPr>
-        <p:txBody>
-          <a:bodyPr wrap="square" anchor="ctr"/>
-          <a:lstStyle/>
-          <a:p>
-            <a:r>
-              <a:rPr sz="1500" b="0" i="0">
+              <a:t>UPDATE de estado</a:t>
+            </a:r>
+            <a:r>
+              <a:rPr sz="2000" b="0" i="0">
                 <a:solidFill>
                   <a:srgbClr val="333333"/>
                 </a:solidFill>
                 <a:latin typeface="Calibri"/>
               </a:rPr>
-              <a:t>□ ¿La política dice quién aprueba y en cuánto tiempo, y trae la prueba negativa con «SET ROLE»?</a:t>
-            </a:r>
-          </a:p>
-        </p:txBody>
-      </p:sp>
-      <p:sp>
-        <p:nvSpPr>
-          <p:cNvPr id="29" name="TextBox 28"/>
+              <a:t>, nunca un DELETE.</a:t>
+            </a:r>
+          </a:p>
+          <a:p>
+            <a:pPr>
+              <a:spcAft>
+                <a:spcPts val="800"/>
+              </a:spcAft>
+            </a:pPr>
+            <a:r>
+              <a:rPr sz="2000" b="0" i="0">
+                <a:solidFill>
+                  <a:srgbClr val="333333"/>
+                </a:solidFill>
+                <a:latin typeface="Calibri"/>
+              </a:rPr>
+              <a:t>–   Los «GRANT» de hoy corren de verdad y se auditan con «information_schema»: la matriz que entregas tiene que decir lo mismo que ejecutó el motor.</a:t>
+            </a:r>
+          </a:p>
+        </p:txBody>
+      </p:sp>
+      <p:sp>
+        <p:nvSpPr>
+          <p:cNvPr id="6" name="TextBox 5"/>
           <p:cNvSpPr txBox="1"/>
           <p:nvPr/>
         </p:nvSpPr>
@@ -18640,7 +17944,7 @@
                 </a:solidFill>
                 <a:latin typeface="Calibri"/>
               </a:rPr>
-              <a:t>Criterios de exito / entregable</a:t>
+              <a:t>Taller PI VetCare — objetivo y criterios</a:t>
             </a:r>
           </a:p>
         </p:txBody>
@@ -18688,7 +17992,7 @@
                 </a:solidFill>
                 <a:latin typeface="Calibri"/>
               </a:rPr>
-              <a:t>Entregable:</a:t>
+              <a:t>Objetivo:</a:t>
             </a:r>
             <a:r>
               <a:rPr sz="2000" b="0" i="0">
@@ -18697,7 +18001,7 @@
                 </a:solidFill>
                 <a:latin typeface="Calibri"/>
               </a:rPr>
-              <a:t> Documento Roles_VetCare + script GRANT/REVOKE ejecutado en la plataforma del curso</a:t>
+              <a:t> Los 4 roles de VetCare creados y verificados, más la matriz rol x objeto y la política de altas y bajas.</a:t>
             </a:r>
           </a:p>
           <a:p>
@@ -18713,7 +18017,25 @@
                 </a:solidFill>
                 <a:latin typeface="Calibri"/>
               </a:rPr>
-              <a:t>–   Evidencia: el SQL y su salida quedan guardados en cada pregunta de la plataforma del curso.</a:t>
+              <a:t>–   </a:t>
+            </a:r>
+            <a:r>
+              <a:rPr sz="2000" b="1" i="0">
+                <a:solidFill>
+                  <a:srgbClr val="333333"/>
+                </a:solidFill>
+                <a:latin typeface="Calibri"/>
+              </a:rPr>
+              <a:t>Exito:</a:t>
+            </a:r>
+            <a:r>
+              <a:rPr sz="2000" b="0" i="0">
+                <a:solidFill>
+                  <a:srgbClr val="333333"/>
+                </a:solidFill>
+                <a:latin typeface="Calibri"/>
+              </a:rPr>
+              <a:t> Los 4 roles creados, con sus GRANT y el REVOKE explícito de DELETE.</a:t>
             </a:r>
           </a:p>
           <a:p>
@@ -18729,7 +18051,25 @@
                 </a:solidFill>
                 <a:latin typeface="Calibri"/>
               </a:rPr>
-              <a:t>–   Conserva copia en tu carpeta del PI (los .sql que pide el entregable).</a:t>
+              <a:t>–   </a:t>
+            </a:r>
+            <a:r>
+              <a:rPr sz="2000" b="1" i="0">
+                <a:solidFill>
+                  <a:srgbClr val="333333"/>
+                </a:solidFill>
+                <a:latin typeface="Calibri"/>
+              </a:rPr>
+              <a:t>Exito:</a:t>
+            </a:r>
+            <a:r>
+              <a:rPr sz="2000" b="0" i="0">
+                <a:solidFill>
+                  <a:srgbClr val="333333"/>
+                </a:solidFill>
+                <a:latin typeface="Calibri"/>
+              </a:rPr>
+              <a:t> La matriz real consultada con «information_schema.role_table_grants».</a:t>
             </a:r>
           </a:p>
           <a:p>
@@ -18745,7 +18085,25 @@
                 </a:solidFill>
                 <a:latin typeface="Calibri"/>
               </a:rPr>
-              <a:t>–   Actualizar checklist PI (que criterio de rubrica avanzo).</a:t>
+              <a:t>–   </a:t>
+            </a:r>
+            <a:r>
+              <a:rPr sz="2000" b="1" i="0">
+                <a:solidFill>
+                  <a:srgbClr val="333333"/>
+                </a:solidFill>
+                <a:latin typeface="Calibri"/>
+              </a:rPr>
+              <a:t>Exito:</a:t>
+            </a:r>
+            <a:r>
+              <a:rPr sz="2000" b="0" i="0">
+                <a:solidFill>
+                  <a:srgbClr val="333333"/>
+                </a:solidFill>
+                <a:latin typeface="Calibri"/>
+              </a:rPr>
+              <a:t> Vista «v_agenda_recepcion» sin el email + «GRANT SELECT (id_dueno, nombre)».</a:t>
             </a:r>
           </a:p>
           <a:p>
@@ -18770,7 +18128,7 @@
                 </a:solidFill>
                 <a:latin typeface="Calibri"/>
               </a:rPr>
-              <a:t>Entrega en la plataforma del curso</a:t>
+              <a:t>Exito:</a:t>
             </a:r>
             <a:r>
               <a:rPr sz="2000" b="0" i="0">
@@ -18779,7 +18137,75 @@
                 </a:solidFill>
                 <a:latin typeface="Calibri"/>
               </a:rPr>
-              <a:t> — en la fecha que indique el docente.</a:t>
+              <a:t> Matriz de 10 objetos x 4 roles, sin celdas vacías y consistente con los GRANT.</a:t>
+            </a:r>
+          </a:p>
+          <a:p>
+            <a:pPr>
+              <a:spcAft>
+                <a:spcPts val="800"/>
+              </a:spcAft>
+            </a:pPr>
+            <a:r>
+              <a:rPr sz="2000" b="0" i="0">
+                <a:solidFill>
+                  <a:srgbClr val="333333"/>
+                </a:solidFill>
+                <a:latin typeface="Calibri"/>
+              </a:rPr>
+              <a:t>–   </a:t>
+            </a:r>
+            <a:r>
+              <a:rPr sz="2000" b="1" i="0">
+                <a:solidFill>
+                  <a:srgbClr val="333333"/>
+                </a:solidFill>
+                <a:latin typeface="Calibri"/>
+              </a:rPr>
+              <a:t>Exito:</a:t>
+            </a:r>
+            <a:r>
+              <a:rPr sz="2000" b="0" i="0">
+                <a:solidFill>
+                  <a:srgbClr val="333333"/>
+                </a:solidFill>
+                <a:latin typeface="Calibri"/>
+              </a:rPr>
+              <a:t> Política de 1 página con las 5 secciones, cada una con responsable y plazo.</a:t>
+            </a:r>
+          </a:p>
+          <a:p>
+            <a:pPr>
+              <a:spcAft>
+                <a:spcPts val="800"/>
+              </a:spcAft>
+            </a:pPr>
+            <a:r>
+              <a:rPr sz="2000" b="0" i="0">
+                <a:solidFill>
+                  <a:srgbClr val="333333"/>
+                </a:solidFill>
+                <a:latin typeface="Calibri"/>
+              </a:rPr>
+              <a:t>–   </a:t>
+            </a:r>
+            <a:r>
+              <a:rPr sz="2000" b="1" i="0">
+                <a:solidFill>
+                  <a:srgbClr val="333333"/>
+                </a:solidFill>
+                <a:latin typeface="Calibri"/>
+              </a:rPr>
+              <a:t>Exito:</a:t>
+            </a:r>
+            <a:r>
+              <a:rPr sz="2000" b="0" i="0">
+                <a:solidFill>
+                  <a:srgbClr val="333333"/>
+                </a:solidFill>
+                <a:latin typeface="Calibri"/>
+              </a:rPr>
+              <a:t> Entrega en la fecha que indique el docente.</a:t>
             </a:r>
           </a:p>
         </p:txBody>
@@ -18960,109 +18386,21 @@
                 </a:solidFill>
                 <a:latin typeface="Calibri"/>
               </a:rPr>
-              <a:t>Para el PI esta semana</a:t>
-            </a:r>
-          </a:p>
-        </p:txBody>
-      </p:sp>
-      <p:sp>
-        <p:nvSpPr>
-          <p:cNvPr id="5" name="Rounded Rectangle 4"/>
-          <p:cNvSpPr/>
-          <p:nvPr/>
-        </p:nvSpPr>
-        <p:spPr>
-          <a:xfrm>
-            <a:off x="457200" y="1261872"/>
-            <a:ext cx="11277295" cy="1051560"/>
-          </a:xfrm>
-          <a:prstGeom prst="roundRect">
-            <a:avLst>
-              <a:gd name="adj" fmla="val 12000"/>
-            </a:avLst>
-          </a:prstGeom>
-          <a:solidFill>
-            <a:srgbClr val="E8F4FA"/>
-          </a:solidFill>
-          <a:ln>
-            <a:noFill/>
-          </a:ln>
-        </p:spPr>
-        <p:style>
-          <a:lnRef idx="1">
-            <a:schemeClr val="accent1"/>
-          </a:lnRef>
-          <a:fillRef idx="3">
-            <a:schemeClr val="accent1"/>
-          </a:fillRef>
-          <a:effectRef idx="2">
-            <a:schemeClr val="accent1"/>
-          </a:effectRef>
-          <a:fontRef idx="minor">
-            <a:schemeClr val="lt1"/>
-          </a:fontRef>
-        </p:style>
-        <p:txBody>
-          <a:bodyPr rtlCol="0" anchor="ctr"/>
-          <a:lstStyle/>
-          <a:p>
-            <a:pPr algn="ctr"/>
-          </a:p>
-        </p:txBody>
-      </p:sp>
-      <p:sp>
-        <p:nvSpPr>
-          <p:cNvPr id="6" name="Rectangle 5"/>
-          <p:cNvSpPr/>
-          <p:nvPr/>
-        </p:nvSpPr>
-        <p:spPr>
-          <a:xfrm>
-            <a:off x="457200" y="1261872"/>
-            <a:ext cx="128016" cy="1051560"/>
-          </a:xfrm>
-          <a:prstGeom prst="rect">
-            <a:avLst/>
-          </a:prstGeom>
-          <a:solidFill>
-            <a:srgbClr val="269CCB"/>
-          </a:solidFill>
-          <a:ln>
-            <a:noFill/>
-          </a:ln>
-        </p:spPr>
-        <p:style>
-          <a:lnRef idx="1">
-            <a:schemeClr val="accent1"/>
-          </a:lnRef>
-          <a:fillRef idx="3">
-            <a:schemeClr val="accent1"/>
-          </a:fillRef>
-          <a:effectRef idx="2">
-            <a:schemeClr val="accent1"/>
-          </a:effectRef>
-          <a:fontRef idx="minor">
-            <a:schemeClr val="lt1"/>
-          </a:fontRef>
-        </p:style>
-        <p:txBody>
-          <a:bodyPr rtlCol="0" anchor="ctr"/>
-          <a:lstStyle/>
-          <a:p>
-            <a:pPr algn="ctr"/>
-          </a:p>
-        </p:txBody>
-      </p:sp>
-      <p:sp>
-        <p:nvSpPr>
-          <p:cNvPr id="7" name="TextBox 6"/>
+              <a:t>Taller PI VetCare — escenario / datos de partida</a:t>
+            </a:r>
+          </a:p>
+        </p:txBody>
+      </p:sp>
+      <p:sp>
+        <p:nvSpPr>
+          <p:cNvPr id="5" name="TextBox 4"/>
           <p:cNvSpPr txBox="1"/>
           <p:nvPr/>
         </p:nvSpPr>
         <p:spPr>
           <a:xfrm>
-            <a:off x="777240" y="1399031"/>
-            <a:ext cx="10774375" cy="822959"/>
+            <a:off x="457200" y="1170432"/>
+            <a:ext cx="11277295" cy="5230368"/>
           </a:xfrm>
           <a:prstGeom prst="rect">
             <a:avLst/>
@@ -19075,313 +18413,92 @@
           </a:bodyPr>
           <a:lstStyle/>
           <a:p>
-            <a:r>
-              <a:rPr sz="1200" b="1" i="0">
-                <a:solidFill>
-                  <a:srgbClr val="269CCB"/>
-                </a:solidFill>
-                <a:latin typeface="Calibri"/>
-              </a:rPr>
-              <a:t>Info</a:t>
-            </a:r>
-          </a:p>
-          <a:p>
             <a:pPr>
-              <a:spcBef>
-                <a:spcPts val="400"/>
-              </a:spcBef>
+              <a:spcAft>
+                <a:spcPts val="800"/>
+              </a:spcAft>
             </a:pPr>
             <a:r>
-              <a:rPr sz="1400" b="0" i="0">
+              <a:rPr sz="2000" b="0" i="0">
                 <a:solidFill>
                   <a:srgbClr val="333333"/>
                 </a:solidFill>
                 <a:latin typeface="Calibri"/>
               </a:rPr>
-              <a:t>Hito: Plan de roles/privilegios de VetCare</a:t>
-            </a:r>
-          </a:p>
-        </p:txBody>
-      </p:sp>
-      <p:sp>
-        <p:nvSpPr>
-          <p:cNvPr id="8" name="Rounded Rectangle 7"/>
-          <p:cNvSpPr/>
-          <p:nvPr/>
-        </p:nvSpPr>
-        <p:spPr>
-          <a:xfrm>
-            <a:off x="457200" y="2478024"/>
-            <a:ext cx="11277295" cy="1051560"/>
-          </a:xfrm>
-          <a:prstGeom prst="roundRect">
-            <a:avLst>
-              <a:gd name="adj" fmla="val 12000"/>
-            </a:avLst>
-          </a:prstGeom>
-          <a:solidFill>
-            <a:srgbClr val="FFF8E1"/>
-          </a:solidFill>
-          <a:ln>
-            <a:noFill/>
-          </a:ln>
-        </p:spPr>
-        <p:style>
-          <a:lnRef idx="1">
-            <a:schemeClr val="accent1"/>
-          </a:lnRef>
-          <a:fillRef idx="3">
-            <a:schemeClr val="accent1"/>
-          </a:fillRef>
-          <a:effectRef idx="2">
-            <a:schemeClr val="accent1"/>
-          </a:effectRef>
-          <a:fontRef idx="minor">
-            <a:schemeClr val="lt1"/>
-          </a:fontRef>
-        </p:style>
-        <p:txBody>
-          <a:bodyPr rtlCol="0" anchor="ctr"/>
-          <a:lstStyle/>
-          <a:p>
-            <a:pPr algn="ctr"/>
-          </a:p>
-        </p:txBody>
-      </p:sp>
-      <p:sp>
-        <p:nvSpPr>
-          <p:cNvPr id="9" name="Rectangle 8"/>
-          <p:cNvSpPr/>
-          <p:nvPr/>
-        </p:nvSpPr>
-        <p:spPr>
-          <a:xfrm>
-            <a:off x="457200" y="2478024"/>
-            <a:ext cx="128016" cy="1051560"/>
-          </a:xfrm>
-          <a:prstGeom prst="rect">
-            <a:avLst/>
-          </a:prstGeom>
-          <a:solidFill>
-            <a:srgbClr val="FFD000"/>
-          </a:solidFill>
-          <a:ln>
-            <a:noFill/>
-          </a:ln>
-        </p:spPr>
-        <p:style>
-          <a:lnRef idx="1">
-            <a:schemeClr val="accent1"/>
-          </a:lnRef>
-          <a:fillRef idx="3">
-            <a:schemeClr val="accent1"/>
-          </a:fillRef>
-          <a:effectRef idx="2">
-            <a:schemeClr val="accent1"/>
-          </a:effectRef>
-          <a:fontRef idx="minor">
-            <a:schemeClr val="lt1"/>
-          </a:fontRef>
-        </p:style>
-        <p:txBody>
-          <a:bodyPr rtlCol="0" anchor="ctr"/>
-          <a:lstStyle/>
-          <a:p>
-            <a:pPr algn="ctr"/>
-          </a:p>
-        </p:txBody>
-      </p:sp>
-      <p:sp>
-        <p:nvSpPr>
-          <p:cNvPr id="10" name="TextBox 9"/>
-          <p:cNvSpPr txBox="1"/>
-          <p:nvPr/>
-        </p:nvSpPr>
-        <p:spPr>
-          <a:xfrm>
-            <a:off x="777240" y="2615184"/>
-            <a:ext cx="10774375" cy="822959"/>
-          </a:xfrm>
-          <a:prstGeom prst="rect">
-            <a:avLst/>
-          </a:prstGeom>
-          <a:noFill/>
-        </p:spPr>
-        <p:txBody>
-          <a:bodyPr wrap="square">
-            <a:spAutoFit/>
-          </a:bodyPr>
-          <a:lstStyle/>
-          <a:p>
-            <a:r>
-              <a:rPr sz="1200" b="1" i="0">
-                <a:solidFill>
-                  <a:srgbClr val="FFD000"/>
-                </a:solidFill>
-                <a:latin typeface="Calibri"/>
-              </a:rPr>
-              <a:t>Aclaración</a:t>
+              <a:t>–   Esquema de VetCare ya creado y poblado: 8 tablas, y los dos procedimientos («sp_agendar_cita», «sp_facturar») como objetos de la matriz.</a:t>
             </a:r>
           </a:p>
           <a:p>
             <a:pPr>
-              <a:spcBef>
-                <a:spcPts val="400"/>
-              </a:spcBef>
+              <a:spcAft>
+                <a:spcPts val="800"/>
+              </a:spcAft>
             </a:pPr>
             <a:r>
-              <a:rPr sz="1400" b="0" i="0">
+              <a:rPr sz="2000" b="0" i="0">
                 <a:solidFill>
                   <a:srgbClr val="333333"/>
                 </a:solidFill>
                 <a:latin typeface="Calibri"/>
               </a:rPr>
-              <a:t>Enunciado completo: Clases/Proyecto Integrador/ (VetCare DB).</a:t>
-            </a:r>
-          </a:p>
-        </p:txBody>
-      </p:sp>
-      <p:sp>
-        <p:nvSpPr>
-          <p:cNvPr id="11" name="Rounded Rectangle 10"/>
-          <p:cNvSpPr/>
-          <p:nvPr/>
-        </p:nvSpPr>
-        <p:spPr>
-          <a:xfrm>
-            <a:off x="457200" y="3694176"/>
-            <a:ext cx="11277295" cy="1051560"/>
-          </a:xfrm>
-          <a:prstGeom prst="roundRect">
-            <a:avLst>
-              <a:gd name="adj" fmla="val 12000"/>
-            </a:avLst>
-          </a:prstGeom>
-          <a:solidFill>
-            <a:srgbClr val="FBE4E4"/>
-          </a:solidFill>
-          <a:ln>
-            <a:noFill/>
-          </a:ln>
-        </p:spPr>
-        <p:style>
-          <a:lnRef idx="1">
-            <a:schemeClr val="accent1"/>
-          </a:lnRef>
-          <a:fillRef idx="3">
-            <a:schemeClr val="accent1"/>
-          </a:fillRef>
-          <a:effectRef idx="2">
-            <a:schemeClr val="accent1"/>
-          </a:effectRef>
-          <a:fontRef idx="minor">
-            <a:schemeClr val="lt1"/>
-          </a:fontRef>
-        </p:style>
-        <p:txBody>
-          <a:bodyPr rtlCol="0" anchor="ctr"/>
-          <a:lstStyle/>
-          <a:p>
-            <a:pPr algn="ctr"/>
-          </a:p>
-        </p:txBody>
-      </p:sp>
-      <p:sp>
-        <p:nvSpPr>
-          <p:cNvPr id="12" name="Rectangle 11"/>
-          <p:cNvSpPr/>
-          <p:nvPr/>
-        </p:nvSpPr>
-        <p:spPr>
-          <a:xfrm>
-            <a:off x="457200" y="3694176"/>
-            <a:ext cx="128016" cy="1051560"/>
-          </a:xfrm>
-          <a:prstGeom prst="rect">
-            <a:avLst/>
-          </a:prstGeom>
-          <a:solidFill>
-            <a:srgbClr val="A02030"/>
-          </a:solidFill>
-          <a:ln>
-            <a:noFill/>
-          </a:ln>
-        </p:spPr>
-        <p:style>
-          <a:lnRef idx="1">
-            <a:schemeClr val="accent1"/>
-          </a:lnRef>
-          <a:fillRef idx="3">
-            <a:schemeClr val="accent1"/>
-          </a:fillRef>
-          <a:effectRef idx="2">
-            <a:schemeClr val="accent1"/>
-          </a:effectRef>
-          <a:fontRef idx="minor">
-            <a:schemeClr val="lt1"/>
-          </a:fontRef>
-        </p:style>
-        <p:txBody>
-          <a:bodyPr rtlCol="0" anchor="ctr"/>
-          <a:lstStyle/>
-          <a:p>
-            <a:pPr algn="ctr"/>
-          </a:p>
-        </p:txBody>
-      </p:sp>
-      <p:sp>
-        <p:nvSpPr>
-          <p:cNvPr id="13" name="TextBox 12"/>
-          <p:cNvSpPr txBox="1"/>
-          <p:nvPr/>
-        </p:nvSpPr>
-        <p:spPr>
-          <a:xfrm>
-            <a:off x="777240" y="3831336"/>
-            <a:ext cx="10774375" cy="822959"/>
-          </a:xfrm>
-          <a:prstGeom prst="rect">
-            <a:avLst/>
-          </a:prstGeom>
-          <a:noFill/>
-        </p:spPr>
-        <p:txBody>
-          <a:bodyPr wrap="square">
-            <a:spAutoFit/>
-          </a:bodyPr>
-          <a:lstStyle/>
-          <a:p>
-            <a:r>
-              <a:rPr sz="1200" b="1" i="0">
-                <a:solidFill>
-                  <a:srgbClr val="A02030"/>
-                </a:solidFill>
-                <a:latin typeface="Calibri"/>
-              </a:rPr>
-              <a:t>Atención</a:t>
+              <a:t>–   Roles a crear: «admin_bd» · «recepcion» · «veterinario_rol» · «auditor» (minúsculas; el del veterinario lleva «_rol» porque «veterinario» ya es una tabla).</a:t>
             </a:r>
           </a:p>
           <a:p>
             <a:pPr>
-              <a:spcBef>
-                <a:spcPts val="400"/>
-              </a:spcBef>
+              <a:spcAft>
+                <a:spcPts val="800"/>
+              </a:spcAft>
             </a:pPr>
             <a:r>
-              <a:rPr sz="1400" b="0" i="0">
+              <a:rPr sz="2000" b="0" i="0">
                 <a:solidFill>
                   <a:srgbClr val="333333"/>
                 </a:solidFill>
                 <a:latin typeface="Calibri"/>
               </a:rPr>
-              <a:t>Si el docente asigna taller esta semana, él indica el canal y la fecha.</a:t>
-            </a:r>
-          </a:p>
-        </p:txBody>
-      </p:sp>
-      <p:sp>
-        <p:nvSpPr>
-          <p:cNvPr id="14" name="TextBox 13"/>
+              <a:t>–   </a:t>
+            </a:r>
+            <a:r>
+              <a:rPr sz="2000" b="1" i="0">
+                <a:solidFill>
+                  <a:srgbClr val="333333"/>
+                </a:solidFill>
+                <a:latin typeface="Calibri"/>
+              </a:rPr>
+              <a:t>Motor:</a:t>
+            </a:r>
+            <a:r>
+              <a:rPr sz="2000" b="0" i="0">
+                <a:solidFill>
+                  <a:srgbClr val="333333"/>
+                </a:solidFill>
+                <a:latin typeface="Calibri"/>
+              </a:rPr>
+              <a:t> PostgreSQL dentro de la plataforma del curso. Los GRANT son reales, y el permiso negado se comprueba con «SET ROLE» en la misma sesión: no hay una segunda conexión.</a:t>
+            </a:r>
+          </a:p>
+          <a:p>
+            <a:pPr>
+              <a:spcAft>
+                <a:spcPts val="800"/>
+              </a:spcAft>
+            </a:pPr>
+            <a:r>
+              <a:rPr sz="2000" b="0" i="0">
+                <a:solidFill>
+                  <a:srgbClr val="333333"/>
+                </a:solidFill>
+                <a:latin typeface="Calibri"/>
+              </a:rPr>
+              <a:t>–   La matriz y la política se escriben en Google Docs y se pegan en la plataforma del curso; la plantilla en blanco de las dos está en este documento.</a:t>
+            </a:r>
+          </a:p>
+        </p:txBody>
+      </p:sp>
+      <p:sp>
+        <p:nvSpPr>
+          <p:cNvPr id="6" name="TextBox 5"/>
           <p:cNvSpPr txBox="1"/>
           <p:nvPr/>
         </p:nvSpPr>
@@ -19449,7 +18566,1018 @@
         <p:spPr>
           <a:xfrm>
             <a:off x="0" y="0"/>
-            <a:ext cx="12191695" cy="164592"/>
+            <a:ext cx="12191695" cy="960120"/>
+          </a:xfrm>
+          <a:prstGeom prst="rect">
+            <a:avLst/>
+          </a:prstGeom>
+          <a:solidFill>
+            <a:srgbClr val="095292"/>
+          </a:solidFill>
+          <a:ln>
+            <a:noFill/>
+          </a:ln>
+        </p:spPr>
+        <p:style>
+          <a:lnRef idx="1">
+            <a:schemeClr val="accent1"/>
+          </a:lnRef>
+          <a:fillRef idx="3">
+            <a:schemeClr val="accent1"/>
+          </a:fillRef>
+          <a:effectRef idx="2">
+            <a:schemeClr val="accent1"/>
+          </a:effectRef>
+          <a:fontRef idx="minor">
+            <a:schemeClr val="lt1"/>
+          </a:fontRef>
+        </p:style>
+        <p:txBody>
+          <a:bodyPr rtlCol="0" anchor="ctr"/>
+          <a:lstStyle/>
+          <a:p>
+            <a:pPr algn="ctr"/>
+          </a:p>
+        </p:txBody>
+      </p:sp>
+      <p:sp>
+        <p:nvSpPr>
+          <p:cNvPr id="3" name="Rectangle 2"/>
+          <p:cNvSpPr/>
+          <p:nvPr/>
+        </p:nvSpPr>
+        <p:spPr>
+          <a:xfrm>
+            <a:off x="0" y="960120"/>
+            <a:ext cx="12191695" cy="41148"/>
+          </a:xfrm>
+          <a:prstGeom prst="rect">
+            <a:avLst/>
+          </a:prstGeom>
+          <a:solidFill>
+            <a:srgbClr val="FFD000"/>
+          </a:solidFill>
+          <a:ln>
+            <a:noFill/>
+          </a:ln>
+        </p:spPr>
+        <p:style>
+          <a:lnRef idx="1">
+            <a:schemeClr val="accent1"/>
+          </a:lnRef>
+          <a:fillRef idx="3">
+            <a:schemeClr val="accent1"/>
+          </a:fillRef>
+          <a:effectRef idx="2">
+            <a:schemeClr val="accent1"/>
+          </a:effectRef>
+          <a:fontRef idx="minor">
+            <a:schemeClr val="lt1"/>
+          </a:fontRef>
+        </p:style>
+        <p:txBody>
+          <a:bodyPr rtlCol="0" anchor="ctr"/>
+          <a:lstStyle/>
+          <a:p>
+            <a:pPr algn="ctr"/>
+          </a:p>
+        </p:txBody>
+      </p:sp>
+      <p:sp>
+        <p:nvSpPr>
+          <p:cNvPr id="4" name="TextBox 3"/>
+          <p:cNvSpPr txBox="1"/>
+          <p:nvPr/>
+        </p:nvSpPr>
+        <p:spPr>
+          <a:xfrm>
+            <a:off x="457200" y="164592"/>
+            <a:ext cx="11277295" cy="502920"/>
+          </a:xfrm>
+          <a:prstGeom prst="rect">
+            <a:avLst/>
+          </a:prstGeom>
+          <a:noFill/>
+        </p:spPr>
+        <p:txBody>
+          <a:bodyPr wrap="square">
+            <a:spAutoFit/>
+          </a:bodyPr>
+          <a:lstStyle/>
+          <a:p>
+            <a:r>
+              <a:rPr sz="2600" b="1" i="0">
+                <a:solidFill>
+                  <a:srgbClr val="FFFFFF"/>
+                </a:solidFill>
+                <a:latin typeface="Calibri"/>
+              </a:rPr>
+              <a:t>Taller PI VetCare — pasos guiados</a:t>
+            </a:r>
+          </a:p>
+        </p:txBody>
+      </p:sp>
+      <p:sp>
+        <p:nvSpPr>
+          <p:cNvPr id="5" name="Rounded Rectangle 4"/>
+          <p:cNvSpPr/>
+          <p:nvPr/>
+        </p:nvSpPr>
+        <p:spPr>
+          <a:xfrm>
+            <a:off x="457200" y="1554480"/>
+            <a:ext cx="11277295" cy="1051560"/>
+          </a:xfrm>
+          <a:prstGeom prst="roundRect">
+            <a:avLst>
+              <a:gd name="adj" fmla="val 12000"/>
+            </a:avLst>
+          </a:prstGeom>
+          <a:solidFill>
+            <a:srgbClr val="F2F2F2"/>
+          </a:solidFill>
+          <a:ln>
+            <a:noFill/>
+          </a:ln>
+        </p:spPr>
+        <p:style>
+          <a:lnRef idx="1">
+            <a:schemeClr val="accent1"/>
+          </a:lnRef>
+          <a:fillRef idx="3">
+            <a:schemeClr val="accent1"/>
+          </a:fillRef>
+          <a:effectRef idx="2">
+            <a:schemeClr val="accent1"/>
+          </a:effectRef>
+          <a:fontRef idx="minor">
+            <a:schemeClr val="lt1"/>
+          </a:fontRef>
+        </p:style>
+        <p:txBody>
+          <a:bodyPr rtlCol="0" anchor="ctr"/>
+          <a:lstStyle/>
+          <a:p>
+            <a:pPr algn="ctr"/>
+          </a:p>
+        </p:txBody>
+      </p:sp>
+      <p:sp>
+        <p:nvSpPr>
+          <p:cNvPr id="6" name="Rounded Rectangle 5"/>
+          <p:cNvSpPr/>
+          <p:nvPr/>
+        </p:nvSpPr>
+        <p:spPr>
+          <a:xfrm>
+            <a:off x="594360" y="1860804"/>
+            <a:ext cx="438912" cy="438912"/>
+          </a:xfrm>
+          <a:prstGeom prst="roundRect">
+            <a:avLst>
+              <a:gd name="adj" fmla="val 12000"/>
+            </a:avLst>
+          </a:prstGeom>
+          <a:solidFill>
+            <a:srgbClr val="095292"/>
+          </a:solidFill>
+          <a:ln>
+            <a:noFill/>
+          </a:ln>
+        </p:spPr>
+        <p:style>
+          <a:lnRef idx="1">
+            <a:schemeClr val="accent1"/>
+          </a:lnRef>
+          <a:fillRef idx="3">
+            <a:schemeClr val="accent1"/>
+          </a:fillRef>
+          <a:effectRef idx="2">
+            <a:schemeClr val="accent1"/>
+          </a:effectRef>
+          <a:fontRef idx="minor">
+            <a:schemeClr val="lt1"/>
+          </a:fontRef>
+        </p:style>
+        <p:txBody>
+          <a:bodyPr rtlCol="0" anchor="ctr"/>
+          <a:lstStyle/>
+          <a:p>
+            <a:pPr algn="ctr"/>
+          </a:p>
+        </p:txBody>
+      </p:sp>
+      <p:sp>
+        <p:nvSpPr>
+          <p:cNvPr id="7" name="TextBox 6"/>
+          <p:cNvSpPr txBox="1"/>
+          <p:nvPr/>
+        </p:nvSpPr>
+        <p:spPr>
+          <a:xfrm>
+            <a:off x="594360" y="1860804"/>
+            <a:ext cx="438912" cy="438912"/>
+          </a:xfrm>
+          <a:prstGeom prst="rect">
+            <a:avLst/>
+          </a:prstGeom>
+          <a:noFill/>
+        </p:spPr>
+        <p:txBody>
+          <a:bodyPr wrap="square" anchor="ctr"/>
+          <a:lstStyle/>
+          <a:p>
+            <a:pPr algn="ctr"/>
+            <a:r>
+              <a:rPr sz="1600" b="1" i="0">
+                <a:solidFill>
+                  <a:srgbClr val="FFFFFF"/>
+                </a:solidFill>
+                <a:latin typeface="Calibri"/>
+              </a:rPr>
+              <a:t>1</a:t>
+            </a:r>
+          </a:p>
+        </p:txBody>
+      </p:sp>
+      <p:sp>
+        <p:nvSpPr>
+          <p:cNvPr id="8" name="TextBox 7"/>
+          <p:cNvSpPr txBox="1"/>
+          <p:nvPr/>
+        </p:nvSpPr>
+        <p:spPr>
+          <a:xfrm>
+            <a:off x="1188720" y="1645920"/>
+            <a:ext cx="10271455" cy="886968"/>
+          </a:xfrm>
+          <a:prstGeom prst="rect">
+            <a:avLst/>
+          </a:prstGeom>
+          <a:noFill/>
+        </p:spPr>
+        <p:txBody>
+          <a:bodyPr wrap="square" anchor="ctr"/>
+          <a:lstStyle/>
+          <a:p>
+            <a:r>
+              <a:rPr sz="1500" b="1" i="0">
+                <a:solidFill>
+                  <a:srgbClr val="095292"/>
+                </a:solidFill>
+                <a:latin typeface="Calibri"/>
+              </a:rPr>
+              <a:t>Crear los 4 roles (admin_bd, recepcion, veterinario_rol, auditor) con GRANT/REVOKE que corran.</a:t>
+            </a:r>
+          </a:p>
+        </p:txBody>
+      </p:sp>
+      <p:sp>
+        <p:nvSpPr>
+          <p:cNvPr id="9" name="Rounded Rectangle 8"/>
+          <p:cNvSpPr/>
+          <p:nvPr/>
+        </p:nvSpPr>
+        <p:spPr>
+          <a:xfrm>
+            <a:off x="457200" y="2697480"/>
+            <a:ext cx="11277295" cy="1051560"/>
+          </a:xfrm>
+          <a:prstGeom prst="roundRect">
+            <a:avLst>
+              <a:gd name="adj" fmla="val 12000"/>
+            </a:avLst>
+          </a:prstGeom>
+          <a:solidFill>
+            <a:srgbClr val="E8F4FA"/>
+          </a:solidFill>
+          <a:ln>
+            <a:noFill/>
+          </a:ln>
+        </p:spPr>
+        <p:style>
+          <a:lnRef idx="1">
+            <a:schemeClr val="accent1"/>
+          </a:lnRef>
+          <a:fillRef idx="3">
+            <a:schemeClr val="accent1"/>
+          </a:fillRef>
+          <a:effectRef idx="2">
+            <a:schemeClr val="accent1"/>
+          </a:effectRef>
+          <a:fontRef idx="minor">
+            <a:schemeClr val="lt1"/>
+          </a:fontRef>
+        </p:style>
+        <p:txBody>
+          <a:bodyPr rtlCol="0" anchor="ctr"/>
+          <a:lstStyle/>
+          <a:p>
+            <a:pPr algn="ctr"/>
+          </a:p>
+        </p:txBody>
+      </p:sp>
+      <p:sp>
+        <p:nvSpPr>
+          <p:cNvPr id="10" name="Rounded Rectangle 9"/>
+          <p:cNvSpPr/>
+          <p:nvPr/>
+        </p:nvSpPr>
+        <p:spPr>
+          <a:xfrm>
+            <a:off x="594360" y="3003804"/>
+            <a:ext cx="438912" cy="438912"/>
+          </a:xfrm>
+          <a:prstGeom prst="roundRect">
+            <a:avLst>
+              <a:gd name="adj" fmla="val 12000"/>
+            </a:avLst>
+          </a:prstGeom>
+          <a:solidFill>
+            <a:srgbClr val="095292"/>
+          </a:solidFill>
+          <a:ln>
+            <a:noFill/>
+          </a:ln>
+        </p:spPr>
+        <p:style>
+          <a:lnRef idx="1">
+            <a:schemeClr val="accent1"/>
+          </a:lnRef>
+          <a:fillRef idx="3">
+            <a:schemeClr val="accent1"/>
+          </a:fillRef>
+          <a:effectRef idx="2">
+            <a:schemeClr val="accent1"/>
+          </a:effectRef>
+          <a:fontRef idx="minor">
+            <a:schemeClr val="lt1"/>
+          </a:fontRef>
+        </p:style>
+        <p:txBody>
+          <a:bodyPr rtlCol="0" anchor="ctr"/>
+          <a:lstStyle/>
+          <a:p>
+            <a:pPr algn="ctr"/>
+          </a:p>
+        </p:txBody>
+      </p:sp>
+      <p:sp>
+        <p:nvSpPr>
+          <p:cNvPr id="11" name="TextBox 10"/>
+          <p:cNvSpPr txBox="1"/>
+          <p:nvPr/>
+        </p:nvSpPr>
+        <p:spPr>
+          <a:xfrm>
+            <a:off x="594360" y="3003804"/>
+            <a:ext cx="438912" cy="438912"/>
+          </a:xfrm>
+          <a:prstGeom prst="rect">
+            <a:avLst/>
+          </a:prstGeom>
+          <a:noFill/>
+        </p:spPr>
+        <p:txBody>
+          <a:bodyPr wrap="square" anchor="ctr"/>
+          <a:lstStyle/>
+          <a:p>
+            <a:pPr algn="ctr"/>
+            <a:r>
+              <a:rPr sz="1600" b="1" i="0">
+                <a:solidFill>
+                  <a:srgbClr val="FFFFFF"/>
+                </a:solidFill>
+                <a:latin typeface="Calibri"/>
+              </a:rPr>
+              <a:t>2</a:t>
+            </a:r>
+          </a:p>
+        </p:txBody>
+      </p:sp>
+      <p:sp>
+        <p:nvSpPr>
+          <p:cNvPr id="12" name="TextBox 11"/>
+          <p:cNvSpPr txBox="1"/>
+          <p:nvPr/>
+        </p:nvSpPr>
+        <p:spPr>
+          <a:xfrm>
+            <a:off x="1188720" y="2788920"/>
+            <a:ext cx="10271455" cy="886968"/>
+          </a:xfrm>
+          <a:prstGeom prst="rect">
+            <a:avLst/>
+          </a:prstGeom>
+          <a:noFill/>
+        </p:spPr>
+        <p:txBody>
+          <a:bodyPr wrap="square" anchor="ctr"/>
+          <a:lstStyle/>
+          <a:p>
+            <a:r>
+              <a:rPr sz="1500" b="1" i="0">
+                <a:solidFill>
+                  <a:srgbClr val="095292"/>
+                </a:solidFill>
+                <a:latin typeface="Calibri"/>
+              </a:rPr>
+              <a:t>Recortar la superficie: vista v_agenda_recepcion + privilegio por columna sobre dueno.</a:t>
+            </a:r>
+          </a:p>
+        </p:txBody>
+      </p:sp>
+      <p:sp>
+        <p:nvSpPr>
+          <p:cNvPr id="13" name="Rounded Rectangle 12"/>
+          <p:cNvSpPr/>
+          <p:nvPr/>
+        </p:nvSpPr>
+        <p:spPr>
+          <a:xfrm>
+            <a:off x="457200" y="3840480"/>
+            <a:ext cx="11277295" cy="1051560"/>
+          </a:xfrm>
+          <a:prstGeom prst="roundRect">
+            <a:avLst>
+              <a:gd name="adj" fmla="val 12000"/>
+            </a:avLst>
+          </a:prstGeom>
+          <a:solidFill>
+            <a:srgbClr val="F2F2F2"/>
+          </a:solidFill>
+          <a:ln>
+            <a:noFill/>
+          </a:ln>
+        </p:spPr>
+        <p:style>
+          <a:lnRef idx="1">
+            <a:schemeClr val="accent1"/>
+          </a:lnRef>
+          <a:fillRef idx="3">
+            <a:schemeClr val="accent1"/>
+          </a:fillRef>
+          <a:effectRef idx="2">
+            <a:schemeClr val="accent1"/>
+          </a:effectRef>
+          <a:fontRef idx="minor">
+            <a:schemeClr val="lt1"/>
+          </a:fontRef>
+        </p:style>
+        <p:txBody>
+          <a:bodyPr rtlCol="0" anchor="ctr"/>
+          <a:lstStyle/>
+          <a:p>
+            <a:pPr algn="ctr"/>
+          </a:p>
+        </p:txBody>
+      </p:sp>
+      <p:sp>
+        <p:nvSpPr>
+          <p:cNvPr id="14" name="Rounded Rectangle 13"/>
+          <p:cNvSpPr/>
+          <p:nvPr/>
+        </p:nvSpPr>
+        <p:spPr>
+          <a:xfrm>
+            <a:off x="594360" y="4146804"/>
+            <a:ext cx="438912" cy="438912"/>
+          </a:xfrm>
+          <a:prstGeom prst="roundRect">
+            <a:avLst>
+              <a:gd name="adj" fmla="val 12000"/>
+            </a:avLst>
+          </a:prstGeom>
+          <a:solidFill>
+            <a:srgbClr val="095292"/>
+          </a:solidFill>
+          <a:ln>
+            <a:noFill/>
+          </a:ln>
+        </p:spPr>
+        <p:style>
+          <a:lnRef idx="1">
+            <a:schemeClr val="accent1"/>
+          </a:lnRef>
+          <a:fillRef idx="3">
+            <a:schemeClr val="accent1"/>
+          </a:fillRef>
+          <a:effectRef idx="2">
+            <a:schemeClr val="accent1"/>
+          </a:effectRef>
+          <a:fontRef idx="minor">
+            <a:schemeClr val="lt1"/>
+          </a:fontRef>
+        </p:style>
+        <p:txBody>
+          <a:bodyPr rtlCol="0" anchor="ctr"/>
+          <a:lstStyle/>
+          <a:p>
+            <a:pPr algn="ctr"/>
+          </a:p>
+        </p:txBody>
+      </p:sp>
+      <p:sp>
+        <p:nvSpPr>
+          <p:cNvPr id="15" name="TextBox 14"/>
+          <p:cNvSpPr txBox="1"/>
+          <p:nvPr/>
+        </p:nvSpPr>
+        <p:spPr>
+          <a:xfrm>
+            <a:off x="594360" y="4146804"/>
+            <a:ext cx="438912" cy="438912"/>
+          </a:xfrm>
+          <a:prstGeom prst="rect">
+            <a:avLst/>
+          </a:prstGeom>
+          <a:noFill/>
+        </p:spPr>
+        <p:txBody>
+          <a:bodyPr wrap="square" anchor="ctr"/>
+          <a:lstStyle/>
+          <a:p>
+            <a:pPr algn="ctr"/>
+            <a:r>
+              <a:rPr sz="1600" b="1" i="0">
+                <a:solidFill>
+                  <a:srgbClr val="FFFFFF"/>
+                </a:solidFill>
+                <a:latin typeface="Calibri"/>
+              </a:rPr>
+              <a:t>3</a:t>
+            </a:r>
+          </a:p>
+        </p:txBody>
+      </p:sp>
+      <p:sp>
+        <p:nvSpPr>
+          <p:cNvPr id="16" name="TextBox 15"/>
+          <p:cNvSpPr txBox="1"/>
+          <p:nvPr/>
+        </p:nvSpPr>
+        <p:spPr>
+          <a:xfrm>
+            <a:off x="1188720" y="3931920"/>
+            <a:ext cx="10271455" cy="886968"/>
+          </a:xfrm>
+          <a:prstGeom prst="rect">
+            <a:avLst/>
+          </a:prstGeom>
+          <a:noFill/>
+        </p:spPr>
+        <p:txBody>
+          <a:bodyPr wrap="square" anchor="ctr"/>
+          <a:lstStyle/>
+          <a:p>
+            <a:r>
+              <a:rPr sz="1500" b="1" i="0">
+                <a:solidFill>
+                  <a:srgbClr val="095292"/>
+                </a:solidFill>
+                <a:latin typeface="Calibri"/>
+              </a:rPr>
+              <a:t>Matriz rol x objeto x privilegio de los 10 objetos, justificando privilegio minimo.</a:t>
+            </a:r>
+          </a:p>
+        </p:txBody>
+      </p:sp>
+      <p:sp>
+        <p:nvSpPr>
+          <p:cNvPr id="17" name="Rounded Rectangle 16"/>
+          <p:cNvSpPr/>
+          <p:nvPr/>
+        </p:nvSpPr>
+        <p:spPr>
+          <a:xfrm>
+            <a:off x="457200" y="4983480"/>
+            <a:ext cx="11277295" cy="1051560"/>
+          </a:xfrm>
+          <a:prstGeom prst="roundRect">
+            <a:avLst>
+              <a:gd name="adj" fmla="val 12000"/>
+            </a:avLst>
+          </a:prstGeom>
+          <a:solidFill>
+            <a:srgbClr val="E8F4FA"/>
+          </a:solidFill>
+          <a:ln>
+            <a:noFill/>
+          </a:ln>
+        </p:spPr>
+        <p:style>
+          <a:lnRef idx="1">
+            <a:schemeClr val="accent1"/>
+          </a:lnRef>
+          <a:fillRef idx="3">
+            <a:schemeClr val="accent1"/>
+          </a:fillRef>
+          <a:effectRef idx="2">
+            <a:schemeClr val="accent1"/>
+          </a:effectRef>
+          <a:fontRef idx="minor">
+            <a:schemeClr val="lt1"/>
+          </a:fontRef>
+        </p:style>
+        <p:txBody>
+          <a:bodyPr rtlCol="0" anchor="ctr"/>
+          <a:lstStyle/>
+          <a:p>
+            <a:pPr algn="ctr"/>
+          </a:p>
+        </p:txBody>
+      </p:sp>
+      <p:sp>
+        <p:nvSpPr>
+          <p:cNvPr id="18" name="Rounded Rectangle 17"/>
+          <p:cNvSpPr/>
+          <p:nvPr/>
+        </p:nvSpPr>
+        <p:spPr>
+          <a:xfrm>
+            <a:off x="594360" y="5289804"/>
+            <a:ext cx="438912" cy="438912"/>
+          </a:xfrm>
+          <a:prstGeom prst="roundRect">
+            <a:avLst>
+              <a:gd name="adj" fmla="val 12000"/>
+            </a:avLst>
+          </a:prstGeom>
+          <a:solidFill>
+            <a:srgbClr val="095292"/>
+          </a:solidFill>
+          <a:ln>
+            <a:noFill/>
+          </a:ln>
+        </p:spPr>
+        <p:style>
+          <a:lnRef idx="1">
+            <a:schemeClr val="accent1"/>
+          </a:lnRef>
+          <a:fillRef idx="3">
+            <a:schemeClr val="accent1"/>
+          </a:fillRef>
+          <a:effectRef idx="2">
+            <a:schemeClr val="accent1"/>
+          </a:effectRef>
+          <a:fontRef idx="minor">
+            <a:schemeClr val="lt1"/>
+          </a:fontRef>
+        </p:style>
+        <p:txBody>
+          <a:bodyPr rtlCol="0" anchor="ctr"/>
+          <a:lstStyle/>
+          <a:p>
+            <a:pPr algn="ctr"/>
+          </a:p>
+        </p:txBody>
+      </p:sp>
+      <p:sp>
+        <p:nvSpPr>
+          <p:cNvPr id="19" name="TextBox 18"/>
+          <p:cNvSpPr txBox="1"/>
+          <p:nvPr/>
+        </p:nvSpPr>
+        <p:spPr>
+          <a:xfrm>
+            <a:off x="594360" y="5289804"/>
+            <a:ext cx="438912" cy="438912"/>
+          </a:xfrm>
+          <a:prstGeom prst="rect">
+            <a:avLst/>
+          </a:prstGeom>
+          <a:noFill/>
+        </p:spPr>
+        <p:txBody>
+          <a:bodyPr wrap="square" anchor="ctr"/>
+          <a:lstStyle/>
+          <a:p>
+            <a:pPr algn="ctr"/>
+            <a:r>
+              <a:rPr sz="1600" b="1" i="0">
+                <a:solidFill>
+                  <a:srgbClr val="FFFFFF"/>
+                </a:solidFill>
+                <a:latin typeface="Calibri"/>
+              </a:rPr>
+              <a:t>4</a:t>
+            </a:r>
+          </a:p>
+        </p:txBody>
+      </p:sp>
+      <p:sp>
+        <p:nvSpPr>
+          <p:cNvPr id="20" name="TextBox 19"/>
+          <p:cNvSpPr txBox="1"/>
+          <p:nvPr/>
+        </p:nvSpPr>
+        <p:spPr>
+          <a:xfrm>
+            <a:off x="1188720" y="5074920"/>
+            <a:ext cx="10271455" cy="886968"/>
+          </a:xfrm>
+          <a:prstGeom prst="rect">
+            <a:avLst/>
+          </a:prstGeom>
+          <a:noFill/>
+        </p:spPr>
+        <p:txBody>
+          <a:bodyPr wrap="square" anchor="ctr"/>
+          <a:lstStyle/>
+          <a:p>
+            <a:r>
+              <a:rPr sz="1500" b="1" i="0">
+                <a:solidFill>
+                  <a:srgbClr val="095292"/>
+                </a:solidFill>
+                <a:latin typeface="Calibri"/>
+              </a:rPr>
+              <a:t>Redactar 1 pagina: politica de altas/bajas de usuarios, con la prueba negativa (SET ROLE) corrida y su mensaje de error.</a:t>
+            </a:r>
+          </a:p>
+        </p:txBody>
+      </p:sp>
+      <p:sp>
+        <p:nvSpPr>
+          <p:cNvPr id="21" name="TextBox 20"/>
+          <p:cNvSpPr txBox="1"/>
+          <p:nvPr/>
+        </p:nvSpPr>
+        <p:spPr>
+          <a:xfrm>
+            <a:off x="11185855" y="6473952"/>
+            <a:ext cx="640080" cy="274320"/>
+          </a:xfrm>
+          <a:prstGeom prst="rect">
+            <a:avLst/>
+          </a:prstGeom>
+          <a:noFill/>
+        </p:spPr>
+        <p:txBody>
+          <a:bodyPr wrap="square">
+            <a:spAutoFit/>
+          </a:bodyPr>
+          <a:lstStyle/>
+          <a:p>
+            <a:pPr algn="r"/>
+            <a:r>
+              <a:rPr sz="1100" b="0" i="0">
+                <a:solidFill>
+                  <a:srgbClr val="666666"/>
+                </a:solidFill>
+                <a:latin typeface="Calibri"/>
+              </a:rPr>
+              <a:t>48</a:t>
+            </a:r>
+          </a:p>
+        </p:txBody>
+      </p:sp>
+    </p:spTree>
+  </p:cSld>
+  <p:clrMapOvr>
+    <a:masterClrMapping/>
+  </p:clrMapOvr>
+</p:sld>
+</file>
+
+<file path=ppt/slides/slide49.xml><?xml version="1.0" encoding="utf-8"?>
+<p:sld xmlns:a="http://schemas.openxmlformats.org/drawingml/2006/main" xmlns:p="http://schemas.openxmlformats.org/presentationml/2006/main" xmlns:r="http://schemas.openxmlformats.org/officeDocument/2006/relationships">
+  <p:cSld>
+    <p:bg>
+      <p:bgPr>
+        <a:solidFill>
+          <a:srgbClr val="FFFFFF"/>
+        </a:solidFill>
+        <a:effectLst/>
+      </p:bgPr>
+    </p:bg>
+    <p:spTree>
+      <p:nvGrpSpPr>
+        <p:cNvPr id="1" name=""/>
+        <p:cNvGrpSpPr/>
+        <p:nvPr/>
+      </p:nvGrpSpPr>
+      <p:grpSpPr/>
+      <p:sp>
+        <p:nvSpPr>
+          <p:cNvPr id="2" name="Rectangle 1"/>
+          <p:cNvSpPr/>
+          <p:nvPr/>
+        </p:nvSpPr>
+        <p:spPr>
+          <a:xfrm>
+            <a:off x="0" y="0"/>
+            <a:ext cx="12191695" cy="960120"/>
+          </a:xfrm>
+          <a:prstGeom prst="rect">
+            <a:avLst/>
+          </a:prstGeom>
+          <a:solidFill>
+            <a:srgbClr val="095292"/>
+          </a:solidFill>
+          <a:ln>
+            <a:noFill/>
+          </a:ln>
+        </p:spPr>
+        <p:style>
+          <a:lnRef idx="1">
+            <a:schemeClr val="accent1"/>
+          </a:lnRef>
+          <a:fillRef idx="3">
+            <a:schemeClr val="accent1"/>
+          </a:fillRef>
+          <a:effectRef idx="2">
+            <a:schemeClr val="accent1"/>
+          </a:effectRef>
+          <a:fontRef idx="minor">
+            <a:schemeClr val="lt1"/>
+          </a:fontRef>
+        </p:style>
+        <p:txBody>
+          <a:bodyPr rtlCol="0" anchor="ctr"/>
+          <a:lstStyle/>
+          <a:p>
+            <a:pPr algn="ctr"/>
+          </a:p>
+        </p:txBody>
+      </p:sp>
+      <p:sp>
+        <p:nvSpPr>
+          <p:cNvPr id="3" name="Rectangle 2"/>
+          <p:cNvSpPr/>
+          <p:nvPr/>
+        </p:nvSpPr>
+        <p:spPr>
+          <a:xfrm>
+            <a:off x="0" y="960120"/>
+            <a:ext cx="12191695" cy="41148"/>
+          </a:xfrm>
+          <a:prstGeom prst="rect">
+            <a:avLst/>
+          </a:prstGeom>
+          <a:solidFill>
+            <a:srgbClr val="FFD000"/>
+          </a:solidFill>
+          <a:ln>
+            <a:noFill/>
+          </a:ln>
+        </p:spPr>
+        <p:style>
+          <a:lnRef idx="1">
+            <a:schemeClr val="accent1"/>
+          </a:lnRef>
+          <a:fillRef idx="3">
+            <a:schemeClr val="accent1"/>
+          </a:fillRef>
+          <a:effectRef idx="2">
+            <a:schemeClr val="accent1"/>
+          </a:effectRef>
+          <a:fontRef idx="minor">
+            <a:schemeClr val="lt1"/>
+          </a:fontRef>
+        </p:style>
+        <p:txBody>
+          <a:bodyPr rtlCol="0" anchor="ctr"/>
+          <a:lstStyle/>
+          <a:p>
+            <a:pPr algn="ctr"/>
+          </a:p>
+        </p:txBody>
+      </p:sp>
+      <p:sp>
+        <p:nvSpPr>
+          <p:cNvPr id="4" name="TextBox 3"/>
+          <p:cNvSpPr txBox="1"/>
+          <p:nvPr/>
+        </p:nvSpPr>
+        <p:spPr>
+          <a:xfrm>
+            <a:off x="457200" y="164592"/>
+            <a:ext cx="11277295" cy="502920"/>
+          </a:xfrm>
+          <a:prstGeom prst="rect">
+            <a:avLst/>
+          </a:prstGeom>
+          <a:noFill/>
+        </p:spPr>
+        <p:txBody>
+          <a:bodyPr wrap="square">
+            <a:spAutoFit/>
+          </a:bodyPr>
+          <a:lstStyle/>
+          <a:p>
+            <a:r>
+              <a:rPr sz="2600" b="1" i="0">
+                <a:solidFill>
+                  <a:srgbClr val="FFFFFF"/>
+                </a:solidFill>
+                <a:latin typeface="Calibri"/>
+              </a:rPr>
+              <a:t>Taller PI VetCare — pistas (checklist vacio)</a:t>
+            </a:r>
+          </a:p>
+        </p:txBody>
+      </p:sp>
+      <p:sp>
+        <p:nvSpPr>
+          <p:cNvPr id="5" name="Rounded Rectangle 4"/>
+          <p:cNvSpPr/>
+          <p:nvPr/>
+        </p:nvSpPr>
+        <p:spPr>
+          <a:xfrm>
+            <a:off x="457200" y="1261872"/>
+            <a:ext cx="11277295" cy="566928"/>
+          </a:xfrm>
+          <a:prstGeom prst="roundRect">
+            <a:avLst>
+              <a:gd name="adj" fmla="val 12000"/>
+            </a:avLst>
+          </a:prstGeom>
+          <a:solidFill>
+            <a:srgbClr val="F2F2F2"/>
+          </a:solidFill>
+          <a:ln>
+            <a:noFill/>
+          </a:ln>
+        </p:spPr>
+        <p:style>
+          <a:lnRef idx="1">
+            <a:schemeClr val="accent1"/>
+          </a:lnRef>
+          <a:fillRef idx="3">
+            <a:schemeClr val="accent1"/>
+          </a:fillRef>
+          <a:effectRef idx="2">
+            <a:schemeClr val="accent1"/>
+          </a:effectRef>
+          <a:fontRef idx="minor">
+            <a:schemeClr val="lt1"/>
+          </a:fontRef>
+        </p:style>
+        <p:txBody>
+          <a:bodyPr rtlCol="0" anchor="ctr"/>
+          <a:lstStyle/>
+          <a:p>
+            <a:pPr algn="ctr"/>
+          </a:p>
+        </p:txBody>
+      </p:sp>
+      <p:sp>
+        <p:nvSpPr>
+          <p:cNvPr id="6" name="Rectangle 5"/>
+          <p:cNvSpPr/>
+          <p:nvPr/>
+        </p:nvSpPr>
+        <p:spPr>
+          <a:xfrm>
+            <a:off x="640080" y="1408175"/>
+            <a:ext cx="274320" cy="274320"/>
+          </a:xfrm>
+          <a:prstGeom prst="rect">
+            <a:avLst/>
+          </a:prstGeom>
+          <a:solidFill>
+            <a:srgbClr val="FFFFFF"/>
+          </a:solidFill>
+          <a:ln>
+            <a:solidFill>
+              <a:srgbClr val="333333"/>
+            </a:solidFill>
+          </a:ln>
+        </p:spPr>
+        <p:style>
+          <a:lnRef idx="1">
+            <a:schemeClr val="accent1"/>
+          </a:lnRef>
+          <a:fillRef idx="3">
+            <a:schemeClr val="accent1"/>
+          </a:fillRef>
+          <a:effectRef idx="2">
+            <a:schemeClr val="accent1"/>
+          </a:effectRef>
+          <a:fontRef idx="minor">
+            <a:schemeClr val="lt1"/>
+          </a:fontRef>
+        </p:style>
+        <p:txBody>
+          <a:bodyPr rtlCol="0" anchor="ctr"/>
+          <a:lstStyle/>
+          <a:p>
+            <a:pPr algn="ctr"/>
+          </a:p>
+        </p:txBody>
+      </p:sp>
+      <p:sp>
+        <p:nvSpPr>
+          <p:cNvPr id="7" name="Rectangle 6"/>
+          <p:cNvSpPr/>
+          <p:nvPr/>
+        </p:nvSpPr>
+        <p:spPr>
+          <a:xfrm>
+            <a:off x="640080" y="1408175"/>
+            <a:ext cx="73152" cy="274320"/>
           </a:xfrm>
           <a:prstGeom prst="rect">
             <a:avLst/>
@@ -19483,40 +19611,16 @@
           </a:p>
         </p:txBody>
       </p:sp>
-      <p:pic>
-        <p:nvPicPr>
-          <p:cNvPr id="3" name="Picture 2" descr="logo_uniajc_color.png"/>
-          <p:cNvPicPr>
-            <a:picLocks noChangeAspect="1"/>
-          </p:cNvPicPr>
-          <p:nvPr/>
-        </p:nvPicPr>
-        <p:blipFill>
-          <a:blip r:embed="rId2"/>
-          <a:stretch>
-            <a:fillRect/>
-          </a:stretch>
-        </p:blipFill>
-        <p:spPr>
-          <a:xfrm>
-            <a:off x="10271455" y="5998464"/>
-            <a:ext cx="1463040" cy="643233"/>
-          </a:xfrm>
-          <a:prstGeom prst="rect">
-            <a:avLst/>
-          </a:prstGeom>
-        </p:spPr>
-      </p:pic>
-      <p:sp>
-        <p:nvSpPr>
-          <p:cNvPr id="4" name="TextBox 3"/>
+      <p:sp>
+        <p:nvSpPr>
+          <p:cNvPr id="8" name="TextBox 7"/>
           <p:cNvSpPr txBox="1"/>
           <p:nvPr/>
         </p:nvSpPr>
         <p:spPr>
           <a:xfrm>
-            <a:off x="457200" y="1737360"/>
-            <a:ext cx="11277295" cy="1097280"/>
+            <a:off x="1097280" y="1353312"/>
+            <a:ext cx="10362895" cy="402336"/>
           </a:xfrm>
           <a:prstGeom prst="rect">
             <a:avLst/>
@@ -19527,29 +19631,853 @@
           <a:bodyPr wrap="square" anchor="ctr"/>
           <a:lstStyle/>
           <a:p>
+            <a:r>
+              <a:rPr sz="1500" b="0" i="0">
+                <a:solidFill>
+                  <a:srgbClr val="333333"/>
+                </a:solidFill>
+                <a:latin typeface="Calibri"/>
+              </a:rPr>
+              <a:t>□ ¿Los 4 roles con el nombre exacto, en minúscula y con «veterinario_rol»?</a:t>
+            </a:r>
+          </a:p>
+        </p:txBody>
+      </p:sp>
+      <p:sp>
+        <p:nvSpPr>
+          <p:cNvPr id="9" name="Rounded Rectangle 8"/>
+          <p:cNvSpPr/>
+          <p:nvPr/>
+        </p:nvSpPr>
+        <p:spPr>
+          <a:xfrm>
+            <a:off x="457200" y="1938528"/>
+            <a:ext cx="11277295" cy="566928"/>
+          </a:xfrm>
+          <a:prstGeom prst="roundRect">
+            <a:avLst>
+              <a:gd name="adj" fmla="val 12000"/>
+            </a:avLst>
+          </a:prstGeom>
+          <a:solidFill>
+            <a:srgbClr val="F2F2F2"/>
+          </a:solidFill>
+          <a:ln>
+            <a:noFill/>
+          </a:ln>
+        </p:spPr>
+        <p:style>
+          <a:lnRef idx="1">
+            <a:schemeClr val="accent1"/>
+          </a:lnRef>
+          <a:fillRef idx="3">
+            <a:schemeClr val="accent1"/>
+          </a:fillRef>
+          <a:effectRef idx="2">
+            <a:schemeClr val="accent1"/>
+          </a:effectRef>
+          <a:fontRef idx="minor">
+            <a:schemeClr val="lt1"/>
+          </a:fontRef>
+        </p:style>
+        <p:txBody>
+          <a:bodyPr rtlCol="0" anchor="ctr"/>
+          <a:lstStyle/>
+          <a:p>
             <a:pPr algn="ctr"/>
-            <a:r>
-              <a:rPr sz="3400" b="1" i="0">
-                <a:solidFill>
-                  <a:srgbClr val="095292"/>
-                </a:solidFill>
-                <a:latin typeface="Calibri"/>
-              </a:rPr>
-              <a:t>Clase 2 · VetCare avanza</a:t>
-            </a:r>
-          </a:p>
-        </p:txBody>
-      </p:sp>
-      <p:sp>
-        <p:nvSpPr>
-          <p:cNvPr id="5" name="TextBox 4"/>
+          </a:p>
+        </p:txBody>
+      </p:sp>
+      <p:sp>
+        <p:nvSpPr>
+          <p:cNvPr id="10" name="Rectangle 9"/>
+          <p:cNvSpPr/>
+          <p:nvPr/>
+        </p:nvSpPr>
+        <p:spPr>
+          <a:xfrm>
+            <a:off x="640080" y="2084832"/>
+            <a:ext cx="274320" cy="274320"/>
+          </a:xfrm>
+          <a:prstGeom prst="rect">
+            <a:avLst/>
+          </a:prstGeom>
+          <a:solidFill>
+            <a:srgbClr val="FFFFFF"/>
+          </a:solidFill>
+          <a:ln>
+            <a:solidFill>
+              <a:srgbClr val="333333"/>
+            </a:solidFill>
+          </a:ln>
+        </p:spPr>
+        <p:style>
+          <a:lnRef idx="1">
+            <a:schemeClr val="accent1"/>
+          </a:lnRef>
+          <a:fillRef idx="3">
+            <a:schemeClr val="accent1"/>
+          </a:fillRef>
+          <a:effectRef idx="2">
+            <a:schemeClr val="accent1"/>
+          </a:effectRef>
+          <a:fontRef idx="minor">
+            <a:schemeClr val="lt1"/>
+          </a:fontRef>
+        </p:style>
+        <p:txBody>
+          <a:bodyPr rtlCol="0" anchor="ctr"/>
+          <a:lstStyle/>
+          <a:p>
+            <a:pPr algn="ctr"/>
+          </a:p>
+        </p:txBody>
+      </p:sp>
+      <p:sp>
+        <p:nvSpPr>
+          <p:cNvPr id="11" name="Rectangle 10"/>
+          <p:cNvSpPr/>
+          <p:nvPr/>
+        </p:nvSpPr>
+        <p:spPr>
+          <a:xfrm>
+            <a:off x="640080" y="2084832"/>
+            <a:ext cx="73152" cy="274320"/>
+          </a:xfrm>
+          <a:prstGeom prst="rect">
+            <a:avLst/>
+          </a:prstGeom>
+          <a:solidFill>
+            <a:srgbClr val="269CCB"/>
+          </a:solidFill>
+          <a:ln>
+            <a:noFill/>
+          </a:ln>
+        </p:spPr>
+        <p:style>
+          <a:lnRef idx="1">
+            <a:schemeClr val="accent1"/>
+          </a:lnRef>
+          <a:fillRef idx="3">
+            <a:schemeClr val="accent1"/>
+          </a:fillRef>
+          <a:effectRef idx="2">
+            <a:schemeClr val="accent1"/>
+          </a:effectRef>
+          <a:fontRef idx="minor">
+            <a:schemeClr val="lt1"/>
+          </a:fontRef>
+        </p:style>
+        <p:txBody>
+          <a:bodyPr rtlCol="0" anchor="ctr"/>
+          <a:lstStyle/>
+          <a:p>
+            <a:pPr algn="ctr"/>
+          </a:p>
+        </p:txBody>
+      </p:sp>
+      <p:sp>
+        <p:nvSpPr>
+          <p:cNvPr id="12" name="TextBox 11"/>
           <p:cNvSpPr txBox="1"/>
           <p:nvPr/>
         </p:nvSpPr>
         <p:spPr>
           <a:xfrm>
-            <a:off x="457200" y="3017520"/>
-            <a:ext cx="11277295" cy="1645920"/>
+            <a:off x="1097280" y="2029968"/>
+            <a:ext cx="10362895" cy="402336"/>
+          </a:xfrm>
+          <a:prstGeom prst="rect">
+            <a:avLst/>
+          </a:prstGeom>
+          <a:noFill/>
+        </p:spPr>
+        <p:txBody>
+          <a:bodyPr wrap="square" anchor="ctr"/>
+          <a:lstStyle/>
+          <a:p>
+            <a:r>
+              <a:rPr sz="1500" b="0" i="0">
+                <a:solidFill>
+                  <a:srgbClr val="333333"/>
+                </a:solidFill>
+                <a:latin typeface="Calibri"/>
+              </a:rPr>
+              <a:t>□ ¿«recepcion» sin DELETE en ninguna tabla, y el REVOKE escrito aunque sea redundante?</a:t>
+            </a:r>
+          </a:p>
+        </p:txBody>
+      </p:sp>
+      <p:sp>
+        <p:nvSpPr>
+          <p:cNvPr id="13" name="Rounded Rectangle 12"/>
+          <p:cNvSpPr/>
+          <p:nvPr/>
+        </p:nvSpPr>
+        <p:spPr>
+          <a:xfrm>
+            <a:off x="457200" y="2615184"/>
+            <a:ext cx="11277295" cy="566928"/>
+          </a:xfrm>
+          <a:prstGeom prst="roundRect">
+            <a:avLst>
+              <a:gd name="adj" fmla="val 12000"/>
+            </a:avLst>
+          </a:prstGeom>
+          <a:solidFill>
+            <a:srgbClr val="F2F2F2"/>
+          </a:solidFill>
+          <a:ln>
+            <a:noFill/>
+          </a:ln>
+        </p:spPr>
+        <p:style>
+          <a:lnRef idx="1">
+            <a:schemeClr val="accent1"/>
+          </a:lnRef>
+          <a:fillRef idx="3">
+            <a:schemeClr val="accent1"/>
+          </a:fillRef>
+          <a:effectRef idx="2">
+            <a:schemeClr val="accent1"/>
+          </a:effectRef>
+          <a:fontRef idx="minor">
+            <a:schemeClr val="lt1"/>
+          </a:fontRef>
+        </p:style>
+        <p:txBody>
+          <a:bodyPr rtlCol="0" anchor="ctr"/>
+          <a:lstStyle/>
+          <a:p>
+            <a:pPr algn="ctr"/>
+          </a:p>
+        </p:txBody>
+      </p:sp>
+      <p:sp>
+        <p:nvSpPr>
+          <p:cNvPr id="14" name="Rectangle 13"/>
+          <p:cNvSpPr/>
+          <p:nvPr/>
+        </p:nvSpPr>
+        <p:spPr>
+          <a:xfrm>
+            <a:off x="640080" y="2761488"/>
+            <a:ext cx="274320" cy="274320"/>
+          </a:xfrm>
+          <a:prstGeom prst="rect">
+            <a:avLst/>
+          </a:prstGeom>
+          <a:solidFill>
+            <a:srgbClr val="FFFFFF"/>
+          </a:solidFill>
+          <a:ln>
+            <a:solidFill>
+              <a:srgbClr val="333333"/>
+            </a:solidFill>
+          </a:ln>
+        </p:spPr>
+        <p:style>
+          <a:lnRef idx="1">
+            <a:schemeClr val="accent1"/>
+          </a:lnRef>
+          <a:fillRef idx="3">
+            <a:schemeClr val="accent1"/>
+          </a:fillRef>
+          <a:effectRef idx="2">
+            <a:schemeClr val="accent1"/>
+          </a:effectRef>
+          <a:fontRef idx="minor">
+            <a:schemeClr val="lt1"/>
+          </a:fontRef>
+        </p:style>
+        <p:txBody>
+          <a:bodyPr rtlCol="0" anchor="ctr"/>
+          <a:lstStyle/>
+          <a:p>
+            <a:pPr algn="ctr"/>
+          </a:p>
+        </p:txBody>
+      </p:sp>
+      <p:sp>
+        <p:nvSpPr>
+          <p:cNvPr id="15" name="Rectangle 14"/>
+          <p:cNvSpPr/>
+          <p:nvPr/>
+        </p:nvSpPr>
+        <p:spPr>
+          <a:xfrm>
+            <a:off x="640080" y="2761488"/>
+            <a:ext cx="73152" cy="274320"/>
+          </a:xfrm>
+          <a:prstGeom prst="rect">
+            <a:avLst/>
+          </a:prstGeom>
+          <a:solidFill>
+            <a:srgbClr val="269CCB"/>
+          </a:solidFill>
+          <a:ln>
+            <a:noFill/>
+          </a:ln>
+        </p:spPr>
+        <p:style>
+          <a:lnRef idx="1">
+            <a:schemeClr val="accent1"/>
+          </a:lnRef>
+          <a:fillRef idx="3">
+            <a:schemeClr val="accent1"/>
+          </a:fillRef>
+          <a:effectRef idx="2">
+            <a:schemeClr val="accent1"/>
+          </a:effectRef>
+          <a:fontRef idx="minor">
+            <a:schemeClr val="lt1"/>
+          </a:fontRef>
+        </p:style>
+        <p:txBody>
+          <a:bodyPr rtlCol="0" anchor="ctr"/>
+          <a:lstStyle/>
+          <a:p>
+            <a:pPr algn="ctr"/>
+          </a:p>
+        </p:txBody>
+      </p:sp>
+      <p:sp>
+        <p:nvSpPr>
+          <p:cNvPr id="16" name="TextBox 15"/>
+          <p:cNvSpPr txBox="1"/>
+          <p:nvPr/>
+        </p:nvSpPr>
+        <p:spPr>
+          <a:xfrm>
+            <a:off x="1097280" y="2706624"/>
+            <a:ext cx="10362895" cy="402336"/>
+          </a:xfrm>
+          <a:prstGeom prst="rect">
+            <a:avLst/>
+          </a:prstGeom>
+          <a:noFill/>
+        </p:spPr>
+        <p:txBody>
+          <a:bodyPr wrap="square" anchor="ctr"/>
+          <a:lstStyle/>
+          <a:p>
+            <a:r>
+              <a:rPr sz="1500" b="0" i="0">
+                <a:solidFill>
+                  <a:srgbClr val="333333"/>
+                </a:solidFill>
+                <a:latin typeface="Calibri"/>
+              </a:rPr>
+              <a:t>□ ¿«auditor» solo con SELECT?</a:t>
+            </a:r>
+          </a:p>
+        </p:txBody>
+      </p:sp>
+      <p:sp>
+        <p:nvSpPr>
+          <p:cNvPr id="17" name="Rounded Rectangle 16"/>
+          <p:cNvSpPr/>
+          <p:nvPr/>
+        </p:nvSpPr>
+        <p:spPr>
+          <a:xfrm>
+            <a:off x="457200" y="3291840"/>
+            <a:ext cx="11277295" cy="566928"/>
+          </a:xfrm>
+          <a:prstGeom prst="roundRect">
+            <a:avLst>
+              <a:gd name="adj" fmla="val 12000"/>
+            </a:avLst>
+          </a:prstGeom>
+          <a:solidFill>
+            <a:srgbClr val="F2F2F2"/>
+          </a:solidFill>
+          <a:ln>
+            <a:noFill/>
+          </a:ln>
+        </p:spPr>
+        <p:style>
+          <a:lnRef idx="1">
+            <a:schemeClr val="accent1"/>
+          </a:lnRef>
+          <a:fillRef idx="3">
+            <a:schemeClr val="accent1"/>
+          </a:fillRef>
+          <a:effectRef idx="2">
+            <a:schemeClr val="accent1"/>
+          </a:effectRef>
+          <a:fontRef idx="minor">
+            <a:schemeClr val="lt1"/>
+          </a:fontRef>
+        </p:style>
+        <p:txBody>
+          <a:bodyPr rtlCol="0" anchor="ctr"/>
+          <a:lstStyle/>
+          <a:p>
+            <a:pPr algn="ctr"/>
+          </a:p>
+        </p:txBody>
+      </p:sp>
+      <p:sp>
+        <p:nvSpPr>
+          <p:cNvPr id="18" name="Rectangle 17"/>
+          <p:cNvSpPr/>
+          <p:nvPr/>
+        </p:nvSpPr>
+        <p:spPr>
+          <a:xfrm>
+            <a:off x="640080" y="3438144"/>
+            <a:ext cx="274320" cy="274320"/>
+          </a:xfrm>
+          <a:prstGeom prst="rect">
+            <a:avLst/>
+          </a:prstGeom>
+          <a:solidFill>
+            <a:srgbClr val="FFFFFF"/>
+          </a:solidFill>
+          <a:ln>
+            <a:solidFill>
+              <a:srgbClr val="333333"/>
+            </a:solidFill>
+          </a:ln>
+        </p:spPr>
+        <p:style>
+          <a:lnRef idx="1">
+            <a:schemeClr val="accent1"/>
+          </a:lnRef>
+          <a:fillRef idx="3">
+            <a:schemeClr val="accent1"/>
+          </a:fillRef>
+          <a:effectRef idx="2">
+            <a:schemeClr val="accent1"/>
+          </a:effectRef>
+          <a:fontRef idx="minor">
+            <a:schemeClr val="lt1"/>
+          </a:fontRef>
+        </p:style>
+        <p:txBody>
+          <a:bodyPr rtlCol="0" anchor="ctr"/>
+          <a:lstStyle/>
+          <a:p>
+            <a:pPr algn="ctr"/>
+          </a:p>
+        </p:txBody>
+      </p:sp>
+      <p:sp>
+        <p:nvSpPr>
+          <p:cNvPr id="19" name="Rectangle 18"/>
+          <p:cNvSpPr/>
+          <p:nvPr/>
+        </p:nvSpPr>
+        <p:spPr>
+          <a:xfrm>
+            <a:off x="640080" y="3438144"/>
+            <a:ext cx="73152" cy="274320"/>
+          </a:xfrm>
+          <a:prstGeom prst="rect">
+            <a:avLst/>
+          </a:prstGeom>
+          <a:solidFill>
+            <a:srgbClr val="269CCB"/>
+          </a:solidFill>
+          <a:ln>
+            <a:noFill/>
+          </a:ln>
+        </p:spPr>
+        <p:style>
+          <a:lnRef idx="1">
+            <a:schemeClr val="accent1"/>
+          </a:lnRef>
+          <a:fillRef idx="3">
+            <a:schemeClr val="accent1"/>
+          </a:fillRef>
+          <a:effectRef idx="2">
+            <a:schemeClr val="accent1"/>
+          </a:effectRef>
+          <a:fontRef idx="minor">
+            <a:schemeClr val="lt1"/>
+          </a:fontRef>
+        </p:style>
+        <p:txBody>
+          <a:bodyPr rtlCol="0" anchor="ctr"/>
+          <a:lstStyle/>
+          <a:p>
+            <a:pPr algn="ctr"/>
+          </a:p>
+        </p:txBody>
+      </p:sp>
+      <p:sp>
+        <p:nvSpPr>
+          <p:cNvPr id="20" name="TextBox 19"/>
+          <p:cNvSpPr txBox="1"/>
+          <p:nvPr/>
+        </p:nvSpPr>
+        <p:spPr>
+          <a:xfrm>
+            <a:off x="1097280" y="3383280"/>
+            <a:ext cx="10362895" cy="402336"/>
+          </a:xfrm>
+          <a:prstGeom prst="rect">
+            <a:avLst/>
+          </a:prstGeom>
+          <a:noFill/>
+        </p:spPr>
+        <p:txBody>
+          <a:bodyPr wrap="square" anchor="ctr"/>
+          <a:lstStyle/>
+          <a:p>
+            <a:r>
+              <a:rPr sz="1500" b="0" i="0">
+                <a:solidFill>
+                  <a:srgbClr val="333333"/>
+                </a:solidFill>
+                <a:latin typeface="Calibri"/>
+              </a:rPr>
+              <a:t>□ ¿La vista deja fuera el email, y «column_privileges» devuelve exactamente 2 filas?</a:t>
+            </a:r>
+          </a:p>
+        </p:txBody>
+      </p:sp>
+      <p:sp>
+        <p:nvSpPr>
+          <p:cNvPr id="21" name="Rounded Rectangle 20"/>
+          <p:cNvSpPr/>
+          <p:nvPr/>
+        </p:nvSpPr>
+        <p:spPr>
+          <a:xfrm>
+            <a:off x="457200" y="3968496"/>
+            <a:ext cx="11277295" cy="566928"/>
+          </a:xfrm>
+          <a:prstGeom prst="roundRect">
+            <a:avLst>
+              <a:gd name="adj" fmla="val 12000"/>
+            </a:avLst>
+          </a:prstGeom>
+          <a:solidFill>
+            <a:srgbClr val="F2F2F2"/>
+          </a:solidFill>
+          <a:ln>
+            <a:noFill/>
+          </a:ln>
+        </p:spPr>
+        <p:style>
+          <a:lnRef idx="1">
+            <a:schemeClr val="accent1"/>
+          </a:lnRef>
+          <a:fillRef idx="3">
+            <a:schemeClr val="accent1"/>
+          </a:fillRef>
+          <a:effectRef idx="2">
+            <a:schemeClr val="accent1"/>
+          </a:effectRef>
+          <a:fontRef idx="minor">
+            <a:schemeClr val="lt1"/>
+          </a:fontRef>
+        </p:style>
+        <p:txBody>
+          <a:bodyPr rtlCol="0" anchor="ctr"/>
+          <a:lstStyle/>
+          <a:p>
+            <a:pPr algn="ctr"/>
+          </a:p>
+        </p:txBody>
+      </p:sp>
+      <p:sp>
+        <p:nvSpPr>
+          <p:cNvPr id="22" name="Rectangle 21"/>
+          <p:cNvSpPr/>
+          <p:nvPr/>
+        </p:nvSpPr>
+        <p:spPr>
+          <a:xfrm>
+            <a:off x="640080" y="4114800"/>
+            <a:ext cx="274320" cy="274320"/>
+          </a:xfrm>
+          <a:prstGeom prst="rect">
+            <a:avLst/>
+          </a:prstGeom>
+          <a:solidFill>
+            <a:srgbClr val="FFFFFF"/>
+          </a:solidFill>
+          <a:ln>
+            <a:solidFill>
+              <a:srgbClr val="333333"/>
+            </a:solidFill>
+          </a:ln>
+        </p:spPr>
+        <p:style>
+          <a:lnRef idx="1">
+            <a:schemeClr val="accent1"/>
+          </a:lnRef>
+          <a:fillRef idx="3">
+            <a:schemeClr val="accent1"/>
+          </a:fillRef>
+          <a:effectRef idx="2">
+            <a:schemeClr val="accent1"/>
+          </a:effectRef>
+          <a:fontRef idx="minor">
+            <a:schemeClr val="lt1"/>
+          </a:fontRef>
+        </p:style>
+        <p:txBody>
+          <a:bodyPr rtlCol="0" anchor="ctr"/>
+          <a:lstStyle/>
+          <a:p>
+            <a:pPr algn="ctr"/>
+          </a:p>
+        </p:txBody>
+      </p:sp>
+      <p:sp>
+        <p:nvSpPr>
+          <p:cNvPr id="23" name="Rectangle 22"/>
+          <p:cNvSpPr/>
+          <p:nvPr/>
+        </p:nvSpPr>
+        <p:spPr>
+          <a:xfrm>
+            <a:off x="640080" y="4114800"/>
+            <a:ext cx="73152" cy="274320"/>
+          </a:xfrm>
+          <a:prstGeom prst="rect">
+            <a:avLst/>
+          </a:prstGeom>
+          <a:solidFill>
+            <a:srgbClr val="269CCB"/>
+          </a:solidFill>
+          <a:ln>
+            <a:noFill/>
+          </a:ln>
+        </p:spPr>
+        <p:style>
+          <a:lnRef idx="1">
+            <a:schemeClr val="accent1"/>
+          </a:lnRef>
+          <a:fillRef idx="3">
+            <a:schemeClr val="accent1"/>
+          </a:fillRef>
+          <a:effectRef idx="2">
+            <a:schemeClr val="accent1"/>
+          </a:effectRef>
+          <a:fontRef idx="minor">
+            <a:schemeClr val="lt1"/>
+          </a:fontRef>
+        </p:style>
+        <p:txBody>
+          <a:bodyPr rtlCol="0" anchor="ctr"/>
+          <a:lstStyle/>
+          <a:p>
+            <a:pPr algn="ctr"/>
+          </a:p>
+        </p:txBody>
+      </p:sp>
+      <p:sp>
+        <p:nvSpPr>
+          <p:cNvPr id="24" name="TextBox 23"/>
+          <p:cNvSpPr txBox="1"/>
+          <p:nvPr/>
+        </p:nvSpPr>
+        <p:spPr>
+          <a:xfrm>
+            <a:off x="1097280" y="4059936"/>
+            <a:ext cx="10362895" cy="402336"/>
+          </a:xfrm>
+          <a:prstGeom prst="rect">
+            <a:avLst/>
+          </a:prstGeom>
+          <a:noFill/>
+        </p:spPr>
+        <p:txBody>
+          <a:bodyPr wrap="square" anchor="ctr"/>
+          <a:lstStyle/>
+          <a:p>
+            <a:r>
+              <a:rPr sz="1500" b="0" i="0">
+                <a:solidFill>
+                  <a:srgbClr val="333333"/>
+                </a:solidFill>
+                <a:latin typeface="Calibri"/>
+              </a:rPr>
+              <a:t>□ ¿La matriz tiene las 10 filas llenas y los «sp_» con E, no con S ni I?</a:t>
+            </a:r>
+          </a:p>
+        </p:txBody>
+      </p:sp>
+      <p:sp>
+        <p:nvSpPr>
+          <p:cNvPr id="25" name="Rounded Rectangle 24"/>
+          <p:cNvSpPr/>
+          <p:nvPr/>
+        </p:nvSpPr>
+        <p:spPr>
+          <a:xfrm>
+            <a:off x="457200" y="4645152"/>
+            <a:ext cx="11277295" cy="566928"/>
+          </a:xfrm>
+          <a:prstGeom prst="roundRect">
+            <a:avLst>
+              <a:gd name="adj" fmla="val 12000"/>
+            </a:avLst>
+          </a:prstGeom>
+          <a:solidFill>
+            <a:srgbClr val="F2F2F2"/>
+          </a:solidFill>
+          <a:ln>
+            <a:noFill/>
+          </a:ln>
+        </p:spPr>
+        <p:style>
+          <a:lnRef idx="1">
+            <a:schemeClr val="accent1"/>
+          </a:lnRef>
+          <a:fillRef idx="3">
+            <a:schemeClr val="accent1"/>
+          </a:fillRef>
+          <a:effectRef idx="2">
+            <a:schemeClr val="accent1"/>
+          </a:effectRef>
+          <a:fontRef idx="minor">
+            <a:schemeClr val="lt1"/>
+          </a:fontRef>
+        </p:style>
+        <p:txBody>
+          <a:bodyPr rtlCol="0" anchor="ctr"/>
+          <a:lstStyle/>
+          <a:p>
+            <a:pPr algn="ctr"/>
+          </a:p>
+        </p:txBody>
+      </p:sp>
+      <p:sp>
+        <p:nvSpPr>
+          <p:cNvPr id="26" name="Rectangle 25"/>
+          <p:cNvSpPr/>
+          <p:nvPr/>
+        </p:nvSpPr>
+        <p:spPr>
+          <a:xfrm>
+            <a:off x="640080" y="4791456"/>
+            <a:ext cx="274320" cy="274320"/>
+          </a:xfrm>
+          <a:prstGeom prst="rect">
+            <a:avLst/>
+          </a:prstGeom>
+          <a:solidFill>
+            <a:srgbClr val="FFFFFF"/>
+          </a:solidFill>
+          <a:ln>
+            <a:solidFill>
+              <a:srgbClr val="333333"/>
+            </a:solidFill>
+          </a:ln>
+        </p:spPr>
+        <p:style>
+          <a:lnRef idx="1">
+            <a:schemeClr val="accent1"/>
+          </a:lnRef>
+          <a:fillRef idx="3">
+            <a:schemeClr val="accent1"/>
+          </a:fillRef>
+          <a:effectRef idx="2">
+            <a:schemeClr val="accent1"/>
+          </a:effectRef>
+          <a:fontRef idx="minor">
+            <a:schemeClr val="lt1"/>
+          </a:fontRef>
+        </p:style>
+        <p:txBody>
+          <a:bodyPr rtlCol="0" anchor="ctr"/>
+          <a:lstStyle/>
+          <a:p>
+            <a:pPr algn="ctr"/>
+          </a:p>
+        </p:txBody>
+      </p:sp>
+      <p:sp>
+        <p:nvSpPr>
+          <p:cNvPr id="27" name="Rectangle 26"/>
+          <p:cNvSpPr/>
+          <p:nvPr/>
+        </p:nvSpPr>
+        <p:spPr>
+          <a:xfrm>
+            <a:off x="640080" y="4791456"/>
+            <a:ext cx="73152" cy="274320"/>
+          </a:xfrm>
+          <a:prstGeom prst="rect">
+            <a:avLst/>
+          </a:prstGeom>
+          <a:solidFill>
+            <a:srgbClr val="269CCB"/>
+          </a:solidFill>
+          <a:ln>
+            <a:noFill/>
+          </a:ln>
+        </p:spPr>
+        <p:style>
+          <a:lnRef idx="1">
+            <a:schemeClr val="accent1"/>
+          </a:lnRef>
+          <a:fillRef idx="3">
+            <a:schemeClr val="accent1"/>
+          </a:fillRef>
+          <a:effectRef idx="2">
+            <a:schemeClr val="accent1"/>
+          </a:effectRef>
+          <a:fontRef idx="minor">
+            <a:schemeClr val="lt1"/>
+          </a:fontRef>
+        </p:style>
+        <p:txBody>
+          <a:bodyPr rtlCol="0" anchor="ctr"/>
+          <a:lstStyle/>
+          <a:p>
+            <a:pPr algn="ctr"/>
+          </a:p>
+        </p:txBody>
+      </p:sp>
+      <p:sp>
+        <p:nvSpPr>
+          <p:cNvPr id="28" name="TextBox 27"/>
+          <p:cNvSpPr txBox="1"/>
+          <p:nvPr/>
+        </p:nvSpPr>
+        <p:spPr>
+          <a:xfrm>
+            <a:off x="1097280" y="4736592"/>
+            <a:ext cx="10362895" cy="402336"/>
+          </a:xfrm>
+          <a:prstGeom prst="rect">
+            <a:avLst/>
+          </a:prstGeom>
+          <a:noFill/>
+        </p:spPr>
+        <p:txBody>
+          <a:bodyPr wrap="square" anchor="ctr"/>
+          <a:lstStyle/>
+          <a:p>
+            <a:r>
+              <a:rPr sz="1500" b="0" i="0">
+                <a:solidFill>
+                  <a:srgbClr val="333333"/>
+                </a:solidFill>
+                <a:latin typeface="Calibri"/>
+              </a:rPr>
+              <a:t>□ ¿La política dice quién aprueba y en cuánto tiempo, y trae la prueba negativa con «SET ROLE»?</a:t>
+            </a:r>
+          </a:p>
+        </p:txBody>
+      </p:sp>
+      <p:sp>
+        <p:nvSpPr>
+          <p:cNvPr id="29" name="TextBox 28"/>
+          <p:cNvSpPr txBox="1"/>
+          <p:nvPr/>
+        </p:nvSpPr>
+        <p:spPr>
+          <a:xfrm>
+            <a:off x="11185855" y="6473952"/>
+            <a:ext cx="640080" cy="274320"/>
           </a:xfrm>
           <a:prstGeom prst="rect">
             <a:avLst/>
@@ -19562,86 +20490,15 @@
           </a:bodyPr>
           <a:lstStyle/>
           <a:p>
-            <a:pPr algn="ctr">
-              <a:spcAft>
-                <a:spcPts val="600"/>
-              </a:spcAft>
-            </a:pPr>
-            <a:r>
-              <a:rPr sz="1600" b="0" i="0">
-                <a:solidFill>
-                  <a:srgbClr val="333333"/>
-                </a:solidFill>
-                <a:latin typeface="Calibri"/>
-              </a:rPr>
-              <a:t>Plan de roles/privilegios de VetCare</a:t>
-            </a:r>
-          </a:p>
-          <a:p>
-            <a:pPr algn="ctr">
-              <a:spcAft>
-                <a:spcPts val="600"/>
-              </a:spcAft>
-            </a:pPr>
-            <a:r>
-              <a:rPr sz="1600" b="0" i="0">
-                <a:solidFill>
-                  <a:srgbClr val="333333"/>
-                </a:solidFill>
-                <a:latin typeface="Calibri"/>
-              </a:rPr>
-              <a:t>Entregable: Documento Roles_VetCare + script GRANT/REVOKE ejecutado en la plataforma del curso</a:t>
-            </a:r>
-          </a:p>
-          <a:p>
-            <a:pPr algn="ctr">
-              <a:spcAft>
-                <a:spcPts val="600"/>
-              </a:spcAft>
-            </a:pPr>
-            <a:r>
-              <a:rPr sz="1600" b="0" i="0">
-                <a:solidFill>
-                  <a:srgbClr val="333333"/>
-                </a:solidFill>
-                <a:latin typeface="Calibri"/>
-              </a:rPr>
-              <a:t>Siguiente clase: continuar el hilo del PI segun plan</a:t>
-            </a:r>
-          </a:p>
-        </p:txBody>
-      </p:sp>
-      <p:sp>
-        <p:nvSpPr>
-          <p:cNvPr id="6" name="TextBox 5"/>
-          <p:cNvSpPr txBox="1"/>
-          <p:nvPr/>
-        </p:nvSpPr>
-        <p:spPr>
-          <a:xfrm>
-            <a:off x="457200" y="4754880"/>
-            <a:ext cx="11277295" cy="640080"/>
-          </a:xfrm>
-          <a:prstGeom prst="rect">
-            <a:avLst/>
-          </a:prstGeom>
-          <a:noFill/>
-        </p:spPr>
-        <p:txBody>
-          <a:bodyPr wrap="square">
-            <a:spAutoFit/>
-          </a:bodyPr>
-          <a:lstStyle/>
-          <a:p>
-            <a:pPr algn="ctr"/>
-            <a:r>
-              <a:rPr sz="2000" b="1" i="0">
-                <a:solidFill>
-                  <a:srgbClr val="269CCB"/>
-                </a:solidFill>
-                <a:latin typeface="Calibri"/>
-              </a:rPr>
-              <a:t>Teoria breve · practica = PI</a:t>
+            <a:pPr algn="r"/>
+            <a:r>
+              <a:rPr sz="1100" b="0" i="0">
+                <a:solidFill>
+                  <a:srgbClr val="666666"/>
+                </a:solidFill>
+                <a:latin typeface="Calibri"/>
+              </a:rPr>
+              <a:t>49</a:t>
             </a:r>
           </a:p>
         </p:txBody>
@@ -19926,6 +20783,1153 @@
                 <a:latin typeface="Calibri"/>
               </a:rPr>
               <a:t>5</a:t>
+            </a:r>
+          </a:p>
+        </p:txBody>
+      </p:sp>
+    </p:spTree>
+  </p:cSld>
+  <p:clrMapOvr>
+    <a:masterClrMapping/>
+  </p:clrMapOvr>
+</p:sld>
+</file>
+
+<file path=ppt/slides/slide50.xml><?xml version="1.0" encoding="utf-8"?>
+<p:sld xmlns:a="http://schemas.openxmlformats.org/drawingml/2006/main" xmlns:p="http://schemas.openxmlformats.org/presentationml/2006/main" xmlns:r="http://schemas.openxmlformats.org/officeDocument/2006/relationships">
+  <p:cSld>
+    <p:bg>
+      <p:bgPr>
+        <a:solidFill>
+          <a:srgbClr val="FFFFFF"/>
+        </a:solidFill>
+        <a:effectLst/>
+      </p:bgPr>
+    </p:bg>
+    <p:spTree>
+      <p:nvGrpSpPr>
+        <p:cNvPr id="1" name=""/>
+        <p:cNvGrpSpPr/>
+        <p:nvPr/>
+      </p:nvGrpSpPr>
+      <p:grpSpPr/>
+      <p:sp>
+        <p:nvSpPr>
+          <p:cNvPr id="2" name="Rectangle 1"/>
+          <p:cNvSpPr/>
+          <p:nvPr/>
+        </p:nvSpPr>
+        <p:spPr>
+          <a:xfrm>
+            <a:off x="0" y="0"/>
+            <a:ext cx="12191695" cy="960120"/>
+          </a:xfrm>
+          <a:prstGeom prst="rect">
+            <a:avLst/>
+          </a:prstGeom>
+          <a:solidFill>
+            <a:srgbClr val="095292"/>
+          </a:solidFill>
+          <a:ln>
+            <a:noFill/>
+          </a:ln>
+        </p:spPr>
+        <p:style>
+          <a:lnRef idx="1">
+            <a:schemeClr val="accent1"/>
+          </a:lnRef>
+          <a:fillRef idx="3">
+            <a:schemeClr val="accent1"/>
+          </a:fillRef>
+          <a:effectRef idx="2">
+            <a:schemeClr val="accent1"/>
+          </a:effectRef>
+          <a:fontRef idx="minor">
+            <a:schemeClr val="lt1"/>
+          </a:fontRef>
+        </p:style>
+        <p:txBody>
+          <a:bodyPr rtlCol="0" anchor="ctr"/>
+          <a:lstStyle/>
+          <a:p>
+            <a:pPr algn="ctr"/>
+          </a:p>
+        </p:txBody>
+      </p:sp>
+      <p:sp>
+        <p:nvSpPr>
+          <p:cNvPr id="3" name="Rectangle 2"/>
+          <p:cNvSpPr/>
+          <p:nvPr/>
+        </p:nvSpPr>
+        <p:spPr>
+          <a:xfrm>
+            <a:off x="0" y="960120"/>
+            <a:ext cx="12191695" cy="41148"/>
+          </a:xfrm>
+          <a:prstGeom prst="rect">
+            <a:avLst/>
+          </a:prstGeom>
+          <a:solidFill>
+            <a:srgbClr val="FFD000"/>
+          </a:solidFill>
+          <a:ln>
+            <a:noFill/>
+          </a:ln>
+        </p:spPr>
+        <p:style>
+          <a:lnRef idx="1">
+            <a:schemeClr val="accent1"/>
+          </a:lnRef>
+          <a:fillRef idx="3">
+            <a:schemeClr val="accent1"/>
+          </a:fillRef>
+          <a:effectRef idx="2">
+            <a:schemeClr val="accent1"/>
+          </a:effectRef>
+          <a:fontRef idx="minor">
+            <a:schemeClr val="lt1"/>
+          </a:fontRef>
+        </p:style>
+        <p:txBody>
+          <a:bodyPr rtlCol="0" anchor="ctr"/>
+          <a:lstStyle/>
+          <a:p>
+            <a:pPr algn="ctr"/>
+          </a:p>
+        </p:txBody>
+      </p:sp>
+      <p:sp>
+        <p:nvSpPr>
+          <p:cNvPr id="4" name="TextBox 3"/>
+          <p:cNvSpPr txBox="1"/>
+          <p:nvPr/>
+        </p:nvSpPr>
+        <p:spPr>
+          <a:xfrm>
+            <a:off x="457200" y="164592"/>
+            <a:ext cx="11277295" cy="502920"/>
+          </a:xfrm>
+          <a:prstGeom prst="rect">
+            <a:avLst/>
+          </a:prstGeom>
+          <a:noFill/>
+        </p:spPr>
+        <p:txBody>
+          <a:bodyPr wrap="square">
+            <a:spAutoFit/>
+          </a:bodyPr>
+          <a:lstStyle/>
+          <a:p>
+            <a:r>
+              <a:rPr sz="2600" b="1" i="0">
+                <a:solidFill>
+                  <a:srgbClr val="FFFFFF"/>
+                </a:solidFill>
+                <a:latin typeface="Calibri"/>
+              </a:rPr>
+              <a:t>Criterios de exito / entregable</a:t>
+            </a:r>
+          </a:p>
+        </p:txBody>
+      </p:sp>
+      <p:sp>
+        <p:nvSpPr>
+          <p:cNvPr id="5" name="TextBox 4"/>
+          <p:cNvSpPr txBox="1"/>
+          <p:nvPr/>
+        </p:nvSpPr>
+        <p:spPr>
+          <a:xfrm>
+            <a:off x="457200" y="1170432"/>
+            <a:ext cx="11277295" cy="5230368"/>
+          </a:xfrm>
+          <a:prstGeom prst="rect">
+            <a:avLst/>
+          </a:prstGeom>
+          <a:noFill/>
+        </p:spPr>
+        <p:txBody>
+          <a:bodyPr wrap="square">
+            <a:spAutoFit/>
+          </a:bodyPr>
+          <a:lstStyle/>
+          <a:p>
+            <a:pPr>
+              <a:spcAft>
+                <a:spcPts val="800"/>
+              </a:spcAft>
+            </a:pPr>
+            <a:r>
+              <a:rPr sz="2000" b="0" i="0">
+                <a:solidFill>
+                  <a:srgbClr val="333333"/>
+                </a:solidFill>
+                <a:latin typeface="Calibri"/>
+              </a:rPr>
+              <a:t>–   </a:t>
+            </a:r>
+            <a:r>
+              <a:rPr sz="2000" b="1" i="0">
+                <a:solidFill>
+                  <a:srgbClr val="333333"/>
+                </a:solidFill>
+                <a:latin typeface="Calibri"/>
+              </a:rPr>
+              <a:t>Entregable:</a:t>
+            </a:r>
+            <a:r>
+              <a:rPr sz="2000" b="0" i="0">
+                <a:solidFill>
+                  <a:srgbClr val="333333"/>
+                </a:solidFill>
+                <a:latin typeface="Calibri"/>
+              </a:rPr>
+              <a:t> Documento Roles_VetCare + script GRANT/REVOKE ejecutado en la plataforma del curso</a:t>
+            </a:r>
+          </a:p>
+          <a:p>
+            <a:pPr>
+              <a:spcAft>
+                <a:spcPts val="800"/>
+              </a:spcAft>
+            </a:pPr>
+            <a:r>
+              <a:rPr sz="2000" b="0" i="0">
+                <a:solidFill>
+                  <a:srgbClr val="333333"/>
+                </a:solidFill>
+                <a:latin typeface="Calibri"/>
+              </a:rPr>
+              <a:t>–   Evidencia: el SQL y su salida quedan guardados en cada pregunta de la plataforma del curso.</a:t>
+            </a:r>
+          </a:p>
+          <a:p>
+            <a:pPr>
+              <a:spcAft>
+                <a:spcPts val="800"/>
+              </a:spcAft>
+            </a:pPr>
+            <a:r>
+              <a:rPr sz="2000" b="0" i="0">
+                <a:solidFill>
+                  <a:srgbClr val="333333"/>
+                </a:solidFill>
+                <a:latin typeface="Calibri"/>
+              </a:rPr>
+              <a:t>–   Conserva copia en tu carpeta del PI (los .sql que pide el entregable).</a:t>
+            </a:r>
+          </a:p>
+          <a:p>
+            <a:pPr>
+              <a:spcAft>
+                <a:spcPts val="800"/>
+              </a:spcAft>
+            </a:pPr>
+            <a:r>
+              <a:rPr sz="2000" b="0" i="0">
+                <a:solidFill>
+                  <a:srgbClr val="333333"/>
+                </a:solidFill>
+                <a:latin typeface="Calibri"/>
+              </a:rPr>
+              <a:t>–   Actualizar checklist PI (que criterio de rubrica avanzo).</a:t>
+            </a:r>
+          </a:p>
+          <a:p>
+            <a:pPr>
+              <a:spcAft>
+                <a:spcPts val="800"/>
+              </a:spcAft>
+            </a:pPr>
+            <a:r>
+              <a:rPr sz="2000" b="0" i="0">
+                <a:solidFill>
+                  <a:srgbClr val="333333"/>
+                </a:solidFill>
+                <a:latin typeface="Calibri"/>
+              </a:rPr>
+              <a:t>–   </a:t>
+            </a:r>
+            <a:r>
+              <a:rPr sz="2000" b="1" i="0">
+                <a:solidFill>
+                  <a:srgbClr val="333333"/>
+                </a:solidFill>
+                <a:latin typeface="Calibri"/>
+              </a:rPr>
+              <a:t>Entrega en la plataforma del curso</a:t>
+            </a:r>
+            <a:r>
+              <a:rPr sz="2000" b="0" i="0">
+                <a:solidFill>
+                  <a:srgbClr val="333333"/>
+                </a:solidFill>
+                <a:latin typeface="Calibri"/>
+              </a:rPr>
+              <a:t> — en la fecha que indique el docente.</a:t>
+            </a:r>
+          </a:p>
+        </p:txBody>
+      </p:sp>
+      <p:sp>
+        <p:nvSpPr>
+          <p:cNvPr id="6" name="TextBox 5"/>
+          <p:cNvSpPr txBox="1"/>
+          <p:nvPr/>
+        </p:nvSpPr>
+        <p:spPr>
+          <a:xfrm>
+            <a:off x="11185855" y="6473952"/>
+            <a:ext cx="640080" cy="274320"/>
+          </a:xfrm>
+          <a:prstGeom prst="rect">
+            <a:avLst/>
+          </a:prstGeom>
+          <a:noFill/>
+        </p:spPr>
+        <p:txBody>
+          <a:bodyPr wrap="square">
+            <a:spAutoFit/>
+          </a:bodyPr>
+          <a:lstStyle/>
+          <a:p>
+            <a:pPr algn="r"/>
+            <a:r>
+              <a:rPr sz="1100" b="0" i="0">
+                <a:solidFill>
+                  <a:srgbClr val="666666"/>
+                </a:solidFill>
+                <a:latin typeface="Calibri"/>
+              </a:rPr>
+              <a:t>50</a:t>
+            </a:r>
+          </a:p>
+        </p:txBody>
+      </p:sp>
+    </p:spTree>
+  </p:cSld>
+  <p:clrMapOvr>
+    <a:masterClrMapping/>
+  </p:clrMapOvr>
+</p:sld>
+</file>
+
+<file path=ppt/slides/slide51.xml><?xml version="1.0" encoding="utf-8"?>
+<p:sld xmlns:a="http://schemas.openxmlformats.org/drawingml/2006/main" xmlns:p="http://schemas.openxmlformats.org/presentationml/2006/main" xmlns:r="http://schemas.openxmlformats.org/officeDocument/2006/relationships">
+  <p:cSld>
+    <p:bg>
+      <p:bgPr>
+        <a:solidFill>
+          <a:srgbClr val="FFFFFF"/>
+        </a:solidFill>
+        <a:effectLst/>
+      </p:bgPr>
+    </p:bg>
+    <p:spTree>
+      <p:nvGrpSpPr>
+        <p:cNvPr id="1" name=""/>
+        <p:cNvGrpSpPr/>
+        <p:nvPr/>
+      </p:nvGrpSpPr>
+      <p:grpSpPr/>
+      <p:sp>
+        <p:nvSpPr>
+          <p:cNvPr id="2" name="Rectangle 1"/>
+          <p:cNvSpPr/>
+          <p:nvPr/>
+        </p:nvSpPr>
+        <p:spPr>
+          <a:xfrm>
+            <a:off x="0" y="0"/>
+            <a:ext cx="12191695" cy="960120"/>
+          </a:xfrm>
+          <a:prstGeom prst="rect">
+            <a:avLst/>
+          </a:prstGeom>
+          <a:solidFill>
+            <a:srgbClr val="095292"/>
+          </a:solidFill>
+          <a:ln>
+            <a:noFill/>
+          </a:ln>
+        </p:spPr>
+        <p:style>
+          <a:lnRef idx="1">
+            <a:schemeClr val="accent1"/>
+          </a:lnRef>
+          <a:fillRef idx="3">
+            <a:schemeClr val="accent1"/>
+          </a:fillRef>
+          <a:effectRef idx="2">
+            <a:schemeClr val="accent1"/>
+          </a:effectRef>
+          <a:fontRef idx="minor">
+            <a:schemeClr val="lt1"/>
+          </a:fontRef>
+        </p:style>
+        <p:txBody>
+          <a:bodyPr rtlCol="0" anchor="ctr"/>
+          <a:lstStyle/>
+          <a:p>
+            <a:pPr algn="ctr"/>
+          </a:p>
+        </p:txBody>
+      </p:sp>
+      <p:sp>
+        <p:nvSpPr>
+          <p:cNvPr id="3" name="Rectangle 2"/>
+          <p:cNvSpPr/>
+          <p:nvPr/>
+        </p:nvSpPr>
+        <p:spPr>
+          <a:xfrm>
+            <a:off x="0" y="960120"/>
+            <a:ext cx="12191695" cy="41148"/>
+          </a:xfrm>
+          <a:prstGeom prst="rect">
+            <a:avLst/>
+          </a:prstGeom>
+          <a:solidFill>
+            <a:srgbClr val="FFD000"/>
+          </a:solidFill>
+          <a:ln>
+            <a:noFill/>
+          </a:ln>
+        </p:spPr>
+        <p:style>
+          <a:lnRef idx="1">
+            <a:schemeClr val="accent1"/>
+          </a:lnRef>
+          <a:fillRef idx="3">
+            <a:schemeClr val="accent1"/>
+          </a:fillRef>
+          <a:effectRef idx="2">
+            <a:schemeClr val="accent1"/>
+          </a:effectRef>
+          <a:fontRef idx="minor">
+            <a:schemeClr val="lt1"/>
+          </a:fontRef>
+        </p:style>
+        <p:txBody>
+          <a:bodyPr rtlCol="0" anchor="ctr"/>
+          <a:lstStyle/>
+          <a:p>
+            <a:pPr algn="ctr"/>
+          </a:p>
+        </p:txBody>
+      </p:sp>
+      <p:sp>
+        <p:nvSpPr>
+          <p:cNvPr id="4" name="TextBox 3"/>
+          <p:cNvSpPr txBox="1"/>
+          <p:nvPr/>
+        </p:nvSpPr>
+        <p:spPr>
+          <a:xfrm>
+            <a:off x="457200" y="164592"/>
+            <a:ext cx="11277295" cy="502920"/>
+          </a:xfrm>
+          <a:prstGeom prst="rect">
+            <a:avLst/>
+          </a:prstGeom>
+          <a:noFill/>
+        </p:spPr>
+        <p:txBody>
+          <a:bodyPr wrap="square">
+            <a:spAutoFit/>
+          </a:bodyPr>
+          <a:lstStyle/>
+          <a:p>
+            <a:r>
+              <a:rPr sz="2600" b="1" i="0">
+                <a:solidFill>
+                  <a:srgbClr val="FFFFFF"/>
+                </a:solidFill>
+                <a:latin typeface="Calibri"/>
+              </a:rPr>
+              <a:t>Para el PI esta semana</a:t>
+            </a:r>
+          </a:p>
+        </p:txBody>
+      </p:sp>
+      <p:sp>
+        <p:nvSpPr>
+          <p:cNvPr id="5" name="Rounded Rectangle 4"/>
+          <p:cNvSpPr/>
+          <p:nvPr/>
+        </p:nvSpPr>
+        <p:spPr>
+          <a:xfrm>
+            <a:off x="457200" y="1261872"/>
+            <a:ext cx="11277295" cy="1051560"/>
+          </a:xfrm>
+          <a:prstGeom prst="roundRect">
+            <a:avLst>
+              <a:gd name="adj" fmla="val 12000"/>
+            </a:avLst>
+          </a:prstGeom>
+          <a:solidFill>
+            <a:srgbClr val="E8F4FA"/>
+          </a:solidFill>
+          <a:ln>
+            <a:noFill/>
+          </a:ln>
+        </p:spPr>
+        <p:style>
+          <a:lnRef idx="1">
+            <a:schemeClr val="accent1"/>
+          </a:lnRef>
+          <a:fillRef idx="3">
+            <a:schemeClr val="accent1"/>
+          </a:fillRef>
+          <a:effectRef idx="2">
+            <a:schemeClr val="accent1"/>
+          </a:effectRef>
+          <a:fontRef idx="minor">
+            <a:schemeClr val="lt1"/>
+          </a:fontRef>
+        </p:style>
+        <p:txBody>
+          <a:bodyPr rtlCol="0" anchor="ctr"/>
+          <a:lstStyle/>
+          <a:p>
+            <a:pPr algn="ctr"/>
+          </a:p>
+        </p:txBody>
+      </p:sp>
+      <p:sp>
+        <p:nvSpPr>
+          <p:cNvPr id="6" name="Rectangle 5"/>
+          <p:cNvSpPr/>
+          <p:nvPr/>
+        </p:nvSpPr>
+        <p:spPr>
+          <a:xfrm>
+            <a:off x="457200" y="1261872"/>
+            <a:ext cx="128016" cy="1051560"/>
+          </a:xfrm>
+          <a:prstGeom prst="rect">
+            <a:avLst/>
+          </a:prstGeom>
+          <a:solidFill>
+            <a:srgbClr val="269CCB"/>
+          </a:solidFill>
+          <a:ln>
+            <a:noFill/>
+          </a:ln>
+        </p:spPr>
+        <p:style>
+          <a:lnRef idx="1">
+            <a:schemeClr val="accent1"/>
+          </a:lnRef>
+          <a:fillRef idx="3">
+            <a:schemeClr val="accent1"/>
+          </a:fillRef>
+          <a:effectRef idx="2">
+            <a:schemeClr val="accent1"/>
+          </a:effectRef>
+          <a:fontRef idx="minor">
+            <a:schemeClr val="lt1"/>
+          </a:fontRef>
+        </p:style>
+        <p:txBody>
+          <a:bodyPr rtlCol="0" anchor="ctr"/>
+          <a:lstStyle/>
+          <a:p>
+            <a:pPr algn="ctr"/>
+          </a:p>
+        </p:txBody>
+      </p:sp>
+      <p:sp>
+        <p:nvSpPr>
+          <p:cNvPr id="7" name="TextBox 6"/>
+          <p:cNvSpPr txBox="1"/>
+          <p:nvPr/>
+        </p:nvSpPr>
+        <p:spPr>
+          <a:xfrm>
+            <a:off x="777240" y="1399031"/>
+            <a:ext cx="10774375" cy="822959"/>
+          </a:xfrm>
+          <a:prstGeom prst="rect">
+            <a:avLst/>
+          </a:prstGeom>
+          <a:noFill/>
+        </p:spPr>
+        <p:txBody>
+          <a:bodyPr wrap="square">
+            <a:spAutoFit/>
+          </a:bodyPr>
+          <a:lstStyle/>
+          <a:p>
+            <a:r>
+              <a:rPr sz="1200" b="1" i="0">
+                <a:solidFill>
+                  <a:srgbClr val="269CCB"/>
+                </a:solidFill>
+                <a:latin typeface="Calibri"/>
+              </a:rPr>
+              <a:t>Info</a:t>
+            </a:r>
+          </a:p>
+          <a:p>
+            <a:pPr>
+              <a:spcBef>
+                <a:spcPts val="400"/>
+              </a:spcBef>
+            </a:pPr>
+            <a:r>
+              <a:rPr sz="1400" b="0" i="0">
+                <a:solidFill>
+                  <a:srgbClr val="333333"/>
+                </a:solidFill>
+                <a:latin typeface="Calibri"/>
+              </a:rPr>
+              <a:t>Hito: Plan de roles/privilegios de VetCare</a:t>
+            </a:r>
+          </a:p>
+        </p:txBody>
+      </p:sp>
+      <p:sp>
+        <p:nvSpPr>
+          <p:cNvPr id="8" name="Rounded Rectangle 7"/>
+          <p:cNvSpPr/>
+          <p:nvPr/>
+        </p:nvSpPr>
+        <p:spPr>
+          <a:xfrm>
+            <a:off x="457200" y="2478024"/>
+            <a:ext cx="11277295" cy="1051560"/>
+          </a:xfrm>
+          <a:prstGeom prst="roundRect">
+            <a:avLst>
+              <a:gd name="adj" fmla="val 12000"/>
+            </a:avLst>
+          </a:prstGeom>
+          <a:solidFill>
+            <a:srgbClr val="FFF8E1"/>
+          </a:solidFill>
+          <a:ln>
+            <a:noFill/>
+          </a:ln>
+        </p:spPr>
+        <p:style>
+          <a:lnRef idx="1">
+            <a:schemeClr val="accent1"/>
+          </a:lnRef>
+          <a:fillRef idx="3">
+            <a:schemeClr val="accent1"/>
+          </a:fillRef>
+          <a:effectRef idx="2">
+            <a:schemeClr val="accent1"/>
+          </a:effectRef>
+          <a:fontRef idx="minor">
+            <a:schemeClr val="lt1"/>
+          </a:fontRef>
+        </p:style>
+        <p:txBody>
+          <a:bodyPr rtlCol="0" anchor="ctr"/>
+          <a:lstStyle/>
+          <a:p>
+            <a:pPr algn="ctr"/>
+          </a:p>
+        </p:txBody>
+      </p:sp>
+      <p:sp>
+        <p:nvSpPr>
+          <p:cNvPr id="9" name="Rectangle 8"/>
+          <p:cNvSpPr/>
+          <p:nvPr/>
+        </p:nvSpPr>
+        <p:spPr>
+          <a:xfrm>
+            <a:off x="457200" y="2478024"/>
+            <a:ext cx="128016" cy="1051560"/>
+          </a:xfrm>
+          <a:prstGeom prst="rect">
+            <a:avLst/>
+          </a:prstGeom>
+          <a:solidFill>
+            <a:srgbClr val="FFD000"/>
+          </a:solidFill>
+          <a:ln>
+            <a:noFill/>
+          </a:ln>
+        </p:spPr>
+        <p:style>
+          <a:lnRef idx="1">
+            <a:schemeClr val="accent1"/>
+          </a:lnRef>
+          <a:fillRef idx="3">
+            <a:schemeClr val="accent1"/>
+          </a:fillRef>
+          <a:effectRef idx="2">
+            <a:schemeClr val="accent1"/>
+          </a:effectRef>
+          <a:fontRef idx="minor">
+            <a:schemeClr val="lt1"/>
+          </a:fontRef>
+        </p:style>
+        <p:txBody>
+          <a:bodyPr rtlCol="0" anchor="ctr"/>
+          <a:lstStyle/>
+          <a:p>
+            <a:pPr algn="ctr"/>
+          </a:p>
+        </p:txBody>
+      </p:sp>
+      <p:sp>
+        <p:nvSpPr>
+          <p:cNvPr id="10" name="TextBox 9"/>
+          <p:cNvSpPr txBox="1"/>
+          <p:nvPr/>
+        </p:nvSpPr>
+        <p:spPr>
+          <a:xfrm>
+            <a:off x="777240" y="2615184"/>
+            <a:ext cx="10774375" cy="822959"/>
+          </a:xfrm>
+          <a:prstGeom prst="rect">
+            <a:avLst/>
+          </a:prstGeom>
+          <a:noFill/>
+        </p:spPr>
+        <p:txBody>
+          <a:bodyPr wrap="square">
+            <a:spAutoFit/>
+          </a:bodyPr>
+          <a:lstStyle/>
+          <a:p>
+            <a:r>
+              <a:rPr sz="1200" b="1" i="0">
+                <a:solidFill>
+                  <a:srgbClr val="FFD000"/>
+                </a:solidFill>
+                <a:latin typeface="Calibri"/>
+              </a:rPr>
+              <a:t>Aclaración</a:t>
+            </a:r>
+          </a:p>
+          <a:p>
+            <a:pPr>
+              <a:spcBef>
+                <a:spcPts val="400"/>
+              </a:spcBef>
+            </a:pPr>
+            <a:r>
+              <a:rPr sz="1400" b="0" i="0">
+                <a:solidFill>
+                  <a:srgbClr val="333333"/>
+                </a:solidFill>
+                <a:latin typeface="Calibri"/>
+              </a:rPr>
+              <a:t>Enunciado completo: Clases/Proyecto Integrador/ (VetCare DB).</a:t>
+            </a:r>
+          </a:p>
+        </p:txBody>
+      </p:sp>
+      <p:sp>
+        <p:nvSpPr>
+          <p:cNvPr id="11" name="Rounded Rectangle 10"/>
+          <p:cNvSpPr/>
+          <p:nvPr/>
+        </p:nvSpPr>
+        <p:spPr>
+          <a:xfrm>
+            <a:off x="457200" y="3694176"/>
+            <a:ext cx="11277295" cy="1051560"/>
+          </a:xfrm>
+          <a:prstGeom prst="roundRect">
+            <a:avLst>
+              <a:gd name="adj" fmla="val 12000"/>
+            </a:avLst>
+          </a:prstGeom>
+          <a:solidFill>
+            <a:srgbClr val="FBE4E4"/>
+          </a:solidFill>
+          <a:ln>
+            <a:noFill/>
+          </a:ln>
+        </p:spPr>
+        <p:style>
+          <a:lnRef idx="1">
+            <a:schemeClr val="accent1"/>
+          </a:lnRef>
+          <a:fillRef idx="3">
+            <a:schemeClr val="accent1"/>
+          </a:fillRef>
+          <a:effectRef idx="2">
+            <a:schemeClr val="accent1"/>
+          </a:effectRef>
+          <a:fontRef idx="minor">
+            <a:schemeClr val="lt1"/>
+          </a:fontRef>
+        </p:style>
+        <p:txBody>
+          <a:bodyPr rtlCol="0" anchor="ctr"/>
+          <a:lstStyle/>
+          <a:p>
+            <a:pPr algn="ctr"/>
+          </a:p>
+        </p:txBody>
+      </p:sp>
+      <p:sp>
+        <p:nvSpPr>
+          <p:cNvPr id="12" name="Rectangle 11"/>
+          <p:cNvSpPr/>
+          <p:nvPr/>
+        </p:nvSpPr>
+        <p:spPr>
+          <a:xfrm>
+            <a:off x="457200" y="3694176"/>
+            <a:ext cx="128016" cy="1051560"/>
+          </a:xfrm>
+          <a:prstGeom prst="rect">
+            <a:avLst/>
+          </a:prstGeom>
+          <a:solidFill>
+            <a:srgbClr val="A02030"/>
+          </a:solidFill>
+          <a:ln>
+            <a:noFill/>
+          </a:ln>
+        </p:spPr>
+        <p:style>
+          <a:lnRef idx="1">
+            <a:schemeClr val="accent1"/>
+          </a:lnRef>
+          <a:fillRef idx="3">
+            <a:schemeClr val="accent1"/>
+          </a:fillRef>
+          <a:effectRef idx="2">
+            <a:schemeClr val="accent1"/>
+          </a:effectRef>
+          <a:fontRef idx="minor">
+            <a:schemeClr val="lt1"/>
+          </a:fontRef>
+        </p:style>
+        <p:txBody>
+          <a:bodyPr rtlCol="0" anchor="ctr"/>
+          <a:lstStyle/>
+          <a:p>
+            <a:pPr algn="ctr"/>
+          </a:p>
+        </p:txBody>
+      </p:sp>
+      <p:sp>
+        <p:nvSpPr>
+          <p:cNvPr id="13" name="TextBox 12"/>
+          <p:cNvSpPr txBox="1"/>
+          <p:nvPr/>
+        </p:nvSpPr>
+        <p:spPr>
+          <a:xfrm>
+            <a:off x="777240" y="3831336"/>
+            <a:ext cx="10774375" cy="822959"/>
+          </a:xfrm>
+          <a:prstGeom prst="rect">
+            <a:avLst/>
+          </a:prstGeom>
+          <a:noFill/>
+        </p:spPr>
+        <p:txBody>
+          <a:bodyPr wrap="square">
+            <a:spAutoFit/>
+          </a:bodyPr>
+          <a:lstStyle/>
+          <a:p>
+            <a:r>
+              <a:rPr sz="1200" b="1" i="0">
+                <a:solidFill>
+                  <a:srgbClr val="A02030"/>
+                </a:solidFill>
+                <a:latin typeface="Calibri"/>
+              </a:rPr>
+              <a:t>Atención</a:t>
+            </a:r>
+          </a:p>
+          <a:p>
+            <a:pPr>
+              <a:spcBef>
+                <a:spcPts val="400"/>
+              </a:spcBef>
+            </a:pPr>
+            <a:r>
+              <a:rPr sz="1400" b="0" i="0">
+                <a:solidFill>
+                  <a:srgbClr val="333333"/>
+                </a:solidFill>
+                <a:latin typeface="Calibri"/>
+              </a:rPr>
+              <a:t>Si el docente asigna taller esta semana, él indica el canal y la fecha.</a:t>
+            </a:r>
+          </a:p>
+        </p:txBody>
+      </p:sp>
+      <p:sp>
+        <p:nvSpPr>
+          <p:cNvPr id="14" name="TextBox 13"/>
+          <p:cNvSpPr txBox="1"/>
+          <p:nvPr/>
+        </p:nvSpPr>
+        <p:spPr>
+          <a:xfrm>
+            <a:off x="11185855" y="6473952"/>
+            <a:ext cx="640080" cy="274320"/>
+          </a:xfrm>
+          <a:prstGeom prst="rect">
+            <a:avLst/>
+          </a:prstGeom>
+          <a:noFill/>
+        </p:spPr>
+        <p:txBody>
+          <a:bodyPr wrap="square">
+            <a:spAutoFit/>
+          </a:bodyPr>
+          <a:lstStyle/>
+          <a:p>
+            <a:pPr algn="r"/>
+            <a:r>
+              <a:rPr sz="1100" b="0" i="0">
+                <a:solidFill>
+                  <a:srgbClr val="666666"/>
+                </a:solidFill>
+                <a:latin typeface="Calibri"/>
+              </a:rPr>
+              <a:t>51</a:t>
+            </a:r>
+          </a:p>
+        </p:txBody>
+      </p:sp>
+    </p:spTree>
+  </p:cSld>
+  <p:clrMapOvr>
+    <a:masterClrMapping/>
+  </p:clrMapOvr>
+</p:sld>
+</file>
+
+<file path=ppt/slides/slide52.xml><?xml version="1.0" encoding="utf-8"?>
+<p:sld xmlns:a="http://schemas.openxmlformats.org/drawingml/2006/main" xmlns:p="http://schemas.openxmlformats.org/presentationml/2006/main" xmlns:r="http://schemas.openxmlformats.org/officeDocument/2006/relationships">
+  <p:cSld>
+    <p:bg>
+      <p:bgPr>
+        <a:solidFill>
+          <a:srgbClr val="FFFFFF"/>
+        </a:solidFill>
+        <a:effectLst/>
+      </p:bgPr>
+    </p:bg>
+    <p:spTree>
+      <p:nvGrpSpPr>
+        <p:cNvPr id="1" name=""/>
+        <p:cNvGrpSpPr/>
+        <p:nvPr/>
+      </p:nvGrpSpPr>
+      <p:grpSpPr/>
+      <p:sp>
+        <p:nvSpPr>
+          <p:cNvPr id="2" name="Rectangle 1"/>
+          <p:cNvSpPr/>
+          <p:nvPr/>
+        </p:nvSpPr>
+        <p:spPr>
+          <a:xfrm>
+            <a:off x="0" y="0"/>
+            <a:ext cx="12191695" cy="164592"/>
+          </a:xfrm>
+          <a:prstGeom prst="rect">
+            <a:avLst/>
+          </a:prstGeom>
+          <a:solidFill>
+            <a:srgbClr val="269CCB"/>
+          </a:solidFill>
+          <a:ln>
+            <a:noFill/>
+          </a:ln>
+        </p:spPr>
+        <p:style>
+          <a:lnRef idx="1">
+            <a:schemeClr val="accent1"/>
+          </a:lnRef>
+          <a:fillRef idx="3">
+            <a:schemeClr val="accent1"/>
+          </a:fillRef>
+          <a:effectRef idx="2">
+            <a:schemeClr val="accent1"/>
+          </a:effectRef>
+          <a:fontRef idx="minor">
+            <a:schemeClr val="lt1"/>
+          </a:fontRef>
+        </p:style>
+        <p:txBody>
+          <a:bodyPr rtlCol="0" anchor="ctr"/>
+          <a:lstStyle/>
+          <a:p>
+            <a:pPr algn="ctr"/>
+          </a:p>
+        </p:txBody>
+      </p:sp>
+      <p:pic>
+        <p:nvPicPr>
+          <p:cNvPr id="3" name="Picture 2" descr="logo_uniajc_color.png"/>
+          <p:cNvPicPr>
+            <a:picLocks noChangeAspect="1"/>
+          </p:cNvPicPr>
+          <p:nvPr/>
+        </p:nvPicPr>
+        <p:blipFill>
+          <a:blip r:embed="rId2"/>
+          <a:stretch>
+            <a:fillRect/>
+          </a:stretch>
+        </p:blipFill>
+        <p:spPr>
+          <a:xfrm>
+            <a:off x="10271455" y="5998464"/>
+            <a:ext cx="1463040" cy="643233"/>
+          </a:xfrm>
+          <a:prstGeom prst="rect">
+            <a:avLst/>
+          </a:prstGeom>
+        </p:spPr>
+      </p:pic>
+      <p:sp>
+        <p:nvSpPr>
+          <p:cNvPr id="4" name="TextBox 3"/>
+          <p:cNvSpPr txBox="1"/>
+          <p:nvPr/>
+        </p:nvSpPr>
+        <p:spPr>
+          <a:xfrm>
+            <a:off x="457200" y="1737360"/>
+            <a:ext cx="11277295" cy="1097280"/>
+          </a:xfrm>
+          <a:prstGeom prst="rect">
+            <a:avLst/>
+          </a:prstGeom>
+          <a:noFill/>
+        </p:spPr>
+        <p:txBody>
+          <a:bodyPr wrap="square" anchor="ctr"/>
+          <a:lstStyle/>
+          <a:p>
+            <a:pPr algn="ctr"/>
+            <a:r>
+              <a:rPr sz="3400" b="1" i="0">
+                <a:solidFill>
+                  <a:srgbClr val="095292"/>
+                </a:solidFill>
+                <a:latin typeface="Calibri"/>
+              </a:rPr>
+              <a:t>Clase 2 · VetCare avanza</a:t>
+            </a:r>
+          </a:p>
+        </p:txBody>
+      </p:sp>
+      <p:sp>
+        <p:nvSpPr>
+          <p:cNvPr id="5" name="TextBox 4"/>
+          <p:cNvSpPr txBox="1"/>
+          <p:nvPr/>
+        </p:nvSpPr>
+        <p:spPr>
+          <a:xfrm>
+            <a:off x="457200" y="3017520"/>
+            <a:ext cx="11277295" cy="1645920"/>
+          </a:xfrm>
+          <a:prstGeom prst="rect">
+            <a:avLst/>
+          </a:prstGeom>
+          <a:noFill/>
+        </p:spPr>
+        <p:txBody>
+          <a:bodyPr wrap="square">
+            <a:spAutoFit/>
+          </a:bodyPr>
+          <a:lstStyle/>
+          <a:p>
+            <a:pPr algn="ctr">
+              <a:spcAft>
+                <a:spcPts val="600"/>
+              </a:spcAft>
+            </a:pPr>
+            <a:r>
+              <a:rPr sz="1600" b="0" i="0">
+                <a:solidFill>
+                  <a:srgbClr val="333333"/>
+                </a:solidFill>
+                <a:latin typeface="Calibri"/>
+              </a:rPr>
+              <a:t>Plan de roles/privilegios de VetCare</a:t>
+            </a:r>
+          </a:p>
+          <a:p>
+            <a:pPr algn="ctr">
+              <a:spcAft>
+                <a:spcPts val="600"/>
+              </a:spcAft>
+            </a:pPr>
+            <a:r>
+              <a:rPr sz="1600" b="0" i="0">
+                <a:solidFill>
+                  <a:srgbClr val="333333"/>
+                </a:solidFill>
+                <a:latin typeface="Calibri"/>
+              </a:rPr>
+              <a:t>Entregable: Documento Roles_VetCare + script GRANT/REVOKE ejecutado en la plataforma del curso</a:t>
+            </a:r>
+          </a:p>
+          <a:p>
+            <a:pPr algn="ctr">
+              <a:spcAft>
+                <a:spcPts val="600"/>
+              </a:spcAft>
+            </a:pPr>
+            <a:r>
+              <a:rPr sz="1600" b="0" i="0">
+                <a:solidFill>
+                  <a:srgbClr val="333333"/>
+                </a:solidFill>
+                <a:latin typeface="Calibri"/>
+              </a:rPr>
+              <a:t>Siguiente clase: continuar el hilo del PI segun plan</a:t>
+            </a:r>
+          </a:p>
+        </p:txBody>
+      </p:sp>
+      <p:sp>
+        <p:nvSpPr>
+          <p:cNvPr id="6" name="TextBox 5"/>
+          <p:cNvSpPr txBox="1"/>
+          <p:nvPr/>
+        </p:nvSpPr>
+        <p:spPr>
+          <a:xfrm>
+            <a:off x="457200" y="4754880"/>
+            <a:ext cx="11277295" cy="640080"/>
+          </a:xfrm>
+          <a:prstGeom prst="rect">
+            <a:avLst/>
+          </a:prstGeom>
+          <a:noFill/>
+        </p:spPr>
+        <p:txBody>
+          <a:bodyPr wrap="square">
+            <a:spAutoFit/>
+          </a:bodyPr>
+          <a:lstStyle/>
+          <a:p>
+            <a:pPr algn="ctr"/>
+            <a:r>
+              <a:rPr sz="2000" b="1" i="0">
+                <a:solidFill>
+                  <a:srgbClr val="269CCB"/>
+                </a:solidFill>
+                <a:latin typeface="Calibri"/>
+              </a:rPr>
+              <a:t>Teoria breve · practica = PI</a:t>
             </a:r>
           </a:p>
         </p:txBody>

--- a/Bases de Datos II/Clases/Clase 2 - Administracion de bases de datos/Presentacion.pptx
+++ b/Bases de Datos II/Clases/Clase 2 - Administracion de bases de datos/Presentacion.pptx
@@ -9,54 +9,46 @@
     <p:sldId id="257" r:id="rId8"/>
     <p:sldId id="258" r:id="rId9"/>
     <p:sldId id="259" r:id="rId10"/>
-    <p:sldId id="260" r:id="rId11"/>
-    <p:sldId id="261" r:id="rId12"/>
-    <p:sldId id="262" r:id="rId13"/>
-    <p:sldId id="263" r:id="rId14"/>
-    <p:sldId id="264" r:id="rId15"/>
-    <p:sldId id="265" r:id="rId16"/>
-    <p:sldId id="266" r:id="rId17"/>
-    <p:sldId id="267" r:id="rId18"/>
-    <p:sldId id="268" r:id="rId19"/>
-    <p:sldId id="269" r:id="rId20"/>
-    <p:sldId id="270" r:id="rId21"/>
-    <p:sldId id="271" r:id="rId22"/>
-    <p:sldId id="272" r:id="rId23"/>
-    <p:sldId id="273" r:id="rId24"/>
-    <p:sldId id="274" r:id="rId25"/>
-    <p:sldId id="275" r:id="rId26"/>
-    <p:sldId id="276" r:id="rId27"/>
-    <p:sldId id="277" r:id="rId28"/>
-    <p:sldId id="278" r:id="rId29"/>
-    <p:sldId id="279" r:id="rId30"/>
-    <p:sldId id="280" r:id="rId31"/>
-    <p:sldId id="281" r:id="rId32"/>
-    <p:sldId id="282" r:id="rId33"/>
-    <p:sldId id="283" r:id="rId34"/>
-    <p:sldId id="284" r:id="rId35"/>
-    <p:sldId id="285" r:id="rId36"/>
-    <p:sldId id="286" r:id="rId37"/>
-    <p:sldId id="287" r:id="rId38"/>
-    <p:sldId id="288" r:id="rId39"/>
-    <p:sldId id="289" r:id="rId40"/>
-    <p:sldId id="290" r:id="rId41"/>
-    <p:sldId id="291" r:id="rId42"/>
-    <p:sldId id="292" r:id="rId43"/>
-    <p:sldId id="293" r:id="rId44"/>
-    <p:sldId id="294" r:id="rId45"/>
-    <p:sldId id="295" r:id="rId46"/>
-    <p:sldId id="296" r:id="rId47"/>
-    <p:sldId id="297" r:id="rId48"/>
-    <p:sldId id="298" r:id="rId49"/>
-    <p:sldId id="299" r:id="rId50"/>
-    <p:sldId id="300" r:id="rId51"/>
-    <p:sldId id="301" r:id="rId52"/>
-    <p:sldId id="302" r:id="rId53"/>
-    <p:sldId id="303" r:id="rId54"/>
-    <p:sldId id="304" r:id="rId55"/>
-    <p:sldId id="305" r:id="rId56"/>
-    <p:sldId id="306" r:id="rId57"/>
-    <p:sldId id="307" r:id="rId58"/>
+    <p:sldId id="260" r:id="rId12"/>
+    <p:sldId id="261" r:id="rId13"/>
+    <p:sldId id="262" r:id="rId14"/>
+    <p:sldId id="263" r:id="rId15"/>
+    <p:sldId id="264" r:id="rId16"/>
+    <p:sldId id="265" r:id="rId17"/>
+    <p:sldId id="266" r:id="rId18"/>
+    <p:sldId id="267" r:id="rId19"/>
+    <p:sldId id="268" r:id="rId20"/>
+    <p:sldId id="269" r:id="rId21"/>
+    <p:sldId id="270" r:id="rId22"/>
+    <p:sldId id="271" r:id="rId23"/>
+    <p:sldId id="272" r:id="rId24"/>
+    <p:sldId id="273" r:id="rId25"/>
+    <p:sldId id="274" r:id="rId26"/>
+    <p:sldId id="275" r:id="rId27"/>
+    <p:sldId id="276" r:id="rId28"/>
+    <p:sldId id="277" r:id="rId29"/>
+    <p:sldId id="278" r:id="rId30"/>
+    <p:sldId id="279" r:id="rId31"/>
+    <p:sldId id="280" r:id="rId32"/>
+    <p:sldId id="281" r:id="rId33"/>
+    <p:sldId id="282" r:id="rId34"/>
+    <p:sldId id="283" r:id="rId35"/>
+    <p:sldId id="284" r:id="rId36"/>
+    <p:sldId id="285" r:id="rId37"/>
+    <p:sldId id="286" r:id="rId38"/>
+    <p:sldId id="287" r:id="rId39"/>
+    <p:sldId id="288" r:id="rId40"/>
+    <p:sldId id="289" r:id="rId41"/>
+    <p:sldId id="290" r:id="rId42"/>
+    <p:sldId id="291" r:id="rId43"/>
+    <p:sldId id="292" r:id="rId44"/>
+    <p:sldId id="293" r:id="rId45"/>
+    <p:sldId id="294" r:id="rId46"/>
+    <p:sldId id="295" r:id="rId47"/>
+    <p:sldId id="296" r:id="rId48"/>
+    <p:sldId id="297" r:id="rId49"/>
+    <p:sldId id="298" r:id="rId50"/>
+    <p:sldId id="299" r:id="rId51"/>
   </p:sldIdLst>
   <p:sldSz cx="12191695" cy="6858000" type="screen4x3"/>
   <p:notesSz cx="6858000" cy="9144000"/>
@@ -156,6 +148,1426 @@
     </a:lvl9pPr>
   </p:defaultTextStyle>
 </p:presentation>
+</file>
+
+<file path=ppt/notesMasters/notesMaster1.xml><?xml version="1.0" encoding="utf-8"?>
+<p:notesMaster xmlns:a="http://schemas.openxmlformats.org/drawingml/2006/main" xmlns:p="http://schemas.openxmlformats.org/presentationml/2006/main" xmlns:r="http://schemas.openxmlformats.org/officeDocument/2006/relationships">
+  <p:cSld>
+    <p:bg>
+      <p:bgRef idx="1001">
+        <a:schemeClr val="bg1"/>
+      </p:bgRef>
+    </p:bg>
+    <p:spTree>
+      <p:nvGrpSpPr>
+        <p:cNvPr id="1" name=""/>
+        <p:cNvGrpSpPr/>
+        <p:nvPr/>
+      </p:nvGrpSpPr>
+      <p:grpSpPr>
+        <a:xfrm>
+          <a:off x="0" y="0"/>
+          <a:ext cx="0" cy="0"/>
+          <a:chOff x="0" y="0"/>
+          <a:chExt cx="0" cy="0"/>
+        </a:xfrm>
+      </p:grpSpPr>
+      <p:sp>
+        <p:nvSpPr>
+          <p:cNvPr id="2" name="Header Placeholder 1"/>
+          <p:cNvSpPr>
+            <a:spLocks noGrp="1"/>
+          </p:cNvSpPr>
+          <p:nvPr>
+            <p:ph type="hdr" sz="quarter"/>
+          </p:nvPr>
+        </p:nvSpPr>
+        <p:spPr>
+          <a:xfrm>
+            <a:off x="0" y="0"/>
+            <a:ext cx="2971800" cy="457200"/>
+          </a:xfrm>
+          <a:prstGeom prst="rect">
+            <a:avLst/>
+          </a:prstGeom>
+        </p:spPr>
+        <p:txBody>
+          <a:bodyPr vert="horz" lIns="91440" tIns="45720" rIns="91440" bIns="45720" rtlCol="0"/>
+          <a:lstStyle>
+            <a:lvl1pPr algn="l">
+              <a:defRPr sz="1200"/>
+            </a:lvl1pPr>
+          </a:lstStyle>
+          <a:p>
+            <a:endParaRPr lang="en-US"/>
+          </a:p>
+        </p:txBody>
+      </p:sp>
+      <p:sp>
+        <p:nvSpPr>
+          <p:cNvPr id="3" name="Date Placeholder 2"/>
+          <p:cNvSpPr>
+            <a:spLocks noGrp="1"/>
+          </p:cNvSpPr>
+          <p:nvPr>
+            <p:ph type="dt" idx="1"/>
+          </p:nvPr>
+        </p:nvSpPr>
+        <p:spPr>
+          <a:xfrm>
+            <a:off x="3884613" y="0"/>
+            <a:ext cx="2971800" cy="457200"/>
+          </a:xfrm>
+          <a:prstGeom prst="rect">
+            <a:avLst/>
+          </a:prstGeom>
+        </p:spPr>
+        <p:txBody>
+          <a:bodyPr vert="horz" lIns="91440" tIns="45720" rIns="91440" bIns="45720" rtlCol="0"/>
+          <a:lstStyle>
+            <a:lvl1pPr algn="r">
+              <a:defRPr sz="1200"/>
+            </a:lvl1pPr>
+          </a:lstStyle>
+          <a:p>
+            <a:fld id="{0F89C1C7-3DCD-1040-A9CF-14679D8B5DDD}" type="datetimeFigureOut">
+              <a:rPr lang="en-US" smtClean="0"/>
+              <a:t>10/17/16</a:t>
+            </a:fld>
+            <a:endParaRPr lang="en-US"/>
+          </a:p>
+        </p:txBody>
+      </p:sp>
+      <p:sp>
+        <p:nvSpPr>
+          <p:cNvPr id="4" name="Slide Image Placeholder 3"/>
+          <p:cNvSpPr>
+            <a:spLocks noGrp="1" noRot="1" noChangeAspect="1"/>
+          </p:cNvSpPr>
+          <p:nvPr>
+            <p:ph type="sldImg" idx="2"/>
+          </p:nvPr>
+        </p:nvSpPr>
+        <p:spPr>
+          <a:xfrm>
+            <a:off x="1143000" y="685800"/>
+            <a:ext cx="4572000" cy="3429000"/>
+          </a:xfrm>
+          <a:prstGeom prst="rect">
+            <a:avLst/>
+          </a:prstGeom>
+          <a:noFill/>
+          <a:ln w="12700">
+            <a:solidFill>
+              <a:prstClr val="black"/>
+            </a:solidFill>
+          </a:ln>
+        </p:spPr>
+        <p:txBody>
+          <a:bodyPr vert="horz" lIns="91440" tIns="45720" rIns="91440" bIns="45720" rtlCol="0" anchor="ctr"/>
+          <a:lstStyle/>
+          <a:p>
+            <a:endParaRPr lang="en-US"/>
+          </a:p>
+        </p:txBody>
+      </p:sp>
+      <p:sp>
+        <p:nvSpPr>
+          <p:cNvPr id="5" name="Notes Placeholder 4"/>
+          <p:cNvSpPr>
+            <a:spLocks noGrp="1"/>
+          </p:cNvSpPr>
+          <p:nvPr>
+            <p:ph type="body" sz="quarter" idx="3"/>
+          </p:nvPr>
+        </p:nvSpPr>
+        <p:spPr>
+          <a:xfrm>
+            <a:off x="685800" y="4343400"/>
+            <a:ext cx="5486400" cy="4114800"/>
+          </a:xfrm>
+          <a:prstGeom prst="rect">
+            <a:avLst/>
+          </a:prstGeom>
+        </p:spPr>
+        <p:txBody>
+          <a:bodyPr vert="horz" lIns="91440" tIns="45720" rIns="91440" bIns="45720" rtlCol="0"/>
+          <a:lstStyle/>
+          <a:p>
+            <a:pPr lvl="0"/>
+            <a:r>
+              <a:rPr lang="en-US" smtClean="0"/>
+              <a:t>Click to edit Master text styles</a:t>
+            </a:r>
+          </a:p>
+          <a:p>
+            <a:pPr lvl="1"/>
+            <a:r>
+              <a:rPr lang="en-US" smtClean="0"/>
+              <a:t>Second level</a:t>
+            </a:r>
+          </a:p>
+          <a:p>
+            <a:pPr lvl="2"/>
+            <a:r>
+              <a:rPr lang="en-US" smtClean="0"/>
+              <a:t>Third level</a:t>
+            </a:r>
+          </a:p>
+          <a:p>
+            <a:pPr lvl="3"/>
+            <a:r>
+              <a:rPr lang="en-US" smtClean="0"/>
+              <a:t>Fourth level</a:t>
+            </a:r>
+          </a:p>
+          <a:p>
+            <a:pPr lvl="4"/>
+            <a:r>
+              <a:rPr lang="en-US" smtClean="0"/>
+              <a:t>Fifth level</a:t>
+            </a:r>
+            <a:endParaRPr lang="en-US"/>
+          </a:p>
+        </p:txBody>
+      </p:sp>
+      <p:sp>
+        <p:nvSpPr>
+          <p:cNvPr id="6" name="Footer Placeholder 5"/>
+          <p:cNvSpPr>
+            <a:spLocks noGrp="1"/>
+          </p:cNvSpPr>
+          <p:nvPr>
+            <p:ph type="ftr" sz="quarter" idx="4"/>
+          </p:nvPr>
+        </p:nvSpPr>
+        <p:spPr>
+          <a:xfrm>
+            <a:off x="0" y="8685213"/>
+            <a:ext cx="2971800" cy="457200"/>
+          </a:xfrm>
+          <a:prstGeom prst="rect">
+            <a:avLst/>
+          </a:prstGeom>
+        </p:spPr>
+        <p:txBody>
+          <a:bodyPr vert="horz" lIns="91440" tIns="45720" rIns="91440" bIns="45720" rtlCol="0" anchor="b"/>
+          <a:lstStyle>
+            <a:lvl1pPr algn="l">
+              <a:defRPr sz="1200"/>
+            </a:lvl1pPr>
+          </a:lstStyle>
+          <a:p>
+            <a:endParaRPr lang="en-US"/>
+          </a:p>
+        </p:txBody>
+      </p:sp>
+      <p:sp>
+        <p:nvSpPr>
+          <p:cNvPr id="7" name="Slide Number Placeholder 6"/>
+          <p:cNvSpPr>
+            <a:spLocks noGrp="1"/>
+          </p:cNvSpPr>
+          <p:nvPr>
+            <p:ph type="sldNum" sz="quarter" idx="5"/>
+          </p:nvPr>
+        </p:nvSpPr>
+        <p:spPr>
+          <a:xfrm>
+            <a:off x="3884613" y="8685213"/>
+            <a:ext cx="2971800" cy="457200"/>
+          </a:xfrm>
+          <a:prstGeom prst="rect">
+            <a:avLst/>
+          </a:prstGeom>
+        </p:spPr>
+        <p:txBody>
+          <a:bodyPr vert="horz" lIns="91440" tIns="45720" rIns="91440" bIns="45720" rtlCol="0" anchor="b"/>
+          <a:lstStyle>
+            <a:lvl1pPr algn="r">
+              <a:defRPr sz="1200"/>
+            </a:lvl1pPr>
+          </a:lstStyle>
+          <a:p>
+            <a:fld id="{BB5E49A5-4136-284D-997B-48E1D791AD67}" type="slidenum">
+              <a:rPr lang="en-US" smtClean="0"/>
+              <a:t>‹#›</a:t>
+            </a:fld>
+            <a:endParaRPr lang="en-US"/>
+          </a:p>
+        </p:txBody>
+      </p:sp>
+    </p:spTree>
+    <p:extLst>
+      <p:ext uri="{BB962C8B-B14F-4D97-AF65-F5344CB8AC3E}">
+        <p14:creationId xmlns:p14="http://schemas.microsoft.com/office/powerpoint/2010/main" val="2623252185"/>
+      </p:ext>
+    </p:extLst>
+  </p:cSld>
+  <p:clrMap bg1="lt1" tx1="dk1" bg2="lt2" tx2="dk2" accent1="accent1" accent2="accent2" accent3="accent3" accent4="accent4" accent5="accent5" accent6="accent6" hlink="hlink" folHlink="folHlink"/>
+  <p:notesStyle>
+    <a:lvl1pPr marL="0" algn="l" defTabSz="457200" rtl="0" eaLnBrk="1" latinLnBrk="0" hangingPunct="1">
+      <a:defRPr sz="1200" kern="1200">
+        <a:solidFill>
+          <a:schemeClr val="tx1"/>
+        </a:solidFill>
+        <a:latin typeface="+mn-lt"/>
+        <a:ea typeface="+mn-ea"/>
+        <a:cs typeface="+mn-cs"/>
+      </a:defRPr>
+    </a:lvl1pPr>
+    <a:lvl2pPr marL="457200" algn="l" defTabSz="457200" rtl="0" eaLnBrk="1" latinLnBrk="0" hangingPunct="1">
+      <a:defRPr sz="1200" kern="1200">
+        <a:solidFill>
+          <a:schemeClr val="tx1"/>
+        </a:solidFill>
+        <a:latin typeface="+mn-lt"/>
+        <a:ea typeface="+mn-ea"/>
+        <a:cs typeface="+mn-cs"/>
+      </a:defRPr>
+    </a:lvl2pPr>
+    <a:lvl3pPr marL="914400" algn="l" defTabSz="457200" rtl="0" eaLnBrk="1" latinLnBrk="0" hangingPunct="1">
+      <a:defRPr sz="1200" kern="1200">
+        <a:solidFill>
+          <a:schemeClr val="tx1"/>
+        </a:solidFill>
+        <a:latin typeface="+mn-lt"/>
+        <a:ea typeface="+mn-ea"/>
+        <a:cs typeface="+mn-cs"/>
+      </a:defRPr>
+    </a:lvl3pPr>
+    <a:lvl4pPr marL="1371600" algn="l" defTabSz="457200" rtl="0" eaLnBrk="1" latinLnBrk="0" hangingPunct="1">
+      <a:defRPr sz="1200" kern="1200">
+        <a:solidFill>
+          <a:schemeClr val="tx1"/>
+        </a:solidFill>
+        <a:latin typeface="+mn-lt"/>
+        <a:ea typeface="+mn-ea"/>
+        <a:cs typeface="+mn-cs"/>
+      </a:defRPr>
+    </a:lvl4pPr>
+    <a:lvl5pPr marL="1828800" algn="l" defTabSz="457200" rtl="0" eaLnBrk="1" latinLnBrk="0" hangingPunct="1">
+      <a:defRPr sz="1200" kern="1200">
+        <a:solidFill>
+          <a:schemeClr val="tx1"/>
+        </a:solidFill>
+        <a:latin typeface="+mn-lt"/>
+        <a:ea typeface="+mn-ea"/>
+        <a:cs typeface="+mn-cs"/>
+      </a:defRPr>
+    </a:lvl5pPr>
+    <a:lvl6pPr marL="2286000" algn="l" defTabSz="457200" rtl="0" eaLnBrk="1" latinLnBrk="0" hangingPunct="1">
+      <a:defRPr sz="1200" kern="1200">
+        <a:solidFill>
+          <a:schemeClr val="tx1"/>
+        </a:solidFill>
+        <a:latin typeface="+mn-lt"/>
+        <a:ea typeface="+mn-ea"/>
+        <a:cs typeface="+mn-cs"/>
+      </a:defRPr>
+    </a:lvl6pPr>
+    <a:lvl7pPr marL="2743200" algn="l" defTabSz="457200" rtl="0" eaLnBrk="1" latinLnBrk="0" hangingPunct="1">
+      <a:defRPr sz="1200" kern="1200">
+        <a:solidFill>
+          <a:schemeClr val="tx1"/>
+        </a:solidFill>
+        <a:latin typeface="+mn-lt"/>
+        <a:ea typeface="+mn-ea"/>
+        <a:cs typeface="+mn-cs"/>
+      </a:defRPr>
+    </a:lvl7pPr>
+    <a:lvl8pPr marL="3200400" algn="l" defTabSz="457200" rtl="0" eaLnBrk="1" latinLnBrk="0" hangingPunct="1">
+      <a:defRPr sz="1200" kern="1200">
+        <a:solidFill>
+          <a:schemeClr val="tx1"/>
+        </a:solidFill>
+        <a:latin typeface="+mn-lt"/>
+        <a:ea typeface="+mn-ea"/>
+        <a:cs typeface="+mn-cs"/>
+      </a:defRPr>
+    </a:lvl8pPr>
+    <a:lvl9pPr marL="3657600" algn="l" defTabSz="457200" rtl="0" eaLnBrk="1" latinLnBrk="0" hangingPunct="1">
+      <a:defRPr sz="1200" kern="1200">
+        <a:solidFill>
+          <a:schemeClr val="tx1"/>
+        </a:solidFill>
+        <a:latin typeface="+mn-lt"/>
+        <a:ea typeface="+mn-ea"/>
+        <a:cs typeface="+mn-cs"/>
+      </a:defRPr>
+    </a:lvl9pPr>
+  </p:notesStyle>
+</p:notesMaster>
+</file>
+
+<file path=ppt/notesSlides/notesSlide1.xml><?xml version="1.0" encoding="utf-8"?>
+<p:notes xmlns:a="http://schemas.openxmlformats.org/drawingml/2006/main" xmlns:p="http://schemas.openxmlformats.org/presentationml/2006/main" xmlns:r="http://schemas.openxmlformats.org/officeDocument/2006/relationships">
+  <p:cSld>
+    <p:spTree>
+      <p:nvGrpSpPr>
+        <p:cNvPr id="1" name=""/>
+        <p:cNvGrpSpPr/>
+        <p:nvPr/>
+      </p:nvGrpSpPr>
+      <p:grpSpPr>
+        <a:xfrm>
+          <a:off x="0" y="0"/>
+          <a:ext cx="0" cy="0"/>
+          <a:chOff x="0" y="0"/>
+          <a:chExt cx="0" cy="0"/>
+        </a:xfrm>
+      </p:grpSpPr>
+      <p:sp>
+        <p:nvSpPr>
+          <p:cNvPr id="2" name="Slide Image Placeholder 1"/>
+          <p:cNvSpPr>
+            <a:spLocks noGrp="1"/>
+          </p:cNvSpPr>
+          <p:nvPr>
+            <p:ph type="sldImg" idx="2"/>
+          </p:nvPr>
+        </p:nvSpPr>
+        <p:spPr/>
+      </p:sp>
+      <p:sp>
+        <p:nvSpPr>
+          <p:cNvPr id="3" name="Notes Placeholder 2"/>
+          <p:cNvSpPr>
+            <a:spLocks noGrp="1"/>
+          </p:cNvSpPr>
+          <p:nvPr>
+            <p:ph type="body" idx="3" sz="quarter"/>
+          </p:nvPr>
+        </p:nvSpPr>
+        <p:spPr/>
+        <p:txBody>
+          <a:bodyPr/>
+          <a:lstStyle/>
+          <a:p>
+            <a:r>
+              <a:t>Conviene aprovechar precisamente eso, porque los permisos son el tema del curso donde el estudiante mas necesita que alguien le diga en el momento por que su GRANT no surtio efecto.</a:t>
+            </a:r>
+          </a:p>
+        </p:txBody>
+      </p:sp>
+      <p:sp>
+        <p:nvSpPr>
+          <p:cNvPr id="4" name="Slide Number Placeholder 3"/>
+          <p:cNvSpPr>
+            <a:spLocks noGrp="1"/>
+          </p:cNvSpPr>
+          <p:nvPr>
+            <p:ph type="sldNum" idx="5" sz="quarter"/>
+          </p:nvPr>
+        </p:nvSpPr>
+        <p:spPr/>
+      </p:sp>
+    </p:spTree>
+  </p:cSld>
+  <p:clrMapOvr>
+    <a:masterClrMapping/>
+  </p:clrMapOvr>
+</p:notes>
+</file>
+
+<file path=ppt/notesSlides/notesSlide10.xml><?xml version="1.0" encoding="utf-8"?>
+<p:notes xmlns:a="http://schemas.openxmlformats.org/drawingml/2006/main" xmlns:p="http://schemas.openxmlformats.org/presentationml/2006/main" xmlns:r="http://schemas.openxmlformats.org/officeDocument/2006/relationships">
+  <p:cSld>
+    <p:spTree>
+      <p:nvGrpSpPr>
+        <p:cNvPr id="1" name=""/>
+        <p:cNvGrpSpPr/>
+        <p:nvPr/>
+      </p:nvGrpSpPr>
+      <p:grpSpPr>
+        <a:xfrm>
+          <a:off x="0" y="0"/>
+          <a:ext cx="0" cy="0"/>
+          <a:chOff x="0" y="0"/>
+          <a:chExt cx="0" cy="0"/>
+        </a:xfrm>
+      </p:grpSpPr>
+      <p:sp>
+        <p:nvSpPr>
+          <p:cNvPr id="2" name="Slide Image Placeholder 1"/>
+          <p:cNvSpPr>
+            <a:spLocks noGrp="1"/>
+          </p:cNvSpPr>
+          <p:nvPr>
+            <p:ph type="sldImg" idx="2"/>
+          </p:nvPr>
+        </p:nvSpPr>
+        <p:spPr/>
+      </p:sp>
+      <p:sp>
+        <p:nvSpPr>
+          <p:cNvPr id="3" name="Notes Placeholder 2"/>
+          <p:cNvSpPr>
+            <a:spLocks noGrp="1"/>
+          </p:cNvSpPr>
+          <p:nvPr>
+            <p:ph type="body" idx="3" sz="quarter"/>
+          </p:nvPr>
+        </p:nvSpPr>
+        <p:spPr/>
+        <p:txBody>
+          <a:bodyPr/>
+          <a:lstStyle/>
+          <a:p>
+            <a:r>
+              <a:t>Vale explicar por que se usa role_table_grants y no table_privileges, que es la que aparece primero al buscar: table_privileges solo muestra los privilegios en los que el usuario actual es quien otorga o quien recibe, mientras que role_table_grants incluye los de cualquier rol que este habilitado en la sesion, que es justamente lo que necesita el propietario para auditar lo que reparti.</a:t>
+            </a:r>
+          </a:p>
+          <a:p>
+            <a:r>
+              <a:t>Estas dos consultas son la evidencia que la rubrica exige tres veces, y el docente deberia proyectar su salida en la demo: ver la matriz salir del motor, y no de un documento, es lo que convence al grupo de que los permisos son verificables.</a:t>
+            </a:r>
+          </a:p>
+        </p:txBody>
+      </p:sp>
+      <p:sp>
+        <p:nvSpPr>
+          <p:cNvPr id="4" name="Slide Number Placeholder 3"/>
+          <p:cNvSpPr>
+            <a:spLocks noGrp="1"/>
+          </p:cNvSpPr>
+          <p:nvPr>
+            <p:ph type="sldNum" idx="5" sz="quarter"/>
+          </p:nvPr>
+        </p:nvSpPr>
+        <p:spPr/>
+      </p:sp>
+    </p:spTree>
+  </p:cSld>
+  <p:clrMapOvr>
+    <a:masterClrMapping/>
+  </p:clrMapOvr>
+</p:notes>
+</file>
+
+<file path=ppt/notesSlides/notesSlide11.xml><?xml version="1.0" encoding="utf-8"?>
+<p:notes xmlns:a="http://schemas.openxmlformats.org/drawingml/2006/main" xmlns:p="http://schemas.openxmlformats.org/presentationml/2006/main" xmlns:r="http://schemas.openxmlformats.org/officeDocument/2006/relationships">
+  <p:cSld>
+    <p:spTree>
+      <p:nvGrpSpPr>
+        <p:cNvPr id="1" name=""/>
+        <p:cNvGrpSpPr/>
+        <p:nvPr/>
+      </p:nvGrpSpPr>
+      <p:grpSpPr>
+        <a:xfrm>
+          <a:off x="0" y="0"/>
+          <a:ext cx="0" cy="0"/>
+          <a:chOff x="0" y="0"/>
+          <a:chExt cx="0" cy="0"/>
+        </a:xfrm>
+      </p:grpSpPr>
+      <p:sp>
+        <p:nvSpPr>
+          <p:cNvPr id="2" name="Slide Image Placeholder 1"/>
+          <p:cNvSpPr>
+            <a:spLocks noGrp="1"/>
+          </p:cNvSpPr>
+          <p:nvPr>
+            <p:ph type="sldImg" idx="2"/>
+          </p:nvPr>
+        </p:nvSpPr>
+        <p:spPr/>
+      </p:sp>
+      <p:sp>
+        <p:nvSpPr>
+          <p:cNvPr id="3" name="Notes Placeholder 2"/>
+          <p:cNvSpPr>
+            <a:spLocks noGrp="1"/>
+          </p:cNvSpPr>
+          <p:nvPr>
+            <p:ph type="body" idx="3" sz="quarter"/>
+          </p:nvPr>
+        </p:nvSpPr>
+        <p:spPr/>
+        <p:txBody>
+          <a:bodyPr/>
+          <a:lstStyle/>
+          <a:p>
+            <a:r>
+              <a:t>La diapositiva trae las cinco secciones en el mismo orden en que el taller las va a pedir, asi que se dicta recorriendola de arriba abajo.</a:t>
+            </a:r>
+          </a:p>
+          <a:p>
+            <a:r>
+              <a:t>Dos reglas la cierran.</a:t>
+            </a:r>
+          </a:p>
+          <a:p>
+            <a:r>
+              <a:t>Vale la pena senalar el detalle tecnico de la baja: en PostgreSQL no se puede hacer DROP ROLE de un rol que todavia posee objetos, hay que reasignarlos primero con REASSIGN OWNED BY ana_gomez TO admin_bd, y por eso la politica tiene que decir que pasa con lo que la persona era dueno.</a:t>
+            </a:r>
+          </a:p>
+        </p:txBody>
+      </p:sp>
+      <p:sp>
+        <p:nvSpPr>
+          <p:cNvPr id="4" name="Slide Number Placeholder 3"/>
+          <p:cNvSpPr>
+            <a:spLocks noGrp="1"/>
+          </p:cNvSpPr>
+          <p:nvPr>
+            <p:ph type="sldNum" idx="5" sz="quarter"/>
+          </p:nvPr>
+        </p:nvSpPr>
+        <p:spPr/>
+      </p:sp>
+    </p:spTree>
+  </p:cSld>
+  <p:clrMapOvr>
+    <a:masterClrMapping/>
+  </p:clrMapOvr>
+</p:notes>
+</file>
+
+<file path=ppt/notesSlides/notesSlide12.xml><?xml version="1.0" encoding="utf-8"?>
+<p:notes xmlns:a="http://schemas.openxmlformats.org/drawingml/2006/main" xmlns:p="http://schemas.openxmlformats.org/presentationml/2006/main" xmlns:r="http://schemas.openxmlformats.org/officeDocument/2006/relationships">
+  <p:cSld>
+    <p:spTree>
+      <p:nvGrpSpPr>
+        <p:cNvPr id="1" name=""/>
+        <p:cNvGrpSpPr/>
+        <p:nvPr/>
+      </p:nvGrpSpPr>
+      <p:grpSpPr>
+        <a:xfrm>
+          <a:off x="0" y="0"/>
+          <a:ext cx="0" cy="0"/>
+          <a:chOff x="0" y="0"/>
+          <a:chExt cx="0" cy="0"/>
+        </a:xfrm>
+      </p:grpSpPr>
+      <p:sp>
+        <p:nvSpPr>
+          <p:cNvPr id="2" name="Slide Image Placeholder 1"/>
+          <p:cNvSpPr>
+            <a:spLocks noGrp="1"/>
+          </p:cNvSpPr>
+          <p:nvPr>
+            <p:ph type="sldImg" idx="2"/>
+          </p:nvPr>
+        </p:nvSpPr>
+        <p:spPr/>
+      </p:sp>
+      <p:sp>
+        <p:nvSpPr>
+          <p:cNvPr id="3" name="Notes Placeholder 2"/>
+          <p:cNvSpPr>
+            <a:spLocks noGrp="1"/>
+          </p:cNvSpPr>
+          <p:nvPr>
+            <p:ph type="body" idx="3" sz="quarter"/>
+          </p:nvPr>
+        </p:nvSpPr>
+        <p:spPr/>
+        <p:txBody>
+          <a:bodyPr/>
+          <a:lstStyle/>
+          <a:p>
+            <a:r>
+              <a:t>El taller se resuelve y se califica en ExamLab, que ejecuta PostgreSQL dentro del navegador.</a:t>
+            </a:r>
+          </a:p>
+          <a:p>
+            <a:r>
+              <a:t>Ahi CREATE ROLE, GRANT, REVOKE, CREATE VIEW, los privilegios por columna y las consultas a information_schema funcionan todos: son DDL real y son verificables, asi que la evidencia del taller es la salida del motor y no una promesa.</a:t>
+            </a:r>
+          </a:p>
+          <a:p>
+            <a:r>
+              <a:t>Lo que NO se puede hacer es abrir una segunda conexion: el entorno tiene un solo usuario con login y una sola sesion, asi que nadie va a conectarse como recepcion en otra pestana mientras el docente mira desde la suya.</a:t>
+            </a:r>
+          </a:p>
+          <a:p>
+            <a:r>
+              <a:t>Esa es la limitacion real, y hay que nombrarla con esa precision, porque la version anterior de esta guia decia algo mas fuerte y falso: que por eso la prueba negativa era imposible.</a:t>
+            </a:r>
+          </a:p>
+          <a:p>
+            <a:r>
+              <a:t>Para ver el permiso negado no hace falta otra conexion, hace falta cambiar el rol EFECTIVO dentro de la misma sesion, y eso es lo que hace SET ROLE recepcion; a partir de esa linea los privilegios que el motor revisa son los del rol y no los del propietario, de modo que devuelve permission denied for table cita y tambien, si ya se revoco el SELECT de la tabla.</a:t>
+            </a:r>
+          </a:p>
+          <a:p>
+            <a:r>
+              <a:t>Se cierra con RESET ROLE; y conviene no olvidarlo, porque todo lo que venga despues se seguiria ejecutando con los permisos recortados.</a:t>
+            </a:r>
+          </a:p>
+          <a:p>
+            <a:r>
+              <a:t>Dos advertencias para la demo.</a:t>
+            </a:r>
+          </a:p>
+        </p:txBody>
+      </p:sp>
+      <p:sp>
+        <p:nvSpPr>
+          <p:cNvPr id="4" name="Slide Number Placeholder 3"/>
+          <p:cNvSpPr>
+            <a:spLocks noGrp="1"/>
+          </p:cNvSpPr>
+          <p:nvPr>
+            <p:ph type="sldNum" idx="5" sz="quarter"/>
+          </p:nvPr>
+        </p:nvSpPr>
+        <p:spPr/>
+      </p:sp>
+    </p:spTree>
+  </p:cSld>
+  <p:clrMapOvr>
+    <a:masterClrMapping/>
+  </p:clrMapOvr>
+</p:notes>
+</file>
+
+<file path=ppt/notesSlides/notesSlide13.xml><?xml version="1.0" encoding="utf-8"?>
+<p:notes xmlns:a="http://schemas.openxmlformats.org/drawingml/2006/main" xmlns:p="http://schemas.openxmlformats.org/presentationml/2006/main" xmlns:r="http://schemas.openxmlformats.org/officeDocument/2006/relationships">
+  <p:cSld>
+    <p:spTree>
+      <p:nvGrpSpPr>
+        <p:cNvPr id="1" name=""/>
+        <p:cNvGrpSpPr/>
+        <p:nvPr/>
+      </p:nvGrpSpPr>
+      <p:grpSpPr>
+        <a:xfrm>
+          <a:off x="0" y="0"/>
+          <a:ext cx="0" cy="0"/>
+          <a:chOff x="0" y="0"/>
+          <a:chExt cx="0" cy="0"/>
+        </a:xfrm>
+      </p:grpSpPr>
+      <p:sp>
+        <p:nvSpPr>
+          <p:cNvPr id="2" name="Slide Image Placeholder 1"/>
+          <p:cNvSpPr>
+            <a:spLocks noGrp="1"/>
+          </p:cNvSpPr>
+          <p:nvPr>
+            <p:ph type="sldImg" idx="2"/>
+          </p:nvPr>
+        </p:nvSpPr>
+        <p:spPr/>
+      </p:sp>
+      <p:sp>
+        <p:nvSpPr>
+          <p:cNvPr id="3" name="Notes Placeholder 2"/>
+          <p:cNvSpPr>
+            <a:spLocks noGrp="1"/>
+          </p:cNvSpPr>
+          <p:nvPr>
+            <p:ph type="body" idx="3" sz="quarter"/>
+          </p:nvPr>
+        </p:nvSpPr>
+        <p:spPr/>
+        <p:txBody>
+          <a:bodyPr/>
+          <a:lstStyle/>
+          <a:p>
+            <a:r>
+              <a:t>O el rol no tiene USAGE sobre el esquema.</a:t>
+            </a:r>
+          </a:p>
+          <a:p>
+            <a:r>
+              <a:t>Lo que no se puede es conectarse como recepcion en una segunda sesion, porque el entorno tiene un solo usuario con login.</a:t>
+            </a:r>
+          </a:p>
+        </p:txBody>
+      </p:sp>
+      <p:sp>
+        <p:nvSpPr>
+          <p:cNvPr id="4" name="Slide Number Placeholder 3"/>
+          <p:cNvSpPr>
+            <a:spLocks noGrp="1"/>
+          </p:cNvSpPr>
+          <p:nvPr>
+            <p:ph type="sldNum" idx="5" sz="quarter"/>
+          </p:nvPr>
+        </p:nvSpPr>
+        <p:spPr/>
+      </p:sp>
+    </p:spTree>
+  </p:cSld>
+  <p:clrMapOvr>
+    <a:masterClrMapping/>
+  </p:clrMapOvr>
+</p:notes>
+</file>
+
+<file path=ppt/notesSlides/notesSlide2.xml><?xml version="1.0" encoding="utf-8"?>
+<p:notes xmlns:a="http://schemas.openxmlformats.org/drawingml/2006/main" xmlns:p="http://schemas.openxmlformats.org/presentationml/2006/main" xmlns:r="http://schemas.openxmlformats.org/officeDocument/2006/relationships">
+  <p:cSld>
+    <p:spTree>
+      <p:nvGrpSpPr>
+        <p:cNvPr id="1" name=""/>
+        <p:cNvGrpSpPr/>
+        <p:nvPr/>
+      </p:nvGrpSpPr>
+      <p:grpSpPr>
+        <a:xfrm>
+          <a:off x="0" y="0"/>
+          <a:ext cx="0" cy="0"/>
+          <a:chOff x="0" y="0"/>
+          <a:chExt cx="0" cy="0"/>
+        </a:xfrm>
+      </p:grpSpPr>
+      <p:sp>
+        <p:nvSpPr>
+          <p:cNvPr id="2" name="Slide Image Placeholder 1"/>
+          <p:cNvSpPr>
+            <a:spLocks noGrp="1"/>
+          </p:cNvSpPr>
+          <p:nvPr>
+            <p:ph type="sldImg" idx="2"/>
+          </p:nvPr>
+        </p:nvSpPr>
+        <p:spPr/>
+      </p:sp>
+      <p:sp>
+        <p:nvSpPr>
+          <p:cNvPr id="3" name="Notes Placeholder 2"/>
+          <p:cNvSpPr>
+            <a:spLocks noGrp="1"/>
+          </p:cNvSpPr>
+          <p:nvPr>
+            <p:ph type="body" idx="3" sz="quarter"/>
+          </p:nvPr>
+        </p:nvSpPr>
+        <p:spPr/>
+        <p:txBody>
+          <a:bodyPr/>
+          <a:lstStyle/>
+          <a:p>
+            <a:r>
+              <a:t>EXECUTE sobre una funcion o un procedimiento</a:t>
+            </a:r>
+          </a:p>
+          <a:p>
+            <a:r>
+              <a:t>USAGE sobre un esquema o una secuencia</a:t>
+            </a:r>
+          </a:p>
+          <a:p>
+            <a:r>
+              <a:t>CONNECT y TEMPORARY sobre la base de datos.</a:t>
+            </a:r>
+          </a:p>
+          <a:p>
+            <a:r>
+              <a:t>Vale la pena decirlo porque el estudiante que busque en internet va a encontrar GRANT CREATE SESSION, que es sintaxis de Oracle y en PostgreSQL no existe.</a:t>
+            </a:r>
+          </a:p>
+          <a:p>
+            <a:r>
+              <a:t>La distincion practica que hay que dejar clara es la que separa DDL de DML.</a:t>
+            </a:r>
+          </a:p>
+          <a:p>
+            <a:r>
+              <a:t>Si su cuenta puede ejecutar DROP TABLE cita, un error de copiar y pegar borra la agenda completa, y ningun respaldo de la noche anterior devuelve las citas que se agendaron hoy.</a:t>
+            </a:r>
+          </a:p>
+        </p:txBody>
+      </p:sp>
+      <p:sp>
+        <p:nvSpPr>
+          <p:cNvPr id="4" name="Slide Number Placeholder 3"/>
+          <p:cNvSpPr>
+            <a:spLocks noGrp="1"/>
+          </p:cNvSpPr>
+          <p:nvPr>
+            <p:ph type="sldNum" idx="5" sz="quarter"/>
+          </p:nvPr>
+        </p:nvSpPr>
+        <p:spPr/>
+      </p:sp>
+    </p:spTree>
+  </p:cSld>
+  <p:clrMapOvr>
+    <a:masterClrMapping/>
+  </p:clrMapOvr>
+</p:notes>
+</file>
+
+<file path=ppt/notesSlides/notesSlide3.xml><?xml version="1.0" encoding="utf-8"?>
+<p:notes xmlns:a="http://schemas.openxmlformats.org/drawingml/2006/main" xmlns:p="http://schemas.openxmlformats.org/presentationml/2006/main" xmlns:r="http://schemas.openxmlformats.org/officeDocument/2006/relationships">
+  <p:cSld>
+    <p:spTree>
+      <p:nvGrpSpPr>
+        <p:cNvPr id="1" name=""/>
+        <p:cNvGrpSpPr/>
+        <p:nvPr/>
+      </p:nvGrpSpPr>
+      <p:grpSpPr>
+        <a:xfrm>
+          <a:off x="0" y="0"/>
+          <a:ext cx="0" cy="0"/>
+          <a:chOff x="0" y="0"/>
+          <a:chExt cx="0" cy="0"/>
+        </a:xfrm>
+      </p:grpSpPr>
+      <p:sp>
+        <p:nvSpPr>
+          <p:cNvPr id="2" name="Slide Image Placeholder 1"/>
+          <p:cNvSpPr>
+            <a:spLocks noGrp="1"/>
+          </p:cNvSpPr>
+          <p:nvPr>
+            <p:ph type="sldImg" idx="2"/>
+          </p:nvPr>
+        </p:nvSpPr>
+        <p:spPr/>
+      </p:sp>
+      <p:sp>
+        <p:nvSpPr>
+          <p:cNvPr id="3" name="Notes Placeholder 2"/>
+          <p:cNvSpPr>
+            <a:spLocks noGrp="1"/>
+          </p:cNvSpPr>
+          <p:nvPr>
+            <p:ph type="body" idx="3" sz="quarter"/>
+          </p:nvPr>
+        </p:nvSpPr>
+        <p:spPr/>
+        <p:txBody>
+          <a:bodyPr/>
+          <a:lstStyle/>
+          <a:p>
+            <a:r>
+              <a:t>Existe por una razon aritmetica que conviene poner en el tablero con los numeros de VetCare.</a:t>
+            </a:r>
+          </a:p>
+          <a:p>
+            <a:r>
+              <a:t>Sobre cada uno hay hasta cinco acciones posibles, asi que la matriz completa tiene cincuenta celdas.</a:t>
+            </a:r>
+          </a:p>
+          <a:p>
+            <a:r>
+              <a:t>Ese es el argumento real que el docente debe transmitir: el rol no ahorra tipeo, ahorra olvidos, y los olvidos en materia de permisos son precisamente los que producen incidentes de seguridad.</a:t>
+            </a:r>
+          </a:p>
+        </p:txBody>
+      </p:sp>
+      <p:sp>
+        <p:nvSpPr>
+          <p:cNvPr id="4" name="Slide Number Placeholder 3"/>
+          <p:cNvSpPr>
+            <a:spLocks noGrp="1"/>
+          </p:cNvSpPr>
+          <p:nvPr>
+            <p:ph type="sldNum" idx="5" sz="quarter"/>
+          </p:nvPr>
+        </p:nvSpPr>
+        <p:spPr/>
+      </p:sp>
+    </p:spTree>
+  </p:cSld>
+  <p:clrMapOvr>
+    <a:masterClrMapping/>
+  </p:clrMapOvr>
+</p:notes>
+</file>
+
+<file path=ppt/notesSlides/notesSlide4.xml><?xml version="1.0" encoding="utf-8"?>
+<p:notes xmlns:a="http://schemas.openxmlformats.org/drawingml/2006/main" xmlns:p="http://schemas.openxmlformats.org/presentationml/2006/main" xmlns:r="http://schemas.openxmlformats.org/officeDocument/2006/relationships">
+  <p:cSld>
+    <p:spTree>
+      <p:nvGrpSpPr>
+        <p:cNvPr id="1" name=""/>
+        <p:cNvGrpSpPr/>
+        <p:nvPr/>
+      </p:nvGrpSpPr>
+      <p:grpSpPr>
+        <a:xfrm>
+          <a:off x="0" y="0"/>
+          <a:ext cx="0" cy="0"/>
+          <a:chOff x="0" y="0"/>
+          <a:chExt cx="0" cy="0"/>
+        </a:xfrm>
+      </p:grpSpPr>
+      <p:sp>
+        <p:nvSpPr>
+          <p:cNvPr id="2" name="Slide Image Placeholder 1"/>
+          <p:cNvSpPr>
+            <a:spLocks noGrp="1"/>
+          </p:cNvSpPr>
+          <p:nvPr>
+            <p:ph type="sldImg" idx="2"/>
+          </p:nvPr>
+        </p:nvSpPr>
+        <p:spPr/>
+      </p:sp>
+      <p:sp>
+        <p:nvSpPr>
+          <p:cNvPr id="3" name="Notes Placeholder 2"/>
+          <p:cNvSpPr>
+            <a:spLocks noGrp="1"/>
+          </p:cNvSpPr>
+          <p:nvPr>
+            <p:ph type="body" idx="3" sz="quarter"/>
+          </p:nvPr>
+        </p:nvSpPr>
+        <p:spPr/>
+        <p:txBody>
+          <a:bodyPr/>
+          <a:lstStyle/>
+          <a:p>
+            <a:r>
+              <a:t>Por eso los cuatro roles del taller se crean con CREATE ROLE recepcion NOLOGIN: son bolsas de privilegios, no identidades.</a:t>
+            </a:r>
+          </a:p>
+          <a:p>
+            <a:r>
+              <a:t>La persona viene despues, como CREATE ROLE ana_gomez LOGIN PASSWORD '...', y recibe la bolsa con GRANT recepcion TO ana_gomez.</a:t>
+            </a:r>
+          </a:p>
+          <a:p>
+            <a:r>
+              <a:t>Esa herencia es la que hace que al modificar el rol se corrijan todas las personas a la vez.</a:t>
+            </a:r>
+          </a:p>
+          <a:p>
+            <a:r>
+              <a:t>Conviene decir esto tal cual, porque un estudiante despierto va a preguntar por que el sufijo y merece la respuesta correcta y no una inventada.</a:t>
+            </a:r>
+          </a:p>
+        </p:txBody>
+      </p:sp>
+      <p:sp>
+        <p:nvSpPr>
+          <p:cNvPr id="4" name="Slide Number Placeholder 3"/>
+          <p:cNvSpPr>
+            <a:spLocks noGrp="1"/>
+          </p:cNvSpPr>
+          <p:nvPr>
+            <p:ph type="sldNum" idx="5" sz="quarter"/>
+          </p:nvPr>
+        </p:nvSpPr>
+        <p:spPr/>
+      </p:sp>
+    </p:spTree>
+  </p:cSld>
+  <p:clrMapOvr>
+    <a:masterClrMapping/>
+  </p:clrMapOvr>
+</p:notes>
+</file>
+
+<file path=ppt/notesSlides/notesSlide5.xml><?xml version="1.0" encoding="utf-8"?>
+<p:notes xmlns:a="http://schemas.openxmlformats.org/drawingml/2006/main" xmlns:p="http://schemas.openxmlformats.org/presentationml/2006/main" xmlns:r="http://schemas.openxmlformats.org/officeDocument/2006/relationships">
+  <p:cSld>
+    <p:spTree>
+      <p:nvGrpSpPr>
+        <p:cNvPr id="1" name=""/>
+        <p:cNvGrpSpPr/>
+        <p:nvPr/>
+      </p:nvGrpSpPr>
+      <p:grpSpPr>
+        <a:xfrm>
+          <a:off x="0" y="0"/>
+          <a:ext cx="0" cy="0"/>
+          <a:chOff x="0" y="0"/>
+          <a:chExt cx="0" cy="0"/>
+        </a:xfrm>
+      </p:grpSpPr>
+      <p:sp>
+        <p:nvSpPr>
+          <p:cNvPr id="2" name="Slide Image Placeholder 1"/>
+          <p:cNvSpPr>
+            <a:spLocks noGrp="1"/>
+          </p:cNvSpPr>
+          <p:nvPr>
+            <p:ph type="sldImg" idx="2"/>
+          </p:nvPr>
+        </p:nvSpPr>
+        <p:spPr/>
+      </p:sp>
+      <p:sp>
+        <p:nvSpPr>
+          <p:cNvPr id="3" name="Notes Placeholder 2"/>
+          <p:cNvSpPr>
+            <a:spLocks noGrp="1"/>
+          </p:cNvSpPr>
+          <p:nvPr>
+            <p:ph type="body" idx="3" sz="quarter"/>
+          </p:nvPr>
+        </p:nvSpPr>
+        <p:spPr/>
+        <p:txBody>
+          <a:bodyPr/>
+          <a:lstStyle/>
+          <a:p>
+            <a:r>
+              <a:t>El principio de minimo privilegio dice que cada rol recibe exactamente lo que necesita para cumplir su funcion y ni un privilegio mas.</a:t>
+            </a:r>
+          </a:p>
+          <a:p>
+            <a:r>
+              <a:t>Aplicado a VetCare deja una matriz muy concreta y defendible.</a:t>
+            </a:r>
+          </a:p>
+          <a:p>
+            <a:r>
+              <a:t>El rol recepcion necesita SELECT sobre mascota, dueno y veterinario para poder buscar y agendar, y SELECT, INSERT y UPDATE sobre cita para agendar y reprogramar; nada mas.</a:t>
+            </a:r>
+          </a:p>
+          <a:p>
+            <a:r>
+              <a:t>El rol auditor recibe unicamente SELECT, y jamas una escritura.</a:t>
+            </a:r>
+          </a:p>
+          <a:p>
+            <a:r>
+              <a:t>Eso se llama borrado logico, y hace que el privilegio DELETE sea innecesario para casi todos los usuarios, lo que a su vez elimina de raiz la posibilidad de una perdida accidental de informacion.</a:t>
+            </a:r>
+          </a:p>
+          <a:p>
+            <a:r>
+              <a:t>Conviene escribir esos dos valores en el tablero, porque el estudiante que suponga activa = 0 escribira un UPDATE que el CHECK va a rechazar y perdera diez minutos buscando el error en otra parte.</a:t>
+            </a:r>
+          </a:p>
+        </p:txBody>
+      </p:sp>
+      <p:sp>
+        <p:nvSpPr>
+          <p:cNvPr id="4" name="Slide Number Placeholder 3"/>
+          <p:cNvSpPr>
+            <a:spLocks noGrp="1"/>
+          </p:cNvSpPr>
+          <p:nvPr>
+            <p:ph type="sldNum" idx="5" sz="quarter"/>
+          </p:nvPr>
+        </p:nvSpPr>
+        <p:spPr/>
+      </p:sp>
+    </p:spTree>
+  </p:cSld>
+  <p:clrMapOvr>
+    <a:masterClrMapping/>
+  </p:clrMapOvr>
+</p:notes>
+</file>
+
+<file path=ppt/notesSlides/notesSlide6.xml><?xml version="1.0" encoding="utf-8"?>
+<p:notes xmlns:a="http://schemas.openxmlformats.org/drawingml/2006/main" xmlns:p="http://schemas.openxmlformats.org/presentationml/2006/main" xmlns:r="http://schemas.openxmlformats.org/officeDocument/2006/relationships">
+  <p:cSld>
+    <p:spTree>
+      <p:nvGrpSpPr>
+        <p:cNvPr id="1" name=""/>
+        <p:cNvGrpSpPr/>
+        <p:nvPr/>
+      </p:nvGrpSpPr>
+      <p:grpSpPr>
+        <a:xfrm>
+          <a:off x="0" y="0"/>
+          <a:ext cx="0" cy="0"/>
+          <a:chOff x="0" y="0"/>
+          <a:chExt cx="0" cy="0"/>
+        </a:xfrm>
+      </p:grpSpPr>
+      <p:sp>
+        <p:nvSpPr>
+          <p:cNvPr id="2" name="Slide Image Placeholder 1"/>
+          <p:cNvSpPr>
+            <a:spLocks noGrp="1"/>
+          </p:cNvSpPr>
+          <p:nvPr>
+            <p:ph type="sldImg" idx="2"/>
+          </p:nvPr>
+        </p:nvSpPr>
+        <p:spPr/>
+      </p:sp>
+      <p:sp>
+        <p:nvSpPr>
+          <p:cNvPr id="3" name="Notes Placeholder 2"/>
+          <p:cNvSpPr>
+            <a:spLocks noGrp="1"/>
+          </p:cNvSpPr>
+          <p:nvPr>
+            <p:ph type="body" idx="3" sz="quarter"/>
+          </p:nvPr>
+        </p:nvSpPr>
+        <p:spPr/>
+        <p:txBody>
+          <a:bodyPr/>
+          <a:lstStyle/>
+          <a:p>
+            <a:r>
+              <a:t>La respuesta que el docente debe dar es que el problema no es la confianza en la persona sino el dano posible por un error o por una sesion robada.</a:t>
+            </a:r>
+          </a:p>
+          <a:p>
+            <a:r>
+              <a:t>Si alguien roba la sesion del recepcionista, con minimo privilegio el atacante ve agendas y datos de contacto; con privilegios de administrador, borra la base completa.</a:t>
+            </a:r>
+          </a:p>
+          <a:p>
+            <a:r>
+              <a:t>El permiso no mide cuanto se quiere a un empleado, mide cuanto se puede perder.</a:t>
+            </a:r>
+          </a:p>
+        </p:txBody>
+      </p:sp>
+      <p:sp>
+        <p:nvSpPr>
+          <p:cNvPr id="4" name="Slide Number Placeholder 3"/>
+          <p:cNvSpPr>
+            <a:spLocks noGrp="1"/>
+          </p:cNvSpPr>
+          <p:nvPr>
+            <p:ph type="sldNum" idx="5" sz="quarter"/>
+          </p:nvPr>
+        </p:nvSpPr>
+        <p:spPr/>
+      </p:sp>
+    </p:spTree>
+  </p:cSld>
+  <p:clrMapOvr>
+    <a:masterClrMapping/>
+  </p:clrMapOvr>
+</p:notes>
+</file>
+
+<file path=ppt/notesSlides/notesSlide7.xml><?xml version="1.0" encoding="utf-8"?>
+<p:notes xmlns:a="http://schemas.openxmlformats.org/drawingml/2006/main" xmlns:p="http://schemas.openxmlformats.org/presentationml/2006/main" xmlns:r="http://schemas.openxmlformats.org/officeDocument/2006/relationships">
+  <p:cSld>
+    <p:spTree>
+      <p:nvGrpSpPr>
+        <p:cNvPr id="1" name=""/>
+        <p:cNvGrpSpPr/>
+        <p:nvPr/>
+      </p:nvGrpSpPr>
+      <p:grpSpPr>
+        <a:xfrm>
+          <a:off x="0" y="0"/>
+          <a:ext cx="0" cy="0"/>
+          <a:chOff x="0" y="0"/>
+          <a:chExt cx="0" cy="0"/>
+        </a:xfrm>
+      </p:grpSpPr>
+      <p:sp>
+        <p:nvSpPr>
+          <p:cNvPr id="2" name="Slide Image Placeholder 1"/>
+          <p:cNvSpPr>
+            <a:spLocks noGrp="1"/>
+          </p:cNvSpPr>
+          <p:nvPr>
+            <p:ph type="sldImg" idx="2"/>
+          </p:nvPr>
+        </p:nvSpPr>
+        <p:spPr/>
+      </p:sp>
+      <p:sp>
+        <p:nvSpPr>
+          <p:cNvPr id="3" name="Notes Placeholder 2"/>
+          <p:cNvSpPr>
+            <a:spLocks noGrp="1"/>
+          </p:cNvSpPr>
+          <p:nvPr>
+            <p:ph type="body" idx="3" sz="quarter"/>
+          </p:nvPr>
+        </p:nvSpPr>
+        <p:spPr/>
+        <p:txBody>
+          <a:bodyPr/>
+          <a:lstStyle/>
+          <a:p>
+            <a:r>
+              <a:t>GRANT otorga y REVOKE retira, y ambos operan igual sobre usuarios y sobre roles.</a:t>
+            </a:r>
+          </a:p>
+          <a:p>
+            <a:r>
+              <a:t>Para retirar un permiso</a:t>
+            </a:r>
+          </a:p>
+          <a:p>
+            <a:r>
+              <a:t>Hay tres detalles operativos que evitan la mitad de los tropiezos del taller.</a:t>
+            </a:r>
+          </a:p>
+          <a:p>
+            <a:r>
+              <a:t>Eso explica por que el REVOKE de DELETE que pide el taller es, tecnicamente, redundante; se escribe de todos modos porque es la evidencia documental de una decision de diseno, y quien revise el script tiene que poder ver que la ausencia de DELETE fue deliberada y no un olvido.</a:t>
+            </a:r>
+          </a:p>
+        </p:txBody>
+      </p:sp>
+      <p:sp>
+        <p:nvSpPr>
+          <p:cNvPr id="4" name="Slide Number Placeholder 3"/>
+          <p:cNvSpPr>
+            <a:spLocks noGrp="1"/>
+          </p:cNvSpPr>
+          <p:nvPr>
+            <p:ph type="sldNum" idx="5" sz="quarter"/>
+          </p:nvPr>
+        </p:nvSpPr>
+        <p:spPr/>
+      </p:sp>
+    </p:spTree>
+  </p:cSld>
+  <p:clrMapOvr>
+    <a:masterClrMapping/>
+  </p:clrMapOvr>
+</p:notes>
+</file>
+
+<file path=ppt/notesSlides/notesSlide8.xml><?xml version="1.0" encoding="utf-8"?>
+<p:notes xmlns:a="http://schemas.openxmlformats.org/drawingml/2006/main" xmlns:p="http://schemas.openxmlformats.org/presentationml/2006/main" xmlns:r="http://schemas.openxmlformats.org/officeDocument/2006/relationships">
+  <p:cSld>
+    <p:spTree>
+      <p:nvGrpSpPr>
+        <p:cNvPr id="1" name=""/>
+        <p:cNvGrpSpPr/>
+        <p:nvPr/>
+      </p:nvGrpSpPr>
+      <p:grpSpPr>
+        <a:xfrm>
+          <a:off x="0" y="0"/>
+          <a:ext cx="0" cy="0"/>
+          <a:chOff x="0" y="0"/>
+          <a:chExt cx="0" cy="0"/>
+        </a:xfrm>
+      </p:grpSpPr>
+      <p:sp>
+        <p:nvSpPr>
+          <p:cNvPr id="2" name="Slide Image Placeholder 1"/>
+          <p:cNvSpPr>
+            <a:spLocks noGrp="1"/>
+          </p:cNvSpPr>
+          <p:nvPr>
+            <p:ph type="sldImg" idx="2"/>
+          </p:nvPr>
+        </p:nvSpPr>
+        <p:spPr/>
+      </p:sp>
+      <p:sp>
+        <p:nvSpPr>
+          <p:cNvPr id="3" name="Notes Placeholder 2"/>
+          <p:cNvSpPr>
+            <a:spLocks noGrp="1"/>
+          </p:cNvSpPr>
+          <p:nvPr>
+            <p:ph type="body" idx="3" sz="quarter"/>
+          </p:nvPr>
+        </p:nvSpPr>
+        <p:spPr/>
+        <p:txBody>
+          <a:bodyPr/>
+          <a:lstStyle/>
+          <a:p>
+            <a:r>
+              <a:t>Hay dos mecanismos que conviene conocer porque hacen dano en silencio.</a:t>
+            </a:r>
+          </a:p>
+        </p:txBody>
+      </p:sp>
+      <p:sp>
+        <p:nvSpPr>
+          <p:cNvPr id="4" name="Slide Number Placeholder 3"/>
+          <p:cNvSpPr>
+            <a:spLocks noGrp="1"/>
+          </p:cNvSpPr>
+          <p:nvPr>
+            <p:ph type="sldNum" idx="5" sz="quarter"/>
+          </p:nvPr>
+        </p:nvSpPr>
+        <p:spPr/>
+      </p:sp>
+    </p:spTree>
+  </p:cSld>
+  <p:clrMapOvr>
+    <a:masterClrMapping/>
+  </p:clrMapOvr>
+</p:notes>
+</file>
+
+<file path=ppt/notesSlides/notesSlide9.xml><?xml version="1.0" encoding="utf-8"?>
+<p:notes xmlns:a="http://schemas.openxmlformats.org/drawingml/2006/main" xmlns:p="http://schemas.openxmlformats.org/presentationml/2006/main" xmlns:r="http://schemas.openxmlformats.org/officeDocument/2006/relationships">
+  <p:cSld>
+    <p:spTree>
+      <p:nvGrpSpPr>
+        <p:cNvPr id="1" name=""/>
+        <p:cNvGrpSpPr/>
+        <p:nvPr/>
+      </p:nvGrpSpPr>
+      <p:grpSpPr>
+        <a:xfrm>
+          <a:off x="0" y="0"/>
+          <a:ext cx="0" cy="0"/>
+          <a:chOff x="0" y="0"/>
+          <a:chExt cx="0" cy="0"/>
+        </a:xfrm>
+      </p:grpSpPr>
+      <p:sp>
+        <p:nvSpPr>
+          <p:cNvPr id="2" name="Slide Image Placeholder 1"/>
+          <p:cNvSpPr>
+            <a:spLocks noGrp="1"/>
+          </p:cNvSpPr>
+          <p:nvPr>
+            <p:ph type="sldImg" idx="2"/>
+          </p:nvPr>
+        </p:nvSpPr>
+        <p:spPr/>
+      </p:sp>
+      <p:sp>
+        <p:nvSpPr>
+          <p:cNvPr id="3" name="Notes Placeholder 2"/>
+          <p:cNvSpPr>
+            <a:spLocks noGrp="1"/>
+          </p:cNvSpPr>
+          <p:nvPr>
+            <p:ph type="body" idx="3" sz="quarter"/>
+          </p:nvPr>
+        </p:nvSpPr>
+        <p:spPr/>
+        <p:txBody>
+          <a:bodyPr/>
+          <a:lstStyle/>
+          <a:p>
+            <a:r>
+              <a:t>Pero la recepcionista solo necesita el nombre y el telefono para identificar a quien llama, y no tiene por que ver el correo electronico de los clientes.</a:t>
+            </a:r>
+          </a:p>
+          <a:p>
+            <a:r>
+              <a:t>El primero es la vista.</a:t>
+            </a:r>
+          </a:p>
+          <a:p>
+            <a:r>
+              <a:t>Lo que hace que funcione, y es el punto que el estudiante no cree hasta que lo ve, es que la consulta de la vista se ejecuta con los privilegios de su PROPIETARIO y no con los de quien la consulta: por eso se puede dar SELECT sobre la vista a recepcion y al mismo tiempo hacer REVOKE SELECT ON dueno FROM recepcion, y el rol sigue viendo el telefono del dueno a traves de la vista pero no puede consultar la tabla directamente.</a:t>
+            </a:r>
+          </a:p>
+        </p:txBody>
+      </p:sp>
+      <p:sp>
+        <p:nvSpPr>
+          <p:cNvPr id="4" name="Slide Number Placeholder 3"/>
+          <p:cNvSpPr>
+            <a:spLocks noGrp="1"/>
+          </p:cNvSpPr>
+          <p:nvPr>
+            <p:ph type="sldNum" idx="5" sz="quarter"/>
+          </p:nvPr>
+        </p:nvSpPr>
+        <p:spPr/>
+      </p:sp>
+    </p:spTree>
+  </p:cSld>
+  <p:clrMapOvr>
+    <a:masterClrMapping/>
+  </p:clrMapOvr>
+</p:notes>
 </file>
 
 <file path=ppt/slideLayouts/slideLayout1.xml><?xml version="1.0" encoding="utf-8"?>
@@ -6361,7 +7773,7 @@
                 </a:solidFill>
                 <a:latin typeface="Calibri"/>
               </a:rPr>
-              <a:t>Encuadre de hoy · Objetivo PI</a:t>
+              <a:t>Encuadre de hoy · Tema y objetivo</a:t>
             </a:r>
           </a:p>
         </p:txBody>
@@ -6409,7 +7821,7 @@
                 </a:solidFill>
                 <a:latin typeface="Calibri"/>
               </a:rPr>
-              <a:t>Hoy avanzamos el PI en:</a:t>
+              <a:t>Tema de hoy:</a:t>
             </a:r>
             <a:r>
               <a:rPr sz="2000" b="0" i="0">
@@ -6418,7 +7830,7 @@
                 </a:solidFill>
                 <a:latin typeface="Calibri"/>
               </a:rPr>
-              <a:t> Plan de roles/privilegios de VetCare</a:t>
+              <a:t> Administracion de BD · Roles VetCare</a:t>
             </a:r>
           </a:p>
           <a:p>
@@ -6463,15 +7875,6 @@
               </a:rPr>
               <a:t>120 min</a:t>
             </a:r>
-            <a:r>
-              <a:rPr sz="2000" b="0" i="0">
-                <a:solidFill>
-                  <a:srgbClr val="333333"/>
-                </a:solidFill>
-                <a:latin typeface="Calibri"/>
-              </a:rPr>
-              <a:t> · Teoría breve · Taller PI</a:t>
-            </a:r>
           </a:p>
           <a:p>
             <a:pPr>
@@ -6486,25 +7889,7 @@
                 </a:solidFill>
                 <a:latin typeface="Calibri"/>
               </a:rPr>
-              <a:t>–   </a:t>
-            </a:r>
-            <a:r>
-              <a:rPr sz="2000" b="1" i="0">
-                <a:solidFill>
-                  <a:srgbClr val="333333"/>
-                </a:solidFill>
-                <a:latin typeface="Calibri"/>
-              </a:rPr>
-              <a:t>Entregable de hoy:</a:t>
-            </a:r>
-            <a:r>
-              <a:rPr sz="2000" b="0" i="0">
-                <a:solidFill>
-                  <a:srgbClr val="333333"/>
-                </a:solidFill>
-                <a:latin typeface="Calibri"/>
-              </a:rPr>
-              <a:t> Documento Roles_VetCare + script GRANT/REVOKE ejecutado en la plataforma del curso</a:t>
+              <a:t>–   Gratis + navegador · free tier · sin software de pago obligatorio.</a:t>
             </a:r>
           </a:p>
           <a:p>
@@ -6520,7 +7905,7 @@
                 </a:solidFill>
                 <a:latin typeface="Calibri"/>
               </a:rPr>
-              <a:t>–   Gratis + navegador · free tier · sin software de pago obligatorio.</a:t>
+              <a:t>–   Recorrido: teoría del tema, una lámina por concepto, y demo del docente sobre VetCare DB.</a:t>
             </a:r>
           </a:p>
           <a:p>
@@ -6536,23 +7921,7 @@
                 </a:solidFill>
                 <a:latin typeface="Calibri"/>
               </a:rPr>
-              <a:t>–   La teoría no es un tema aislado: alimenta evidencias de la rúbrica del PI.</a:t>
-            </a:r>
-          </a:p>
-          <a:p>
-            <a:pPr>
-              <a:spcAft>
-                <a:spcPts val="800"/>
-              </a:spcAft>
-            </a:pPr>
-            <a:r>
-              <a:rPr sz="2000" b="0" i="0">
-                <a:solidFill>
-                  <a:srgbClr val="333333"/>
-                </a:solidFill>
-                <a:latin typeface="Calibri"/>
-              </a:rPr>
-              <a:t>–   Al salir: avance concreto en su paquete VetCare.</a:t>
+              <a:t>–   Cada lámina se sostiene sola: sirve para repasar aunque hayas faltado.</a:t>
             </a:r>
           </a:p>
         </p:txBody>
@@ -10260,7 +11629,7 @@
                 </a:solidFill>
                 <a:latin typeface="Calibri"/>
               </a:rPr>
-              <a:t>Taller guiado = tarea del PI</a:t>
+              <a:t>Práctica (opcional, guía en la carpeta)</a:t>
             </a:r>
           </a:p>
         </p:txBody>
@@ -10375,7 +11744,7 @@
                 </a:solidFill>
                 <a:latin typeface="Calibri"/>
               </a:rPr>
-              <a:t>Criterios de exito · cierre · dudas del PI</a:t>
+              <a:t>Cierre conceptual · dudas</a:t>
             </a:r>
           </a:p>
         </p:txBody>
@@ -10609,7 +11978,7 @@
                 </a:solidFill>
                 <a:latin typeface="Calibri"/>
               </a:rPr>
-              <a:t>La matriz es el entregable, no el script (1/2)</a:t>
+              <a:t>La matriz es la decision, no el script (1/2)</a:t>
             </a:r>
           </a:p>
         </p:txBody>
@@ -10909,7 +12278,7 @@
                 </a:solidFill>
                 <a:latin typeface="Calibri"/>
               </a:rPr>
-              <a:t>La matriz es el entregable, no el script (2/2)</a:t>
+              <a:t>La matriz es la decision, no el script (2/2)</a:t>
             </a:r>
           </a:p>
         </p:txBody>
@@ -16519,13 +17888,13 @@
         <p:spPr>
           <a:xfrm>
             <a:off x="0" y="0"/>
-            <a:ext cx="12191695" cy="1170432"/>
+            <a:ext cx="12191695" cy="164592"/>
           </a:xfrm>
           <a:prstGeom prst="rect">
             <a:avLst/>
           </a:prstGeom>
           <a:solidFill>
-            <a:srgbClr val="095292"/>
+            <a:srgbClr val="269CCB"/>
           </a:solidFill>
           <a:ln>
             <a:noFill/>
@@ -16553,251 +17922,9 @@
           </a:p>
         </p:txBody>
       </p:sp>
-      <p:sp>
-        <p:nvSpPr>
-          <p:cNvPr id="3" name="Rectangle 2"/>
-          <p:cNvSpPr/>
-          <p:nvPr/>
-        </p:nvSpPr>
-        <p:spPr>
-          <a:xfrm>
-            <a:off x="0" y="1170432"/>
-            <a:ext cx="12191695" cy="41148"/>
-          </a:xfrm>
-          <a:prstGeom prst="rect">
-            <a:avLst/>
-          </a:prstGeom>
-          <a:solidFill>
-            <a:srgbClr val="FFD000"/>
-          </a:solidFill>
-          <a:ln>
-            <a:noFill/>
-          </a:ln>
-        </p:spPr>
-        <p:style>
-          <a:lnRef idx="1">
-            <a:schemeClr val="accent1"/>
-          </a:lnRef>
-          <a:fillRef idx="3">
-            <a:schemeClr val="accent1"/>
-          </a:fillRef>
-          <a:effectRef idx="2">
-            <a:schemeClr val="accent1"/>
-          </a:effectRef>
-          <a:fontRef idx="minor">
-            <a:schemeClr val="lt1"/>
-          </a:fontRef>
-        </p:style>
-        <p:txBody>
-          <a:bodyPr rtlCol="0" anchor="ctr"/>
-          <a:lstStyle/>
-          <a:p>
-            <a:pPr algn="ctr"/>
-          </a:p>
-        </p:txBody>
-      </p:sp>
-      <p:sp>
-        <p:nvSpPr>
-          <p:cNvPr id="4" name="TextBox 3"/>
-          <p:cNvSpPr txBox="1"/>
-          <p:nvPr/>
-        </p:nvSpPr>
-        <p:spPr>
-          <a:xfrm>
-            <a:off x="457200" y="164592"/>
-            <a:ext cx="11277295" cy="384048"/>
-          </a:xfrm>
-          <a:prstGeom prst="rect">
-            <a:avLst/>
-          </a:prstGeom>
-          <a:noFill/>
-        </p:spPr>
-        <p:txBody>
-          <a:bodyPr wrap="square">
-            <a:spAutoFit/>
-          </a:bodyPr>
-          <a:lstStyle/>
-          <a:p>
-            <a:r>
-              <a:rPr sz="2600" b="1" i="0">
-                <a:solidFill>
-                  <a:srgbClr val="FFFFFF"/>
-                </a:solidFill>
-                <a:latin typeface="Calibri"/>
-              </a:rPr>
-              <a:t>Herramientas de hoy</a:t>
-            </a:r>
-          </a:p>
-        </p:txBody>
-      </p:sp>
-      <p:sp>
-        <p:nvSpPr>
-          <p:cNvPr id="5" name="TextBox 4"/>
-          <p:cNvSpPr txBox="1"/>
-          <p:nvPr/>
-        </p:nvSpPr>
-        <p:spPr>
-          <a:xfrm>
-            <a:off x="457200" y="566928"/>
-            <a:ext cx="11277295" cy="411480"/>
-          </a:xfrm>
-          <a:prstGeom prst="rect">
-            <a:avLst/>
-          </a:prstGeom>
-          <a:noFill/>
-        </p:spPr>
-        <p:txBody>
-          <a:bodyPr wrap="square">
-            <a:spAutoFit/>
-          </a:bodyPr>
-          <a:lstStyle/>
-          <a:p>
-            <a:r>
-              <a:rPr sz="1400" b="0" i="0">
-                <a:solidFill>
-                  <a:srgbClr val="B8D8EE"/>
-                </a:solidFill>
-                <a:latin typeface="Calibri"/>
-              </a:rPr>
-              <a:t>Gratis · navegador o free tier</a:t>
-            </a:r>
-          </a:p>
-        </p:txBody>
-      </p:sp>
-      <p:sp>
-        <p:nvSpPr>
-          <p:cNvPr id="6" name="Rounded Rectangle 5"/>
-          <p:cNvSpPr/>
-          <p:nvPr/>
-        </p:nvSpPr>
-        <p:spPr>
-          <a:xfrm>
-            <a:off x="457200" y="1591056"/>
-            <a:ext cx="3624986" cy="2299716"/>
-          </a:xfrm>
-          <a:prstGeom prst="roundRect">
-            <a:avLst>
-              <a:gd name="adj" fmla="val 12000"/>
-            </a:avLst>
-          </a:prstGeom>
-          <a:solidFill>
-            <a:srgbClr val="F2F2F2"/>
-          </a:solidFill>
-          <a:ln>
-            <a:noFill/>
-          </a:ln>
-        </p:spPr>
-        <p:style>
-          <a:lnRef idx="1">
-            <a:schemeClr val="accent1"/>
-          </a:lnRef>
-          <a:fillRef idx="3">
-            <a:schemeClr val="accent1"/>
-          </a:fillRef>
-          <a:effectRef idx="2">
-            <a:schemeClr val="accent1"/>
-          </a:effectRef>
-          <a:fontRef idx="minor">
-            <a:schemeClr val="lt1"/>
-          </a:fontRef>
-        </p:style>
-        <p:txBody>
-          <a:bodyPr rtlCol="0" anchor="ctr"/>
-          <a:lstStyle/>
-          <a:p>
-            <a:pPr algn="ctr"/>
-          </a:p>
-        </p:txBody>
-      </p:sp>
-      <p:sp>
-        <p:nvSpPr>
-          <p:cNvPr id="7" name="Rectangle 6"/>
-          <p:cNvSpPr/>
-          <p:nvPr/>
-        </p:nvSpPr>
-        <p:spPr>
-          <a:xfrm>
-            <a:off x="457200" y="1591056"/>
-            <a:ext cx="3624986" cy="64008"/>
-          </a:xfrm>
-          <a:prstGeom prst="rect">
-            <a:avLst/>
-          </a:prstGeom>
-          <a:solidFill>
-            <a:srgbClr val="095292"/>
-          </a:solidFill>
-          <a:ln>
-            <a:noFill/>
-          </a:ln>
-        </p:spPr>
-        <p:style>
-          <a:lnRef idx="1">
-            <a:schemeClr val="accent1"/>
-          </a:lnRef>
-          <a:fillRef idx="3">
-            <a:schemeClr val="accent1"/>
-          </a:fillRef>
-          <a:effectRef idx="2">
-            <a:schemeClr val="accent1"/>
-          </a:effectRef>
-          <a:fontRef idx="minor">
-            <a:schemeClr val="lt1"/>
-          </a:fontRef>
-        </p:style>
-        <p:txBody>
-          <a:bodyPr rtlCol="0" anchor="ctr"/>
-          <a:lstStyle/>
-          <a:p>
-            <a:pPr algn="ctr"/>
-          </a:p>
-        </p:txBody>
-      </p:sp>
-      <p:sp>
-        <p:nvSpPr>
-          <p:cNvPr id="8" name="Rectangle 7"/>
-          <p:cNvSpPr/>
-          <p:nvPr/>
-        </p:nvSpPr>
-        <p:spPr>
-          <a:xfrm>
-            <a:off x="457200" y="1655064"/>
-            <a:ext cx="3624986" cy="27432"/>
-          </a:xfrm>
-          <a:prstGeom prst="rect">
-            <a:avLst/>
-          </a:prstGeom>
-          <a:solidFill>
-            <a:srgbClr val="FFD000"/>
-          </a:solidFill>
-          <a:ln>
-            <a:noFill/>
-          </a:ln>
-        </p:spPr>
-        <p:style>
-          <a:lnRef idx="1">
-            <a:schemeClr val="accent1"/>
-          </a:lnRef>
-          <a:fillRef idx="3">
-            <a:schemeClr val="accent1"/>
-          </a:fillRef>
-          <a:effectRef idx="2">
-            <a:schemeClr val="accent1"/>
-          </a:effectRef>
-          <a:fontRef idx="minor">
-            <a:schemeClr val="lt1"/>
-          </a:fontRef>
-        </p:style>
-        <p:txBody>
-          <a:bodyPr rtlCol="0" anchor="ctr"/>
-          <a:lstStyle/>
-          <a:p>
-            <a:pPr algn="ctr"/>
-          </a:p>
-        </p:txBody>
-      </p:sp>
       <p:pic>
         <p:nvPicPr>
-          <p:cNvPr id="9" name="Picture 8" descr="examlab.png"/>
+          <p:cNvPr id="3" name="Picture 2" descr="logo_uniajc_color.png"/>
           <p:cNvPicPr>
             <a:picLocks noChangeAspect="1"/>
           </p:cNvPicPr>
@@ -16811,8 +17938,8 @@
         </p:blipFill>
         <p:spPr>
           <a:xfrm>
-            <a:off x="1659331" y="1847087"/>
-            <a:ext cx="1220724" cy="1220724"/>
+            <a:off x="10271455" y="5998464"/>
+            <a:ext cx="1463040" cy="643233"/>
           </a:xfrm>
           <a:prstGeom prst="rect">
             <a:avLst/>
@@ -16821,14 +17948,14 @@
       </p:pic>
       <p:sp>
         <p:nvSpPr>
-          <p:cNvPr id="10" name="TextBox 9"/>
+          <p:cNvPr id="4" name="TextBox 3"/>
           <p:cNvSpPr txBox="1"/>
           <p:nvPr/>
         </p:nvSpPr>
         <p:spPr>
           <a:xfrm>
-            <a:off x="530352" y="3159251"/>
-            <a:ext cx="3478682" cy="621792"/>
+            <a:off x="457200" y="1737360"/>
+            <a:ext cx="11277295" cy="1097280"/>
           </a:xfrm>
           <a:prstGeom prst="rect">
             <a:avLst/>
@@ -16836,660 +17963,32 @@
           <a:noFill/>
         </p:spPr>
         <p:txBody>
-          <a:bodyPr wrap="square" anchor="t"/>
+          <a:bodyPr wrap="square" anchor="ctr"/>
           <a:lstStyle/>
           <a:p>
             <a:pPr algn="ctr"/>
             <a:r>
-              <a:rPr sz="1300" b="1" i="0">
+              <a:rPr sz="3400" b="1" i="0">
                 <a:solidFill>
                   <a:srgbClr val="095292"/>
                 </a:solidFill>
                 <a:latin typeface="Calibri"/>
               </a:rPr>
-              <a:t>la plataforma del curso</a:t>
-            </a:r>
-          </a:p>
-          <a:p>
-            <a:pPr algn="ctr">
-              <a:spcBef>
-                <a:spcPts val="200"/>
-              </a:spcBef>
-            </a:pPr>
-            <a:r>
-              <a:rPr sz="1000" b="0" i="0">
-                <a:solidFill>
-                  <a:srgbClr val="666666"/>
-                </a:solidFill>
-                <a:latin typeface="Calibri"/>
-              </a:rPr>
-              <a:t>PostgreSQL: aqui corre</a:t>
-            </a:r>
-          </a:p>
-        </p:txBody>
-      </p:sp>
-      <p:sp>
-        <p:nvSpPr>
-          <p:cNvPr id="11" name="Rounded Rectangle 10"/>
-          <p:cNvSpPr/>
-          <p:nvPr/>
-        </p:nvSpPr>
-        <p:spPr>
-          <a:xfrm>
-            <a:off x="4283354" y="1591056"/>
-            <a:ext cx="3624986" cy="2299716"/>
-          </a:xfrm>
-          <a:prstGeom prst="roundRect">
-            <a:avLst>
-              <a:gd name="adj" fmla="val 12000"/>
-            </a:avLst>
-          </a:prstGeom>
-          <a:solidFill>
-            <a:srgbClr val="F2F2F2"/>
-          </a:solidFill>
-          <a:ln>
-            <a:noFill/>
-          </a:ln>
-        </p:spPr>
-        <p:style>
-          <a:lnRef idx="1">
-            <a:schemeClr val="accent1"/>
-          </a:lnRef>
-          <a:fillRef idx="3">
-            <a:schemeClr val="accent1"/>
-          </a:fillRef>
-          <a:effectRef idx="2">
-            <a:schemeClr val="accent1"/>
-          </a:effectRef>
-          <a:fontRef idx="minor">
-            <a:schemeClr val="lt1"/>
-          </a:fontRef>
-        </p:style>
-        <p:txBody>
-          <a:bodyPr rtlCol="0" anchor="ctr"/>
-          <a:lstStyle/>
-          <a:p>
-            <a:pPr algn="ctr"/>
-          </a:p>
-        </p:txBody>
-      </p:sp>
-      <p:sp>
-        <p:nvSpPr>
-          <p:cNvPr id="12" name="Rectangle 11"/>
-          <p:cNvSpPr/>
-          <p:nvPr/>
-        </p:nvSpPr>
-        <p:spPr>
-          <a:xfrm>
-            <a:off x="4283354" y="1591056"/>
-            <a:ext cx="3624986" cy="64008"/>
-          </a:xfrm>
-          <a:prstGeom prst="rect">
-            <a:avLst/>
-          </a:prstGeom>
-          <a:solidFill>
-            <a:srgbClr val="095292"/>
-          </a:solidFill>
-          <a:ln>
-            <a:noFill/>
-          </a:ln>
-        </p:spPr>
-        <p:style>
-          <a:lnRef idx="1">
-            <a:schemeClr val="accent1"/>
-          </a:lnRef>
-          <a:fillRef idx="3">
-            <a:schemeClr val="accent1"/>
-          </a:fillRef>
-          <a:effectRef idx="2">
-            <a:schemeClr val="accent1"/>
-          </a:effectRef>
-          <a:fontRef idx="minor">
-            <a:schemeClr val="lt1"/>
-          </a:fontRef>
-        </p:style>
-        <p:txBody>
-          <a:bodyPr rtlCol="0" anchor="ctr"/>
-          <a:lstStyle/>
-          <a:p>
-            <a:pPr algn="ctr"/>
-          </a:p>
-        </p:txBody>
-      </p:sp>
-      <p:sp>
-        <p:nvSpPr>
-          <p:cNvPr id="13" name="Rectangle 12"/>
-          <p:cNvSpPr/>
-          <p:nvPr/>
-        </p:nvSpPr>
-        <p:spPr>
-          <a:xfrm>
-            <a:off x="4283354" y="1655064"/>
-            <a:ext cx="3624986" cy="27432"/>
-          </a:xfrm>
-          <a:prstGeom prst="rect">
-            <a:avLst/>
-          </a:prstGeom>
-          <a:solidFill>
-            <a:srgbClr val="FFD000"/>
-          </a:solidFill>
-          <a:ln>
-            <a:noFill/>
-          </a:ln>
-        </p:spPr>
-        <p:style>
-          <a:lnRef idx="1">
-            <a:schemeClr val="accent1"/>
-          </a:lnRef>
-          <a:fillRef idx="3">
-            <a:schemeClr val="accent1"/>
-          </a:fillRef>
-          <a:effectRef idx="2">
-            <a:schemeClr val="accent1"/>
-          </a:effectRef>
-          <a:fontRef idx="minor">
-            <a:schemeClr val="lt1"/>
-          </a:fontRef>
-        </p:style>
-        <p:txBody>
-          <a:bodyPr rtlCol="0" anchor="ctr"/>
-          <a:lstStyle/>
-          <a:p>
-            <a:pPr algn="ctr"/>
-          </a:p>
-        </p:txBody>
-      </p:sp>
-      <p:pic>
-        <p:nvPicPr>
-          <p:cNvPr id="14" name="Picture 13" descr="google_docs.png"/>
-          <p:cNvPicPr>
-            <a:picLocks noChangeAspect="1"/>
-          </p:cNvPicPr>
-          <p:nvPr/>
-        </p:nvPicPr>
-        <p:blipFill>
-          <a:blip r:embed="rId3"/>
-          <a:stretch>
-            <a:fillRect/>
-          </a:stretch>
-        </p:blipFill>
-        <p:spPr>
-          <a:xfrm>
-            <a:off x="5485485" y="1847087"/>
-            <a:ext cx="1220724" cy="1220724"/>
-          </a:xfrm>
-          <a:prstGeom prst="rect">
-            <a:avLst/>
-          </a:prstGeom>
-        </p:spPr>
-      </p:pic>
-      <p:sp>
-        <p:nvSpPr>
-          <p:cNvPr id="15" name="TextBox 14"/>
+              <a:t>Clase 2 · Administracion de BD · Roles VetCare</a:t>
+            </a:r>
+          </a:p>
+        </p:txBody>
+      </p:sp>
+      <p:sp>
+        <p:nvSpPr>
+          <p:cNvPr id="5" name="TextBox 4"/>
           <p:cNvSpPr txBox="1"/>
           <p:nvPr/>
         </p:nvSpPr>
         <p:spPr>
           <a:xfrm>
-            <a:off x="4356506" y="3159251"/>
-            <a:ext cx="3478682" cy="621792"/>
-          </a:xfrm>
-          <a:prstGeom prst="rect">
-            <a:avLst/>
-          </a:prstGeom>
-          <a:noFill/>
-        </p:spPr>
-        <p:txBody>
-          <a:bodyPr wrap="square" anchor="t"/>
-          <a:lstStyle/>
-          <a:p>
-            <a:pPr algn="ctr"/>
-            <a:r>
-              <a:rPr sz="1300" b="1" i="0">
-                <a:solidFill>
-                  <a:srgbClr val="095292"/>
-                </a:solidFill>
-                <a:latin typeface="Calibri"/>
-              </a:rPr>
-              <a:t>Google Docs</a:t>
-            </a:r>
-          </a:p>
-          <a:p>
-            <a:pPr algn="ctr">
-              <a:spcBef>
-                <a:spcPts val="200"/>
-              </a:spcBef>
-            </a:pPr>
-            <a:r>
-              <a:rPr sz="1000" b="0" i="0">
-                <a:solidFill>
-                  <a:srgbClr val="666666"/>
-                </a:solidFill>
-                <a:latin typeface="Calibri"/>
-              </a:rPr>
-              <a:t>Matriz y politica</a:t>
-            </a:r>
-          </a:p>
-        </p:txBody>
-      </p:sp>
-      <p:sp>
-        <p:nvSpPr>
-          <p:cNvPr id="16" name="Rounded Rectangle 15"/>
-          <p:cNvSpPr/>
-          <p:nvPr/>
-        </p:nvSpPr>
-        <p:spPr>
-          <a:xfrm>
-            <a:off x="8109508" y="1591056"/>
-            <a:ext cx="3624986" cy="2299716"/>
-          </a:xfrm>
-          <a:prstGeom prst="roundRect">
-            <a:avLst>
-              <a:gd name="adj" fmla="val 12000"/>
-            </a:avLst>
-          </a:prstGeom>
-          <a:solidFill>
-            <a:srgbClr val="F2F2F2"/>
-          </a:solidFill>
-          <a:ln>
-            <a:noFill/>
-          </a:ln>
-        </p:spPr>
-        <p:style>
-          <a:lnRef idx="1">
-            <a:schemeClr val="accent1"/>
-          </a:lnRef>
-          <a:fillRef idx="3">
-            <a:schemeClr val="accent1"/>
-          </a:fillRef>
-          <a:effectRef idx="2">
-            <a:schemeClr val="accent1"/>
-          </a:effectRef>
-          <a:fontRef idx="minor">
-            <a:schemeClr val="lt1"/>
-          </a:fontRef>
-        </p:style>
-        <p:txBody>
-          <a:bodyPr rtlCol="0" anchor="ctr"/>
-          <a:lstStyle/>
-          <a:p>
-            <a:pPr algn="ctr"/>
-          </a:p>
-        </p:txBody>
-      </p:sp>
-      <p:sp>
-        <p:nvSpPr>
-          <p:cNvPr id="17" name="Rectangle 16"/>
-          <p:cNvSpPr/>
-          <p:nvPr/>
-        </p:nvSpPr>
-        <p:spPr>
-          <a:xfrm>
-            <a:off x="8109508" y="1591056"/>
-            <a:ext cx="3624986" cy="64008"/>
-          </a:xfrm>
-          <a:prstGeom prst="rect">
-            <a:avLst/>
-          </a:prstGeom>
-          <a:solidFill>
-            <a:srgbClr val="095292"/>
-          </a:solidFill>
-          <a:ln>
-            <a:noFill/>
-          </a:ln>
-        </p:spPr>
-        <p:style>
-          <a:lnRef idx="1">
-            <a:schemeClr val="accent1"/>
-          </a:lnRef>
-          <a:fillRef idx="3">
-            <a:schemeClr val="accent1"/>
-          </a:fillRef>
-          <a:effectRef idx="2">
-            <a:schemeClr val="accent1"/>
-          </a:effectRef>
-          <a:fontRef idx="minor">
-            <a:schemeClr val="lt1"/>
-          </a:fontRef>
-        </p:style>
-        <p:txBody>
-          <a:bodyPr rtlCol="0" anchor="ctr"/>
-          <a:lstStyle/>
-          <a:p>
-            <a:pPr algn="ctr"/>
-          </a:p>
-        </p:txBody>
-      </p:sp>
-      <p:sp>
-        <p:nvSpPr>
-          <p:cNvPr id="18" name="Rectangle 17"/>
-          <p:cNvSpPr/>
-          <p:nvPr/>
-        </p:nvSpPr>
-        <p:spPr>
-          <a:xfrm>
-            <a:off x="8109508" y="1655064"/>
-            <a:ext cx="3624986" cy="27432"/>
-          </a:xfrm>
-          <a:prstGeom prst="rect">
-            <a:avLst/>
-          </a:prstGeom>
-          <a:solidFill>
-            <a:srgbClr val="FFD000"/>
-          </a:solidFill>
-          <a:ln>
-            <a:noFill/>
-          </a:ln>
-        </p:spPr>
-        <p:style>
-          <a:lnRef idx="1">
-            <a:schemeClr val="accent1"/>
-          </a:lnRef>
-          <a:fillRef idx="3">
-            <a:schemeClr val="accent1"/>
-          </a:fillRef>
-          <a:effectRef idx="2">
-            <a:schemeClr val="accent1"/>
-          </a:effectRef>
-          <a:fontRef idx="minor">
-            <a:schemeClr val="lt1"/>
-          </a:fontRef>
-        </p:style>
-        <p:txBody>
-          <a:bodyPr rtlCol="0" anchor="ctr"/>
-          <a:lstStyle/>
-          <a:p>
-            <a:pPr algn="ctr"/>
-          </a:p>
-        </p:txBody>
-      </p:sp>
-      <p:pic>
-        <p:nvPicPr>
-          <p:cNvPr id="19" name="Picture 18" descr="dbfiddle.png"/>
-          <p:cNvPicPr>
-            <a:picLocks noChangeAspect="1"/>
-          </p:cNvPicPr>
-          <p:nvPr/>
-        </p:nvPicPr>
-        <p:blipFill>
-          <a:blip r:embed="rId4"/>
-          <a:stretch>
-            <a:fillRect/>
-          </a:stretch>
-        </p:blipFill>
-        <p:spPr>
-          <a:xfrm>
-            <a:off x="9311640" y="1847087"/>
-            <a:ext cx="1220724" cy="1220724"/>
-          </a:xfrm>
-          <a:prstGeom prst="rect">
-            <a:avLst/>
-          </a:prstGeom>
-        </p:spPr>
-      </p:pic>
-      <p:sp>
-        <p:nvSpPr>
-          <p:cNvPr id="20" name="TextBox 19"/>
-          <p:cNvSpPr txBox="1"/>
-          <p:nvPr/>
-        </p:nvSpPr>
-        <p:spPr>
-          <a:xfrm>
-            <a:off x="8182660" y="3159251"/>
-            <a:ext cx="3478682" cy="621792"/>
-          </a:xfrm>
-          <a:prstGeom prst="rect">
-            <a:avLst/>
-          </a:prstGeom>
-          <a:noFill/>
-        </p:spPr>
-        <p:txBody>
-          <a:bodyPr wrap="square" anchor="t"/>
-          <a:lstStyle/>
-          <a:p>
-            <a:pPr algn="ctr"/>
-            <a:r>
-              <a:rPr sz="1300" b="1" i="0">
-                <a:solidFill>
-                  <a:srgbClr val="095292"/>
-                </a:solidFill>
-                <a:latin typeface="Calibri"/>
-              </a:rPr>
-              <a:t>DB Fiddle</a:t>
-            </a:r>
-          </a:p>
-          <a:p>
-            <a:pPr algn="ctr">
-              <a:spcBef>
-                <a:spcPts val="200"/>
-              </a:spcBef>
-            </a:pPr>
-            <a:r>
-              <a:rPr sz="1000" b="0" i="0">
-                <a:solidFill>
-                  <a:srgbClr val="666666"/>
-                </a:solidFill>
-                <a:latin typeface="Calibri"/>
-              </a:rPr>
-              <a:t>Alterno: SQL suelto</a:t>
-            </a:r>
-          </a:p>
-        </p:txBody>
-      </p:sp>
-      <p:sp>
-        <p:nvSpPr>
-          <p:cNvPr id="21" name="Rounded Rectangle 20"/>
-          <p:cNvSpPr/>
-          <p:nvPr/>
-        </p:nvSpPr>
-        <p:spPr>
-          <a:xfrm>
-            <a:off x="4283354" y="4055364"/>
-            <a:ext cx="3624986" cy="2299716"/>
-          </a:xfrm>
-          <a:prstGeom prst="roundRect">
-            <a:avLst>
-              <a:gd name="adj" fmla="val 12000"/>
-            </a:avLst>
-          </a:prstGeom>
-          <a:solidFill>
-            <a:srgbClr val="F2F2F2"/>
-          </a:solidFill>
-          <a:ln>
-            <a:noFill/>
-          </a:ln>
-        </p:spPr>
-        <p:style>
-          <a:lnRef idx="1">
-            <a:schemeClr val="accent1"/>
-          </a:lnRef>
-          <a:fillRef idx="3">
-            <a:schemeClr val="accent1"/>
-          </a:fillRef>
-          <a:effectRef idx="2">
-            <a:schemeClr val="accent1"/>
-          </a:effectRef>
-          <a:fontRef idx="minor">
-            <a:schemeClr val="lt1"/>
-          </a:fontRef>
-        </p:style>
-        <p:txBody>
-          <a:bodyPr rtlCol="0" anchor="ctr"/>
-          <a:lstStyle/>
-          <a:p>
-            <a:pPr algn="ctr"/>
-          </a:p>
-        </p:txBody>
-      </p:sp>
-      <p:sp>
-        <p:nvSpPr>
-          <p:cNvPr id="22" name="Rectangle 21"/>
-          <p:cNvSpPr/>
-          <p:nvPr/>
-        </p:nvSpPr>
-        <p:spPr>
-          <a:xfrm>
-            <a:off x="4283354" y="4055364"/>
-            <a:ext cx="3624986" cy="64008"/>
-          </a:xfrm>
-          <a:prstGeom prst="rect">
-            <a:avLst/>
-          </a:prstGeom>
-          <a:solidFill>
-            <a:srgbClr val="095292"/>
-          </a:solidFill>
-          <a:ln>
-            <a:noFill/>
-          </a:ln>
-        </p:spPr>
-        <p:style>
-          <a:lnRef idx="1">
-            <a:schemeClr val="accent1"/>
-          </a:lnRef>
-          <a:fillRef idx="3">
-            <a:schemeClr val="accent1"/>
-          </a:fillRef>
-          <a:effectRef idx="2">
-            <a:schemeClr val="accent1"/>
-          </a:effectRef>
-          <a:fontRef idx="minor">
-            <a:schemeClr val="lt1"/>
-          </a:fontRef>
-        </p:style>
-        <p:txBody>
-          <a:bodyPr rtlCol="0" anchor="ctr"/>
-          <a:lstStyle/>
-          <a:p>
-            <a:pPr algn="ctr"/>
-          </a:p>
-        </p:txBody>
-      </p:sp>
-      <p:sp>
-        <p:nvSpPr>
-          <p:cNvPr id="23" name="Rectangle 22"/>
-          <p:cNvSpPr/>
-          <p:nvPr/>
-        </p:nvSpPr>
-        <p:spPr>
-          <a:xfrm>
-            <a:off x="4283354" y="4119372"/>
-            <a:ext cx="3624986" cy="27432"/>
-          </a:xfrm>
-          <a:prstGeom prst="rect">
-            <a:avLst/>
-          </a:prstGeom>
-          <a:solidFill>
-            <a:srgbClr val="FFD000"/>
-          </a:solidFill>
-          <a:ln>
-            <a:noFill/>
-          </a:ln>
-        </p:spPr>
-        <p:style>
-          <a:lnRef idx="1">
-            <a:schemeClr val="accent1"/>
-          </a:lnRef>
-          <a:fillRef idx="3">
-            <a:schemeClr val="accent1"/>
-          </a:fillRef>
-          <a:effectRef idx="2">
-            <a:schemeClr val="accent1"/>
-          </a:effectRef>
-          <a:fontRef idx="minor">
-            <a:schemeClr val="lt1"/>
-          </a:fontRef>
-        </p:style>
-        <p:txBody>
-          <a:bodyPr rtlCol="0" anchor="ctr"/>
-          <a:lstStyle/>
-          <a:p>
-            <a:pPr algn="ctr"/>
-          </a:p>
-        </p:txBody>
-      </p:sp>
-      <p:pic>
-        <p:nvPicPr>
-          <p:cNvPr id="24" name="Picture 23" descr="oracle_livesql.png"/>
-          <p:cNvPicPr>
-            <a:picLocks noChangeAspect="1"/>
-          </p:cNvPicPr>
-          <p:nvPr/>
-        </p:nvPicPr>
-        <p:blipFill>
-          <a:blip r:embed="rId5"/>
-          <a:stretch>
-            <a:fillRect/>
-          </a:stretch>
-        </p:blipFill>
-        <p:spPr>
-          <a:xfrm>
-            <a:off x="5485485" y="4311396"/>
-            <a:ext cx="1220724" cy="1220724"/>
-          </a:xfrm>
-          <a:prstGeom prst="rect">
-            <a:avLst/>
-          </a:prstGeom>
-        </p:spPr>
-      </p:pic>
-      <p:sp>
-        <p:nvSpPr>
-          <p:cNvPr id="25" name="TextBox 24"/>
-          <p:cNvSpPr txBox="1"/>
-          <p:nvPr/>
-        </p:nvSpPr>
-        <p:spPr>
-          <a:xfrm>
-            <a:off x="4356506" y="5623560"/>
-            <a:ext cx="3478682" cy="621792"/>
-          </a:xfrm>
-          <a:prstGeom prst="rect">
-            <a:avLst/>
-          </a:prstGeom>
-          <a:noFill/>
-        </p:spPr>
-        <p:txBody>
-          <a:bodyPr wrap="square" anchor="t"/>
-          <a:lstStyle/>
-          <a:p>
-            <a:pPr algn="ctr"/>
-            <a:r>
-              <a:rPr sz="1300" b="1" i="0">
-                <a:solidFill>
-                  <a:srgbClr val="095292"/>
-                </a:solidFill>
-                <a:latin typeface="Calibri"/>
-              </a:rPr>
-              <a:t>Oracle Live SQL</a:t>
-            </a:r>
-          </a:p>
-          <a:p>
-            <a:pPr algn="ctr">
-              <a:spcBef>
-                <a:spcPts val="200"/>
-              </a:spcBef>
-            </a:pPr>
-            <a:r>
-              <a:rPr sz="1000" b="0" i="0">
-                <a:solidFill>
-                  <a:srgbClr val="666666"/>
-                </a:solidFill>
-                <a:latin typeface="Calibri"/>
-              </a:rPr>
-              <a:t>Solo contraste</a:t>
-            </a:r>
-          </a:p>
-        </p:txBody>
-      </p:sp>
-      <p:sp>
-        <p:nvSpPr>
-          <p:cNvPr id="26" name="TextBox 25"/>
-          <p:cNvSpPr txBox="1"/>
-          <p:nvPr/>
-        </p:nvSpPr>
-        <p:spPr>
-          <a:xfrm>
-            <a:off x="11185855" y="6473952"/>
-            <a:ext cx="640080" cy="274320"/>
+            <a:off x="457200" y="3017520"/>
+            <a:ext cx="11277295" cy="1645920"/>
           </a:xfrm>
           <a:prstGeom prst="rect">
             <a:avLst/>
@@ -17502,141 +18001,65 @@
           </a:bodyPr>
           <a:lstStyle/>
           <a:p>
-            <a:pPr algn="r"/>
-            <a:r>
-              <a:rPr sz="1100" b="0" i="0">
-                <a:solidFill>
-                  <a:srgbClr val="666666"/>
-                </a:solidFill>
-                <a:latin typeface="Calibri"/>
-              </a:rPr>
-              <a:t>44</a:t>
-            </a:r>
-          </a:p>
-        </p:txBody>
-      </p:sp>
-    </p:spTree>
-  </p:cSld>
-  <p:clrMapOvr>
-    <a:masterClrMapping/>
-  </p:clrMapOvr>
-</p:sld>
-</file>
-
-<file path=ppt/slides/slide45.xml><?xml version="1.0" encoding="utf-8"?>
-<p:sld xmlns:a="http://schemas.openxmlformats.org/drawingml/2006/main" xmlns:p="http://schemas.openxmlformats.org/presentationml/2006/main" xmlns:r="http://schemas.openxmlformats.org/officeDocument/2006/relationships">
-  <p:cSld>
-    <p:bg>
-      <p:bgPr>
-        <a:solidFill>
-          <a:srgbClr val="FFFFFF"/>
-        </a:solidFill>
-        <a:effectLst/>
-      </p:bgPr>
-    </p:bg>
-    <p:spTree>
-      <p:nvGrpSpPr>
-        <p:cNvPr id="1" name=""/>
-        <p:cNvGrpSpPr/>
-        <p:nvPr/>
-      </p:nvGrpSpPr>
-      <p:grpSpPr/>
-      <p:sp>
-        <p:nvSpPr>
-          <p:cNvPr id="2" name="Rectangle 1"/>
-          <p:cNvSpPr/>
-          <p:nvPr/>
-        </p:nvSpPr>
-        <p:spPr>
-          <a:xfrm>
-            <a:off x="0" y="0"/>
-            <a:ext cx="12191695" cy="960120"/>
-          </a:xfrm>
-          <a:prstGeom prst="rect">
-            <a:avLst/>
-          </a:prstGeom>
-          <a:solidFill>
-            <a:srgbClr val="095292"/>
-          </a:solidFill>
-          <a:ln>
-            <a:noFill/>
-          </a:ln>
-        </p:spPr>
-        <p:style>
-          <a:lnRef idx="1">
-            <a:schemeClr val="accent1"/>
-          </a:lnRef>
-          <a:fillRef idx="3">
-            <a:schemeClr val="accent1"/>
-          </a:fillRef>
-          <a:effectRef idx="2">
-            <a:schemeClr val="accent1"/>
-          </a:effectRef>
-          <a:fontRef idx="minor">
-            <a:schemeClr val="lt1"/>
-          </a:fontRef>
-        </p:style>
-        <p:txBody>
-          <a:bodyPr rtlCol="0" anchor="ctr"/>
-          <a:lstStyle/>
-          <a:p>
-            <a:pPr algn="ctr"/>
-          </a:p>
-        </p:txBody>
-      </p:sp>
-      <p:sp>
-        <p:nvSpPr>
-          <p:cNvPr id="3" name="Rectangle 2"/>
-          <p:cNvSpPr/>
-          <p:nvPr/>
-        </p:nvSpPr>
-        <p:spPr>
-          <a:xfrm>
-            <a:off x="0" y="960120"/>
-            <a:ext cx="12191695" cy="41148"/>
-          </a:xfrm>
-          <a:prstGeom prst="rect">
-            <a:avLst/>
-          </a:prstGeom>
-          <a:solidFill>
-            <a:srgbClr val="FFD000"/>
-          </a:solidFill>
-          <a:ln>
-            <a:noFill/>
-          </a:ln>
-        </p:spPr>
-        <p:style>
-          <a:lnRef idx="1">
-            <a:schemeClr val="accent1"/>
-          </a:lnRef>
-          <a:fillRef idx="3">
-            <a:schemeClr val="accent1"/>
-          </a:fillRef>
-          <a:effectRef idx="2">
-            <a:schemeClr val="accent1"/>
-          </a:effectRef>
-          <a:fontRef idx="minor">
-            <a:schemeClr val="lt1"/>
-          </a:fontRef>
-        </p:style>
-        <p:txBody>
-          <a:bodyPr rtlCol="0" anchor="ctr"/>
-          <a:lstStyle/>
-          <a:p>
-            <a:pPr algn="ctr"/>
-          </a:p>
-        </p:txBody>
-      </p:sp>
-      <p:sp>
-        <p:nvSpPr>
-          <p:cNvPr id="4" name="TextBox 3"/>
+            <a:pPr algn="ctr">
+              <a:spcAft>
+                <a:spcPts val="600"/>
+              </a:spcAft>
+            </a:pPr>
+            <a:r>
+              <a:rPr sz="1600" b="0" i="0">
+                <a:solidFill>
+                  <a:srgbClr val="333333"/>
+                </a:solidFill>
+                <a:latin typeface="Calibri"/>
+              </a:rPr>
+              <a:t>Los cuatro terminos que se confunden todo el tiempo</a:t>
+            </a:r>
+          </a:p>
+          <a:p>
+            <a:pPr algn="ctr">
+              <a:spcAft>
+                <a:spcPts val="600"/>
+              </a:spcAft>
+            </a:pPr>
+            <a:r>
+              <a:rPr sz="1600" b="0" i="0">
+                <a:solidFill>
+                  <a:srgbClr val="333333"/>
+                </a:solidFill>
+                <a:latin typeface="Calibri"/>
+              </a:rPr>
+              <a:t>Privilegio</a:t>
+            </a:r>
+          </a:p>
+          <a:p>
+            <a:pPr algn="ctr">
+              <a:spcAft>
+                <a:spcPts val="600"/>
+              </a:spcAft>
+            </a:pPr>
+            <a:r>
+              <a:rPr sz="1600" b="0" i="0">
+                <a:solidFill>
+                  <a:srgbClr val="333333"/>
+                </a:solidFill>
+                <a:latin typeface="Calibri"/>
+              </a:rPr>
+              <a:t>Rol</a:t>
+            </a:r>
+          </a:p>
+        </p:txBody>
+      </p:sp>
+      <p:sp>
+        <p:nvSpPr>
+          <p:cNvPr id="6" name="TextBox 5"/>
           <p:cNvSpPr txBox="1"/>
           <p:nvPr/>
         </p:nvSpPr>
         <p:spPr>
           <a:xfrm>
-            <a:off x="457200" y="164592"/>
-            <a:ext cx="11277295" cy="502920"/>
+            <a:off x="457200" y="4754880"/>
+            <a:ext cx="11277295" cy="640080"/>
           </a:xfrm>
           <a:prstGeom prst="rect">
             <a:avLst/>
@@ -17649,2856 +18072,15 @@
           </a:bodyPr>
           <a:lstStyle/>
           <a:p>
-            <a:r>
-              <a:rPr sz="2600" b="1" i="0">
-                <a:solidFill>
-                  <a:srgbClr val="FFFFFF"/>
-                </a:solidFill>
-                <a:latin typeface="Calibri"/>
-              </a:rPr>
-              <a:t>Taller PI VetCare — contexto / por que importa</a:t>
-            </a:r>
-          </a:p>
-        </p:txBody>
-      </p:sp>
-      <p:sp>
-        <p:nvSpPr>
-          <p:cNvPr id="5" name="TextBox 4"/>
-          <p:cNvSpPr txBox="1"/>
-          <p:nvPr/>
-        </p:nvSpPr>
-        <p:spPr>
-          <a:xfrm>
-            <a:off x="457200" y="1170432"/>
-            <a:ext cx="11277295" cy="5230368"/>
-          </a:xfrm>
-          <a:prstGeom prst="rect">
-            <a:avLst/>
-          </a:prstGeom>
-          <a:noFill/>
-        </p:spPr>
-        <p:txBody>
-          <a:bodyPr wrap="square">
-            <a:spAutoFit/>
-          </a:bodyPr>
-          <a:lstStyle/>
-          <a:p>
-            <a:pPr>
-              <a:spcAft>
-                <a:spcPts val="800"/>
-              </a:spcAft>
-            </a:pPr>
-            <a:r>
-              <a:rPr sz="2000" b="0" i="0">
-                <a:solidFill>
-                  <a:srgbClr val="333333"/>
-                </a:solidFill>
-                <a:latin typeface="Calibri"/>
-              </a:rPr>
-              <a:t>–   </a:t>
-            </a:r>
+            <a:pPr algn="ctr"/>
             <a:r>
               <a:rPr sz="2000" b="1" i="0">
                 <a:solidFill>
-                  <a:srgbClr val="333333"/>
-                </a:solidFill>
-                <a:latin typeface="Calibri"/>
-              </a:rPr>
-              <a:t>Por qué importa al PI:</a:t>
-            </a:r>
-            <a:r>
-              <a:rPr sz="2000" b="0" i="0">
-                <a:solidFill>
-                  <a:srgbClr val="333333"/>
-                </a:solidFill>
-                <a:latin typeface="Calibri"/>
-              </a:rPr>
-              <a:t> la seguridad de VetCare DB es un criterio de la rúbrica, y la evidencia son los roles y su matriz — no una promesa.</a:t>
-            </a:r>
-          </a:p>
-          <a:p>
-            <a:pPr>
-              <a:spcAft>
-                <a:spcPts val="800"/>
-              </a:spcAft>
-            </a:pPr>
-            <a:r>
-              <a:rPr sz="2000" b="0" i="0">
-                <a:solidFill>
-                  <a:srgbClr val="333333"/>
-                </a:solidFill>
-                <a:latin typeface="Calibri"/>
-              </a:rPr>
-              <a:t>–   Mínimo privilegio evita que Recepción borre historia clínica: cancelar una cita es un </a:t>
-            </a:r>
-            <a:r>
-              <a:rPr sz="2000" b="1" i="0">
-                <a:solidFill>
-                  <a:srgbClr val="333333"/>
-                </a:solidFill>
-                <a:latin typeface="Calibri"/>
-              </a:rPr>
-              <a:t>UPDATE de estado</a:t>
-            </a:r>
-            <a:r>
-              <a:rPr sz="2000" b="0" i="0">
-                <a:solidFill>
-                  <a:srgbClr val="333333"/>
-                </a:solidFill>
-                <a:latin typeface="Calibri"/>
-              </a:rPr>
-              <a:t>, nunca un DELETE.</a:t>
-            </a:r>
-          </a:p>
-          <a:p>
-            <a:pPr>
-              <a:spcAft>
-                <a:spcPts val="800"/>
-              </a:spcAft>
-            </a:pPr>
-            <a:r>
-              <a:rPr sz="2000" b="0" i="0">
-                <a:solidFill>
-                  <a:srgbClr val="333333"/>
-                </a:solidFill>
-                <a:latin typeface="Calibri"/>
-              </a:rPr>
-              <a:t>–   Los «GRANT» de hoy corren de verdad y se auditan con «information_schema»: la matriz que entregas tiene que decir lo mismo que ejecutó el motor.</a:t>
-            </a:r>
-          </a:p>
-        </p:txBody>
-      </p:sp>
-      <p:sp>
-        <p:nvSpPr>
-          <p:cNvPr id="6" name="TextBox 5"/>
-          <p:cNvSpPr txBox="1"/>
-          <p:nvPr/>
-        </p:nvSpPr>
-        <p:spPr>
-          <a:xfrm>
-            <a:off x="11185855" y="6473952"/>
-            <a:ext cx="640080" cy="274320"/>
-          </a:xfrm>
-          <a:prstGeom prst="rect">
-            <a:avLst/>
-          </a:prstGeom>
-          <a:noFill/>
-        </p:spPr>
-        <p:txBody>
-          <a:bodyPr wrap="square">
-            <a:spAutoFit/>
-          </a:bodyPr>
-          <a:lstStyle/>
-          <a:p>
-            <a:pPr algn="r"/>
-            <a:r>
-              <a:rPr sz="1100" b="0" i="0">
-                <a:solidFill>
-                  <a:srgbClr val="666666"/>
-                </a:solidFill>
-                <a:latin typeface="Calibri"/>
-              </a:rPr>
-              <a:t>45</a:t>
-            </a:r>
-          </a:p>
-        </p:txBody>
-      </p:sp>
-    </p:spTree>
-  </p:cSld>
-  <p:clrMapOvr>
-    <a:masterClrMapping/>
-  </p:clrMapOvr>
-</p:sld>
-</file>
-
-<file path=ppt/slides/slide46.xml><?xml version="1.0" encoding="utf-8"?>
-<p:sld xmlns:a="http://schemas.openxmlformats.org/drawingml/2006/main" xmlns:p="http://schemas.openxmlformats.org/presentationml/2006/main" xmlns:r="http://schemas.openxmlformats.org/officeDocument/2006/relationships">
-  <p:cSld>
-    <p:bg>
-      <p:bgPr>
-        <a:solidFill>
-          <a:srgbClr val="FFFFFF"/>
-        </a:solidFill>
-        <a:effectLst/>
-      </p:bgPr>
-    </p:bg>
-    <p:spTree>
-      <p:nvGrpSpPr>
-        <p:cNvPr id="1" name=""/>
-        <p:cNvGrpSpPr/>
-        <p:nvPr/>
-      </p:nvGrpSpPr>
-      <p:grpSpPr/>
-      <p:sp>
-        <p:nvSpPr>
-          <p:cNvPr id="2" name="Rectangle 1"/>
-          <p:cNvSpPr/>
-          <p:nvPr/>
-        </p:nvSpPr>
-        <p:spPr>
-          <a:xfrm>
-            <a:off x="0" y="0"/>
-            <a:ext cx="12191695" cy="960120"/>
-          </a:xfrm>
-          <a:prstGeom prst="rect">
-            <a:avLst/>
-          </a:prstGeom>
-          <a:solidFill>
-            <a:srgbClr val="095292"/>
-          </a:solidFill>
-          <a:ln>
-            <a:noFill/>
-          </a:ln>
-        </p:spPr>
-        <p:style>
-          <a:lnRef idx="1">
-            <a:schemeClr val="accent1"/>
-          </a:lnRef>
-          <a:fillRef idx="3">
-            <a:schemeClr val="accent1"/>
-          </a:fillRef>
-          <a:effectRef idx="2">
-            <a:schemeClr val="accent1"/>
-          </a:effectRef>
-          <a:fontRef idx="minor">
-            <a:schemeClr val="lt1"/>
-          </a:fontRef>
-        </p:style>
-        <p:txBody>
-          <a:bodyPr rtlCol="0" anchor="ctr"/>
-          <a:lstStyle/>
-          <a:p>
-            <a:pPr algn="ctr"/>
-          </a:p>
-        </p:txBody>
-      </p:sp>
-      <p:sp>
-        <p:nvSpPr>
-          <p:cNvPr id="3" name="Rectangle 2"/>
-          <p:cNvSpPr/>
-          <p:nvPr/>
-        </p:nvSpPr>
-        <p:spPr>
-          <a:xfrm>
-            <a:off x="0" y="960120"/>
-            <a:ext cx="12191695" cy="41148"/>
-          </a:xfrm>
-          <a:prstGeom prst="rect">
-            <a:avLst/>
-          </a:prstGeom>
-          <a:solidFill>
-            <a:srgbClr val="FFD000"/>
-          </a:solidFill>
-          <a:ln>
-            <a:noFill/>
-          </a:ln>
-        </p:spPr>
-        <p:style>
-          <a:lnRef idx="1">
-            <a:schemeClr val="accent1"/>
-          </a:lnRef>
-          <a:fillRef idx="3">
-            <a:schemeClr val="accent1"/>
-          </a:fillRef>
-          <a:effectRef idx="2">
-            <a:schemeClr val="accent1"/>
-          </a:effectRef>
-          <a:fontRef idx="minor">
-            <a:schemeClr val="lt1"/>
-          </a:fontRef>
-        </p:style>
-        <p:txBody>
-          <a:bodyPr rtlCol="0" anchor="ctr"/>
-          <a:lstStyle/>
-          <a:p>
-            <a:pPr algn="ctr"/>
-          </a:p>
-        </p:txBody>
-      </p:sp>
-      <p:sp>
-        <p:nvSpPr>
-          <p:cNvPr id="4" name="TextBox 3"/>
-          <p:cNvSpPr txBox="1"/>
-          <p:nvPr/>
-        </p:nvSpPr>
-        <p:spPr>
-          <a:xfrm>
-            <a:off x="457200" y="164592"/>
-            <a:ext cx="11277295" cy="502920"/>
-          </a:xfrm>
-          <a:prstGeom prst="rect">
-            <a:avLst/>
-          </a:prstGeom>
-          <a:noFill/>
-        </p:spPr>
-        <p:txBody>
-          <a:bodyPr wrap="square">
-            <a:spAutoFit/>
-          </a:bodyPr>
-          <a:lstStyle/>
-          <a:p>
-            <a:r>
-              <a:rPr sz="2600" b="1" i="0">
-                <a:solidFill>
-                  <a:srgbClr val="FFFFFF"/>
-                </a:solidFill>
-                <a:latin typeface="Calibri"/>
-              </a:rPr>
-              <a:t>Taller PI VetCare — objetivo y criterios</a:t>
-            </a:r>
-          </a:p>
-        </p:txBody>
-      </p:sp>
-      <p:sp>
-        <p:nvSpPr>
-          <p:cNvPr id="5" name="TextBox 4"/>
-          <p:cNvSpPr txBox="1"/>
-          <p:nvPr/>
-        </p:nvSpPr>
-        <p:spPr>
-          <a:xfrm>
-            <a:off x="457200" y="1170432"/>
-            <a:ext cx="11277295" cy="5230368"/>
-          </a:xfrm>
-          <a:prstGeom prst="rect">
-            <a:avLst/>
-          </a:prstGeom>
-          <a:noFill/>
-        </p:spPr>
-        <p:txBody>
-          <a:bodyPr wrap="square">
-            <a:spAutoFit/>
-          </a:bodyPr>
-          <a:lstStyle/>
-          <a:p>
-            <a:pPr>
-              <a:spcAft>
-                <a:spcPts val="800"/>
-              </a:spcAft>
-            </a:pPr>
-            <a:r>
-              <a:rPr sz="2000" b="0" i="0">
-                <a:solidFill>
-                  <a:srgbClr val="333333"/>
-                </a:solidFill>
-                <a:latin typeface="Calibri"/>
-              </a:rPr>
-              <a:t>–   </a:t>
-            </a:r>
-            <a:r>
-              <a:rPr sz="2000" b="1" i="0">
-                <a:solidFill>
-                  <a:srgbClr val="333333"/>
-                </a:solidFill>
-                <a:latin typeface="Calibri"/>
-              </a:rPr>
-              <a:t>Objetivo:</a:t>
-            </a:r>
-            <a:r>
-              <a:rPr sz="2000" b="0" i="0">
-                <a:solidFill>
-                  <a:srgbClr val="333333"/>
-                </a:solidFill>
-                <a:latin typeface="Calibri"/>
-              </a:rPr>
-              <a:t> Los 4 roles de VetCare creados y verificados, más la matriz rol x objeto y la política de altas y bajas.</a:t>
-            </a:r>
-          </a:p>
-          <a:p>
-            <a:pPr>
-              <a:spcAft>
-                <a:spcPts val="800"/>
-              </a:spcAft>
-            </a:pPr>
-            <a:r>
-              <a:rPr sz="2000" b="0" i="0">
-                <a:solidFill>
-                  <a:srgbClr val="333333"/>
-                </a:solidFill>
-                <a:latin typeface="Calibri"/>
-              </a:rPr>
-              <a:t>–   </a:t>
-            </a:r>
-            <a:r>
-              <a:rPr sz="2000" b="1" i="0">
-                <a:solidFill>
-                  <a:srgbClr val="333333"/>
-                </a:solidFill>
-                <a:latin typeface="Calibri"/>
-              </a:rPr>
-              <a:t>Exito:</a:t>
-            </a:r>
-            <a:r>
-              <a:rPr sz="2000" b="0" i="0">
-                <a:solidFill>
-                  <a:srgbClr val="333333"/>
-                </a:solidFill>
-                <a:latin typeface="Calibri"/>
-              </a:rPr>
-              <a:t> Los 4 roles creados, con sus GRANT y el REVOKE explícito de DELETE.</a:t>
-            </a:r>
-          </a:p>
-          <a:p>
-            <a:pPr>
-              <a:spcAft>
-                <a:spcPts val="800"/>
-              </a:spcAft>
-            </a:pPr>
-            <a:r>
-              <a:rPr sz="2000" b="0" i="0">
-                <a:solidFill>
-                  <a:srgbClr val="333333"/>
-                </a:solidFill>
-                <a:latin typeface="Calibri"/>
-              </a:rPr>
-              <a:t>–   </a:t>
-            </a:r>
-            <a:r>
-              <a:rPr sz="2000" b="1" i="0">
-                <a:solidFill>
-                  <a:srgbClr val="333333"/>
-                </a:solidFill>
-                <a:latin typeface="Calibri"/>
-              </a:rPr>
-              <a:t>Exito:</a:t>
-            </a:r>
-            <a:r>
-              <a:rPr sz="2000" b="0" i="0">
-                <a:solidFill>
-                  <a:srgbClr val="333333"/>
-                </a:solidFill>
-                <a:latin typeface="Calibri"/>
-              </a:rPr>
-              <a:t> La matriz real consultada con «information_schema.role_table_grants».</a:t>
-            </a:r>
-          </a:p>
-          <a:p>
-            <a:pPr>
-              <a:spcAft>
-                <a:spcPts val="800"/>
-              </a:spcAft>
-            </a:pPr>
-            <a:r>
-              <a:rPr sz="2000" b="0" i="0">
-                <a:solidFill>
-                  <a:srgbClr val="333333"/>
-                </a:solidFill>
-                <a:latin typeface="Calibri"/>
-              </a:rPr>
-              <a:t>–   </a:t>
-            </a:r>
-            <a:r>
-              <a:rPr sz="2000" b="1" i="0">
-                <a:solidFill>
-                  <a:srgbClr val="333333"/>
-                </a:solidFill>
-                <a:latin typeface="Calibri"/>
-              </a:rPr>
-              <a:t>Exito:</a:t>
-            </a:r>
-            <a:r>
-              <a:rPr sz="2000" b="0" i="0">
-                <a:solidFill>
-                  <a:srgbClr val="333333"/>
-                </a:solidFill>
-                <a:latin typeface="Calibri"/>
-              </a:rPr>
-              <a:t> Vista «v_agenda_recepcion» sin el email + «GRANT SELECT (id_dueno, nombre)».</a:t>
-            </a:r>
-          </a:p>
-          <a:p>
-            <a:pPr>
-              <a:spcAft>
-                <a:spcPts val="800"/>
-              </a:spcAft>
-            </a:pPr>
-            <a:r>
-              <a:rPr sz="2000" b="0" i="0">
-                <a:solidFill>
-                  <a:srgbClr val="333333"/>
-                </a:solidFill>
-                <a:latin typeface="Calibri"/>
-              </a:rPr>
-              <a:t>–   </a:t>
-            </a:r>
-            <a:r>
-              <a:rPr sz="2000" b="1" i="0">
-                <a:solidFill>
-                  <a:srgbClr val="333333"/>
-                </a:solidFill>
-                <a:latin typeface="Calibri"/>
-              </a:rPr>
-              <a:t>Exito:</a:t>
-            </a:r>
-            <a:r>
-              <a:rPr sz="2000" b="0" i="0">
-                <a:solidFill>
-                  <a:srgbClr val="333333"/>
-                </a:solidFill>
-                <a:latin typeface="Calibri"/>
-              </a:rPr>
-              <a:t> Matriz de 10 objetos x 4 roles, sin celdas vacías y consistente con los GRANT.</a:t>
-            </a:r>
-          </a:p>
-          <a:p>
-            <a:pPr>
-              <a:spcAft>
-                <a:spcPts val="800"/>
-              </a:spcAft>
-            </a:pPr>
-            <a:r>
-              <a:rPr sz="2000" b="0" i="0">
-                <a:solidFill>
-                  <a:srgbClr val="333333"/>
-                </a:solidFill>
-                <a:latin typeface="Calibri"/>
-              </a:rPr>
-              <a:t>–   </a:t>
-            </a:r>
-            <a:r>
-              <a:rPr sz="2000" b="1" i="0">
-                <a:solidFill>
-                  <a:srgbClr val="333333"/>
-                </a:solidFill>
-                <a:latin typeface="Calibri"/>
-              </a:rPr>
-              <a:t>Exito:</a:t>
-            </a:r>
-            <a:r>
-              <a:rPr sz="2000" b="0" i="0">
-                <a:solidFill>
-                  <a:srgbClr val="333333"/>
-                </a:solidFill>
-                <a:latin typeface="Calibri"/>
-              </a:rPr>
-              <a:t> Política de 1 página con las 5 secciones, cada una con responsable y plazo.</a:t>
-            </a:r>
-          </a:p>
-          <a:p>
-            <a:pPr>
-              <a:spcAft>
-                <a:spcPts val="800"/>
-              </a:spcAft>
-            </a:pPr>
-            <a:r>
-              <a:rPr sz="2000" b="0" i="0">
-                <a:solidFill>
-                  <a:srgbClr val="333333"/>
-                </a:solidFill>
-                <a:latin typeface="Calibri"/>
-              </a:rPr>
-              <a:t>–   </a:t>
-            </a:r>
-            <a:r>
-              <a:rPr sz="2000" b="1" i="0">
-                <a:solidFill>
-                  <a:srgbClr val="333333"/>
-                </a:solidFill>
-                <a:latin typeface="Calibri"/>
-              </a:rPr>
-              <a:t>Exito:</a:t>
-            </a:r>
-            <a:r>
-              <a:rPr sz="2000" b="0" i="0">
-                <a:solidFill>
-                  <a:srgbClr val="333333"/>
-                </a:solidFill>
-                <a:latin typeface="Calibri"/>
-              </a:rPr>
-              <a:t> Entrega en la fecha que indique el docente.</a:t>
-            </a:r>
-          </a:p>
-        </p:txBody>
-      </p:sp>
-      <p:sp>
-        <p:nvSpPr>
-          <p:cNvPr id="6" name="TextBox 5"/>
-          <p:cNvSpPr txBox="1"/>
-          <p:nvPr/>
-        </p:nvSpPr>
-        <p:spPr>
-          <a:xfrm>
-            <a:off x="11185855" y="6473952"/>
-            <a:ext cx="640080" cy="274320"/>
-          </a:xfrm>
-          <a:prstGeom prst="rect">
-            <a:avLst/>
-          </a:prstGeom>
-          <a:noFill/>
-        </p:spPr>
-        <p:txBody>
-          <a:bodyPr wrap="square">
-            <a:spAutoFit/>
-          </a:bodyPr>
-          <a:lstStyle/>
-          <a:p>
-            <a:pPr algn="r"/>
-            <a:r>
-              <a:rPr sz="1100" b="0" i="0">
-                <a:solidFill>
-                  <a:srgbClr val="666666"/>
-                </a:solidFill>
-                <a:latin typeface="Calibri"/>
-              </a:rPr>
-              <a:t>46</a:t>
-            </a:r>
-          </a:p>
-        </p:txBody>
-      </p:sp>
-    </p:spTree>
-  </p:cSld>
-  <p:clrMapOvr>
-    <a:masterClrMapping/>
-  </p:clrMapOvr>
-</p:sld>
-</file>
-
-<file path=ppt/slides/slide47.xml><?xml version="1.0" encoding="utf-8"?>
-<p:sld xmlns:a="http://schemas.openxmlformats.org/drawingml/2006/main" xmlns:p="http://schemas.openxmlformats.org/presentationml/2006/main" xmlns:r="http://schemas.openxmlformats.org/officeDocument/2006/relationships">
-  <p:cSld>
-    <p:bg>
-      <p:bgPr>
-        <a:solidFill>
-          <a:srgbClr val="FFFFFF"/>
-        </a:solidFill>
-        <a:effectLst/>
-      </p:bgPr>
-    </p:bg>
-    <p:spTree>
-      <p:nvGrpSpPr>
-        <p:cNvPr id="1" name=""/>
-        <p:cNvGrpSpPr/>
-        <p:nvPr/>
-      </p:nvGrpSpPr>
-      <p:grpSpPr/>
-      <p:sp>
-        <p:nvSpPr>
-          <p:cNvPr id="2" name="Rectangle 1"/>
-          <p:cNvSpPr/>
-          <p:nvPr/>
-        </p:nvSpPr>
-        <p:spPr>
-          <a:xfrm>
-            <a:off x="0" y="0"/>
-            <a:ext cx="12191695" cy="960120"/>
-          </a:xfrm>
-          <a:prstGeom prst="rect">
-            <a:avLst/>
-          </a:prstGeom>
-          <a:solidFill>
-            <a:srgbClr val="095292"/>
-          </a:solidFill>
-          <a:ln>
-            <a:noFill/>
-          </a:ln>
-        </p:spPr>
-        <p:style>
-          <a:lnRef idx="1">
-            <a:schemeClr val="accent1"/>
-          </a:lnRef>
-          <a:fillRef idx="3">
-            <a:schemeClr val="accent1"/>
-          </a:fillRef>
-          <a:effectRef idx="2">
-            <a:schemeClr val="accent1"/>
-          </a:effectRef>
-          <a:fontRef idx="minor">
-            <a:schemeClr val="lt1"/>
-          </a:fontRef>
-        </p:style>
-        <p:txBody>
-          <a:bodyPr rtlCol="0" anchor="ctr"/>
-          <a:lstStyle/>
-          <a:p>
-            <a:pPr algn="ctr"/>
-          </a:p>
-        </p:txBody>
-      </p:sp>
-      <p:sp>
-        <p:nvSpPr>
-          <p:cNvPr id="3" name="Rectangle 2"/>
-          <p:cNvSpPr/>
-          <p:nvPr/>
-        </p:nvSpPr>
-        <p:spPr>
-          <a:xfrm>
-            <a:off x="0" y="960120"/>
-            <a:ext cx="12191695" cy="41148"/>
-          </a:xfrm>
-          <a:prstGeom prst="rect">
-            <a:avLst/>
-          </a:prstGeom>
-          <a:solidFill>
-            <a:srgbClr val="FFD000"/>
-          </a:solidFill>
-          <a:ln>
-            <a:noFill/>
-          </a:ln>
-        </p:spPr>
-        <p:style>
-          <a:lnRef idx="1">
-            <a:schemeClr val="accent1"/>
-          </a:lnRef>
-          <a:fillRef idx="3">
-            <a:schemeClr val="accent1"/>
-          </a:fillRef>
-          <a:effectRef idx="2">
-            <a:schemeClr val="accent1"/>
-          </a:effectRef>
-          <a:fontRef idx="minor">
-            <a:schemeClr val="lt1"/>
-          </a:fontRef>
-        </p:style>
-        <p:txBody>
-          <a:bodyPr rtlCol="0" anchor="ctr"/>
-          <a:lstStyle/>
-          <a:p>
-            <a:pPr algn="ctr"/>
-          </a:p>
-        </p:txBody>
-      </p:sp>
-      <p:sp>
-        <p:nvSpPr>
-          <p:cNvPr id="4" name="TextBox 3"/>
-          <p:cNvSpPr txBox="1"/>
-          <p:nvPr/>
-        </p:nvSpPr>
-        <p:spPr>
-          <a:xfrm>
-            <a:off x="457200" y="164592"/>
-            <a:ext cx="11277295" cy="502920"/>
-          </a:xfrm>
-          <a:prstGeom prst="rect">
-            <a:avLst/>
-          </a:prstGeom>
-          <a:noFill/>
-        </p:spPr>
-        <p:txBody>
-          <a:bodyPr wrap="square">
-            <a:spAutoFit/>
-          </a:bodyPr>
-          <a:lstStyle/>
-          <a:p>
-            <a:r>
-              <a:rPr sz="2600" b="1" i="0">
-                <a:solidFill>
-                  <a:srgbClr val="FFFFFF"/>
-                </a:solidFill>
-                <a:latin typeface="Calibri"/>
-              </a:rPr>
-              <a:t>Taller PI VetCare — escenario / datos de partida</a:t>
-            </a:r>
-          </a:p>
-        </p:txBody>
-      </p:sp>
-      <p:sp>
-        <p:nvSpPr>
-          <p:cNvPr id="5" name="TextBox 4"/>
-          <p:cNvSpPr txBox="1"/>
-          <p:nvPr/>
-        </p:nvSpPr>
-        <p:spPr>
-          <a:xfrm>
-            <a:off x="457200" y="1170432"/>
-            <a:ext cx="11277295" cy="5230368"/>
-          </a:xfrm>
-          <a:prstGeom prst="rect">
-            <a:avLst/>
-          </a:prstGeom>
-          <a:noFill/>
-        </p:spPr>
-        <p:txBody>
-          <a:bodyPr wrap="square">
-            <a:spAutoFit/>
-          </a:bodyPr>
-          <a:lstStyle/>
-          <a:p>
-            <a:pPr>
-              <a:spcAft>
-                <a:spcPts val="800"/>
-              </a:spcAft>
-            </a:pPr>
-            <a:r>
-              <a:rPr sz="2000" b="0" i="0">
-                <a:solidFill>
-                  <a:srgbClr val="333333"/>
-                </a:solidFill>
-                <a:latin typeface="Calibri"/>
-              </a:rPr>
-              <a:t>–   Esquema de VetCare ya creado y poblado: 8 tablas, y los dos procedimientos («sp_agendar_cita», «sp_facturar») como objetos de la matriz.</a:t>
-            </a:r>
-          </a:p>
-          <a:p>
-            <a:pPr>
-              <a:spcAft>
-                <a:spcPts val="800"/>
-              </a:spcAft>
-            </a:pPr>
-            <a:r>
-              <a:rPr sz="2000" b="0" i="0">
-                <a:solidFill>
-                  <a:srgbClr val="333333"/>
-                </a:solidFill>
-                <a:latin typeface="Calibri"/>
-              </a:rPr>
-              <a:t>–   Roles a crear: «admin_bd» · «recepcion» · «veterinario_rol» · «auditor» (minúsculas; el del veterinario lleva «_rol» porque «veterinario» ya es una tabla).</a:t>
-            </a:r>
-          </a:p>
-          <a:p>
-            <a:pPr>
-              <a:spcAft>
-                <a:spcPts val="800"/>
-              </a:spcAft>
-            </a:pPr>
-            <a:r>
-              <a:rPr sz="2000" b="0" i="0">
-                <a:solidFill>
-                  <a:srgbClr val="333333"/>
-                </a:solidFill>
-                <a:latin typeface="Calibri"/>
-              </a:rPr>
-              <a:t>–   </a:t>
-            </a:r>
-            <a:r>
-              <a:rPr sz="2000" b="1" i="0">
-                <a:solidFill>
-                  <a:srgbClr val="333333"/>
-                </a:solidFill>
-                <a:latin typeface="Calibri"/>
-              </a:rPr>
-              <a:t>Motor:</a:t>
-            </a:r>
-            <a:r>
-              <a:rPr sz="2000" b="0" i="0">
-                <a:solidFill>
-                  <a:srgbClr val="333333"/>
-                </a:solidFill>
-                <a:latin typeface="Calibri"/>
-              </a:rPr>
-              <a:t> PostgreSQL dentro de la plataforma del curso. Los GRANT son reales, y el permiso negado se comprueba con «SET ROLE» en la misma sesión: no hay una segunda conexión.</a:t>
-            </a:r>
-          </a:p>
-          <a:p>
-            <a:pPr>
-              <a:spcAft>
-                <a:spcPts val="800"/>
-              </a:spcAft>
-            </a:pPr>
-            <a:r>
-              <a:rPr sz="2000" b="0" i="0">
-                <a:solidFill>
-                  <a:srgbClr val="333333"/>
-                </a:solidFill>
-                <a:latin typeface="Calibri"/>
-              </a:rPr>
-              <a:t>–   La matriz y la política se escriben en Google Docs y se pegan en la plataforma del curso; la plantilla en blanco de las dos está en este documento.</a:t>
-            </a:r>
-          </a:p>
-        </p:txBody>
-      </p:sp>
-      <p:sp>
-        <p:nvSpPr>
-          <p:cNvPr id="6" name="TextBox 5"/>
-          <p:cNvSpPr txBox="1"/>
-          <p:nvPr/>
-        </p:nvSpPr>
-        <p:spPr>
-          <a:xfrm>
-            <a:off x="11185855" y="6473952"/>
-            <a:ext cx="640080" cy="274320"/>
-          </a:xfrm>
-          <a:prstGeom prst="rect">
-            <a:avLst/>
-          </a:prstGeom>
-          <a:noFill/>
-        </p:spPr>
-        <p:txBody>
-          <a:bodyPr wrap="square">
-            <a:spAutoFit/>
-          </a:bodyPr>
-          <a:lstStyle/>
-          <a:p>
-            <a:pPr algn="r"/>
-            <a:r>
-              <a:rPr sz="1100" b="0" i="0">
-                <a:solidFill>
-                  <a:srgbClr val="666666"/>
-                </a:solidFill>
-                <a:latin typeface="Calibri"/>
-              </a:rPr>
-              <a:t>47</a:t>
-            </a:r>
-          </a:p>
-        </p:txBody>
-      </p:sp>
-    </p:spTree>
-  </p:cSld>
-  <p:clrMapOvr>
-    <a:masterClrMapping/>
-  </p:clrMapOvr>
-</p:sld>
-</file>
-
-<file path=ppt/slides/slide48.xml><?xml version="1.0" encoding="utf-8"?>
-<p:sld xmlns:a="http://schemas.openxmlformats.org/drawingml/2006/main" xmlns:p="http://schemas.openxmlformats.org/presentationml/2006/main" xmlns:r="http://schemas.openxmlformats.org/officeDocument/2006/relationships">
-  <p:cSld>
-    <p:bg>
-      <p:bgPr>
-        <a:solidFill>
-          <a:srgbClr val="FFFFFF"/>
-        </a:solidFill>
-        <a:effectLst/>
-      </p:bgPr>
-    </p:bg>
-    <p:spTree>
-      <p:nvGrpSpPr>
-        <p:cNvPr id="1" name=""/>
-        <p:cNvGrpSpPr/>
-        <p:nvPr/>
-      </p:nvGrpSpPr>
-      <p:grpSpPr/>
-      <p:sp>
-        <p:nvSpPr>
-          <p:cNvPr id="2" name="Rectangle 1"/>
-          <p:cNvSpPr/>
-          <p:nvPr/>
-        </p:nvSpPr>
-        <p:spPr>
-          <a:xfrm>
-            <a:off x="0" y="0"/>
-            <a:ext cx="12191695" cy="960120"/>
-          </a:xfrm>
-          <a:prstGeom prst="rect">
-            <a:avLst/>
-          </a:prstGeom>
-          <a:solidFill>
-            <a:srgbClr val="095292"/>
-          </a:solidFill>
-          <a:ln>
-            <a:noFill/>
-          </a:ln>
-        </p:spPr>
-        <p:style>
-          <a:lnRef idx="1">
-            <a:schemeClr val="accent1"/>
-          </a:lnRef>
-          <a:fillRef idx="3">
-            <a:schemeClr val="accent1"/>
-          </a:fillRef>
-          <a:effectRef idx="2">
-            <a:schemeClr val="accent1"/>
-          </a:effectRef>
-          <a:fontRef idx="minor">
-            <a:schemeClr val="lt1"/>
-          </a:fontRef>
-        </p:style>
-        <p:txBody>
-          <a:bodyPr rtlCol="0" anchor="ctr"/>
-          <a:lstStyle/>
-          <a:p>
-            <a:pPr algn="ctr"/>
-          </a:p>
-        </p:txBody>
-      </p:sp>
-      <p:sp>
-        <p:nvSpPr>
-          <p:cNvPr id="3" name="Rectangle 2"/>
-          <p:cNvSpPr/>
-          <p:nvPr/>
-        </p:nvSpPr>
-        <p:spPr>
-          <a:xfrm>
-            <a:off x="0" y="960120"/>
-            <a:ext cx="12191695" cy="41148"/>
-          </a:xfrm>
-          <a:prstGeom prst="rect">
-            <a:avLst/>
-          </a:prstGeom>
-          <a:solidFill>
-            <a:srgbClr val="FFD000"/>
-          </a:solidFill>
-          <a:ln>
-            <a:noFill/>
-          </a:ln>
-        </p:spPr>
-        <p:style>
-          <a:lnRef idx="1">
-            <a:schemeClr val="accent1"/>
-          </a:lnRef>
-          <a:fillRef idx="3">
-            <a:schemeClr val="accent1"/>
-          </a:fillRef>
-          <a:effectRef idx="2">
-            <a:schemeClr val="accent1"/>
-          </a:effectRef>
-          <a:fontRef idx="minor">
-            <a:schemeClr val="lt1"/>
-          </a:fontRef>
-        </p:style>
-        <p:txBody>
-          <a:bodyPr rtlCol="0" anchor="ctr"/>
-          <a:lstStyle/>
-          <a:p>
-            <a:pPr algn="ctr"/>
-          </a:p>
-        </p:txBody>
-      </p:sp>
-      <p:sp>
-        <p:nvSpPr>
-          <p:cNvPr id="4" name="TextBox 3"/>
-          <p:cNvSpPr txBox="1"/>
-          <p:nvPr/>
-        </p:nvSpPr>
-        <p:spPr>
-          <a:xfrm>
-            <a:off x="457200" y="164592"/>
-            <a:ext cx="11277295" cy="502920"/>
-          </a:xfrm>
-          <a:prstGeom prst="rect">
-            <a:avLst/>
-          </a:prstGeom>
-          <a:noFill/>
-        </p:spPr>
-        <p:txBody>
-          <a:bodyPr wrap="square">
-            <a:spAutoFit/>
-          </a:bodyPr>
-          <a:lstStyle/>
-          <a:p>
-            <a:r>
-              <a:rPr sz="2600" b="1" i="0">
-                <a:solidFill>
-                  <a:srgbClr val="FFFFFF"/>
-                </a:solidFill>
-                <a:latin typeface="Calibri"/>
-              </a:rPr>
-              <a:t>Taller PI VetCare — pasos guiados</a:t>
-            </a:r>
-          </a:p>
-        </p:txBody>
-      </p:sp>
-      <p:sp>
-        <p:nvSpPr>
-          <p:cNvPr id="5" name="Rounded Rectangle 4"/>
-          <p:cNvSpPr/>
-          <p:nvPr/>
-        </p:nvSpPr>
-        <p:spPr>
-          <a:xfrm>
-            <a:off x="457200" y="1554480"/>
-            <a:ext cx="11277295" cy="1051560"/>
-          </a:xfrm>
-          <a:prstGeom prst="roundRect">
-            <a:avLst>
-              <a:gd name="adj" fmla="val 12000"/>
-            </a:avLst>
-          </a:prstGeom>
-          <a:solidFill>
-            <a:srgbClr val="F2F2F2"/>
-          </a:solidFill>
-          <a:ln>
-            <a:noFill/>
-          </a:ln>
-        </p:spPr>
-        <p:style>
-          <a:lnRef idx="1">
-            <a:schemeClr val="accent1"/>
-          </a:lnRef>
-          <a:fillRef idx="3">
-            <a:schemeClr val="accent1"/>
-          </a:fillRef>
-          <a:effectRef idx="2">
-            <a:schemeClr val="accent1"/>
-          </a:effectRef>
-          <a:fontRef idx="minor">
-            <a:schemeClr val="lt1"/>
-          </a:fontRef>
-        </p:style>
-        <p:txBody>
-          <a:bodyPr rtlCol="0" anchor="ctr"/>
-          <a:lstStyle/>
-          <a:p>
-            <a:pPr algn="ctr"/>
-          </a:p>
-        </p:txBody>
-      </p:sp>
-      <p:sp>
-        <p:nvSpPr>
-          <p:cNvPr id="6" name="Rounded Rectangle 5"/>
-          <p:cNvSpPr/>
-          <p:nvPr/>
-        </p:nvSpPr>
-        <p:spPr>
-          <a:xfrm>
-            <a:off x="594360" y="1860804"/>
-            <a:ext cx="438912" cy="438912"/>
-          </a:xfrm>
-          <a:prstGeom prst="roundRect">
-            <a:avLst>
-              <a:gd name="adj" fmla="val 12000"/>
-            </a:avLst>
-          </a:prstGeom>
-          <a:solidFill>
-            <a:srgbClr val="095292"/>
-          </a:solidFill>
-          <a:ln>
-            <a:noFill/>
-          </a:ln>
-        </p:spPr>
-        <p:style>
-          <a:lnRef idx="1">
-            <a:schemeClr val="accent1"/>
-          </a:lnRef>
-          <a:fillRef idx="3">
-            <a:schemeClr val="accent1"/>
-          </a:fillRef>
-          <a:effectRef idx="2">
-            <a:schemeClr val="accent1"/>
-          </a:effectRef>
-          <a:fontRef idx="minor">
-            <a:schemeClr val="lt1"/>
-          </a:fontRef>
-        </p:style>
-        <p:txBody>
-          <a:bodyPr rtlCol="0" anchor="ctr"/>
-          <a:lstStyle/>
-          <a:p>
-            <a:pPr algn="ctr"/>
-          </a:p>
-        </p:txBody>
-      </p:sp>
-      <p:sp>
-        <p:nvSpPr>
-          <p:cNvPr id="7" name="TextBox 6"/>
-          <p:cNvSpPr txBox="1"/>
-          <p:nvPr/>
-        </p:nvSpPr>
-        <p:spPr>
-          <a:xfrm>
-            <a:off x="594360" y="1860804"/>
-            <a:ext cx="438912" cy="438912"/>
-          </a:xfrm>
-          <a:prstGeom prst="rect">
-            <a:avLst/>
-          </a:prstGeom>
-          <a:noFill/>
-        </p:spPr>
-        <p:txBody>
-          <a:bodyPr wrap="square" anchor="ctr"/>
-          <a:lstStyle/>
-          <a:p>
-            <a:pPr algn="ctr"/>
-            <a:r>
-              <a:rPr sz="1600" b="1" i="0">
-                <a:solidFill>
-                  <a:srgbClr val="FFFFFF"/>
-                </a:solidFill>
-                <a:latin typeface="Calibri"/>
-              </a:rPr>
-              <a:t>1</a:t>
-            </a:r>
-          </a:p>
-        </p:txBody>
-      </p:sp>
-      <p:sp>
-        <p:nvSpPr>
-          <p:cNvPr id="8" name="TextBox 7"/>
-          <p:cNvSpPr txBox="1"/>
-          <p:nvPr/>
-        </p:nvSpPr>
-        <p:spPr>
-          <a:xfrm>
-            <a:off x="1188720" y="1645920"/>
-            <a:ext cx="10271455" cy="886968"/>
-          </a:xfrm>
-          <a:prstGeom prst="rect">
-            <a:avLst/>
-          </a:prstGeom>
-          <a:noFill/>
-        </p:spPr>
-        <p:txBody>
-          <a:bodyPr wrap="square" anchor="ctr"/>
-          <a:lstStyle/>
-          <a:p>
-            <a:r>
-              <a:rPr sz="1500" b="1" i="0">
-                <a:solidFill>
-                  <a:srgbClr val="095292"/>
-                </a:solidFill>
-                <a:latin typeface="Calibri"/>
-              </a:rPr>
-              <a:t>Crear los 4 roles (admin_bd, recepcion, veterinario_rol, auditor) con GRANT/REVOKE que corran.</a:t>
-            </a:r>
-          </a:p>
-        </p:txBody>
-      </p:sp>
-      <p:sp>
-        <p:nvSpPr>
-          <p:cNvPr id="9" name="Rounded Rectangle 8"/>
-          <p:cNvSpPr/>
-          <p:nvPr/>
-        </p:nvSpPr>
-        <p:spPr>
-          <a:xfrm>
-            <a:off x="457200" y="2697480"/>
-            <a:ext cx="11277295" cy="1051560"/>
-          </a:xfrm>
-          <a:prstGeom prst="roundRect">
-            <a:avLst>
-              <a:gd name="adj" fmla="val 12000"/>
-            </a:avLst>
-          </a:prstGeom>
-          <a:solidFill>
-            <a:srgbClr val="E8F4FA"/>
-          </a:solidFill>
-          <a:ln>
-            <a:noFill/>
-          </a:ln>
-        </p:spPr>
-        <p:style>
-          <a:lnRef idx="1">
-            <a:schemeClr val="accent1"/>
-          </a:lnRef>
-          <a:fillRef idx="3">
-            <a:schemeClr val="accent1"/>
-          </a:fillRef>
-          <a:effectRef idx="2">
-            <a:schemeClr val="accent1"/>
-          </a:effectRef>
-          <a:fontRef idx="minor">
-            <a:schemeClr val="lt1"/>
-          </a:fontRef>
-        </p:style>
-        <p:txBody>
-          <a:bodyPr rtlCol="0" anchor="ctr"/>
-          <a:lstStyle/>
-          <a:p>
-            <a:pPr algn="ctr"/>
-          </a:p>
-        </p:txBody>
-      </p:sp>
-      <p:sp>
-        <p:nvSpPr>
-          <p:cNvPr id="10" name="Rounded Rectangle 9"/>
-          <p:cNvSpPr/>
-          <p:nvPr/>
-        </p:nvSpPr>
-        <p:spPr>
-          <a:xfrm>
-            <a:off x="594360" y="3003804"/>
-            <a:ext cx="438912" cy="438912"/>
-          </a:xfrm>
-          <a:prstGeom prst="roundRect">
-            <a:avLst>
-              <a:gd name="adj" fmla="val 12000"/>
-            </a:avLst>
-          </a:prstGeom>
-          <a:solidFill>
-            <a:srgbClr val="095292"/>
-          </a:solidFill>
-          <a:ln>
-            <a:noFill/>
-          </a:ln>
-        </p:spPr>
-        <p:style>
-          <a:lnRef idx="1">
-            <a:schemeClr val="accent1"/>
-          </a:lnRef>
-          <a:fillRef idx="3">
-            <a:schemeClr val="accent1"/>
-          </a:fillRef>
-          <a:effectRef idx="2">
-            <a:schemeClr val="accent1"/>
-          </a:effectRef>
-          <a:fontRef idx="minor">
-            <a:schemeClr val="lt1"/>
-          </a:fontRef>
-        </p:style>
-        <p:txBody>
-          <a:bodyPr rtlCol="0" anchor="ctr"/>
-          <a:lstStyle/>
-          <a:p>
-            <a:pPr algn="ctr"/>
-          </a:p>
-        </p:txBody>
-      </p:sp>
-      <p:sp>
-        <p:nvSpPr>
-          <p:cNvPr id="11" name="TextBox 10"/>
-          <p:cNvSpPr txBox="1"/>
-          <p:nvPr/>
-        </p:nvSpPr>
-        <p:spPr>
-          <a:xfrm>
-            <a:off x="594360" y="3003804"/>
-            <a:ext cx="438912" cy="438912"/>
-          </a:xfrm>
-          <a:prstGeom prst="rect">
-            <a:avLst/>
-          </a:prstGeom>
-          <a:noFill/>
-        </p:spPr>
-        <p:txBody>
-          <a:bodyPr wrap="square" anchor="ctr"/>
-          <a:lstStyle/>
-          <a:p>
-            <a:pPr algn="ctr"/>
-            <a:r>
-              <a:rPr sz="1600" b="1" i="0">
-                <a:solidFill>
-                  <a:srgbClr val="FFFFFF"/>
-                </a:solidFill>
-                <a:latin typeface="Calibri"/>
-              </a:rPr>
-              <a:t>2</a:t>
-            </a:r>
-          </a:p>
-        </p:txBody>
-      </p:sp>
-      <p:sp>
-        <p:nvSpPr>
-          <p:cNvPr id="12" name="TextBox 11"/>
-          <p:cNvSpPr txBox="1"/>
-          <p:nvPr/>
-        </p:nvSpPr>
-        <p:spPr>
-          <a:xfrm>
-            <a:off x="1188720" y="2788920"/>
-            <a:ext cx="10271455" cy="886968"/>
-          </a:xfrm>
-          <a:prstGeom prst="rect">
-            <a:avLst/>
-          </a:prstGeom>
-          <a:noFill/>
-        </p:spPr>
-        <p:txBody>
-          <a:bodyPr wrap="square" anchor="ctr"/>
-          <a:lstStyle/>
-          <a:p>
-            <a:r>
-              <a:rPr sz="1500" b="1" i="0">
-                <a:solidFill>
-                  <a:srgbClr val="095292"/>
-                </a:solidFill>
-                <a:latin typeface="Calibri"/>
-              </a:rPr>
-              <a:t>Recortar la superficie: vista v_agenda_recepcion + privilegio por columna sobre dueno.</a:t>
-            </a:r>
-          </a:p>
-        </p:txBody>
-      </p:sp>
-      <p:sp>
-        <p:nvSpPr>
-          <p:cNvPr id="13" name="Rounded Rectangle 12"/>
-          <p:cNvSpPr/>
-          <p:nvPr/>
-        </p:nvSpPr>
-        <p:spPr>
-          <a:xfrm>
-            <a:off x="457200" y="3840480"/>
-            <a:ext cx="11277295" cy="1051560"/>
-          </a:xfrm>
-          <a:prstGeom prst="roundRect">
-            <a:avLst>
-              <a:gd name="adj" fmla="val 12000"/>
-            </a:avLst>
-          </a:prstGeom>
-          <a:solidFill>
-            <a:srgbClr val="F2F2F2"/>
-          </a:solidFill>
-          <a:ln>
-            <a:noFill/>
-          </a:ln>
-        </p:spPr>
-        <p:style>
-          <a:lnRef idx="1">
-            <a:schemeClr val="accent1"/>
-          </a:lnRef>
-          <a:fillRef idx="3">
-            <a:schemeClr val="accent1"/>
-          </a:fillRef>
-          <a:effectRef idx="2">
-            <a:schemeClr val="accent1"/>
-          </a:effectRef>
-          <a:fontRef idx="minor">
-            <a:schemeClr val="lt1"/>
-          </a:fontRef>
-        </p:style>
-        <p:txBody>
-          <a:bodyPr rtlCol="0" anchor="ctr"/>
-          <a:lstStyle/>
-          <a:p>
-            <a:pPr algn="ctr"/>
-          </a:p>
-        </p:txBody>
-      </p:sp>
-      <p:sp>
-        <p:nvSpPr>
-          <p:cNvPr id="14" name="Rounded Rectangle 13"/>
-          <p:cNvSpPr/>
-          <p:nvPr/>
-        </p:nvSpPr>
-        <p:spPr>
-          <a:xfrm>
-            <a:off x="594360" y="4146804"/>
-            <a:ext cx="438912" cy="438912"/>
-          </a:xfrm>
-          <a:prstGeom prst="roundRect">
-            <a:avLst>
-              <a:gd name="adj" fmla="val 12000"/>
-            </a:avLst>
-          </a:prstGeom>
-          <a:solidFill>
-            <a:srgbClr val="095292"/>
-          </a:solidFill>
-          <a:ln>
-            <a:noFill/>
-          </a:ln>
-        </p:spPr>
-        <p:style>
-          <a:lnRef idx="1">
-            <a:schemeClr val="accent1"/>
-          </a:lnRef>
-          <a:fillRef idx="3">
-            <a:schemeClr val="accent1"/>
-          </a:fillRef>
-          <a:effectRef idx="2">
-            <a:schemeClr val="accent1"/>
-          </a:effectRef>
-          <a:fontRef idx="minor">
-            <a:schemeClr val="lt1"/>
-          </a:fontRef>
-        </p:style>
-        <p:txBody>
-          <a:bodyPr rtlCol="0" anchor="ctr"/>
-          <a:lstStyle/>
-          <a:p>
-            <a:pPr algn="ctr"/>
-          </a:p>
-        </p:txBody>
-      </p:sp>
-      <p:sp>
-        <p:nvSpPr>
-          <p:cNvPr id="15" name="TextBox 14"/>
-          <p:cNvSpPr txBox="1"/>
-          <p:nvPr/>
-        </p:nvSpPr>
-        <p:spPr>
-          <a:xfrm>
-            <a:off x="594360" y="4146804"/>
-            <a:ext cx="438912" cy="438912"/>
-          </a:xfrm>
-          <a:prstGeom prst="rect">
-            <a:avLst/>
-          </a:prstGeom>
-          <a:noFill/>
-        </p:spPr>
-        <p:txBody>
-          <a:bodyPr wrap="square" anchor="ctr"/>
-          <a:lstStyle/>
-          <a:p>
-            <a:pPr algn="ctr"/>
-            <a:r>
-              <a:rPr sz="1600" b="1" i="0">
-                <a:solidFill>
-                  <a:srgbClr val="FFFFFF"/>
-                </a:solidFill>
-                <a:latin typeface="Calibri"/>
-              </a:rPr>
-              <a:t>3</a:t>
-            </a:r>
-          </a:p>
-        </p:txBody>
-      </p:sp>
-      <p:sp>
-        <p:nvSpPr>
-          <p:cNvPr id="16" name="TextBox 15"/>
-          <p:cNvSpPr txBox="1"/>
-          <p:nvPr/>
-        </p:nvSpPr>
-        <p:spPr>
-          <a:xfrm>
-            <a:off x="1188720" y="3931920"/>
-            <a:ext cx="10271455" cy="886968"/>
-          </a:xfrm>
-          <a:prstGeom prst="rect">
-            <a:avLst/>
-          </a:prstGeom>
-          <a:noFill/>
-        </p:spPr>
-        <p:txBody>
-          <a:bodyPr wrap="square" anchor="ctr"/>
-          <a:lstStyle/>
-          <a:p>
-            <a:r>
-              <a:rPr sz="1500" b="1" i="0">
-                <a:solidFill>
-                  <a:srgbClr val="095292"/>
-                </a:solidFill>
-                <a:latin typeface="Calibri"/>
-              </a:rPr>
-              <a:t>Matriz rol x objeto x privilegio de los 10 objetos, justificando privilegio minimo.</a:t>
-            </a:r>
-          </a:p>
-        </p:txBody>
-      </p:sp>
-      <p:sp>
-        <p:nvSpPr>
-          <p:cNvPr id="17" name="Rounded Rectangle 16"/>
-          <p:cNvSpPr/>
-          <p:nvPr/>
-        </p:nvSpPr>
-        <p:spPr>
-          <a:xfrm>
-            <a:off x="457200" y="4983480"/>
-            <a:ext cx="11277295" cy="1051560"/>
-          </a:xfrm>
-          <a:prstGeom prst="roundRect">
-            <a:avLst>
-              <a:gd name="adj" fmla="val 12000"/>
-            </a:avLst>
-          </a:prstGeom>
-          <a:solidFill>
-            <a:srgbClr val="E8F4FA"/>
-          </a:solidFill>
-          <a:ln>
-            <a:noFill/>
-          </a:ln>
-        </p:spPr>
-        <p:style>
-          <a:lnRef idx="1">
-            <a:schemeClr val="accent1"/>
-          </a:lnRef>
-          <a:fillRef idx="3">
-            <a:schemeClr val="accent1"/>
-          </a:fillRef>
-          <a:effectRef idx="2">
-            <a:schemeClr val="accent1"/>
-          </a:effectRef>
-          <a:fontRef idx="minor">
-            <a:schemeClr val="lt1"/>
-          </a:fontRef>
-        </p:style>
-        <p:txBody>
-          <a:bodyPr rtlCol="0" anchor="ctr"/>
-          <a:lstStyle/>
-          <a:p>
-            <a:pPr algn="ctr"/>
-          </a:p>
-        </p:txBody>
-      </p:sp>
-      <p:sp>
-        <p:nvSpPr>
-          <p:cNvPr id="18" name="Rounded Rectangle 17"/>
-          <p:cNvSpPr/>
-          <p:nvPr/>
-        </p:nvSpPr>
-        <p:spPr>
-          <a:xfrm>
-            <a:off x="594360" y="5289804"/>
-            <a:ext cx="438912" cy="438912"/>
-          </a:xfrm>
-          <a:prstGeom prst="roundRect">
-            <a:avLst>
-              <a:gd name="adj" fmla="val 12000"/>
-            </a:avLst>
-          </a:prstGeom>
-          <a:solidFill>
-            <a:srgbClr val="095292"/>
-          </a:solidFill>
-          <a:ln>
-            <a:noFill/>
-          </a:ln>
-        </p:spPr>
-        <p:style>
-          <a:lnRef idx="1">
-            <a:schemeClr val="accent1"/>
-          </a:lnRef>
-          <a:fillRef idx="3">
-            <a:schemeClr val="accent1"/>
-          </a:fillRef>
-          <a:effectRef idx="2">
-            <a:schemeClr val="accent1"/>
-          </a:effectRef>
-          <a:fontRef idx="minor">
-            <a:schemeClr val="lt1"/>
-          </a:fontRef>
-        </p:style>
-        <p:txBody>
-          <a:bodyPr rtlCol="0" anchor="ctr"/>
-          <a:lstStyle/>
-          <a:p>
-            <a:pPr algn="ctr"/>
-          </a:p>
-        </p:txBody>
-      </p:sp>
-      <p:sp>
-        <p:nvSpPr>
-          <p:cNvPr id="19" name="TextBox 18"/>
-          <p:cNvSpPr txBox="1"/>
-          <p:nvPr/>
-        </p:nvSpPr>
-        <p:spPr>
-          <a:xfrm>
-            <a:off x="594360" y="5289804"/>
-            <a:ext cx="438912" cy="438912"/>
-          </a:xfrm>
-          <a:prstGeom prst="rect">
-            <a:avLst/>
-          </a:prstGeom>
-          <a:noFill/>
-        </p:spPr>
-        <p:txBody>
-          <a:bodyPr wrap="square" anchor="ctr"/>
-          <a:lstStyle/>
-          <a:p>
-            <a:pPr algn="ctr"/>
-            <a:r>
-              <a:rPr sz="1600" b="1" i="0">
-                <a:solidFill>
-                  <a:srgbClr val="FFFFFF"/>
-                </a:solidFill>
-                <a:latin typeface="Calibri"/>
-              </a:rPr>
-              <a:t>4</a:t>
-            </a:r>
-          </a:p>
-        </p:txBody>
-      </p:sp>
-      <p:sp>
-        <p:nvSpPr>
-          <p:cNvPr id="20" name="TextBox 19"/>
-          <p:cNvSpPr txBox="1"/>
-          <p:nvPr/>
-        </p:nvSpPr>
-        <p:spPr>
-          <a:xfrm>
-            <a:off x="1188720" y="5074920"/>
-            <a:ext cx="10271455" cy="886968"/>
-          </a:xfrm>
-          <a:prstGeom prst="rect">
-            <a:avLst/>
-          </a:prstGeom>
-          <a:noFill/>
-        </p:spPr>
-        <p:txBody>
-          <a:bodyPr wrap="square" anchor="ctr"/>
-          <a:lstStyle/>
-          <a:p>
-            <a:r>
-              <a:rPr sz="1500" b="1" i="0">
-                <a:solidFill>
-                  <a:srgbClr val="095292"/>
-                </a:solidFill>
-                <a:latin typeface="Calibri"/>
-              </a:rPr>
-              <a:t>Redactar 1 pagina: politica de altas/bajas de usuarios, con la prueba negativa (SET ROLE) corrida y su mensaje de error.</a:t>
-            </a:r>
-          </a:p>
-        </p:txBody>
-      </p:sp>
-      <p:sp>
-        <p:nvSpPr>
-          <p:cNvPr id="21" name="TextBox 20"/>
-          <p:cNvSpPr txBox="1"/>
-          <p:nvPr/>
-        </p:nvSpPr>
-        <p:spPr>
-          <a:xfrm>
-            <a:off x="11185855" y="6473952"/>
-            <a:ext cx="640080" cy="274320"/>
-          </a:xfrm>
-          <a:prstGeom prst="rect">
-            <a:avLst/>
-          </a:prstGeom>
-          <a:noFill/>
-        </p:spPr>
-        <p:txBody>
-          <a:bodyPr wrap="square">
-            <a:spAutoFit/>
-          </a:bodyPr>
-          <a:lstStyle/>
-          <a:p>
-            <a:pPr algn="r"/>
-            <a:r>
-              <a:rPr sz="1100" b="0" i="0">
-                <a:solidFill>
-                  <a:srgbClr val="666666"/>
-                </a:solidFill>
-                <a:latin typeface="Calibri"/>
-              </a:rPr>
-              <a:t>48</a:t>
-            </a:r>
-          </a:p>
-        </p:txBody>
-      </p:sp>
-    </p:spTree>
-  </p:cSld>
-  <p:clrMapOvr>
-    <a:masterClrMapping/>
-  </p:clrMapOvr>
-</p:sld>
-</file>
-
-<file path=ppt/slides/slide49.xml><?xml version="1.0" encoding="utf-8"?>
-<p:sld xmlns:a="http://schemas.openxmlformats.org/drawingml/2006/main" xmlns:p="http://schemas.openxmlformats.org/presentationml/2006/main" xmlns:r="http://schemas.openxmlformats.org/officeDocument/2006/relationships">
-  <p:cSld>
-    <p:bg>
-      <p:bgPr>
-        <a:solidFill>
-          <a:srgbClr val="FFFFFF"/>
-        </a:solidFill>
-        <a:effectLst/>
-      </p:bgPr>
-    </p:bg>
-    <p:spTree>
-      <p:nvGrpSpPr>
-        <p:cNvPr id="1" name=""/>
-        <p:cNvGrpSpPr/>
-        <p:nvPr/>
-      </p:nvGrpSpPr>
-      <p:grpSpPr/>
-      <p:sp>
-        <p:nvSpPr>
-          <p:cNvPr id="2" name="Rectangle 1"/>
-          <p:cNvSpPr/>
-          <p:nvPr/>
-        </p:nvSpPr>
-        <p:spPr>
-          <a:xfrm>
-            <a:off x="0" y="0"/>
-            <a:ext cx="12191695" cy="960120"/>
-          </a:xfrm>
-          <a:prstGeom prst="rect">
-            <a:avLst/>
-          </a:prstGeom>
-          <a:solidFill>
-            <a:srgbClr val="095292"/>
-          </a:solidFill>
-          <a:ln>
-            <a:noFill/>
-          </a:ln>
-        </p:spPr>
-        <p:style>
-          <a:lnRef idx="1">
-            <a:schemeClr val="accent1"/>
-          </a:lnRef>
-          <a:fillRef idx="3">
-            <a:schemeClr val="accent1"/>
-          </a:fillRef>
-          <a:effectRef idx="2">
-            <a:schemeClr val="accent1"/>
-          </a:effectRef>
-          <a:fontRef idx="minor">
-            <a:schemeClr val="lt1"/>
-          </a:fontRef>
-        </p:style>
-        <p:txBody>
-          <a:bodyPr rtlCol="0" anchor="ctr"/>
-          <a:lstStyle/>
-          <a:p>
-            <a:pPr algn="ctr"/>
-          </a:p>
-        </p:txBody>
-      </p:sp>
-      <p:sp>
-        <p:nvSpPr>
-          <p:cNvPr id="3" name="Rectangle 2"/>
-          <p:cNvSpPr/>
-          <p:nvPr/>
-        </p:nvSpPr>
-        <p:spPr>
-          <a:xfrm>
-            <a:off x="0" y="960120"/>
-            <a:ext cx="12191695" cy="41148"/>
-          </a:xfrm>
-          <a:prstGeom prst="rect">
-            <a:avLst/>
-          </a:prstGeom>
-          <a:solidFill>
-            <a:srgbClr val="FFD000"/>
-          </a:solidFill>
-          <a:ln>
-            <a:noFill/>
-          </a:ln>
-        </p:spPr>
-        <p:style>
-          <a:lnRef idx="1">
-            <a:schemeClr val="accent1"/>
-          </a:lnRef>
-          <a:fillRef idx="3">
-            <a:schemeClr val="accent1"/>
-          </a:fillRef>
-          <a:effectRef idx="2">
-            <a:schemeClr val="accent1"/>
-          </a:effectRef>
-          <a:fontRef idx="minor">
-            <a:schemeClr val="lt1"/>
-          </a:fontRef>
-        </p:style>
-        <p:txBody>
-          <a:bodyPr rtlCol="0" anchor="ctr"/>
-          <a:lstStyle/>
-          <a:p>
-            <a:pPr algn="ctr"/>
-          </a:p>
-        </p:txBody>
-      </p:sp>
-      <p:sp>
-        <p:nvSpPr>
-          <p:cNvPr id="4" name="TextBox 3"/>
-          <p:cNvSpPr txBox="1"/>
-          <p:nvPr/>
-        </p:nvSpPr>
-        <p:spPr>
-          <a:xfrm>
-            <a:off x="457200" y="164592"/>
-            <a:ext cx="11277295" cy="502920"/>
-          </a:xfrm>
-          <a:prstGeom prst="rect">
-            <a:avLst/>
-          </a:prstGeom>
-          <a:noFill/>
-        </p:spPr>
-        <p:txBody>
-          <a:bodyPr wrap="square">
-            <a:spAutoFit/>
-          </a:bodyPr>
-          <a:lstStyle/>
-          <a:p>
-            <a:r>
-              <a:rPr sz="2600" b="1" i="0">
-                <a:solidFill>
-                  <a:srgbClr val="FFFFFF"/>
-                </a:solidFill>
-                <a:latin typeface="Calibri"/>
-              </a:rPr>
-              <a:t>Taller PI VetCare — pistas (checklist vacio)</a:t>
-            </a:r>
-          </a:p>
-        </p:txBody>
-      </p:sp>
-      <p:sp>
-        <p:nvSpPr>
-          <p:cNvPr id="5" name="Rounded Rectangle 4"/>
-          <p:cNvSpPr/>
-          <p:nvPr/>
-        </p:nvSpPr>
-        <p:spPr>
-          <a:xfrm>
-            <a:off x="457200" y="1261872"/>
-            <a:ext cx="11277295" cy="566928"/>
-          </a:xfrm>
-          <a:prstGeom prst="roundRect">
-            <a:avLst>
-              <a:gd name="adj" fmla="val 12000"/>
-            </a:avLst>
-          </a:prstGeom>
-          <a:solidFill>
-            <a:srgbClr val="F2F2F2"/>
-          </a:solidFill>
-          <a:ln>
-            <a:noFill/>
-          </a:ln>
-        </p:spPr>
-        <p:style>
-          <a:lnRef idx="1">
-            <a:schemeClr val="accent1"/>
-          </a:lnRef>
-          <a:fillRef idx="3">
-            <a:schemeClr val="accent1"/>
-          </a:fillRef>
-          <a:effectRef idx="2">
-            <a:schemeClr val="accent1"/>
-          </a:effectRef>
-          <a:fontRef idx="minor">
-            <a:schemeClr val="lt1"/>
-          </a:fontRef>
-        </p:style>
-        <p:txBody>
-          <a:bodyPr rtlCol="0" anchor="ctr"/>
-          <a:lstStyle/>
-          <a:p>
-            <a:pPr algn="ctr"/>
-          </a:p>
-        </p:txBody>
-      </p:sp>
-      <p:sp>
-        <p:nvSpPr>
-          <p:cNvPr id="6" name="Rectangle 5"/>
-          <p:cNvSpPr/>
-          <p:nvPr/>
-        </p:nvSpPr>
-        <p:spPr>
-          <a:xfrm>
-            <a:off x="640080" y="1408175"/>
-            <a:ext cx="274320" cy="274320"/>
-          </a:xfrm>
-          <a:prstGeom prst="rect">
-            <a:avLst/>
-          </a:prstGeom>
-          <a:solidFill>
-            <a:srgbClr val="FFFFFF"/>
-          </a:solidFill>
-          <a:ln>
-            <a:solidFill>
-              <a:srgbClr val="333333"/>
-            </a:solidFill>
-          </a:ln>
-        </p:spPr>
-        <p:style>
-          <a:lnRef idx="1">
-            <a:schemeClr val="accent1"/>
-          </a:lnRef>
-          <a:fillRef idx="3">
-            <a:schemeClr val="accent1"/>
-          </a:fillRef>
-          <a:effectRef idx="2">
-            <a:schemeClr val="accent1"/>
-          </a:effectRef>
-          <a:fontRef idx="minor">
-            <a:schemeClr val="lt1"/>
-          </a:fontRef>
-        </p:style>
-        <p:txBody>
-          <a:bodyPr rtlCol="0" anchor="ctr"/>
-          <a:lstStyle/>
-          <a:p>
-            <a:pPr algn="ctr"/>
-          </a:p>
-        </p:txBody>
-      </p:sp>
-      <p:sp>
-        <p:nvSpPr>
-          <p:cNvPr id="7" name="Rectangle 6"/>
-          <p:cNvSpPr/>
-          <p:nvPr/>
-        </p:nvSpPr>
-        <p:spPr>
-          <a:xfrm>
-            <a:off x="640080" y="1408175"/>
-            <a:ext cx="73152" cy="274320"/>
-          </a:xfrm>
-          <a:prstGeom prst="rect">
-            <a:avLst/>
-          </a:prstGeom>
-          <a:solidFill>
-            <a:srgbClr val="269CCB"/>
-          </a:solidFill>
-          <a:ln>
-            <a:noFill/>
-          </a:ln>
-        </p:spPr>
-        <p:style>
-          <a:lnRef idx="1">
-            <a:schemeClr val="accent1"/>
-          </a:lnRef>
-          <a:fillRef idx="3">
-            <a:schemeClr val="accent1"/>
-          </a:fillRef>
-          <a:effectRef idx="2">
-            <a:schemeClr val="accent1"/>
-          </a:effectRef>
-          <a:fontRef idx="minor">
-            <a:schemeClr val="lt1"/>
-          </a:fontRef>
-        </p:style>
-        <p:txBody>
-          <a:bodyPr rtlCol="0" anchor="ctr"/>
-          <a:lstStyle/>
-          <a:p>
-            <a:pPr algn="ctr"/>
-          </a:p>
-        </p:txBody>
-      </p:sp>
-      <p:sp>
-        <p:nvSpPr>
-          <p:cNvPr id="8" name="TextBox 7"/>
-          <p:cNvSpPr txBox="1"/>
-          <p:nvPr/>
-        </p:nvSpPr>
-        <p:spPr>
-          <a:xfrm>
-            <a:off x="1097280" y="1353312"/>
-            <a:ext cx="10362895" cy="402336"/>
-          </a:xfrm>
-          <a:prstGeom prst="rect">
-            <a:avLst/>
-          </a:prstGeom>
-          <a:noFill/>
-        </p:spPr>
-        <p:txBody>
-          <a:bodyPr wrap="square" anchor="ctr"/>
-          <a:lstStyle/>
-          <a:p>
-            <a:r>
-              <a:rPr sz="1500" b="0" i="0">
-                <a:solidFill>
-                  <a:srgbClr val="333333"/>
-                </a:solidFill>
-                <a:latin typeface="Calibri"/>
-              </a:rPr>
-              <a:t>□ ¿Los 4 roles con el nombre exacto, en minúscula y con «veterinario_rol»?</a:t>
-            </a:r>
-          </a:p>
-        </p:txBody>
-      </p:sp>
-      <p:sp>
-        <p:nvSpPr>
-          <p:cNvPr id="9" name="Rounded Rectangle 8"/>
-          <p:cNvSpPr/>
-          <p:nvPr/>
-        </p:nvSpPr>
-        <p:spPr>
-          <a:xfrm>
-            <a:off x="457200" y="1938528"/>
-            <a:ext cx="11277295" cy="566928"/>
-          </a:xfrm>
-          <a:prstGeom prst="roundRect">
-            <a:avLst>
-              <a:gd name="adj" fmla="val 12000"/>
-            </a:avLst>
-          </a:prstGeom>
-          <a:solidFill>
-            <a:srgbClr val="F2F2F2"/>
-          </a:solidFill>
-          <a:ln>
-            <a:noFill/>
-          </a:ln>
-        </p:spPr>
-        <p:style>
-          <a:lnRef idx="1">
-            <a:schemeClr val="accent1"/>
-          </a:lnRef>
-          <a:fillRef idx="3">
-            <a:schemeClr val="accent1"/>
-          </a:fillRef>
-          <a:effectRef idx="2">
-            <a:schemeClr val="accent1"/>
-          </a:effectRef>
-          <a:fontRef idx="minor">
-            <a:schemeClr val="lt1"/>
-          </a:fontRef>
-        </p:style>
-        <p:txBody>
-          <a:bodyPr rtlCol="0" anchor="ctr"/>
-          <a:lstStyle/>
-          <a:p>
-            <a:pPr algn="ctr"/>
-          </a:p>
-        </p:txBody>
-      </p:sp>
-      <p:sp>
-        <p:nvSpPr>
-          <p:cNvPr id="10" name="Rectangle 9"/>
-          <p:cNvSpPr/>
-          <p:nvPr/>
-        </p:nvSpPr>
-        <p:spPr>
-          <a:xfrm>
-            <a:off x="640080" y="2084832"/>
-            <a:ext cx="274320" cy="274320"/>
-          </a:xfrm>
-          <a:prstGeom prst="rect">
-            <a:avLst/>
-          </a:prstGeom>
-          <a:solidFill>
-            <a:srgbClr val="FFFFFF"/>
-          </a:solidFill>
-          <a:ln>
-            <a:solidFill>
-              <a:srgbClr val="333333"/>
-            </a:solidFill>
-          </a:ln>
-        </p:spPr>
-        <p:style>
-          <a:lnRef idx="1">
-            <a:schemeClr val="accent1"/>
-          </a:lnRef>
-          <a:fillRef idx="3">
-            <a:schemeClr val="accent1"/>
-          </a:fillRef>
-          <a:effectRef idx="2">
-            <a:schemeClr val="accent1"/>
-          </a:effectRef>
-          <a:fontRef idx="minor">
-            <a:schemeClr val="lt1"/>
-          </a:fontRef>
-        </p:style>
-        <p:txBody>
-          <a:bodyPr rtlCol="0" anchor="ctr"/>
-          <a:lstStyle/>
-          <a:p>
-            <a:pPr algn="ctr"/>
-          </a:p>
-        </p:txBody>
-      </p:sp>
-      <p:sp>
-        <p:nvSpPr>
-          <p:cNvPr id="11" name="Rectangle 10"/>
-          <p:cNvSpPr/>
-          <p:nvPr/>
-        </p:nvSpPr>
-        <p:spPr>
-          <a:xfrm>
-            <a:off x="640080" y="2084832"/>
-            <a:ext cx="73152" cy="274320"/>
-          </a:xfrm>
-          <a:prstGeom prst="rect">
-            <a:avLst/>
-          </a:prstGeom>
-          <a:solidFill>
-            <a:srgbClr val="269CCB"/>
-          </a:solidFill>
-          <a:ln>
-            <a:noFill/>
-          </a:ln>
-        </p:spPr>
-        <p:style>
-          <a:lnRef idx="1">
-            <a:schemeClr val="accent1"/>
-          </a:lnRef>
-          <a:fillRef idx="3">
-            <a:schemeClr val="accent1"/>
-          </a:fillRef>
-          <a:effectRef idx="2">
-            <a:schemeClr val="accent1"/>
-          </a:effectRef>
-          <a:fontRef idx="minor">
-            <a:schemeClr val="lt1"/>
-          </a:fontRef>
-        </p:style>
-        <p:txBody>
-          <a:bodyPr rtlCol="0" anchor="ctr"/>
-          <a:lstStyle/>
-          <a:p>
-            <a:pPr algn="ctr"/>
-          </a:p>
-        </p:txBody>
-      </p:sp>
-      <p:sp>
-        <p:nvSpPr>
-          <p:cNvPr id="12" name="TextBox 11"/>
-          <p:cNvSpPr txBox="1"/>
-          <p:nvPr/>
-        </p:nvSpPr>
-        <p:spPr>
-          <a:xfrm>
-            <a:off x="1097280" y="2029968"/>
-            <a:ext cx="10362895" cy="402336"/>
-          </a:xfrm>
-          <a:prstGeom prst="rect">
-            <a:avLst/>
-          </a:prstGeom>
-          <a:noFill/>
-        </p:spPr>
-        <p:txBody>
-          <a:bodyPr wrap="square" anchor="ctr"/>
-          <a:lstStyle/>
-          <a:p>
-            <a:r>
-              <a:rPr sz="1500" b="0" i="0">
-                <a:solidFill>
-                  <a:srgbClr val="333333"/>
-                </a:solidFill>
-                <a:latin typeface="Calibri"/>
-              </a:rPr>
-              <a:t>□ ¿«recepcion» sin DELETE en ninguna tabla, y el REVOKE escrito aunque sea redundante?</a:t>
-            </a:r>
-          </a:p>
-        </p:txBody>
-      </p:sp>
-      <p:sp>
-        <p:nvSpPr>
-          <p:cNvPr id="13" name="Rounded Rectangle 12"/>
-          <p:cNvSpPr/>
-          <p:nvPr/>
-        </p:nvSpPr>
-        <p:spPr>
-          <a:xfrm>
-            <a:off x="457200" y="2615184"/>
-            <a:ext cx="11277295" cy="566928"/>
-          </a:xfrm>
-          <a:prstGeom prst="roundRect">
-            <a:avLst>
-              <a:gd name="adj" fmla="val 12000"/>
-            </a:avLst>
-          </a:prstGeom>
-          <a:solidFill>
-            <a:srgbClr val="F2F2F2"/>
-          </a:solidFill>
-          <a:ln>
-            <a:noFill/>
-          </a:ln>
-        </p:spPr>
-        <p:style>
-          <a:lnRef idx="1">
-            <a:schemeClr val="accent1"/>
-          </a:lnRef>
-          <a:fillRef idx="3">
-            <a:schemeClr val="accent1"/>
-          </a:fillRef>
-          <a:effectRef idx="2">
-            <a:schemeClr val="accent1"/>
-          </a:effectRef>
-          <a:fontRef idx="minor">
-            <a:schemeClr val="lt1"/>
-          </a:fontRef>
-        </p:style>
-        <p:txBody>
-          <a:bodyPr rtlCol="0" anchor="ctr"/>
-          <a:lstStyle/>
-          <a:p>
-            <a:pPr algn="ctr"/>
-          </a:p>
-        </p:txBody>
-      </p:sp>
-      <p:sp>
-        <p:nvSpPr>
-          <p:cNvPr id="14" name="Rectangle 13"/>
-          <p:cNvSpPr/>
-          <p:nvPr/>
-        </p:nvSpPr>
-        <p:spPr>
-          <a:xfrm>
-            <a:off x="640080" y="2761488"/>
-            <a:ext cx="274320" cy="274320"/>
-          </a:xfrm>
-          <a:prstGeom prst="rect">
-            <a:avLst/>
-          </a:prstGeom>
-          <a:solidFill>
-            <a:srgbClr val="FFFFFF"/>
-          </a:solidFill>
-          <a:ln>
-            <a:solidFill>
-              <a:srgbClr val="333333"/>
-            </a:solidFill>
-          </a:ln>
-        </p:spPr>
-        <p:style>
-          <a:lnRef idx="1">
-            <a:schemeClr val="accent1"/>
-          </a:lnRef>
-          <a:fillRef idx="3">
-            <a:schemeClr val="accent1"/>
-          </a:fillRef>
-          <a:effectRef idx="2">
-            <a:schemeClr val="accent1"/>
-          </a:effectRef>
-          <a:fontRef idx="minor">
-            <a:schemeClr val="lt1"/>
-          </a:fontRef>
-        </p:style>
-        <p:txBody>
-          <a:bodyPr rtlCol="0" anchor="ctr"/>
-          <a:lstStyle/>
-          <a:p>
-            <a:pPr algn="ctr"/>
-          </a:p>
-        </p:txBody>
-      </p:sp>
-      <p:sp>
-        <p:nvSpPr>
-          <p:cNvPr id="15" name="Rectangle 14"/>
-          <p:cNvSpPr/>
-          <p:nvPr/>
-        </p:nvSpPr>
-        <p:spPr>
-          <a:xfrm>
-            <a:off x="640080" y="2761488"/>
-            <a:ext cx="73152" cy="274320"/>
-          </a:xfrm>
-          <a:prstGeom prst="rect">
-            <a:avLst/>
-          </a:prstGeom>
-          <a:solidFill>
-            <a:srgbClr val="269CCB"/>
-          </a:solidFill>
-          <a:ln>
-            <a:noFill/>
-          </a:ln>
-        </p:spPr>
-        <p:style>
-          <a:lnRef idx="1">
-            <a:schemeClr val="accent1"/>
-          </a:lnRef>
-          <a:fillRef idx="3">
-            <a:schemeClr val="accent1"/>
-          </a:fillRef>
-          <a:effectRef idx="2">
-            <a:schemeClr val="accent1"/>
-          </a:effectRef>
-          <a:fontRef idx="minor">
-            <a:schemeClr val="lt1"/>
-          </a:fontRef>
-        </p:style>
-        <p:txBody>
-          <a:bodyPr rtlCol="0" anchor="ctr"/>
-          <a:lstStyle/>
-          <a:p>
-            <a:pPr algn="ctr"/>
-          </a:p>
-        </p:txBody>
-      </p:sp>
-      <p:sp>
-        <p:nvSpPr>
-          <p:cNvPr id="16" name="TextBox 15"/>
-          <p:cNvSpPr txBox="1"/>
-          <p:nvPr/>
-        </p:nvSpPr>
-        <p:spPr>
-          <a:xfrm>
-            <a:off x="1097280" y="2706624"/>
-            <a:ext cx="10362895" cy="402336"/>
-          </a:xfrm>
-          <a:prstGeom prst="rect">
-            <a:avLst/>
-          </a:prstGeom>
-          <a:noFill/>
-        </p:spPr>
-        <p:txBody>
-          <a:bodyPr wrap="square" anchor="ctr"/>
-          <a:lstStyle/>
-          <a:p>
-            <a:r>
-              <a:rPr sz="1500" b="0" i="0">
-                <a:solidFill>
-                  <a:srgbClr val="333333"/>
-                </a:solidFill>
-                <a:latin typeface="Calibri"/>
-              </a:rPr>
-              <a:t>□ ¿«auditor» solo con SELECT?</a:t>
-            </a:r>
-          </a:p>
-        </p:txBody>
-      </p:sp>
-      <p:sp>
-        <p:nvSpPr>
-          <p:cNvPr id="17" name="Rounded Rectangle 16"/>
-          <p:cNvSpPr/>
-          <p:nvPr/>
-        </p:nvSpPr>
-        <p:spPr>
-          <a:xfrm>
-            <a:off x="457200" y="3291840"/>
-            <a:ext cx="11277295" cy="566928"/>
-          </a:xfrm>
-          <a:prstGeom prst="roundRect">
-            <a:avLst>
-              <a:gd name="adj" fmla="val 12000"/>
-            </a:avLst>
-          </a:prstGeom>
-          <a:solidFill>
-            <a:srgbClr val="F2F2F2"/>
-          </a:solidFill>
-          <a:ln>
-            <a:noFill/>
-          </a:ln>
-        </p:spPr>
-        <p:style>
-          <a:lnRef idx="1">
-            <a:schemeClr val="accent1"/>
-          </a:lnRef>
-          <a:fillRef idx="3">
-            <a:schemeClr val="accent1"/>
-          </a:fillRef>
-          <a:effectRef idx="2">
-            <a:schemeClr val="accent1"/>
-          </a:effectRef>
-          <a:fontRef idx="minor">
-            <a:schemeClr val="lt1"/>
-          </a:fontRef>
-        </p:style>
-        <p:txBody>
-          <a:bodyPr rtlCol="0" anchor="ctr"/>
-          <a:lstStyle/>
-          <a:p>
-            <a:pPr algn="ctr"/>
-          </a:p>
-        </p:txBody>
-      </p:sp>
-      <p:sp>
-        <p:nvSpPr>
-          <p:cNvPr id="18" name="Rectangle 17"/>
-          <p:cNvSpPr/>
-          <p:nvPr/>
-        </p:nvSpPr>
-        <p:spPr>
-          <a:xfrm>
-            <a:off x="640080" y="3438144"/>
-            <a:ext cx="274320" cy="274320"/>
-          </a:xfrm>
-          <a:prstGeom prst="rect">
-            <a:avLst/>
-          </a:prstGeom>
-          <a:solidFill>
-            <a:srgbClr val="FFFFFF"/>
-          </a:solidFill>
-          <a:ln>
-            <a:solidFill>
-              <a:srgbClr val="333333"/>
-            </a:solidFill>
-          </a:ln>
-        </p:spPr>
-        <p:style>
-          <a:lnRef idx="1">
-            <a:schemeClr val="accent1"/>
-          </a:lnRef>
-          <a:fillRef idx="3">
-            <a:schemeClr val="accent1"/>
-          </a:fillRef>
-          <a:effectRef idx="2">
-            <a:schemeClr val="accent1"/>
-          </a:effectRef>
-          <a:fontRef idx="minor">
-            <a:schemeClr val="lt1"/>
-          </a:fontRef>
-        </p:style>
-        <p:txBody>
-          <a:bodyPr rtlCol="0" anchor="ctr"/>
-          <a:lstStyle/>
-          <a:p>
-            <a:pPr algn="ctr"/>
-          </a:p>
-        </p:txBody>
-      </p:sp>
-      <p:sp>
-        <p:nvSpPr>
-          <p:cNvPr id="19" name="Rectangle 18"/>
-          <p:cNvSpPr/>
-          <p:nvPr/>
-        </p:nvSpPr>
-        <p:spPr>
-          <a:xfrm>
-            <a:off x="640080" y="3438144"/>
-            <a:ext cx="73152" cy="274320"/>
-          </a:xfrm>
-          <a:prstGeom prst="rect">
-            <a:avLst/>
-          </a:prstGeom>
-          <a:solidFill>
-            <a:srgbClr val="269CCB"/>
-          </a:solidFill>
-          <a:ln>
-            <a:noFill/>
-          </a:ln>
-        </p:spPr>
-        <p:style>
-          <a:lnRef idx="1">
-            <a:schemeClr val="accent1"/>
-          </a:lnRef>
-          <a:fillRef idx="3">
-            <a:schemeClr val="accent1"/>
-          </a:fillRef>
-          <a:effectRef idx="2">
-            <a:schemeClr val="accent1"/>
-          </a:effectRef>
-          <a:fontRef idx="minor">
-            <a:schemeClr val="lt1"/>
-          </a:fontRef>
-        </p:style>
-        <p:txBody>
-          <a:bodyPr rtlCol="0" anchor="ctr"/>
-          <a:lstStyle/>
-          <a:p>
-            <a:pPr algn="ctr"/>
-          </a:p>
-        </p:txBody>
-      </p:sp>
-      <p:sp>
-        <p:nvSpPr>
-          <p:cNvPr id="20" name="TextBox 19"/>
-          <p:cNvSpPr txBox="1"/>
-          <p:nvPr/>
-        </p:nvSpPr>
-        <p:spPr>
-          <a:xfrm>
-            <a:off x="1097280" y="3383280"/>
-            <a:ext cx="10362895" cy="402336"/>
-          </a:xfrm>
-          <a:prstGeom prst="rect">
-            <a:avLst/>
-          </a:prstGeom>
-          <a:noFill/>
-        </p:spPr>
-        <p:txBody>
-          <a:bodyPr wrap="square" anchor="ctr"/>
-          <a:lstStyle/>
-          <a:p>
-            <a:r>
-              <a:rPr sz="1500" b="0" i="0">
-                <a:solidFill>
-                  <a:srgbClr val="333333"/>
-                </a:solidFill>
-                <a:latin typeface="Calibri"/>
-              </a:rPr>
-              <a:t>□ ¿La vista deja fuera el email, y «column_privileges» devuelve exactamente 2 filas?</a:t>
-            </a:r>
-          </a:p>
-        </p:txBody>
-      </p:sp>
-      <p:sp>
-        <p:nvSpPr>
-          <p:cNvPr id="21" name="Rounded Rectangle 20"/>
-          <p:cNvSpPr/>
-          <p:nvPr/>
-        </p:nvSpPr>
-        <p:spPr>
-          <a:xfrm>
-            <a:off x="457200" y="3968496"/>
-            <a:ext cx="11277295" cy="566928"/>
-          </a:xfrm>
-          <a:prstGeom prst="roundRect">
-            <a:avLst>
-              <a:gd name="adj" fmla="val 12000"/>
-            </a:avLst>
-          </a:prstGeom>
-          <a:solidFill>
-            <a:srgbClr val="F2F2F2"/>
-          </a:solidFill>
-          <a:ln>
-            <a:noFill/>
-          </a:ln>
-        </p:spPr>
-        <p:style>
-          <a:lnRef idx="1">
-            <a:schemeClr val="accent1"/>
-          </a:lnRef>
-          <a:fillRef idx="3">
-            <a:schemeClr val="accent1"/>
-          </a:fillRef>
-          <a:effectRef idx="2">
-            <a:schemeClr val="accent1"/>
-          </a:effectRef>
-          <a:fontRef idx="minor">
-            <a:schemeClr val="lt1"/>
-          </a:fontRef>
-        </p:style>
-        <p:txBody>
-          <a:bodyPr rtlCol="0" anchor="ctr"/>
-          <a:lstStyle/>
-          <a:p>
-            <a:pPr algn="ctr"/>
-          </a:p>
-        </p:txBody>
-      </p:sp>
-      <p:sp>
-        <p:nvSpPr>
-          <p:cNvPr id="22" name="Rectangle 21"/>
-          <p:cNvSpPr/>
-          <p:nvPr/>
-        </p:nvSpPr>
-        <p:spPr>
-          <a:xfrm>
-            <a:off x="640080" y="4114800"/>
-            <a:ext cx="274320" cy="274320"/>
-          </a:xfrm>
-          <a:prstGeom prst="rect">
-            <a:avLst/>
-          </a:prstGeom>
-          <a:solidFill>
-            <a:srgbClr val="FFFFFF"/>
-          </a:solidFill>
-          <a:ln>
-            <a:solidFill>
-              <a:srgbClr val="333333"/>
-            </a:solidFill>
-          </a:ln>
-        </p:spPr>
-        <p:style>
-          <a:lnRef idx="1">
-            <a:schemeClr val="accent1"/>
-          </a:lnRef>
-          <a:fillRef idx="3">
-            <a:schemeClr val="accent1"/>
-          </a:fillRef>
-          <a:effectRef idx="2">
-            <a:schemeClr val="accent1"/>
-          </a:effectRef>
-          <a:fontRef idx="minor">
-            <a:schemeClr val="lt1"/>
-          </a:fontRef>
-        </p:style>
-        <p:txBody>
-          <a:bodyPr rtlCol="0" anchor="ctr"/>
-          <a:lstStyle/>
-          <a:p>
-            <a:pPr algn="ctr"/>
-          </a:p>
-        </p:txBody>
-      </p:sp>
-      <p:sp>
-        <p:nvSpPr>
-          <p:cNvPr id="23" name="Rectangle 22"/>
-          <p:cNvSpPr/>
-          <p:nvPr/>
-        </p:nvSpPr>
-        <p:spPr>
-          <a:xfrm>
-            <a:off x="640080" y="4114800"/>
-            <a:ext cx="73152" cy="274320"/>
-          </a:xfrm>
-          <a:prstGeom prst="rect">
-            <a:avLst/>
-          </a:prstGeom>
-          <a:solidFill>
-            <a:srgbClr val="269CCB"/>
-          </a:solidFill>
-          <a:ln>
-            <a:noFill/>
-          </a:ln>
-        </p:spPr>
-        <p:style>
-          <a:lnRef idx="1">
-            <a:schemeClr val="accent1"/>
-          </a:lnRef>
-          <a:fillRef idx="3">
-            <a:schemeClr val="accent1"/>
-          </a:fillRef>
-          <a:effectRef idx="2">
-            <a:schemeClr val="accent1"/>
-          </a:effectRef>
-          <a:fontRef idx="minor">
-            <a:schemeClr val="lt1"/>
-          </a:fontRef>
-        </p:style>
-        <p:txBody>
-          <a:bodyPr rtlCol="0" anchor="ctr"/>
-          <a:lstStyle/>
-          <a:p>
-            <a:pPr algn="ctr"/>
-          </a:p>
-        </p:txBody>
-      </p:sp>
-      <p:sp>
-        <p:nvSpPr>
-          <p:cNvPr id="24" name="TextBox 23"/>
-          <p:cNvSpPr txBox="1"/>
-          <p:nvPr/>
-        </p:nvSpPr>
-        <p:spPr>
-          <a:xfrm>
-            <a:off x="1097280" y="4059936"/>
-            <a:ext cx="10362895" cy="402336"/>
-          </a:xfrm>
-          <a:prstGeom prst="rect">
-            <a:avLst/>
-          </a:prstGeom>
-          <a:noFill/>
-        </p:spPr>
-        <p:txBody>
-          <a:bodyPr wrap="square" anchor="ctr"/>
-          <a:lstStyle/>
-          <a:p>
-            <a:r>
-              <a:rPr sz="1500" b="0" i="0">
-                <a:solidFill>
-                  <a:srgbClr val="333333"/>
-                </a:solidFill>
-                <a:latin typeface="Calibri"/>
-              </a:rPr>
-              <a:t>□ ¿La matriz tiene las 10 filas llenas y los «sp_» con E, no con S ni I?</a:t>
-            </a:r>
-          </a:p>
-        </p:txBody>
-      </p:sp>
-      <p:sp>
-        <p:nvSpPr>
-          <p:cNvPr id="25" name="Rounded Rectangle 24"/>
-          <p:cNvSpPr/>
-          <p:nvPr/>
-        </p:nvSpPr>
-        <p:spPr>
-          <a:xfrm>
-            <a:off x="457200" y="4645152"/>
-            <a:ext cx="11277295" cy="566928"/>
-          </a:xfrm>
-          <a:prstGeom prst="roundRect">
-            <a:avLst>
-              <a:gd name="adj" fmla="val 12000"/>
-            </a:avLst>
-          </a:prstGeom>
-          <a:solidFill>
-            <a:srgbClr val="F2F2F2"/>
-          </a:solidFill>
-          <a:ln>
-            <a:noFill/>
-          </a:ln>
-        </p:spPr>
-        <p:style>
-          <a:lnRef idx="1">
-            <a:schemeClr val="accent1"/>
-          </a:lnRef>
-          <a:fillRef idx="3">
-            <a:schemeClr val="accent1"/>
-          </a:fillRef>
-          <a:effectRef idx="2">
-            <a:schemeClr val="accent1"/>
-          </a:effectRef>
-          <a:fontRef idx="minor">
-            <a:schemeClr val="lt1"/>
-          </a:fontRef>
-        </p:style>
-        <p:txBody>
-          <a:bodyPr rtlCol="0" anchor="ctr"/>
-          <a:lstStyle/>
-          <a:p>
-            <a:pPr algn="ctr"/>
-          </a:p>
-        </p:txBody>
-      </p:sp>
-      <p:sp>
-        <p:nvSpPr>
-          <p:cNvPr id="26" name="Rectangle 25"/>
-          <p:cNvSpPr/>
-          <p:nvPr/>
-        </p:nvSpPr>
-        <p:spPr>
-          <a:xfrm>
-            <a:off x="640080" y="4791456"/>
-            <a:ext cx="274320" cy="274320"/>
-          </a:xfrm>
-          <a:prstGeom prst="rect">
-            <a:avLst/>
-          </a:prstGeom>
-          <a:solidFill>
-            <a:srgbClr val="FFFFFF"/>
-          </a:solidFill>
-          <a:ln>
-            <a:solidFill>
-              <a:srgbClr val="333333"/>
-            </a:solidFill>
-          </a:ln>
-        </p:spPr>
-        <p:style>
-          <a:lnRef idx="1">
-            <a:schemeClr val="accent1"/>
-          </a:lnRef>
-          <a:fillRef idx="3">
-            <a:schemeClr val="accent1"/>
-          </a:fillRef>
-          <a:effectRef idx="2">
-            <a:schemeClr val="accent1"/>
-          </a:effectRef>
-          <a:fontRef idx="minor">
-            <a:schemeClr val="lt1"/>
-          </a:fontRef>
-        </p:style>
-        <p:txBody>
-          <a:bodyPr rtlCol="0" anchor="ctr"/>
-          <a:lstStyle/>
-          <a:p>
-            <a:pPr algn="ctr"/>
-          </a:p>
-        </p:txBody>
-      </p:sp>
-      <p:sp>
-        <p:nvSpPr>
-          <p:cNvPr id="27" name="Rectangle 26"/>
-          <p:cNvSpPr/>
-          <p:nvPr/>
-        </p:nvSpPr>
-        <p:spPr>
-          <a:xfrm>
-            <a:off x="640080" y="4791456"/>
-            <a:ext cx="73152" cy="274320"/>
-          </a:xfrm>
-          <a:prstGeom prst="rect">
-            <a:avLst/>
-          </a:prstGeom>
-          <a:solidFill>
-            <a:srgbClr val="269CCB"/>
-          </a:solidFill>
-          <a:ln>
-            <a:noFill/>
-          </a:ln>
-        </p:spPr>
-        <p:style>
-          <a:lnRef idx="1">
-            <a:schemeClr val="accent1"/>
-          </a:lnRef>
-          <a:fillRef idx="3">
-            <a:schemeClr val="accent1"/>
-          </a:fillRef>
-          <a:effectRef idx="2">
-            <a:schemeClr val="accent1"/>
-          </a:effectRef>
-          <a:fontRef idx="minor">
-            <a:schemeClr val="lt1"/>
-          </a:fontRef>
-        </p:style>
-        <p:txBody>
-          <a:bodyPr rtlCol="0" anchor="ctr"/>
-          <a:lstStyle/>
-          <a:p>
-            <a:pPr algn="ctr"/>
-          </a:p>
-        </p:txBody>
-      </p:sp>
-      <p:sp>
-        <p:nvSpPr>
-          <p:cNvPr id="28" name="TextBox 27"/>
-          <p:cNvSpPr txBox="1"/>
-          <p:nvPr/>
-        </p:nvSpPr>
-        <p:spPr>
-          <a:xfrm>
-            <a:off x="1097280" y="4736592"/>
-            <a:ext cx="10362895" cy="402336"/>
-          </a:xfrm>
-          <a:prstGeom prst="rect">
-            <a:avLst/>
-          </a:prstGeom>
-          <a:noFill/>
-        </p:spPr>
-        <p:txBody>
-          <a:bodyPr wrap="square" anchor="ctr"/>
-          <a:lstStyle/>
-          <a:p>
-            <a:r>
-              <a:rPr sz="1500" b="0" i="0">
-                <a:solidFill>
-                  <a:srgbClr val="333333"/>
-                </a:solidFill>
-                <a:latin typeface="Calibri"/>
-              </a:rPr>
-              <a:t>□ ¿La política dice quién aprueba y en cuánto tiempo, y trae la prueba negativa con «SET ROLE»?</a:t>
-            </a:r>
-          </a:p>
-        </p:txBody>
-      </p:sp>
-      <p:sp>
-        <p:nvSpPr>
-          <p:cNvPr id="29" name="TextBox 28"/>
-          <p:cNvSpPr txBox="1"/>
-          <p:nvPr/>
-        </p:nvSpPr>
-        <p:spPr>
-          <a:xfrm>
-            <a:off x="11185855" y="6473952"/>
-            <a:ext cx="640080" cy="274320"/>
-          </a:xfrm>
-          <a:prstGeom prst="rect">
-            <a:avLst/>
-          </a:prstGeom>
-          <a:noFill/>
-        </p:spPr>
-        <p:txBody>
-          <a:bodyPr wrap="square">
-            <a:spAutoFit/>
-          </a:bodyPr>
-          <a:lstStyle/>
-          <a:p>
-            <a:pPr algn="r"/>
-            <a:r>
-              <a:rPr sz="1100" b="0" i="0">
-                <a:solidFill>
-                  <a:srgbClr val="666666"/>
-                </a:solidFill>
-                <a:latin typeface="Calibri"/>
-              </a:rPr>
-              <a:t>49</a:t>
+                  <a:srgbClr val="269CCB"/>
+                </a:solidFill>
+                <a:latin typeface="Calibri"/>
+              </a:rPr>
+              <a:t>Todo lo visto queda proyectado para repasar</a:t>
             </a:r>
           </a:p>
         </p:txBody>
@@ -20783,1153 +18365,6 @@
                 <a:latin typeface="Calibri"/>
               </a:rPr>
               <a:t>5</a:t>
-            </a:r>
-          </a:p>
-        </p:txBody>
-      </p:sp>
-    </p:spTree>
-  </p:cSld>
-  <p:clrMapOvr>
-    <a:masterClrMapping/>
-  </p:clrMapOvr>
-</p:sld>
-</file>
-
-<file path=ppt/slides/slide50.xml><?xml version="1.0" encoding="utf-8"?>
-<p:sld xmlns:a="http://schemas.openxmlformats.org/drawingml/2006/main" xmlns:p="http://schemas.openxmlformats.org/presentationml/2006/main" xmlns:r="http://schemas.openxmlformats.org/officeDocument/2006/relationships">
-  <p:cSld>
-    <p:bg>
-      <p:bgPr>
-        <a:solidFill>
-          <a:srgbClr val="FFFFFF"/>
-        </a:solidFill>
-        <a:effectLst/>
-      </p:bgPr>
-    </p:bg>
-    <p:spTree>
-      <p:nvGrpSpPr>
-        <p:cNvPr id="1" name=""/>
-        <p:cNvGrpSpPr/>
-        <p:nvPr/>
-      </p:nvGrpSpPr>
-      <p:grpSpPr/>
-      <p:sp>
-        <p:nvSpPr>
-          <p:cNvPr id="2" name="Rectangle 1"/>
-          <p:cNvSpPr/>
-          <p:nvPr/>
-        </p:nvSpPr>
-        <p:spPr>
-          <a:xfrm>
-            <a:off x="0" y="0"/>
-            <a:ext cx="12191695" cy="960120"/>
-          </a:xfrm>
-          <a:prstGeom prst="rect">
-            <a:avLst/>
-          </a:prstGeom>
-          <a:solidFill>
-            <a:srgbClr val="095292"/>
-          </a:solidFill>
-          <a:ln>
-            <a:noFill/>
-          </a:ln>
-        </p:spPr>
-        <p:style>
-          <a:lnRef idx="1">
-            <a:schemeClr val="accent1"/>
-          </a:lnRef>
-          <a:fillRef idx="3">
-            <a:schemeClr val="accent1"/>
-          </a:fillRef>
-          <a:effectRef idx="2">
-            <a:schemeClr val="accent1"/>
-          </a:effectRef>
-          <a:fontRef idx="minor">
-            <a:schemeClr val="lt1"/>
-          </a:fontRef>
-        </p:style>
-        <p:txBody>
-          <a:bodyPr rtlCol="0" anchor="ctr"/>
-          <a:lstStyle/>
-          <a:p>
-            <a:pPr algn="ctr"/>
-          </a:p>
-        </p:txBody>
-      </p:sp>
-      <p:sp>
-        <p:nvSpPr>
-          <p:cNvPr id="3" name="Rectangle 2"/>
-          <p:cNvSpPr/>
-          <p:nvPr/>
-        </p:nvSpPr>
-        <p:spPr>
-          <a:xfrm>
-            <a:off x="0" y="960120"/>
-            <a:ext cx="12191695" cy="41148"/>
-          </a:xfrm>
-          <a:prstGeom prst="rect">
-            <a:avLst/>
-          </a:prstGeom>
-          <a:solidFill>
-            <a:srgbClr val="FFD000"/>
-          </a:solidFill>
-          <a:ln>
-            <a:noFill/>
-          </a:ln>
-        </p:spPr>
-        <p:style>
-          <a:lnRef idx="1">
-            <a:schemeClr val="accent1"/>
-          </a:lnRef>
-          <a:fillRef idx="3">
-            <a:schemeClr val="accent1"/>
-          </a:fillRef>
-          <a:effectRef idx="2">
-            <a:schemeClr val="accent1"/>
-          </a:effectRef>
-          <a:fontRef idx="minor">
-            <a:schemeClr val="lt1"/>
-          </a:fontRef>
-        </p:style>
-        <p:txBody>
-          <a:bodyPr rtlCol="0" anchor="ctr"/>
-          <a:lstStyle/>
-          <a:p>
-            <a:pPr algn="ctr"/>
-          </a:p>
-        </p:txBody>
-      </p:sp>
-      <p:sp>
-        <p:nvSpPr>
-          <p:cNvPr id="4" name="TextBox 3"/>
-          <p:cNvSpPr txBox="1"/>
-          <p:nvPr/>
-        </p:nvSpPr>
-        <p:spPr>
-          <a:xfrm>
-            <a:off x="457200" y="164592"/>
-            <a:ext cx="11277295" cy="502920"/>
-          </a:xfrm>
-          <a:prstGeom prst="rect">
-            <a:avLst/>
-          </a:prstGeom>
-          <a:noFill/>
-        </p:spPr>
-        <p:txBody>
-          <a:bodyPr wrap="square">
-            <a:spAutoFit/>
-          </a:bodyPr>
-          <a:lstStyle/>
-          <a:p>
-            <a:r>
-              <a:rPr sz="2600" b="1" i="0">
-                <a:solidFill>
-                  <a:srgbClr val="FFFFFF"/>
-                </a:solidFill>
-                <a:latin typeface="Calibri"/>
-              </a:rPr>
-              <a:t>Criterios de exito / entregable</a:t>
-            </a:r>
-          </a:p>
-        </p:txBody>
-      </p:sp>
-      <p:sp>
-        <p:nvSpPr>
-          <p:cNvPr id="5" name="TextBox 4"/>
-          <p:cNvSpPr txBox="1"/>
-          <p:nvPr/>
-        </p:nvSpPr>
-        <p:spPr>
-          <a:xfrm>
-            <a:off x="457200" y="1170432"/>
-            <a:ext cx="11277295" cy="5230368"/>
-          </a:xfrm>
-          <a:prstGeom prst="rect">
-            <a:avLst/>
-          </a:prstGeom>
-          <a:noFill/>
-        </p:spPr>
-        <p:txBody>
-          <a:bodyPr wrap="square">
-            <a:spAutoFit/>
-          </a:bodyPr>
-          <a:lstStyle/>
-          <a:p>
-            <a:pPr>
-              <a:spcAft>
-                <a:spcPts val="800"/>
-              </a:spcAft>
-            </a:pPr>
-            <a:r>
-              <a:rPr sz="2000" b="0" i="0">
-                <a:solidFill>
-                  <a:srgbClr val="333333"/>
-                </a:solidFill>
-                <a:latin typeface="Calibri"/>
-              </a:rPr>
-              <a:t>–   </a:t>
-            </a:r>
-            <a:r>
-              <a:rPr sz="2000" b="1" i="0">
-                <a:solidFill>
-                  <a:srgbClr val="333333"/>
-                </a:solidFill>
-                <a:latin typeface="Calibri"/>
-              </a:rPr>
-              <a:t>Entregable:</a:t>
-            </a:r>
-            <a:r>
-              <a:rPr sz="2000" b="0" i="0">
-                <a:solidFill>
-                  <a:srgbClr val="333333"/>
-                </a:solidFill>
-                <a:latin typeface="Calibri"/>
-              </a:rPr>
-              <a:t> Documento Roles_VetCare + script GRANT/REVOKE ejecutado en la plataforma del curso</a:t>
-            </a:r>
-          </a:p>
-          <a:p>
-            <a:pPr>
-              <a:spcAft>
-                <a:spcPts val="800"/>
-              </a:spcAft>
-            </a:pPr>
-            <a:r>
-              <a:rPr sz="2000" b="0" i="0">
-                <a:solidFill>
-                  <a:srgbClr val="333333"/>
-                </a:solidFill>
-                <a:latin typeface="Calibri"/>
-              </a:rPr>
-              <a:t>–   Evidencia: el SQL y su salida quedan guardados en cada pregunta de la plataforma del curso.</a:t>
-            </a:r>
-          </a:p>
-          <a:p>
-            <a:pPr>
-              <a:spcAft>
-                <a:spcPts val="800"/>
-              </a:spcAft>
-            </a:pPr>
-            <a:r>
-              <a:rPr sz="2000" b="0" i="0">
-                <a:solidFill>
-                  <a:srgbClr val="333333"/>
-                </a:solidFill>
-                <a:latin typeface="Calibri"/>
-              </a:rPr>
-              <a:t>–   Conserva copia en tu carpeta del PI (los .sql que pide el entregable).</a:t>
-            </a:r>
-          </a:p>
-          <a:p>
-            <a:pPr>
-              <a:spcAft>
-                <a:spcPts val="800"/>
-              </a:spcAft>
-            </a:pPr>
-            <a:r>
-              <a:rPr sz="2000" b="0" i="0">
-                <a:solidFill>
-                  <a:srgbClr val="333333"/>
-                </a:solidFill>
-                <a:latin typeface="Calibri"/>
-              </a:rPr>
-              <a:t>–   Actualizar checklist PI (que criterio de rubrica avanzo).</a:t>
-            </a:r>
-          </a:p>
-          <a:p>
-            <a:pPr>
-              <a:spcAft>
-                <a:spcPts val="800"/>
-              </a:spcAft>
-            </a:pPr>
-            <a:r>
-              <a:rPr sz="2000" b="0" i="0">
-                <a:solidFill>
-                  <a:srgbClr val="333333"/>
-                </a:solidFill>
-                <a:latin typeface="Calibri"/>
-              </a:rPr>
-              <a:t>–   </a:t>
-            </a:r>
-            <a:r>
-              <a:rPr sz="2000" b="1" i="0">
-                <a:solidFill>
-                  <a:srgbClr val="333333"/>
-                </a:solidFill>
-                <a:latin typeface="Calibri"/>
-              </a:rPr>
-              <a:t>Entrega en la plataforma del curso</a:t>
-            </a:r>
-            <a:r>
-              <a:rPr sz="2000" b="0" i="0">
-                <a:solidFill>
-                  <a:srgbClr val="333333"/>
-                </a:solidFill>
-                <a:latin typeface="Calibri"/>
-              </a:rPr>
-              <a:t> — en la fecha que indique el docente.</a:t>
-            </a:r>
-          </a:p>
-        </p:txBody>
-      </p:sp>
-      <p:sp>
-        <p:nvSpPr>
-          <p:cNvPr id="6" name="TextBox 5"/>
-          <p:cNvSpPr txBox="1"/>
-          <p:nvPr/>
-        </p:nvSpPr>
-        <p:spPr>
-          <a:xfrm>
-            <a:off x="11185855" y="6473952"/>
-            <a:ext cx="640080" cy="274320"/>
-          </a:xfrm>
-          <a:prstGeom prst="rect">
-            <a:avLst/>
-          </a:prstGeom>
-          <a:noFill/>
-        </p:spPr>
-        <p:txBody>
-          <a:bodyPr wrap="square">
-            <a:spAutoFit/>
-          </a:bodyPr>
-          <a:lstStyle/>
-          <a:p>
-            <a:pPr algn="r"/>
-            <a:r>
-              <a:rPr sz="1100" b="0" i="0">
-                <a:solidFill>
-                  <a:srgbClr val="666666"/>
-                </a:solidFill>
-                <a:latin typeface="Calibri"/>
-              </a:rPr>
-              <a:t>50</a:t>
-            </a:r>
-          </a:p>
-        </p:txBody>
-      </p:sp>
-    </p:spTree>
-  </p:cSld>
-  <p:clrMapOvr>
-    <a:masterClrMapping/>
-  </p:clrMapOvr>
-</p:sld>
-</file>
-
-<file path=ppt/slides/slide51.xml><?xml version="1.0" encoding="utf-8"?>
-<p:sld xmlns:a="http://schemas.openxmlformats.org/drawingml/2006/main" xmlns:p="http://schemas.openxmlformats.org/presentationml/2006/main" xmlns:r="http://schemas.openxmlformats.org/officeDocument/2006/relationships">
-  <p:cSld>
-    <p:bg>
-      <p:bgPr>
-        <a:solidFill>
-          <a:srgbClr val="FFFFFF"/>
-        </a:solidFill>
-        <a:effectLst/>
-      </p:bgPr>
-    </p:bg>
-    <p:spTree>
-      <p:nvGrpSpPr>
-        <p:cNvPr id="1" name=""/>
-        <p:cNvGrpSpPr/>
-        <p:nvPr/>
-      </p:nvGrpSpPr>
-      <p:grpSpPr/>
-      <p:sp>
-        <p:nvSpPr>
-          <p:cNvPr id="2" name="Rectangle 1"/>
-          <p:cNvSpPr/>
-          <p:nvPr/>
-        </p:nvSpPr>
-        <p:spPr>
-          <a:xfrm>
-            <a:off x="0" y="0"/>
-            <a:ext cx="12191695" cy="960120"/>
-          </a:xfrm>
-          <a:prstGeom prst="rect">
-            <a:avLst/>
-          </a:prstGeom>
-          <a:solidFill>
-            <a:srgbClr val="095292"/>
-          </a:solidFill>
-          <a:ln>
-            <a:noFill/>
-          </a:ln>
-        </p:spPr>
-        <p:style>
-          <a:lnRef idx="1">
-            <a:schemeClr val="accent1"/>
-          </a:lnRef>
-          <a:fillRef idx="3">
-            <a:schemeClr val="accent1"/>
-          </a:fillRef>
-          <a:effectRef idx="2">
-            <a:schemeClr val="accent1"/>
-          </a:effectRef>
-          <a:fontRef idx="minor">
-            <a:schemeClr val="lt1"/>
-          </a:fontRef>
-        </p:style>
-        <p:txBody>
-          <a:bodyPr rtlCol="0" anchor="ctr"/>
-          <a:lstStyle/>
-          <a:p>
-            <a:pPr algn="ctr"/>
-          </a:p>
-        </p:txBody>
-      </p:sp>
-      <p:sp>
-        <p:nvSpPr>
-          <p:cNvPr id="3" name="Rectangle 2"/>
-          <p:cNvSpPr/>
-          <p:nvPr/>
-        </p:nvSpPr>
-        <p:spPr>
-          <a:xfrm>
-            <a:off x="0" y="960120"/>
-            <a:ext cx="12191695" cy="41148"/>
-          </a:xfrm>
-          <a:prstGeom prst="rect">
-            <a:avLst/>
-          </a:prstGeom>
-          <a:solidFill>
-            <a:srgbClr val="FFD000"/>
-          </a:solidFill>
-          <a:ln>
-            <a:noFill/>
-          </a:ln>
-        </p:spPr>
-        <p:style>
-          <a:lnRef idx="1">
-            <a:schemeClr val="accent1"/>
-          </a:lnRef>
-          <a:fillRef idx="3">
-            <a:schemeClr val="accent1"/>
-          </a:fillRef>
-          <a:effectRef idx="2">
-            <a:schemeClr val="accent1"/>
-          </a:effectRef>
-          <a:fontRef idx="minor">
-            <a:schemeClr val="lt1"/>
-          </a:fontRef>
-        </p:style>
-        <p:txBody>
-          <a:bodyPr rtlCol="0" anchor="ctr"/>
-          <a:lstStyle/>
-          <a:p>
-            <a:pPr algn="ctr"/>
-          </a:p>
-        </p:txBody>
-      </p:sp>
-      <p:sp>
-        <p:nvSpPr>
-          <p:cNvPr id="4" name="TextBox 3"/>
-          <p:cNvSpPr txBox="1"/>
-          <p:nvPr/>
-        </p:nvSpPr>
-        <p:spPr>
-          <a:xfrm>
-            <a:off x="457200" y="164592"/>
-            <a:ext cx="11277295" cy="502920"/>
-          </a:xfrm>
-          <a:prstGeom prst="rect">
-            <a:avLst/>
-          </a:prstGeom>
-          <a:noFill/>
-        </p:spPr>
-        <p:txBody>
-          <a:bodyPr wrap="square">
-            <a:spAutoFit/>
-          </a:bodyPr>
-          <a:lstStyle/>
-          <a:p>
-            <a:r>
-              <a:rPr sz="2600" b="1" i="0">
-                <a:solidFill>
-                  <a:srgbClr val="FFFFFF"/>
-                </a:solidFill>
-                <a:latin typeface="Calibri"/>
-              </a:rPr>
-              <a:t>Para el PI esta semana</a:t>
-            </a:r>
-          </a:p>
-        </p:txBody>
-      </p:sp>
-      <p:sp>
-        <p:nvSpPr>
-          <p:cNvPr id="5" name="Rounded Rectangle 4"/>
-          <p:cNvSpPr/>
-          <p:nvPr/>
-        </p:nvSpPr>
-        <p:spPr>
-          <a:xfrm>
-            <a:off x="457200" y="1261872"/>
-            <a:ext cx="11277295" cy="1051560"/>
-          </a:xfrm>
-          <a:prstGeom prst="roundRect">
-            <a:avLst>
-              <a:gd name="adj" fmla="val 12000"/>
-            </a:avLst>
-          </a:prstGeom>
-          <a:solidFill>
-            <a:srgbClr val="E8F4FA"/>
-          </a:solidFill>
-          <a:ln>
-            <a:noFill/>
-          </a:ln>
-        </p:spPr>
-        <p:style>
-          <a:lnRef idx="1">
-            <a:schemeClr val="accent1"/>
-          </a:lnRef>
-          <a:fillRef idx="3">
-            <a:schemeClr val="accent1"/>
-          </a:fillRef>
-          <a:effectRef idx="2">
-            <a:schemeClr val="accent1"/>
-          </a:effectRef>
-          <a:fontRef idx="minor">
-            <a:schemeClr val="lt1"/>
-          </a:fontRef>
-        </p:style>
-        <p:txBody>
-          <a:bodyPr rtlCol="0" anchor="ctr"/>
-          <a:lstStyle/>
-          <a:p>
-            <a:pPr algn="ctr"/>
-          </a:p>
-        </p:txBody>
-      </p:sp>
-      <p:sp>
-        <p:nvSpPr>
-          <p:cNvPr id="6" name="Rectangle 5"/>
-          <p:cNvSpPr/>
-          <p:nvPr/>
-        </p:nvSpPr>
-        <p:spPr>
-          <a:xfrm>
-            <a:off x="457200" y="1261872"/>
-            <a:ext cx="128016" cy="1051560"/>
-          </a:xfrm>
-          <a:prstGeom prst="rect">
-            <a:avLst/>
-          </a:prstGeom>
-          <a:solidFill>
-            <a:srgbClr val="269CCB"/>
-          </a:solidFill>
-          <a:ln>
-            <a:noFill/>
-          </a:ln>
-        </p:spPr>
-        <p:style>
-          <a:lnRef idx="1">
-            <a:schemeClr val="accent1"/>
-          </a:lnRef>
-          <a:fillRef idx="3">
-            <a:schemeClr val="accent1"/>
-          </a:fillRef>
-          <a:effectRef idx="2">
-            <a:schemeClr val="accent1"/>
-          </a:effectRef>
-          <a:fontRef idx="minor">
-            <a:schemeClr val="lt1"/>
-          </a:fontRef>
-        </p:style>
-        <p:txBody>
-          <a:bodyPr rtlCol="0" anchor="ctr"/>
-          <a:lstStyle/>
-          <a:p>
-            <a:pPr algn="ctr"/>
-          </a:p>
-        </p:txBody>
-      </p:sp>
-      <p:sp>
-        <p:nvSpPr>
-          <p:cNvPr id="7" name="TextBox 6"/>
-          <p:cNvSpPr txBox="1"/>
-          <p:nvPr/>
-        </p:nvSpPr>
-        <p:spPr>
-          <a:xfrm>
-            <a:off x="777240" y="1399031"/>
-            <a:ext cx="10774375" cy="822959"/>
-          </a:xfrm>
-          <a:prstGeom prst="rect">
-            <a:avLst/>
-          </a:prstGeom>
-          <a:noFill/>
-        </p:spPr>
-        <p:txBody>
-          <a:bodyPr wrap="square">
-            <a:spAutoFit/>
-          </a:bodyPr>
-          <a:lstStyle/>
-          <a:p>
-            <a:r>
-              <a:rPr sz="1200" b="1" i="0">
-                <a:solidFill>
-                  <a:srgbClr val="269CCB"/>
-                </a:solidFill>
-                <a:latin typeface="Calibri"/>
-              </a:rPr>
-              <a:t>Info</a:t>
-            </a:r>
-          </a:p>
-          <a:p>
-            <a:pPr>
-              <a:spcBef>
-                <a:spcPts val="400"/>
-              </a:spcBef>
-            </a:pPr>
-            <a:r>
-              <a:rPr sz="1400" b="0" i="0">
-                <a:solidFill>
-                  <a:srgbClr val="333333"/>
-                </a:solidFill>
-                <a:latin typeface="Calibri"/>
-              </a:rPr>
-              <a:t>Hito: Plan de roles/privilegios de VetCare</a:t>
-            </a:r>
-          </a:p>
-        </p:txBody>
-      </p:sp>
-      <p:sp>
-        <p:nvSpPr>
-          <p:cNvPr id="8" name="Rounded Rectangle 7"/>
-          <p:cNvSpPr/>
-          <p:nvPr/>
-        </p:nvSpPr>
-        <p:spPr>
-          <a:xfrm>
-            <a:off x="457200" y="2478024"/>
-            <a:ext cx="11277295" cy="1051560"/>
-          </a:xfrm>
-          <a:prstGeom prst="roundRect">
-            <a:avLst>
-              <a:gd name="adj" fmla="val 12000"/>
-            </a:avLst>
-          </a:prstGeom>
-          <a:solidFill>
-            <a:srgbClr val="FFF8E1"/>
-          </a:solidFill>
-          <a:ln>
-            <a:noFill/>
-          </a:ln>
-        </p:spPr>
-        <p:style>
-          <a:lnRef idx="1">
-            <a:schemeClr val="accent1"/>
-          </a:lnRef>
-          <a:fillRef idx="3">
-            <a:schemeClr val="accent1"/>
-          </a:fillRef>
-          <a:effectRef idx="2">
-            <a:schemeClr val="accent1"/>
-          </a:effectRef>
-          <a:fontRef idx="minor">
-            <a:schemeClr val="lt1"/>
-          </a:fontRef>
-        </p:style>
-        <p:txBody>
-          <a:bodyPr rtlCol="0" anchor="ctr"/>
-          <a:lstStyle/>
-          <a:p>
-            <a:pPr algn="ctr"/>
-          </a:p>
-        </p:txBody>
-      </p:sp>
-      <p:sp>
-        <p:nvSpPr>
-          <p:cNvPr id="9" name="Rectangle 8"/>
-          <p:cNvSpPr/>
-          <p:nvPr/>
-        </p:nvSpPr>
-        <p:spPr>
-          <a:xfrm>
-            <a:off x="457200" y="2478024"/>
-            <a:ext cx="128016" cy="1051560"/>
-          </a:xfrm>
-          <a:prstGeom prst="rect">
-            <a:avLst/>
-          </a:prstGeom>
-          <a:solidFill>
-            <a:srgbClr val="FFD000"/>
-          </a:solidFill>
-          <a:ln>
-            <a:noFill/>
-          </a:ln>
-        </p:spPr>
-        <p:style>
-          <a:lnRef idx="1">
-            <a:schemeClr val="accent1"/>
-          </a:lnRef>
-          <a:fillRef idx="3">
-            <a:schemeClr val="accent1"/>
-          </a:fillRef>
-          <a:effectRef idx="2">
-            <a:schemeClr val="accent1"/>
-          </a:effectRef>
-          <a:fontRef idx="minor">
-            <a:schemeClr val="lt1"/>
-          </a:fontRef>
-        </p:style>
-        <p:txBody>
-          <a:bodyPr rtlCol="0" anchor="ctr"/>
-          <a:lstStyle/>
-          <a:p>
-            <a:pPr algn="ctr"/>
-          </a:p>
-        </p:txBody>
-      </p:sp>
-      <p:sp>
-        <p:nvSpPr>
-          <p:cNvPr id="10" name="TextBox 9"/>
-          <p:cNvSpPr txBox="1"/>
-          <p:nvPr/>
-        </p:nvSpPr>
-        <p:spPr>
-          <a:xfrm>
-            <a:off x="777240" y="2615184"/>
-            <a:ext cx="10774375" cy="822959"/>
-          </a:xfrm>
-          <a:prstGeom prst="rect">
-            <a:avLst/>
-          </a:prstGeom>
-          <a:noFill/>
-        </p:spPr>
-        <p:txBody>
-          <a:bodyPr wrap="square">
-            <a:spAutoFit/>
-          </a:bodyPr>
-          <a:lstStyle/>
-          <a:p>
-            <a:r>
-              <a:rPr sz="1200" b="1" i="0">
-                <a:solidFill>
-                  <a:srgbClr val="FFD000"/>
-                </a:solidFill>
-                <a:latin typeface="Calibri"/>
-              </a:rPr>
-              <a:t>Aclaración</a:t>
-            </a:r>
-          </a:p>
-          <a:p>
-            <a:pPr>
-              <a:spcBef>
-                <a:spcPts val="400"/>
-              </a:spcBef>
-            </a:pPr>
-            <a:r>
-              <a:rPr sz="1400" b="0" i="0">
-                <a:solidFill>
-                  <a:srgbClr val="333333"/>
-                </a:solidFill>
-                <a:latin typeface="Calibri"/>
-              </a:rPr>
-              <a:t>Enunciado completo: Clases/Proyecto Integrador/ (VetCare DB).</a:t>
-            </a:r>
-          </a:p>
-        </p:txBody>
-      </p:sp>
-      <p:sp>
-        <p:nvSpPr>
-          <p:cNvPr id="11" name="Rounded Rectangle 10"/>
-          <p:cNvSpPr/>
-          <p:nvPr/>
-        </p:nvSpPr>
-        <p:spPr>
-          <a:xfrm>
-            <a:off x="457200" y="3694176"/>
-            <a:ext cx="11277295" cy="1051560"/>
-          </a:xfrm>
-          <a:prstGeom prst="roundRect">
-            <a:avLst>
-              <a:gd name="adj" fmla="val 12000"/>
-            </a:avLst>
-          </a:prstGeom>
-          <a:solidFill>
-            <a:srgbClr val="FBE4E4"/>
-          </a:solidFill>
-          <a:ln>
-            <a:noFill/>
-          </a:ln>
-        </p:spPr>
-        <p:style>
-          <a:lnRef idx="1">
-            <a:schemeClr val="accent1"/>
-          </a:lnRef>
-          <a:fillRef idx="3">
-            <a:schemeClr val="accent1"/>
-          </a:fillRef>
-          <a:effectRef idx="2">
-            <a:schemeClr val="accent1"/>
-          </a:effectRef>
-          <a:fontRef idx="minor">
-            <a:schemeClr val="lt1"/>
-          </a:fontRef>
-        </p:style>
-        <p:txBody>
-          <a:bodyPr rtlCol="0" anchor="ctr"/>
-          <a:lstStyle/>
-          <a:p>
-            <a:pPr algn="ctr"/>
-          </a:p>
-        </p:txBody>
-      </p:sp>
-      <p:sp>
-        <p:nvSpPr>
-          <p:cNvPr id="12" name="Rectangle 11"/>
-          <p:cNvSpPr/>
-          <p:nvPr/>
-        </p:nvSpPr>
-        <p:spPr>
-          <a:xfrm>
-            <a:off x="457200" y="3694176"/>
-            <a:ext cx="128016" cy="1051560"/>
-          </a:xfrm>
-          <a:prstGeom prst="rect">
-            <a:avLst/>
-          </a:prstGeom>
-          <a:solidFill>
-            <a:srgbClr val="A02030"/>
-          </a:solidFill>
-          <a:ln>
-            <a:noFill/>
-          </a:ln>
-        </p:spPr>
-        <p:style>
-          <a:lnRef idx="1">
-            <a:schemeClr val="accent1"/>
-          </a:lnRef>
-          <a:fillRef idx="3">
-            <a:schemeClr val="accent1"/>
-          </a:fillRef>
-          <a:effectRef idx="2">
-            <a:schemeClr val="accent1"/>
-          </a:effectRef>
-          <a:fontRef idx="minor">
-            <a:schemeClr val="lt1"/>
-          </a:fontRef>
-        </p:style>
-        <p:txBody>
-          <a:bodyPr rtlCol="0" anchor="ctr"/>
-          <a:lstStyle/>
-          <a:p>
-            <a:pPr algn="ctr"/>
-          </a:p>
-        </p:txBody>
-      </p:sp>
-      <p:sp>
-        <p:nvSpPr>
-          <p:cNvPr id="13" name="TextBox 12"/>
-          <p:cNvSpPr txBox="1"/>
-          <p:nvPr/>
-        </p:nvSpPr>
-        <p:spPr>
-          <a:xfrm>
-            <a:off x="777240" y="3831336"/>
-            <a:ext cx="10774375" cy="822959"/>
-          </a:xfrm>
-          <a:prstGeom prst="rect">
-            <a:avLst/>
-          </a:prstGeom>
-          <a:noFill/>
-        </p:spPr>
-        <p:txBody>
-          <a:bodyPr wrap="square">
-            <a:spAutoFit/>
-          </a:bodyPr>
-          <a:lstStyle/>
-          <a:p>
-            <a:r>
-              <a:rPr sz="1200" b="1" i="0">
-                <a:solidFill>
-                  <a:srgbClr val="A02030"/>
-                </a:solidFill>
-                <a:latin typeface="Calibri"/>
-              </a:rPr>
-              <a:t>Atención</a:t>
-            </a:r>
-          </a:p>
-          <a:p>
-            <a:pPr>
-              <a:spcBef>
-                <a:spcPts val="400"/>
-              </a:spcBef>
-            </a:pPr>
-            <a:r>
-              <a:rPr sz="1400" b="0" i="0">
-                <a:solidFill>
-                  <a:srgbClr val="333333"/>
-                </a:solidFill>
-                <a:latin typeface="Calibri"/>
-              </a:rPr>
-              <a:t>Si el docente asigna taller esta semana, él indica el canal y la fecha.</a:t>
-            </a:r>
-          </a:p>
-        </p:txBody>
-      </p:sp>
-      <p:sp>
-        <p:nvSpPr>
-          <p:cNvPr id="14" name="TextBox 13"/>
-          <p:cNvSpPr txBox="1"/>
-          <p:nvPr/>
-        </p:nvSpPr>
-        <p:spPr>
-          <a:xfrm>
-            <a:off x="11185855" y="6473952"/>
-            <a:ext cx="640080" cy="274320"/>
-          </a:xfrm>
-          <a:prstGeom prst="rect">
-            <a:avLst/>
-          </a:prstGeom>
-          <a:noFill/>
-        </p:spPr>
-        <p:txBody>
-          <a:bodyPr wrap="square">
-            <a:spAutoFit/>
-          </a:bodyPr>
-          <a:lstStyle/>
-          <a:p>
-            <a:pPr algn="r"/>
-            <a:r>
-              <a:rPr sz="1100" b="0" i="0">
-                <a:solidFill>
-                  <a:srgbClr val="666666"/>
-                </a:solidFill>
-                <a:latin typeface="Calibri"/>
-              </a:rPr>
-              <a:t>51</a:t>
-            </a:r>
-          </a:p>
-        </p:txBody>
-      </p:sp>
-    </p:spTree>
-  </p:cSld>
-  <p:clrMapOvr>
-    <a:masterClrMapping/>
-  </p:clrMapOvr>
-</p:sld>
-</file>
-
-<file path=ppt/slides/slide52.xml><?xml version="1.0" encoding="utf-8"?>
-<p:sld xmlns:a="http://schemas.openxmlformats.org/drawingml/2006/main" xmlns:p="http://schemas.openxmlformats.org/presentationml/2006/main" xmlns:r="http://schemas.openxmlformats.org/officeDocument/2006/relationships">
-  <p:cSld>
-    <p:bg>
-      <p:bgPr>
-        <a:solidFill>
-          <a:srgbClr val="FFFFFF"/>
-        </a:solidFill>
-        <a:effectLst/>
-      </p:bgPr>
-    </p:bg>
-    <p:spTree>
-      <p:nvGrpSpPr>
-        <p:cNvPr id="1" name=""/>
-        <p:cNvGrpSpPr/>
-        <p:nvPr/>
-      </p:nvGrpSpPr>
-      <p:grpSpPr/>
-      <p:sp>
-        <p:nvSpPr>
-          <p:cNvPr id="2" name="Rectangle 1"/>
-          <p:cNvSpPr/>
-          <p:nvPr/>
-        </p:nvSpPr>
-        <p:spPr>
-          <a:xfrm>
-            <a:off x="0" y="0"/>
-            <a:ext cx="12191695" cy="164592"/>
-          </a:xfrm>
-          <a:prstGeom prst="rect">
-            <a:avLst/>
-          </a:prstGeom>
-          <a:solidFill>
-            <a:srgbClr val="269CCB"/>
-          </a:solidFill>
-          <a:ln>
-            <a:noFill/>
-          </a:ln>
-        </p:spPr>
-        <p:style>
-          <a:lnRef idx="1">
-            <a:schemeClr val="accent1"/>
-          </a:lnRef>
-          <a:fillRef idx="3">
-            <a:schemeClr val="accent1"/>
-          </a:fillRef>
-          <a:effectRef idx="2">
-            <a:schemeClr val="accent1"/>
-          </a:effectRef>
-          <a:fontRef idx="minor">
-            <a:schemeClr val="lt1"/>
-          </a:fontRef>
-        </p:style>
-        <p:txBody>
-          <a:bodyPr rtlCol="0" anchor="ctr"/>
-          <a:lstStyle/>
-          <a:p>
-            <a:pPr algn="ctr"/>
-          </a:p>
-        </p:txBody>
-      </p:sp>
-      <p:pic>
-        <p:nvPicPr>
-          <p:cNvPr id="3" name="Picture 2" descr="logo_uniajc_color.png"/>
-          <p:cNvPicPr>
-            <a:picLocks noChangeAspect="1"/>
-          </p:cNvPicPr>
-          <p:nvPr/>
-        </p:nvPicPr>
-        <p:blipFill>
-          <a:blip r:embed="rId2"/>
-          <a:stretch>
-            <a:fillRect/>
-          </a:stretch>
-        </p:blipFill>
-        <p:spPr>
-          <a:xfrm>
-            <a:off x="10271455" y="5998464"/>
-            <a:ext cx="1463040" cy="643233"/>
-          </a:xfrm>
-          <a:prstGeom prst="rect">
-            <a:avLst/>
-          </a:prstGeom>
-        </p:spPr>
-      </p:pic>
-      <p:sp>
-        <p:nvSpPr>
-          <p:cNvPr id="4" name="TextBox 3"/>
-          <p:cNvSpPr txBox="1"/>
-          <p:nvPr/>
-        </p:nvSpPr>
-        <p:spPr>
-          <a:xfrm>
-            <a:off x="457200" y="1737360"/>
-            <a:ext cx="11277295" cy="1097280"/>
-          </a:xfrm>
-          <a:prstGeom prst="rect">
-            <a:avLst/>
-          </a:prstGeom>
-          <a:noFill/>
-        </p:spPr>
-        <p:txBody>
-          <a:bodyPr wrap="square" anchor="ctr"/>
-          <a:lstStyle/>
-          <a:p>
-            <a:pPr algn="ctr"/>
-            <a:r>
-              <a:rPr sz="3400" b="1" i="0">
-                <a:solidFill>
-                  <a:srgbClr val="095292"/>
-                </a:solidFill>
-                <a:latin typeface="Calibri"/>
-              </a:rPr>
-              <a:t>Clase 2 · VetCare avanza</a:t>
-            </a:r>
-          </a:p>
-        </p:txBody>
-      </p:sp>
-      <p:sp>
-        <p:nvSpPr>
-          <p:cNvPr id="5" name="TextBox 4"/>
-          <p:cNvSpPr txBox="1"/>
-          <p:nvPr/>
-        </p:nvSpPr>
-        <p:spPr>
-          <a:xfrm>
-            <a:off x="457200" y="3017520"/>
-            <a:ext cx="11277295" cy="1645920"/>
-          </a:xfrm>
-          <a:prstGeom prst="rect">
-            <a:avLst/>
-          </a:prstGeom>
-          <a:noFill/>
-        </p:spPr>
-        <p:txBody>
-          <a:bodyPr wrap="square">
-            <a:spAutoFit/>
-          </a:bodyPr>
-          <a:lstStyle/>
-          <a:p>
-            <a:pPr algn="ctr">
-              <a:spcAft>
-                <a:spcPts val="600"/>
-              </a:spcAft>
-            </a:pPr>
-            <a:r>
-              <a:rPr sz="1600" b="0" i="0">
-                <a:solidFill>
-                  <a:srgbClr val="333333"/>
-                </a:solidFill>
-                <a:latin typeface="Calibri"/>
-              </a:rPr>
-              <a:t>Plan de roles/privilegios de VetCare</a:t>
-            </a:r>
-          </a:p>
-          <a:p>
-            <a:pPr algn="ctr">
-              <a:spcAft>
-                <a:spcPts val="600"/>
-              </a:spcAft>
-            </a:pPr>
-            <a:r>
-              <a:rPr sz="1600" b="0" i="0">
-                <a:solidFill>
-                  <a:srgbClr val="333333"/>
-                </a:solidFill>
-                <a:latin typeface="Calibri"/>
-              </a:rPr>
-              <a:t>Entregable: Documento Roles_VetCare + script GRANT/REVOKE ejecutado en la plataforma del curso</a:t>
-            </a:r>
-          </a:p>
-          <a:p>
-            <a:pPr algn="ctr">
-              <a:spcAft>
-                <a:spcPts val="600"/>
-              </a:spcAft>
-            </a:pPr>
-            <a:r>
-              <a:rPr sz="1600" b="0" i="0">
-                <a:solidFill>
-                  <a:srgbClr val="333333"/>
-                </a:solidFill>
-                <a:latin typeface="Calibri"/>
-              </a:rPr>
-              <a:t>Siguiente clase: continuar el hilo del PI segun plan</a:t>
-            </a:r>
-          </a:p>
-        </p:txBody>
-      </p:sp>
-      <p:sp>
-        <p:nvSpPr>
-          <p:cNvPr id="6" name="TextBox 5"/>
-          <p:cNvSpPr txBox="1"/>
-          <p:nvPr/>
-        </p:nvSpPr>
-        <p:spPr>
-          <a:xfrm>
-            <a:off x="457200" y="4754880"/>
-            <a:ext cx="11277295" cy="640080"/>
-          </a:xfrm>
-          <a:prstGeom prst="rect">
-            <a:avLst/>
-          </a:prstGeom>
-          <a:noFill/>
-        </p:spPr>
-        <p:txBody>
-          <a:bodyPr wrap="square">
-            <a:spAutoFit/>
-          </a:bodyPr>
-          <a:lstStyle/>
-          <a:p>
-            <a:pPr algn="ctr"/>
-            <a:r>
-              <a:rPr sz="2000" b="1" i="0">
-                <a:solidFill>
-                  <a:srgbClr val="269CCB"/>
-                </a:solidFill>
-                <a:latin typeface="Calibri"/>
-              </a:rPr>
-              <a:t>Teoria breve · practica = PI</a:t>
             </a:r>
           </a:p>
         </p:txBody>
@@ -23284,4 +19719,324 @@
   </a:objectDefaults>
   <a:extraClrSchemeLst/>
 </a:theme>
+</file>
+
+<file path=ppt/theme/theme2.xml><?xml version="1.0" encoding="utf-8"?>
+<a:theme xmlns:a="http://schemas.openxmlformats.org/drawingml/2006/main" name="Office Theme">
+  <a:themeElements>
+    <a:clrScheme name="Office">
+      <a:dk1>
+        <a:sysClr val="windowText" lastClr="000000"/>
+      </a:dk1>
+      <a:lt1>
+        <a:sysClr val="window" lastClr="FFFFFF"/>
+      </a:lt1>
+      <a:dk2>
+        <a:srgbClr val="1F497D"/>
+      </a:dk2>
+      <a:lt2>
+        <a:srgbClr val="EEECE1"/>
+      </a:lt2>
+      <a:accent1>
+        <a:srgbClr val="4F81BD"/>
+      </a:accent1>
+      <a:accent2>
+        <a:srgbClr val="C0504D"/>
+      </a:accent2>
+      <a:accent3>
+        <a:srgbClr val="9BBB59"/>
+      </a:accent3>
+      <a:accent4>
+        <a:srgbClr val="8064A2"/>
+      </a:accent4>
+      <a:accent5>
+        <a:srgbClr val="4BACC6"/>
+      </a:accent5>
+      <a:accent6>
+        <a:srgbClr val="F79646"/>
+      </a:accent6>
+      <a:hlink>
+        <a:srgbClr val="0000FF"/>
+      </a:hlink>
+      <a:folHlink>
+        <a:srgbClr val="800080"/>
+      </a:folHlink>
+    </a:clrScheme>
+    <a:fontScheme name="Office">
+      <a:majorFont>
+        <a:latin typeface="Calibri"/>
+        <a:ea typeface=""/>
+        <a:cs typeface=""/>
+        <a:font script="Jpan" typeface="ＭＳ Ｐゴシック"/>
+        <a:font script="Hang" typeface="맑은 고딕"/>
+        <a:font script="Hans" typeface="宋体"/>
+        <a:font script="Hant" typeface="新細明體"/>
+        <a:font script="Arab" typeface="Times New Roman"/>
+        <a:font script="Hebr" typeface="Times New Roman"/>
+        <a:font script="Thai" typeface="Angsana New"/>
+        <a:font script="Ethi" typeface="Nyala"/>
+        <a:font script="Beng" typeface="Vrinda"/>
+        <a:font script="Gujr" typeface="Shruti"/>
+        <a:font script="Khmr" typeface="MoolBoran"/>
+        <a:font script="Knda" typeface="Tunga"/>
+        <a:font script="Guru" typeface="Raavi"/>
+        <a:font script="Cans" typeface="Euphemia"/>
+        <a:font script="Cher" typeface="Plantagenet Cherokee"/>
+        <a:font script="Yiii" typeface="Microsoft Yi Baiti"/>
+        <a:font script="Tibt" typeface="Microsoft Himalaya"/>
+        <a:font script="Thaa" typeface="MV Boli"/>
+        <a:font script="Deva" typeface="Mangal"/>
+        <a:font script="Telu" typeface="Gautami"/>
+        <a:font script="Taml" typeface="Latha"/>
+        <a:font script="Syrc" typeface="Estrangelo Edessa"/>
+        <a:font script="Orya" typeface="Kalinga"/>
+        <a:font script="Mlym" typeface="Kartika"/>
+        <a:font script="Laoo" typeface="DokChampa"/>
+        <a:font script="Sinh" typeface="Iskoola Pota"/>
+        <a:font script="Mong" typeface="Mongolian Baiti"/>
+        <a:font script="Viet" typeface="Times New Roman"/>
+        <a:font script="Uigh" typeface="Microsoft Uighur"/>
+        <a:font script="Geor" typeface="Sylfaen"/>
+      </a:majorFont>
+      <a:minorFont>
+        <a:latin typeface="Calibri"/>
+        <a:ea typeface=""/>
+        <a:cs typeface=""/>
+        <a:font script="Jpan" typeface="ＭＳ Ｐゴシック"/>
+        <a:font script="Hang" typeface="맑은 고딕"/>
+        <a:font script="Hans" typeface="宋体"/>
+        <a:font script="Hant" typeface="新細明體"/>
+        <a:font script="Arab" typeface="Arial"/>
+        <a:font script="Hebr" typeface="Arial"/>
+        <a:font script="Thai" typeface="Cordia New"/>
+        <a:font script="Ethi" typeface="Nyala"/>
+        <a:font script="Beng" typeface="Vrinda"/>
+        <a:font script="Gujr" typeface="Shruti"/>
+        <a:font script="Khmr" typeface="DaunPenh"/>
+        <a:font script="Knda" typeface="Tunga"/>
+        <a:font script="Guru" typeface="Raavi"/>
+        <a:font script="Cans" typeface="Euphemia"/>
+        <a:font script="Cher" typeface="Plantagenet Cherokee"/>
+        <a:font script="Yiii" typeface="Microsoft Yi Baiti"/>
+        <a:font script="Tibt" typeface="Microsoft Himalaya"/>
+        <a:font script="Thaa" typeface="MV Boli"/>
+        <a:font script="Deva" typeface="Mangal"/>
+        <a:font script="Telu" typeface="Gautami"/>
+        <a:font script="Taml" typeface="Latha"/>
+        <a:font script="Syrc" typeface="Estrangelo Edessa"/>
+        <a:font script="Orya" typeface="Kalinga"/>
+        <a:font script="Mlym" typeface="Kartika"/>
+        <a:font script="Laoo" typeface="DokChampa"/>
+        <a:font script="Sinh" typeface="Iskoola Pota"/>
+        <a:font script="Mong" typeface="Mongolian Baiti"/>
+        <a:font script="Viet" typeface="Arial"/>
+        <a:font script="Uigh" typeface="Microsoft Uighur"/>
+        <a:font script="Geor" typeface="Sylfaen"/>
+      </a:minorFont>
+    </a:fontScheme>
+    <a:fmtScheme name="Office">
+      <a:fillStyleLst>
+        <a:solidFill>
+          <a:schemeClr val="phClr"/>
+        </a:solidFill>
+        <a:gradFill rotWithShape="1">
+          <a:gsLst>
+            <a:gs pos="0">
+              <a:schemeClr val="phClr">
+                <a:tint val="50000"/>
+                <a:satMod val="300000"/>
+              </a:schemeClr>
+            </a:gs>
+            <a:gs pos="35000">
+              <a:schemeClr val="phClr">
+                <a:tint val="37000"/>
+                <a:satMod val="300000"/>
+              </a:schemeClr>
+            </a:gs>
+            <a:gs pos="100000">
+              <a:schemeClr val="phClr">
+                <a:tint val="15000"/>
+                <a:satMod val="350000"/>
+              </a:schemeClr>
+            </a:gs>
+          </a:gsLst>
+          <a:lin ang="16200000" scaled="1"/>
+        </a:gradFill>
+        <a:gradFill rotWithShape="1">
+          <a:gsLst>
+            <a:gs pos="0">
+              <a:schemeClr val="phClr">
+                <a:tint val="100000"/>
+                <a:shade val="100000"/>
+                <a:satMod val="130000"/>
+              </a:schemeClr>
+            </a:gs>
+            <a:gs pos="100000">
+              <a:schemeClr val="phClr">
+                <a:tint val="50000"/>
+                <a:shade val="100000"/>
+                <a:satMod val="350000"/>
+              </a:schemeClr>
+            </a:gs>
+          </a:gsLst>
+          <a:lin ang="16200000" scaled="0"/>
+        </a:gradFill>
+      </a:fillStyleLst>
+      <a:lnStyleLst>
+        <a:ln w="9525" cap="flat" cmpd="sng" algn="ctr">
+          <a:solidFill>
+            <a:schemeClr val="phClr">
+              <a:shade val="95000"/>
+              <a:satMod val="105000"/>
+            </a:schemeClr>
+          </a:solidFill>
+          <a:prstDash val="solid"/>
+        </a:ln>
+        <a:ln w="25400" cap="flat" cmpd="sng" algn="ctr">
+          <a:solidFill>
+            <a:schemeClr val="phClr"/>
+          </a:solidFill>
+          <a:prstDash val="solid"/>
+        </a:ln>
+        <a:ln w="38100" cap="flat" cmpd="sng" algn="ctr">
+          <a:solidFill>
+            <a:schemeClr val="phClr"/>
+          </a:solidFill>
+          <a:prstDash val="solid"/>
+        </a:ln>
+      </a:lnStyleLst>
+      <a:effectStyleLst>
+        <a:effectStyle>
+          <a:effectLst>
+            <a:outerShdw blurRad="40000" dist="20000" dir="5400000" rotWithShape="0">
+              <a:srgbClr val="000000">
+                <a:alpha val="38000"/>
+              </a:srgbClr>
+            </a:outerShdw>
+          </a:effectLst>
+        </a:effectStyle>
+        <a:effectStyle>
+          <a:effectLst>
+            <a:outerShdw blurRad="40000" dist="23000" dir="5400000" rotWithShape="0">
+              <a:srgbClr val="000000">
+                <a:alpha val="35000"/>
+              </a:srgbClr>
+            </a:outerShdw>
+          </a:effectLst>
+        </a:effectStyle>
+        <a:effectStyle>
+          <a:effectLst>
+            <a:outerShdw blurRad="40000" dist="23000" dir="5400000" rotWithShape="0">
+              <a:srgbClr val="000000">
+                <a:alpha val="35000"/>
+              </a:srgbClr>
+            </a:outerShdw>
+          </a:effectLst>
+          <a:scene3d>
+            <a:camera prst="orthographicFront">
+              <a:rot lat="0" lon="0" rev="0"/>
+            </a:camera>
+            <a:lightRig rig="threePt" dir="t">
+              <a:rot lat="0" lon="0" rev="1200000"/>
+            </a:lightRig>
+          </a:scene3d>
+          <a:sp3d>
+            <a:bevelT w="63500" h="25400"/>
+          </a:sp3d>
+        </a:effectStyle>
+      </a:effectStyleLst>
+      <a:bgFillStyleLst>
+        <a:solidFill>
+          <a:schemeClr val="phClr"/>
+        </a:solidFill>
+        <a:gradFill rotWithShape="1">
+          <a:gsLst>
+            <a:gs pos="0">
+              <a:schemeClr val="phClr">
+                <a:tint val="40000"/>
+                <a:satMod val="350000"/>
+              </a:schemeClr>
+            </a:gs>
+            <a:gs pos="40000">
+              <a:schemeClr val="phClr">
+                <a:tint val="45000"/>
+                <a:shade val="99000"/>
+                <a:satMod val="350000"/>
+              </a:schemeClr>
+            </a:gs>
+            <a:gs pos="100000">
+              <a:schemeClr val="phClr">
+                <a:shade val="20000"/>
+                <a:satMod val="255000"/>
+              </a:schemeClr>
+            </a:gs>
+          </a:gsLst>
+          <a:path path="circle">
+            <a:fillToRect l="50000" t="-80000" r="50000" b="180000"/>
+          </a:path>
+        </a:gradFill>
+        <a:gradFill rotWithShape="1">
+          <a:gsLst>
+            <a:gs pos="0">
+              <a:schemeClr val="phClr">
+                <a:tint val="80000"/>
+                <a:satMod val="300000"/>
+              </a:schemeClr>
+            </a:gs>
+            <a:gs pos="100000">
+              <a:schemeClr val="phClr">
+                <a:shade val="30000"/>
+                <a:satMod val="200000"/>
+              </a:schemeClr>
+            </a:gs>
+          </a:gsLst>
+          <a:path path="circle">
+            <a:fillToRect l="50000" t="50000" r="50000" b="50000"/>
+          </a:path>
+        </a:gradFill>
+      </a:bgFillStyleLst>
+    </a:fmtScheme>
+  </a:themeElements>
+  <a:objectDefaults>
+    <a:spDef>
+      <a:spPr/>
+      <a:bodyPr/>
+      <a:lstStyle/>
+      <a:style>
+        <a:lnRef idx="1">
+          <a:schemeClr val="accent1"/>
+        </a:lnRef>
+        <a:fillRef idx="3">
+          <a:schemeClr val="accent1"/>
+        </a:fillRef>
+        <a:effectRef idx="2">
+          <a:schemeClr val="accent1"/>
+        </a:effectRef>
+        <a:fontRef idx="minor">
+          <a:schemeClr val="lt1"/>
+        </a:fontRef>
+      </a:style>
+    </a:spDef>
+    <a:lnDef>
+      <a:spPr/>
+      <a:bodyPr/>
+      <a:lstStyle/>
+      <a:style>
+        <a:lnRef idx="2">
+          <a:schemeClr val="accent1"/>
+        </a:lnRef>
+        <a:fillRef idx="0">
+          <a:schemeClr val="accent1"/>
+        </a:fillRef>
+        <a:effectRef idx="1">
+          <a:schemeClr val="accent1"/>
+        </a:effectRef>
+        <a:fontRef idx="minor">
+          <a:schemeClr val="tx1"/>
+        </a:fontRef>
+      </a:style>
+    </a:lnDef>
+  </a:objectDefaults>
+  <a:extraClrSchemeLst/>
+</a:theme>
 </file>
--- a/Bases de Datos II/Clases/Clase 2 - Administracion de bases de datos/Presentacion.pptx
+++ b/Bases de Datos II/Clases/Clase 2 - Administracion de bases de datos/Presentacion.pptx
@@ -615,12 +615,28 @@
           <a:lstStyle/>
           <a:p>
             <a:r>
-              <a:t>Vale explicar por que se usa role_table_grants y no table_privileges, que es la que aparece primero al buscar: table_privileges solo muestra los privilegios en los que el usuario actual es quien otorga o quien recibe, mientras que role_table_grants incluye los de cualquier rol que este habilitado en la sesion, que es justamente lo que necesita el propietario para auditar lo que reparti.</a:t>
-            </a:r>
-          </a:p>
-          <a:p>
-            <a:r>
-              <a:t>Estas dos consultas son la evidencia que la rubrica exige tres veces, y el docente deberia proyectar su salida en la demo: ver la matriz salir del motor, y no de un documento, es lo que convence al grupo de que los permisos son verificables.</a:t>
+              <a:t>Fuera de la lamina (habla de la practica, no del tema):</a:t>
+            </a:r>
+          </a:p>
+          <a:p>
+            <a:r>
+              <a:t>- Aqui esta el concepto que hace la diferencia entre una matriz de aficionado y una defendible, y es la parte que el taller evalua con veinte puntos.</a:t>
+            </a:r>
+          </a:p>
+          <a:p/>
+          <a:p>
+            <a:r>
+              <a:t>Pero la recepcionista solo necesita el nombre y el telefono para identificar a quien llama, y no tiene por que ver el correo electronico de los clientes.</a:t>
+            </a:r>
+          </a:p>
+          <a:p>
+            <a:r>
+              <a:t>El primero es la vista.</a:t>
+            </a:r>
+          </a:p>
+          <a:p>
+            <a:r>
+              <a:t>Lo que hace que funcione, y es el punto que el estudiante no cree hasta que lo ve, es que la consulta de la vista se ejecuta con los privilegios de su PROPIETARIO y no con los de quien la consulta: por eso se puede dar SELECT sobre la vista a recepcion y al mismo tiempo hacer REVOKE SELECT ON dueno FROM recepcion, y el rol sigue viendo el telefono del dueno a traves de la vista pero no puede consultar la tabla directamente.</a:t>
             </a:r>
           </a:p>
         </p:txBody>
@@ -690,17 +706,12 @@
           <a:lstStyle/>
           <a:p>
             <a:r>
-              <a:t>La diapositiva trae las cinco secciones en el mismo orden en que el taller las va a pedir, asi que se dicta recorriendola de arriba abajo.</a:t>
-            </a:r>
-          </a:p>
-          <a:p>
-            <a:r>
-              <a:t>Dos reglas la cierran.</a:t>
-            </a:r>
-          </a:p>
-          <a:p>
-            <a:r>
-              <a:t>Vale la pena senalar el detalle tecnico de la baja: en PostgreSQL no se puede hacer DROP ROLE de un rol que todavia posee objetos, hay que reasignarlos primero con REASSIGN OWNED BY ana_gomez TO admin_bd, y por eso la politica tiene que decir que pasa con lo que la persona era dueno.</a:t>
+              <a:t>Vale explicar por que se usa role_table_grants y no table_privileges, que es la que aparece primero al buscar: table_privileges solo muestra los privilegios en los que el usuario actual es quien otorga o quien recibe, mientras que role_table_grants incluye los de cualquier rol que este habilitado en la sesion, que es justamente lo que necesita el propietario para auditar lo que reparti.</a:t>
+            </a:r>
+          </a:p>
+          <a:p>
+            <a:r>
+              <a:t>Estas dos consultas son la evidencia que la rubrica exige tres veces, y el docente deberia proyectar su salida en la demo: ver la matriz salir del motor, y no de un documento, es lo que convence al grupo de que los permisos son verificables.</a:t>
             </a:r>
           </a:p>
         </p:txBody>
@@ -770,37 +781,17 @@
           <a:lstStyle/>
           <a:p>
             <a:r>
-              <a:t>El taller se resuelve y se califica en ExamLab, que ejecuta PostgreSQL dentro del navegador.</a:t>
-            </a:r>
-          </a:p>
-          <a:p>
-            <a:r>
-              <a:t>Ahi CREATE ROLE, GRANT, REVOKE, CREATE VIEW, los privilegios por columna y las consultas a information_schema funcionan todos: son DDL real y son verificables, asi que la evidencia del taller es la salida del motor y no una promesa.</a:t>
-            </a:r>
-          </a:p>
-          <a:p>
-            <a:r>
-              <a:t>Lo que NO se puede hacer es abrir una segunda conexion: el entorno tiene un solo usuario con login y una sola sesion, asi que nadie va a conectarse como recepcion en otra pestana mientras el docente mira desde la suya.</a:t>
-            </a:r>
-          </a:p>
-          <a:p>
-            <a:r>
-              <a:t>Esa es la limitacion real, y hay que nombrarla con esa precision, porque la version anterior de esta guia decia algo mas fuerte y falso: que por eso la prueba negativa era imposible.</a:t>
-            </a:r>
-          </a:p>
-          <a:p>
-            <a:r>
-              <a:t>Para ver el permiso negado no hace falta otra conexion, hace falta cambiar el rol EFECTIVO dentro de la misma sesion, y eso es lo que hace SET ROLE recepcion; a partir de esa linea los privilegios que el motor revisa son los del rol y no los del propietario, de modo que devuelve permission denied for table cita y tambien, si ya se revoco el SELECT de la tabla.</a:t>
-            </a:r>
-          </a:p>
-          <a:p>
-            <a:r>
-              <a:t>Se cierra con RESET ROLE; y conviene no olvidarlo, porque todo lo que venga despues se seguiria ejecutando con los permisos recortados.</a:t>
-            </a:r>
-          </a:p>
-          <a:p>
-            <a:r>
-              <a:t>Dos advertencias para la demo.</a:t>
+              <a:t>La diapositiva trae las cinco secciones en el mismo orden en que el taller las va a pedir, asi que se dicta recorriendola de arriba abajo.</a:t>
+            </a:r>
+          </a:p>
+          <a:p>
+            <a:r>
+              <a:t>Dos reglas la cierran.</a:t>
+            </a:r>
+          </a:p>
+          <a:p>
+            <a:r>
+              <a:t>Vale la pena senalar el detalle tecnico de la baja: en PostgreSQL no se puede hacer DROP ROLE de un rol que todavia posee objetos, hay que reasignarlos primero con REASSIGN OWNED BY ana_gomez TO admin_bd, y por eso la politica tiene que decir que pasa con lo que la persona era dueno.</a:t>
             </a:r>
           </a:p>
         </p:txBody>
@@ -870,12 +861,513 @@
           <a:lstStyle/>
           <a:p>
             <a:r>
+              <a:t>Fuera de la lamina (habla de la practica, no del tema):</a:t>
+            </a:r>
+          </a:p>
+          <a:p>
+            <a:r>
+              <a:t>- Lo que se califica ahi no es que la prueba negativa exista, sino que el estudiante sepa nombrarla como brecha de verificacion de su propia entrega.</a:t>
+            </a:r>
+          </a:p>
+        </p:txBody>
+      </p:sp>
+      <p:sp>
+        <p:nvSpPr>
+          <p:cNvPr id="4" name="Slide Number Placeholder 3"/>
+          <p:cNvSpPr>
+            <a:spLocks noGrp="1"/>
+          </p:cNvSpPr>
+          <p:nvPr>
+            <p:ph type="sldNum" idx="5" sz="quarter"/>
+          </p:nvPr>
+        </p:nvSpPr>
+        <p:spPr/>
+      </p:sp>
+    </p:spTree>
+  </p:cSld>
+  <p:clrMapOvr>
+    <a:masterClrMapping/>
+  </p:clrMapOvr>
+</p:notes>
+</file>
+
+<file path=ppt/notesSlides/notesSlide14.xml><?xml version="1.0" encoding="utf-8"?>
+<p:notes xmlns:a="http://schemas.openxmlformats.org/drawingml/2006/main" xmlns:p="http://schemas.openxmlformats.org/presentationml/2006/main" xmlns:r="http://schemas.openxmlformats.org/officeDocument/2006/relationships">
+  <p:cSld>
+    <p:spTree>
+      <p:nvGrpSpPr>
+        <p:cNvPr id="1" name=""/>
+        <p:cNvGrpSpPr/>
+        <p:nvPr/>
+      </p:nvGrpSpPr>
+      <p:grpSpPr>
+        <a:xfrm>
+          <a:off x="0" y="0"/>
+          <a:ext cx="0" cy="0"/>
+          <a:chOff x="0" y="0"/>
+          <a:chExt cx="0" cy="0"/>
+        </a:xfrm>
+      </p:grpSpPr>
+      <p:sp>
+        <p:nvSpPr>
+          <p:cNvPr id="2" name="Slide Image Placeholder 1"/>
+          <p:cNvSpPr>
+            <a:spLocks noGrp="1"/>
+          </p:cNvSpPr>
+          <p:nvPr>
+            <p:ph type="sldImg" idx="2"/>
+          </p:nvPr>
+        </p:nvSpPr>
+        <p:spPr/>
+      </p:sp>
+      <p:sp>
+        <p:nvSpPr>
+          <p:cNvPr id="3" name="Notes Placeholder 2"/>
+          <p:cNvSpPr>
+            <a:spLocks noGrp="1"/>
+          </p:cNvSpPr>
+          <p:nvPr>
+            <p:ph type="body" idx="3" sz="quarter"/>
+          </p:nvPr>
+        </p:nvSpPr>
+        <p:spPr/>
+        <p:txBody>
+          <a:bodyPr/>
+          <a:lstStyle/>
+          <a:p>
+            <a:r>
+              <a:t>Fuera de la lamina (habla de la practica, no del tema):</a:t>
+            </a:r>
+          </a:p>
+          <a:p>
+            <a:r>
+              <a:t>- Una politica que no dice quien firma ni en cuanto tiempo no es una politica, es una intencion, y asi esta escrita la rubrica.</a:t>
+            </a:r>
+          </a:p>
+        </p:txBody>
+      </p:sp>
+      <p:sp>
+        <p:nvSpPr>
+          <p:cNvPr id="4" name="Slide Number Placeholder 3"/>
+          <p:cNvSpPr>
+            <a:spLocks noGrp="1"/>
+          </p:cNvSpPr>
+          <p:nvPr>
+            <p:ph type="sldNum" idx="5" sz="quarter"/>
+          </p:nvPr>
+        </p:nvSpPr>
+        <p:spPr/>
+      </p:sp>
+    </p:spTree>
+  </p:cSld>
+  <p:clrMapOvr>
+    <a:masterClrMapping/>
+  </p:clrMapOvr>
+</p:notes>
+</file>
+
+<file path=ppt/notesSlides/notesSlide15.xml><?xml version="1.0" encoding="utf-8"?>
+<p:notes xmlns:a="http://schemas.openxmlformats.org/drawingml/2006/main" xmlns:p="http://schemas.openxmlformats.org/presentationml/2006/main" xmlns:r="http://schemas.openxmlformats.org/officeDocument/2006/relationships">
+  <p:cSld>
+    <p:spTree>
+      <p:nvGrpSpPr>
+        <p:cNvPr id="1" name=""/>
+        <p:cNvGrpSpPr/>
+        <p:nvPr/>
+      </p:nvGrpSpPr>
+      <p:grpSpPr>
+        <a:xfrm>
+          <a:off x="0" y="0"/>
+          <a:ext cx="0" cy="0"/>
+          <a:chOff x="0" y="0"/>
+          <a:chExt cx="0" cy="0"/>
+        </a:xfrm>
+      </p:grpSpPr>
+      <p:sp>
+        <p:nvSpPr>
+          <p:cNvPr id="2" name="Slide Image Placeholder 1"/>
+          <p:cNvSpPr>
+            <a:spLocks noGrp="1"/>
+          </p:cNvSpPr>
+          <p:nvPr>
+            <p:ph type="sldImg" idx="2"/>
+          </p:nvPr>
+        </p:nvSpPr>
+        <p:spPr/>
+      </p:sp>
+      <p:sp>
+        <p:nvSpPr>
+          <p:cNvPr id="3" name="Notes Placeholder 2"/>
+          <p:cNvSpPr>
+            <a:spLocks noGrp="1"/>
+          </p:cNvSpPr>
+          <p:nvPr>
+            <p:ph type="body" idx="3" sz="quarter"/>
+          </p:nvPr>
+        </p:nvSpPr>
+        <p:spPr/>
+        <p:txBody>
+          <a:bodyPr/>
+          <a:lstStyle/>
+          <a:p>
+            <a:r>
+              <a:t>Fuera de la lamina (habla de la practica, no del tema):</a:t>
+            </a:r>
+          </a:p>
+          <a:p>
+            <a:r>
+              <a:t>- Este punto hay que decirlo con precision porque una version anterior de esta guia decia lo contrario y costaria puntos repetirla.</a:t>
+            </a:r>
+          </a:p>
+          <a:p>
+            <a:r>
+              <a:t>- Dos, si el entorno del dia no permite cambiar de rol, no hay que esconderlo — se muestra el mensaje, y entonces si aparece la brecha de verificacion que la pregunta 5 pide nombrar.</a:t>
+            </a:r>
+          </a:p>
+          <a:p/>
+          <a:p>
+            <a:r>
+              <a:t>Ahi CREATE ROLE, GRANT, REVOKE, CREATE VIEW, los privilegios por columna y las consultas a information_schema funcionan todos: son DDL real y son verificables, asi que la evidencia del taller es la salida del motor y no una promesa.</a:t>
+            </a:r>
+          </a:p>
+          <a:p>
+            <a:r>
+              <a:t>Lo que NO se puede hacer es abrir una segunda conexion: el entorno tiene un solo usuario con login y una sola sesion, asi que nadie va a conectarse como recepcion en otra pestana mientras el docente mira desde la suya.</a:t>
+            </a:r>
+          </a:p>
+          <a:p>
+            <a:r>
+              <a:t>Esa es la limitacion real, y hay que nombrarla con esa precision, porque la version anterior de esta guia decia algo mas fuerte y falso: que por eso la prueba negativa era imposible.</a:t>
+            </a:r>
+          </a:p>
+          <a:p>
+            <a:r>
+              <a:t>Para ver el permiso negado no hace falta otra conexion, hace falta cambiar el rol EFECTIVO dentro de la misma sesion, y eso es lo que hace SET ROLE recepcion; a partir de esa linea los privilegios que el motor revisa son los del rol y no los del propietario, de modo que devuelve permission denied for table cita y tambien, si ya se revoco el SELECT de la tabla.</a:t>
+            </a:r>
+          </a:p>
+          <a:p>
+            <a:r>
+              <a:t>Se cierra con RESET ROLE; y conviene no olvidarlo, porque todo lo que venga despues se seguiria ejecutando con los permisos recortados.</a:t>
+            </a:r>
+          </a:p>
+          <a:p>
+            <a:r>
+              <a:t>Dos advertencias para la demo.</a:t>
+            </a:r>
+          </a:p>
+        </p:txBody>
+      </p:sp>
+      <p:sp>
+        <p:nvSpPr>
+          <p:cNvPr id="4" name="Slide Number Placeholder 3"/>
+          <p:cNvSpPr>
+            <a:spLocks noGrp="1"/>
+          </p:cNvSpPr>
+          <p:nvPr>
+            <p:ph type="sldNum" idx="5" sz="quarter"/>
+          </p:nvPr>
+        </p:nvSpPr>
+        <p:spPr/>
+      </p:sp>
+    </p:spTree>
+  </p:cSld>
+  <p:clrMapOvr>
+    <a:masterClrMapping/>
+  </p:clrMapOvr>
+</p:notes>
+</file>
+
+<file path=ppt/notesSlides/notesSlide16.xml><?xml version="1.0" encoding="utf-8"?>
+<p:notes xmlns:a="http://schemas.openxmlformats.org/drawingml/2006/main" xmlns:p="http://schemas.openxmlformats.org/presentationml/2006/main" xmlns:r="http://schemas.openxmlformats.org/officeDocument/2006/relationships">
+  <p:cSld>
+    <p:spTree>
+      <p:nvGrpSpPr>
+        <p:cNvPr id="1" name=""/>
+        <p:cNvGrpSpPr/>
+        <p:nvPr/>
+      </p:nvGrpSpPr>
+      <p:grpSpPr>
+        <a:xfrm>
+          <a:off x="0" y="0"/>
+          <a:ext cx="0" cy="0"/>
+          <a:chOff x="0" y="0"/>
+          <a:chExt cx="0" cy="0"/>
+        </a:xfrm>
+      </p:grpSpPr>
+      <p:sp>
+        <p:nvSpPr>
+          <p:cNvPr id="2" name="Slide Image Placeholder 1"/>
+          <p:cNvSpPr>
+            <a:spLocks noGrp="1"/>
+          </p:cNvSpPr>
+          <p:nvPr>
+            <p:ph type="sldImg" idx="2"/>
+          </p:nvPr>
+        </p:nvSpPr>
+        <p:spPr/>
+      </p:sp>
+      <p:sp>
+        <p:nvSpPr>
+          <p:cNvPr id="3" name="Notes Placeholder 2"/>
+          <p:cNvSpPr>
+            <a:spLocks noGrp="1"/>
+          </p:cNvSpPr>
+          <p:nvPr>
+            <p:ph type="body" idx="3" sz="quarter"/>
+          </p:nvPr>
+        </p:nvSpPr>
+        <p:spPr/>
+        <p:txBody>
+          <a:bodyPr/>
+          <a:lstStyle/>
+          <a:p>
+            <a:r>
+              <a:t>Fuera de la lamina (habla de la practica, no del tema):</a:t>
+            </a:r>
+          </a:p>
+          <a:p>
+            <a:r>
+              <a:t>- Lo de hoy no es una isla, y decirlo en voz alta le da sentido al entregable.</a:t>
+            </a:r>
+          </a:p>
+          <a:p>
+            <a:r>
+              <a:t>- La Clase 4 agrega disparadores de auditoria y el plan de respaldo, que son el otro componente de este mismo criterio de rubrica.</a:t>
+            </a:r>
+          </a:p>
+          <a:p>
+            <a:r>
+              <a:t>- En la rubrica del PI, seguridad y respaldo valen 15 de los 100 puntos.</a:t>
+            </a:r>
+          </a:p>
+        </p:txBody>
+      </p:sp>
+      <p:sp>
+        <p:nvSpPr>
+          <p:cNvPr id="4" name="Slide Number Placeholder 3"/>
+          <p:cNvSpPr>
+            <a:spLocks noGrp="1"/>
+          </p:cNvSpPr>
+          <p:nvPr>
+            <p:ph type="sldNum" idx="5" sz="quarter"/>
+          </p:nvPr>
+        </p:nvSpPr>
+        <p:spPr/>
+      </p:sp>
+    </p:spTree>
+  </p:cSld>
+  <p:clrMapOvr>
+    <a:masterClrMapping/>
+  </p:clrMapOvr>
+</p:notes>
+</file>
+
+<file path=ppt/notesSlides/notesSlide17.xml><?xml version="1.0" encoding="utf-8"?>
+<p:notes xmlns:a="http://schemas.openxmlformats.org/drawingml/2006/main" xmlns:p="http://schemas.openxmlformats.org/presentationml/2006/main" xmlns:r="http://schemas.openxmlformats.org/officeDocument/2006/relationships">
+  <p:cSld>
+    <p:spTree>
+      <p:nvGrpSpPr>
+        <p:cNvPr id="1" name=""/>
+        <p:cNvGrpSpPr/>
+        <p:nvPr/>
+      </p:nvGrpSpPr>
+      <p:grpSpPr>
+        <a:xfrm>
+          <a:off x="0" y="0"/>
+          <a:ext cx="0" cy="0"/>
+          <a:chOff x="0" y="0"/>
+          <a:chExt cx="0" cy="0"/>
+        </a:xfrm>
+      </p:grpSpPr>
+      <p:sp>
+        <p:nvSpPr>
+          <p:cNvPr id="2" name="Slide Image Placeholder 1"/>
+          <p:cNvSpPr>
+            <a:spLocks noGrp="1"/>
+          </p:cNvSpPr>
+          <p:nvPr>
+            <p:ph type="sldImg" idx="2"/>
+          </p:nvPr>
+        </p:nvSpPr>
+        <p:spPr/>
+      </p:sp>
+      <p:sp>
+        <p:nvSpPr>
+          <p:cNvPr id="3" name="Notes Placeholder 2"/>
+          <p:cNvSpPr>
+            <a:spLocks noGrp="1"/>
+          </p:cNvSpPr>
+          <p:nvPr>
+            <p:ph type="body" idx="3" sz="quarter"/>
+          </p:nvPr>
+        </p:nvSpPr>
+        <p:spPr/>
+        <p:txBody>
+          <a:bodyPr/>
+          <a:lstStyle/>
+          <a:p>
+            <a:r>
               <a:t>O el rol no tiene USAGE sobre el esquema.</a:t>
             </a:r>
           </a:p>
           <a:p>
             <a:r>
               <a:t>Lo que no se puede es conectarse como recepcion en una segunda sesion, porque el entorno tiene un solo usuario con login.</a:t>
+            </a:r>
+          </a:p>
+        </p:txBody>
+      </p:sp>
+      <p:sp>
+        <p:nvSpPr>
+          <p:cNvPr id="4" name="Slide Number Placeholder 3"/>
+          <p:cNvSpPr>
+            <a:spLocks noGrp="1"/>
+          </p:cNvSpPr>
+          <p:nvPr>
+            <p:ph type="sldNum" idx="5" sz="quarter"/>
+          </p:nvPr>
+        </p:nvSpPr>
+        <p:spPr/>
+      </p:sp>
+    </p:spTree>
+  </p:cSld>
+  <p:clrMapOvr>
+    <a:masterClrMapping/>
+  </p:clrMapOvr>
+</p:notes>
+</file>
+
+<file path=ppt/notesSlides/notesSlide18.xml><?xml version="1.0" encoding="utf-8"?>
+<p:notes xmlns:a="http://schemas.openxmlformats.org/drawingml/2006/main" xmlns:p="http://schemas.openxmlformats.org/presentationml/2006/main" xmlns:r="http://schemas.openxmlformats.org/officeDocument/2006/relationships">
+  <p:cSld>
+    <p:spTree>
+      <p:nvGrpSpPr>
+        <p:cNvPr id="1" name=""/>
+        <p:cNvGrpSpPr/>
+        <p:nvPr/>
+      </p:nvGrpSpPr>
+      <p:grpSpPr>
+        <a:xfrm>
+          <a:off x="0" y="0"/>
+          <a:ext cx="0" cy="0"/>
+          <a:chOff x="0" y="0"/>
+          <a:chExt cx="0" cy="0"/>
+        </a:xfrm>
+      </p:grpSpPr>
+      <p:sp>
+        <p:nvSpPr>
+          <p:cNvPr id="2" name="Slide Image Placeholder 1"/>
+          <p:cNvSpPr>
+            <a:spLocks noGrp="1"/>
+          </p:cNvSpPr>
+          <p:nvPr>
+            <p:ph type="sldImg" idx="2"/>
+          </p:nvPr>
+        </p:nvSpPr>
+        <p:spPr/>
+      </p:sp>
+      <p:sp>
+        <p:nvSpPr>
+          <p:cNvPr id="3" name="Notes Placeholder 2"/>
+          <p:cNvSpPr>
+            <a:spLocks noGrp="1"/>
+          </p:cNvSpPr>
+          <p:nvPr>
+            <p:ph type="body" idx="3" sz="quarter"/>
+          </p:nvPr>
+        </p:nvSpPr>
+        <p:spPr/>
+        <p:txBody>
+          <a:bodyPr/>
+          <a:lstStyle/>
+          <a:p>
+            <a:r>
+              <a:t>Fuera de la lamina (habla de la practica, no del tema):</a:t>
+            </a:r>
+          </a:p>
+          <a:p>
+            <a:r>
+              <a:t>- Lo que pide el taller</a:t>
+            </a:r>
+          </a:p>
+        </p:txBody>
+      </p:sp>
+      <p:sp>
+        <p:nvSpPr>
+          <p:cNvPr id="4" name="Slide Number Placeholder 3"/>
+          <p:cNvSpPr>
+            <a:spLocks noGrp="1"/>
+          </p:cNvSpPr>
+          <p:nvPr>
+            <p:ph type="sldNum" idx="5" sz="quarter"/>
+          </p:nvPr>
+        </p:nvSpPr>
+        <p:spPr/>
+      </p:sp>
+    </p:spTree>
+  </p:cSld>
+  <p:clrMapOvr>
+    <a:masterClrMapping/>
+  </p:clrMapOvr>
+</p:notes>
+</file>
+
+<file path=ppt/notesSlides/notesSlide19.xml><?xml version="1.0" encoding="utf-8"?>
+<p:notes xmlns:a="http://schemas.openxmlformats.org/drawingml/2006/main" xmlns:p="http://schemas.openxmlformats.org/presentationml/2006/main" xmlns:r="http://schemas.openxmlformats.org/officeDocument/2006/relationships">
+  <p:cSld>
+    <p:spTree>
+      <p:nvGrpSpPr>
+        <p:cNvPr id="1" name=""/>
+        <p:cNvGrpSpPr/>
+        <p:nvPr/>
+      </p:nvGrpSpPr>
+      <p:grpSpPr>
+        <a:xfrm>
+          <a:off x="0" y="0"/>
+          <a:ext cx="0" cy="0"/>
+          <a:chOff x="0" y="0"/>
+          <a:chExt cx="0" cy="0"/>
+        </a:xfrm>
+      </p:grpSpPr>
+      <p:sp>
+        <p:nvSpPr>
+          <p:cNvPr id="2" name="Slide Image Placeholder 1"/>
+          <p:cNvSpPr>
+            <a:spLocks noGrp="1"/>
+          </p:cNvSpPr>
+          <p:nvPr>
+            <p:ph type="sldImg" idx="2"/>
+          </p:nvPr>
+        </p:nvSpPr>
+        <p:spPr/>
+      </p:sp>
+      <p:sp>
+        <p:nvSpPr>
+          <p:cNvPr id="3" name="Notes Placeholder 2"/>
+          <p:cNvSpPr>
+            <a:spLocks noGrp="1"/>
+          </p:cNvSpPr>
+          <p:nvPr>
+            <p:ph type="body" idx="3" sz="quarter"/>
+          </p:nvPr>
+        </p:nvSpPr>
+        <p:spPr/>
+        <p:txBody>
+          <a:bodyPr/>
+          <a:lstStyle/>
+          <a:p>
+            <a:r>
+              <a:t>Fuera de la lamina (habla de la practica, no del tema):</a:t>
+            </a:r>
+          </a:p>
+          <a:p>
+            <a:r>
+              <a:t>- Si el entorno no deja cambiar de rol, se documenta el intento: eso es una brecha de verificacion del entregable.</a:t>
+            </a:r>
+          </a:p>
+          <a:p>
+            <a:r>
+              <a:t>- La politica es lo que le pone responsable y plazo a cada uno: son las 5 secciones del entregable</a:t>
             </a:r>
           </a:p>
         </p:txBody>
@@ -945,32 +1437,12 @@
           <a:lstStyle/>
           <a:p>
             <a:r>
-              <a:t>EXECUTE sobre una funcion o un procedimiento</a:t>
-            </a:r>
-          </a:p>
-          <a:p>
-            <a:r>
-              <a:t>USAGE sobre un esquema o una secuencia</a:t>
-            </a:r>
-          </a:p>
-          <a:p>
-            <a:r>
-              <a:t>CONNECT y TEMPORARY sobre la base de datos.</a:t>
-            </a:r>
-          </a:p>
-          <a:p>
-            <a:r>
-              <a:t>Vale la pena decirlo porque el estudiante que busque en internet va a encontrar GRANT CREATE SESSION, que es sintaxis de Oracle y en PostgreSQL no existe.</a:t>
-            </a:r>
-          </a:p>
-          <a:p>
-            <a:r>
-              <a:t>La distincion practica que hay que dejar clara es la que separa DDL de DML.</a:t>
-            </a:r>
-          </a:p>
-          <a:p>
-            <a:r>
-              <a:t>Si su cuenta puede ejecutar DROP TABLE cita, un error de copiar y pegar borra la agenda completa, y ningun respaldo de la noche anterior devuelve las citas que se agendaron hoy.</a:t>
+              <a:t>Fuera de la lamina (habla de la practica, no del tema):</a:t>
+            </a:r>
+          </a:p>
+          <a:p>
+            <a:r>
+              <a:t>- Esta clase se dicta en sesion virtual sincrona, en el bloque normal de 120 minutos: hay explicacion en vivo, taller acompanado y espacio para preguntar, asi que este texto es el material con el que el docente dicta y no una lectura que sustituya la clase.</a:t>
             </a:r>
           </a:p>
         </p:txBody>
@@ -1040,17 +1512,32 @@
           <a:lstStyle/>
           <a:p>
             <a:r>
-              <a:t>Existe por una razon aritmetica que conviene poner en el tablero con los numeros de VetCare.</a:t>
-            </a:r>
-          </a:p>
-          <a:p>
-            <a:r>
-              <a:t>Sobre cada uno hay hasta cinco acciones posibles, asi que la matriz completa tiene cincuenta celdas.</a:t>
-            </a:r>
-          </a:p>
-          <a:p>
-            <a:r>
-              <a:t>Ese es el argumento real que el docente debe transmitir: el rol no ahorra tipeo, ahorra olvidos, y los olvidos en materia de permisos son precisamente los que producen incidentes de seguridad.</a:t>
+              <a:t>EXECUTE sobre una funcion o un procedimiento</a:t>
+            </a:r>
+          </a:p>
+          <a:p>
+            <a:r>
+              <a:t>USAGE sobre un esquema o una secuencia</a:t>
+            </a:r>
+          </a:p>
+          <a:p>
+            <a:r>
+              <a:t>CONNECT y TEMPORARY sobre la base de datos.</a:t>
+            </a:r>
+          </a:p>
+          <a:p>
+            <a:r>
+              <a:t>Vale la pena decirlo porque el estudiante que busque en internet va a encontrar GRANT CREATE SESSION, que es sintaxis de Oracle y en PostgreSQL no existe.</a:t>
+            </a:r>
+          </a:p>
+          <a:p>
+            <a:r>
+              <a:t>La distincion practica que hay que dejar clara es la que separa DDL de DML.</a:t>
+            </a:r>
+          </a:p>
+          <a:p>
+            <a:r>
+              <a:t>Si su cuenta puede ejecutar DROP TABLE cita, un error de copiar y pegar borra la agenda completa, y ningun respaldo de la noche anterior devuelve las citas que se agendaron hoy.</a:t>
             </a:r>
           </a:p>
         </p:txBody>
@@ -1120,22 +1607,17 @@
           <a:lstStyle/>
           <a:p>
             <a:r>
-              <a:t>Por eso los cuatro roles del taller se crean con CREATE ROLE recepcion NOLOGIN: son bolsas de privilegios, no identidades.</a:t>
-            </a:r>
-          </a:p>
-          <a:p>
-            <a:r>
-              <a:t>La persona viene despues, como CREATE ROLE ana_gomez LOGIN PASSWORD '...', y recibe la bolsa con GRANT recepcion TO ana_gomez.</a:t>
-            </a:r>
-          </a:p>
-          <a:p>
-            <a:r>
-              <a:t>Esa herencia es la que hace que al modificar el rol se corrijan todas las personas a la vez.</a:t>
-            </a:r>
-          </a:p>
-          <a:p>
-            <a:r>
-              <a:t>Conviene decir esto tal cual, porque un estudiante despierto va a preguntar por que el sufijo y merece la respuesta correcta y no una inventada.</a:t>
+              <a:t>Existe por una razon aritmetica que conviene poner en el tablero con los numeros de VetCare.</a:t>
+            </a:r>
+          </a:p>
+          <a:p>
+            <a:r>
+              <a:t>Sobre cada uno hay hasta cinco acciones posibles, asi que la matriz completa tiene cincuenta celdas.</a:t>
+            </a:r>
+          </a:p>
+          <a:p>
+            <a:r>
+              <a:t>Ese es el argumento real que el docente debe transmitir: el rol no ahorra tipeo, ahorra olvidos, y los olvidos en materia de permisos son precisamente los que producen incidentes de seguridad.</a:t>
             </a:r>
           </a:p>
         </p:txBody>
@@ -1205,32 +1687,22 @@
           <a:lstStyle/>
           <a:p>
             <a:r>
-              <a:t>El principio de minimo privilegio dice que cada rol recibe exactamente lo que necesita para cumplir su funcion y ni un privilegio mas.</a:t>
-            </a:r>
-          </a:p>
-          <a:p>
-            <a:r>
-              <a:t>Aplicado a VetCare deja una matriz muy concreta y defendible.</a:t>
-            </a:r>
-          </a:p>
-          <a:p>
-            <a:r>
-              <a:t>El rol recepcion necesita SELECT sobre mascota, dueno y veterinario para poder buscar y agendar, y SELECT, INSERT y UPDATE sobre cita para agendar y reprogramar; nada mas.</a:t>
-            </a:r>
-          </a:p>
-          <a:p>
-            <a:r>
-              <a:t>El rol auditor recibe unicamente SELECT, y jamas una escritura.</a:t>
-            </a:r>
-          </a:p>
-          <a:p>
-            <a:r>
-              <a:t>Eso se llama borrado logico, y hace que el privilegio DELETE sea innecesario para casi todos los usuarios, lo que a su vez elimina de raiz la posibilidad de una perdida accidental de informacion.</a:t>
-            </a:r>
-          </a:p>
-          <a:p>
-            <a:r>
-              <a:t>Conviene escribir esos dos valores en el tablero, porque el estudiante que suponga activa = 0 escribira un UPDATE que el CHECK va a rechazar y perdera diez minutos buscando el error en otra parte.</a:t>
+              <a:t>Por eso los cuatro roles del taller se crean con CREATE ROLE recepcion NOLOGIN: son bolsas de privilegios, no identidades.</a:t>
+            </a:r>
+          </a:p>
+          <a:p>
+            <a:r>
+              <a:t>La persona viene despues, como CREATE ROLE ana_gomez LOGIN PASSWORD '...', y recibe la bolsa con GRANT recepcion TO ana_gomez.</a:t>
+            </a:r>
+          </a:p>
+          <a:p>
+            <a:r>
+              <a:t>Esa herencia es la que hace que al modificar el rol se corrijan todas las personas a la vez.</a:t>
+            </a:r>
+          </a:p>
+          <a:p>
+            <a:r>
+              <a:t>Conviene decir esto tal cual, porque un estudiante despierto va a preguntar por que el sufijo y merece la respuesta correcta y no una inventada.</a:t>
             </a:r>
           </a:p>
         </p:txBody>
@@ -1300,17 +1772,32 @@
           <a:lstStyle/>
           <a:p>
             <a:r>
-              <a:t>La respuesta que el docente debe dar es que el problema no es la confianza en la persona sino el dano posible por un error o por una sesion robada.</a:t>
-            </a:r>
-          </a:p>
-          <a:p>
-            <a:r>
-              <a:t>Si alguien roba la sesion del recepcionista, con minimo privilegio el atacante ve agendas y datos de contacto; con privilegios de administrador, borra la base completa.</a:t>
-            </a:r>
-          </a:p>
-          <a:p>
-            <a:r>
-              <a:t>El permiso no mide cuanto se quiere a un empleado, mide cuanto se puede perder.</a:t>
+              <a:t>El principio de minimo privilegio dice que cada rol recibe exactamente lo que necesita para cumplir su funcion y ni un privilegio mas.</a:t>
+            </a:r>
+          </a:p>
+          <a:p>
+            <a:r>
+              <a:t>Aplicado a VetCare deja una matriz muy concreta y defendible.</a:t>
+            </a:r>
+          </a:p>
+          <a:p>
+            <a:r>
+              <a:t>El rol recepcion necesita SELECT sobre mascota, dueno y veterinario para poder buscar y agendar, y SELECT, INSERT y UPDATE sobre cita para agendar y reprogramar; nada mas.</a:t>
+            </a:r>
+          </a:p>
+          <a:p>
+            <a:r>
+              <a:t>El rol auditor recibe unicamente SELECT, y jamas una escritura.</a:t>
+            </a:r>
+          </a:p>
+          <a:p>
+            <a:r>
+              <a:t>Eso se llama borrado logico, y hace que el privilegio DELETE sea innecesario para casi todos los usuarios, lo que a su vez elimina de raiz la posibilidad de una perdida accidental de informacion.</a:t>
+            </a:r>
+          </a:p>
+          <a:p>
+            <a:r>
+              <a:t>Conviene escribir esos dos valores en el tablero, porque el estudiante que suponga activa = 0 escribira un UPDATE que el CHECK va a rechazar y perdera diez minutos buscando el error en otra parte.</a:t>
             </a:r>
           </a:p>
         </p:txBody>
@@ -1380,22 +1867,17 @@
           <a:lstStyle/>
           <a:p>
             <a:r>
-              <a:t>GRANT otorga y REVOKE retira, y ambos operan igual sobre usuarios y sobre roles.</a:t>
-            </a:r>
-          </a:p>
-          <a:p>
-            <a:r>
-              <a:t>Para retirar un permiso</a:t>
-            </a:r>
-          </a:p>
-          <a:p>
-            <a:r>
-              <a:t>Hay tres detalles operativos que evitan la mitad de los tropiezos del taller.</a:t>
-            </a:r>
-          </a:p>
-          <a:p>
-            <a:r>
-              <a:t>Eso explica por que el REVOKE de DELETE que pide el taller es, tecnicamente, redundante; se escribe de todos modos porque es la evidencia documental de una decision de diseno, y quien revise el script tiene que poder ver que la ausencia de DELETE fue deliberada y no un olvido.</a:t>
+              <a:t>La respuesta que el docente debe dar es que el problema no es la confianza en la persona sino el dano posible por un error o por una sesion robada.</a:t>
+            </a:r>
+          </a:p>
+          <a:p>
+            <a:r>
+              <a:t>Si alguien roba la sesion del recepcionista, con minimo privilegio el atacante ve agendas y datos de contacto; con privilegios de administrador, borra la base completa.</a:t>
+            </a:r>
+          </a:p>
+          <a:p>
+            <a:r>
+              <a:t>El permiso no mide cuanto se quiere a un empleado, mide cuanto se puede perder.</a:t>
             </a:r>
           </a:p>
         </p:txBody>
@@ -1465,7 +1947,22 @@
           <a:lstStyle/>
           <a:p>
             <a:r>
-              <a:t>Hay dos mecanismos que conviene conocer porque hacen dano en silencio.</a:t>
+              <a:t>GRANT otorga y REVOKE retira, y ambos operan igual sobre usuarios y sobre roles.</a:t>
+            </a:r>
+          </a:p>
+          <a:p>
+            <a:r>
+              <a:t>Para retirar un permiso</a:t>
+            </a:r>
+          </a:p>
+          <a:p>
+            <a:r>
+              <a:t>Hay tres detalles operativos que evitan la mitad de los tropiezos del taller.</a:t>
+            </a:r>
+          </a:p>
+          <a:p>
+            <a:r>
+              <a:t>Eso explica por que el REVOKE de DELETE que pide el taller es, tecnicamente, redundante; se escribe de todos modos porque es la evidencia documental de una decision de diseno, y quien revise el script tiene que poder ver que la ausencia de DELETE fue deliberada y no un olvido.</a:t>
             </a:r>
           </a:p>
         </p:txBody>
@@ -1535,17 +2032,7 @@
           <a:lstStyle/>
           <a:p>
             <a:r>
-              <a:t>Pero la recepcionista solo necesita el nombre y el telefono para identificar a quien llama, y no tiene por que ver el correo electronico de los clientes.</a:t>
-            </a:r>
-          </a:p>
-          <a:p>
-            <a:r>
-              <a:t>El primero es la vista.</a:t>
-            </a:r>
-          </a:p>
-          <a:p>
-            <a:r>
-              <a:t>Lo que hace que funcione, y es el punto que el estudiante no cree hasta que lo ve, es que la consulta de la vista se ejecuta con los privilegios de su PROPIETARIO y no con los de quien la consulta: por eso se puede dar SELECT sobre la vista a recepcion y al mismo tiempo hacer REVOKE SELECT ON dueno FROM recepcion, y el rol sigue viendo el telefono del dueno a traves de la vista pero no puede consultar la tabla directamente.</a:t>
+              <a:t>Hay dos mecanismos que conviene conocer porque hacen dano en silencio.</a:t>
             </a:r>
           </a:p>
         </p:txBody>
@@ -5108,7 +5595,7 @@
                 </a:solidFill>
                 <a:latin typeface="Calibri"/>
               </a:rPr>
-              <a:t>–   Hay un detalle del motor que hay que decir temprano porque de lo contrario el taller se vuelve incomprensible: en PostgreSQL usuario y rol son la misma entidad.</a:t>
+              <a:t>–   Hay un detalle del motor que hay que decir temprano porque de lo contrario el tema se vuelve incomprensible: en PostgreSQL usuario y rol son la misma entidad.</a:t>
             </a:r>
           </a:p>
           <a:p>
@@ -7528,7 +8015,7 @@
                 </a:solidFill>
                 <a:latin typeface="Calibri"/>
               </a:rPr>
-              <a:t>–   Aqui esta el concepto que hace la diferencia entre una matriz de aficionado y una defendible, y es la parte que el taller evalua con veinte puntos.</a:t>
+              <a:t>–   Aqui esta el concepto que hace la diferencia entre una matriz de aficionado y una defendible.</a:t>
             </a:r>
           </a:p>
           <a:p>
@@ -7855,7 +8342,7 @@
                 </a:solidFill>
                 <a:latin typeface="Calibri"/>
               </a:rPr>
-              <a:t>PostgreSQL en el navegador + Google Docs</a:t>
+              <a:t>PostgreSQL + Google Docs</a:t>
             </a:r>
             <a:r>
               <a:rPr sz="2000" b="0" i="0">
@@ -9373,7 +9860,7 @@
                 </a:solidFill>
                 <a:latin typeface="Calibri"/>
               </a:rPr>
-              <a:t>–   La segunda parte del entregable es la politica de altas y bajas, que documenta el ciclo de vida de una cuenta: quien autoriza que se cree, con que rol nace, que pasa cuando alguien cambia de funcion, y en cuanto tiempo se desactiva cuando se va de la clinica.</a:t>
+              <a:t>–   La politica de altas y bajas documenta el ciclo de vida de una cuenta: quien autoriza que se cree, con que rol nace, que pasa cuando alguien cambia de funcion, y en cuanto tiempo se desactiva cuando se va de la clinica.</a:t>
             </a:r>
           </a:p>
           <a:p>
@@ -9422,6 +9909,22 @@
                 <a:latin typeface="Calibri"/>
               </a:rPr>
               <a:t>–   El problema que resuelve es la cuenta huerfana: la del pasante que se fue hace un ano y cuya clave sigue funcionando.</a:t>
+            </a:r>
+          </a:p>
+          <a:p>
+            <a:pPr>
+              <a:spcAft>
+                <a:spcPts val="800"/>
+              </a:spcAft>
+            </a:pPr>
+            <a:r>
+              <a:rPr sz="2000" b="0" i="0">
+                <a:solidFill>
+                  <a:srgbClr val="333333"/>
+                </a:solidFill>
+                <a:latin typeface="Calibri"/>
+              </a:rPr>
+              <a:t>–   Una, nunca cuentas compartidas: si tres recepcionistas entran con la cuenta recepcion1, la tabla de auditoria dira que recepcion1 cancelo la cita y no habra forma de saber quien fue</a:t>
             </a:r>
           </a:p>
         </p:txBody>
@@ -9641,7 +10144,7 @@
                 </a:solidFill>
                 <a:latin typeface="Calibri"/>
               </a:rPr>
-              <a:t>–   Una, nunca cuentas compartidas: si tres recepcionistas entran con la cuenta recepcion1, la tabla de auditoria dira que recepcion1 cancelo la cita y no habra forma de saber quien fue</a:t>
+              <a:t>–   La trazabilidad se pierde de manera irrecuperable y con ella cualquier investigacion posterior.</a:t>
             </a:r>
           </a:p>
           <a:p>
@@ -9657,7 +10160,7 @@
                 </a:solidFill>
                 <a:latin typeface="Calibri"/>
               </a:rPr>
-              <a:t>–   La trazabilidad se pierde de manera irrecuperable y con ella cualquier investigacion posterior.</a:t>
+              <a:t>–   Dos, los permisos no se acumulan: al cambiar de rol se revoca el anterior con REVOKE recepcion FROM ana_gomez, porque quien pasa de recepcion a auditoria y conserva ambos roles termina pudiendo modificar justamente lo que audita.</a:t>
             </a:r>
           </a:p>
           <a:p>
@@ -9673,7 +10176,7 @@
                 </a:solidFill>
                 <a:latin typeface="Calibri"/>
               </a:rPr>
-              <a:t>–   Dos, los permisos no se acumulan: al cambiar de rol se revoca el anterior con REVOKE recepcion FROM ana_gomez, porque quien pasa de recepcion a auditoria y conserva ambos roles termina pudiendo modificar justamente lo que audita.</a:t>
+              <a:t>–   La cuarta seccion, la revision periodica, se apoya en la consulta de information_schema que acaba de verse: la evidencia de la auditoria es su salida, y la politica dice cada cuanto se corre y quien la firma.</a:t>
             </a:r>
           </a:p>
           <a:p>
@@ -9689,7 +10192,7 @@
                 </a:solidFill>
                 <a:latin typeface="Calibri"/>
               </a:rPr>
-              <a:t>–   La cuarta seccion, la revision periodica, se apoya en la consulta de information_schema que acaba de verse: la evidencia de la auditoria es su salida, y la politica dice cada cuanto se corre y quien la firma.</a:t>
+              <a:t>–   La quinta seccion es el limite de este entorno, y se desarrolla completa en «El motor de hoy es PostgreSQL» un poco mas abajo</a:t>
             </a:r>
           </a:p>
         </p:txBody>
@@ -9909,7 +10412,7 @@
                 </a:solidFill>
                 <a:latin typeface="Calibri"/>
               </a:rPr>
-              <a:t>–   La quinta seccion es el limite de este entorno, y se desarrolla completa en «El motor de hoy es PostgreSQL» un poco mas abajo</a:t>
+              <a:t>–   Al dictar la politica conviene bajarla a nombres propios de Huellitas en lugar de dejarla en abstracto: quien autoriza el alta es la administradora de la clinica</a:t>
             </a:r>
           </a:p>
           <a:p>
@@ -9925,7 +10428,7 @@
                 </a:solidFill>
                 <a:latin typeface="Calibri"/>
               </a:rPr>
-              <a:t>–   Lo que se califica ahi no es que la prueba negativa exista, sino que el estudiante sepa nombrarla como brecha de verificacion de su propia entrega.</a:t>
+              <a:t>–   La recepcionista que entra nace con el rol recepcion y con nada mas, y la baja del pasante se hace el mismo dia.</a:t>
             </a:r>
           </a:p>
           <a:p>
@@ -9941,39 +10444,7 @@
                 </a:solidFill>
                 <a:latin typeface="Calibri"/>
               </a:rPr>
-              <a:t>–   Al dictar la politica conviene bajarla a nombres propios de Huellitas en lugar de dejarla en abstracto: quien autoriza el alta es la administradora de la clinica</a:t>
-            </a:r>
-          </a:p>
-          <a:p>
-            <a:pPr>
-              <a:spcAft>
-                <a:spcPts val="800"/>
-              </a:spcAft>
-            </a:pPr>
-            <a:r>
-              <a:rPr sz="2000" b="0" i="0">
-                <a:solidFill>
-                  <a:srgbClr val="333333"/>
-                </a:solidFill>
-                <a:latin typeface="Calibri"/>
-              </a:rPr>
-              <a:t>–   La recepcionista que entra nace con el rol recepcion y con nada mas, y la baja del pasante se hace el mismo dia.</a:t>
-            </a:r>
-          </a:p>
-          <a:p>
-            <a:pPr>
-              <a:spcAft>
-                <a:spcPts val="800"/>
-              </a:spcAft>
-            </a:pPr>
-            <a:r>
-              <a:rPr sz="2000" b="0" i="0">
-                <a:solidFill>
-                  <a:srgbClr val="333333"/>
-                </a:solidFill>
-                <a:latin typeface="Calibri"/>
-              </a:rPr>
-              <a:t>–   Una politica que no dice quien firma ni en cuanto tiempo no es una politica, es una intencion, y asi esta escrita la rubrica.</a:t>
+              <a:t>–   Una politica que no dice quien firma ni en cuanto tiempo no es una politica, es una intencion.</a:t>
             </a:r>
           </a:p>
         </p:txBody>
@@ -10193,7 +10664,7 @@
                 </a:solidFill>
                 <a:latin typeface="Calibri"/>
               </a:rPr>
-              <a:t>–   Este punto hay que decirlo con precision porque una version anterior de esta guia decia lo contrario y costaria puntos repetirla.</a:t>
+              <a:t>–   El motor de la clase es PostgreSQL, que corre dentro del navegador.</a:t>
             </a:r>
           </a:p>
           <a:p>
@@ -10225,7 +10696,7 @@
                 </a:solidFill>
                 <a:latin typeface="Calibri"/>
               </a:rPr>
-              <a:t>–   Dos, si el entorno del dia no permite cambiar de rol, no hay que esconderlo — se muestra el mensaje, y entonces si aparece la brecha de verificacion que la pregunta 5 pide nombrar.</a:t>
+              <a:t>–   Dos, si el entorno del dia no permite cambiar de rol, no hay que esconderlo — se muestra el mensaje.</a:t>
             </a:r>
           </a:p>
           <a:p>
@@ -10242,22 +10713,6 @@
                 <a:latin typeface="Calibri"/>
               </a:rPr>
               <a:t>–   La diferencia entre las dos cosas es justamente lo que el estudiante tiene que entender: SET ROLE cambia con que permisos se evalua lo que escribo</a:t>
-            </a:r>
-          </a:p>
-          <a:p>
-            <a:pPr>
-              <a:spcAft>
-                <a:spcPts val="800"/>
-              </a:spcAft>
-            </a:pPr>
-            <a:r>
-              <a:rPr sz="2000" b="0" i="0">
-                <a:solidFill>
-                  <a:srgbClr val="333333"/>
-                </a:solidFill>
-                <a:latin typeface="Calibri"/>
-              </a:rPr>
-              <a:t>–   Y conectarse como otro usuario cambia quien esta conectado; para probar que un privilegio falta, basta lo primero.</a:t>
             </a:r>
           </a:p>
         </p:txBody>
@@ -10477,7 +10932,7 @@
                 </a:solidFill>
                 <a:latin typeface="Calibri"/>
               </a:rPr>
-              <a:t>–   Oracle Live SQL y DB Fiddle siguen en el kit, pero cambian de papel: DB Fiddle sirve para probar SQL suelto y Live SQL solo como contraste de sintaxis, porque alli se escribe CREATE USER...</a:t>
+              <a:t>–   Y conectarse como otro usuario cambia quien esta conectado; para probar que un privilegio falta, basta lo primero.</a:t>
             </a:r>
           </a:p>
           <a:p>
@@ -10493,7 +10948,7 @@
                 </a:solidFill>
                 <a:latin typeface="Calibri"/>
               </a:rPr>
-              <a:t>–   IDENTIFIED BY, se otorga GRANT CREATE SESSION y el esquema es el usuario.</a:t>
+              <a:t>–   Oracle Live SQL y DB Fiddle siguen en el kit, pero cambian de papel: DB Fiddle sirve para probar SQL suelto y Live SQL solo como contraste de sintaxis, porque alli se escribe CREATE USER...</a:t>
             </a:r>
           </a:p>
           <a:p>
@@ -10509,7 +10964,7 @@
                 </a:solidFill>
                 <a:latin typeface="Calibri"/>
               </a:rPr>
-              <a:t>–   Vale un minuto de clase mencionarlo, porque muchos se van a encontrar Oracle en el trabajo; no vale mas</a:t>
+              <a:t>–   IDENTIFIED BY, se otorga GRANT CREATE SESSION y el esquema es el usuario.</a:t>
             </a:r>
           </a:p>
           <a:p>
@@ -10525,7 +10980,7 @@
                 </a:solidFill>
                 <a:latin typeface="Calibri"/>
               </a:rPr>
-              <a:t>–   Porque la calificacion ocurre en PostgreSQL y todo minuto invertido en sintaxis del otro motor es un minuto que el estudiante no dedica a lo que se le va a evaluar.</a:t>
+              <a:t>–   Vale un minuto de clase mencionarlo, porque muchos se van a encontrar Oracle en el trabajo; no vale mas, porque el motor de la clase es PostgreSQL y todo minuto invertido en sintaxis del otro motor es un minuto que no se dedica al tema.</a:t>
             </a:r>
           </a:p>
         </p:txBody>
@@ -12017,7 +12472,7 @@
                 </a:solidFill>
                 <a:latin typeface="Calibri"/>
               </a:rPr>
-              <a:t>–   El entregable central de hoy no es el script sino la matriz rol por objeto por privilegio, y conviene explicar por que.</a:t>
+              <a:t>–   Lo central no es el script sino la matriz rol por objeto por privilegio, y conviene explicar por que.</a:t>
             </a:r>
           </a:p>
           <a:p>
@@ -12049,23 +12504,7 @@
                 </a:solidFill>
                 <a:latin typeface="Calibri"/>
               </a:rPr>
-              <a:t>–   Se construye con los objetos en las filas, los roles en las columnas</a:t>
-            </a:r>
-          </a:p>
-          <a:p>
-            <a:pPr>
-              <a:spcAft>
-                <a:spcPts val="800"/>
-              </a:spcAft>
-            </a:pPr>
-            <a:r>
-              <a:rPr sz="2000" b="0" i="0">
-                <a:solidFill>
-                  <a:srgbClr val="333333"/>
-                </a:solidFill>
-                <a:latin typeface="Calibri"/>
-              </a:rPr>
-              <a:t>–   Y en cada celda las acciones permitidas con la notacion abreviada que pide el taller: S para SELECT, I para INSERT, U para UPDATE, D para DELETE, E para EXECUTE y un guion cuando no hay ninguno.</a:t>
+              <a:t>–   Se construye con los objetos en las filas, los roles en las columnas, y en cada celda las acciones permitidas con la notacion abreviada: S para SELECT, I para INSERT, U para UPDATE, D para DELETE, E para EXECUTE y un guion cuando no hay ninguno.</a:t>
             </a:r>
           </a:p>
           <a:p>
@@ -12514,7 +12953,7 @@
                 </a:solidFill>
                 <a:latin typeface="Calibri"/>
               </a:rPr>
-              <a:t>Como amarra con las clases vecinas y con la rubrica del PI</a:t>
+              <a:t>Como amarra con las clases vecinas y con el PI</a:t>
             </a:r>
           </a:p>
         </p:txBody>
@@ -12553,7 +12992,7 @@
                 </a:solidFill>
                 <a:latin typeface="Calibri"/>
               </a:rPr>
-              <a:t>–   Lo de hoy no es una isla, y decirlo en voz alta le da sentido al entregable.</a:t>
+              <a:t>–   Lo de hoy no es una isla.</a:t>
             </a:r>
           </a:p>
           <a:p>
@@ -12601,7 +13040,7 @@
                 </a:solidFill>
                 <a:latin typeface="Calibri"/>
               </a:rPr>
-              <a:t>–   La Clase 4 agrega disparadores de auditoria y el plan de respaldo, que son el otro componente de este mismo criterio de rubrica.</a:t>
+              <a:t>–   La Clase 4 agrega disparadores de auditoria y el plan de respaldo.</a:t>
             </a:r>
           </a:p>
           <a:p>
@@ -12618,22 +13057,6 @@
                 <a:latin typeface="Calibri"/>
               </a:rPr>
               <a:t>–   Y la Clase 12 reutiliza estos roles para definir la cuenta de servicio con la que la aplicacion se conecta.</a:t>
-            </a:r>
-          </a:p>
-          <a:p>
-            <a:pPr>
-              <a:spcAft>
-                <a:spcPts val="800"/>
-              </a:spcAft>
-            </a:pPr>
-            <a:r>
-              <a:rPr sz="2000" b="0" i="0">
-                <a:solidFill>
-                  <a:srgbClr val="333333"/>
-                </a:solidFill>
-                <a:latin typeface="Calibri"/>
-              </a:rPr>
-              <a:t>–   En la rubrica del PI, seguridad y respaldo valen 15 de los 100 puntos.</a:t>
             </a:r>
           </a:p>
         </p:txBody>
@@ -16335,7 +16758,7 @@
                 </a:solidFill>
                 <a:latin typeface="Calibri"/>
               </a:rPr>
-              <a:t>Lo que pide el taller</a:t>
+              <a:t/>
             </a:r>
           </a:p>
         </p:txBody>
@@ -17172,7 +17595,7 @@
                 </a:solidFill>
                 <a:latin typeface="Calibri"/>
               </a:rPr>
-              <a:t>Cada flecha del ciclo es un GRANT o un REVOKE. La politica es lo que le pone responsable y plazo a cada uno: son las 5 secciones del entregable</a:t>
+              <a:t>Cada flecha del ciclo es un GRANT o un REVOKE. La politica es lo que le pone responsable y plazo a cada uno.</a:t>
             </a:r>
           </a:p>
         </p:txBody>
@@ -17491,25 +17914,7 @@
                 </a:solidFill>
                 <a:latin typeface="Calibri"/>
               </a:rPr>
-              <a:t>. Se cierra con «RESET ROLE;». Si el entorno no deja cambiar de rol, se documenta el intento: eso es una </a:t>
-            </a:r>
-            <a:r>
-              <a:rPr sz="2000" b="1" i="0">
-                <a:solidFill>
-                  <a:srgbClr val="333333"/>
-                </a:solidFill>
-                <a:latin typeface="Calibri"/>
-              </a:rPr>
-              <a:t>brecha de verificacion</a:t>
-            </a:r>
-            <a:r>
-              <a:rPr sz="2000" b="0" i="0">
-                <a:solidFill>
-                  <a:srgbClr val="333333"/>
-                </a:solidFill>
-                <a:latin typeface="Calibri"/>
-              </a:rPr>
-              <a:t> del entregable.</a:t>
+              <a:t>. Se cierra con «RESET ROLE;». Si el entorno no deja cambiar de rol, se documenta el intento.</a:t>
             </a:r>
           </a:p>
         </p:txBody>
@@ -17747,7 +18152,7 @@
                 </a:solidFill>
                 <a:latin typeface="Calibri"/>
               </a:rPr>
-              <a:t> PostgreSQL en el navegador + Google Docs</a:t>
+              <a:t> PostgreSQL + Google Docs</a:t>
             </a:r>
           </a:p>
           <a:p>
@@ -17781,7 +18186,7 @@
                 </a:solidFill>
                 <a:latin typeface="Calibri"/>
               </a:rPr>
-              <a:t> Los 4 roles de VetCare con CREATE ROLE/GRANT/REVOKE en la plataforma del curso, verificados con information_schema.role_table_grants.</a:t>
+              <a:t> Los 4 roles de VetCare con CREATE ROLE/GRANT/REVOKE, verificados con information_schema.role_table_grants.</a:t>
             </a:r>
           </a:p>
           <a:p>
@@ -18329,7 +18734,7 @@
                 </a:solidFill>
                 <a:latin typeface="Calibri"/>
               </a:rPr>
-              <a:t>–   Esta clase se dicta en sesion virtual sincrona, en el bloque normal de 120 minutos: hay explicacion en vivo, taller acompanado y espacio para preguntar, asi que este texto es el material con el que el docente dicta y no una lectura que sustituya la clase.</a:t>
+              <a:t>–   Esta clase se dicta en sesion virtual sincrona, en el bloque normal de 120 minutos: hay explicacion en vivo.</a:t>
             </a:r>
           </a:p>
         </p:txBody>

--- a/Bases de Datos II/Clases/Clase 2 - Administracion de bases de datos/Presentacion.pptx
+++ b/Bases de Datos II/Clases/Clase 2 - Administracion de bases de datos/Presentacion.pptx
@@ -548,6 +548,11 @@
               <a:t>Conviene aprovechar precisamente eso, porque los permisos son el tema del curso donde el estudiante mas necesita que alguien le diga en el momento por que su GRANT no surtio efecto.</a:t>
             </a:r>
           </a:p>
+          <a:p>
+            <a:r>
+              <a:t>Fuera de la lamina (habla de la practica): Esta clase se dicta en sesion virtual sincrona, en el bloque normal de 120 minutos: hay explicacion en vivo, taller acompanado y espacio para preguntar, asi que este texto es el material con el que el docente dicta y no una lectura que sustituya la clase.</a:t>
+            </a:r>
+          </a:p>
         </p:txBody>
       </p:sp>
       <p:sp>
@@ -615,28 +620,12 @@
           <a:lstStyle/>
           <a:p>
             <a:r>
-              <a:t>Fuera de la lamina (habla de la practica, no del tema):</a:t>
-            </a:r>
-          </a:p>
-          <a:p>
-            <a:r>
-              <a:t>- Aqui esta el concepto que hace la diferencia entre una matriz de aficionado y una defendible, y es la parte que el taller evalua con veinte puntos.</a:t>
-            </a:r>
-          </a:p>
-          <a:p/>
-          <a:p>
-            <a:r>
-              <a:t>Pero la recepcionista solo necesita el nombre y el telefono para identificar a quien llama, y no tiene por que ver el correo electronico de los clientes.</a:t>
-            </a:r>
-          </a:p>
-          <a:p>
-            <a:r>
-              <a:t>El primero es la vista.</a:t>
-            </a:r>
-          </a:p>
-          <a:p>
-            <a:r>
-              <a:t>Lo que hace que funcione, y es el punto que el estudiante no cree hasta que lo ve, es que la consulta de la vista se ejecuta con los privilegios de su PROPIETARIO y no con los de quien la consulta: por eso se puede dar SELECT sobre la vista a recepcion y al mismo tiempo hacer REVOKE SELECT ON dueno FROM recepcion, y el rol sigue viendo el telefono del dueno a traves de la vista pero no puede consultar la tabla directamente.</a:t>
+              <a:t>Vale explicar por que se usa role_table_grants y no table_privileges, que es la que aparece primero al buscar: table_privileges solo muestra los privilegios en los que el usuario actual es quien otorga o quien recibe, mientras que role_table_grants incluye los de cualquier rol que este habilitado en la sesion, que es justamente lo que necesita el propietario para auditar lo que reparti.</a:t>
+            </a:r>
+          </a:p>
+          <a:p>
+            <a:r>
+              <a:t>Fuera de la lamina (habla de la practica): Estas dos consultas son la evidencia que la rubrica exige tres veces, y el docente deberia proyectar su salida en la demo: ver la matriz salir del motor, y no de un documento, es lo que convence al grupo de que los permisos son verificables.</a:t>
             </a:r>
           </a:p>
         </p:txBody>
@@ -706,12 +695,27 @@
           <a:lstStyle/>
           <a:p>
             <a:r>
-              <a:t>Vale explicar por que se usa role_table_grants y no table_privileges, que es la que aparece primero al buscar: table_privileges solo muestra los privilegios en los que el usuario actual es quien otorga o quien recibe, mientras que role_table_grants incluye los de cualquier rol que este habilitado en la sesion, que es justamente lo que necesita el propietario para auditar lo que reparti.</a:t>
-            </a:r>
-          </a:p>
-          <a:p>
-            <a:r>
-              <a:t>Estas dos consultas son la evidencia que la rubrica exige tres veces, y el docente deberia proyectar su salida en la demo: ver la matriz salir del motor, y no de un documento, es lo que convence al grupo de que los permisos son verificables.</a:t>
+              <a:t>Dos reglas la cierran.</a:t>
+            </a:r>
+          </a:p>
+          <a:p>
+            <a:r>
+              <a:t>Vale la pena senalar el detalle tecnico de la baja: en PostgreSQL no se puede hacer DROP ROLE de un rol que todavia posee objetos, hay que reasignarlos primero con REASSIGN OWNED BY ana_gomez TO admin_bd, y por eso la politica tiene que decir que pasa con lo que la persona era dueno.</a:t>
+            </a:r>
+          </a:p>
+          <a:p>
+            <a:r>
+              <a:t>Fuera de la lamina (habla de la practica): La diapositiva trae las cinco secciones en el mismo orden en que el taller las va a pedir, asi que se dicta recorriendola de arriba abajo.</a:t>
+            </a:r>
+          </a:p>
+          <a:p>
+            <a:r>
+              <a:t>Fuera de la lamina (habla de la practica): La quinta seccion es el limite de este entorno, y se desarrolla completa en «El motor de hoy es PostgreSQL» un poco mas abajo; lo que se califica ahi no es que la prueba negativa exista, sino que el estudiante sepa nombrarla como brecha de verificacion de su propia entrega.</a:t>
+            </a:r>
+          </a:p>
+          <a:p>
+            <a:r>
+              <a:t>Fuera de la lamina (habla de la practica): Una politica que no dice quien firma ni en cuanto tiempo no es una politica, es una intencion, y asi esta escrita la rubrica.</a:t>
             </a:r>
           </a:p>
         </p:txBody>
@@ -781,17 +785,42 @@
           <a:lstStyle/>
           <a:p>
             <a:r>
-              <a:t>La diapositiva trae las cinco secciones en el mismo orden en que el taller las va a pedir, asi que se dicta recorriendola de arriba abajo.</a:t>
-            </a:r>
-          </a:p>
-          <a:p>
-            <a:r>
-              <a:t>Dos reglas la cierran.</a:t>
-            </a:r>
-          </a:p>
-          <a:p>
-            <a:r>
-              <a:t>Vale la pena senalar el detalle tecnico de la baja: en PostgreSQL no se puede hacer DROP ROLE de un rol que todavia posee objetos, hay que reasignarlos primero con REASSIGN OWNED BY ana_gomez TO admin_bd, y por eso la politica tiene que decir que pasa con lo que la persona era dueno.</a:t>
+              <a:t>Ahi CREATE ROLE, GRANT, REVOKE, CREATE VIEW, los privilegios por columna y las consultas a information_schema funcionan todos: son DDL real y son verificables, asi que la evidencia de la clase es la salida del motor y no una promesa.</a:t>
+            </a:r>
+          </a:p>
+          <a:p>
+            <a:r>
+              <a:t>Lo que NO se puede hacer es abrir una segunda conexion: el entorno tiene un solo usuario con login y una sola sesion, asi que nadie va a conectarse como recepcion en otra pestana mientras el docente mira desde la suya.</a:t>
+            </a:r>
+          </a:p>
+          <a:p>
+            <a:r>
+              <a:t>Esa es la limitacion real, y hay que nombrarla con esa precision, porque la version anterior de esta guia decia algo mas fuerte y falso: que por eso la prueba negativa era imposible.</a:t>
+            </a:r>
+          </a:p>
+          <a:p>
+            <a:r>
+              <a:t>Para ver el permiso negado no hace falta otra conexion, hace falta cambiar el rol EFECTIVO dentro de la misma sesion, y eso es lo que hace SET ROLE recepcion; a partir de esa linea los privilegios que el motor revisa son los del rol y no los del propietario, de modo que devuelve permission denied for table cita y tambien, si ya se revoco el SELECT de la tabla.</a:t>
+            </a:r>
+          </a:p>
+          <a:p>
+            <a:r>
+              <a:t>Se cierra con RESET ROLE; y conviene no olvidarlo, porque todo lo que venga despues se seguiria ejecutando con los permisos recortados.</a:t>
+            </a:r>
+          </a:p>
+          <a:p>
+            <a:r>
+              <a:t>Dos advertencias para la demo.</a:t>
+            </a:r>
+          </a:p>
+          <a:p>
+            <a:r>
+              <a:t>Fuera de la lamina (habla de la practica): Este punto hay que decirlo con precision porque una version anterior de esta guia decia lo contrario y costaria puntos repetirla.</a:t>
+            </a:r>
+          </a:p>
+          <a:p>
+            <a:r>
+              <a:t>Fuera de la lamina (habla de la practica): Dos, si el entorno del dia no permite cambiar de rol, no hay que esconderlo — se muestra el mensaje, y entonces si aparece la brecha de verificacion que la pregunta 5 pide nombrar.</a:t>
             </a:r>
           </a:p>
         </p:txBody>
@@ -861,12 +890,17 @@
           <a:lstStyle/>
           <a:p>
             <a:r>
-              <a:t>Fuera de la lamina (habla de la practica, no del tema):</a:t>
-            </a:r>
-          </a:p>
-          <a:p>
-            <a:r>
-              <a:t>- Lo que se califica ahi no es que la prueba negativa exista, sino que el estudiante sepa nombrarla como brecha de verificacion de su propia entrega.</a:t>
+              <a:t>Fuera de la lamina (habla de la practica): Lo de hoy no es una isla, y decirlo en voz alta le da sentido al entregable.</a:t>
+            </a:r>
+          </a:p>
+          <a:p>
+            <a:r>
+              <a:t>Fuera de la lamina (habla de la practica): La Clase 4 agrega disparadores de auditoria y el plan de respaldo, que son el otro componente de este mismo criterio de rubrica.</a:t>
+            </a:r>
+          </a:p>
+          <a:p>
+            <a:r>
+              <a:t>Fuera de la lamina (habla de la practica): En la rubrica del PI, seguridad y respaldo valen 15 de los 100 puntos.</a:t>
             </a:r>
           </a:p>
         </p:txBody>
@@ -936,438 +970,12 @@
           <a:lstStyle/>
           <a:p>
             <a:r>
-              <a:t>Fuera de la lamina (habla de la practica, no del tema):</a:t>
-            </a:r>
-          </a:p>
-          <a:p>
-            <a:r>
-              <a:t>- Una politica que no dice quien firma ni en cuanto tiempo no es una politica, es una intencion, y asi esta escrita la rubrica.</a:t>
-            </a:r>
-          </a:p>
-        </p:txBody>
-      </p:sp>
-      <p:sp>
-        <p:nvSpPr>
-          <p:cNvPr id="4" name="Slide Number Placeholder 3"/>
-          <p:cNvSpPr>
-            <a:spLocks noGrp="1"/>
-          </p:cNvSpPr>
-          <p:nvPr>
-            <p:ph type="sldNum" idx="5" sz="quarter"/>
-          </p:nvPr>
-        </p:nvSpPr>
-        <p:spPr/>
-      </p:sp>
-    </p:spTree>
-  </p:cSld>
-  <p:clrMapOvr>
-    <a:masterClrMapping/>
-  </p:clrMapOvr>
-</p:notes>
-</file>
-
-<file path=ppt/notesSlides/notesSlide15.xml><?xml version="1.0" encoding="utf-8"?>
-<p:notes xmlns:a="http://schemas.openxmlformats.org/drawingml/2006/main" xmlns:p="http://schemas.openxmlformats.org/presentationml/2006/main" xmlns:r="http://schemas.openxmlformats.org/officeDocument/2006/relationships">
-  <p:cSld>
-    <p:spTree>
-      <p:nvGrpSpPr>
-        <p:cNvPr id="1" name=""/>
-        <p:cNvGrpSpPr/>
-        <p:nvPr/>
-      </p:nvGrpSpPr>
-      <p:grpSpPr>
-        <a:xfrm>
-          <a:off x="0" y="0"/>
-          <a:ext cx="0" cy="0"/>
-          <a:chOff x="0" y="0"/>
-          <a:chExt cx="0" cy="0"/>
-        </a:xfrm>
-      </p:grpSpPr>
-      <p:sp>
-        <p:nvSpPr>
-          <p:cNvPr id="2" name="Slide Image Placeholder 1"/>
-          <p:cNvSpPr>
-            <a:spLocks noGrp="1"/>
-          </p:cNvSpPr>
-          <p:nvPr>
-            <p:ph type="sldImg" idx="2"/>
-          </p:nvPr>
-        </p:nvSpPr>
-        <p:spPr/>
-      </p:sp>
-      <p:sp>
-        <p:nvSpPr>
-          <p:cNvPr id="3" name="Notes Placeholder 2"/>
-          <p:cNvSpPr>
-            <a:spLocks noGrp="1"/>
-          </p:cNvSpPr>
-          <p:nvPr>
-            <p:ph type="body" idx="3" sz="quarter"/>
-          </p:nvPr>
-        </p:nvSpPr>
-        <p:spPr/>
-        <p:txBody>
-          <a:bodyPr/>
-          <a:lstStyle/>
-          <a:p>
-            <a:r>
-              <a:t>Fuera de la lamina (habla de la practica, no del tema):</a:t>
-            </a:r>
-          </a:p>
-          <a:p>
-            <a:r>
-              <a:t>- Este punto hay que decirlo con precision porque una version anterior de esta guia decia lo contrario y costaria puntos repetirla.</a:t>
-            </a:r>
-          </a:p>
-          <a:p>
-            <a:r>
-              <a:t>- Dos, si el entorno del dia no permite cambiar de rol, no hay que esconderlo — se muestra el mensaje, y entonces si aparece la brecha de verificacion que la pregunta 5 pide nombrar.</a:t>
-            </a:r>
-          </a:p>
-          <a:p/>
-          <a:p>
-            <a:r>
-              <a:t>Ahi CREATE ROLE, GRANT, REVOKE, CREATE VIEW, los privilegios por columna y las consultas a information_schema funcionan todos: son DDL real y son verificables, asi que la evidencia del taller es la salida del motor y no una promesa.</a:t>
-            </a:r>
-          </a:p>
-          <a:p>
-            <a:r>
-              <a:t>Lo que NO se puede hacer es abrir una segunda conexion: el entorno tiene un solo usuario con login y una sola sesion, asi que nadie va a conectarse como recepcion en otra pestana mientras el docente mira desde la suya.</a:t>
-            </a:r>
-          </a:p>
-          <a:p>
-            <a:r>
-              <a:t>Esa es la limitacion real, y hay que nombrarla con esa precision, porque la version anterior de esta guia decia algo mas fuerte y falso: que por eso la prueba negativa era imposible.</a:t>
-            </a:r>
-          </a:p>
-          <a:p>
-            <a:r>
-              <a:t>Para ver el permiso negado no hace falta otra conexion, hace falta cambiar el rol EFECTIVO dentro de la misma sesion, y eso es lo que hace SET ROLE recepcion; a partir de esa linea los privilegios que el motor revisa son los del rol y no los del propietario, de modo que devuelve permission denied for table cita y tambien, si ya se revoco el SELECT de la tabla.</a:t>
-            </a:r>
-          </a:p>
-          <a:p>
-            <a:r>
-              <a:t>Se cierra con RESET ROLE; y conviene no olvidarlo, porque todo lo que venga despues se seguiria ejecutando con los permisos recortados.</a:t>
-            </a:r>
-          </a:p>
-          <a:p>
-            <a:r>
-              <a:t>Dos advertencias para la demo.</a:t>
-            </a:r>
-          </a:p>
-        </p:txBody>
-      </p:sp>
-      <p:sp>
-        <p:nvSpPr>
-          <p:cNvPr id="4" name="Slide Number Placeholder 3"/>
-          <p:cNvSpPr>
-            <a:spLocks noGrp="1"/>
-          </p:cNvSpPr>
-          <p:nvPr>
-            <p:ph type="sldNum" idx="5" sz="quarter"/>
-          </p:nvPr>
-        </p:nvSpPr>
-        <p:spPr/>
-      </p:sp>
-    </p:spTree>
-  </p:cSld>
-  <p:clrMapOvr>
-    <a:masterClrMapping/>
-  </p:clrMapOvr>
-</p:notes>
-</file>
-
-<file path=ppt/notesSlides/notesSlide16.xml><?xml version="1.0" encoding="utf-8"?>
-<p:notes xmlns:a="http://schemas.openxmlformats.org/drawingml/2006/main" xmlns:p="http://schemas.openxmlformats.org/presentationml/2006/main" xmlns:r="http://schemas.openxmlformats.org/officeDocument/2006/relationships">
-  <p:cSld>
-    <p:spTree>
-      <p:nvGrpSpPr>
-        <p:cNvPr id="1" name=""/>
-        <p:cNvGrpSpPr/>
-        <p:nvPr/>
-      </p:nvGrpSpPr>
-      <p:grpSpPr>
-        <a:xfrm>
-          <a:off x="0" y="0"/>
-          <a:ext cx="0" cy="0"/>
-          <a:chOff x="0" y="0"/>
-          <a:chExt cx="0" cy="0"/>
-        </a:xfrm>
-      </p:grpSpPr>
-      <p:sp>
-        <p:nvSpPr>
-          <p:cNvPr id="2" name="Slide Image Placeholder 1"/>
-          <p:cNvSpPr>
-            <a:spLocks noGrp="1"/>
-          </p:cNvSpPr>
-          <p:nvPr>
-            <p:ph type="sldImg" idx="2"/>
-          </p:nvPr>
-        </p:nvSpPr>
-        <p:spPr/>
-      </p:sp>
-      <p:sp>
-        <p:nvSpPr>
-          <p:cNvPr id="3" name="Notes Placeholder 2"/>
-          <p:cNvSpPr>
-            <a:spLocks noGrp="1"/>
-          </p:cNvSpPr>
-          <p:nvPr>
-            <p:ph type="body" idx="3" sz="quarter"/>
-          </p:nvPr>
-        </p:nvSpPr>
-        <p:spPr/>
-        <p:txBody>
-          <a:bodyPr/>
-          <a:lstStyle/>
-          <a:p>
-            <a:r>
-              <a:t>Fuera de la lamina (habla de la practica, no del tema):</a:t>
-            </a:r>
-          </a:p>
-          <a:p>
-            <a:r>
-              <a:t>- Lo de hoy no es una isla, y decirlo en voz alta le da sentido al entregable.</a:t>
-            </a:r>
-          </a:p>
-          <a:p>
-            <a:r>
-              <a:t>- La Clase 4 agrega disparadores de auditoria y el plan de respaldo, que son el otro componente de este mismo criterio de rubrica.</a:t>
-            </a:r>
-          </a:p>
-          <a:p>
-            <a:r>
-              <a:t>- En la rubrica del PI, seguridad y respaldo valen 15 de los 100 puntos.</a:t>
-            </a:r>
-          </a:p>
-        </p:txBody>
-      </p:sp>
-      <p:sp>
-        <p:nvSpPr>
-          <p:cNvPr id="4" name="Slide Number Placeholder 3"/>
-          <p:cNvSpPr>
-            <a:spLocks noGrp="1"/>
-          </p:cNvSpPr>
-          <p:nvPr>
-            <p:ph type="sldNum" idx="5" sz="quarter"/>
-          </p:nvPr>
-        </p:nvSpPr>
-        <p:spPr/>
-      </p:sp>
-    </p:spTree>
-  </p:cSld>
-  <p:clrMapOvr>
-    <a:masterClrMapping/>
-  </p:clrMapOvr>
-</p:notes>
-</file>
-
-<file path=ppt/notesSlides/notesSlide17.xml><?xml version="1.0" encoding="utf-8"?>
-<p:notes xmlns:a="http://schemas.openxmlformats.org/drawingml/2006/main" xmlns:p="http://schemas.openxmlformats.org/presentationml/2006/main" xmlns:r="http://schemas.openxmlformats.org/officeDocument/2006/relationships">
-  <p:cSld>
-    <p:spTree>
-      <p:nvGrpSpPr>
-        <p:cNvPr id="1" name=""/>
-        <p:cNvGrpSpPr/>
-        <p:nvPr/>
-      </p:nvGrpSpPr>
-      <p:grpSpPr>
-        <a:xfrm>
-          <a:off x="0" y="0"/>
-          <a:ext cx="0" cy="0"/>
-          <a:chOff x="0" y="0"/>
-          <a:chExt cx="0" cy="0"/>
-        </a:xfrm>
-      </p:grpSpPr>
-      <p:sp>
-        <p:nvSpPr>
-          <p:cNvPr id="2" name="Slide Image Placeholder 1"/>
-          <p:cNvSpPr>
-            <a:spLocks noGrp="1"/>
-          </p:cNvSpPr>
-          <p:nvPr>
-            <p:ph type="sldImg" idx="2"/>
-          </p:nvPr>
-        </p:nvSpPr>
-        <p:spPr/>
-      </p:sp>
-      <p:sp>
-        <p:nvSpPr>
-          <p:cNvPr id="3" name="Notes Placeholder 2"/>
-          <p:cNvSpPr>
-            <a:spLocks noGrp="1"/>
-          </p:cNvSpPr>
-          <p:nvPr>
-            <p:ph type="body" idx="3" sz="quarter"/>
-          </p:nvPr>
-        </p:nvSpPr>
-        <p:spPr/>
-        <p:txBody>
-          <a:bodyPr/>
-          <a:lstStyle/>
-          <a:p>
-            <a:r>
               <a:t>O el rol no tiene USAGE sobre el esquema.</a:t>
             </a:r>
           </a:p>
           <a:p>
             <a:r>
               <a:t>Lo que no se puede es conectarse como recepcion en una segunda sesion, porque el entorno tiene un solo usuario con login.</a:t>
-            </a:r>
-          </a:p>
-        </p:txBody>
-      </p:sp>
-      <p:sp>
-        <p:nvSpPr>
-          <p:cNvPr id="4" name="Slide Number Placeholder 3"/>
-          <p:cNvSpPr>
-            <a:spLocks noGrp="1"/>
-          </p:cNvSpPr>
-          <p:nvPr>
-            <p:ph type="sldNum" idx="5" sz="quarter"/>
-          </p:nvPr>
-        </p:nvSpPr>
-        <p:spPr/>
-      </p:sp>
-    </p:spTree>
-  </p:cSld>
-  <p:clrMapOvr>
-    <a:masterClrMapping/>
-  </p:clrMapOvr>
-</p:notes>
-</file>
-
-<file path=ppt/notesSlides/notesSlide18.xml><?xml version="1.0" encoding="utf-8"?>
-<p:notes xmlns:a="http://schemas.openxmlformats.org/drawingml/2006/main" xmlns:p="http://schemas.openxmlformats.org/presentationml/2006/main" xmlns:r="http://schemas.openxmlformats.org/officeDocument/2006/relationships">
-  <p:cSld>
-    <p:spTree>
-      <p:nvGrpSpPr>
-        <p:cNvPr id="1" name=""/>
-        <p:cNvGrpSpPr/>
-        <p:nvPr/>
-      </p:nvGrpSpPr>
-      <p:grpSpPr>
-        <a:xfrm>
-          <a:off x="0" y="0"/>
-          <a:ext cx="0" cy="0"/>
-          <a:chOff x="0" y="0"/>
-          <a:chExt cx="0" cy="0"/>
-        </a:xfrm>
-      </p:grpSpPr>
-      <p:sp>
-        <p:nvSpPr>
-          <p:cNvPr id="2" name="Slide Image Placeholder 1"/>
-          <p:cNvSpPr>
-            <a:spLocks noGrp="1"/>
-          </p:cNvSpPr>
-          <p:nvPr>
-            <p:ph type="sldImg" idx="2"/>
-          </p:nvPr>
-        </p:nvSpPr>
-        <p:spPr/>
-      </p:sp>
-      <p:sp>
-        <p:nvSpPr>
-          <p:cNvPr id="3" name="Notes Placeholder 2"/>
-          <p:cNvSpPr>
-            <a:spLocks noGrp="1"/>
-          </p:cNvSpPr>
-          <p:nvPr>
-            <p:ph type="body" idx="3" sz="quarter"/>
-          </p:nvPr>
-        </p:nvSpPr>
-        <p:spPr/>
-        <p:txBody>
-          <a:bodyPr/>
-          <a:lstStyle/>
-          <a:p>
-            <a:r>
-              <a:t>Fuera de la lamina (habla de la practica, no del tema):</a:t>
-            </a:r>
-          </a:p>
-          <a:p>
-            <a:r>
-              <a:t>- Lo que pide el taller</a:t>
-            </a:r>
-          </a:p>
-        </p:txBody>
-      </p:sp>
-      <p:sp>
-        <p:nvSpPr>
-          <p:cNvPr id="4" name="Slide Number Placeholder 3"/>
-          <p:cNvSpPr>
-            <a:spLocks noGrp="1"/>
-          </p:cNvSpPr>
-          <p:nvPr>
-            <p:ph type="sldNum" idx="5" sz="quarter"/>
-          </p:nvPr>
-        </p:nvSpPr>
-        <p:spPr/>
-      </p:sp>
-    </p:spTree>
-  </p:cSld>
-  <p:clrMapOvr>
-    <a:masterClrMapping/>
-  </p:clrMapOvr>
-</p:notes>
-</file>
-
-<file path=ppt/notesSlides/notesSlide19.xml><?xml version="1.0" encoding="utf-8"?>
-<p:notes xmlns:a="http://schemas.openxmlformats.org/drawingml/2006/main" xmlns:p="http://schemas.openxmlformats.org/presentationml/2006/main" xmlns:r="http://schemas.openxmlformats.org/officeDocument/2006/relationships">
-  <p:cSld>
-    <p:spTree>
-      <p:nvGrpSpPr>
-        <p:cNvPr id="1" name=""/>
-        <p:cNvGrpSpPr/>
-        <p:nvPr/>
-      </p:nvGrpSpPr>
-      <p:grpSpPr>
-        <a:xfrm>
-          <a:off x="0" y="0"/>
-          <a:ext cx="0" cy="0"/>
-          <a:chOff x="0" y="0"/>
-          <a:chExt cx="0" cy="0"/>
-        </a:xfrm>
-      </p:grpSpPr>
-      <p:sp>
-        <p:nvSpPr>
-          <p:cNvPr id="2" name="Slide Image Placeholder 1"/>
-          <p:cNvSpPr>
-            <a:spLocks noGrp="1"/>
-          </p:cNvSpPr>
-          <p:nvPr>
-            <p:ph type="sldImg" idx="2"/>
-          </p:nvPr>
-        </p:nvSpPr>
-        <p:spPr/>
-      </p:sp>
-      <p:sp>
-        <p:nvSpPr>
-          <p:cNvPr id="3" name="Notes Placeholder 2"/>
-          <p:cNvSpPr>
-            <a:spLocks noGrp="1"/>
-          </p:cNvSpPr>
-          <p:nvPr>
-            <p:ph type="body" idx="3" sz="quarter"/>
-          </p:nvPr>
-        </p:nvSpPr>
-        <p:spPr/>
-        <p:txBody>
-          <a:bodyPr/>
-          <a:lstStyle/>
-          <a:p>
-            <a:r>
-              <a:t>Fuera de la lamina (habla de la practica, no del tema):</a:t>
-            </a:r>
-          </a:p>
-          <a:p>
-            <a:r>
-              <a:t>- Si el entorno no deja cambiar de rol, se documenta el intento: eso es una brecha de verificacion del entregable.</a:t>
-            </a:r>
-          </a:p>
-          <a:p>
-            <a:r>
-              <a:t>- La politica es lo que le pone responsable y plazo a cada uno: son las 5 secciones del entregable</a:t>
             </a:r>
           </a:p>
         </p:txBody>
@@ -1437,12 +1045,32 @@
           <a:lstStyle/>
           <a:p>
             <a:r>
-              <a:t>Fuera de la lamina (habla de la practica, no del tema):</a:t>
-            </a:r>
-          </a:p>
-          <a:p>
-            <a:r>
-              <a:t>- Esta clase se dicta en sesion virtual sincrona, en el bloque normal de 120 minutos: hay explicacion en vivo, taller acompanado y espacio para preguntar, asi que este texto es el material con el que el docente dicta y no una lectura que sustituya la clase.</a:t>
+              <a:t>EXECUTE sobre una funcion o un procedimiento</a:t>
+            </a:r>
+          </a:p>
+          <a:p>
+            <a:r>
+              <a:t>USAGE sobre un esquema o una secuencia</a:t>
+            </a:r>
+          </a:p>
+          <a:p>
+            <a:r>
+              <a:t>CONNECT y TEMPORARY sobre la base de datos.</a:t>
+            </a:r>
+          </a:p>
+          <a:p>
+            <a:r>
+              <a:t>Vale la pena decirlo porque el estudiante que busque en internet va a encontrar GRANT CREATE SESSION, que es sintaxis de Oracle y en PostgreSQL no existe.</a:t>
+            </a:r>
+          </a:p>
+          <a:p>
+            <a:r>
+              <a:t>La distincion practica que hay que dejar clara es la que separa DDL de DML.</a:t>
+            </a:r>
+          </a:p>
+          <a:p>
+            <a:r>
+              <a:t>Si su cuenta puede ejecutar DROP TABLE cita, un error de copiar y pegar borra la agenda completa, y ningun respaldo de la noche anterior devuelve las citas que se agendaron hoy.</a:t>
             </a:r>
           </a:p>
         </p:txBody>
@@ -1512,32 +1140,17 @@
           <a:lstStyle/>
           <a:p>
             <a:r>
-              <a:t>EXECUTE sobre una funcion o un procedimiento</a:t>
-            </a:r>
-          </a:p>
-          <a:p>
-            <a:r>
-              <a:t>USAGE sobre un esquema o una secuencia</a:t>
-            </a:r>
-          </a:p>
-          <a:p>
-            <a:r>
-              <a:t>CONNECT y TEMPORARY sobre la base de datos.</a:t>
-            </a:r>
-          </a:p>
-          <a:p>
-            <a:r>
-              <a:t>Vale la pena decirlo porque el estudiante que busque en internet va a encontrar GRANT CREATE SESSION, que es sintaxis de Oracle y en PostgreSQL no existe.</a:t>
-            </a:r>
-          </a:p>
-          <a:p>
-            <a:r>
-              <a:t>La distincion practica que hay que dejar clara es la que separa DDL de DML.</a:t>
-            </a:r>
-          </a:p>
-          <a:p>
-            <a:r>
-              <a:t>Si su cuenta puede ejecutar DROP TABLE cita, un error de copiar y pegar borra la agenda completa, y ningun respaldo de la noche anterior devuelve las citas que se agendaron hoy.</a:t>
+              <a:t>Existe por una razon aritmetica que conviene poner en el tablero con los numeros de VetCare.</a:t>
+            </a:r>
+          </a:p>
+          <a:p>
+            <a:r>
+              <a:t>Sobre cada uno hay hasta cinco acciones posibles, asi que la matriz completa tiene cincuenta celdas.</a:t>
+            </a:r>
+          </a:p>
+          <a:p>
+            <a:r>
+              <a:t>Ese es el argumento real que el docente debe transmitir: el rol no ahorra tipeo, ahorra olvidos, y los olvidos en materia de permisos son precisamente los que producen incidentes de seguridad.</a:t>
             </a:r>
           </a:p>
         </p:txBody>
@@ -1607,17 +1220,22 @@
           <a:lstStyle/>
           <a:p>
             <a:r>
-              <a:t>Existe por una razon aritmetica que conviene poner en el tablero con los numeros de VetCare.</a:t>
-            </a:r>
-          </a:p>
-          <a:p>
-            <a:r>
-              <a:t>Sobre cada uno hay hasta cinco acciones posibles, asi que la matriz completa tiene cincuenta celdas.</a:t>
-            </a:r>
-          </a:p>
-          <a:p>
-            <a:r>
-              <a:t>Ese es el argumento real que el docente debe transmitir: el rol no ahorra tipeo, ahorra olvidos, y los olvidos en materia de permisos son precisamente los que producen incidentes de seguridad.</a:t>
+              <a:t>Por eso los cuatro roles de la clase se crean con CREATE ROLE recepcion NOLOGIN: son bolsas de privilegios, no identidades.</a:t>
+            </a:r>
+          </a:p>
+          <a:p>
+            <a:r>
+              <a:t>La persona viene despues, como CREATE ROLE ana_gomez LOGIN PASSWORD '...', y recibe la bolsa con GRANT recepcion TO ana_gomez.</a:t>
+            </a:r>
+          </a:p>
+          <a:p>
+            <a:r>
+              <a:t>Esa herencia es la que hace que al modificar el rol se corrijan todas las personas a la vez.</a:t>
+            </a:r>
+          </a:p>
+          <a:p>
+            <a:r>
+              <a:t>Conviene decir esto tal cual, porque un estudiante despierto va a preguntar por que el sufijo y merece la respuesta correcta y no una inventada.</a:t>
             </a:r>
           </a:p>
         </p:txBody>
@@ -1687,22 +1305,32 @@
           <a:lstStyle/>
           <a:p>
             <a:r>
-              <a:t>Por eso los cuatro roles del taller se crean con CREATE ROLE recepcion NOLOGIN: son bolsas de privilegios, no identidades.</a:t>
-            </a:r>
-          </a:p>
-          <a:p>
-            <a:r>
-              <a:t>La persona viene despues, como CREATE ROLE ana_gomez LOGIN PASSWORD '...', y recibe la bolsa con GRANT recepcion TO ana_gomez.</a:t>
-            </a:r>
-          </a:p>
-          <a:p>
-            <a:r>
-              <a:t>Esa herencia es la que hace que al modificar el rol se corrijan todas las personas a la vez.</a:t>
-            </a:r>
-          </a:p>
-          <a:p>
-            <a:r>
-              <a:t>Conviene decir esto tal cual, porque un estudiante despierto va a preguntar por que el sufijo y merece la respuesta correcta y no una inventada.</a:t>
+              <a:t>El principio de minimo privilegio dice que cada rol recibe exactamente lo que necesita para cumplir su funcion y ni un privilegio mas.</a:t>
+            </a:r>
+          </a:p>
+          <a:p>
+            <a:r>
+              <a:t>Aplicado a VetCare deja una matriz muy concreta y defendible.</a:t>
+            </a:r>
+          </a:p>
+          <a:p>
+            <a:r>
+              <a:t>El rol recepcion necesita SELECT sobre mascota, dueno y veterinario para poder buscar y agendar, y SELECT, INSERT y UPDATE sobre cita para agendar y reprogramar; nada mas.</a:t>
+            </a:r>
+          </a:p>
+          <a:p>
+            <a:r>
+              <a:t>El rol auditor recibe unicamente SELECT, y jamas una escritura.</a:t>
+            </a:r>
+          </a:p>
+          <a:p>
+            <a:r>
+              <a:t>Eso se llama borrado logico, y hace que el privilegio DELETE sea innecesario para casi todos los usuarios, lo que a su vez elimina de raiz la posibilidad de una perdida accidental de informacion.</a:t>
+            </a:r>
+          </a:p>
+          <a:p>
+            <a:r>
+              <a:t>Conviene escribir esos dos valores en el tablero, porque el estudiante que suponga activa = 0 escribira un UPDATE que el CHECK va a rechazar y perdera diez minutos buscando el error en otra parte.</a:t>
             </a:r>
           </a:p>
         </p:txBody>
@@ -1772,32 +1400,22 @@
           <a:lstStyle/>
           <a:p>
             <a:r>
-              <a:t>El principio de minimo privilegio dice que cada rol recibe exactamente lo que necesita para cumplir su funcion y ni un privilegio mas.</a:t>
-            </a:r>
-          </a:p>
-          <a:p>
-            <a:r>
-              <a:t>Aplicado a VetCare deja una matriz muy concreta y defendible.</a:t>
-            </a:r>
-          </a:p>
-          <a:p>
-            <a:r>
-              <a:t>El rol recepcion necesita SELECT sobre mascota, dueno y veterinario para poder buscar y agendar, y SELECT, INSERT y UPDATE sobre cita para agendar y reprogramar; nada mas.</a:t>
-            </a:r>
-          </a:p>
-          <a:p>
-            <a:r>
-              <a:t>El rol auditor recibe unicamente SELECT, y jamas una escritura.</a:t>
-            </a:r>
-          </a:p>
-          <a:p>
-            <a:r>
-              <a:t>Eso se llama borrado logico, y hace que el privilegio DELETE sea innecesario para casi todos los usuarios, lo que a su vez elimina de raiz la posibilidad de una perdida accidental de informacion.</a:t>
-            </a:r>
-          </a:p>
-          <a:p>
-            <a:r>
-              <a:t>Conviene escribir esos dos valores en el tablero, porque el estudiante que suponga activa = 0 escribira un UPDATE que el CHECK va a rechazar y perdera diez minutos buscando el error en otra parte.</a:t>
+              <a:t>La respuesta que el docente debe dar es que el problema no es la confianza en la persona sino el dano posible por un error o por una sesion robada.</a:t>
+            </a:r>
+          </a:p>
+          <a:p>
+            <a:r>
+              <a:t>Si alguien roba la sesion del recepcionista, con minimo privilegio el atacante ve agendas y datos de contacto; con privilegios de administrador, borra la base completa.</a:t>
+            </a:r>
+          </a:p>
+          <a:p>
+            <a:r>
+              <a:t>El permiso no mide cuanto se quiere a un empleado, mide cuanto se puede perder.</a:t>
+            </a:r>
+          </a:p>
+          <a:p>
+            <a:r>
+              <a:t>Ningun rol puede a la vez crear, modificar y aprobar el mismo registro.</a:t>
             </a:r>
           </a:p>
         </p:txBody>
@@ -1867,17 +1485,22 @@
           <a:lstStyle/>
           <a:p>
             <a:r>
-              <a:t>La respuesta que el docente debe dar es que el problema no es la confianza en la persona sino el dano posible por un error o por una sesion robada.</a:t>
-            </a:r>
-          </a:p>
-          <a:p>
-            <a:r>
-              <a:t>Si alguien roba la sesion del recepcionista, con minimo privilegio el atacante ve agendas y datos de contacto; con privilegios de administrador, borra la base completa.</a:t>
-            </a:r>
-          </a:p>
-          <a:p>
-            <a:r>
-              <a:t>El permiso no mide cuanto se quiere a un empleado, mide cuanto se puede perder.</a:t>
+              <a:t>GRANT otorga y REVOKE retira, y ambos operan igual sobre usuarios y sobre roles.</a:t>
+            </a:r>
+          </a:p>
+          <a:p>
+            <a:r>
+              <a:t>Para retirar un permiso</a:t>
+            </a:r>
+          </a:p>
+          <a:p>
+            <a:r>
+              <a:t>Hay tres detalles operativos que evitan la mitad de los tropiezos de la clase.</a:t>
+            </a:r>
+          </a:p>
+          <a:p>
+            <a:r>
+              <a:t>Fuera de la lamina (habla de la practica): Eso explica por que el REVOKE de DELETE que pide el taller es, tecnicamente, redundante; se escribe de todos modos porque es la evidencia documental de una decision de diseno, y quien revise el script tiene que poder ver que la ausencia de DELETE fue deliberada y no un olvido.</a:t>
             </a:r>
           </a:p>
         </p:txBody>
@@ -1947,22 +1570,7 @@
           <a:lstStyle/>
           <a:p>
             <a:r>
-              <a:t>GRANT otorga y REVOKE retira, y ambos operan igual sobre usuarios y sobre roles.</a:t>
-            </a:r>
-          </a:p>
-          <a:p>
-            <a:r>
-              <a:t>Para retirar un permiso</a:t>
-            </a:r>
-          </a:p>
-          <a:p>
-            <a:r>
-              <a:t>Hay tres detalles operativos que evitan la mitad de los tropiezos del taller.</a:t>
-            </a:r>
-          </a:p>
-          <a:p>
-            <a:r>
-              <a:t>Eso explica por que el REVOKE de DELETE que pide el taller es, tecnicamente, redundante; se escribe de todos modos porque es la evidencia documental de una decision de diseno, y quien revise el script tiene que poder ver que la ausencia de DELETE fue deliberada y no un olvido.</a:t>
+              <a:t>Hay dos mecanismos que conviene conocer porque hacen dano en silencio.</a:t>
             </a:r>
           </a:p>
         </p:txBody>
@@ -2032,7 +1640,27 @@
           <a:lstStyle/>
           <a:p>
             <a:r>
-              <a:t>Hay dos mecanismos que conviene conocer porque hacen dano en silencio.</a:t>
+              <a:t>Aqui esta el concepto que hace la diferencia entre una matriz de aficionado y una defendible.</a:t>
+            </a:r>
+          </a:p>
+          <a:p>
+            <a:r>
+              <a:t>Pero la recepcionista solo necesita el nombre y el telefono para identificar a quien llama, y no tiene por que ver el correo electronico de los clientes.</a:t>
+            </a:r>
+          </a:p>
+          <a:p>
+            <a:r>
+              <a:t>El primero es la vista.</a:t>
+            </a:r>
+          </a:p>
+          <a:p>
+            <a:r>
+              <a:t>Lo que hace que funcione, y es el punto que el estudiante no cree hasta que lo ve, es que la consulta de la vista se ejecuta con los privilegios de su PROPIETARIO y no con los de quien la consulta: por eso se puede dar SELECT sobre la vista a recepcion y al mismo tiempo hacer REVOKE SELECT ON dueno FROM recepcion, y el rol sigue viendo el telefono del dueno a traves de la vista pero no puede consultar la tabla directamente.</a:t>
+            </a:r>
+          </a:p>
+          <a:p>
+            <a:r>
+              <a:t>Fuera de la lamina (habla de la practica): Aqui esta el concepto que hace la diferencia entre una matriz de aficionado y una defendible, y es la parte que el taller evalua con veinte puntos.</a:t>
             </a:r>
           </a:p>
         </p:txBody>
@@ -6654,6 +6282,22 @@
               <a:t>–   Aqui aparece la primera pregunta previsible del estudiante: «no es mas facil darle todo al jefe y ya?».</a:t>
             </a:r>
           </a:p>
+          <a:p>
+            <a:pPr>
+              <a:spcAft>
+                <a:spcPts val="800"/>
+              </a:spcAft>
+            </a:pPr>
+            <a:r>
+              <a:rPr sz="2000" b="0" i="0">
+                <a:solidFill>
+                  <a:srgbClr val="333333"/>
+                </a:solidFill>
+                <a:latin typeface="Calibri"/>
+              </a:rPr>
+              <a:t>–   En terminos de privilegios: recepcion puede INSERT en factura pero no UPDATE sobre un total ya emitido, y auditor solo tiene SELECT.</a:t>
+            </a:r>
+          </a:p>
         </p:txBody>
       </p:sp>
       <p:sp>
@@ -7158,6 +6802,38 @@
               <a:t>–   De modo que la tabla que se cree la semana entrante quedara fuera y nadie se dara cuenta; para eso existe ALTER DEFAULT PRIVILEGES, que vale nombrar sin desarrollar.</a:t>
             </a:r>
           </a:p>
+          <a:p>
+            <a:pPr>
+              <a:spcAft>
+                <a:spcPts val="800"/>
+              </a:spcAft>
+            </a:pPr>
+            <a:r>
+              <a:rPr sz="2000" b="0" i="0">
+                <a:solidFill>
+                  <a:srgbClr val="333333"/>
+                </a:solidFill>
+                <a:latin typeface="Calibri"/>
+              </a:rPr>
+              <a:t>–   Error comun: creer que REVOKE de un privilegio que nunca se otorgo es un error: PostgreSQL lo ejecuta sin error y no cambia nada.</a:t>
+            </a:r>
+          </a:p>
+          <a:p>
+            <a:pPr>
+              <a:spcAft>
+                <a:spcPts val="800"/>
+              </a:spcAft>
+            </a:pPr>
+            <a:r>
+              <a:rPr sz="2000" b="0" i="0">
+                <a:solidFill>
+                  <a:srgbClr val="333333"/>
+                </a:solidFill>
+                <a:latin typeface="Calibri"/>
+              </a:rPr>
+              <a:t>–   Tambien es comun olvidar que los privilegios concedidos a PUBLIC los recibe todo rol, incluido el que se acaba de restringir.</a:t>
+            </a:r>
+          </a:p>
         </p:txBody>
       </p:sp>
       <p:sp>
@@ -8015,7 +7691,7 @@
                 </a:solidFill>
                 <a:latin typeface="Calibri"/>
               </a:rPr>
-              <a:t>–   Aqui esta el concepto que hace la diferencia entre una matriz de aficionado y una defendible.</a:t>
+              <a:t>–   Un GRANT sobre una tabla es todo o nada en filas y columnas: quien tiene SELECT sobre dueno ve las seis columnas y las seis filas.</a:t>
             </a:r>
           </a:p>
           <a:p>
@@ -8031,7 +7707,7 @@
                 </a:solidFill>
                 <a:latin typeface="Calibri"/>
               </a:rPr>
-              <a:t>–   Un GRANT sobre una tabla es todo o nada en filas y columnas: quien tiene SELECT sobre dueno ve las seis columnas y las seis filas.</a:t>
+              <a:t>–   Hay dos mecanismos para recortar esa superficie y hay que saber cuando usar cada uno.</a:t>
             </a:r>
           </a:p>
           <a:p>
@@ -8047,7 +7723,7 @@
                 </a:solidFill>
                 <a:latin typeface="Calibri"/>
               </a:rPr>
-              <a:t>–   Hay dos mecanismos para recortar esa superficie y hay que saber cuando usar cada uno.</a:t>
+              <a:t>–   Una vista es una consulta guardada con nombre, que se usa como si fuera una tabla; se crea con CREATE VIEW v_agenda_recepcion AS SELECT... y se le otorga SELECT al rol.</a:t>
             </a:r>
           </a:p>
           <a:p>
@@ -8063,7 +7739,7 @@
                 </a:solidFill>
                 <a:latin typeface="Calibri"/>
               </a:rPr>
-              <a:t>–   Una vista es una consulta guardada con nombre, que se usa como si fuera una tabla; se crea con CREATE VIEW v_agenda_recepcion AS SELECT... y se le otorga SELECT al rol.</a:t>
+              <a:t>–   La vista recorta las dos dimensiones a la vez: filas, con un WHERE estado &lt;&gt; 'CANCELADA', y columnas, con solo dejar el email fuera del SELECT.</a:t>
             </a:r>
           </a:p>
           <a:p>
@@ -8079,7 +7755,7 @@
                 </a:solidFill>
                 <a:latin typeface="Calibri"/>
               </a:rPr>
-              <a:t>–   La vista recorta las dos dimensiones a la vez: filas, con un WHERE estado &lt;&gt; 'CANCELADA', y columnas, con solo dejar el email fuera del SELECT.</a:t>
+              <a:t>–   El segundo mecanismo es el privilegio por columna: ON dueno TO veterinario_rol otorga lectura de dos columnas y de ninguna otra, sin crear ningun objeto nuevo.</a:t>
             </a:r>
           </a:p>
         </p:txBody>
@@ -8411,6 +8087,40 @@
               <a:t>–   Cada lámina se sostiene sola: sirve para repasar aunque hayas faltado.</a:t>
             </a:r>
           </a:p>
+          <a:p>
+            <a:pPr>
+              <a:spcAft>
+                <a:spcPts val="800"/>
+              </a:spcAft>
+            </a:pPr>
+            <a:r>
+              <a:rPr sz="2000" b="0" i="0">
+                <a:solidFill>
+                  <a:srgbClr val="333333"/>
+                </a:solidFill>
+                <a:latin typeface="Calibri"/>
+              </a:rPr>
+              <a:t>–   </a:t>
+            </a:r>
+            <a:r>
+              <a:rPr sz="2000" b="1" i="0">
+                <a:solidFill>
+                  <a:srgbClr val="333333"/>
+                </a:solidFill>
+                <a:latin typeface="Calibri"/>
+              </a:rPr>
+              <a:t>Conceptos de hoy:</a:t>
+            </a:r>
+            <a:r>
+              <a:rPr sz="2000" b="0" i="0">
+                <a:solidFill>
+                  <a:srgbClr val="333333"/>
+                </a:solidFill>
+                <a:latin typeface="Calibri"/>
+              </a:rPr>
+              <a:t> Los cuatro terminos que se confunden todo el tiempo · Privilegio · Rol · En PostgreSQL usuario y rol son lo mismo, y por eso hoy se escribe NOLOGIN.</a:t>
+            </a:r>
+          </a:p>
         </p:txBody>
       </p:sp>
       <p:sp>
@@ -8628,22 +8338,6 @@
                 </a:solidFill>
                 <a:latin typeface="Calibri"/>
               </a:rPr>
-              <a:t>–   El segundo mecanismo es el privilegio por columna: ON dueno TO veterinario_rol otorga lectura de dos columnas y de ninguna otra, sin crear ningun objeto nuevo.</a:t>
-            </a:r>
-          </a:p>
-          <a:p>
-            <a:pPr>
-              <a:spcAft>
-                <a:spcPts val="800"/>
-              </a:spcAft>
-            </a:pPr>
-            <a:r>
-              <a:rPr sz="2000" b="0" i="0">
-                <a:solidFill>
-                  <a:srgbClr val="333333"/>
-                </a:solidFill>
-                <a:latin typeface="Calibri"/>
-              </a:rPr>
               <a:t>–   Tiene una consecuencia que hay que advertir en clase porque genera un error confuso: ese rol ya no puede escribir SELECT * FROM dueno, porque el asterisco pide todas las columnas y dos de ellas le estan negadas; tiene que nombrar las columnas explicitamente.</a:t>
             </a:r>
           </a:p>
@@ -9911,22 +9605,6 @@
               <a:t>–   El problema que resuelve es la cuenta huerfana: la del pasante que se fue hace un ano y cuya clave sigue funcionando.</a:t>
             </a:r>
           </a:p>
-          <a:p>
-            <a:pPr>
-              <a:spcAft>
-                <a:spcPts val="800"/>
-              </a:spcAft>
-            </a:pPr>
-            <a:r>
-              <a:rPr sz="2000" b="0" i="0">
-                <a:solidFill>
-                  <a:srgbClr val="333333"/>
-                </a:solidFill>
-                <a:latin typeface="Calibri"/>
-              </a:rPr>
-              <a:t>–   Una, nunca cuentas compartidas: si tres recepcionistas entran con la cuenta recepcion1, la tabla de auditoria dira que recepcion1 cancelo la cita y no habra forma de saber quien fue</a:t>
-            </a:r>
-          </a:p>
         </p:txBody>
       </p:sp>
       <p:sp>
@@ -10144,6 +9822,22 @@
                 </a:solidFill>
                 <a:latin typeface="Calibri"/>
               </a:rPr>
+              <a:t>–   Una, nunca cuentas compartidas: si tres recepcionistas entran con la cuenta recepcion1, la tabla de auditoria dira que recepcion1 cancelo la cita y no habra forma de saber quien fue</a:t>
+            </a:r>
+          </a:p>
+          <a:p>
+            <a:pPr>
+              <a:spcAft>
+                <a:spcPts val="800"/>
+              </a:spcAft>
+            </a:pPr>
+            <a:r>
+              <a:rPr sz="2000" b="0" i="0">
+                <a:solidFill>
+                  <a:srgbClr val="333333"/>
+                </a:solidFill>
+                <a:latin typeface="Calibri"/>
+              </a:rPr>
               <a:t>–   La trazabilidad se pierde de manera irrecuperable y con ella cualquier investigacion posterior.</a:t>
             </a:r>
           </a:p>
@@ -10177,22 +9871,6 @@
                 <a:latin typeface="Calibri"/>
               </a:rPr>
               <a:t>–   La cuarta seccion, la revision periodica, se apoya en la consulta de information_schema que acaba de verse: la evidencia de la auditoria es su salida, y la politica dice cada cuanto se corre y quien la firma.</a:t>
-            </a:r>
-          </a:p>
-          <a:p>
-            <a:pPr>
-              <a:spcAft>
-                <a:spcPts val="800"/>
-              </a:spcAft>
-            </a:pPr>
-            <a:r>
-              <a:rPr sz="2000" b="0" i="0">
-                <a:solidFill>
-                  <a:srgbClr val="333333"/>
-                </a:solidFill>
-                <a:latin typeface="Calibri"/>
-              </a:rPr>
-              <a:t>–   La quinta seccion es el limite de este entorno, y se desarrolla completa en «El motor de hoy es PostgreSQL» un poco mas abajo</a:t>
             </a:r>
           </a:p>
         </p:txBody>
@@ -10412,6 +10090,22 @@
                 </a:solidFill>
                 <a:latin typeface="Calibri"/>
               </a:rPr>
+              <a:t>–   La quinta seccion es el limite de este entorno, y se desarrolla completa en «El motor de hoy es PostgreSQL» un poco mas abajo.</a:t>
+            </a:r>
+          </a:p>
+          <a:p>
+            <a:pPr>
+              <a:spcAft>
+                <a:spcPts val="800"/>
+              </a:spcAft>
+            </a:pPr>
+            <a:r>
+              <a:rPr sz="2000" b="0" i="0">
+                <a:solidFill>
+                  <a:srgbClr val="333333"/>
+                </a:solidFill>
+                <a:latin typeface="Calibri"/>
+              </a:rPr>
               <a:t>–   Al dictar la politica conviene bajarla a nombres propios de Huellitas en lugar de dejarla en abstracto: quien autoriza el alta es la administradora de la clinica</a:t>
             </a:r>
           </a:p>
@@ -10715,6 +10409,22 @@
               <a:t>–   La diferencia entre las dos cosas es justamente lo que el estudiante tiene que entender: SET ROLE cambia con que permisos se evalua lo que escribo</a:t>
             </a:r>
           </a:p>
+          <a:p>
+            <a:pPr>
+              <a:spcAft>
+                <a:spcPts val="800"/>
+              </a:spcAft>
+            </a:pPr>
+            <a:r>
+              <a:rPr sz="2000" b="0" i="0">
+                <a:solidFill>
+                  <a:srgbClr val="333333"/>
+                </a:solidFill>
+                <a:latin typeface="Calibri"/>
+              </a:rPr>
+              <a:t>–   Y conectarse como otro usuario cambia quien esta conectado; para probar que un privilegio falta, basta lo primero.</a:t>
+            </a:r>
+          </a:p>
         </p:txBody>
       </p:sp>
       <p:sp>
@@ -10932,22 +10642,6 @@
                 </a:solidFill>
                 <a:latin typeface="Calibri"/>
               </a:rPr>
-              <a:t>–   Y conectarse como otro usuario cambia quien esta conectado; para probar que un privilegio falta, basta lo primero.</a:t>
-            </a:r>
-          </a:p>
-          <a:p>
-            <a:pPr>
-              <a:spcAft>
-                <a:spcPts val="800"/>
-              </a:spcAft>
-            </a:pPr>
-            <a:r>
-              <a:rPr sz="2000" b="0" i="0">
-                <a:solidFill>
-                  <a:srgbClr val="333333"/>
-                </a:solidFill>
-                <a:latin typeface="Calibri"/>
-              </a:rPr>
               <a:t>–   Oracle Live SQL y DB Fiddle siguen en el kit, pero cambian de papel: DB Fiddle sirve para probar SQL suelto y Live SQL solo como contraste de sintaxis, porque alli se escribe CREATE USER...</a:t>
             </a:r>
           </a:p>
@@ -16758,7 +16452,7 @@
                 </a:solidFill>
                 <a:latin typeface="Calibri"/>
               </a:rPr>
-              <a:t/>
+              <a:t>Lo que pide el minimo privilegio</a:t>
             </a:r>
           </a:p>
         </p:txBody>
@@ -17595,7 +17289,7 @@
                 </a:solidFill>
                 <a:latin typeface="Calibri"/>
               </a:rPr>
-              <a:t>Cada flecha del ciclo es un GRANT o un REVOKE. La politica es lo que le pone responsable y plazo a cada uno.</a:t>
+              <a:t>Cada flecha del ciclo es un GRANT o un REVOKE. La politica es lo que le pone responsable y plazo a cada uno</a:t>
             </a:r>
           </a:p>
         </p:txBody>
@@ -17914,7 +17608,25 @@
                 </a:solidFill>
                 <a:latin typeface="Calibri"/>
               </a:rPr>
-              <a:t>. Se cierra con «RESET ROLE;». Si el entorno no deja cambiar de rol, se documenta el intento.</a:t>
+              <a:t>. Se cierra con «RESET ROLE;». Si el entorno no deja cambiar de rol, se documenta el intento: eso es una </a:t>
+            </a:r>
+            <a:r>
+              <a:rPr sz="2000" b="1" i="0">
+                <a:solidFill>
+                  <a:srgbClr val="333333"/>
+                </a:solidFill>
+                <a:latin typeface="Calibri"/>
+              </a:rPr>
+              <a:t>brecha de verificacion</a:t>
+            </a:r>
+            <a:r>
+              <a:rPr sz="2000" b="0" i="0">
+                <a:solidFill>
+                  <a:srgbClr val="333333"/>
+                </a:solidFill>
+                <a:latin typeface="Calibri"/>
+              </a:rPr>
+              <a:t>.</a:t>
             </a:r>
           </a:p>
         </p:txBody>
@@ -18218,7 +17930,59 @@
                 </a:solidFill>
                 <a:latin typeface="Calibri"/>
               </a:rPr>
-              <a:t>–   Al final de la demo: dejar enlace/script compartible al grupo.</a:t>
+              <a:t>–   </a:t>
+            </a:r>
+            <a:r>
+              <a:rPr sz="2000" b="1" i="0">
+                <a:solidFill>
+                  <a:srgbClr val="333333"/>
+                </a:solidFill>
+                <a:latin typeface="Calibri"/>
+              </a:rPr>
+              <a:t>Qué observar:</a:t>
+            </a:r>
+            <a:r>
+              <a:rPr sz="2000" b="0" i="0">
+                <a:solidFill>
+                  <a:srgbClr val="333333"/>
+                </a:solidFill>
+                <a:latin typeface="Calibri"/>
+              </a:rPr>
+              <a:t> con «SET ROLE recepcion» el «DELETE» responde permission denied, y «information_schema.role_table_grants» muestra la matriz real que dejo cada GRANT.</a:t>
+            </a:r>
+          </a:p>
+          <a:p>
+            <a:pPr>
+              <a:spcAft>
+                <a:spcPts val="800"/>
+              </a:spcAft>
+            </a:pPr>
+            <a:r>
+              <a:rPr sz="2000" b="0" i="0">
+                <a:solidFill>
+                  <a:srgbClr val="333333"/>
+                </a:solidFill>
+                <a:latin typeface="Calibri"/>
+              </a:rPr>
+              <a:t>–   </a:t>
+            </a:r>
+            <a:r>
+              <a:rPr sz="2000" b="1" i="0">
+                <a:solidFill>
+                  <a:srgbClr val="333333"/>
+                </a:solidFill>
+                <a:latin typeface="Calibri"/>
+              </a:rPr>
+              <a:t>Qué observar:</a:t>
+            </a:r>
+            <a:r>
+              <a:rPr sz="2000" b="0" i="0">
+                <a:solidFill>
+                  <a:srgbClr val="333333"/>
+                </a:solidFill>
+                <a:latin typeface="Calibri"/>
+              </a:rPr>
+              <a:t> la vista entrega a recepcion la agenda sin el email del dueno: el privilegio por columna recorta lo que se ve.</a:t>
             </a:r>
           </a:p>
         </p:txBody>
@@ -19257,6 +19021,22 @@
               <a:t>–   Un recepcionista de la clinica Huellitas necesita DML sobre unas pocas tablas y nunca necesita DDL.</a:t>
             </a:r>
           </a:p>
+          <a:p>
+            <a:pPr>
+              <a:spcAft>
+                <a:spcPts val="800"/>
+              </a:spcAft>
+            </a:pPr>
+            <a:r>
+              <a:rPr sz="2000" b="0" i="0">
+                <a:solidFill>
+                  <a:srgbClr val="333333"/>
+                </a:solidFill>
+                <a:latin typeface="Calibri"/>
+              </a:rPr>
+              <a:t>–   Ejemplo en VetCare: GRANT SELECT, INSERT ON cita TO recepcion permite leer y agendar, pero no UPDATE ni DELETE, y tampoco ALTER TABLE, porque modificar la estructura de un objeto no es un privilegio que se conceda con GRANT: lo puede hacer su dueno.</a:t>
+            </a:r>
+          </a:p>
         </p:txBody>
       </p:sp>
       <p:sp>
@@ -19759,6 +19539,38 @@
                 <a:latin typeface="Calibri"/>
               </a:rPr>
               <a:t>–   Al cambiar la regla se hace un REVOKE sobre el rol y los doce usuarios quedan corregidos en el mismo instante, sin excepciones y sin listas de verificacion.</a:t>
+            </a:r>
+          </a:p>
+          <a:p>
+            <a:pPr>
+              <a:spcAft>
+                <a:spcPts val="800"/>
+              </a:spcAft>
+            </a:pPr>
+            <a:r>
+              <a:rPr sz="2000" b="0" i="0">
+                <a:solidFill>
+                  <a:srgbClr val="333333"/>
+                </a:solidFill>
+                <a:latin typeface="Calibri"/>
+              </a:rPr>
+              <a:t>–   Ejemplo VetCare: cuando entra una recepcionista nueva, el alta es una sola sentencia que le otorga el rol recepcion; cuando se va, la baja es una sola sentencia que se lo revoca.</a:t>
+            </a:r>
+          </a:p>
+          <a:p>
+            <a:pPr>
+              <a:spcAft>
+                <a:spcPts val="800"/>
+              </a:spcAft>
+            </a:pPr>
+            <a:r>
+              <a:rPr sz="2000" b="0" i="0">
+                <a:solidFill>
+                  <a:srgbClr val="333333"/>
+                </a:solidFill>
+                <a:latin typeface="Calibri"/>
+              </a:rPr>
+              <a:t>–   Ningun permiso se toca objeto por objeto: la matriz del rol sigue siendo la misma para las 12 cuentas.</a:t>
             </a:r>
           </a:p>
         </p:txBody>

--- a/Bases de Datos II/Clases/Clase 2 - Administracion de bases de datos/Presentacion.pptx
+++ b/Bases de Datos II/Clases/Clase 2 - Administracion de bases de datos/Presentacion.pptx
@@ -900,7 +900,7 @@
           </a:p>
           <a:p>
             <a:r>
-              <a:t>Fuera de la lamina (habla de la practica): En la rubrica del PI, seguridad y respaldo valen 15 de los 100 puntos.</a:t>
+              <a:t>Fuera de la lamina (habla de la practica): En la rubrica del proyecto, seguridad y respaldo valen 15 de los 100 puntos.</a:t>
             </a:r>
           </a:p>
         </p:txBody>
@@ -1140,7 +1140,7 @@
           <a:lstStyle/>
           <a:p>
             <a:r>
-              <a:t>Existe por una razon aritmetica que conviene poner en el tablero con los numeros de VetCare.</a:t>
+              <a:t>Existe por una razon aritmetica que conviene poner en el tablero con los numeros de la clínica.</a:t>
             </a:r>
           </a:p>
           <a:p>
@@ -1310,7 +1310,7 @@
           </a:p>
           <a:p>
             <a:r>
-              <a:t>Aplicado a VetCare deja una matriz muy concreta y defendible.</a:t>
+              <a:t>Aplicado a la clínica deja una matriz muy concreta y defendible.</a:t>
             </a:r>
           </a:p>
           <a:p>
@@ -4919,13 +4919,13 @@
           <a:p>
             <a:pPr algn="ctr"/>
             <a:r>
-              <a:rPr sz="4000" b="1" i="0">
+              <a:rPr sz="3400" b="1" i="0">
                 <a:solidFill>
                   <a:srgbClr val="FFFFFF"/>
                 </a:solidFill>
                 <a:latin typeface="Calibri"/>
               </a:rPr>
-              <a:t>Administracion de BD · Roles VetCare</a:t>
+              <a:t>Administracion de BD · Roles la clínica</a:t>
             </a:r>
           </a:p>
         </p:txBody>
@@ -5003,7 +5003,7 @@
                 </a:solidFill>
                 <a:latin typeface="Calibri"/>
               </a:rPr>
-              <a:t>Privilegios y usuarios del PI</a:t>
+              <a:t>Privilegios y usuarios del proyecto</a:t>
             </a:r>
           </a:p>
         </p:txBody>
@@ -5688,7 +5688,7 @@
                 </a:solidFill>
                 <a:latin typeface="Calibri"/>
               </a:rPr>
-              <a:t>Minimo privilegio aplicado a VetCare: la matriz defendible</a:t>
+              <a:t>Minimo privilegio aplicado a la clínica: la matriz defendible</a:t>
             </a:r>
           </a:p>
         </p:txBody>
@@ -6043,7 +6043,7 @@
                 </a:solidFill>
                 <a:latin typeface="Calibri"/>
               </a:rPr>
-              <a:t>–   El ejemplo de VetCare es facil de contar: si la misma cuenta que emite una factura puede tambien borrarla, entonces una persona puede cobrar en efectivo y hacer desaparecer el registro, y no queda evidencia de que la factura existio.</a:t>
+              <a:t>–   El ejemplo de la clínica es facil de contar: si la misma cuenta que emite una factura puede tambien borrarla, entonces una persona puede cobrar en efectivo y hacer desaparecer el registro, y no queda evidencia de que la factura existio.</a:t>
             </a:r>
           </a:p>
         </p:txBody>
@@ -7993,7 +7993,7 @@
                 </a:solidFill>
                 <a:latin typeface="Calibri"/>
               </a:rPr>
-              <a:t> Administracion de BD · Roles VetCare</a:t>
+              <a:t> Administracion de BD · Roles la clínica</a:t>
             </a:r>
           </a:p>
           <a:p>
@@ -8068,7 +8068,7 @@
                 </a:solidFill>
                 <a:latin typeface="Calibri"/>
               </a:rPr>
-              <a:t>–   Recorrido: teoría del tema, una lámina por concepto, y demo del docente sobre VetCare DB.</a:t>
+              <a:t>–   Recorrido: teoría del tema, una lámina por concepto, y demo del docente sobre la base de la clínica.</a:t>
             </a:r>
           </a:p>
           <a:p>
@@ -10106,7 +10106,7 @@
                 </a:solidFill>
                 <a:latin typeface="Calibri"/>
               </a:rPr>
-              <a:t>–   Al dictar la politica conviene bajarla a nombres propios de Huellitas en lugar de dejarla en abstracto: quien autoriza el alta es la administradora de la clinica</a:t>
+              <a:t>–   Al dictar la politica conviene bajarla a nombres propios de la clínica en lugar de dejarla en abstracto: quien autoriza el alta es la administradora de la clinica</a:t>
             </a:r>
           </a:p>
           <a:p>
@@ -11433,7 +11433,7 @@
                 </a:solidFill>
                 <a:latin typeface="Calibri"/>
               </a:rPr>
-              <a:t>Encuadre · clase regular · VetCare</a:t>
+              <a:t>Encuadre · clase regular · la clínica</a:t>
             </a:r>
           </a:p>
         </p:txBody>
@@ -11548,7 +11548,7 @@
                 </a:solidFill>
                 <a:latin typeface="Calibri"/>
               </a:rPr>
-              <a:t>Teoría Core breve (al servicio del PI)</a:t>
+              <a:t>Teoría Core breve (al servicio del proyecto)</a:t>
             </a:r>
           </a:p>
         </p:txBody>
@@ -12214,7 +12214,7 @@
                 </a:solidFill>
                 <a:latin typeface="Calibri"/>
               </a:rPr>
-              <a:t>–   Lo exigible para VetCare son los diez objetos por los cuatro roles, sin celdas vacias</a:t>
+              <a:t>–   Lo exigible para la clínica son los diez objetos por los cuatro roles, sin celdas vacias</a:t>
             </a:r>
           </a:p>
           <a:p>
@@ -12647,7 +12647,7 @@
                 </a:solidFill>
                 <a:latin typeface="Calibri"/>
               </a:rPr>
-              <a:t>Como amarra con las clases vecinas y con el PI</a:t>
+              <a:t>Como amarra con las clases vecinas</a:t>
             </a:r>
           </a:p>
         </p:txBody>
@@ -15942,7 +15942,7 @@
                 </a:solidFill>
                 <a:latin typeface="Calibri"/>
               </a:rPr>
-              <a:t>–   Aqui hay que desactivar una confusion que traen quienes vieron Oracle: alli esquema y usuario son practicamente lo mismo y se escribe VETCARE.MASCOTA</a:t>
+              <a:t>–   Aqui hay que desactivar una confusion que traen quienes vieron Oracle: alli esquema y usuario son practicamente lo mismo y se escribe la clínica.MASCOTA</a:t>
             </a:r>
           </a:p>
         </p:txBody>
@@ -17898,7 +17898,7 @@
                 </a:solidFill>
                 <a:latin typeface="Calibri"/>
               </a:rPr>
-              <a:t> Los 4 roles de VetCare con CREATE ROLE/GRANT/REVOKE, verificados con information_schema.role_table_grants.</a:t>
+              <a:t> Los 4 roles de la clínica con CREATE ROLE/GRANT/REVOKE, verificados con information_schema.role_table_grants.</a:t>
             </a:r>
           </a:p>
           <a:p>
@@ -17914,7 +17914,7 @@
                 </a:solidFill>
                 <a:latin typeface="Calibri"/>
               </a:rPr>
-              <a:t>–   Sigan el mismo dominio VetCare (no inventen otro caso).</a:t>
+              <a:t>–   Sigan el mismo dominio de la clínica (no inventen otro caso).</a:t>
             </a:r>
           </a:p>
           <a:p>
@@ -18143,7 +18143,7 @@
                 </a:solidFill>
                 <a:latin typeface="Calibri"/>
               </a:rPr>
-              <a:t>Clase 2 · Administracion de BD · Roles VetCare</a:t>
+              <a:t>Clase 2 · Administracion de BD · Roles la clínica</a:t>
             </a:r>
           </a:p>
         </p:txBody>
@@ -19018,7 +19018,7 @@
                 </a:solidFill>
                 <a:latin typeface="Calibri"/>
               </a:rPr>
-              <a:t>–   Un recepcionista de la clinica Huellitas necesita DML sobre unas pocas tablas y nunca necesita DDL.</a:t>
+              <a:t>–   Un recepcionista de la clínica necesita DML sobre unas pocas tablas y nunca necesita DDL.</a:t>
             </a:r>
           </a:p>
           <a:p>
@@ -19034,7 +19034,7 @@
                 </a:solidFill>
                 <a:latin typeface="Calibri"/>
               </a:rPr>
-              <a:t>–   Ejemplo en VetCare: GRANT SELECT, INSERT ON cita TO recepcion permite leer y agendar, pero no UPDATE ni DELETE, y tampoco ALTER TABLE, porque modificar la estructura de un objeto no es un privilegio que se conceda con GRANT: lo puede hacer su dueno.</a:t>
+              <a:t>–   Ejemplo en la clínica: GRANT SELECT, INSERT ON cita TO recepcion permite leer y agendar, pero no UPDATE ni DELETE, y tampoco ALTER TABLE, porque modificar la estructura de un objeto no es un privilegio que se conceda con GRANT: lo puede hacer su dueno.</a:t>
             </a:r>
           </a:p>
         </p:txBody>
@@ -19554,7 +19554,7 @@
                 </a:solidFill>
                 <a:latin typeface="Calibri"/>
               </a:rPr>
-              <a:t>–   Ejemplo VetCare: cuando entra una recepcionista nueva, el alta es una sola sentencia que le otorga el rol recepcion; cuando se va, la baja es una sola sentencia que se lo revoca.</a:t>
+              <a:t>–   Ejemplo la clínica: cuando entra una recepcionista nueva, el alta es una sola sentencia que le otorga el rol recepcion; cuando se va, la baja es una sola sentencia que se lo revoca.</a:t>
             </a:r>
           </a:p>
           <a:p>

--- a/Bases de Datos II/Clases/Clase 2 - Administracion de bases de datos/Presentacion.pptx
+++ b/Bases de Datos II/Clases/Clase 2 - Administracion de bases de datos/Presentacion.pptx
@@ -7,8 +7,8 @@
   <p:sldIdLst>
     <p:sldId id="256" r:id="rId7"/>
     <p:sldId id="257" r:id="rId8"/>
-    <p:sldId id="258" r:id="rId10"/>
-    <p:sldId id="259" r:id="rId11"/>
+    <p:sldId id="258" r:id="rId9"/>
+    <p:sldId id="259" r:id="rId10"/>
     <p:sldId id="260" r:id="rId12"/>
     <p:sldId id="261" r:id="rId13"/>
     <p:sldId id="262" r:id="rId14"/>
@@ -527,43 +527,72 @@
           <a:lstStyle/>
           <a:p>
             <a:r>
-              <a:t>TEXTO COMPLETO DE LA LÁMINA (se proyecta resumido):</a:t>
-            </a:r>
-          </a:p>
-          <a:p/>
-          <a:p>
-            <a:r>
-              <a:t>Tema de hoy: Administracion de BD · Roles la clínica</a:t>
-            </a:r>
-          </a:p>
-          <a:p/>
-          <a:p>
-            <a:r>
-              <a:t>Herramienta: PostgreSQL + Google Docs · Bloque 120 min</a:t>
-            </a:r>
-          </a:p>
-          <a:p/>
-          <a:p>
-            <a:r>
-              <a:t>Gratis + navegador · free tier · sin software de pago obligatorio.</a:t>
-            </a:r>
-          </a:p>
-          <a:p/>
-          <a:p>
-            <a:r>
-              <a:t>Recorrido: teoría del tema, una lámina por concepto, y demo del docente sobre la base de la clínica.</a:t>
-            </a:r>
-          </a:p>
-          <a:p/>
-          <a:p>
-            <a:r>
-              <a:t>Cada lámina se sostiene sola: sirve para repasar aunque hayas faltado.</a:t>
-            </a:r>
-          </a:p>
-          <a:p/>
-          <a:p>
-            <a:r>
-              <a:t>Conceptos de hoy: Los cuatro terminos que se confunden todo el tiempo · Privilegio · Rol · En PostgreSQL usuario y rol son lo mismo, y por eso hoy se escribe NOLOGIN.</a:t>
+              <a:t>DESARROLLO (para explicarlo, no se proyecta):</a:t>
+            </a:r>
+          </a:p>
+          <a:p>
+            <a:r>
+              <a:t>Administrar una base de datos es decidir y hacer cumplir quien puede hacer que sobre cada objeto, y dejar rastro de quien lo hizo.</a:t>
+            </a:r>
+          </a:p>
+          <a:p>
+            <a:r>
+              <a:t>Antes de llegar a la sintaxis conviene fijar cuatro terminos que se usan sueltos y se confunden todo el tiempo.</a:t>
+            </a:r>
+          </a:p>
+          <a:p>
+            <a:r>
+              <a:t>Un objeto de base de datos es cualquier cosa que el motor guarda y a la que se le puede poner nombre: una tabla como cita, una vista, un procedimiento, una secuencia.</a:t>
+            </a:r>
+          </a:p>
+          <a:p>
+            <a:r>
+              <a:t>Un esquema es un contenedor con nombre donde viven esos objetos; en PostgreSQL, que es el motor de esta clase, el esquema por omision se llama public y el nombre completo de la tabla es public.cita.</a:t>
+            </a:r>
+          </a:p>
+          <a:p>
+            <a:r>
+              <a:t>Aqui hay que desactivar una confusion que traen quienes vieron Oracle: alli esquema y usuario son practicamente lo mismo y se escribe la clínica.MASCOTA</a:t>
+            </a:r>
+          </a:p>
+          <a:p>
+            <a:r>
+              <a:t>Mientras que en PostgreSQL son cosas separadas, un mismo usuario puede tener objetos en varios esquemas y un esquema puede contener objetos de varios propietarios.</a:t>
+            </a:r>
+          </a:p>
+          <a:p>
+            <a:r>
+              <a:t>Autenticacion es probar quien es usted, con usuario y clave o con un certificado.</a:t>
+            </a:r>
+          </a:p>
+          <a:p>
+            <a:r>
+              <a:t>Autorizacion es decidir que puede hacer una vez que ya esta dentro.</a:t>
+            </a:r>
+          </a:p>
+          <a:p>
+            <a:r>
+              <a:t>Son etapas distintas, se controlan con mecanismos distintos, y un usuario puede autenticarse perfectamente y no tener permiso para leer ni una sola fila.</a:t>
+            </a:r>
+          </a:p>
+          <a:p>
+            <a:r>
+              <a:t>Esta clase se dicta en sesion virtual sincrona, en el bloque normal de 120 minutos: hay explicacion en vivo.</a:t>
+            </a:r>
+          </a:p>
+          <a:p>
+            <a:r>
+              <a:t>NOTAS:</a:t>
+            </a:r>
+          </a:p>
+          <a:p>
+            <a:r>
+              <a:t>Conviene aprovechar precisamente eso, porque los permisos son el tema del curso donde el estudiante mas necesita que alguien le diga en el momento por que su GRANT no surtio efecto.</a:t>
+            </a:r>
+          </a:p>
+          <a:p>
+            <a:r>
+              <a:t>Fuera de la lamina (habla de la practica): Esta clase se dicta en sesion virtual sincrona, en el bloque normal de 120 minutos: hay explicacion en vivo, taller acompanado y espacio para preguntar, asi que este texto es el material con el que el docente dicta y no una lectura que sustituya la clase.</a:t>
             </a:r>
           </a:p>
         </p:txBody>
@@ -638,32 +667,22 @@
           </a:p>
           <a:p>
             <a:r>
-              <a:t>Un GRANT sobre una tabla es todo o nada en filas y columnas: quien tiene SELECT sobre dueno ve las seis columnas y las seis filas.</a:t>
-            </a:r>
-          </a:p>
-          <a:p>
-            <a:r>
-              <a:t>Hay dos mecanismos para recortar esa superficie y hay que saber cuando usar cada uno.</a:t>
-            </a:r>
-          </a:p>
-          <a:p>
-            <a:r>
-              <a:t>Una vista es una consulta guardada con nombre, que se usa como si fuera una tabla; se crea con CREATE VIEW v_agenda_recepcion AS SELECT... y se le otorga SELECT al rol.</a:t>
-            </a:r>
-          </a:p>
-          <a:p>
-            <a:r>
-              <a:t>La vista recorta las dos dimensiones a la vez: filas, con un WHERE estado &lt;&gt; 'CANCELADA', y columnas, con solo dejar el email fuera del SELECT.</a:t>
-            </a:r>
-          </a:p>
-          <a:p>
-            <a:r>
-              <a:t>El segundo mecanismo es el privilegio por columna: ON dueno TO veterinario_rol otorga lectura de dos columnas y de ninguna otra, sin crear ningun objeto nuevo.</a:t>
-            </a:r>
-          </a:p>
-          <a:p>
-            <a:r>
-              <a:t>El criterio para elegir es simple: si el recorte necesita filtrar filas o cruzar tablas, se hace con vista; si es puramente por columna y no se quiere mantener un objeto mas, con privilegio por columna.</a:t>
+              <a:t>Una matriz de permisos que solo existe en un documento es una intencion; la matriz se vuelve un hecho cuando se puede consultar en el motor.</a:t>
+            </a:r>
+          </a:p>
+          <a:p>
+            <a:r>
+              <a:t>PostgreSQL expone esa informacion en el esquema estandar information_schema y hay dos vistas que hay que saber usar.</a:t>
+            </a:r>
+          </a:p>
+          <a:p>
+            <a:r>
+              <a:t>La primera es role_table_grants, con ORDER BY grantee, table_name, privilege_type: devuelve una fila por cada combinacion de rol, tabla y privilegio realmente otorgado.</a:t>
+            </a:r>
+          </a:p>
+          <a:p>
+            <a:r>
+              <a:t>La segunda es column_privileges, que agrega la columna column_name y es la unica forma de evidenciar que el privilegio por columna quedo aplicado.</a:t>
             </a:r>
           </a:p>
           <a:p>
@@ -673,27 +692,7 @@
           </a:p>
           <a:p>
             <a:r>
-              <a:t>Aqui esta el concepto que hace la diferencia entre una matriz de aficionado y una defendible.</a:t>
-            </a:r>
-          </a:p>
-          <a:p>
-            <a:r>
-              <a:t>Pero la recepcionista solo necesita el nombre y el telefono para identificar a quien llama, y no tiene por que ver el correo electronico de los clientes.</a:t>
-            </a:r>
-          </a:p>
-          <a:p>
-            <a:r>
-              <a:t>El primero es la vista.</a:t>
-            </a:r>
-          </a:p>
-          <a:p>
-            <a:r>
-              <a:t>Lo que hace que funcione, y es el punto que el estudiante no cree hasta que lo ve, es que la consulta de la vista se ejecuta con los privilegios de su PROPIETARIO y no con los de quien la consulta: por eso se puede dar SELECT sobre la vista a recepcion y al mismo tiempo hacer REVOKE SELECT ON dueno FROM recepcion, y el rol sigue viendo el telefono del dueno a traves de la vista pero no puede consultar la tabla directamente.</a:t>
-            </a:r>
-          </a:p>
-          <a:p>
-            <a:r>
-              <a:t>Tiene una consecuencia que hay que advertir en clase porque genera un error confuso: ese rol ya no puede escribir SELECT * FROM dueno, porque el asterisco pide todas las columnas y dos de ellas le estan negadas; tiene que nombrar las columnas explicitamente.</a:t>
+              <a:t>Vale explicar por que se usa role_table_grants y no table_privileges, que es la que aparece primero al buscar: table_privileges solo muestra los privilegios en los que el usuario actual es quien otorga o quien recibe, mientras que role_table_grants incluye los de cualquier rol que este habilitado en la sesion, que es justamente lo que necesita el propietario para auditar lo que reparti.</a:t>
             </a:r>
           </a:p>
           <a:p>
@@ -703,12 +702,12 @@
           </a:p>
           <a:p>
             <a:r>
-              <a:t>GRANT SELECT (id_dueno, nombre)</a:t>
-            </a:r>
-          </a:p>
-          <a:p>
-            <a:r>
-              <a:t>Fuera de la lamina (habla de la practica): Aqui esta el concepto que hace la diferencia entre una matriz de aficionado y una defendible, y es la parte que el taller evalua con veinte puntos.</a:t>
+              <a:t>SELECT grantee, table_name, privilege_type FROM information_schema.role_table_grants WHERE grantee IN ('admin_bd','recepcion','veterinario_rol','auditor')</a:t>
+            </a:r>
+          </a:p>
+          <a:p>
+            <a:r>
+              <a:t>Fuera de la lamina (habla de la practica): Estas dos consultas son la evidencia que la rubrica exige tres veces, y el docente deberia proyectar su salida en la demo: ver la matriz salir del motor, y no de un documento, es lo que convence al grupo de que los permisos son verificables.</a:t>
             </a:r>
           </a:p>
         </p:txBody>
@@ -783,22 +782,62 @@
           </a:p>
           <a:p>
             <a:r>
-              <a:t>Una matriz de permisos que solo existe en un documento es una intencion; la matriz se vuelve un hecho cuando se puede consultar en el motor.</a:t>
-            </a:r>
-          </a:p>
-          <a:p>
-            <a:r>
-              <a:t>PostgreSQL expone esa informacion en el esquema estandar information_schema y hay dos vistas que hay que saber usar.</a:t>
-            </a:r>
-          </a:p>
-          <a:p>
-            <a:r>
-              <a:t>La primera es role_table_grants, con ORDER BY grantee, table_name, privilege_type: devuelve una fila por cada combinacion de rol, tabla y privilegio realmente otorgado.</a:t>
-            </a:r>
-          </a:p>
-          <a:p>
-            <a:r>
-              <a:t>La segunda es column_privileges, que agrega la columna column_name y es la unica forma de evidenciar que el privilegio por columna quedo aplicado.</a:t>
+              <a:t>La politica de altas y bajas documenta el ciclo de vida de una cuenta: quien autoriza que se cree, con que rol nace, que pasa cuando alguien cambia de funcion, y en cuanto tiempo se desactiva cuando se va de la clinica.</a:t>
+            </a:r>
+          </a:p>
+          <a:p>
+            <a:r>
+              <a:t>El plazo que se compromete habitualmente en la industria es el mismo dia del retiro, y por convencion se revisan las cuentas activas cada tres o seis meses; ninguno de esos dos numeros es una regla dura del motor, son practicas de gobierno</a:t>
+            </a:r>
+          </a:p>
+          <a:p>
+            <a:r>
+              <a:t>Y la politica vale precisamente porque fija responsables y plazos concretos en lugar de generalidades.</a:t>
+            </a:r>
+          </a:p>
+          <a:p>
+            <a:r>
+              <a:t>El problema que resuelve es la cuenta huerfana: la del pasante que se fue hace un ano y cuya clave sigue funcionando.</a:t>
+            </a:r>
+          </a:p>
+          <a:p>
+            <a:r>
+              <a:t>Una, nunca cuentas compartidas: si tres recepcionistas entran con la cuenta recepcion1, la tabla de auditoria dira que recepcion1 cancelo la cita y no habra forma de saber quien fue</a:t>
+            </a:r>
+          </a:p>
+          <a:p>
+            <a:r>
+              <a:t>La trazabilidad se pierde de manera irrecuperable y con ella cualquier investigacion posterior.</a:t>
+            </a:r>
+          </a:p>
+          <a:p>
+            <a:r>
+              <a:t>Dos, los permisos no se acumulan: al cambiar de rol se revoca el anterior con REVOKE recepcion FROM ana_gomez, porque quien pasa de recepcion a auditoria y conserva ambos roles termina pudiendo modificar justamente lo que audita.</a:t>
+            </a:r>
+          </a:p>
+          <a:p>
+            <a:r>
+              <a:t>La cuarta seccion, la revision periodica, se apoya en la consulta de information_schema que acaba de verse: la evidencia de la auditoria es su salida, y la politica dice cada cuanto se corre y quien la firma.</a:t>
+            </a:r>
+          </a:p>
+          <a:p>
+            <a:r>
+              <a:t>La quinta seccion es el limite de este entorno, y se desarrolla completa en «El motor de hoy es PostgreSQL» un poco mas abajo.</a:t>
+            </a:r>
+          </a:p>
+          <a:p>
+            <a:r>
+              <a:t>Al dictar la politica conviene bajarla a nombres propios de la clínica en lugar de dejarla en abstracto: quien autoriza el alta es la administradora de la clinica</a:t>
+            </a:r>
+          </a:p>
+          <a:p>
+            <a:r>
+              <a:t>La recepcionista que entra nace con el rol recepcion y con nada mas, y la baja del pasante se hace el mismo dia.</a:t>
+            </a:r>
+          </a:p>
+          <a:p>
+            <a:r>
+              <a:t>Una politica que no dice quien firma ni en cuanto tiempo no es una politica, es una intencion.</a:t>
             </a:r>
           </a:p>
           <a:p>
@@ -808,22 +847,27 @@
           </a:p>
           <a:p>
             <a:r>
-              <a:t>Vale explicar por que se usa role_table_grants y no table_privileges, que es la que aparece primero al buscar: table_privileges solo muestra los privilegios en los que el usuario actual es quien otorga o quien recibe, mientras que role_table_grants incluye los de cualquier rol que este habilitado en la sesion, que es justamente lo que necesita el propietario para auditar lo que reparti.</a:t>
-            </a:r>
-          </a:p>
-          <a:p>
-            <a:r>
-              <a:t>CÓDIGO CITADO (referencia):</a:t>
-            </a:r>
-          </a:p>
-          <a:p>
-            <a:r>
-              <a:t>SELECT grantee, table_name, privilege_type FROM information_schema.role_table_grants WHERE grantee IN ('admin_bd','recepcion','veterinario_rol','auditor')</a:t>
-            </a:r>
-          </a:p>
-          <a:p>
-            <a:r>
-              <a:t>Fuera de la lamina (habla de la practica): Estas dos consultas son la evidencia que la rubrica exige tres veces, y el docente deberia proyectar su salida en la demo: ver la matriz salir del motor, y no de un documento, es lo que convence al grupo de que los permisos son verificables.</a:t>
+              <a:t>Dos reglas la cierran.</a:t>
+            </a:r>
+          </a:p>
+          <a:p>
+            <a:r>
+              <a:t>Vale la pena senalar el detalle tecnico de la baja: en PostgreSQL no se puede hacer DROP ROLE de un rol que todavia posee objetos, hay que reasignarlos primero con REASSIGN OWNED BY ana_gomez TO admin_bd, y por eso la politica tiene que decir que pasa con lo que la persona era dueno.</a:t>
+            </a:r>
+          </a:p>
+          <a:p>
+            <a:r>
+              <a:t>Fuera de la lamina (habla de la practica): La diapositiva trae las cinco secciones en el mismo orden en que el taller las va a pedir, asi que se dicta recorriendola de arriba abajo.</a:t>
+            </a:r>
+          </a:p>
+          <a:p>
+            <a:r>
+              <a:t>Fuera de la lamina (habla de la practica): La quinta seccion es el limite de este entorno, y se desarrolla completa en «El motor de hoy es PostgreSQL» un poco mas abajo; lo que se califica ahi no es que la prueba negativa exista, sino que el estudiante sepa nombrarla como brecha de verificacion de su propia entrega.</a:t>
+            </a:r>
+          </a:p>
+          <a:p>
+            <a:r>
+              <a:t>Fuera de la lamina (habla de la practica): Una politica que no dice quien firma ni en cuanto tiempo no es una politica, es una intencion, y asi esta escrita la rubrica.</a:t>
             </a:r>
           </a:p>
         </p:txBody>
@@ -898,62 +942,42 @@
           </a:p>
           <a:p>
             <a:r>
-              <a:t>La politica de altas y bajas documenta el ciclo de vida de una cuenta: quien autoriza que se cree, con que rol nace, que pasa cuando alguien cambia de funcion, y en cuanto tiempo se desactiva cuando se va de la clinica.</a:t>
-            </a:r>
-          </a:p>
-          <a:p>
-            <a:r>
-              <a:t>El plazo que se compromete habitualmente en la industria es el mismo dia del retiro, y por convencion se revisan las cuentas activas cada tres o seis meses; ninguno de esos dos numeros es una regla dura del motor, son practicas de gobierno</a:t>
-            </a:r>
-          </a:p>
-          <a:p>
-            <a:r>
-              <a:t>Y la politica vale precisamente porque fija responsables y plazos concretos en lugar de generalidades.</a:t>
-            </a:r>
-          </a:p>
-          <a:p>
-            <a:r>
-              <a:t>El problema que resuelve es la cuenta huerfana: la del pasante que se fue hace un ano y cuya clave sigue funcionando.</a:t>
-            </a:r>
-          </a:p>
-          <a:p>
-            <a:r>
-              <a:t>Una, nunca cuentas compartidas: si tres recepcionistas entran con la cuenta recepcion1, la tabla de auditoria dira que recepcion1 cancelo la cita y no habra forma de saber quien fue</a:t>
-            </a:r>
-          </a:p>
-          <a:p>
-            <a:r>
-              <a:t>La trazabilidad se pierde de manera irrecuperable y con ella cualquier investigacion posterior.</a:t>
-            </a:r>
-          </a:p>
-          <a:p>
-            <a:r>
-              <a:t>Dos, los permisos no se acumulan: al cambiar de rol se revoca el anterior con REVOKE recepcion FROM ana_gomez, porque quien pasa de recepcion a auditoria y conserva ambos roles termina pudiendo modificar justamente lo que audita.</a:t>
-            </a:r>
-          </a:p>
-          <a:p>
-            <a:r>
-              <a:t>La cuarta seccion, la revision periodica, se apoya en la consulta de information_schema que acaba de verse: la evidencia de la auditoria es su salida, y la politica dice cada cuanto se corre y quien la firma.</a:t>
-            </a:r>
-          </a:p>
-          <a:p>
-            <a:r>
-              <a:t>La quinta seccion es el limite de este entorno, y se desarrolla completa en «El motor de hoy es PostgreSQL» un poco mas abajo.</a:t>
-            </a:r>
-          </a:p>
-          <a:p>
-            <a:r>
-              <a:t>Al dictar la politica conviene bajarla a nombres propios de la clínica en lugar de dejarla en abstracto: quien autoriza el alta es la administradora de la clinica</a:t>
-            </a:r>
-          </a:p>
-          <a:p>
-            <a:r>
-              <a:t>La recepcionista que entra nace con el rol recepcion y con nada mas, y la baja del pasante se hace el mismo dia.</a:t>
-            </a:r>
-          </a:p>
-          <a:p>
-            <a:r>
-              <a:t>Una politica que no dice quien firma ni en cuanto tiempo no es una politica, es una intencion.</a:t>
+              <a:t>El motor de la clase es PostgreSQL, que corre dentro del navegador.</a:t>
+            </a:r>
+          </a:p>
+          <a:p>
+            <a:r>
+              <a:t>Una, esas dos lineas TIENEN que fallar, asi que se ejecutan una por una: un runner que aborta al primer error se llevaria las siguientes.</a:t>
+            </a:r>
+          </a:p>
+          <a:p>
+            <a:r>
+              <a:t>Dos, si el entorno del dia no permite cambiar de rol, no hay que esconderlo — se muestra el mensaje.</a:t>
+            </a:r>
+          </a:p>
+          <a:p>
+            <a:r>
+              <a:t>La diferencia entre las dos cosas es justamente lo que el estudiante tiene que entender: SET ROLE cambia con que permisos se evalua lo que escribo</a:t>
+            </a:r>
+          </a:p>
+          <a:p>
+            <a:r>
+              <a:t>Y conectarse como otro usuario cambia quien esta conectado; para probar que un privilegio falta, basta lo primero.</a:t>
+            </a:r>
+          </a:p>
+          <a:p>
+            <a:r>
+              <a:t>Oracle Live SQL y DB Fiddle siguen en el kit, pero cambian de papel: DB Fiddle sirve para probar SQL suelto y Live SQL solo como contraste de sintaxis, porque alli se escribe CREATE USER...</a:t>
+            </a:r>
+          </a:p>
+          <a:p>
+            <a:r>
+              <a:t>IDENTIFIED BY, se otorga GRANT CREATE SESSION y el esquema es el usuario.</a:t>
+            </a:r>
+          </a:p>
+          <a:p>
+            <a:r>
+              <a:t>Vale un minuto de clase mencionarlo, porque muchos se van a encontrar Oracle en el trabajo; no vale mas, porque el motor de la clase es PostgreSQL y todo minuto invertido en sintaxis del otro motor es un minuto que no se dedica al tema.</a:t>
             </a:r>
           </a:p>
           <a:p>
@@ -963,27 +987,57 @@
           </a:p>
           <a:p>
             <a:r>
-              <a:t>Dos reglas la cierran.</a:t>
-            </a:r>
-          </a:p>
-          <a:p>
-            <a:r>
-              <a:t>Vale la pena senalar el detalle tecnico de la baja: en PostgreSQL no se puede hacer DROP ROLE de un rol que todavia posee objetos, hay que reasignarlos primero con REASSIGN OWNED BY ana_gomez TO admin_bd, y por eso la politica tiene que decir que pasa con lo que la persona era dueno.</a:t>
-            </a:r>
-          </a:p>
-          <a:p>
-            <a:r>
-              <a:t>Fuera de la lamina (habla de la practica): La diapositiva trae las cinco secciones en el mismo orden en que el taller las va a pedir, asi que se dicta recorriendola de arriba abajo.</a:t>
-            </a:r>
-          </a:p>
-          <a:p>
-            <a:r>
-              <a:t>Fuera de la lamina (habla de la practica): La quinta seccion es el limite de este entorno, y se desarrolla completa en «El motor de hoy es PostgreSQL» un poco mas abajo; lo que se califica ahi no es que la prueba negativa exista, sino que el estudiante sepa nombrarla como brecha de verificacion de su propia entrega.</a:t>
-            </a:r>
-          </a:p>
-          <a:p>
-            <a:r>
-              <a:t>Fuera de la lamina (habla de la practica): Una politica que no dice quien firma ni en cuanto tiempo no es una politica, es una intencion, y asi esta escrita la rubrica.</a:t>
+              <a:t>Ahi CREATE ROLE, GRANT, REVOKE, CREATE VIEW, los privilegios por columna y las consultas a information_schema funcionan todos: son DDL real y son verificables, asi que la evidencia de la clase es la salida del motor y no una promesa.</a:t>
+            </a:r>
+          </a:p>
+          <a:p>
+            <a:r>
+              <a:t>Lo que NO se puede hacer es abrir una segunda conexion: el entorno tiene un solo usuario con login y una sola sesion, asi que nadie va a conectarse como recepcion en otra pestana mientras el docente mira desde la suya.</a:t>
+            </a:r>
+          </a:p>
+          <a:p>
+            <a:r>
+              <a:t>Esa es la limitacion real, y hay que nombrarla con esa precision, porque la version anterior de esta guia decia algo mas fuerte y falso: que por eso la prueba negativa era imposible.</a:t>
+            </a:r>
+          </a:p>
+          <a:p>
+            <a:r>
+              <a:t>Para ver el permiso negado no hace falta otra conexion, hace falta cambiar el rol EFECTIVO dentro de la misma sesion, y eso es lo que hace SET ROLE recepcion; a partir de esa linea los privilegios que el motor revisa son los del rol y no los del propietario, de modo que devuelve permission denied for table cita y tambien, si ya se revoco el SELECT de la tabla.</a:t>
+            </a:r>
+          </a:p>
+          <a:p>
+            <a:r>
+              <a:t>Se cierra con RESET ROLE; y conviene no olvidarlo, porque todo lo que venga despues se seguiria ejecutando con los permisos recortados.</a:t>
+            </a:r>
+          </a:p>
+          <a:p>
+            <a:r>
+              <a:t>Dos advertencias para la demo.</a:t>
+            </a:r>
+          </a:p>
+          <a:p>
+            <a:r>
+              <a:t>CÓDIGO CITADO (referencia):</a:t>
+            </a:r>
+          </a:p>
+          <a:p>
+            <a:r>
+              <a:t>DELETE FROM cita WHERE id_cita = 1</a:t>
+            </a:r>
+          </a:p>
+          <a:p>
+            <a:r>
+              <a:t>SELECT nombre, email FROM dueno</a:t>
+            </a:r>
+          </a:p>
+          <a:p>
+            <a:r>
+              <a:t>Fuera de la lamina (habla de la practica): Este punto hay que decirlo con precision porque una version anterior de esta guia decia lo contrario y costaria puntos repetirla.</a:t>
+            </a:r>
+          </a:p>
+          <a:p>
+            <a:r>
+              <a:t>Fuera de la lamina (habla de la practica): Dos, si el entorno del dia no permite cambiar de rol, no hay que esconderlo — se muestra el mensaje, y entonces si aparece la brecha de verificacion que la pregunta 5 pide nombrar.</a:t>
             </a:r>
           </a:p>
         </p:txBody>
@@ -1053,37 +1107,47 @@
           <a:lstStyle/>
           <a:p>
             <a:r>
-              <a:t>TEXTO COMPLETO DE LA LÁMINA (se proyecta resumido):</a:t>
-            </a:r>
-          </a:p>
-          <a:p/>
-          <a:p>
-            <a:r>
-              <a:t>1. Alta. Quien solicita y quien aprueba; la cuenta nace con un solo rol y con credencial temporal que caduca en el primer ingreso.</a:t>
-            </a:r>
-          </a:p>
-          <a:p/>
-          <a:p>
-            <a:r>
-              <a:t>2. Cambio de rol. `GRANT` del nuevo y `REVOKE` del anterior: los permisos no se acumulan. Quien pasa de recepcion a auditoria y conserva los dos termina auditando lo que el mismo modifica.</a:t>
-            </a:r>
-          </a:p>
-          <a:p/>
-          <a:p>
-            <a:r>
-              <a:t>3. Baja: el mismo dia. Revocar los roles, dejar la cuenta sin login y reasignar los objetos antes de borrar el rol (`REASSIGN OWNED BY ... TO admin_bd`): PostgreSQL no deja hacer `DROP ROLE` de un rol que todavia posee objetos. Lo que esto evita es la cuenta huerfana.</a:t>
-            </a:r>
-          </a:p>
-          <a:p/>
-          <a:p>
-            <a:r>
-              <a:t>4. Revision periodica. Cada 3 a 6 meses se audita la matriz con `information_schema.role_table_grants`, y alguien firma la evidencia. Sin cuentas compartidas: si tres personas entran como `recepcion1`, la auditoria no puede decir quien cancelo la cita.</a:t>
-            </a:r>
-          </a:p>
-          <a:p/>
-          <a:p>
-            <a:r>
-              <a:t>5. Probar que el permiso NO esta. No hace falta otra conexion (aqui hay un solo usuario con login): `SET ROLE recepcion;` cambia el rol efectivo, y ahi `DELETE FROM cita ...` debe responder permission denied. Se cierra con `RESET ROLE;`. Si el entorno no deja cambiar de rol, se documenta el intento: eso es una brecha de verificacion.</a:t>
+              <a:t>DESARROLLO (para explicarlo, no se proyecta):</a:t>
+            </a:r>
+          </a:p>
+          <a:p>
+            <a:r>
+              <a:t>El script es la traduccion mecanica de una decision; la matriz es la decision.</a:t>
+            </a:r>
+          </a:p>
+          <a:p>
+            <a:r>
+              <a:t>Se construye con los objetos en las filas, los roles en las columnas, y en cada celda las acciones permitidas con la notacion abreviada: S para SELECT, I para INSERT, U para UPDATE, D para DELETE, E para EXECUTE y un guion cuando no hay ninguno.</a:t>
+            </a:r>
+          </a:p>
+          <a:p>
+            <a:r>
+              <a:t>Lo exigible para la clínica son los diez objetos por los cuatro roles, sin celdas vacias</a:t>
+            </a:r>
+          </a:p>
+          <a:p>
+            <a:r>
+              <a:t>Y la regla de calidad es que la matriz sea consistente con los GRANT que se ejecutaron en la primera pregunta: si el script no le dio DELETE a nadie, en la matriz no puede aparecer una D.</a:t>
+            </a:r>
+          </a:p>
+          <a:p>
+            <a:r>
+              <a:t>Los dos procedimientos van con E y nunca con S ni con I, y eso no es un detalle de notacion: es el patron que la Clase 3 va a construir y la Clase 12 va a usar, en el que la aplicacion no escribe en las tablas sino que invoca la regla de negocio.</a:t>
+            </a:r>
+          </a:p>
+          <a:p>
+            <a:r>
+              <a:t>Debajo de la matriz van cuatro a seis lineas justificando tres decisiones concretas, y ahi la regla es que una X sin texto no es una celda completa: «auditor sobre cita: solo S, porque auditar es verificar, no corregir» si lo es.</a:t>
+            </a:r>
+          </a:p>
+          <a:p>
+            <a:r>
+              <a:t>NOTAS:</a:t>
+            </a:r>
+          </a:p>
+          <a:p>
+            <a:r>
+              <a:t>Lo central no es el script sino la matriz rol por objeto por privilegio, y conviene explicar por que.</a:t>
             </a:r>
           </a:p>
         </p:txBody>
@@ -1158,286 +1222,6 @@
           </a:p>
           <a:p>
             <a:r>
-              <a:t>El motor de la clase es PostgreSQL, que corre dentro del navegador.</a:t>
-            </a:r>
-          </a:p>
-          <a:p>
-            <a:r>
-              <a:t>Una, esas dos lineas TIENEN que fallar, asi que se ejecutan una por una: un runner que aborta al primer error se llevaria las siguientes.</a:t>
-            </a:r>
-          </a:p>
-          <a:p>
-            <a:r>
-              <a:t>Dos, si el entorno del dia no permite cambiar de rol, no hay que esconderlo — se muestra el mensaje.</a:t>
-            </a:r>
-          </a:p>
-          <a:p>
-            <a:r>
-              <a:t>La diferencia entre las dos cosas es justamente lo que el estudiante tiene que entender: SET ROLE cambia con que permisos se evalua lo que escribo</a:t>
-            </a:r>
-          </a:p>
-          <a:p>
-            <a:r>
-              <a:t>Y conectarse como otro usuario cambia quien esta conectado; para probar que un privilegio falta, basta lo primero.</a:t>
-            </a:r>
-          </a:p>
-          <a:p>
-            <a:r>
-              <a:t>Oracle Live SQL y DB Fiddle siguen en el kit, pero cambian de papel: DB Fiddle sirve para probar SQL suelto y Live SQL solo como contraste de sintaxis, porque alli se escribe CREATE USER...</a:t>
-            </a:r>
-          </a:p>
-          <a:p>
-            <a:r>
-              <a:t>IDENTIFIED BY, se otorga GRANT CREATE SESSION y el esquema es el usuario.</a:t>
-            </a:r>
-          </a:p>
-          <a:p>
-            <a:r>
-              <a:t>Vale un minuto de clase mencionarlo, porque muchos se van a encontrar Oracle en el trabajo; no vale mas, porque el motor de la clase es PostgreSQL y todo minuto invertido en sintaxis del otro motor es un minuto que no se dedica al tema.</a:t>
-            </a:r>
-          </a:p>
-          <a:p>
-            <a:r>
-              <a:t>NOTAS:</a:t>
-            </a:r>
-          </a:p>
-          <a:p>
-            <a:r>
-              <a:t>Ahi CREATE ROLE, GRANT, REVOKE, CREATE VIEW, los privilegios por columna y las consultas a information_schema funcionan todos: son DDL real y son verificables, asi que la evidencia de la clase es la salida del motor y no una promesa.</a:t>
-            </a:r>
-          </a:p>
-          <a:p>
-            <a:r>
-              <a:t>Lo que NO se puede hacer es abrir una segunda conexion: el entorno tiene un solo usuario con login y una sola sesion, asi que nadie va a conectarse como recepcion en otra pestana mientras el docente mira desde la suya.</a:t>
-            </a:r>
-          </a:p>
-          <a:p>
-            <a:r>
-              <a:t>Esa es la limitacion real, y hay que nombrarla con esa precision, porque la version anterior de esta guia decia algo mas fuerte y falso: que por eso la prueba negativa era imposible.</a:t>
-            </a:r>
-          </a:p>
-          <a:p>
-            <a:r>
-              <a:t>Para ver el permiso negado no hace falta otra conexion, hace falta cambiar el rol EFECTIVO dentro de la misma sesion, y eso es lo que hace SET ROLE recepcion; a partir de esa linea los privilegios que el motor revisa son los del rol y no los del propietario, de modo que devuelve permission denied for table cita y tambien, si ya se revoco el SELECT de la tabla.</a:t>
-            </a:r>
-          </a:p>
-          <a:p>
-            <a:r>
-              <a:t>Se cierra con RESET ROLE; y conviene no olvidarlo, porque todo lo que venga despues se seguiria ejecutando con los permisos recortados.</a:t>
-            </a:r>
-          </a:p>
-          <a:p>
-            <a:r>
-              <a:t>Dos advertencias para la demo.</a:t>
-            </a:r>
-          </a:p>
-          <a:p>
-            <a:r>
-              <a:t>CÓDIGO CITADO (referencia):</a:t>
-            </a:r>
-          </a:p>
-          <a:p>
-            <a:r>
-              <a:t>DELETE FROM cita WHERE id_cita = 1</a:t>
-            </a:r>
-          </a:p>
-          <a:p>
-            <a:r>
-              <a:t>SELECT nombre, email FROM dueno</a:t>
-            </a:r>
-          </a:p>
-          <a:p>
-            <a:r>
-              <a:t>Fuera de la lamina (habla de la practica): Este punto hay que decirlo con precision porque una version anterior de esta guia decia lo contrario y costaria puntos repetirla.</a:t>
-            </a:r>
-          </a:p>
-          <a:p>
-            <a:r>
-              <a:t>Fuera de la lamina (habla de la practica): Dos, si el entorno del dia no permite cambiar de rol, no hay que esconderlo — se muestra el mensaje, y entonces si aparece la brecha de verificacion que la pregunta 5 pide nombrar.</a:t>
-            </a:r>
-          </a:p>
-        </p:txBody>
-      </p:sp>
-      <p:sp>
-        <p:nvSpPr>
-          <p:cNvPr id="4" name="Slide Number Placeholder 3"/>
-          <p:cNvSpPr>
-            <a:spLocks noGrp="1"/>
-          </p:cNvSpPr>
-          <p:nvPr>
-            <p:ph type="sldNum" idx="5" sz="quarter"/>
-          </p:nvPr>
-        </p:nvSpPr>
-        <p:spPr/>
-      </p:sp>
-    </p:spTree>
-  </p:cSld>
-  <p:clrMapOvr>
-    <a:masterClrMapping/>
-  </p:clrMapOvr>
-</p:notes>
-</file>
-
-<file path=ppt/notesSlides/notesSlide15.xml><?xml version="1.0" encoding="utf-8"?>
-<p:notes xmlns:a="http://schemas.openxmlformats.org/drawingml/2006/main" xmlns:p="http://schemas.openxmlformats.org/presentationml/2006/main" xmlns:r="http://schemas.openxmlformats.org/officeDocument/2006/relationships">
-  <p:cSld>
-    <p:spTree>
-      <p:nvGrpSpPr>
-        <p:cNvPr id="1" name=""/>
-        <p:cNvGrpSpPr/>
-        <p:nvPr/>
-      </p:nvGrpSpPr>
-      <p:grpSpPr>
-        <a:xfrm>
-          <a:off x="0" y="0"/>
-          <a:ext cx="0" cy="0"/>
-          <a:chOff x="0" y="0"/>
-          <a:chExt cx="0" cy="0"/>
-        </a:xfrm>
-      </p:grpSpPr>
-      <p:sp>
-        <p:nvSpPr>
-          <p:cNvPr id="2" name="Slide Image Placeholder 1"/>
-          <p:cNvSpPr>
-            <a:spLocks noGrp="1"/>
-          </p:cNvSpPr>
-          <p:nvPr>
-            <p:ph type="sldImg" idx="2"/>
-          </p:nvPr>
-        </p:nvSpPr>
-        <p:spPr/>
-      </p:sp>
-      <p:sp>
-        <p:nvSpPr>
-          <p:cNvPr id="3" name="Notes Placeholder 2"/>
-          <p:cNvSpPr>
-            <a:spLocks noGrp="1"/>
-          </p:cNvSpPr>
-          <p:nvPr>
-            <p:ph type="body" idx="3" sz="quarter"/>
-          </p:nvPr>
-        </p:nvSpPr>
-        <p:spPr/>
-        <p:txBody>
-          <a:bodyPr/>
-          <a:lstStyle/>
-          <a:p>
-            <a:r>
-              <a:t>DESARROLLO (para explicarlo, no se proyecta):</a:t>
-            </a:r>
-          </a:p>
-          <a:p>
-            <a:r>
-              <a:t>El script es la traduccion mecanica de una decision; la matriz es la decision.</a:t>
-            </a:r>
-          </a:p>
-          <a:p>
-            <a:r>
-              <a:t>Se construye con los objetos en las filas, los roles en las columnas, y en cada celda las acciones permitidas con la notacion abreviada: S para SELECT, I para INSERT, U para UPDATE, D para DELETE, E para EXECUTE y un guion cuando no hay ninguno.</a:t>
-            </a:r>
-          </a:p>
-          <a:p>
-            <a:r>
-              <a:t>Lo exigible para la clínica son los diez objetos por los cuatro roles, sin celdas vacias</a:t>
-            </a:r>
-          </a:p>
-          <a:p>
-            <a:r>
-              <a:t>Y la regla de calidad es que la matriz sea consistente con los GRANT que se ejecutaron en la primera pregunta: si el script no le dio DELETE a nadie, en la matriz no puede aparecer una D.</a:t>
-            </a:r>
-          </a:p>
-          <a:p>
-            <a:r>
-              <a:t>Los dos procedimientos van con E y nunca con S ni con I, y eso no es un detalle de notacion: es el patron que la Clase 3 va a construir y la Clase 12 va a usar, en el que la aplicacion no escribe en las tablas sino que invoca la regla de negocio.</a:t>
-            </a:r>
-          </a:p>
-          <a:p>
-            <a:r>
-              <a:t>Debajo de la matriz van cuatro a seis lineas justificando tres decisiones concretas, y ahi la regla es que una X sin texto no es una celda completa: «auditor sobre cita: solo S, porque auditar es verificar, no corregir» si lo es.</a:t>
-            </a:r>
-          </a:p>
-          <a:p>
-            <a:r>
-              <a:t>NOTAS:</a:t>
-            </a:r>
-          </a:p>
-          <a:p>
-            <a:r>
-              <a:t>Lo central no es el script sino la matriz rol por objeto por privilegio, y conviene explicar por que.</a:t>
-            </a:r>
-          </a:p>
-        </p:txBody>
-      </p:sp>
-      <p:sp>
-        <p:nvSpPr>
-          <p:cNvPr id="4" name="Slide Number Placeholder 3"/>
-          <p:cNvSpPr>
-            <a:spLocks noGrp="1"/>
-          </p:cNvSpPr>
-          <p:nvPr>
-            <p:ph type="sldNum" idx="5" sz="quarter"/>
-          </p:nvPr>
-        </p:nvSpPr>
-        <p:spPr/>
-      </p:sp>
-    </p:spTree>
-  </p:cSld>
-  <p:clrMapOvr>
-    <a:masterClrMapping/>
-  </p:clrMapOvr>
-</p:notes>
-</file>
-
-<file path=ppt/notesSlides/notesSlide16.xml><?xml version="1.0" encoding="utf-8"?>
-<p:notes xmlns:a="http://schemas.openxmlformats.org/drawingml/2006/main" xmlns:p="http://schemas.openxmlformats.org/presentationml/2006/main" xmlns:r="http://schemas.openxmlformats.org/officeDocument/2006/relationships">
-  <p:cSld>
-    <p:spTree>
-      <p:nvGrpSpPr>
-        <p:cNvPr id="1" name=""/>
-        <p:cNvGrpSpPr/>
-        <p:nvPr/>
-      </p:nvGrpSpPr>
-      <p:grpSpPr>
-        <a:xfrm>
-          <a:off x="0" y="0"/>
-          <a:ext cx="0" cy="0"/>
-          <a:chOff x="0" y="0"/>
-          <a:chExt cx="0" cy="0"/>
-        </a:xfrm>
-      </p:grpSpPr>
-      <p:sp>
-        <p:nvSpPr>
-          <p:cNvPr id="2" name="Slide Image Placeholder 1"/>
-          <p:cNvSpPr>
-            <a:spLocks noGrp="1"/>
-          </p:cNvSpPr>
-          <p:nvPr>
-            <p:ph type="sldImg" idx="2"/>
-          </p:nvPr>
-        </p:nvSpPr>
-        <p:spPr/>
-      </p:sp>
-      <p:sp>
-        <p:nvSpPr>
-          <p:cNvPr id="3" name="Notes Placeholder 2"/>
-          <p:cNvSpPr>
-            <a:spLocks noGrp="1"/>
-          </p:cNvSpPr>
-          <p:nvPr>
-            <p:ph type="body" idx="3" sz="quarter"/>
-          </p:nvPr>
-        </p:nvSpPr>
-        <p:spPr/>
-        <p:txBody>
-          <a:bodyPr/>
-          <a:lstStyle/>
-          <a:p>
-            <a:r>
-              <a:t>DESARROLLO (para explicarlo, no se proyecta):</a:t>
-            </a:r>
-          </a:p>
-          <a:p>
-            <a:r>
               <a:t>Lo de hoy no es una isla.</a:t>
             </a:r>
           </a:p>
@@ -1539,106 +1323,6 @@
           <a:p>
             <a:r>
               <a:t>Fuera de la lamina (habla de la practica): En la rubrica del proyecto, seguridad y respaldo valen 15 de los 100 puntos.</a:t>
-            </a:r>
-          </a:p>
-        </p:txBody>
-      </p:sp>
-      <p:sp>
-        <p:nvSpPr>
-          <p:cNvPr id="4" name="Slide Number Placeholder 3"/>
-          <p:cNvSpPr>
-            <a:spLocks noGrp="1"/>
-          </p:cNvSpPr>
-          <p:nvPr>
-            <p:ph type="sldNum" idx="5" sz="quarter"/>
-          </p:nvPr>
-        </p:nvSpPr>
-        <p:spPr/>
-      </p:sp>
-    </p:spTree>
-  </p:cSld>
-  <p:clrMapOvr>
-    <a:masterClrMapping/>
-  </p:clrMapOvr>
-</p:notes>
-</file>
-
-<file path=ppt/notesSlides/notesSlide17.xml><?xml version="1.0" encoding="utf-8"?>
-<p:notes xmlns:a="http://schemas.openxmlformats.org/drawingml/2006/main" xmlns:p="http://schemas.openxmlformats.org/presentationml/2006/main" xmlns:r="http://schemas.openxmlformats.org/officeDocument/2006/relationships">
-  <p:cSld>
-    <p:spTree>
-      <p:nvGrpSpPr>
-        <p:cNvPr id="1" name=""/>
-        <p:cNvGrpSpPr/>
-        <p:nvPr/>
-      </p:nvGrpSpPr>
-      <p:grpSpPr>
-        <a:xfrm>
-          <a:off x="0" y="0"/>
-          <a:ext cx="0" cy="0"/>
-          <a:chOff x="0" y="0"/>
-          <a:chExt cx="0" cy="0"/>
-        </a:xfrm>
-      </p:grpSpPr>
-      <p:sp>
-        <p:nvSpPr>
-          <p:cNvPr id="2" name="Slide Image Placeholder 1"/>
-          <p:cNvSpPr>
-            <a:spLocks noGrp="1"/>
-          </p:cNvSpPr>
-          <p:nvPr>
-            <p:ph type="sldImg" idx="2"/>
-          </p:nvPr>
-        </p:nvSpPr>
-        <p:spPr/>
-      </p:sp>
-      <p:sp>
-        <p:nvSpPr>
-          <p:cNvPr id="3" name="Notes Placeholder 2"/>
-          <p:cNvSpPr>
-            <a:spLocks noGrp="1"/>
-          </p:cNvSpPr>
-          <p:nvPr>
-            <p:ph type="body" idx="3" sz="quarter"/>
-          </p:nvPr>
-        </p:nvSpPr>
-        <p:spPr/>
-        <p:txBody>
-          <a:bodyPr/>
-          <a:lstStyle/>
-          <a:p>
-            <a:r>
-              <a:t>TEXTO COMPLETO DE LA LÁMINA (se proyecta resumido):</a:t>
-            </a:r>
-          </a:p>
-          <a:p/>
-          <a:p>
-            <a:r>
-              <a:t>Herramienta: PostgreSQL + Google Docs</a:t>
-            </a:r>
-          </a:p>
-          <a:p/>
-          <a:p>
-            <a:r>
-              <a:t>Demo: Los 4 roles de la clínica con CREATE ROLE/GRANT/REVOKE, verificados con information_schema.role_table_grants.</a:t>
-            </a:r>
-          </a:p>
-          <a:p/>
-          <a:p>
-            <a:r>
-              <a:t>Sigan el mismo dominio de la clínica (no inventen otro caso).</a:t>
-            </a:r>
-          </a:p>
-          <a:p/>
-          <a:p>
-            <a:r>
-              <a:t>Qué observar: con `SET ROLE recepcion` el `DELETE` responde permission denied, y `information_schema.role_table_grants` muestra la matriz real que dejo cada GRANT.</a:t>
-            </a:r>
-          </a:p>
-          <a:p/>
-          <a:p>
-            <a:r>
-              <a:t>Qué observar: la vista entrega a recepcion la agenda sin el email del dueno: el privilegio por columna recorta lo que se ve.</a:t>
             </a:r>
           </a:p>
         </p:txBody>
@@ -1713,52 +1397,42 @@
           </a:p>
           <a:p>
             <a:r>
-              <a:t>Administrar una base de datos es decidir y hacer cumplir quien puede hacer que sobre cada objeto, y dejar rastro de quien lo hizo.</a:t>
-            </a:r>
-          </a:p>
-          <a:p>
-            <a:r>
-              <a:t>Antes de llegar a la sintaxis conviene fijar cuatro terminos que se usan sueltos y se confunden todo el tiempo.</a:t>
-            </a:r>
-          </a:p>
-          <a:p>
-            <a:r>
-              <a:t>Un objeto de base de datos es cualquier cosa que el motor guarda y a la que se le puede poner nombre: una tabla como cita, una vista, un procedimiento, una secuencia.</a:t>
-            </a:r>
-          </a:p>
-          <a:p>
-            <a:r>
-              <a:t>Un esquema es un contenedor con nombre donde viven esos objetos; en PostgreSQL, que es el motor de esta clase, el esquema por omision se llama public y el nombre completo de la tabla es public.cita.</a:t>
-            </a:r>
-          </a:p>
-          <a:p>
-            <a:r>
-              <a:t>Aqui hay que desactivar una confusion que traen quienes vieron Oracle: alli esquema y usuario son practicamente lo mismo y se escribe la clínica.MASCOTA</a:t>
-            </a:r>
-          </a:p>
-          <a:p>
-            <a:r>
-              <a:t>Mientras que en PostgreSQL son cosas separadas, un mismo usuario puede tener objetos en varios esquemas y un esquema puede contener objetos de varios propietarios.</a:t>
-            </a:r>
-          </a:p>
-          <a:p>
-            <a:r>
-              <a:t>Autenticacion es probar quien es usted, con usuario y clave o con un certificado.</a:t>
-            </a:r>
-          </a:p>
-          <a:p>
-            <a:r>
-              <a:t>Autorizacion es decidir que puede hacer una vez que ya esta dentro.</a:t>
-            </a:r>
-          </a:p>
-          <a:p>
-            <a:r>
-              <a:t>Son etapas distintas, se controlan con mecanismos distintos, y un usuario puede autenticarse perfectamente y no tener permiso para leer ni una sola fila.</a:t>
-            </a:r>
-          </a:p>
-          <a:p>
-            <a:r>
-              <a:t>Esta clase se dicta en sesion virtual sincrona, en el bloque normal de 120 minutos: hay explicacion en vivo.</a:t>
+              <a:t>Un privilegio es un permiso atomico: la unidad mas pequena de autorizacion que el motor sabe otorgar o quitar.</a:t>
+            </a:r>
+          </a:p>
+          <a:p>
+            <a:r>
+              <a:t>En PostgreSQL hay que distinguir dos cosas que los estudiantes mezclan.</a:t>
+            </a:r>
+          </a:p>
+          <a:p>
+            <a:r>
+              <a:t>Los privilegios de objeto habilitan acciones sobre un objeto concreto y son los que se escriben con GRANT: SELECT, INSERT, UPDATE, DELETE, TRUNCATE, REFERENCES y TRIGGER sobre una tabla o una vista</a:t>
+            </a:r>
+          </a:p>
+          <a:p>
+            <a:r>
+              <a:t>Los atributos de rol son otra cosa: LOGIN, CREATEDB, CREATEROLE y SUPERUSER no se otorgan con GRANT sino que se escriben en el CREATE ROLE o se cambian con ALTER ROLE, y son el equivalente de lo que en Oracle se llama privilegio de sistema.</a:t>
+            </a:r>
+          </a:p>
+          <a:p>
+            <a:r>
+              <a:t>DDL, Data Definition Language, son las sentencias que cambian la estructura: CREATE, ALTER, DROP, TRUNCATE.</a:t>
+            </a:r>
+          </a:p>
+          <a:p>
+            <a:r>
+              <a:t>DML, Data Manipulation Language, son las que leen o cambian los datos sin tocar la estructura: SELECT, INSERT, UPDATE, DELETE.</a:t>
+            </a:r>
+          </a:p>
+          <a:p>
+            <a:r>
+              <a:t>Un recepcionista de la clínica necesita DML sobre unas pocas tablas y nunca necesita DDL.</a:t>
+            </a:r>
+          </a:p>
+          <a:p>
+            <a:r>
+              <a:t>Ejemplo en la clínica: GRANT SELECT, INSERT ON cita TO recepcion permite leer y agendar, pero no UPDATE ni DELETE, y tampoco ALTER TABLE, porque modificar la estructura de un objeto no es un privilegio que se conceda con GRANT: lo puede hacer su dueno.</a:t>
             </a:r>
           </a:p>
           <a:p>
@@ -1768,12 +1442,32 @@
           </a:p>
           <a:p>
             <a:r>
-              <a:t>Conviene aprovechar precisamente eso, porque los permisos son el tema del curso donde el estudiante mas necesita que alguien le diga en el momento por que su GRANT no surtio efecto.</a:t>
-            </a:r>
-          </a:p>
-          <a:p>
-            <a:r>
-              <a:t>Fuera de la lamina (habla de la practica): Esta clase se dicta en sesion virtual sincrona, en el bloque normal de 120 minutos: hay explicacion en vivo, taller acompanado y espacio para preguntar, asi que este texto es el material con el que el docente dicta y no una lectura que sustituya la clase.</a:t>
+              <a:t>EXECUTE sobre una funcion o un procedimiento</a:t>
+            </a:r>
+          </a:p>
+          <a:p>
+            <a:r>
+              <a:t>USAGE sobre un esquema o una secuencia</a:t>
+            </a:r>
+          </a:p>
+          <a:p>
+            <a:r>
+              <a:t>CONNECT y TEMPORARY sobre la base de datos.</a:t>
+            </a:r>
+          </a:p>
+          <a:p>
+            <a:r>
+              <a:t>Vale la pena decirlo porque el estudiante que busque en internet va a encontrar GRANT CREATE SESSION, que es sintaxis de Oracle y en PostgreSQL no existe.</a:t>
+            </a:r>
+          </a:p>
+          <a:p>
+            <a:r>
+              <a:t>La distincion practica que hay que dejar clara es la que separa DDL de DML.</a:t>
+            </a:r>
+          </a:p>
+          <a:p>
+            <a:r>
+              <a:t>Si su cuenta puede ejecutar DROP TABLE cita, un error de copiar y pegar borra la agenda completa, y ningun respaldo de la noche anterior devuelve las citas que se agendaron hoy.</a:t>
             </a:r>
           </a:p>
         </p:txBody>
@@ -1848,42 +1542,42 @@
           </a:p>
           <a:p>
             <a:r>
-              <a:t>Un privilegio es un permiso atomico: la unidad mas pequena de autorizacion que el motor sabe otorgar o quitar.</a:t>
-            </a:r>
-          </a:p>
-          <a:p>
-            <a:r>
-              <a:t>En PostgreSQL hay que distinguir dos cosas que los estudiantes mezclan.</a:t>
-            </a:r>
-          </a:p>
-          <a:p>
-            <a:r>
-              <a:t>Los privilegios de objeto habilitan acciones sobre un objeto concreto y son los que se escriben con GRANT: SELECT, INSERT, UPDATE, DELETE, TRUNCATE, REFERENCES y TRIGGER sobre una tabla o una vista</a:t>
-            </a:r>
-          </a:p>
-          <a:p>
-            <a:r>
-              <a:t>Los atributos de rol son otra cosa: LOGIN, CREATEDB, CREATEROLE y SUPERUSER no se otorgan con GRANT sino que se escriben en el CREATE ROLE o se cambian con ALTER ROLE, y son el equivalente de lo que en Oracle se llama privilegio de sistema.</a:t>
-            </a:r>
-          </a:p>
-          <a:p>
-            <a:r>
-              <a:t>DDL, Data Definition Language, son las sentencias que cambian la estructura: CREATE, ALTER, DROP, TRUNCATE.</a:t>
-            </a:r>
-          </a:p>
-          <a:p>
-            <a:r>
-              <a:t>DML, Data Manipulation Language, son las que leen o cambian los datos sin tocar la estructura: SELECT, INSERT, UPDATE, DELETE.</a:t>
-            </a:r>
-          </a:p>
-          <a:p>
-            <a:r>
-              <a:t>Un recepcionista de la clínica necesita DML sobre unas pocas tablas y nunca necesita DDL.</a:t>
-            </a:r>
-          </a:p>
-          <a:p>
-            <a:r>
-              <a:t>Ejemplo en la clínica: GRANT SELECT, INSERT ON cita TO recepcion permite leer y agendar, pero no UPDATE ni DELETE, y tampoco ALTER TABLE, porque modificar la estructura de un objeto no es un privilegio que se conceda con GRANT: lo puede hacer su dueno.</a:t>
+              <a:t>Un rol es un paquete de privilegios con nombre propio, que se otorga a un usuario en un solo paso.</a:t>
+            </a:r>
+          </a:p>
+          <a:p>
+            <a:r>
+              <a:t>El modelo tiene ocho tablas (dueno, mascota, veterinario, cita, consulta, insumo, factura y detalle_factura) y, contando los dos procedimientos que llegaran en la Clase 3, diez objetos que hay que decidir.</a:t>
+            </a:r>
+          </a:p>
+          <a:p>
+            <a:r>
+              <a:t>Si la clinica tiene doce empleados y los permisos se otorgan cuenta por cuenta, el administrador escribe del orden de cientos de sentencias GRANT</a:t>
+            </a:r>
+          </a:p>
+          <a:p>
+            <a:r>
+              <a:t>Pero el problema grave no es el volumen: es que cuando cambie una regla, por ejemplo que recepcion ya no pueda anular facturas, tendra que recordar tocar doce cuentas sin olvidar ninguna.</a:t>
+            </a:r>
+          </a:p>
+          <a:p>
+            <a:r>
+              <a:t>Con roles se define una sola vez el conjunto de privilegios de recepcion y se ejecutan doce sentencias GRANT recepcion TO usuario.</a:t>
+            </a:r>
+          </a:p>
+          <a:p>
+            <a:r>
+              <a:t>Al cambiar la regla se hace un REVOKE sobre el rol y los doce usuarios quedan corregidos en el mismo instante, sin excepciones y sin listas de verificacion.</a:t>
+            </a:r>
+          </a:p>
+          <a:p>
+            <a:r>
+              <a:t>Ejemplo la clínica: cuando entra una recepcionista nueva, el alta es una sola sentencia que le otorga el rol recepcion; cuando se va, la baja es una sola sentencia que se lo revoca.</a:t>
+            </a:r>
+          </a:p>
+          <a:p>
+            <a:r>
+              <a:t>Ningun permiso se toca objeto por objeto: la matriz del rol sigue siendo la misma para las 12 cuentas.</a:t>
             </a:r>
           </a:p>
           <a:p>
@@ -1893,32 +1587,17 @@
           </a:p>
           <a:p>
             <a:r>
-              <a:t>EXECUTE sobre una funcion o un procedimiento</a:t>
-            </a:r>
-          </a:p>
-          <a:p>
-            <a:r>
-              <a:t>USAGE sobre un esquema o una secuencia</a:t>
-            </a:r>
-          </a:p>
-          <a:p>
-            <a:r>
-              <a:t>CONNECT y TEMPORARY sobre la base de datos.</a:t>
-            </a:r>
-          </a:p>
-          <a:p>
-            <a:r>
-              <a:t>Vale la pena decirlo porque el estudiante que busque en internet va a encontrar GRANT CREATE SESSION, que es sintaxis de Oracle y en PostgreSQL no existe.</a:t>
-            </a:r>
-          </a:p>
-          <a:p>
-            <a:r>
-              <a:t>La distincion practica que hay que dejar clara es la que separa DDL de DML.</a:t>
-            </a:r>
-          </a:p>
-          <a:p>
-            <a:r>
-              <a:t>Si su cuenta puede ejecutar DROP TABLE cita, un error de copiar y pegar borra la agenda completa, y ningun respaldo de la noche anterior devuelve las citas que se agendaron hoy.</a:t>
+              <a:t>Existe por una razon aritmetica que conviene poner en el tablero con los numeros de la clínica.</a:t>
+            </a:r>
+          </a:p>
+          <a:p>
+            <a:r>
+              <a:t>Sobre cada uno hay hasta cinco acciones posibles, asi que la matriz completa tiene cincuenta celdas.</a:t>
+            </a:r>
+          </a:p>
+          <a:p>
+            <a:r>
+              <a:t>Ese es el argumento real que el docente debe transmitir: el rol no ahorra tipeo, ahorra olvidos, y los olvidos en materia de permisos son precisamente los que producen incidentes de seguridad.</a:t>
             </a:r>
           </a:p>
         </p:txBody>
@@ -1993,42 +1672,27 @@
           </a:p>
           <a:p>
             <a:r>
-              <a:t>Un rol es un paquete de privilegios con nombre propio, que se otorga a un usuario en un solo paso.</a:t>
-            </a:r>
-          </a:p>
-          <a:p>
-            <a:r>
-              <a:t>El modelo tiene ocho tablas (dueno, mascota, veterinario, cita, consulta, insumo, factura y detalle_factura) y, contando los dos procedimientos que llegaran en la Clase 3, diez objetos que hay que decidir.</a:t>
-            </a:r>
-          </a:p>
-          <a:p>
-            <a:r>
-              <a:t>Si la clinica tiene doce empleados y los permisos se otorgan cuenta por cuenta, el administrador escribe del orden de cientos de sentencias GRANT</a:t>
-            </a:r>
-          </a:p>
-          <a:p>
-            <a:r>
-              <a:t>Pero el problema grave no es el volumen: es que cuando cambie una regla, por ejemplo que recepcion ya no pueda anular facturas, tendra que recordar tocar doce cuentas sin olvidar ninguna.</a:t>
-            </a:r>
-          </a:p>
-          <a:p>
-            <a:r>
-              <a:t>Con roles se define una sola vez el conjunto de privilegios de recepcion y se ejecutan doce sentencias GRANT recepcion TO usuario.</a:t>
-            </a:r>
-          </a:p>
-          <a:p>
-            <a:r>
-              <a:t>Al cambiar la regla se hace un REVOKE sobre el rol y los doce usuarios quedan corregidos en el mismo instante, sin excepciones y sin listas de verificacion.</a:t>
-            </a:r>
-          </a:p>
-          <a:p>
-            <a:r>
-              <a:t>Ejemplo la clínica: cuando entra una recepcionista nueva, el alta es una sola sentencia que le otorga el rol recepcion; cuando se va, la baja es una sola sentencia que se lo revoca.</a:t>
-            </a:r>
-          </a:p>
-          <a:p>
-            <a:r>
-              <a:t>Ningun permiso se toca objeto por objeto: la matriz del rol sigue siendo la misma para las 12 cuentas.</a:t>
+              <a:t>CREATE USER no es un comando distinto, es un alias de CREATE ROLE...</a:t>
+            </a:r>
+          </a:p>
+          <a:p>
+            <a:r>
+              <a:t>Un rol con el atributo LOGIN es lo que llamamos usuario, porque puede iniciar sesion; un rol sin LOGIN es un paquete de permisos que nadie usa para conectarse.</a:t>
+            </a:r>
+          </a:p>
+          <a:p>
+            <a:r>
+              <a:t>Un segundo detalle, este de convencion y no de motor: el rol del veterinario se llama veterinario_rol y no veterinario.</a:t>
+            </a:r>
+          </a:p>
+          <a:p>
+            <a:r>
+              <a:t>Tecnicamente no hay ninguna obligacion, porque en PostgreSQL los roles son globales al cluster y las tablas viven en un esquema, de modo que un rol llamado veterinario y una tabla llamada veterinario pueden coexistir sin conflicto alguno.</a:t>
+            </a:r>
+          </a:p>
+          <a:p>
+            <a:r>
+              <a:t>La razon es de legibilidad para quien audita: en la linea GRANT SELECT ON cita TO veterinario no se puede saber a simple vista si veterinario es un rol o si alguien se equivoco de sintaxis, mientras que veterinario_rol se lee sin ambiguedad.</a:t>
             </a:r>
           </a:p>
           <a:p>
@@ -2038,17 +1702,27 @@
           </a:p>
           <a:p>
             <a:r>
-              <a:t>Existe por una razon aritmetica que conviene poner en el tablero con los numeros de la clínica.</a:t>
-            </a:r>
-          </a:p>
-          <a:p>
-            <a:r>
-              <a:t>Sobre cada uno hay hasta cinco acciones posibles, asi que la matriz completa tiene cincuenta celdas.</a:t>
-            </a:r>
-          </a:p>
-          <a:p>
-            <a:r>
-              <a:t>Ese es el argumento real que el docente debe transmitir: el rol no ahorra tipeo, ahorra olvidos, y los olvidos en materia de permisos son precisamente los que producen incidentes de seguridad.</a:t>
+              <a:t>Hay un detalle del motor que hay que decir temprano porque de lo contrario el tema se vuelve incomprensible: en PostgreSQL usuario y rol son la misma entidad.</a:t>
+            </a:r>
+          </a:p>
+          <a:p>
+            <a:r>
+              <a:t>Por eso los cuatro roles de la clase se crean con CREATE ROLE recepcion NOLOGIN: son bolsas de privilegios, no identidades.</a:t>
+            </a:r>
+          </a:p>
+          <a:p>
+            <a:r>
+              <a:t>La persona viene despues, como CREATE ROLE ana_gomez LOGIN PASSWORD '...', y recibe la bolsa con GRANT recepcion TO ana_gomez.</a:t>
+            </a:r>
+          </a:p>
+          <a:p>
+            <a:r>
+              <a:t>Esa herencia es la que hace que al modificar el rol se corrijan todas las personas a la vez.</a:t>
+            </a:r>
+          </a:p>
+          <a:p>
+            <a:r>
+              <a:t>Conviene decir esto tal cual, porque un estudiante despierto va a preguntar por que el sufijo y merece la respuesta correcta y no una inventada.</a:t>
             </a:r>
           </a:p>
         </p:txBody>
@@ -2123,27 +1797,27 @@
           </a:p>
           <a:p>
             <a:r>
-              <a:t>CREATE USER no es un comando distinto, es un alias de CREATE ROLE...</a:t>
-            </a:r>
-          </a:p>
-          <a:p>
-            <a:r>
-              <a:t>Un rol con el atributo LOGIN es lo que llamamos usuario, porque puede iniciar sesion; un rol sin LOGIN es un paquete de permisos que nadie usa para conectarse.</a:t>
-            </a:r>
-          </a:p>
-          <a:p>
-            <a:r>
-              <a:t>Un segundo detalle, este de convencion y no de motor: el rol del veterinario se llama veterinario_rol y no veterinario.</a:t>
-            </a:r>
-          </a:p>
-          <a:p>
-            <a:r>
-              <a:t>Tecnicamente no hay ninguna obligacion, porque en PostgreSQL los roles son globales al cluster y las tablas viven en un esquema, de modo que un rol llamado veterinario y una tabla llamada veterinario pueden coexistir sin conflicto alguno.</a:t>
-            </a:r>
-          </a:p>
-          <a:p>
-            <a:r>
-              <a:t>La razon es de legibilidad para quien audita: en la linea GRANT SELECT ON cita TO veterinario no se puede saber a simple vista si veterinario es un rol o si alguien se equivoco de sintaxis, mientras que veterinario_rol se lee sin ambiguedad.</a:t>
+              <a:t>No necesita leer consulta, porque el historial clinico es informacion sensible del paciente que la recepcion no requiere para hacer su trabajo.</a:t>
+            </a:r>
+          </a:p>
+          <a:p>
+            <a:r>
+              <a:t>El rol veterinario_rol necesita SELECT sobre cita y mascota, y SELECT, INSERT y UPDATE sobre consulta, porque es quien documenta la atencion.</a:t>
+            </a:r>
+          </a:p>
+          <a:p>
+            <a:r>
+              <a:t>El rol admin_bd es el unico con privilegios amplios, y es el que sostiene el DDL.</a:t>
+            </a:r>
+          </a:p>
+          <a:p>
+            <a:r>
+              <a:t>Notese que DELETE no aparece en ninguna fila operativa, y eso no es descuido: en un sistema clinico las cosas no se borran, se marcan.</a:t>
+            </a:r>
+          </a:p>
+          <a:p>
+            <a:r>
+              <a:t>Una cita cancelada lleva estado = 'CANCELADA' y una mascota que ya no se atiende lleva activa = 'N', que es exactamente como quedo el DDL de la Clase 1, con CHAR(1) y CHECK (activa IN ('S','N')).</a:t>
             </a:r>
           </a:p>
           <a:p>
@@ -2153,27 +1827,32 @@
           </a:p>
           <a:p>
             <a:r>
-              <a:t>Hay un detalle del motor que hay que decir temprano porque de lo contrario el tema se vuelve incomprensible: en PostgreSQL usuario y rol son la misma entidad.</a:t>
-            </a:r>
-          </a:p>
-          <a:p>
-            <a:r>
-              <a:t>Por eso los cuatro roles de la clase se crean con CREATE ROLE recepcion NOLOGIN: son bolsas de privilegios, no identidades.</a:t>
-            </a:r>
-          </a:p>
-          <a:p>
-            <a:r>
-              <a:t>La persona viene despues, como CREATE ROLE ana_gomez LOGIN PASSWORD '...', y recibe la bolsa con GRANT recepcion TO ana_gomez.</a:t>
-            </a:r>
-          </a:p>
-          <a:p>
-            <a:r>
-              <a:t>Esa herencia es la que hace que al modificar el rol se corrijan todas las personas a la vez.</a:t>
-            </a:r>
-          </a:p>
-          <a:p>
-            <a:r>
-              <a:t>Conviene decir esto tal cual, porque un estudiante despierto va a preguntar por que el sufijo y merece la respuesta correcta y no una inventada.</a:t>
+              <a:t>El principio de minimo privilegio dice que cada rol recibe exactamente lo que necesita para cumplir su funcion y ni un privilegio mas.</a:t>
+            </a:r>
+          </a:p>
+          <a:p>
+            <a:r>
+              <a:t>Aplicado a la clínica deja una matriz muy concreta y defendible.</a:t>
+            </a:r>
+          </a:p>
+          <a:p>
+            <a:r>
+              <a:t>El rol recepcion necesita SELECT sobre mascota, dueno y veterinario para poder buscar y agendar, y SELECT, INSERT y UPDATE sobre cita para agendar y reprogramar; nada mas.</a:t>
+            </a:r>
+          </a:p>
+          <a:p>
+            <a:r>
+              <a:t>El rol auditor recibe unicamente SELECT, y jamas una escritura.</a:t>
+            </a:r>
+          </a:p>
+          <a:p>
+            <a:r>
+              <a:t>Eso se llama borrado logico, y hace que el privilegio DELETE sea innecesario para casi todos los usuarios, lo que a su vez elimina de raiz la posibilidad de una perdida accidental de informacion.</a:t>
+            </a:r>
+          </a:p>
+          <a:p>
+            <a:r>
+              <a:t>Conviene escribir esos dos valores en el tablero, porque el estudiante que suponga activa = 0 escribira un UPDATE que el CHECK va a rechazar y perdera diez minutos buscando el error en otra parte.</a:t>
             </a:r>
           </a:p>
         </p:txBody>
@@ -2248,27 +1927,32 @@
           </a:p>
           <a:p>
             <a:r>
-              <a:t>No necesita leer consulta, porque el historial clinico es informacion sensible del paciente que la recepcion no requiere para hacer su trabajo.</a:t>
-            </a:r>
-          </a:p>
-          <a:p>
-            <a:r>
-              <a:t>El rol veterinario_rol necesita SELECT sobre cita y mascota, y SELECT, INSERT y UPDATE sobre consulta, porque es quien documenta la atencion.</a:t>
-            </a:r>
-          </a:p>
-          <a:p>
-            <a:r>
-              <a:t>El rol admin_bd es el unico con privilegios amplios, y es el que sostiene el DDL.</a:t>
-            </a:r>
-          </a:p>
-          <a:p>
-            <a:r>
-              <a:t>Notese que DELETE no aparece en ninguna fila operativa, y eso no es descuido: en un sistema clinico las cosas no se borran, se marcan.</a:t>
-            </a:r>
-          </a:p>
-          <a:p>
-            <a:r>
-              <a:t>Una cita cancelada lleva estado = 'CANCELADA' y una mascota que ya no se atiende lleva activa = 'N', que es exactamente como quedo el DDL de la Clase 1, con CHAR(1) y CHECK (activa IN ('S','N')).</a:t>
+              <a:t>Separacion de funciones, o segregation of duties, es la practica de repartir un proceso sensible entre dos o mas personas para que ninguna pueda completarlo sola sin dejar rastro.</a:t>
+            </a:r>
+          </a:p>
+          <a:p>
+            <a:r>
+              <a:t>En terminos de base de datos significa que quien disena y modifica el esquema no debe ser la misma cuenta que opera los datos del dia a dia, y que quien audita solo debe leer.</a:t>
+            </a:r>
+          </a:p>
+          <a:p>
+            <a:r>
+              <a:t>El ejemplo de la clínica es facil de contar: si la misma cuenta que emite una factura puede tambien borrarla, entonces una persona puede cobrar en efectivo y hacer desaparecer el registro, y no queda evidencia de que la factura existio.</a:t>
+            </a:r>
+          </a:p>
+          <a:p>
+            <a:r>
+              <a:t>Separando funciones, emitir una factura es un INSERT permitido a un rol, y anular una factura es un UPDATE de estado permitido a un rol distinto, y ese UPDATE deja fecha, usuario y motivo.</a:t>
+            </a:r>
+          </a:p>
+          <a:p>
+            <a:r>
+              <a:t>Aqui aparece la primera pregunta previsible del estudiante: «no es mas facil darle todo al jefe y ya?».</a:t>
+            </a:r>
+          </a:p>
+          <a:p>
+            <a:r>
+              <a:t>En terminos de privilegios: recepcion puede INSERT en factura pero no UPDATE sobre un total ya emitido, y auditor solo tiene SELECT.</a:t>
             </a:r>
           </a:p>
           <a:p>
@@ -2278,32 +1962,22 @@
           </a:p>
           <a:p>
             <a:r>
-              <a:t>El principio de minimo privilegio dice que cada rol recibe exactamente lo que necesita para cumplir su funcion y ni un privilegio mas.</a:t>
-            </a:r>
-          </a:p>
-          <a:p>
-            <a:r>
-              <a:t>Aplicado a la clínica deja una matriz muy concreta y defendible.</a:t>
-            </a:r>
-          </a:p>
-          <a:p>
-            <a:r>
-              <a:t>El rol recepcion necesita SELECT sobre mascota, dueno y veterinario para poder buscar y agendar, y SELECT, INSERT y UPDATE sobre cita para agendar y reprogramar; nada mas.</a:t>
-            </a:r>
-          </a:p>
-          <a:p>
-            <a:r>
-              <a:t>El rol auditor recibe unicamente SELECT, y jamas una escritura.</a:t>
-            </a:r>
-          </a:p>
-          <a:p>
-            <a:r>
-              <a:t>Eso se llama borrado logico, y hace que el privilegio DELETE sea innecesario para casi todos los usuarios, lo que a su vez elimina de raiz la posibilidad de una perdida accidental de informacion.</a:t>
-            </a:r>
-          </a:p>
-          <a:p>
-            <a:r>
-              <a:t>Conviene escribir esos dos valores en el tablero, porque el estudiante que suponga activa = 0 escribira un UPDATE que el CHECK va a rechazar y perdera diez minutos buscando el error en otra parte.</a:t>
+              <a:t>La respuesta que el docente debe dar es que el problema no es la confianza en la persona sino el dano posible por un error o por una sesion robada.</a:t>
+            </a:r>
+          </a:p>
+          <a:p>
+            <a:r>
+              <a:t>Si alguien roba la sesion del recepcionista, con minimo privilegio el atacante ve agendas y datos de contacto; con privilegios de administrador, borra la base completa.</a:t>
+            </a:r>
+          </a:p>
+          <a:p>
+            <a:r>
+              <a:t>El permiso no mide cuanto se quiere a un empleado, mide cuanto se puede perder.</a:t>
+            </a:r>
+          </a:p>
+          <a:p>
+            <a:r>
+              <a:t>Ningun rol puede a la vez crear, modificar y aprobar el mismo registro.</a:t>
             </a:r>
           </a:p>
         </p:txBody>
@@ -2378,32 +2052,42 @@
           </a:p>
           <a:p>
             <a:r>
-              <a:t>Separacion de funciones, o segregation of duties, es la practica de repartir un proceso sensible entre dos o mas personas para que ninguna pueda completarlo sola sin dejar rastro.</a:t>
-            </a:r>
-          </a:p>
-          <a:p>
-            <a:r>
-              <a:t>En terminos de base de datos significa que quien disena y modifica el esquema no debe ser la misma cuenta que opera los datos del dia a dia, y que quien audita solo debe leer.</a:t>
-            </a:r>
-          </a:p>
-          <a:p>
-            <a:r>
-              <a:t>El ejemplo de la clínica es facil de contar: si la misma cuenta que emite una factura puede tambien borrarla, entonces una persona puede cobrar en efectivo y hacer desaparecer el registro, y no queda evidencia de que la factura existio.</a:t>
-            </a:r>
-          </a:p>
-          <a:p>
-            <a:r>
-              <a:t>Separando funciones, emitir una factura es un INSERT permitido a un rol, y anular una factura es un UPDATE de estado permitido a un rol distinto, y ese UPDATE deja fecha, usuario y motivo.</a:t>
-            </a:r>
-          </a:p>
-          <a:p>
-            <a:r>
-              <a:t>Aqui aparece la primera pregunta previsible del estudiante: «no es mas facil darle todo al jefe y ya?».</a:t>
-            </a:r>
-          </a:p>
-          <a:p>
-            <a:r>
-              <a:t>En terminos de privilegios: recepcion puede INSERT en factura pero no UPDATE sobre un total ya emitido, y auditor solo tiene SELECT.</a:t>
+              <a:t>La forma de las sentencias reales, que el estudiante debe poder escribir de memoria al terminar la lectura, es esta: CREATE ROLE recepcion NOLOGIN; luego GRANT SELECT, INSERT, UPDATE ON cita TO recepcion</a:t>
+            </a:r>
+          </a:p>
+          <a:p>
+            <a:r>
+              <a:t>Luego GRANT SELECT ON dueno, mascota, veterinario TO recepcion, aprovechando que PostgreSQL acepta varias tablas en un mismo GRANT; y finalmente GRANT recepcion TO ana_gomez.</a:t>
+            </a:r>
+          </a:p>
+          <a:p>
+            <a:r>
+              <a:t>Primero, un rol recien creado no tiene ningun privilegio sobre las tablas ajenas: no hace falta revocar nada para «empezar limpio», el punto de partida ya es cero.</a:t>
+            </a:r>
+          </a:p>
+          <a:p>
+            <a:r>
+              <a:t>Segundo, para que un rol pueda usar los objetos del esquema necesita USAGE sobre el esquema; en public eso viene concedido por omision, asi que hoy no estorba, pero en un servidor con esquemas propios es la causa numero uno del GRANT que «no surtio efecto».</a:t>
+            </a:r>
+          </a:p>
+          <a:p>
+            <a:r>
+              <a:t>Tercero, existe la forma masiva GRANT SELECT ON ALL TABLES IN SCHEMA public TO auditor, comoda y peligrosa a la vez: aplica a las tablas que existen en ese momento y no a las futuras</a:t>
+            </a:r>
+          </a:p>
+          <a:p>
+            <a:r>
+              <a:t>De modo que la tabla que se cree la semana entrante quedara fuera y nadie se dara cuenta; para eso existe ALTER DEFAULT PRIVILEGES, que vale nombrar sin desarrollar.</a:t>
+            </a:r>
+          </a:p>
+          <a:p>
+            <a:r>
+              <a:t>Error comun: creer que REVOKE de un privilegio que nunca se otorgo es un error: PostgreSQL lo ejecuta sin error y no cambia nada.</a:t>
+            </a:r>
+          </a:p>
+          <a:p>
+            <a:r>
+              <a:t>Tambien es comun olvidar que los privilegios concedidos a PUBLIC los recibe todo rol, incluido el que se acaba de restringir.</a:t>
             </a:r>
           </a:p>
           <a:p>
@@ -2413,22 +2097,32 @@
           </a:p>
           <a:p>
             <a:r>
-              <a:t>La respuesta que el docente debe dar es que el problema no es la confianza en la persona sino el dano posible por un error o por una sesion robada.</a:t>
-            </a:r>
-          </a:p>
-          <a:p>
-            <a:r>
-              <a:t>Si alguien roba la sesion del recepcionista, con minimo privilegio el atacante ve agendas y datos de contacto; con privilegios de administrador, borra la base completa.</a:t>
-            </a:r>
-          </a:p>
-          <a:p>
-            <a:r>
-              <a:t>El permiso no mide cuanto se quiere a un empleado, mide cuanto se puede perder.</a:t>
-            </a:r>
-          </a:p>
-          <a:p>
-            <a:r>
-              <a:t>Ningun rol puede a la vez crear, modificar y aprobar el mismo registro.</a:t>
+              <a:t>GRANT otorga y REVOKE retira, y ambos operan igual sobre usuarios y sobre roles.</a:t>
+            </a:r>
+          </a:p>
+          <a:p>
+            <a:r>
+              <a:t>Para retirar un permiso</a:t>
+            </a:r>
+          </a:p>
+          <a:p>
+            <a:r>
+              <a:t>Hay tres detalles operativos que evitan la mitad de los tropiezos de la clase.</a:t>
+            </a:r>
+          </a:p>
+          <a:p>
+            <a:r>
+              <a:t>CÓDIGO CITADO (referencia):</a:t>
+            </a:r>
+          </a:p>
+          <a:p>
+            <a:r>
+              <a:t>REVOKE DELETE ON cita FROM recepcion</a:t>
+            </a:r>
+          </a:p>
+          <a:p>
+            <a:r>
+              <a:t>Fuera de la lamina (habla de la practica): Eso explica por que el REVOKE de DELETE que pide el taller es, tecnicamente, redundante; se escribe de todos modos porque es la evidencia documental de una decision de diseno, y quien revise el script tiene que poder ver que la ausencia de DELETE fue deliberada y no un olvido.</a:t>
             </a:r>
           </a:p>
         </p:txBody>
@@ -2503,42 +2197,27 @@
           </a:p>
           <a:p>
             <a:r>
-              <a:t>La forma de las sentencias reales, que el estudiante debe poder escribir de memoria al terminar la lectura, es esta: CREATE ROLE recepcion NOLOGIN; luego GRANT SELECT, INSERT, UPDATE ON cita TO recepcion</a:t>
-            </a:r>
-          </a:p>
-          <a:p>
-            <a:r>
-              <a:t>Luego GRANT SELECT ON dueno, mascota, veterinario TO recepcion, aprovechando que PostgreSQL acepta varias tablas en un mismo GRANT; y finalmente GRANT recepcion TO ana_gomez.</a:t>
-            </a:r>
-          </a:p>
-          <a:p>
-            <a:r>
-              <a:t>Primero, un rol recien creado no tiene ningun privilegio sobre las tablas ajenas: no hace falta revocar nada para «empezar limpio», el punto de partida ya es cero.</a:t>
-            </a:r>
-          </a:p>
-          <a:p>
-            <a:r>
-              <a:t>Segundo, para que un rol pueda usar los objetos del esquema necesita USAGE sobre el esquema; en public eso viene concedido por omision, asi que hoy no estorba, pero en un servidor con esquemas propios es la causa numero uno del GRANT que «no surtio efecto».</a:t>
-            </a:r>
-          </a:p>
-          <a:p>
-            <a:r>
-              <a:t>Tercero, existe la forma masiva GRANT SELECT ON ALL TABLES IN SCHEMA public TO auditor, comoda y peligrosa a la vez: aplica a las tablas que existen en ese momento y no a las futuras</a:t>
-            </a:r>
-          </a:p>
-          <a:p>
-            <a:r>
-              <a:t>De modo que la tabla que se cree la semana entrante quedara fuera y nadie se dara cuenta; para eso existe ALTER DEFAULT PRIVILEGES, que vale nombrar sin desarrollar.</a:t>
-            </a:r>
-          </a:p>
-          <a:p>
-            <a:r>
-              <a:t>Error comun: creer que REVOKE de un privilegio que nunca se otorgo es un error: PostgreSQL lo ejecuta sin error y no cambia nada.</a:t>
-            </a:r>
-          </a:p>
-          <a:p>
-            <a:r>
-              <a:t>Tambien es comun olvidar que los privilegios concedidos a PUBLIC los recibe todo rol, incluido el que se acaba de restringir.</a:t>
+              <a:t>La clausula WITH GRANT OPTION permite que quien recibio el privilegio lo vuelva a otorgar a otros; suena comodo y es una mala idea</a:t>
+            </a:r>
+          </a:p>
+          <a:p>
+            <a:r>
+              <a:t>Porque el administrador pierde el control de la cadena de permisos y, al hacer REVOKE, se produce una revocacion en cascada con efectos que nadie previo</a:t>
+            </a:r>
+          </a:p>
+          <a:p>
+            <a:r>
+              <a:t>De hecho PostgreSQL rechaza el REVOKE si hay privilegios dependientes y obliga a escribir CASCADE, que es el motor avisando que la operacion va a tocar mas de lo que se le pidio.</a:t>
+            </a:r>
+          </a:p>
+          <a:p>
+            <a:r>
+              <a:t>El segundo es el rol especial PUBLIC, al que pertenecen todos los roles existentes y futuros: un GRANT SELECT ON consulta TO PUBLIC entrega el historial clinico a cualquiera que pueda conectarse, incluido el proximo usuario que se cree manana.</a:t>
+            </a:r>
+          </a:p>
+          <a:p>
+            <a:r>
+              <a:t>Buscar y quitar privilegios otorgados a PUBLIC, con REVOKE ALL ON &lt;tabla&gt; FROM PUBLIC, es una tarea real de endurecimiento en bases de datos heredadas, y vale la pena nombrarla para que el estudiante entienda que estos conceptos no son escolares.</a:t>
             </a:r>
           </a:p>
           <a:p>
@@ -2548,32 +2227,7 @@
           </a:p>
           <a:p>
             <a:r>
-              <a:t>GRANT otorga y REVOKE retira, y ambos operan igual sobre usuarios y sobre roles.</a:t>
-            </a:r>
-          </a:p>
-          <a:p>
-            <a:r>
-              <a:t>Para retirar un permiso</a:t>
-            </a:r>
-          </a:p>
-          <a:p>
-            <a:r>
-              <a:t>Hay tres detalles operativos que evitan la mitad de los tropiezos de la clase.</a:t>
-            </a:r>
-          </a:p>
-          <a:p>
-            <a:r>
-              <a:t>CÓDIGO CITADO (referencia):</a:t>
-            </a:r>
-          </a:p>
-          <a:p>
-            <a:r>
-              <a:t>REVOKE DELETE ON cita FROM recepcion</a:t>
-            </a:r>
-          </a:p>
-          <a:p>
-            <a:r>
-              <a:t>Fuera de la lamina (habla de la practica): Eso explica por que el REVOKE de DELETE que pide el taller es, tecnicamente, redundante; se escribe de todos modos porque es la evidencia documental de una decision de diseno, y quien revise el script tiene que poder ver que la ausencia de DELETE fue deliberada y no un olvido.</a:t>
+              <a:t>Hay dos mecanismos que conviene conocer porque hacen dano en silencio.</a:t>
             </a:r>
           </a:p>
         </p:txBody>
@@ -2648,27 +2302,32 @@
           </a:p>
           <a:p>
             <a:r>
-              <a:t>La clausula WITH GRANT OPTION permite que quien recibio el privilegio lo vuelva a otorgar a otros; suena comodo y es una mala idea</a:t>
-            </a:r>
-          </a:p>
-          <a:p>
-            <a:r>
-              <a:t>Porque el administrador pierde el control de la cadena de permisos y, al hacer REVOKE, se produce una revocacion en cascada con efectos que nadie previo</a:t>
-            </a:r>
-          </a:p>
-          <a:p>
-            <a:r>
-              <a:t>De hecho PostgreSQL rechaza el REVOKE si hay privilegios dependientes y obliga a escribir CASCADE, que es el motor avisando que la operacion va a tocar mas de lo que se le pidio.</a:t>
-            </a:r>
-          </a:p>
-          <a:p>
-            <a:r>
-              <a:t>El segundo es el rol especial PUBLIC, al que pertenecen todos los roles existentes y futuros: un GRANT SELECT ON consulta TO PUBLIC entrega el historial clinico a cualquiera que pueda conectarse, incluido el proximo usuario que se cree manana.</a:t>
-            </a:r>
-          </a:p>
-          <a:p>
-            <a:r>
-              <a:t>Buscar y quitar privilegios otorgados a PUBLIC, con REVOKE ALL ON &lt;tabla&gt; FROM PUBLIC, es una tarea real de endurecimiento en bases de datos heredadas, y vale la pena nombrarla para que el estudiante entienda que estos conceptos no son escolares.</a:t>
+              <a:t>Un GRANT sobre una tabla es todo o nada en filas y columnas: quien tiene SELECT sobre dueno ve las seis columnas y las seis filas.</a:t>
+            </a:r>
+          </a:p>
+          <a:p>
+            <a:r>
+              <a:t>Hay dos mecanismos para recortar esa superficie y hay que saber cuando usar cada uno.</a:t>
+            </a:r>
+          </a:p>
+          <a:p>
+            <a:r>
+              <a:t>Una vista es una consulta guardada con nombre, que se usa como si fuera una tabla; se crea con CREATE VIEW v_agenda_recepcion AS SELECT... y se le otorga SELECT al rol.</a:t>
+            </a:r>
+          </a:p>
+          <a:p>
+            <a:r>
+              <a:t>La vista recorta las dos dimensiones a la vez: filas, con un WHERE estado &lt;&gt; 'CANCELADA', y columnas, con solo dejar el email fuera del SELECT.</a:t>
+            </a:r>
+          </a:p>
+          <a:p>
+            <a:r>
+              <a:t>El segundo mecanismo es el privilegio por columna: ON dueno TO veterinario_rol otorga lectura de dos columnas y de ninguna otra, sin crear ningun objeto nuevo.</a:t>
+            </a:r>
+          </a:p>
+          <a:p>
+            <a:r>
+              <a:t>El criterio para elegir es simple: si el recorte necesita filtrar filas o cruzar tablas, se hace con vista; si es puramente por columna y no se quiere mantener un objeto mas, con privilegio por columna.</a:t>
             </a:r>
           </a:p>
           <a:p>
@@ -2678,7 +2337,42 @@
           </a:p>
           <a:p>
             <a:r>
-              <a:t>Hay dos mecanismos que conviene conocer porque hacen dano en silencio.</a:t>
+              <a:t>Aqui esta el concepto que hace la diferencia entre una matriz de aficionado y una defendible.</a:t>
+            </a:r>
+          </a:p>
+          <a:p>
+            <a:r>
+              <a:t>Pero la recepcionista solo necesita el nombre y el telefono para identificar a quien llama, y no tiene por que ver el correo electronico de los clientes.</a:t>
+            </a:r>
+          </a:p>
+          <a:p>
+            <a:r>
+              <a:t>El primero es la vista.</a:t>
+            </a:r>
+          </a:p>
+          <a:p>
+            <a:r>
+              <a:t>Lo que hace que funcione, y es el punto que el estudiante no cree hasta que lo ve, es que la consulta de la vista se ejecuta con los privilegios de su PROPIETARIO y no con los de quien la consulta: por eso se puede dar SELECT sobre la vista a recepcion y al mismo tiempo hacer REVOKE SELECT ON dueno FROM recepcion, y el rol sigue viendo el telefono del dueno a traves de la vista pero no puede consultar la tabla directamente.</a:t>
+            </a:r>
+          </a:p>
+          <a:p>
+            <a:r>
+              <a:t>Tiene una consecuencia que hay que advertir en clase porque genera un error confuso: ese rol ya no puede escribir SELECT * FROM dueno, porque el asterisco pide todas las columnas y dos de ellas le estan negadas; tiene que nombrar las columnas explicitamente.</a:t>
+            </a:r>
+          </a:p>
+          <a:p>
+            <a:r>
+              <a:t>CÓDIGO CITADO (referencia):</a:t>
+            </a:r>
+          </a:p>
+          <a:p>
+            <a:r>
+              <a:t>GRANT SELECT (id_dueno, nombre)</a:t>
+            </a:r>
+          </a:p>
+          <a:p>
+            <a:r>
+              <a:t>Fuera de la lamina (habla de la practica): Aqui esta el concepto que hace la diferencia entre una matriz de aficionado y una defendible, y es la parte que el taller evalua con veinte puntos.</a:t>
             </a:r>
           </a:p>
         </p:txBody>
@@ -15727,118 +15421,14 @@
       </p:sp>
       <p:sp>
         <p:nvSpPr>
-          <p:cNvPr id="5" name="Rounded Rectangle 4"/>
-          <p:cNvSpPr/>
-          <p:nvPr/>
-        </p:nvSpPr>
-        <p:spPr>
-          <a:xfrm>
-            <a:off x="5797149" y="1573813"/>
-            <a:ext cx="6010497" cy="4057845"/>
-          </a:xfrm>
-          <a:prstGeom prst="roundRect">
-            <a:avLst>
-              <a:gd name="adj" fmla="val 4000"/>
-            </a:avLst>
-          </a:prstGeom>
-          <a:solidFill>
-            <a:srgbClr val="E8EEF4"/>
-          </a:solidFill>
-          <a:ln>
-            <a:noFill/>
-          </a:ln>
-        </p:spPr>
-        <p:style>
-          <a:lnRef idx="1">
-            <a:schemeClr val="accent1"/>
-          </a:lnRef>
-          <a:fillRef idx="3">
-            <a:schemeClr val="accent1"/>
-          </a:fillRef>
-          <a:effectRef idx="2">
-            <a:schemeClr val="accent1"/>
-          </a:effectRef>
-          <a:fontRef idx="minor">
-            <a:schemeClr val="lt1"/>
-          </a:fontRef>
-        </p:style>
-        <p:txBody>
-          <a:bodyPr rtlCol="0" anchor="ctr"/>
-          <a:lstStyle/>
-          <a:p>
-            <a:pPr algn="ctr"/>
-          </a:p>
-        </p:txBody>
-      </p:sp>
-      <p:pic>
-        <p:nvPicPr>
-          <p:cNvPr id="6" name="Picture 5" descr="notebook-planning-desk-coffee.jpg"/>
-          <p:cNvPicPr>
-            <a:picLocks noChangeAspect="1"/>
-          </p:cNvPicPr>
-          <p:nvPr/>
-        </p:nvPicPr>
-        <p:blipFill>
-          <a:blip r:embed="rId2"/>
-          <a:stretch>
-            <a:fillRect/>
-          </a:stretch>
-        </p:blipFill>
-        <p:spPr>
-          <a:xfrm>
-            <a:off x="5870301" y="1646965"/>
-            <a:ext cx="5864193" cy="3911541"/>
-          </a:xfrm>
-          <a:prstGeom prst="rect">
-            <a:avLst/>
-          </a:prstGeom>
-        </p:spPr>
-      </p:pic>
-      <p:sp>
-        <p:nvSpPr>
-          <p:cNvPr id="7" name="TextBox 6"/>
+          <p:cNvPr id="5" name="TextBox 4"/>
           <p:cNvSpPr txBox="1"/>
           <p:nvPr/>
         </p:nvSpPr>
         <p:spPr>
           <a:xfrm>
-            <a:off x="5870301" y="5961888"/>
-            <a:ext cx="5864193" cy="320040"/>
-          </a:xfrm>
-          <a:prstGeom prst="rect">
-            <a:avLst/>
-          </a:prstGeom>
-          <a:noFill/>
-        </p:spPr>
-        <p:txBody>
-          <a:bodyPr wrap="square">
-            <a:spAutoFit/>
-          </a:bodyPr>
-          <a:lstStyle/>
-          <a:p>
-            <a:pPr algn="ctr"/>
-            <a:r>
-              <a:rPr sz="1100" b="0" i="1">
-                <a:solidFill>
-                  <a:srgbClr val="666666"/>
-                </a:solidFill>
-                <a:latin typeface="Calibri"/>
-              </a:rPr>
-              <a:t>Foto: Cup of  Couple · Pexels</a:t>
-            </a:r>
-          </a:p>
-        </p:txBody>
-      </p:sp>
-      <p:sp>
-        <p:nvSpPr>
-          <p:cNvPr id="8" name="TextBox 7"/>
-          <p:cNvSpPr txBox="1"/>
-          <p:nvPr/>
-        </p:nvSpPr>
-        <p:spPr>
-          <a:xfrm>
-            <a:off x="457200" y="1353312"/>
-            <a:ext cx="5093061" cy="5047488"/>
+            <a:off x="457200" y="1170432"/>
+            <a:ext cx="11277295" cy="5230368"/>
           </a:xfrm>
           <a:prstGeom prst="rect">
             <a:avLst/>
@@ -15959,11 +15549,61 @@
               <a:t>–   Recorrido: teoría del tema, una lámina por concepto, y demo del docente sobre la base de la clínica.</a:t>
             </a:r>
           </a:p>
-        </p:txBody>
-      </p:sp>
-      <p:sp>
-        <p:nvSpPr>
-          <p:cNvPr id="9" name="TextBox 8"/>
+          <a:p>
+            <a:pPr>
+              <a:spcAft>
+                <a:spcPts val="800"/>
+              </a:spcAft>
+            </a:pPr>
+            <a:r>
+              <a:rPr sz="2000" b="0" i="0">
+                <a:solidFill>
+                  <a:srgbClr val="333333"/>
+                </a:solidFill>
+                <a:latin typeface="Calibri"/>
+              </a:rPr>
+              <a:t>–   Cada lámina se sostiene sola: sirve para repasar aunque hayas faltado.</a:t>
+            </a:r>
+          </a:p>
+          <a:p>
+            <a:pPr>
+              <a:spcAft>
+                <a:spcPts val="800"/>
+              </a:spcAft>
+            </a:pPr>
+            <a:r>
+              <a:rPr sz="2000" b="0" i="0">
+                <a:solidFill>
+                  <a:srgbClr val="333333"/>
+                </a:solidFill>
+                <a:latin typeface="Calibri"/>
+              </a:rPr>
+              <a:t>–   </a:t>
+            </a:r>
+            <a:r>
+              <a:rPr sz="2000" b="1" i="0">
+                <a:solidFill>
+                  <a:srgbClr val="333333"/>
+                </a:solidFill>
+                <a:latin typeface="Calibri"/>
+              </a:rPr>
+              <a:t>Conceptos de hoy:</a:t>
+            </a:r>
+            <a:r>
+              <a:rPr sz="2000" b="0" i="0">
+                <a:solidFill>
+                  <a:srgbClr val="333333"/>
+                </a:solidFill>
+                <a:latin typeface="Calibri"/>
+              </a:rPr>
+              <a:t> Los cuatro terminos que se confunden todo el tiempo · Privilegio · Rol · En PostgreSQL usuario y rol son lo mismo, y por eso hoy se escribe NOLOGIN.</a:t>
+            </a:r>
+          </a:p>
+        </p:txBody>
+      </p:sp>
+      <p:sp>
+        <p:nvSpPr>
+          <p:cNvPr id="6" name="TextBox 5"/>
           <p:cNvSpPr txBox="1"/>
           <p:nvPr/>
         </p:nvSpPr>
@@ -16718,118 +16358,14 @@
       </p:sp>
       <p:sp>
         <p:nvSpPr>
-          <p:cNvPr id="6" name="Rounded Rectangle 5"/>
-          <p:cNvSpPr/>
-          <p:nvPr/>
-        </p:nvSpPr>
-        <p:spPr>
-          <a:xfrm>
-            <a:off x="5797149" y="1685207"/>
-            <a:ext cx="6010497" cy="4045368"/>
-          </a:xfrm>
-          <a:prstGeom prst="roundRect">
-            <a:avLst>
-              <a:gd name="adj" fmla="val 4000"/>
-            </a:avLst>
-          </a:prstGeom>
-          <a:solidFill>
-            <a:srgbClr val="E8EEF4"/>
-          </a:solidFill>
-          <a:ln>
-            <a:noFill/>
-          </a:ln>
-        </p:spPr>
-        <p:style>
-          <a:lnRef idx="1">
-            <a:schemeClr val="accent1"/>
-          </a:lnRef>
-          <a:fillRef idx="3">
-            <a:schemeClr val="accent1"/>
-          </a:fillRef>
-          <a:effectRef idx="2">
-            <a:schemeClr val="accent1"/>
-          </a:effectRef>
-          <a:fontRef idx="minor">
-            <a:schemeClr val="lt1"/>
-          </a:fontRef>
-        </p:style>
-        <p:txBody>
-          <a:bodyPr rtlCol="0" anchor="ctr"/>
-          <a:lstStyle/>
-          <a:p>
-            <a:pPr algn="ctr"/>
-          </a:p>
-        </p:txBody>
-      </p:sp>
-      <p:pic>
-        <p:nvPicPr>
-          <p:cNvPr id="7" name="Picture 6" descr="user-account-login-screen.jpg"/>
-          <p:cNvPicPr>
-            <a:picLocks noChangeAspect="1"/>
-          </p:cNvPicPr>
-          <p:nvPr/>
-        </p:nvPicPr>
-        <p:blipFill>
-          <a:blip r:embed="rId2"/>
-          <a:stretch>
-            <a:fillRect/>
-          </a:stretch>
-        </p:blipFill>
-        <p:spPr>
-          <a:xfrm>
-            <a:off x="5870301" y="1758359"/>
-            <a:ext cx="5864193" cy="3899064"/>
-          </a:xfrm>
-          <a:prstGeom prst="rect">
-            <a:avLst/>
-          </a:prstGeom>
-        </p:spPr>
-      </p:pic>
-      <p:sp>
-        <p:nvSpPr>
-          <p:cNvPr id="8" name="TextBox 7"/>
+          <p:cNvPr id="6" name="TextBox 5"/>
           <p:cNvSpPr txBox="1"/>
           <p:nvPr/>
         </p:nvSpPr>
         <p:spPr>
           <a:xfrm>
-            <a:off x="5870301" y="5961888"/>
-            <a:ext cx="5864193" cy="320040"/>
-          </a:xfrm>
-          <a:prstGeom prst="rect">
-            <a:avLst/>
-          </a:prstGeom>
-          <a:noFill/>
-        </p:spPr>
-        <p:txBody>
-          <a:bodyPr wrap="square">
-            <a:spAutoFit/>
-          </a:bodyPr>
-          <a:lstStyle/>
-          <a:p>
-            <a:pPr algn="ctr"/>
-            <a:r>
-              <a:rPr sz="1100" b="0" i="1">
-                <a:solidFill>
-                  <a:srgbClr val="666666"/>
-                </a:solidFill>
-                <a:latin typeface="Calibri"/>
-              </a:rPr>
-              <a:t>Foto: Pixabay · Pexels</a:t>
-            </a:r>
-          </a:p>
-        </p:txBody>
-      </p:sp>
-      <p:sp>
-        <p:nvSpPr>
-          <p:cNvPr id="9" name="TextBox 8"/>
-          <p:cNvSpPr txBox="1"/>
-          <p:nvPr/>
-        </p:nvSpPr>
-        <p:spPr>
-          <a:xfrm>
-            <a:off x="457200" y="1563624"/>
-            <a:ext cx="5093061" cy="4837176"/>
+            <a:off x="457200" y="1380744"/>
+            <a:ext cx="11277295" cy="5020056"/>
           </a:xfrm>
           <a:prstGeom prst="rect">
             <a:avLst/>
@@ -16872,7 +16408,25 @@
                 </a:solidFill>
                 <a:latin typeface="Calibri"/>
               </a:rPr>
-              <a:t> Quien solicita y quien aprueba;</a:t>
+              <a:t> Quien solicita y quien aprueba; la cuenta nace con </a:t>
+            </a:r>
+            <a:r>
+              <a:rPr sz="2000" b="1" i="0">
+                <a:solidFill>
+                  <a:srgbClr val="333333"/>
+                </a:solidFill>
+                <a:latin typeface="Calibri"/>
+              </a:rPr>
+              <a:t>un solo rol</a:t>
+            </a:r>
+            <a:r>
+              <a:rPr sz="2000" b="0" i="0">
+                <a:solidFill>
+                  <a:srgbClr val="333333"/>
+                </a:solidFill>
+                <a:latin typeface="Calibri"/>
+              </a:rPr>
+              <a:t> y con credencial temporal que caduca en el primer ingreso.</a:t>
             </a:r>
           </a:p>
           <a:p>
@@ -16924,7 +16478,25 @@
                 </a:solidFill>
                 <a:latin typeface="Calibri"/>
               </a:rPr>
-              <a:t>:</a:t>
+              <a:t>: los permisos </a:t>
+            </a:r>
+            <a:r>
+              <a:rPr sz="2000" b="1" i="0">
+                <a:solidFill>
+                  <a:srgbClr val="333333"/>
+                </a:solidFill>
+                <a:latin typeface="Calibri"/>
+              </a:rPr>
+              <a:t>no se acumulan</a:t>
+            </a:r>
+            <a:r>
+              <a:rPr sz="2000" b="0" i="0">
+                <a:solidFill>
+                  <a:srgbClr val="333333"/>
+                </a:solidFill>
+                <a:latin typeface="Calibri"/>
+              </a:rPr>
+              <a:t>. Quien pasa de recepcion a auditoria y conserva los dos termina auditando lo que el mismo modifica.</a:t>
             </a:r>
           </a:p>
           <a:p>
@@ -16951,6 +16523,51 @@
               </a:rPr>
               <a:t>3. Baja: el mismo dia.</a:t>
             </a:r>
+            <a:r>
+              <a:rPr sz="2000" b="0" i="0">
+                <a:solidFill>
+                  <a:srgbClr val="333333"/>
+                </a:solidFill>
+                <a:latin typeface="Calibri"/>
+              </a:rPr>
+              <a:t> Revocar los roles, dejar la cuenta sin login y </a:t>
+            </a:r>
+            <a:r>
+              <a:rPr sz="2000" b="1" i="0">
+                <a:solidFill>
+                  <a:srgbClr val="333333"/>
+                </a:solidFill>
+                <a:latin typeface="Calibri"/>
+              </a:rPr>
+              <a:t>reasignar los objetos antes de borrar el rol</a:t>
+            </a:r>
+            <a:r>
+              <a:rPr sz="2000" b="0" i="0">
+                <a:solidFill>
+                  <a:srgbClr val="333333"/>
+                </a:solidFill>
+                <a:latin typeface="Calibri"/>
+              </a:rPr>
+              <a:t> («REASSIGN OWNED BY ... TO admin_bd»): PostgreSQL no deja hacer «DROP ROLE» de un rol que todavia posee objetos. Lo que esto evita es la </a:t>
+            </a:r>
+            <a:r>
+              <a:rPr sz="2000" b="1" i="0">
+                <a:solidFill>
+                  <a:srgbClr val="333333"/>
+                </a:solidFill>
+                <a:latin typeface="Calibri"/>
+              </a:rPr>
+              <a:t>cuenta huerfana</a:t>
+            </a:r>
+            <a:r>
+              <a:rPr sz="2000" b="0" i="0">
+                <a:solidFill>
+                  <a:srgbClr val="333333"/>
+                </a:solidFill>
+                <a:latin typeface="Calibri"/>
+              </a:rPr>
+              <a:t>.</a:t>
+            </a:r>
           </a:p>
           <a:p>
             <a:pPr>
@@ -17001,14 +16618,84 @@
                 </a:solidFill>
                 <a:latin typeface="Calibri"/>
               </a:rPr>
-              <a:t> la evidencia.</a:t>
-            </a:r>
-          </a:p>
-        </p:txBody>
-      </p:sp>
-      <p:sp>
-        <p:nvSpPr>
-          <p:cNvPr id="10" name="TextBox 9"/>
+              <a:t> la evidencia. Sin cuentas compartidas: si tres personas entran como «recepcion1», la auditoria no puede decir quien cancelo la cita.</a:t>
+            </a:r>
+          </a:p>
+          <a:p>
+            <a:pPr>
+              <a:spcAft>
+                <a:spcPts val="800"/>
+              </a:spcAft>
+            </a:pPr>
+            <a:r>
+              <a:rPr sz="2000" b="0" i="0">
+                <a:solidFill>
+                  <a:srgbClr val="333333"/>
+                </a:solidFill>
+                <a:latin typeface="Calibri"/>
+              </a:rPr>
+              <a:t>–   </a:t>
+            </a:r>
+            <a:r>
+              <a:rPr sz="2000" b="1" i="0">
+                <a:solidFill>
+                  <a:srgbClr val="333333"/>
+                </a:solidFill>
+                <a:latin typeface="Calibri"/>
+              </a:rPr>
+              <a:t>5. Probar que el permiso NO esta.</a:t>
+            </a:r>
+            <a:r>
+              <a:rPr sz="2000" b="0" i="0">
+                <a:solidFill>
+                  <a:srgbClr val="333333"/>
+                </a:solidFill>
+                <a:latin typeface="Calibri"/>
+              </a:rPr>
+              <a:t> No hace falta otra conexion (aqui hay un solo usuario con login): «SET ROLE recepcion;» cambia el rol efectivo, y ahi «DELETE FROM cita ...» debe responder </a:t>
+            </a:r>
+            <a:r>
+              <a:rPr sz="2000" b="1" i="0">
+                <a:solidFill>
+                  <a:srgbClr val="333333"/>
+                </a:solidFill>
+                <a:latin typeface="Calibri"/>
+              </a:rPr>
+              <a:t>permission denied</a:t>
+            </a:r>
+            <a:r>
+              <a:rPr sz="2000" b="0" i="0">
+                <a:solidFill>
+                  <a:srgbClr val="333333"/>
+                </a:solidFill>
+                <a:latin typeface="Calibri"/>
+              </a:rPr>
+              <a:t>. Se cierra con «RESET ROLE;». Si el entorno no deja cambiar de rol, se documenta el intento: eso es una </a:t>
+            </a:r>
+            <a:r>
+              <a:rPr sz="2000" b="1" i="0">
+                <a:solidFill>
+                  <a:srgbClr val="333333"/>
+                </a:solidFill>
+                <a:latin typeface="Calibri"/>
+              </a:rPr>
+              <a:t>brecha de verificacion</a:t>
+            </a:r>
+            <a:r>
+              <a:rPr sz="2000" b="0" i="0">
+                <a:solidFill>
+                  <a:srgbClr val="333333"/>
+                </a:solidFill>
+                <a:latin typeface="Calibri"/>
+              </a:rPr>
+              <a:t>.</a:t>
+            </a:r>
+          </a:p>
+        </p:txBody>
+      </p:sp>
+      <p:sp>
+        <p:nvSpPr>
+          <p:cNvPr id="7" name="TextBox 6"/>
           <p:cNvSpPr txBox="1"/>
           <p:nvPr/>
         </p:nvSpPr>
@@ -18285,118 +17972,14 @@
       </p:sp>
       <p:sp>
         <p:nvSpPr>
-          <p:cNvPr id="5" name="Rounded Rectangle 4"/>
-          <p:cNvSpPr/>
-          <p:nvPr/>
-        </p:nvSpPr>
-        <p:spPr>
-          <a:xfrm>
-            <a:off x="5797149" y="1573813"/>
-            <a:ext cx="6010497" cy="4057845"/>
-          </a:xfrm>
-          <a:prstGeom prst="roundRect">
-            <a:avLst>
-              <a:gd name="adj" fmla="val 4000"/>
-            </a:avLst>
-          </a:prstGeom>
-          <a:solidFill>
-            <a:srgbClr val="E8EEF4"/>
-          </a:solidFill>
-          <a:ln>
-            <a:noFill/>
-          </a:ln>
-        </p:spPr>
-        <p:style>
-          <a:lnRef idx="1">
-            <a:schemeClr val="accent1"/>
-          </a:lnRef>
-          <a:fillRef idx="3">
-            <a:schemeClr val="accent1"/>
-          </a:fillRef>
-          <a:effectRef idx="2">
-            <a:schemeClr val="accent1"/>
-          </a:effectRef>
-          <a:fontRef idx="minor">
-            <a:schemeClr val="lt1"/>
-          </a:fontRef>
-        </p:style>
-        <p:txBody>
-          <a:bodyPr rtlCol="0" anchor="ctr"/>
-          <a:lstStyle/>
-          <a:p>
-            <a:pPr algn="ctr"/>
-          </a:p>
-        </p:txBody>
-      </p:sp>
-      <p:pic>
-        <p:nvPicPr>
-          <p:cNvPr id="6" name="Picture 5" descr="puzzle-pieces-connected.jpg"/>
-          <p:cNvPicPr>
-            <a:picLocks noChangeAspect="1"/>
-          </p:cNvPicPr>
-          <p:nvPr/>
-        </p:nvPicPr>
-        <p:blipFill>
-          <a:blip r:embed="rId2"/>
-          <a:stretch>
-            <a:fillRect/>
-          </a:stretch>
-        </p:blipFill>
-        <p:spPr>
-          <a:xfrm>
-            <a:off x="5870301" y="1646965"/>
-            <a:ext cx="5864193" cy="3911541"/>
-          </a:xfrm>
-          <a:prstGeom prst="rect">
-            <a:avLst/>
-          </a:prstGeom>
-        </p:spPr>
-      </p:pic>
-      <p:sp>
-        <p:nvSpPr>
-          <p:cNvPr id="7" name="TextBox 6"/>
+          <p:cNvPr id="5" name="TextBox 4"/>
           <p:cNvSpPr txBox="1"/>
           <p:nvPr/>
         </p:nvSpPr>
         <p:spPr>
           <a:xfrm>
-            <a:off x="5870301" y="5961888"/>
-            <a:ext cx="5864193" cy="320040"/>
-          </a:xfrm>
-          <a:prstGeom prst="rect">
-            <a:avLst/>
-          </a:prstGeom>
-          <a:noFill/>
-        </p:spPr>
-        <p:txBody>
-          <a:bodyPr wrap="square">
-            <a:spAutoFit/>
-          </a:bodyPr>
-          <a:lstStyle/>
-          <a:p>
-            <a:pPr algn="ctr"/>
-            <a:r>
-              <a:rPr sz="1100" b="0" i="1">
-                <a:solidFill>
-                  <a:srgbClr val="666666"/>
-                </a:solidFill>
-                <a:latin typeface="Calibri"/>
-              </a:rPr>
-              <a:t>Foto: Diva Plavalaguna · Pexels</a:t>
-            </a:r>
-          </a:p>
-        </p:txBody>
-      </p:sp>
-      <p:sp>
-        <p:nvSpPr>
-          <p:cNvPr id="8" name="TextBox 7"/>
-          <p:cNvSpPr txBox="1"/>
-          <p:nvPr/>
-        </p:nvSpPr>
-        <p:spPr>
-          <a:xfrm>
-            <a:off x="457200" y="1353312"/>
-            <a:ext cx="5093061" cy="5047488"/>
+            <a:off x="457200" y="1170432"/>
+            <a:ext cx="11277295" cy="5230368"/>
           </a:xfrm>
           <a:prstGeom prst="rect">
             <a:avLst/>
@@ -18476,7 +18059,7 @@
       </p:sp>
       <p:sp>
         <p:nvSpPr>
-          <p:cNvPr id="9" name="TextBox 8"/>
+          <p:cNvPr id="6" name="TextBox 5"/>
           <p:cNvSpPr txBox="1"/>
           <p:nvPr/>
         </p:nvSpPr>
@@ -18657,118 +18240,14 @@
       </p:sp>
       <p:sp>
         <p:nvSpPr>
-          <p:cNvPr id="5" name="Rounded Rectangle 4"/>
-          <p:cNvSpPr/>
-          <p:nvPr/>
-        </p:nvSpPr>
-        <p:spPr>
-          <a:xfrm>
-            <a:off x="5797149" y="1573813"/>
-            <a:ext cx="6010497" cy="4057845"/>
-          </a:xfrm>
-          <a:prstGeom prst="roundRect">
-            <a:avLst>
-              <a:gd name="adj" fmla="val 4000"/>
-            </a:avLst>
-          </a:prstGeom>
-          <a:solidFill>
-            <a:srgbClr val="E8EEF4"/>
-          </a:solidFill>
-          <a:ln>
-            <a:noFill/>
-          </a:ln>
-        </p:spPr>
-        <p:style>
-          <a:lnRef idx="1">
-            <a:schemeClr val="accent1"/>
-          </a:lnRef>
-          <a:fillRef idx="3">
-            <a:schemeClr val="accent1"/>
-          </a:fillRef>
-          <a:effectRef idx="2">
-            <a:schemeClr val="accent1"/>
-          </a:effectRef>
-          <a:fontRef idx="minor">
-            <a:schemeClr val="lt1"/>
-          </a:fontRef>
-        </p:style>
-        <p:txBody>
-          <a:bodyPr rtlCol="0" anchor="ctr"/>
-          <a:lstStyle/>
-          <a:p>
-            <a:pPr algn="ctr"/>
-          </a:p>
-        </p:txBody>
-      </p:sp>
-      <p:pic>
-        <p:nvPicPr>
-          <p:cNvPr id="6" name="Picture 5" descr="laptop-code-live-demo.jpg"/>
-          <p:cNvPicPr>
-            <a:picLocks noChangeAspect="1"/>
-          </p:cNvPicPr>
-          <p:nvPr/>
-        </p:nvPicPr>
-        <p:blipFill>
-          <a:blip r:embed="rId2"/>
-          <a:stretch>
-            <a:fillRect/>
-          </a:stretch>
-        </p:blipFill>
-        <p:spPr>
-          <a:xfrm>
-            <a:off x="5870301" y="1646965"/>
-            <a:ext cx="5864193" cy="3911541"/>
-          </a:xfrm>
-          <a:prstGeom prst="rect">
-            <a:avLst/>
-          </a:prstGeom>
-        </p:spPr>
-      </p:pic>
-      <p:sp>
-        <p:nvSpPr>
-          <p:cNvPr id="7" name="TextBox 6"/>
+          <p:cNvPr id="5" name="TextBox 4"/>
           <p:cNvSpPr txBox="1"/>
           <p:nvPr/>
         </p:nvSpPr>
         <p:spPr>
           <a:xfrm>
-            <a:off x="5870301" y="5961888"/>
-            <a:ext cx="5864193" cy="320040"/>
-          </a:xfrm>
-          <a:prstGeom prst="rect">
-            <a:avLst/>
-          </a:prstGeom>
-          <a:noFill/>
-        </p:spPr>
-        <p:txBody>
-          <a:bodyPr wrap="square">
-            <a:spAutoFit/>
-          </a:bodyPr>
-          <a:lstStyle/>
-          <a:p>
-            <a:pPr algn="ctr"/>
-            <a:r>
-              <a:rPr sz="1100" b="0" i="1">
-                <a:solidFill>
-                  <a:srgbClr val="666666"/>
-                </a:solidFill>
-                <a:latin typeface="Calibri"/>
-              </a:rPr>
-              <a:t>Foto: olia danilevich · Pexels</a:t>
-            </a:r>
-          </a:p>
-        </p:txBody>
-      </p:sp>
-      <p:sp>
-        <p:nvSpPr>
-          <p:cNvPr id="8" name="TextBox 7"/>
-          <p:cNvSpPr txBox="1"/>
-          <p:nvPr/>
-        </p:nvSpPr>
-        <p:spPr>
-          <a:xfrm>
-            <a:off x="457200" y="1353312"/>
-            <a:ext cx="5093061" cy="5047488"/>
+            <a:off x="457200" y="1170432"/>
+            <a:ext cx="11277295" cy="5230368"/>
           </a:xfrm>
           <a:prstGeom prst="rect">
             <a:avLst/>
@@ -18888,12 +18367,55 @@
               </a:rPr>
               <a:t>Qué observar:</a:t>
             </a:r>
-          </a:p>
-        </p:txBody>
-      </p:sp>
-      <p:sp>
-        <p:nvSpPr>
-          <p:cNvPr id="9" name="TextBox 8"/>
+            <a:r>
+              <a:rPr sz="2000" b="0" i="0">
+                <a:solidFill>
+                  <a:srgbClr val="333333"/>
+                </a:solidFill>
+                <a:latin typeface="Calibri"/>
+              </a:rPr>
+              <a:t> con «SET ROLE recepcion» el «DELETE» responde permission denied, y «information_schema.role_table_grants» muestra la matriz real que dejo cada GRANT.</a:t>
+            </a:r>
+          </a:p>
+          <a:p>
+            <a:pPr>
+              <a:spcAft>
+                <a:spcPts val="800"/>
+              </a:spcAft>
+            </a:pPr>
+            <a:r>
+              <a:rPr sz="2000" b="0" i="0">
+                <a:solidFill>
+                  <a:srgbClr val="333333"/>
+                </a:solidFill>
+                <a:latin typeface="Calibri"/>
+              </a:rPr>
+              <a:t>–   </a:t>
+            </a:r>
+            <a:r>
+              <a:rPr sz="2000" b="1" i="0">
+                <a:solidFill>
+                  <a:srgbClr val="333333"/>
+                </a:solidFill>
+                <a:latin typeface="Calibri"/>
+              </a:rPr>
+              <a:t>Qué observar:</a:t>
+            </a:r>
+            <a:r>
+              <a:rPr sz="2000" b="0" i="0">
+                <a:solidFill>
+                  <a:srgbClr val="333333"/>
+                </a:solidFill>
+                <a:latin typeface="Calibri"/>
+              </a:rPr>
+              <a:t> la vista entrega a recepcion la agenda sin el email del dueno: el privilegio por columna recorta lo que se ve.</a:t>
+            </a:r>
+          </a:p>
+        </p:txBody>
+      </p:sp>
+      <p:sp>
+        <p:nvSpPr>
+          <p:cNvPr id="6" name="TextBox 5"/>
           <p:cNvSpPr txBox="1"/>
           <p:nvPr/>
         </p:nvSpPr>

--- a/Bases de Datos II/Clases/Clase 2 - Administracion de bases de datos/Presentacion.pptx
+++ b/Bases de Datos II/Clases/Clase 2 - Administracion de bases de datos/Presentacion.pptx
@@ -9523,7 +9523,7 @@
         <p:spPr>
           <a:xfrm>
             <a:off x="457200" y="1261872"/>
-            <a:ext cx="11277295" cy="4840843"/>
+            <a:ext cx="11277295" cy="3600608"/>
           </a:xfrm>
           <a:prstGeom prst="roundRect">
             <a:avLst>
@@ -9772,8 +9772,8 @@
         </p:nvSpPr>
         <p:spPr>
           <a:xfrm>
-            <a:off x="1188720" y="1719072"/>
-            <a:ext cx="10271455" cy="4246483"/>
+            <a:off x="685800" y="1719072"/>
+            <a:ext cx="502920" cy="3006248"/>
           </a:xfrm>
           <a:prstGeom prst="rect">
             <a:avLst/>
@@ -9786,13 +9786,196 @@
           </a:bodyPr>
           <a:lstStyle/>
           <a:p>
+            <a:pPr algn="r">
+              <a:spcAft>
+                <a:spcPts val="342"/>
+              </a:spcAft>
+            </a:pPr>
+            <a:r>
+              <a:rPr sz="1600" i="0" b="0">
+                <a:solidFill>
+                  <a:srgbClr val="858585"/>
+                </a:solidFill>
+                <a:latin typeface="Consolas"/>
+              </a:rPr>
+              <a:t>1</a:t>
+            </a:r>
+          </a:p>
+          <a:p>
+            <a:pPr algn="r">
+              <a:spcAft>
+                <a:spcPts val="342"/>
+              </a:spcAft>
+            </a:pPr>
+            <a:r>
+              <a:rPr sz="1600" i="0" b="0">
+                <a:solidFill>
+                  <a:srgbClr val="858585"/>
+                </a:solidFill>
+                <a:latin typeface="Consolas"/>
+              </a:rPr>
+              <a:t>2</a:t>
+            </a:r>
+          </a:p>
+          <a:p>
+            <a:pPr algn="r">
+              <a:spcAft>
+                <a:spcPts val="342"/>
+              </a:spcAft>
+            </a:pPr>
+            <a:r>
+              <a:rPr sz="1600" i="0" b="0">
+                <a:solidFill>
+                  <a:srgbClr val="858585"/>
+                </a:solidFill>
+                <a:latin typeface="Consolas"/>
+              </a:rPr>
+              <a:t>3</a:t>
+            </a:r>
+          </a:p>
+          <a:p>
+            <a:pPr algn="r">
+              <a:spcAft>
+                <a:spcPts val="342"/>
+              </a:spcAft>
+            </a:pPr>
+            <a:r>
+              <a:rPr sz="1600" i="0" b="0">
+                <a:solidFill>
+                  <a:srgbClr val="858585"/>
+                </a:solidFill>
+                <a:latin typeface="Consolas"/>
+              </a:rPr>
+              <a:t>4</a:t>
+            </a:r>
+          </a:p>
+          <a:p>
+            <a:pPr algn="r">
+              <a:spcAft>
+                <a:spcPts val="342"/>
+              </a:spcAft>
+            </a:pPr>
+            <a:r>
+              <a:rPr sz="1600" i="0" b="0">
+                <a:solidFill>
+                  <a:srgbClr val="858585"/>
+                </a:solidFill>
+                <a:latin typeface="Consolas"/>
+              </a:rPr>
+              <a:t>5</a:t>
+            </a:r>
+          </a:p>
+          <a:p>
+            <a:pPr algn="r">
+              <a:spcAft>
+                <a:spcPts val="342"/>
+              </a:spcAft>
+            </a:pPr>
+            <a:r>
+              <a:rPr sz="1600" i="0" b="0">
+                <a:solidFill>
+                  <a:srgbClr val="858585"/>
+                </a:solidFill>
+                <a:latin typeface="Consolas"/>
+              </a:rPr>
+              <a:t>6</a:t>
+            </a:r>
+          </a:p>
+          <a:p>
+            <a:pPr algn="r">
+              <a:spcAft>
+                <a:spcPts val="342"/>
+              </a:spcAft>
+            </a:pPr>
+            <a:r>
+              <a:rPr sz="1600" i="0" b="0">
+                <a:solidFill>
+                  <a:srgbClr val="858585"/>
+                </a:solidFill>
+                <a:latin typeface="Consolas"/>
+              </a:rPr>
+              <a:t>7</a:t>
+            </a:r>
+          </a:p>
+          <a:p>
+            <a:pPr algn="r">
+              <a:spcAft>
+                <a:spcPts val="342"/>
+              </a:spcAft>
+            </a:pPr>
+            <a:r>
+              <a:rPr sz="1600" i="0" b="0">
+                <a:solidFill>
+                  <a:srgbClr val="858585"/>
+                </a:solidFill>
+                <a:latin typeface="Consolas"/>
+              </a:rPr>
+              <a:t>8</a:t>
+            </a:r>
+          </a:p>
+          <a:p>
+            <a:pPr algn="r">
+              <a:spcAft>
+                <a:spcPts val="342"/>
+              </a:spcAft>
+            </a:pPr>
+            <a:r>
+              <a:rPr sz="1600" i="0" b="0">
+                <a:solidFill>
+                  <a:srgbClr val="858585"/>
+                </a:solidFill>
+                <a:latin typeface="Consolas"/>
+              </a:rPr>
+              <a:t>9</a:t>
+            </a:r>
+          </a:p>
+          <a:p>
+            <a:pPr algn="r">
+              <a:spcAft>
+                <a:spcPts val="342"/>
+              </a:spcAft>
+            </a:pPr>
+            <a:r>
+              <a:rPr sz="1600" i="0" b="0">
+                <a:solidFill>
+                  <a:srgbClr val="858585"/>
+                </a:solidFill>
+                <a:latin typeface="Consolas"/>
+              </a:rPr>
+              <a:t>10</a:t>
+            </a:r>
+          </a:p>
+        </p:txBody>
+      </p:sp>
+      <p:sp>
+        <p:nvSpPr>
+          <p:cNvPr id="12" name="TextBox 11"/>
+          <p:cNvSpPr txBox="1"/>
+          <p:nvPr/>
+        </p:nvSpPr>
+        <p:spPr>
+          <a:xfrm>
+            <a:off x="1188720" y="1719072"/>
+            <a:ext cx="10271455" cy="3006248"/>
+          </a:xfrm>
+          <a:prstGeom prst="rect">
+            <a:avLst/>
+          </a:prstGeom>
+          <a:noFill/>
+        </p:spPr>
+        <p:txBody>
+          <a:bodyPr wrap="square">
+            <a:spAutoFit/>
+          </a:bodyPr>
+          <a:lstStyle/>
+          <a:p>
             <a:pPr>
               <a:spcAft>
-                <a:spcPts val="428"/>
+                <a:spcPts val="342"/>
               </a:spcAft>
             </a:pPr>
             <a:r>
-              <a:rPr sz="2000" i="0" b="0">
+              <a:rPr sz="1600" i="0" b="0">
                 <a:solidFill>
                   <a:srgbClr val="569CD6"/>
                 </a:solidFill>
@@ -9801,7 +9984,7 @@
               <a:t>REVOKE</a:t>
             </a:r>
             <a:r>
-              <a:rPr sz="2000" i="0" b="0">
+              <a:rPr sz="1600" i="0" b="0">
                 <a:solidFill>
                   <a:srgbClr val="D4D4D4"/>
                 </a:solidFill>
@@ -9810,7 +9993,7 @@
               <a:t> </a:t>
             </a:r>
             <a:r>
-              <a:rPr sz="2000" i="0" b="0">
+              <a:rPr sz="1600" i="0" b="0">
                 <a:solidFill>
                   <a:srgbClr val="569CD6"/>
                 </a:solidFill>
@@ -9819,7 +10002,7 @@
               <a:t>DELETE</a:t>
             </a:r>
             <a:r>
-              <a:rPr sz="2000" i="0" b="0">
+              <a:rPr sz="1600" i="0" b="0">
                 <a:solidFill>
                   <a:srgbClr val="D4D4D4"/>
                 </a:solidFill>
@@ -9828,7 +10011,7 @@
               <a:t> </a:t>
             </a:r>
             <a:r>
-              <a:rPr sz="2000" i="0" b="0">
+              <a:rPr sz="1600" i="0" b="0">
                 <a:solidFill>
                   <a:srgbClr val="569CD6"/>
                 </a:solidFill>
@@ -9837,7 +10020,7 @@
               <a:t>ON</a:t>
             </a:r>
             <a:r>
-              <a:rPr sz="2000" i="0" b="0">
+              <a:rPr sz="1600" i="0" b="0">
                 <a:solidFill>
                   <a:srgbClr val="D4D4D4"/>
                 </a:solidFill>
@@ -9846,7 +10029,7 @@
               <a:t> </a:t>
             </a:r>
             <a:r>
-              <a:rPr sz="2000" i="0" b="0">
+              <a:rPr sz="1600" i="0" b="0">
                 <a:solidFill>
                   <a:srgbClr val="D4D4D4"/>
                 </a:solidFill>
@@ -9855,7 +10038,7 @@
               <a:t>cita</a:t>
             </a:r>
             <a:r>
-              <a:rPr sz="2000" i="0" b="0">
+              <a:rPr sz="1600" i="0" b="0">
                 <a:solidFill>
                   <a:srgbClr val="D4D4D4"/>
                 </a:solidFill>
@@ -9864,7 +10047,7 @@
               <a:t> </a:t>
             </a:r>
             <a:r>
-              <a:rPr sz="2000" i="0" b="0">
+              <a:rPr sz="1600" i="0" b="0">
                 <a:solidFill>
                   <a:srgbClr val="569CD6"/>
                 </a:solidFill>
@@ -9873,7 +10056,7 @@
               <a:t>FROM</a:t>
             </a:r>
             <a:r>
-              <a:rPr sz="2000" i="0" b="0">
+              <a:rPr sz="1600" i="0" b="0">
                 <a:solidFill>
                   <a:srgbClr val="D4D4D4"/>
                 </a:solidFill>
@@ -9882,7 +10065,7 @@
               <a:t> </a:t>
             </a:r>
             <a:r>
-              <a:rPr sz="2000" i="0" b="0">
+              <a:rPr sz="1600" i="0" b="0">
                 <a:solidFill>
                   <a:srgbClr val="D4D4D4"/>
                 </a:solidFill>
@@ -9891,7 +10074,7 @@
               <a:t>recepcion</a:t>
             </a:r>
             <a:r>
-              <a:rPr sz="2000" i="0" b="0">
+              <a:rPr sz="1600" i="0" b="0">
                 <a:solidFill>
                   <a:srgbClr val="D4D4D4"/>
                 </a:solidFill>
@@ -9900,7 +10083,7 @@
               <a:t>;   </a:t>
             </a:r>
             <a:r>
-              <a:rPr sz="2000" i="1" b="0">
+              <a:rPr sz="1600" i="1" b="0">
                 <a:solidFill>
                   <a:srgbClr val="6A9955"/>
                 </a:solidFill>
@@ -9912,11 +10095,11 @@
           <a:p>
             <a:pPr>
               <a:spcAft>
-                <a:spcPts val="428"/>
+                <a:spcPts val="342"/>
               </a:spcAft>
             </a:pPr>
             <a:r>
-              <a:rPr sz="2000" i="0" b="0">
+              <a:rPr sz="1600" i="0" b="0">
                 <a:solidFill>
                   <a:srgbClr val="D4D4D4"/>
                 </a:solidFill>
@@ -9928,11 +10111,11 @@
           <a:p>
             <a:pPr>
               <a:spcAft>
-                <a:spcPts val="428"/>
+                <a:spcPts val="342"/>
               </a:spcAft>
             </a:pPr>
             <a:r>
-              <a:rPr sz="2000" i="1" b="0">
+              <a:rPr sz="1600" i="1" b="0">
                 <a:solidFill>
                   <a:srgbClr val="6A9955"/>
                 </a:solidFill>
@@ -9944,11 +10127,11 @@
           <a:p>
             <a:pPr>
               <a:spcAft>
-                <a:spcPts val="428"/>
+                <a:spcPts val="342"/>
               </a:spcAft>
             </a:pPr>
             <a:r>
-              <a:rPr sz="2000" i="0" b="0">
+              <a:rPr sz="1600" i="0" b="0">
                 <a:solidFill>
                   <a:srgbClr val="569CD6"/>
                 </a:solidFill>
@@ -9957,7 +10140,7 @@
               <a:t>REVOKE</a:t>
             </a:r>
             <a:r>
-              <a:rPr sz="2000" i="0" b="0">
+              <a:rPr sz="1600" i="0" b="0">
                 <a:solidFill>
                   <a:srgbClr val="D4D4D4"/>
                 </a:solidFill>
@@ -9966,7 +10149,7 @@
               <a:t> </a:t>
             </a:r>
             <a:r>
-              <a:rPr sz="2000" i="0" b="0">
+              <a:rPr sz="1600" i="0" b="0">
                 <a:solidFill>
                   <a:srgbClr val="569CD6"/>
                 </a:solidFill>
@@ -9975,7 +10158,7 @@
               <a:t>ALL</a:t>
             </a:r>
             <a:r>
-              <a:rPr sz="2000" i="0" b="0">
+              <a:rPr sz="1600" i="0" b="0">
                 <a:solidFill>
                   <a:srgbClr val="D4D4D4"/>
                 </a:solidFill>
@@ -9984,7 +10167,7 @@
               <a:t> </a:t>
             </a:r>
             <a:r>
-              <a:rPr sz="2000" i="0" b="0">
+              <a:rPr sz="1600" i="0" b="0">
                 <a:solidFill>
                   <a:srgbClr val="569CD6"/>
                 </a:solidFill>
@@ -9993,7 +10176,7 @@
               <a:t>ON</a:t>
             </a:r>
             <a:r>
-              <a:rPr sz="2000" i="0" b="0">
+              <a:rPr sz="1600" i="0" b="0">
                 <a:solidFill>
                   <a:srgbClr val="D4D4D4"/>
                 </a:solidFill>
@@ -10002,7 +10185,7 @@
               <a:t> </a:t>
             </a:r>
             <a:r>
-              <a:rPr sz="2000" i="0" b="0">
+              <a:rPr sz="1600" i="0" b="0">
                 <a:solidFill>
                   <a:srgbClr val="D4D4D4"/>
                 </a:solidFill>
@@ -10011,7 +10194,7 @@
               <a:t>consulta</a:t>
             </a:r>
             <a:r>
-              <a:rPr sz="2000" i="0" b="0">
+              <a:rPr sz="1600" i="0" b="0">
                 <a:solidFill>
                   <a:srgbClr val="D4D4D4"/>
                 </a:solidFill>
@@ -10020,7 +10203,7 @@
               <a:t> </a:t>
             </a:r>
             <a:r>
-              <a:rPr sz="2000" i="0" b="0">
+              <a:rPr sz="1600" i="0" b="0">
                 <a:solidFill>
                   <a:srgbClr val="569CD6"/>
                 </a:solidFill>
@@ -10029,7 +10212,7 @@
               <a:t>FROM</a:t>
             </a:r>
             <a:r>
-              <a:rPr sz="2000" i="0" b="0">
+              <a:rPr sz="1600" i="0" b="0">
                 <a:solidFill>
                   <a:srgbClr val="D4D4D4"/>
                 </a:solidFill>
@@ -10038,7 +10221,7 @@
               <a:t> </a:t>
             </a:r>
             <a:r>
-              <a:rPr sz="2000" i="0" b="0">
+              <a:rPr sz="1600" i="0" b="0">
                 <a:solidFill>
                   <a:srgbClr val="D4D4D4"/>
                 </a:solidFill>
@@ -10047,7 +10230,7 @@
               <a:t>PUBLIC</a:t>
             </a:r>
             <a:r>
-              <a:rPr sz="2000" i="0" b="0">
+              <a:rPr sz="1600" i="0" b="0">
                 <a:solidFill>
                   <a:srgbClr val="D4D4D4"/>
                 </a:solidFill>
@@ -10059,11 +10242,11 @@
           <a:p>
             <a:pPr>
               <a:spcAft>
-                <a:spcPts val="428"/>
+                <a:spcPts val="342"/>
               </a:spcAft>
             </a:pPr>
             <a:r>
-              <a:rPr sz="2000" i="0" b="0">
+              <a:rPr sz="1600" i="0" b="0">
                 <a:solidFill>
                   <a:srgbClr val="D4D4D4"/>
                 </a:solidFill>
@@ -10075,11 +10258,11 @@
           <a:p>
             <a:pPr>
               <a:spcAft>
-                <a:spcPts val="428"/>
+                <a:spcPts val="342"/>
               </a:spcAft>
             </a:pPr>
             <a:r>
-              <a:rPr sz="2000" i="1" b="0">
+              <a:rPr sz="1600" i="1" b="0">
                 <a:solidFill>
                   <a:srgbClr val="6A9955"/>
                 </a:solidFill>
@@ -10091,11 +10274,11 @@
           <a:p>
             <a:pPr>
               <a:spcAft>
-                <a:spcPts val="428"/>
+                <a:spcPts val="342"/>
               </a:spcAft>
             </a:pPr>
             <a:r>
-              <a:rPr sz="2000" i="0" b="0">
+              <a:rPr sz="1600" i="0" b="0">
                 <a:solidFill>
                   <a:srgbClr val="569CD6"/>
                 </a:solidFill>
@@ -10104,7 +10287,7 @@
               <a:t>GRANT</a:t>
             </a:r>
             <a:r>
-              <a:rPr sz="2000" i="0" b="0">
+              <a:rPr sz="1600" i="0" b="0">
                 <a:solidFill>
                   <a:srgbClr val="D4D4D4"/>
                 </a:solidFill>
@@ -10113,7 +10296,7 @@
               <a:t> </a:t>
             </a:r>
             <a:r>
-              <a:rPr sz="2000" i="0" b="0">
+              <a:rPr sz="1600" i="0" b="0">
                 <a:solidFill>
                   <a:srgbClr val="569CD6"/>
                 </a:solidFill>
@@ -10122,7 +10305,7 @@
               <a:t>SELECT</a:t>
             </a:r>
             <a:r>
-              <a:rPr sz="2000" i="0" b="0">
+              <a:rPr sz="1600" i="0" b="0">
                 <a:solidFill>
                   <a:srgbClr val="D4D4D4"/>
                 </a:solidFill>
@@ -10131,7 +10314,7 @@
               <a:t> </a:t>
             </a:r>
             <a:r>
-              <a:rPr sz="2000" i="0" b="0">
+              <a:rPr sz="1600" i="0" b="0">
                 <a:solidFill>
                   <a:srgbClr val="569CD6"/>
                 </a:solidFill>
@@ -10140,7 +10323,7 @@
               <a:t>ON</a:t>
             </a:r>
             <a:r>
-              <a:rPr sz="2000" i="0" b="0">
+              <a:rPr sz="1600" i="0" b="0">
                 <a:solidFill>
                   <a:srgbClr val="D4D4D4"/>
                 </a:solidFill>
@@ -10149,7 +10332,7 @@
               <a:t> </a:t>
             </a:r>
             <a:r>
-              <a:rPr sz="2000" i="0" b="0">
+              <a:rPr sz="1600" i="0" b="0">
                 <a:solidFill>
                   <a:srgbClr val="D4D4D4"/>
                 </a:solidFill>
@@ -10158,7 +10341,7 @@
               <a:t>cita</a:t>
             </a:r>
             <a:r>
-              <a:rPr sz="2000" i="0" b="0">
+              <a:rPr sz="1600" i="0" b="0">
                 <a:solidFill>
                   <a:srgbClr val="D4D4D4"/>
                 </a:solidFill>
@@ -10167,7 +10350,7 @@
               <a:t> </a:t>
             </a:r>
             <a:r>
-              <a:rPr sz="2000" i="0" b="0">
+              <a:rPr sz="1600" i="0" b="0">
                 <a:solidFill>
                   <a:srgbClr val="569CD6"/>
                 </a:solidFill>
@@ -10176,7 +10359,7 @@
               <a:t>TO</a:t>
             </a:r>
             <a:r>
-              <a:rPr sz="2000" i="0" b="0">
+              <a:rPr sz="1600" i="0" b="0">
                 <a:solidFill>
                   <a:srgbClr val="D4D4D4"/>
                 </a:solidFill>
@@ -10185,7 +10368,7 @@
               <a:t> </a:t>
             </a:r>
             <a:r>
-              <a:rPr sz="2000" i="0" b="0">
+              <a:rPr sz="1600" i="0" b="0">
                 <a:solidFill>
                   <a:srgbClr val="D4D4D4"/>
                 </a:solidFill>
@@ -10194,7 +10377,7 @@
               <a:t>auditor</a:t>
             </a:r>
             <a:r>
-              <a:rPr sz="2000" i="0" b="0">
+              <a:rPr sz="1600" i="0" b="0">
                 <a:solidFill>
                   <a:srgbClr val="D4D4D4"/>
                 </a:solidFill>
@@ -10203,7 +10386,7 @@
               <a:t> </a:t>
             </a:r>
             <a:r>
-              <a:rPr sz="2000" i="0" b="0">
+              <a:rPr sz="1600" i="0" b="0">
                 <a:solidFill>
                   <a:srgbClr val="569CD6"/>
                 </a:solidFill>
@@ -10212,7 +10395,7 @@
               <a:t>WITH</a:t>
             </a:r>
             <a:r>
-              <a:rPr sz="2000" i="0" b="0">
+              <a:rPr sz="1600" i="0" b="0">
                 <a:solidFill>
                   <a:srgbClr val="D4D4D4"/>
                 </a:solidFill>
@@ -10221,7 +10404,7 @@
               <a:t> </a:t>
             </a:r>
             <a:r>
-              <a:rPr sz="2000" i="0" b="0">
+              <a:rPr sz="1600" i="0" b="0">
                 <a:solidFill>
                   <a:srgbClr val="569CD6"/>
                 </a:solidFill>
@@ -10230,7 +10413,7 @@
               <a:t>GRANT</a:t>
             </a:r>
             <a:r>
-              <a:rPr sz="2000" i="0" b="0">
+              <a:rPr sz="1600" i="0" b="0">
                 <a:solidFill>
                   <a:srgbClr val="D4D4D4"/>
                 </a:solidFill>
@@ -10239,7 +10422,7 @@
               <a:t> </a:t>
             </a:r>
             <a:r>
-              <a:rPr sz="2000" i="0" b="0">
+              <a:rPr sz="1600" i="0" b="0">
                 <a:solidFill>
                   <a:srgbClr val="D4D4D4"/>
                 </a:solidFill>
@@ -10248,7 +10431,7 @@
               <a:t>OPTION</a:t>
             </a:r>
             <a:r>
-              <a:rPr sz="2000" i="0" b="0">
+              <a:rPr sz="1600" i="0" b="0">
                 <a:solidFill>
                   <a:srgbClr val="D4D4D4"/>
                 </a:solidFill>
@@ -10260,11 +10443,11 @@
           <a:p>
             <a:pPr>
               <a:spcAft>
-                <a:spcPts val="428"/>
+                <a:spcPts val="342"/>
               </a:spcAft>
             </a:pPr>
             <a:r>
-              <a:rPr sz="2000" i="1" b="0">
+              <a:rPr sz="1600" i="1" b="0">
                 <a:solidFill>
                   <a:srgbClr val="6A9955"/>
                 </a:solidFill>
@@ -10276,11 +10459,11 @@
           <a:p>
             <a:pPr>
               <a:spcAft>
-                <a:spcPts val="428"/>
+                <a:spcPts val="342"/>
               </a:spcAft>
             </a:pPr>
             <a:r>
-              <a:rPr sz="2000" i="1" b="0">
+              <a:rPr sz="1600" i="1" b="0">
                 <a:solidFill>
                   <a:srgbClr val="6A9955"/>
                 </a:solidFill>
@@ -10292,11 +10475,11 @@
           <a:p>
             <a:pPr>
               <a:spcAft>
-                <a:spcPts val="428"/>
+                <a:spcPts val="342"/>
               </a:spcAft>
             </a:pPr>
             <a:r>
-              <a:rPr sz="2000" i="0" b="0">
+              <a:rPr sz="1600" i="0" b="0">
                 <a:solidFill>
                   <a:srgbClr val="569CD6"/>
                 </a:solidFill>
@@ -10305,7 +10488,7 @@
               <a:t>REVOKE</a:t>
             </a:r>
             <a:r>
-              <a:rPr sz="2000" i="0" b="0">
+              <a:rPr sz="1600" i="0" b="0">
                 <a:solidFill>
                   <a:srgbClr val="D4D4D4"/>
                 </a:solidFill>
@@ -10314,7 +10497,7 @@
               <a:t> </a:t>
             </a:r>
             <a:r>
-              <a:rPr sz="2000" i="0" b="0">
+              <a:rPr sz="1600" i="0" b="0">
                 <a:solidFill>
                   <a:srgbClr val="569CD6"/>
                 </a:solidFill>
@@ -10323,7 +10506,7 @@
               <a:t>GRANT</a:t>
             </a:r>
             <a:r>
-              <a:rPr sz="2000" i="0" b="0">
+              <a:rPr sz="1600" i="0" b="0">
                 <a:solidFill>
                   <a:srgbClr val="D4D4D4"/>
                 </a:solidFill>
@@ -10332,7 +10515,7 @@
               <a:t> </a:t>
             </a:r>
             <a:r>
-              <a:rPr sz="2000" i="0" b="0">
+              <a:rPr sz="1600" i="0" b="0">
                 <a:solidFill>
                   <a:srgbClr val="D4D4D4"/>
                 </a:solidFill>
@@ -10341,7 +10524,7 @@
               <a:t>OPTION</a:t>
             </a:r>
             <a:r>
-              <a:rPr sz="2000" i="0" b="0">
+              <a:rPr sz="1600" i="0" b="0">
                 <a:solidFill>
                   <a:srgbClr val="D4D4D4"/>
                 </a:solidFill>
@@ -10350,7 +10533,7 @@
               <a:t> </a:t>
             </a:r>
             <a:r>
-              <a:rPr sz="2000" i="0" b="0">
+              <a:rPr sz="1600" i="0" b="0">
                 <a:solidFill>
                   <a:srgbClr val="569CD6"/>
                 </a:solidFill>
@@ -10359,7 +10542,7 @@
               <a:t>FOR</a:t>
             </a:r>
             <a:r>
-              <a:rPr sz="2000" i="0" b="0">
+              <a:rPr sz="1600" i="0" b="0">
                 <a:solidFill>
                   <a:srgbClr val="D4D4D4"/>
                 </a:solidFill>
@@ -10368,7 +10551,7 @@
               <a:t> </a:t>
             </a:r>
             <a:r>
-              <a:rPr sz="2000" i="0" b="0">
+              <a:rPr sz="1600" i="0" b="0">
                 <a:solidFill>
                   <a:srgbClr val="569CD6"/>
                 </a:solidFill>
@@ -10377,7 +10560,7 @@
               <a:t>SELECT</a:t>
             </a:r>
             <a:r>
-              <a:rPr sz="2000" i="0" b="0">
+              <a:rPr sz="1600" i="0" b="0">
                 <a:solidFill>
                   <a:srgbClr val="D4D4D4"/>
                 </a:solidFill>
@@ -10386,7 +10569,7 @@
               <a:t> </a:t>
             </a:r>
             <a:r>
-              <a:rPr sz="2000" i="0" b="0">
+              <a:rPr sz="1600" i="0" b="0">
                 <a:solidFill>
                   <a:srgbClr val="569CD6"/>
                 </a:solidFill>
@@ -10395,7 +10578,7 @@
               <a:t>ON</a:t>
             </a:r>
             <a:r>
-              <a:rPr sz="2000" i="0" b="0">
+              <a:rPr sz="1600" i="0" b="0">
                 <a:solidFill>
                   <a:srgbClr val="D4D4D4"/>
                 </a:solidFill>
@@ -10404,7 +10587,7 @@
               <a:t> </a:t>
             </a:r>
             <a:r>
-              <a:rPr sz="2000" i="0" b="0">
+              <a:rPr sz="1600" i="0" b="0">
                 <a:solidFill>
                   <a:srgbClr val="D4D4D4"/>
                 </a:solidFill>
@@ -10413,7 +10596,7 @@
               <a:t>cita</a:t>
             </a:r>
             <a:r>
-              <a:rPr sz="2000" i="0" b="0">
+              <a:rPr sz="1600" i="0" b="0">
                 <a:solidFill>
                   <a:srgbClr val="D4D4D4"/>
                 </a:solidFill>
@@ -10422,7 +10605,7 @@
               <a:t> </a:t>
             </a:r>
             <a:r>
-              <a:rPr sz="2000" i="0" b="0">
+              <a:rPr sz="1600" i="0" b="0">
                 <a:solidFill>
                   <a:srgbClr val="569CD6"/>
                 </a:solidFill>
@@ -10431,7 +10614,7 @@
               <a:t>FROM</a:t>
             </a:r>
             <a:r>
-              <a:rPr sz="2000" i="0" b="0">
+              <a:rPr sz="1600" i="0" b="0">
                 <a:solidFill>
                   <a:srgbClr val="D4D4D4"/>
                 </a:solidFill>
@@ -10440,7 +10623,7 @@
               <a:t> </a:t>
             </a:r>
             <a:r>
-              <a:rPr sz="2000" i="0" b="0">
+              <a:rPr sz="1600" i="0" b="0">
                 <a:solidFill>
                   <a:srgbClr val="D4D4D4"/>
                 </a:solidFill>
@@ -10449,7 +10632,7 @@
               <a:t>auditor</a:t>
             </a:r>
             <a:r>
-              <a:rPr sz="2000" i="0" b="0">
+              <a:rPr sz="1600" i="0" b="0">
                 <a:solidFill>
                   <a:srgbClr val="D4D4D4"/>
                 </a:solidFill>
@@ -10458,7 +10641,7 @@
               <a:t> </a:t>
             </a:r>
             <a:r>
-              <a:rPr sz="2000" i="0" b="0">
+              <a:rPr sz="1600" i="0" b="0">
                 <a:solidFill>
                   <a:srgbClr val="569CD6"/>
                 </a:solidFill>
@@ -10467,7 +10650,7 @@
               <a:t>CASCADE</a:t>
             </a:r>
             <a:r>
-              <a:rPr sz="2000" i="0" b="0">
+              <a:rPr sz="1600" i="0" b="0">
                 <a:solidFill>
                   <a:srgbClr val="D4D4D4"/>
                 </a:solidFill>
@@ -10480,7 +10663,7 @@
       </p:sp>
       <p:sp>
         <p:nvSpPr>
-          <p:cNvPr id="12" name="TextBox 11"/>
+          <p:cNvPr id="13" name="TextBox 12"/>
           <p:cNvSpPr txBox="1"/>
           <p:nvPr/>
         </p:nvSpPr>
@@ -13744,7 +13927,7 @@
         <p:spPr>
           <a:xfrm>
             <a:off x="457200" y="1261872"/>
-            <a:ext cx="11277295" cy="4568884"/>
+            <a:ext cx="11277295" cy="4227820"/>
           </a:xfrm>
           <a:prstGeom prst="roundRect">
             <a:avLst>
@@ -13994,7 +14177,7 @@
         <p:spPr>
           <a:xfrm>
             <a:off x="685800" y="1719072"/>
-            <a:ext cx="502920" cy="3974524"/>
+            <a:ext cx="502920" cy="3633460"/>
           </a:xfrm>
           <a:prstGeom prst="rect">
             <a:avLst/>
@@ -14009,11 +14192,11 @@
           <a:p>
             <a:pPr algn="r">
               <a:spcAft>
-                <a:spcPts val="428"/>
+                <a:spcPts val="385"/>
               </a:spcAft>
             </a:pPr>
             <a:r>
-              <a:rPr sz="2000" i="0" b="0">
+              <a:rPr sz="1800" i="0" b="0">
                 <a:solidFill>
                   <a:srgbClr val="858585"/>
                 </a:solidFill>
@@ -14025,11 +14208,11 @@
           <a:p>
             <a:pPr algn="r">
               <a:spcAft>
-                <a:spcPts val="428"/>
+                <a:spcPts val="385"/>
               </a:spcAft>
             </a:pPr>
             <a:r>
-              <a:rPr sz="2000" i="0" b="0">
+              <a:rPr sz="1800" i="0" b="0">
                 <a:solidFill>
                   <a:srgbClr val="858585"/>
                 </a:solidFill>
@@ -14041,11 +14224,11 @@
           <a:p>
             <a:pPr algn="r">
               <a:spcAft>
-                <a:spcPts val="428"/>
+                <a:spcPts val="385"/>
               </a:spcAft>
             </a:pPr>
             <a:r>
-              <a:rPr sz="2000" i="0" b="0">
+              <a:rPr sz="1800" i="0" b="0">
                 <a:solidFill>
                   <a:srgbClr val="858585"/>
                 </a:solidFill>
@@ -14057,11 +14240,11 @@
           <a:p>
             <a:pPr algn="r">
               <a:spcAft>
-                <a:spcPts val="428"/>
+                <a:spcPts val="385"/>
               </a:spcAft>
             </a:pPr>
             <a:r>
-              <a:rPr sz="2000" i="0" b="0">
+              <a:rPr sz="1800" i="0" b="0">
                 <a:solidFill>
                   <a:srgbClr val="858585"/>
                 </a:solidFill>
@@ -14073,11 +14256,11 @@
           <a:p>
             <a:pPr algn="r">
               <a:spcAft>
-                <a:spcPts val="428"/>
+                <a:spcPts val="385"/>
               </a:spcAft>
             </a:pPr>
             <a:r>
-              <a:rPr sz="2000" i="0" b="0">
+              <a:rPr sz="1800" i="0" b="0">
                 <a:solidFill>
                   <a:srgbClr val="858585"/>
                 </a:solidFill>
@@ -14089,11 +14272,11 @@
           <a:p>
             <a:pPr algn="r">
               <a:spcAft>
-                <a:spcPts val="428"/>
+                <a:spcPts val="385"/>
               </a:spcAft>
             </a:pPr>
             <a:r>
-              <a:rPr sz="2000" i="0" b="0">
+              <a:rPr sz="1800" i="0" b="0">
                 <a:solidFill>
                   <a:srgbClr val="858585"/>
                 </a:solidFill>
@@ -14105,11 +14288,11 @@
           <a:p>
             <a:pPr algn="r">
               <a:spcAft>
-                <a:spcPts val="428"/>
+                <a:spcPts val="385"/>
               </a:spcAft>
             </a:pPr>
             <a:r>
-              <a:rPr sz="2000" i="0" b="0">
+              <a:rPr sz="1800" i="0" b="0">
                 <a:solidFill>
                   <a:srgbClr val="858585"/>
                 </a:solidFill>
@@ -14121,11 +14304,11 @@
           <a:p>
             <a:pPr algn="r">
               <a:spcAft>
-                <a:spcPts val="428"/>
+                <a:spcPts val="385"/>
               </a:spcAft>
             </a:pPr>
             <a:r>
-              <a:rPr sz="2000" i="0" b="0">
+              <a:rPr sz="1800" i="0" b="0">
                 <a:solidFill>
                   <a:srgbClr val="858585"/>
                 </a:solidFill>
@@ -14137,11 +14320,11 @@
           <a:p>
             <a:pPr algn="r">
               <a:spcAft>
-                <a:spcPts val="428"/>
+                <a:spcPts val="385"/>
               </a:spcAft>
             </a:pPr>
             <a:r>
-              <a:rPr sz="2000" i="0" b="0">
+              <a:rPr sz="1800" i="0" b="0">
                 <a:solidFill>
                   <a:srgbClr val="858585"/>
                 </a:solidFill>
@@ -14153,11 +14336,11 @@
           <a:p>
             <a:pPr algn="r">
               <a:spcAft>
-                <a:spcPts val="428"/>
+                <a:spcPts val="385"/>
               </a:spcAft>
             </a:pPr>
             <a:r>
-              <a:rPr sz="2000" i="0" b="0">
+              <a:rPr sz="1800" i="0" b="0">
                 <a:solidFill>
                   <a:srgbClr val="858585"/>
                 </a:solidFill>
@@ -14169,11 +14352,11 @@
           <a:p>
             <a:pPr algn="r">
               <a:spcAft>
-                <a:spcPts val="428"/>
+                <a:spcPts val="385"/>
               </a:spcAft>
             </a:pPr>
             <a:r>
-              <a:rPr sz="2000" i="0" b="0">
+              <a:rPr sz="1800" i="0" b="0">
                 <a:solidFill>
                   <a:srgbClr val="858585"/>
                 </a:solidFill>
@@ -14193,7 +14376,7 @@
         <p:spPr>
           <a:xfrm>
             <a:off x="1188720" y="1719072"/>
-            <a:ext cx="10271455" cy="3974524"/>
+            <a:ext cx="10271455" cy="3633460"/>
           </a:xfrm>
           <a:prstGeom prst="rect">
             <a:avLst/>
@@ -14208,11 +14391,11 @@
           <a:p>
             <a:pPr>
               <a:spcAft>
-                <a:spcPts val="428"/>
+                <a:spcPts val="385"/>
               </a:spcAft>
             </a:pPr>
             <a:r>
-              <a:rPr sz="2000" i="1" b="0">
+              <a:rPr sz="1800" i="1" b="0">
                 <a:solidFill>
                   <a:srgbClr val="6A9955"/>
                 </a:solidFill>
@@ -14224,11 +14407,11 @@
           <a:p>
             <a:pPr>
               <a:spcAft>
-                <a:spcPts val="428"/>
+                <a:spcPts val="385"/>
               </a:spcAft>
             </a:pPr>
             <a:r>
-              <a:rPr sz="2000" i="0" b="0">
+              <a:rPr sz="1800" i="0" b="0">
                 <a:solidFill>
                   <a:srgbClr val="569CD6"/>
                 </a:solidFill>
@@ -14237,7 +14420,7 @@
               <a:t>SELECT</a:t>
             </a:r>
             <a:r>
-              <a:rPr sz="2000" i="0" b="0">
+              <a:rPr sz="1800" i="0" b="0">
                 <a:solidFill>
                   <a:srgbClr val="D4D4D4"/>
                 </a:solidFill>
@@ -14246,7 +14429,7 @@
               <a:t> </a:t>
             </a:r>
             <a:r>
-              <a:rPr sz="2000" i="0" b="0">
+              <a:rPr sz="1800" i="0" b="0">
                 <a:solidFill>
                   <a:srgbClr val="D4D4D4"/>
                 </a:solidFill>
@@ -14255,7 +14438,7 @@
               <a:t>grantee</a:t>
             </a:r>
             <a:r>
-              <a:rPr sz="2000" i="0" b="0">
+              <a:rPr sz="1800" i="0" b="0">
                 <a:solidFill>
                   <a:srgbClr val="D4D4D4"/>
                 </a:solidFill>
@@ -14264,7 +14447,7 @@
               <a:t>, </a:t>
             </a:r>
             <a:r>
-              <a:rPr sz="2000" i="0" b="0">
+              <a:rPr sz="1800" i="0" b="0">
                 <a:solidFill>
                   <a:srgbClr val="D4D4D4"/>
                 </a:solidFill>
@@ -14273,7 +14456,7 @@
               <a:t>table_name</a:t>
             </a:r>
             <a:r>
-              <a:rPr sz="2000" i="0" b="0">
+              <a:rPr sz="1800" i="0" b="0">
                 <a:solidFill>
                   <a:srgbClr val="D4D4D4"/>
                 </a:solidFill>
@@ -14282,7 +14465,7 @@
               <a:t>, </a:t>
             </a:r>
             <a:r>
-              <a:rPr sz="2000" i="0" b="0">
+              <a:rPr sz="1800" i="0" b="0">
                 <a:solidFill>
                   <a:srgbClr val="D4D4D4"/>
                 </a:solidFill>
@@ -14294,11 +14477,11 @@
           <a:p>
             <a:pPr>
               <a:spcAft>
-                <a:spcPts val="428"/>
+                <a:spcPts val="385"/>
               </a:spcAft>
             </a:pPr>
             <a:r>
-              <a:rPr sz="2000" i="0" b="0">
+              <a:rPr sz="1800" i="0" b="0">
                 <a:solidFill>
                   <a:srgbClr val="569CD6"/>
                 </a:solidFill>
@@ -14307,7 +14490,7 @@
               <a:t>FROM</a:t>
             </a:r>
             <a:r>
-              <a:rPr sz="2000" i="0" b="0">
+              <a:rPr sz="1800" i="0" b="0">
                 <a:solidFill>
                   <a:srgbClr val="D4D4D4"/>
                 </a:solidFill>
@@ -14316,7 +14499,7 @@
               <a:t> </a:t>
             </a:r>
             <a:r>
-              <a:rPr sz="2000" i="0" b="0">
+              <a:rPr sz="1800" i="0" b="0">
                 <a:solidFill>
                   <a:srgbClr val="D4D4D4"/>
                 </a:solidFill>
@@ -14325,7 +14508,7 @@
               <a:t>information_schema</a:t>
             </a:r>
             <a:r>
-              <a:rPr sz="2000" i="0" b="0">
+              <a:rPr sz="1800" i="0" b="0">
                 <a:solidFill>
                   <a:srgbClr val="D4D4D4"/>
                 </a:solidFill>
@@ -14334,7 +14517,7 @@
               <a:t>.</a:t>
             </a:r>
             <a:r>
-              <a:rPr sz="2000" i="0" b="0">
+              <a:rPr sz="1800" i="0" b="0">
                 <a:solidFill>
                   <a:srgbClr val="D4D4D4"/>
                 </a:solidFill>
@@ -14346,11 +14529,11 @@
           <a:p>
             <a:pPr>
               <a:spcAft>
-                <a:spcPts val="428"/>
+                <a:spcPts val="385"/>
               </a:spcAft>
             </a:pPr>
             <a:r>
-              <a:rPr sz="2000" i="0" b="0">
+              <a:rPr sz="1800" i="0" b="0">
                 <a:solidFill>
                   <a:srgbClr val="569CD6"/>
                 </a:solidFill>
@@ -14359,7 +14542,7 @@
               <a:t>WHERE</a:t>
             </a:r>
             <a:r>
-              <a:rPr sz="2000" i="0" b="0">
+              <a:rPr sz="1800" i="0" b="0">
                 <a:solidFill>
                   <a:srgbClr val="D4D4D4"/>
                 </a:solidFill>
@@ -14368,7 +14551,7 @@
               <a:t> </a:t>
             </a:r>
             <a:r>
-              <a:rPr sz="2000" i="0" b="0">
+              <a:rPr sz="1800" i="0" b="0">
                 <a:solidFill>
                   <a:srgbClr val="D4D4D4"/>
                 </a:solidFill>
@@ -14377,7 +14560,7 @@
               <a:t>grantee</a:t>
             </a:r>
             <a:r>
-              <a:rPr sz="2000" i="0" b="0">
+              <a:rPr sz="1800" i="0" b="0">
                 <a:solidFill>
                   <a:srgbClr val="D4D4D4"/>
                 </a:solidFill>
@@ -14386,7 +14569,7 @@
               <a:t> </a:t>
             </a:r>
             <a:r>
-              <a:rPr sz="2000" i="0" b="0">
+              <a:rPr sz="1800" i="0" b="0">
                 <a:solidFill>
                   <a:srgbClr val="569CD6"/>
                 </a:solidFill>
@@ -14395,7 +14578,7 @@
               <a:t>IN</a:t>
             </a:r>
             <a:r>
-              <a:rPr sz="2000" i="0" b="0">
+              <a:rPr sz="1800" i="0" b="0">
                 <a:solidFill>
                   <a:srgbClr val="D4D4D4"/>
                 </a:solidFill>
@@ -14404,7 +14587,7 @@
               <a:t> (</a:t>
             </a:r>
             <a:r>
-              <a:rPr sz="2000" i="0" b="0">
+              <a:rPr sz="1800" i="0" b="0">
                 <a:solidFill>
                   <a:srgbClr val="CE9178"/>
                 </a:solidFill>
@@ -14413,7 +14596,7 @@
               <a:t>'admin_bd'</a:t>
             </a:r>
             <a:r>
-              <a:rPr sz="2000" i="0" b="0">
+              <a:rPr sz="1800" i="0" b="0">
                 <a:solidFill>
                   <a:srgbClr val="D4D4D4"/>
                 </a:solidFill>
@@ -14422,7 +14605,7 @@
               <a:t>,</a:t>
             </a:r>
             <a:r>
-              <a:rPr sz="2000" i="0" b="0">
+              <a:rPr sz="1800" i="0" b="0">
                 <a:solidFill>
                   <a:srgbClr val="CE9178"/>
                 </a:solidFill>
@@ -14431,7 +14614,7 @@
               <a:t>'recepcion'</a:t>
             </a:r>
             <a:r>
-              <a:rPr sz="2000" i="0" b="0">
+              <a:rPr sz="1800" i="0" b="0">
                 <a:solidFill>
                   <a:srgbClr val="D4D4D4"/>
                 </a:solidFill>
@@ -14440,7 +14623,7 @@
               <a:t>,</a:t>
             </a:r>
             <a:r>
-              <a:rPr sz="2000" i="0" b="0">
+              <a:rPr sz="1800" i="0" b="0">
                 <a:solidFill>
                   <a:srgbClr val="CE9178"/>
                 </a:solidFill>
@@ -14449,7 +14632,7 @@
               <a:t>'veterinario_rol'</a:t>
             </a:r>
             <a:r>
-              <a:rPr sz="2000" i="0" b="0">
+              <a:rPr sz="1800" i="0" b="0">
                 <a:solidFill>
                   <a:srgbClr val="D4D4D4"/>
                 </a:solidFill>
@@ -14458,7 +14641,7 @@
               <a:t>,</a:t>
             </a:r>
             <a:r>
-              <a:rPr sz="2000" i="0" b="0">
+              <a:rPr sz="1800" i="0" b="0">
                 <a:solidFill>
                   <a:srgbClr val="CE9178"/>
                 </a:solidFill>
@@ -14467,7 +14650,7 @@
               <a:t>'auditor'</a:t>
             </a:r>
             <a:r>
-              <a:rPr sz="2000" i="0" b="0">
+              <a:rPr sz="1800" i="0" b="0">
                 <a:solidFill>
                   <a:srgbClr val="D4D4D4"/>
                 </a:solidFill>
@@ -14479,11 +14662,11 @@
           <a:p>
             <a:pPr>
               <a:spcAft>
-                <a:spcPts val="428"/>
+                <a:spcPts val="385"/>
               </a:spcAft>
             </a:pPr>
             <a:r>
-              <a:rPr sz="2000" i="0" b="0">
+              <a:rPr sz="1800" i="0" b="0">
                 <a:solidFill>
                   <a:srgbClr val="569CD6"/>
                 </a:solidFill>
@@ -14492,7 +14675,7 @@
               <a:t>ORDER</a:t>
             </a:r>
             <a:r>
-              <a:rPr sz="2000" i="0" b="0">
+              <a:rPr sz="1800" i="0" b="0">
                 <a:solidFill>
                   <a:srgbClr val="D4D4D4"/>
                 </a:solidFill>
@@ -14501,7 +14684,7 @@
               <a:t> </a:t>
             </a:r>
             <a:r>
-              <a:rPr sz="2000" i="0" b="0">
+              <a:rPr sz="1800" i="0" b="0">
                 <a:solidFill>
                   <a:srgbClr val="569CD6"/>
                 </a:solidFill>
@@ -14510,7 +14693,7 @@
               <a:t>BY</a:t>
             </a:r>
             <a:r>
-              <a:rPr sz="2000" i="0" b="0">
+              <a:rPr sz="1800" i="0" b="0">
                 <a:solidFill>
                   <a:srgbClr val="D4D4D4"/>
                 </a:solidFill>
@@ -14519,7 +14702,7 @@
               <a:t> </a:t>
             </a:r>
             <a:r>
-              <a:rPr sz="2000" i="0" b="0">
+              <a:rPr sz="1800" i="0" b="0">
                 <a:solidFill>
                   <a:srgbClr val="D4D4D4"/>
                 </a:solidFill>
@@ -14528,7 +14711,7 @@
               <a:t>grantee</a:t>
             </a:r>
             <a:r>
-              <a:rPr sz="2000" i="0" b="0">
+              <a:rPr sz="1800" i="0" b="0">
                 <a:solidFill>
                   <a:srgbClr val="D4D4D4"/>
                 </a:solidFill>
@@ -14537,7 +14720,7 @@
               <a:t>, </a:t>
             </a:r>
             <a:r>
-              <a:rPr sz="2000" i="0" b="0">
+              <a:rPr sz="1800" i="0" b="0">
                 <a:solidFill>
                   <a:srgbClr val="D4D4D4"/>
                 </a:solidFill>
@@ -14546,7 +14729,7 @@
               <a:t>table_name</a:t>
             </a:r>
             <a:r>
-              <a:rPr sz="2000" i="0" b="0">
+              <a:rPr sz="1800" i="0" b="0">
                 <a:solidFill>
                   <a:srgbClr val="D4D4D4"/>
                 </a:solidFill>
@@ -14555,7 +14738,7 @@
               <a:t>, </a:t>
             </a:r>
             <a:r>
-              <a:rPr sz="2000" i="0" b="0">
+              <a:rPr sz="1800" i="0" b="0">
                 <a:solidFill>
                   <a:srgbClr val="D4D4D4"/>
                 </a:solidFill>
@@ -14564,7 +14747,7 @@
               <a:t>privilege_type</a:t>
             </a:r>
             <a:r>
-              <a:rPr sz="2000" i="0" b="0">
+              <a:rPr sz="1800" i="0" b="0">
                 <a:solidFill>
                   <a:srgbClr val="D4D4D4"/>
                 </a:solidFill>
@@ -14576,11 +14759,11 @@
           <a:p>
             <a:pPr>
               <a:spcAft>
-                <a:spcPts val="428"/>
+                <a:spcPts val="385"/>
               </a:spcAft>
             </a:pPr>
             <a:r>
-              <a:rPr sz="2000" i="0" b="0">
+              <a:rPr sz="1800" i="0" b="0">
                 <a:solidFill>
                   <a:srgbClr val="D4D4D4"/>
                 </a:solidFill>
@@ -14592,11 +14775,11 @@
           <a:p>
             <a:pPr>
               <a:spcAft>
-                <a:spcPts val="428"/>
+                <a:spcPts val="385"/>
               </a:spcAft>
             </a:pPr>
             <a:r>
-              <a:rPr sz="2000" i="1" b="0">
+              <a:rPr sz="1800" i="1" b="0">
                 <a:solidFill>
                   <a:srgbClr val="6A9955"/>
                 </a:solidFill>
@@ -14608,11 +14791,11 @@
           <a:p>
             <a:pPr>
               <a:spcAft>
-                <a:spcPts val="428"/>
+                <a:spcPts val="385"/>
               </a:spcAft>
             </a:pPr>
             <a:r>
-              <a:rPr sz="2000" i="0" b="0">
+              <a:rPr sz="1800" i="0" b="0">
                 <a:solidFill>
                   <a:srgbClr val="569CD6"/>
                 </a:solidFill>
@@ -14621,7 +14804,7 @@
               <a:t>SELECT</a:t>
             </a:r>
             <a:r>
-              <a:rPr sz="2000" i="0" b="0">
+              <a:rPr sz="1800" i="0" b="0">
                 <a:solidFill>
                   <a:srgbClr val="D4D4D4"/>
                 </a:solidFill>
@@ -14630,7 +14813,7 @@
               <a:t> </a:t>
             </a:r>
             <a:r>
-              <a:rPr sz="2000" i="0" b="0">
+              <a:rPr sz="1800" i="0" b="0">
                 <a:solidFill>
                   <a:srgbClr val="D4D4D4"/>
                 </a:solidFill>
@@ -14639,7 +14822,7 @@
               <a:t>grantee</a:t>
             </a:r>
             <a:r>
-              <a:rPr sz="2000" i="0" b="0">
+              <a:rPr sz="1800" i="0" b="0">
                 <a:solidFill>
                   <a:srgbClr val="D4D4D4"/>
                 </a:solidFill>
@@ -14648,7 +14831,7 @@
               <a:t>, </a:t>
             </a:r>
             <a:r>
-              <a:rPr sz="2000" i="0" b="0">
+              <a:rPr sz="1800" i="0" b="0">
                 <a:solidFill>
                   <a:srgbClr val="D4D4D4"/>
                 </a:solidFill>
@@ -14657,7 +14840,7 @@
               <a:t>table_name</a:t>
             </a:r>
             <a:r>
-              <a:rPr sz="2000" i="0" b="0">
+              <a:rPr sz="1800" i="0" b="0">
                 <a:solidFill>
                   <a:srgbClr val="D4D4D4"/>
                 </a:solidFill>
@@ -14666,7 +14849,7 @@
               <a:t>, </a:t>
             </a:r>
             <a:r>
-              <a:rPr sz="2000" i="0" b="0">
+              <a:rPr sz="1800" i="0" b="0">
                 <a:solidFill>
                   <a:srgbClr val="D4D4D4"/>
                 </a:solidFill>
@@ -14675,7 +14858,7 @@
               <a:t>column_name</a:t>
             </a:r>
             <a:r>
-              <a:rPr sz="2000" i="0" b="0">
+              <a:rPr sz="1800" i="0" b="0">
                 <a:solidFill>
                   <a:srgbClr val="D4D4D4"/>
                 </a:solidFill>
@@ -14684,7 +14867,7 @@
               <a:t>, </a:t>
             </a:r>
             <a:r>
-              <a:rPr sz="2000" i="0" b="0">
+              <a:rPr sz="1800" i="0" b="0">
                 <a:solidFill>
                   <a:srgbClr val="D4D4D4"/>
                 </a:solidFill>
@@ -14696,11 +14879,11 @@
           <a:p>
             <a:pPr>
               <a:spcAft>
-                <a:spcPts val="428"/>
+                <a:spcPts val="385"/>
               </a:spcAft>
             </a:pPr>
             <a:r>
-              <a:rPr sz="2000" i="0" b="0">
+              <a:rPr sz="1800" i="0" b="0">
                 <a:solidFill>
                   <a:srgbClr val="569CD6"/>
                 </a:solidFill>
@@ -14709,7 +14892,7 @@
               <a:t>FROM</a:t>
             </a:r>
             <a:r>
-              <a:rPr sz="2000" i="0" b="0">
+              <a:rPr sz="1800" i="0" b="0">
                 <a:solidFill>
                   <a:srgbClr val="D4D4D4"/>
                 </a:solidFill>
@@ -14718,7 +14901,7 @@
               <a:t> </a:t>
             </a:r>
             <a:r>
-              <a:rPr sz="2000" i="0" b="0">
+              <a:rPr sz="1800" i="0" b="0">
                 <a:solidFill>
                   <a:srgbClr val="D4D4D4"/>
                 </a:solidFill>
@@ -14727,7 +14910,7 @@
               <a:t>information_schema</a:t>
             </a:r>
             <a:r>
-              <a:rPr sz="2000" i="0" b="0">
+              <a:rPr sz="1800" i="0" b="0">
                 <a:solidFill>
                   <a:srgbClr val="D4D4D4"/>
                 </a:solidFill>
@@ -14736,7 +14919,7 @@
               <a:t>.</a:t>
             </a:r>
             <a:r>
-              <a:rPr sz="2000" i="0" b="0">
+              <a:rPr sz="1800" i="0" b="0">
                 <a:solidFill>
                   <a:srgbClr val="D4D4D4"/>
                 </a:solidFill>
@@ -14748,11 +14931,11 @@
           <a:p>
             <a:pPr>
               <a:spcAft>
-                <a:spcPts val="428"/>
+                <a:spcPts val="385"/>
               </a:spcAft>
             </a:pPr>
             <a:r>
-              <a:rPr sz="2000" i="0" b="0">
+              <a:rPr sz="1800" i="0" b="0">
                 <a:solidFill>
                   <a:srgbClr val="569CD6"/>
                 </a:solidFill>
@@ -14761,7 +14944,7 @@
               <a:t>WHERE</a:t>
             </a:r>
             <a:r>
-              <a:rPr sz="2000" i="0" b="0">
+              <a:rPr sz="1800" i="0" b="0">
                 <a:solidFill>
                   <a:srgbClr val="D4D4D4"/>
                 </a:solidFill>
@@ -14770,7 +14953,7 @@
               <a:t> </a:t>
             </a:r>
             <a:r>
-              <a:rPr sz="2000" i="0" b="0">
+              <a:rPr sz="1800" i="0" b="0">
                 <a:solidFill>
                   <a:srgbClr val="D4D4D4"/>
                 </a:solidFill>
@@ -14779,7 +14962,7 @@
               <a:t>grantee</a:t>
             </a:r>
             <a:r>
-              <a:rPr sz="2000" i="0" b="0">
+              <a:rPr sz="1800" i="0" b="0">
                 <a:solidFill>
                   <a:srgbClr val="D4D4D4"/>
                 </a:solidFill>
@@ -14788,7 +14971,7 @@
               <a:t> = </a:t>
             </a:r>
             <a:r>
-              <a:rPr sz="2000" i="0" b="0">
+              <a:rPr sz="1800" i="0" b="0">
                 <a:solidFill>
                   <a:srgbClr val="CE9178"/>
                 </a:solidFill>
@@ -14797,7 +14980,7 @@
               <a:t>'veterinario_rol'</a:t>
             </a:r>
             <a:r>
-              <a:rPr sz="2000" i="0" b="0">
+              <a:rPr sz="1800" i="0" b="0">
                 <a:solidFill>
                   <a:srgbClr val="D4D4D4"/>
                 </a:solidFill>
@@ -14806,7 +14989,7 @@
               <a:t> </a:t>
             </a:r>
             <a:r>
-              <a:rPr sz="2000" i="0" b="0">
+              <a:rPr sz="1800" i="0" b="0">
                 <a:solidFill>
                   <a:srgbClr val="569CD6"/>
                 </a:solidFill>
@@ -14815,7 +14998,7 @@
               <a:t>AND</a:t>
             </a:r>
             <a:r>
-              <a:rPr sz="2000" i="0" b="0">
+              <a:rPr sz="1800" i="0" b="0">
                 <a:solidFill>
                   <a:srgbClr val="D4D4D4"/>
                 </a:solidFill>
@@ -14824,7 +15007,7 @@
               <a:t> </a:t>
             </a:r>
             <a:r>
-              <a:rPr sz="2000" i="0" b="0">
+              <a:rPr sz="1800" i="0" b="0">
                 <a:solidFill>
                   <a:srgbClr val="D4D4D4"/>
                 </a:solidFill>
@@ -14833,7 +15016,7 @@
               <a:t>table_name</a:t>
             </a:r>
             <a:r>
-              <a:rPr sz="2000" i="0" b="0">
+              <a:rPr sz="1800" i="0" b="0">
                 <a:solidFill>
                   <a:srgbClr val="D4D4D4"/>
                 </a:solidFill>
@@ -14842,7 +15025,7 @@
               <a:t> = </a:t>
             </a:r>
             <a:r>
-              <a:rPr sz="2000" i="0" b="0">
+              <a:rPr sz="1800" i="0" b="0">
                 <a:solidFill>
                   <a:srgbClr val="CE9178"/>
                 </a:solidFill>
@@ -14854,11 +15037,11 @@
           <a:p>
             <a:pPr>
               <a:spcAft>
-                <a:spcPts val="428"/>
+                <a:spcPts val="385"/>
               </a:spcAft>
             </a:pPr>
             <a:r>
-              <a:rPr sz="2000" i="0" b="0">
+              <a:rPr sz="1800" i="0" b="0">
                 <a:solidFill>
                   <a:srgbClr val="569CD6"/>
                 </a:solidFill>
@@ -14867,7 +15050,7 @@
               <a:t>ORDER</a:t>
             </a:r>
             <a:r>
-              <a:rPr sz="2000" i="0" b="0">
+              <a:rPr sz="1800" i="0" b="0">
                 <a:solidFill>
                   <a:srgbClr val="D4D4D4"/>
                 </a:solidFill>
@@ -14876,7 +15059,7 @@
               <a:t> </a:t>
             </a:r>
             <a:r>
-              <a:rPr sz="2000" i="0" b="0">
+              <a:rPr sz="1800" i="0" b="0">
                 <a:solidFill>
                   <a:srgbClr val="569CD6"/>
                 </a:solidFill>
@@ -14885,7 +15068,7 @@
               <a:t>BY</a:t>
             </a:r>
             <a:r>
-              <a:rPr sz="2000" i="0" b="0">
+              <a:rPr sz="1800" i="0" b="0">
                 <a:solidFill>
                   <a:srgbClr val="D4D4D4"/>
                 </a:solidFill>
@@ -14894,7 +15077,7 @@
               <a:t> </a:t>
             </a:r>
             <a:r>
-              <a:rPr sz="2000" i="0" b="0">
+              <a:rPr sz="1800" i="0" b="0">
                 <a:solidFill>
                   <a:srgbClr val="D4D4D4"/>
                 </a:solidFill>
@@ -14903,7 +15086,7 @@
               <a:t>column_name</a:t>
             </a:r>
             <a:r>
-              <a:rPr sz="2000" i="0" b="0">
+              <a:rPr sz="1800" i="0" b="0">
                 <a:solidFill>
                   <a:srgbClr val="D4D4D4"/>
                 </a:solidFill>
@@ -17148,7 +17331,7 @@
         <p:spPr>
           <a:xfrm>
             <a:off x="457200" y="1261872"/>
-            <a:ext cx="11277295" cy="5179278"/>
+            <a:ext cx="11277295" cy="4962237"/>
           </a:xfrm>
           <a:prstGeom prst="roundRect">
             <a:avLst>
@@ -17398,7 +17581,7 @@
         <p:spPr>
           <a:xfrm>
             <a:off x="685800" y="1719072"/>
-            <a:ext cx="502920" cy="4584918"/>
+            <a:ext cx="502920" cy="4367877"/>
           </a:xfrm>
           <a:prstGeom prst="rect">
             <a:avLst/>
@@ -17413,11 +17596,11 @@
           <a:p>
             <a:pPr algn="r">
               <a:spcAft>
-                <a:spcPts val="385"/>
+                <a:spcPts val="364"/>
               </a:spcAft>
             </a:pPr>
             <a:r>
-              <a:rPr sz="1800" i="0" b="0">
+              <a:rPr sz="1700" i="0" b="0">
                 <a:solidFill>
                   <a:srgbClr val="858585"/>
                 </a:solidFill>
@@ -17429,11 +17612,11 @@
           <a:p>
             <a:pPr algn="r">
               <a:spcAft>
-                <a:spcPts val="385"/>
+                <a:spcPts val="364"/>
               </a:spcAft>
             </a:pPr>
             <a:r>
-              <a:rPr sz="1800" i="0" b="0">
+              <a:rPr sz="1700" i="0" b="0">
                 <a:solidFill>
                   <a:srgbClr val="858585"/>
                 </a:solidFill>
@@ -17445,11 +17628,11 @@
           <a:p>
             <a:pPr algn="r">
               <a:spcAft>
-                <a:spcPts val="385"/>
+                <a:spcPts val="364"/>
               </a:spcAft>
             </a:pPr>
             <a:r>
-              <a:rPr sz="1800" i="0" b="0">
+              <a:rPr sz="1700" i="0" b="0">
                 <a:solidFill>
                   <a:srgbClr val="858585"/>
                 </a:solidFill>
@@ -17461,11 +17644,11 @@
           <a:p>
             <a:pPr algn="r">
               <a:spcAft>
-                <a:spcPts val="385"/>
+                <a:spcPts val="364"/>
               </a:spcAft>
             </a:pPr>
             <a:r>
-              <a:rPr sz="1800" i="0" b="0">
+              <a:rPr sz="1700" i="0" b="0">
                 <a:solidFill>
                   <a:srgbClr val="858585"/>
                 </a:solidFill>
@@ -17477,11 +17660,11 @@
           <a:p>
             <a:pPr algn="r">
               <a:spcAft>
-                <a:spcPts val="385"/>
+                <a:spcPts val="364"/>
               </a:spcAft>
             </a:pPr>
             <a:r>
-              <a:rPr sz="1800" i="0" b="0">
+              <a:rPr sz="1700" i="0" b="0">
                 <a:solidFill>
                   <a:srgbClr val="858585"/>
                 </a:solidFill>
@@ -17493,11 +17676,11 @@
           <a:p>
             <a:pPr algn="r">
               <a:spcAft>
-                <a:spcPts val="385"/>
+                <a:spcPts val="364"/>
               </a:spcAft>
             </a:pPr>
             <a:r>
-              <a:rPr sz="1800" i="0" b="0">
+              <a:rPr sz="1700" i="0" b="0">
                 <a:solidFill>
                   <a:srgbClr val="858585"/>
                 </a:solidFill>
@@ -17509,11 +17692,11 @@
           <a:p>
             <a:pPr algn="r">
               <a:spcAft>
-                <a:spcPts val="385"/>
+                <a:spcPts val="364"/>
               </a:spcAft>
             </a:pPr>
             <a:r>
-              <a:rPr sz="1800" i="0" b="0">
+              <a:rPr sz="1700" i="0" b="0">
                 <a:solidFill>
                   <a:srgbClr val="858585"/>
                 </a:solidFill>
@@ -17525,11 +17708,11 @@
           <a:p>
             <a:pPr algn="r">
               <a:spcAft>
-                <a:spcPts val="385"/>
+                <a:spcPts val="364"/>
               </a:spcAft>
             </a:pPr>
             <a:r>
-              <a:rPr sz="1800" i="0" b="0">
+              <a:rPr sz="1700" i="0" b="0">
                 <a:solidFill>
                   <a:srgbClr val="858585"/>
                 </a:solidFill>
@@ -17541,11 +17724,11 @@
           <a:p>
             <a:pPr algn="r">
               <a:spcAft>
-                <a:spcPts val="385"/>
+                <a:spcPts val="364"/>
               </a:spcAft>
             </a:pPr>
             <a:r>
-              <a:rPr sz="1800" i="0" b="0">
+              <a:rPr sz="1700" i="0" b="0">
                 <a:solidFill>
                   <a:srgbClr val="858585"/>
                 </a:solidFill>
@@ -17557,11 +17740,11 @@
           <a:p>
             <a:pPr algn="r">
               <a:spcAft>
-                <a:spcPts val="385"/>
+                <a:spcPts val="364"/>
               </a:spcAft>
             </a:pPr>
             <a:r>
-              <a:rPr sz="1800" i="0" b="0">
+              <a:rPr sz="1700" i="0" b="0">
                 <a:solidFill>
                   <a:srgbClr val="858585"/>
                 </a:solidFill>
@@ -17573,11 +17756,11 @@
           <a:p>
             <a:pPr algn="r">
               <a:spcAft>
-                <a:spcPts val="385"/>
+                <a:spcPts val="364"/>
               </a:spcAft>
             </a:pPr>
             <a:r>
-              <a:rPr sz="1800" i="0" b="0">
+              <a:rPr sz="1700" i="0" b="0">
                 <a:solidFill>
                   <a:srgbClr val="858585"/>
                 </a:solidFill>
@@ -17589,11 +17772,11 @@
           <a:p>
             <a:pPr algn="r">
               <a:spcAft>
-                <a:spcPts val="385"/>
+                <a:spcPts val="364"/>
               </a:spcAft>
             </a:pPr>
             <a:r>
-              <a:rPr sz="1800" i="0" b="0">
+              <a:rPr sz="1700" i="0" b="0">
                 <a:solidFill>
                   <a:srgbClr val="858585"/>
                 </a:solidFill>
@@ -17605,11 +17788,11 @@
           <a:p>
             <a:pPr algn="r">
               <a:spcAft>
-                <a:spcPts val="385"/>
+                <a:spcPts val="364"/>
               </a:spcAft>
             </a:pPr>
             <a:r>
-              <a:rPr sz="1800" i="0" b="0">
+              <a:rPr sz="1700" i="0" b="0">
                 <a:solidFill>
                   <a:srgbClr val="858585"/>
                 </a:solidFill>
@@ -17621,11 +17804,11 @@
           <a:p>
             <a:pPr algn="r">
               <a:spcAft>
-                <a:spcPts val="385"/>
+                <a:spcPts val="364"/>
               </a:spcAft>
             </a:pPr>
             <a:r>
-              <a:rPr sz="1800" i="0" b="0">
+              <a:rPr sz="1700" i="0" b="0">
                 <a:solidFill>
                   <a:srgbClr val="858585"/>
                 </a:solidFill>
@@ -17645,7 +17828,7 @@
         <p:spPr>
           <a:xfrm>
             <a:off x="1188720" y="1719072"/>
-            <a:ext cx="10271455" cy="4584918"/>
+            <a:ext cx="10271455" cy="4367877"/>
           </a:xfrm>
           <a:prstGeom prst="rect">
             <a:avLst/>
@@ -17660,11 +17843,11 @@
           <a:p>
             <a:pPr>
               <a:spcAft>
-                <a:spcPts val="385"/>
+                <a:spcPts val="364"/>
               </a:spcAft>
             </a:pPr>
             <a:r>
-              <a:rPr sz="1800" i="1" b="0">
+              <a:rPr sz="1700" i="1" b="0">
                 <a:solidFill>
                   <a:srgbClr val="6A9955"/>
                 </a:solidFill>
@@ -17676,11 +17859,11 @@
           <a:p>
             <a:pPr>
               <a:spcAft>
-                <a:spcPts val="385"/>
+                <a:spcPts val="364"/>
               </a:spcAft>
             </a:pPr>
             <a:r>
-              <a:rPr sz="1800" i="0" b="0">
+              <a:rPr sz="1700" i="0" b="0">
                 <a:solidFill>
                   <a:srgbClr val="569CD6"/>
                 </a:solidFill>
@@ -17689,7 +17872,7 @@
               <a:t>SET</a:t>
             </a:r>
             <a:r>
-              <a:rPr sz="1800" i="0" b="0">
+              <a:rPr sz="1700" i="0" b="0">
                 <a:solidFill>
                   <a:srgbClr val="D4D4D4"/>
                 </a:solidFill>
@@ -17698,7 +17881,7 @@
               <a:t> </a:t>
             </a:r>
             <a:r>
-              <a:rPr sz="1800" i="0" b="0">
+              <a:rPr sz="1700" i="0" b="0">
                 <a:solidFill>
                   <a:srgbClr val="569CD6"/>
                 </a:solidFill>
@@ -17707,7 +17890,7 @@
               <a:t>ROLE</a:t>
             </a:r>
             <a:r>
-              <a:rPr sz="1800" i="0" b="0">
+              <a:rPr sz="1700" i="0" b="0">
                 <a:solidFill>
                   <a:srgbClr val="D4D4D4"/>
                 </a:solidFill>
@@ -17716,7 +17899,7 @@
               <a:t> </a:t>
             </a:r>
             <a:r>
-              <a:rPr sz="1800" i="0" b="0">
+              <a:rPr sz="1700" i="0" b="0">
                 <a:solidFill>
                   <a:srgbClr val="D4D4D4"/>
                 </a:solidFill>
@@ -17725,7 +17908,7 @@
               <a:t>recepcion</a:t>
             </a:r>
             <a:r>
-              <a:rPr sz="1800" i="0" b="0">
+              <a:rPr sz="1700" i="0" b="0">
                 <a:solidFill>
                   <a:srgbClr val="D4D4D4"/>
                 </a:solidFill>
@@ -17737,11 +17920,11 @@
           <a:p>
             <a:pPr>
               <a:spcAft>
-                <a:spcPts val="385"/>
+                <a:spcPts val="364"/>
               </a:spcAft>
             </a:pPr>
             <a:r>
-              <a:rPr sz="1800" i="0" b="0">
+              <a:rPr sz="1700" i="0" b="0">
                 <a:solidFill>
                   <a:srgbClr val="569CD6"/>
                 </a:solidFill>
@@ -17750,7 +17933,7 @@
               <a:t>SELECT</a:t>
             </a:r>
             <a:r>
-              <a:rPr sz="1800" i="0" b="0">
+              <a:rPr sz="1700" i="0" b="0">
                 <a:solidFill>
                   <a:srgbClr val="D4D4D4"/>
                 </a:solidFill>
@@ -17759,7 +17942,7 @@
               <a:t> </a:t>
             </a:r>
             <a:r>
-              <a:rPr sz="1800" i="0" b="0">
+              <a:rPr sz="1700" i="0" b="0">
                 <a:solidFill>
                   <a:srgbClr val="DCDCAA"/>
                 </a:solidFill>
@@ -17768,7 +17951,7 @@
               <a:t>count</a:t>
             </a:r>
             <a:r>
-              <a:rPr sz="1800" i="0" b="0">
+              <a:rPr sz="1700" i="0" b="0">
                 <a:solidFill>
                   <a:srgbClr val="D4D4D4"/>
                 </a:solidFill>
@@ -17777,7 +17960,7 @@
               <a:t>(*) </a:t>
             </a:r>
             <a:r>
-              <a:rPr sz="1800" i="0" b="0">
+              <a:rPr sz="1700" i="0" b="0">
                 <a:solidFill>
                   <a:srgbClr val="569CD6"/>
                 </a:solidFill>
@@ -17786,7 +17969,7 @@
               <a:t>FROM</a:t>
             </a:r>
             <a:r>
-              <a:rPr sz="1800" i="0" b="0">
+              <a:rPr sz="1700" i="0" b="0">
                 <a:solidFill>
                   <a:srgbClr val="D4D4D4"/>
                 </a:solidFill>
@@ -17795,7 +17978,7 @@
               <a:t> </a:t>
             </a:r>
             <a:r>
-              <a:rPr sz="1800" i="0" b="0">
+              <a:rPr sz="1700" i="0" b="0">
                 <a:solidFill>
                   <a:srgbClr val="D4D4D4"/>
                 </a:solidFill>
@@ -17804,7 +17987,7 @@
               <a:t>v_agenda_recepcion</a:t>
             </a:r>
             <a:r>
-              <a:rPr sz="1800" i="0" b="0">
+              <a:rPr sz="1700" i="0" b="0">
                 <a:solidFill>
                   <a:srgbClr val="D4D4D4"/>
                 </a:solidFill>
@@ -17813,7 +17996,7 @@
               <a:t>;   </a:t>
             </a:r>
             <a:r>
-              <a:rPr sz="1800" i="1" b="0">
+              <a:rPr sz="1700" i="1" b="0">
                 <a:solidFill>
                   <a:srgbClr val="6A9955"/>
                 </a:solidFill>
@@ -17825,11 +18008,11 @@
           <a:p>
             <a:pPr>
               <a:spcAft>
-                <a:spcPts val="385"/>
+                <a:spcPts val="364"/>
               </a:spcAft>
             </a:pPr>
             <a:r>
-              <a:rPr sz="1800" i="0" b="0">
+              <a:rPr sz="1700" i="0" b="0">
                 <a:solidFill>
                   <a:srgbClr val="569CD6"/>
                 </a:solidFill>
@@ -17838,7 +18021,7 @@
               <a:t>DELETE</a:t>
             </a:r>
             <a:r>
-              <a:rPr sz="1800" i="0" b="0">
+              <a:rPr sz="1700" i="0" b="0">
                 <a:solidFill>
                   <a:srgbClr val="D4D4D4"/>
                 </a:solidFill>
@@ -17847,7 +18030,7 @@
               <a:t> </a:t>
             </a:r>
             <a:r>
-              <a:rPr sz="1800" i="0" b="0">
+              <a:rPr sz="1700" i="0" b="0">
                 <a:solidFill>
                   <a:srgbClr val="569CD6"/>
                 </a:solidFill>
@@ -17856,7 +18039,7 @@
               <a:t>FROM</a:t>
             </a:r>
             <a:r>
-              <a:rPr sz="1800" i="0" b="0">
+              <a:rPr sz="1700" i="0" b="0">
                 <a:solidFill>
                   <a:srgbClr val="D4D4D4"/>
                 </a:solidFill>
@@ -17865,7 +18048,7 @@
               <a:t> </a:t>
             </a:r>
             <a:r>
-              <a:rPr sz="1800" i="0" b="0">
+              <a:rPr sz="1700" i="0" b="0">
                 <a:solidFill>
                   <a:srgbClr val="D4D4D4"/>
                 </a:solidFill>
@@ -17874,7 +18057,7 @@
               <a:t>cita</a:t>
             </a:r>
             <a:r>
-              <a:rPr sz="1800" i="0" b="0">
+              <a:rPr sz="1700" i="0" b="0">
                 <a:solidFill>
                   <a:srgbClr val="D4D4D4"/>
                 </a:solidFill>
@@ -17883,7 +18066,7 @@
               <a:t> </a:t>
             </a:r>
             <a:r>
-              <a:rPr sz="1800" i="0" b="0">
+              <a:rPr sz="1700" i="0" b="0">
                 <a:solidFill>
                   <a:srgbClr val="569CD6"/>
                 </a:solidFill>
@@ -17892,7 +18075,7 @@
               <a:t>WHERE</a:t>
             </a:r>
             <a:r>
-              <a:rPr sz="1800" i="0" b="0">
+              <a:rPr sz="1700" i="0" b="0">
                 <a:solidFill>
                   <a:srgbClr val="D4D4D4"/>
                 </a:solidFill>
@@ -17901,7 +18084,7 @@
               <a:t> </a:t>
             </a:r>
             <a:r>
-              <a:rPr sz="1800" i="0" b="0">
+              <a:rPr sz="1700" i="0" b="0">
                 <a:solidFill>
                   <a:srgbClr val="D4D4D4"/>
                 </a:solidFill>
@@ -17910,7 +18093,7 @@
               <a:t>id_cita</a:t>
             </a:r>
             <a:r>
-              <a:rPr sz="1800" i="0" b="0">
+              <a:rPr sz="1700" i="0" b="0">
                 <a:solidFill>
                   <a:srgbClr val="D4D4D4"/>
                 </a:solidFill>
@@ -17919,7 +18102,7 @@
               <a:t> = </a:t>
             </a:r>
             <a:r>
-              <a:rPr sz="1800" i="0" b="0">
+              <a:rPr sz="1700" i="0" b="0">
                 <a:solidFill>
                   <a:srgbClr val="B5CEA8"/>
                 </a:solidFill>
@@ -17928,7 +18111,7 @@
               <a:t>1</a:t>
             </a:r>
             <a:r>
-              <a:rPr sz="1800" i="0" b="0">
+              <a:rPr sz="1700" i="0" b="0">
                 <a:solidFill>
                   <a:srgbClr val="D4D4D4"/>
                 </a:solidFill>
@@ -17940,11 +18123,11 @@
           <a:p>
             <a:pPr>
               <a:spcAft>
-                <a:spcPts val="385"/>
+                <a:spcPts val="364"/>
               </a:spcAft>
             </a:pPr>
             <a:r>
-              <a:rPr sz="1800" i="1" b="0">
+              <a:rPr sz="1700" i="1" b="0">
                 <a:solidFill>
                   <a:srgbClr val="6A9955"/>
                 </a:solidFill>
@@ -17956,11 +18139,11 @@
           <a:p>
             <a:pPr>
               <a:spcAft>
-                <a:spcPts val="385"/>
+                <a:spcPts val="364"/>
               </a:spcAft>
             </a:pPr>
             <a:r>
-              <a:rPr sz="1800" i="0" b="0">
+              <a:rPr sz="1700" i="0" b="0">
                 <a:solidFill>
                   <a:srgbClr val="569CD6"/>
                 </a:solidFill>
@@ -17969,7 +18152,7 @@
               <a:t>SELECT</a:t>
             </a:r>
             <a:r>
-              <a:rPr sz="1800" i="0" b="0">
+              <a:rPr sz="1700" i="0" b="0">
                 <a:solidFill>
                   <a:srgbClr val="D4D4D4"/>
                 </a:solidFill>
@@ -17978,7 +18161,7 @@
               <a:t> </a:t>
             </a:r>
             <a:r>
-              <a:rPr sz="1800" i="0" b="0">
+              <a:rPr sz="1700" i="0" b="0">
                 <a:solidFill>
                   <a:srgbClr val="D4D4D4"/>
                 </a:solidFill>
@@ -17987,7 +18170,7 @@
               <a:t>nombre</a:t>
             </a:r>
             <a:r>
-              <a:rPr sz="1800" i="0" b="0">
+              <a:rPr sz="1700" i="0" b="0">
                 <a:solidFill>
                   <a:srgbClr val="D4D4D4"/>
                 </a:solidFill>
@@ -17996,7 +18179,7 @@
               <a:t>, </a:t>
             </a:r>
             <a:r>
-              <a:rPr sz="1800" i="0" b="0">
+              <a:rPr sz="1700" i="0" b="0">
                 <a:solidFill>
                   <a:srgbClr val="D4D4D4"/>
                 </a:solidFill>
@@ -18005,7 +18188,7 @@
               <a:t>email</a:t>
             </a:r>
             <a:r>
-              <a:rPr sz="1800" i="0" b="0">
+              <a:rPr sz="1700" i="0" b="0">
                 <a:solidFill>
                   <a:srgbClr val="D4D4D4"/>
                 </a:solidFill>
@@ -18014,7 +18197,7 @@
               <a:t> </a:t>
             </a:r>
             <a:r>
-              <a:rPr sz="1800" i="0" b="0">
+              <a:rPr sz="1700" i="0" b="0">
                 <a:solidFill>
                   <a:srgbClr val="569CD6"/>
                 </a:solidFill>
@@ -18023,7 +18206,7 @@
               <a:t>FROM</a:t>
             </a:r>
             <a:r>
-              <a:rPr sz="1800" i="0" b="0">
+              <a:rPr sz="1700" i="0" b="0">
                 <a:solidFill>
                   <a:srgbClr val="D4D4D4"/>
                 </a:solidFill>
@@ -18032,7 +18215,7 @@
               <a:t> </a:t>
             </a:r>
             <a:r>
-              <a:rPr sz="1800" i="0" b="0">
+              <a:rPr sz="1700" i="0" b="0">
                 <a:solidFill>
                   <a:srgbClr val="D4D4D4"/>
                 </a:solidFill>
@@ -18041,7 +18224,7 @@
               <a:t>dueno</a:t>
             </a:r>
             <a:r>
-              <a:rPr sz="1800" i="0" b="0">
+              <a:rPr sz="1700" i="0" b="0">
                 <a:solidFill>
                   <a:srgbClr val="D4D4D4"/>
                 </a:solidFill>
@@ -18053,11 +18236,11 @@
           <a:p>
             <a:pPr>
               <a:spcAft>
-                <a:spcPts val="385"/>
+                <a:spcPts val="364"/>
               </a:spcAft>
             </a:pPr>
             <a:r>
-              <a:rPr sz="1800" i="1" b="0">
+              <a:rPr sz="1700" i="1" b="0">
                 <a:solidFill>
                   <a:srgbClr val="6A9955"/>
                 </a:solidFill>
@@ -18069,11 +18252,11 @@
           <a:p>
             <a:pPr>
               <a:spcAft>
-                <a:spcPts val="385"/>
+                <a:spcPts val="364"/>
               </a:spcAft>
             </a:pPr>
             <a:r>
-              <a:rPr sz="1800" i="0" b="0">
+              <a:rPr sz="1700" i="0" b="0">
                 <a:solidFill>
                   <a:srgbClr val="D4D4D4"/>
                 </a:solidFill>
@@ -18082,7 +18265,7 @@
               <a:t>RESET</a:t>
             </a:r>
             <a:r>
-              <a:rPr sz="1800" i="0" b="0">
+              <a:rPr sz="1700" i="0" b="0">
                 <a:solidFill>
                   <a:srgbClr val="D4D4D4"/>
                 </a:solidFill>
@@ -18091,7 +18274,7 @@
               <a:t> </a:t>
             </a:r>
             <a:r>
-              <a:rPr sz="1800" i="0" b="0">
+              <a:rPr sz="1700" i="0" b="0">
                 <a:solidFill>
                   <a:srgbClr val="569CD6"/>
                 </a:solidFill>
@@ -18100,7 +18283,7 @@
               <a:t>ROLE</a:t>
             </a:r>
             <a:r>
-              <a:rPr sz="1800" i="0" b="0">
+              <a:rPr sz="1700" i="0" b="0">
                 <a:solidFill>
                   <a:srgbClr val="D4D4D4"/>
                 </a:solidFill>
@@ -18109,7 +18292,7 @@
               <a:t>;                                </a:t>
             </a:r>
             <a:r>
-              <a:rPr sz="1800" i="1" b="0">
+              <a:rPr sz="1700" i="1" b="0">
                 <a:solidFill>
                   <a:srgbClr val="6A9955"/>
                 </a:solidFill>
@@ -18121,11 +18304,11 @@
           <a:p>
             <a:pPr>
               <a:spcAft>
-                <a:spcPts val="385"/>
+                <a:spcPts val="364"/>
               </a:spcAft>
             </a:pPr>
             <a:r>
-              <a:rPr sz="1800" i="0" b="0">
+              <a:rPr sz="1700" i="0" b="0">
                 <a:solidFill>
                   <a:srgbClr val="D4D4D4"/>
                 </a:solidFill>
@@ -18137,11 +18320,11 @@
           <a:p>
             <a:pPr>
               <a:spcAft>
-                <a:spcPts val="385"/>
+                <a:spcPts val="364"/>
               </a:spcAft>
             </a:pPr>
             <a:r>
-              <a:rPr sz="1800" i="0" b="0">
+              <a:rPr sz="1700" i="0" b="0">
                 <a:solidFill>
                   <a:srgbClr val="569CD6"/>
                 </a:solidFill>
@@ -18150,7 +18333,7 @@
               <a:t>SET</a:t>
             </a:r>
             <a:r>
-              <a:rPr sz="1800" i="0" b="0">
+              <a:rPr sz="1700" i="0" b="0">
                 <a:solidFill>
                   <a:srgbClr val="D4D4D4"/>
                 </a:solidFill>
@@ -18159,7 +18342,7 @@
               <a:t> </a:t>
             </a:r>
             <a:r>
-              <a:rPr sz="1800" i="0" b="0">
+              <a:rPr sz="1700" i="0" b="0">
                 <a:solidFill>
                   <a:srgbClr val="569CD6"/>
                 </a:solidFill>
@@ -18168,7 +18351,7 @@
               <a:t>ROLE</a:t>
             </a:r>
             <a:r>
-              <a:rPr sz="1800" i="0" b="0">
+              <a:rPr sz="1700" i="0" b="0">
                 <a:solidFill>
                   <a:srgbClr val="D4D4D4"/>
                 </a:solidFill>
@@ -18177,7 +18360,7 @@
               <a:t> </a:t>
             </a:r>
             <a:r>
-              <a:rPr sz="1800" i="0" b="0">
+              <a:rPr sz="1700" i="0" b="0">
                 <a:solidFill>
                   <a:srgbClr val="D4D4D4"/>
                 </a:solidFill>
@@ -18186,7 +18369,7 @@
               <a:t>veterinario_rol</a:t>
             </a:r>
             <a:r>
-              <a:rPr sz="1800" i="0" b="0">
+              <a:rPr sz="1700" i="0" b="0">
                 <a:solidFill>
                   <a:srgbClr val="D4D4D4"/>
                 </a:solidFill>
@@ -18198,11 +18381,11 @@
           <a:p>
             <a:pPr>
               <a:spcAft>
-                <a:spcPts val="385"/>
+                <a:spcPts val="364"/>
               </a:spcAft>
             </a:pPr>
             <a:r>
-              <a:rPr sz="1800" i="0" b="0">
+              <a:rPr sz="1700" i="0" b="0">
                 <a:solidFill>
                   <a:srgbClr val="569CD6"/>
                 </a:solidFill>
@@ -18211,7 +18394,7 @@
               <a:t>SELECT</a:t>
             </a:r>
             <a:r>
-              <a:rPr sz="1800" i="0" b="0">
+              <a:rPr sz="1700" i="0" b="0">
                 <a:solidFill>
                   <a:srgbClr val="D4D4D4"/>
                 </a:solidFill>
@@ -18220,7 +18403,7 @@
               <a:t> </a:t>
             </a:r>
             <a:r>
-              <a:rPr sz="1800" i="0" b="0">
+              <a:rPr sz="1700" i="0" b="0">
                 <a:solidFill>
                   <a:srgbClr val="D4D4D4"/>
                 </a:solidFill>
@@ -18229,7 +18412,7 @@
               <a:t>id_dueno</a:t>
             </a:r>
             <a:r>
-              <a:rPr sz="1800" i="0" b="0">
+              <a:rPr sz="1700" i="0" b="0">
                 <a:solidFill>
                   <a:srgbClr val="D4D4D4"/>
                 </a:solidFill>
@@ -18238,7 +18421,7 @@
               <a:t>, </a:t>
             </a:r>
             <a:r>
-              <a:rPr sz="1800" i="0" b="0">
+              <a:rPr sz="1700" i="0" b="0">
                 <a:solidFill>
                   <a:srgbClr val="D4D4D4"/>
                 </a:solidFill>
@@ -18247,7 +18430,7 @@
               <a:t>nombre</a:t>
             </a:r>
             <a:r>
-              <a:rPr sz="1800" i="0" b="0">
+              <a:rPr sz="1700" i="0" b="0">
                 <a:solidFill>
                   <a:srgbClr val="D4D4D4"/>
                 </a:solidFill>
@@ -18256,7 +18439,7 @@
               <a:t> </a:t>
             </a:r>
             <a:r>
-              <a:rPr sz="1800" i="0" b="0">
+              <a:rPr sz="1700" i="0" b="0">
                 <a:solidFill>
                   <a:srgbClr val="569CD6"/>
                 </a:solidFill>
@@ -18265,7 +18448,7 @@
               <a:t>FROM</a:t>
             </a:r>
             <a:r>
-              <a:rPr sz="1800" i="0" b="0">
+              <a:rPr sz="1700" i="0" b="0">
                 <a:solidFill>
                   <a:srgbClr val="D4D4D4"/>
                 </a:solidFill>
@@ -18274,7 +18457,7 @@
               <a:t> </a:t>
             </a:r>
             <a:r>
-              <a:rPr sz="1800" i="0" b="0">
+              <a:rPr sz="1700" i="0" b="0">
                 <a:solidFill>
                   <a:srgbClr val="D4D4D4"/>
                 </a:solidFill>
@@ -18283,7 +18466,7 @@
               <a:t>dueno</a:t>
             </a:r>
             <a:r>
-              <a:rPr sz="1800" i="0" b="0">
+              <a:rPr sz="1700" i="0" b="0">
                 <a:solidFill>
                   <a:srgbClr val="D4D4D4"/>
                 </a:solidFill>
@@ -18292,7 +18475,7 @@
               <a:t>;        </a:t>
             </a:r>
             <a:r>
-              <a:rPr sz="1800" i="1" b="0">
+              <a:rPr sz="1700" i="1" b="0">
                 <a:solidFill>
                   <a:srgbClr val="6A9955"/>
                 </a:solidFill>
@@ -18304,11 +18487,11 @@
           <a:p>
             <a:pPr>
               <a:spcAft>
-                <a:spcPts val="385"/>
+                <a:spcPts val="364"/>
               </a:spcAft>
             </a:pPr>
             <a:r>
-              <a:rPr sz="1800" i="0" b="0">
+              <a:rPr sz="1700" i="0" b="0">
                 <a:solidFill>
                   <a:srgbClr val="569CD6"/>
                 </a:solidFill>
@@ -18317,7 +18500,7 @@
               <a:t>SELECT</a:t>
             </a:r>
             <a:r>
-              <a:rPr sz="1800" i="0" b="0">
+              <a:rPr sz="1700" i="0" b="0">
                 <a:solidFill>
                   <a:srgbClr val="D4D4D4"/>
                 </a:solidFill>
@@ -18326,7 +18509,7 @@
               <a:t> * </a:t>
             </a:r>
             <a:r>
-              <a:rPr sz="1800" i="0" b="0">
+              <a:rPr sz="1700" i="0" b="0">
                 <a:solidFill>
                   <a:srgbClr val="569CD6"/>
                 </a:solidFill>
@@ -18335,7 +18518,7 @@
               <a:t>FROM</a:t>
             </a:r>
             <a:r>
-              <a:rPr sz="1800" i="0" b="0">
+              <a:rPr sz="1700" i="0" b="0">
                 <a:solidFill>
                   <a:srgbClr val="D4D4D4"/>
                 </a:solidFill>
@@ -18344,7 +18527,7 @@
               <a:t> </a:t>
             </a:r>
             <a:r>
-              <a:rPr sz="1800" i="0" b="0">
+              <a:rPr sz="1700" i="0" b="0">
                 <a:solidFill>
                   <a:srgbClr val="D4D4D4"/>
                 </a:solidFill>
@@ -18353,7 +18536,7 @@
               <a:t>dueno</a:t>
             </a:r>
             <a:r>
-              <a:rPr sz="1800" i="0" b="0">
+              <a:rPr sz="1700" i="0" b="0">
                 <a:solidFill>
                   <a:srgbClr val="D4D4D4"/>
                 </a:solidFill>
@@ -18362,7 +18545,7 @@
               <a:t>;                       </a:t>
             </a:r>
             <a:r>
-              <a:rPr sz="1800" i="1" b="0">
+              <a:rPr sz="1700" i="1" b="0">
                 <a:solidFill>
                   <a:srgbClr val="6A9955"/>
                 </a:solidFill>
@@ -18374,11 +18557,11 @@
           <a:p>
             <a:pPr>
               <a:spcAft>
-                <a:spcPts val="385"/>
+                <a:spcPts val="364"/>
               </a:spcAft>
             </a:pPr>
             <a:r>
-              <a:rPr sz="1800" i="1" b="0">
+              <a:rPr sz="1700" i="1" b="0">
                 <a:solidFill>
                   <a:srgbClr val="6A9955"/>
                 </a:solidFill>
@@ -18390,11 +18573,11 @@
           <a:p>
             <a:pPr>
               <a:spcAft>
-                <a:spcPts val="385"/>
+                <a:spcPts val="364"/>
               </a:spcAft>
             </a:pPr>
             <a:r>
-              <a:rPr sz="1800" i="0" b="0">
+              <a:rPr sz="1700" i="0" b="0">
                 <a:solidFill>
                   <a:srgbClr val="D4D4D4"/>
                 </a:solidFill>
@@ -18403,7 +18586,7 @@
               <a:t>RESET</a:t>
             </a:r>
             <a:r>
-              <a:rPr sz="1800" i="0" b="0">
+              <a:rPr sz="1700" i="0" b="0">
                 <a:solidFill>
                   <a:srgbClr val="D4D4D4"/>
                 </a:solidFill>
@@ -18412,7 +18595,7 @@
               <a:t> </a:t>
             </a:r>
             <a:r>
-              <a:rPr sz="1800" i="0" b="0">
+              <a:rPr sz="1700" i="0" b="0">
                 <a:solidFill>
                   <a:srgbClr val="569CD6"/>
                 </a:solidFill>
@@ -18421,7 +18604,7 @@
               <a:t>ROLE</a:t>
             </a:r>
             <a:r>
-              <a:rPr sz="1800" i="0" b="0">
+              <a:rPr sz="1700" i="0" b="0">
                 <a:solidFill>
                   <a:srgbClr val="D4D4D4"/>
                 </a:solidFill>
@@ -23630,7 +23813,7 @@
         <p:spPr>
           <a:xfrm>
             <a:off x="457200" y="1261872"/>
-            <a:ext cx="11277295" cy="5025563"/>
+            <a:ext cx="11277295" cy="3800832"/>
           </a:xfrm>
           <a:prstGeom prst="roundRect">
             <a:avLst>
@@ -23879,8 +24062,8 @@
         </p:nvSpPr>
         <p:spPr>
           <a:xfrm>
-            <a:off x="1188720" y="1719072"/>
-            <a:ext cx="10271455" cy="4431203"/>
+            <a:off x="685800" y="1719072"/>
+            <a:ext cx="502920" cy="3206472"/>
           </a:xfrm>
           <a:prstGeom prst="rect">
             <a:avLst/>
@@ -23893,13 +24076,228 @@
           </a:bodyPr>
           <a:lstStyle/>
           <a:p>
+            <a:pPr algn="r">
+              <a:spcAft>
+                <a:spcPts val="300"/>
+              </a:spcAft>
+            </a:pPr>
+            <a:r>
+              <a:rPr sz="1400" i="0" b="0">
+                <a:solidFill>
+                  <a:srgbClr val="858585"/>
+                </a:solidFill>
+                <a:latin typeface="Consolas"/>
+              </a:rPr>
+              <a:t>1</a:t>
+            </a:r>
+          </a:p>
+          <a:p>
+            <a:pPr algn="r">
+              <a:spcAft>
+                <a:spcPts val="300"/>
+              </a:spcAft>
+            </a:pPr>
+            <a:r>
+              <a:rPr sz="1400" i="0" b="0">
+                <a:solidFill>
+                  <a:srgbClr val="858585"/>
+                </a:solidFill>
+                <a:latin typeface="Consolas"/>
+              </a:rPr>
+              <a:t>2</a:t>
+            </a:r>
+          </a:p>
+          <a:p>
+            <a:pPr algn="r">
+              <a:spcAft>
+                <a:spcPts val="300"/>
+              </a:spcAft>
+            </a:pPr>
+            <a:r>
+              <a:rPr sz="1400" i="0" b="0">
+                <a:solidFill>
+                  <a:srgbClr val="858585"/>
+                </a:solidFill>
+                <a:latin typeface="Consolas"/>
+              </a:rPr>
+              <a:t>3</a:t>
+            </a:r>
+          </a:p>
+          <a:p>
+            <a:pPr algn="r">
+              <a:spcAft>
+                <a:spcPts val="300"/>
+              </a:spcAft>
+            </a:pPr>
+            <a:r>
+              <a:rPr sz="1400" i="0" b="0">
+                <a:solidFill>
+                  <a:srgbClr val="858585"/>
+                </a:solidFill>
+                <a:latin typeface="Consolas"/>
+              </a:rPr>
+              <a:t>4</a:t>
+            </a:r>
+          </a:p>
+          <a:p>
+            <a:pPr algn="r">
+              <a:spcAft>
+                <a:spcPts val="300"/>
+              </a:spcAft>
+            </a:pPr>
+            <a:r>
+              <a:rPr sz="1400" i="0" b="0">
+                <a:solidFill>
+                  <a:srgbClr val="858585"/>
+                </a:solidFill>
+                <a:latin typeface="Consolas"/>
+              </a:rPr>
+              <a:t>5</a:t>
+            </a:r>
+          </a:p>
+          <a:p>
+            <a:pPr algn="r">
+              <a:spcAft>
+                <a:spcPts val="300"/>
+              </a:spcAft>
+            </a:pPr>
+            <a:r>
+              <a:rPr sz="1400" i="0" b="0">
+                <a:solidFill>
+                  <a:srgbClr val="858585"/>
+                </a:solidFill>
+                <a:latin typeface="Consolas"/>
+              </a:rPr>
+              <a:t>6</a:t>
+            </a:r>
+          </a:p>
+          <a:p>
+            <a:pPr algn="r">
+              <a:spcAft>
+                <a:spcPts val="300"/>
+              </a:spcAft>
+            </a:pPr>
+            <a:r>
+              <a:rPr sz="1400" i="0" b="0">
+                <a:solidFill>
+                  <a:srgbClr val="858585"/>
+                </a:solidFill>
+                <a:latin typeface="Consolas"/>
+              </a:rPr>
+              <a:t>7</a:t>
+            </a:r>
+          </a:p>
+          <a:p>
+            <a:pPr algn="r">
+              <a:spcAft>
+                <a:spcPts val="300"/>
+              </a:spcAft>
+            </a:pPr>
+            <a:r>
+              <a:rPr sz="1400" i="0" b="0">
+                <a:solidFill>
+                  <a:srgbClr val="858585"/>
+                </a:solidFill>
+                <a:latin typeface="Consolas"/>
+              </a:rPr>
+              <a:t>8</a:t>
+            </a:r>
+          </a:p>
+          <a:p>
+            <a:pPr algn="r">
+              <a:spcAft>
+                <a:spcPts val="300"/>
+              </a:spcAft>
+            </a:pPr>
+            <a:r>
+              <a:rPr sz="1400" i="0" b="0">
+                <a:solidFill>
+                  <a:srgbClr val="858585"/>
+                </a:solidFill>
+                <a:latin typeface="Consolas"/>
+              </a:rPr>
+              <a:t>9</a:t>
+            </a:r>
+          </a:p>
+          <a:p>
+            <a:pPr algn="r">
+              <a:spcAft>
+                <a:spcPts val="300"/>
+              </a:spcAft>
+            </a:pPr>
+            <a:r>
+              <a:rPr sz="1400" i="0" b="0">
+                <a:solidFill>
+                  <a:srgbClr val="858585"/>
+                </a:solidFill>
+                <a:latin typeface="Consolas"/>
+              </a:rPr>
+              <a:t>10</a:t>
+            </a:r>
+          </a:p>
+          <a:p>
+            <a:pPr algn="r">
+              <a:spcAft>
+                <a:spcPts val="300"/>
+              </a:spcAft>
+            </a:pPr>
+            <a:r>
+              <a:rPr sz="1400" i="0" b="0">
+                <a:solidFill>
+                  <a:srgbClr val="858585"/>
+                </a:solidFill>
+                <a:latin typeface="Consolas"/>
+              </a:rPr>
+              <a:t>11</a:t>
+            </a:r>
+          </a:p>
+          <a:p>
+            <a:pPr algn="r">
+              <a:spcAft>
+                <a:spcPts val="300"/>
+              </a:spcAft>
+            </a:pPr>
+            <a:r>
+              <a:rPr sz="1400" i="0" b="0">
+                <a:solidFill>
+                  <a:srgbClr val="858585"/>
+                </a:solidFill>
+                <a:latin typeface="Consolas"/>
+              </a:rPr>
+              <a:t>12</a:t>
+            </a:r>
+          </a:p>
+        </p:txBody>
+      </p:sp>
+      <p:sp>
+        <p:nvSpPr>
+          <p:cNvPr id="12" name="TextBox 11"/>
+          <p:cNvSpPr txBox="1"/>
+          <p:nvPr/>
+        </p:nvSpPr>
+        <p:spPr>
+          <a:xfrm>
+            <a:off x="1188720" y="1719072"/>
+            <a:ext cx="10271455" cy="3206472"/>
+          </a:xfrm>
+          <a:prstGeom prst="rect">
+            <a:avLst/>
+          </a:prstGeom>
+          <a:noFill/>
+        </p:spPr>
+        <p:txBody>
+          <a:bodyPr wrap="square">
+            <a:spAutoFit/>
+          </a:bodyPr>
+          <a:lstStyle/>
+          <a:p>
             <a:pPr>
               <a:spcAft>
-                <a:spcPts val="407"/>
+                <a:spcPts val="300"/>
               </a:spcAft>
             </a:pPr>
             <a:r>
-              <a:rPr sz="1900" i="1" b="0">
+              <a:rPr sz="1400" i="1" b="0">
                 <a:solidFill>
                   <a:srgbClr val="6A9955"/>
                 </a:solidFill>
@@ -23911,11 +24309,11 @@
           <a:p>
             <a:pPr>
               <a:spcAft>
-                <a:spcPts val="407"/>
+                <a:spcPts val="300"/>
               </a:spcAft>
             </a:pPr>
             <a:r>
-              <a:rPr sz="1900" i="0" b="0">
+              <a:rPr sz="1400" i="0" b="0">
                 <a:solidFill>
                   <a:srgbClr val="569CD6"/>
                 </a:solidFill>
@@ -23924,7 +24322,7 @@
               <a:t>CREATE</a:t>
             </a:r>
             <a:r>
-              <a:rPr sz="1900" i="0" b="0">
+              <a:rPr sz="1400" i="0" b="0">
                 <a:solidFill>
                   <a:srgbClr val="D4D4D4"/>
                 </a:solidFill>
@@ -23933,7 +24331,7 @@
               <a:t> </a:t>
             </a:r>
             <a:r>
-              <a:rPr sz="1900" i="0" b="0">
+              <a:rPr sz="1400" i="0" b="0">
                 <a:solidFill>
                   <a:srgbClr val="569CD6"/>
                 </a:solidFill>
@@ -23942,7 +24340,7 @@
               <a:t>ROLE</a:t>
             </a:r>
             <a:r>
-              <a:rPr sz="1900" i="0" b="0">
+              <a:rPr sz="1400" i="0" b="0">
                 <a:solidFill>
                   <a:srgbClr val="D4D4D4"/>
                 </a:solidFill>
@@ -23951,7 +24349,7 @@
               <a:t> </a:t>
             </a:r>
             <a:r>
-              <a:rPr sz="1900" i="0" b="0">
+              <a:rPr sz="1400" i="0" b="0">
                 <a:solidFill>
                   <a:srgbClr val="D4D4D4"/>
                 </a:solidFill>
@@ -23960,7 +24358,7 @@
               <a:t>admin_bd</a:t>
             </a:r>
             <a:r>
-              <a:rPr sz="1900" i="0" b="0">
+              <a:rPr sz="1400" i="0" b="0">
                 <a:solidFill>
                   <a:srgbClr val="D4D4D4"/>
                 </a:solidFill>
@@ -23969,7 +24367,7 @@
               <a:t> </a:t>
             </a:r>
             <a:r>
-              <a:rPr sz="1900" i="0" b="0">
+              <a:rPr sz="1400" i="0" b="0">
                 <a:solidFill>
                   <a:srgbClr val="D4D4D4"/>
                 </a:solidFill>
@@ -23978,7 +24376,7 @@
               <a:t>NOLOGIN</a:t>
             </a:r>
             <a:r>
-              <a:rPr sz="1900" i="0" b="0">
+              <a:rPr sz="1400" i="0" b="0">
                 <a:solidFill>
                   <a:srgbClr val="D4D4D4"/>
                 </a:solidFill>
@@ -23987,7 +24385,7 @@
               <a:t>;  </a:t>
             </a:r>
             <a:r>
-              <a:rPr sz="1900" i="0" b="0">
+              <a:rPr sz="1400" i="0" b="0">
                 <a:solidFill>
                   <a:srgbClr val="569CD6"/>
                 </a:solidFill>
@@ -23996,7 +24394,7 @@
               <a:t>CREATE</a:t>
             </a:r>
             <a:r>
-              <a:rPr sz="1900" i="0" b="0">
+              <a:rPr sz="1400" i="0" b="0">
                 <a:solidFill>
                   <a:srgbClr val="D4D4D4"/>
                 </a:solidFill>
@@ -24005,7 +24403,7 @@
               <a:t> </a:t>
             </a:r>
             <a:r>
-              <a:rPr sz="1900" i="0" b="0">
+              <a:rPr sz="1400" i="0" b="0">
                 <a:solidFill>
                   <a:srgbClr val="569CD6"/>
                 </a:solidFill>
@@ -24014,7 +24412,7 @@
               <a:t>ROLE</a:t>
             </a:r>
             <a:r>
-              <a:rPr sz="1900" i="0" b="0">
+              <a:rPr sz="1400" i="0" b="0">
                 <a:solidFill>
                   <a:srgbClr val="D4D4D4"/>
                 </a:solidFill>
@@ -24023,7 +24421,7 @@
               <a:t> </a:t>
             </a:r>
             <a:r>
-              <a:rPr sz="1900" i="0" b="0">
+              <a:rPr sz="1400" i="0" b="0">
                 <a:solidFill>
                   <a:srgbClr val="D4D4D4"/>
                 </a:solidFill>
@@ -24032,7 +24430,7 @@
               <a:t>recepcion</a:t>
             </a:r>
             <a:r>
-              <a:rPr sz="1900" i="0" b="0">
+              <a:rPr sz="1400" i="0" b="0">
                 <a:solidFill>
                   <a:srgbClr val="D4D4D4"/>
                 </a:solidFill>
@@ -24041,7 +24439,7 @@
               <a:t> </a:t>
             </a:r>
             <a:r>
-              <a:rPr sz="1900" i="0" b="0">
+              <a:rPr sz="1400" i="0" b="0">
                 <a:solidFill>
                   <a:srgbClr val="D4D4D4"/>
                 </a:solidFill>
@@ -24050,7 +24448,7 @@
               <a:t>NOLOGIN</a:t>
             </a:r>
             <a:r>
-              <a:rPr sz="1900" i="0" b="0">
+              <a:rPr sz="1400" i="0" b="0">
                 <a:solidFill>
                   <a:srgbClr val="D4D4D4"/>
                 </a:solidFill>
@@ -24062,11 +24460,11 @@
           <a:p>
             <a:pPr>
               <a:spcAft>
-                <a:spcPts val="407"/>
+                <a:spcPts val="300"/>
               </a:spcAft>
             </a:pPr>
             <a:r>
-              <a:rPr sz="1900" i="0" b="0">
+              <a:rPr sz="1400" i="0" b="0">
                 <a:solidFill>
                   <a:srgbClr val="569CD6"/>
                 </a:solidFill>
@@ -24075,7 +24473,7 @@
               <a:t>CREATE</a:t>
             </a:r>
             <a:r>
-              <a:rPr sz="1900" i="0" b="0">
+              <a:rPr sz="1400" i="0" b="0">
                 <a:solidFill>
                   <a:srgbClr val="D4D4D4"/>
                 </a:solidFill>
@@ -24084,7 +24482,7 @@
               <a:t> </a:t>
             </a:r>
             <a:r>
-              <a:rPr sz="1900" i="0" b="0">
+              <a:rPr sz="1400" i="0" b="0">
                 <a:solidFill>
                   <a:srgbClr val="569CD6"/>
                 </a:solidFill>
@@ -24093,7 +24491,7 @@
               <a:t>ROLE</a:t>
             </a:r>
             <a:r>
-              <a:rPr sz="1900" i="0" b="0">
+              <a:rPr sz="1400" i="0" b="0">
                 <a:solidFill>
                   <a:srgbClr val="D4D4D4"/>
                 </a:solidFill>
@@ -24102,7 +24500,7 @@
               <a:t> </a:t>
             </a:r>
             <a:r>
-              <a:rPr sz="1900" i="0" b="0">
+              <a:rPr sz="1400" i="0" b="0">
                 <a:solidFill>
                   <a:srgbClr val="D4D4D4"/>
                 </a:solidFill>
@@ -24111,7 +24509,7 @@
               <a:t>veterinario_rol</a:t>
             </a:r>
             <a:r>
-              <a:rPr sz="1900" i="0" b="0">
+              <a:rPr sz="1400" i="0" b="0">
                 <a:solidFill>
                   <a:srgbClr val="D4D4D4"/>
                 </a:solidFill>
@@ -24120,7 +24518,7 @@
               <a:t> </a:t>
             </a:r>
             <a:r>
-              <a:rPr sz="1900" i="0" b="0">
+              <a:rPr sz="1400" i="0" b="0">
                 <a:solidFill>
                   <a:srgbClr val="D4D4D4"/>
                 </a:solidFill>
@@ -24129,7 +24527,7 @@
               <a:t>NOLOGIN</a:t>
             </a:r>
             <a:r>
-              <a:rPr sz="1900" i="0" b="0">
+              <a:rPr sz="1400" i="0" b="0">
                 <a:solidFill>
                   <a:srgbClr val="D4D4D4"/>
                 </a:solidFill>
@@ -24138,7 +24536,7 @@
               <a:t>;  </a:t>
             </a:r>
             <a:r>
-              <a:rPr sz="1900" i="0" b="0">
+              <a:rPr sz="1400" i="0" b="0">
                 <a:solidFill>
                   <a:srgbClr val="569CD6"/>
                 </a:solidFill>
@@ -24147,7 +24545,7 @@
               <a:t>CREATE</a:t>
             </a:r>
             <a:r>
-              <a:rPr sz="1900" i="0" b="0">
+              <a:rPr sz="1400" i="0" b="0">
                 <a:solidFill>
                   <a:srgbClr val="D4D4D4"/>
                 </a:solidFill>
@@ -24156,7 +24554,7 @@
               <a:t> </a:t>
             </a:r>
             <a:r>
-              <a:rPr sz="1900" i="0" b="0">
+              <a:rPr sz="1400" i="0" b="0">
                 <a:solidFill>
                   <a:srgbClr val="569CD6"/>
                 </a:solidFill>
@@ -24165,7 +24563,7 @@
               <a:t>ROLE</a:t>
             </a:r>
             <a:r>
-              <a:rPr sz="1900" i="0" b="0">
+              <a:rPr sz="1400" i="0" b="0">
                 <a:solidFill>
                   <a:srgbClr val="D4D4D4"/>
                 </a:solidFill>
@@ -24174,7 +24572,7 @@
               <a:t> </a:t>
             </a:r>
             <a:r>
-              <a:rPr sz="1900" i="0" b="0">
+              <a:rPr sz="1400" i="0" b="0">
                 <a:solidFill>
                   <a:srgbClr val="D4D4D4"/>
                 </a:solidFill>
@@ -24183,7 +24581,7 @@
               <a:t>auditor</a:t>
             </a:r>
             <a:r>
-              <a:rPr sz="1900" i="0" b="0">
+              <a:rPr sz="1400" i="0" b="0">
                 <a:solidFill>
                   <a:srgbClr val="D4D4D4"/>
                 </a:solidFill>
@@ -24192,7 +24590,7 @@
               <a:t> </a:t>
             </a:r>
             <a:r>
-              <a:rPr sz="1900" i="0" b="0">
+              <a:rPr sz="1400" i="0" b="0">
                 <a:solidFill>
                   <a:srgbClr val="D4D4D4"/>
                 </a:solidFill>
@@ -24201,7 +24599,7 @@
               <a:t>NOLOGIN</a:t>
             </a:r>
             <a:r>
-              <a:rPr sz="1900" i="0" b="0">
+              <a:rPr sz="1400" i="0" b="0">
                 <a:solidFill>
                   <a:srgbClr val="D4D4D4"/>
                 </a:solidFill>
@@ -24213,11 +24611,11 @@
           <a:p>
             <a:pPr>
               <a:spcAft>
-                <a:spcPts val="407"/>
+                <a:spcPts val="300"/>
               </a:spcAft>
             </a:pPr>
             <a:r>
-              <a:rPr sz="1900" i="1" b="0">
+              <a:rPr sz="1400" i="1" b="0">
                 <a:solidFill>
                   <a:srgbClr val="6A9955"/>
                 </a:solidFill>
@@ -24229,11 +24627,11 @@
           <a:p>
             <a:pPr>
               <a:spcAft>
-                <a:spcPts val="407"/>
+                <a:spcPts val="300"/>
               </a:spcAft>
             </a:pPr>
             <a:r>
-              <a:rPr sz="1900" i="0" b="0">
+              <a:rPr sz="1400" i="0" b="0">
                 <a:solidFill>
                   <a:srgbClr val="569CD6"/>
                 </a:solidFill>
@@ -24242,7 +24640,7 @@
               <a:t>CREATE</a:t>
             </a:r>
             <a:r>
-              <a:rPr sz="1900" i="0" b="0">
+              <a:rPr sz="1400" i="0" b="0">
                 <a:solidFill>
                   <a:srgbClr val="D4D4D4"/>
                 </a:solidFill>
@@ -24251,7 +24649,7 @@
               <a:t> </a:t>
             </a:r>
             <a:r>
-              <a:rPr sz="1900" i="0" b="0">
+              <a:rPr sz="1400" i="0" b="0">
                 <a:solidFill>
                   <a:srgbClr val="569CD6"/>
                 </a:solidFill>
@@ -24260,7 +24658,7 @@
               <a:t>ROLE</a:t>
             </a:r>
             <a:r>
-              <a:rPr sz="1900" i="0" b="0">
+              <a:rPr sz="1400" i="0" b="0">
                 <a:solidFill>
                   <a:srgbClr val="D4D4D4"/>
                 </a:solidFill>
@@ -24269,7 +24667,7 @@
               <a:t> </a:t>
             </a:r>
             <a:r>
-              <a:rPr sz="1900" i="0" b="0">
+              <a:rPr sz="1400" i="0" b="0">
                 <a:solidFill>
                   <a:srgbClr val="D4D4D4"/>
                 </a:solidFill>
@@ -24278,7 +24676,7 @@
               <a:t>ana_gomez</a:t>
             </a:r>
             <a:r>
-              <a:rPr sz="1900" i="0" b="0">
+              <a:rPr sz="1400" i="0" b="0">
                 <a:solidFill>
                   <a:srgbClr val="D4D4D4"/>
                 </a:solidFill>
@@ -24287,7 +24685,7 @@
               <a:t> </a:t>
             </a:r>
             <a:r>
-              <a:rPr sz="1900" i="0" b="0">
+              <a:rPr sz="1400" i="0" b="0">
                 <a:solidFill>
                   <a:srgbClr val="D4D4D4"/>
                 </a:solidFill>
@@ -24296,7 +24694,7 @@
               <a:t>LOGIN</a:t>
             </a:r>
             <a:r>
-              <a:rPr sz="1900" i="0" b="0">
+              <a:rPr sz="1400" i="0" b="0">
                 <a:solidFill>
                   <a:srgbClr val="D4D4D4"/>
                 </a:solidFill>
@@ -24305,7 +24703,7 @@
               <a:t> </a:t>
             </a:r>
             <a:r>
-              <a:rPr sz="1900" i="0" b="0">
+              <a:rPr sz="1400" i="0" b="0">
                 <a:solidFill>
                   <a:srgbClr val="D4D4D4"/>
                 </a:solidFill>
@@ -24314,7 +24712,7 @@
               <a:t>PASSWORD</a:t>
             </a:r>
             <a:r>
-              <a:rPr sz="1900" i="0" b="0">
+              <a:rPr sz="1400" i="0" b="0">
                 <a:solidFill>
                   <a:srgbClr val="D4D4D4"/>
                 </a:solidFill>
@@ -24323,7 +24721,7 @@
               <a:t> </a:t>
             </a:r>
             <a:r>
-              <a:rPr sz="1900" i="0" b="0">
+              <a:rPr sz="1400" i="0" b="0">
                 <a:solidFill>
                   <a:srgbClr val="CE9178"/>
                 </a:solidFill>
@@ -24332,7 +24730,7 @@
               <a:t>'cambiar_en_produccion'</a:t>
             </a:r>
             <a:r>
-              <a:rPr sz="1900" i="0" b="0">
+              <a:rPr sz="1400" i="0" b="0">
                 <a:solidFill>
                   <a:srgbClr val="D4D4D4"/>
                 </a:solidFill>
@@ -24344,11 +24742,11 @@
           <a:p>
             <a:pPr>
               <a:spcAft>
-                <a:spcPts val="407"/>
+                <a:spcPts val="300"/>
               </a:spcAft>
             </a:pPr>
             <a:r>
-              <a:rPr sz="1900" i="0" b="0">
+              <a:rPr sz="1400" i="0" b="0">
                 <a:solidFill>
                   <a:srgbClr val="569CD6"/>
                 </a:solidFill>
@@ -24357,7 +24755,7 @@
               <a:t>GRANT</a:t>
             </a:r>
             <a:r>
-              <a:rPr sz="1900" i="0" b="0">
+              <a:rPr sz="1400" i="0" b="0">
                 <a:solidFill>
                   <a:srgbClr val="D4D4D4"/>
                 </a:solidFill>
@@ -24366,7 +24764,7 @@
               <a:t> </a:t>
             </a:r>
             <a:r>
-              <a:rPr sz="1900" i="0" b="0">
+              <a:rPr sz="1400" i="0" b="0">
                 <a:solidFill>
                   <a:srgbClr val="D4D4D4"/>
                 </a:solidFill>
@@ -24375,7 +24773,7 @@
               <a:t>recepcion</a:t>
             </a:r>
             <a:r>
-              <a:rPr sz="1900" i="0" b="0">
+              <a:rPr sz="1400" i="0" b="0">
                 <a:solidFill>
                   <a:srgbClr val="D4D4D4"/>
                 </a:solidFill>
@@ -24384,7 +24782,7 @@
               <a:t> </a:t>
             </a:r>
             <a:r>
-              <a:rPr sz="1900" i="0" b="0">
+              <a:rPr sz="1400" i="0" b="0">
                 <a:solidFill>
                   <a:srgbClr val="569CD6"/>
                 </a:solidFill>
@@ -24393,7 +24791,7 @@
               <a:t>TO</a:t>
             </a:r>
             <a:r>
-              <a:rPr sz="1900" i="0" b="0">
+              <a:rPr sz="1400" i="0" b="0">
                 <a:solidFill>
                   <a:srgbClr val="D4D4D4"/>
                 </a:solidFill>
@@ -24402,7 +24800,7 @@
               <a:t> </a:t>
             </a:r>
             <a:r>
-              <a:rPr sz="1900" i="0" b="0">
+              <a:rPr sz="1400" i="0" b="0">
                 <a:solidFill>
                   <a:srgbClr val="D4D4D4"/>
                 </a:solidFill>
@@ -24411,7 +24809,7 @@
               <a:t>ana_gomez</a:t>
             </a:r>
             <a:r>
-              <a:rPr sz="1900" i="0" b="0">
+              <a:rPr sz="1400" i="0" b="0">
                 <a:solidFill>
                   <a:srgbClr val="D4D4D4"/>
                 </a:solidFill>
@@ -24423,11 +24821,11 @@
           <a:p>
             <a:pPr>
               <a:spcAft>
-                <a:spcPts val="407"/>
+                <a:spcPts val="300"/>
               </a:spcAft>
             </a:pPr>
             <a:r>
-              <a:rPr sz="1900" i="0" b="0">
+              <a:rPr sz="1400" i="0" b="0">
                 <a:solidFill>
                   <a:srgbClr val="D4D4D4"/>
                 </a:solidFill>
@@ -24439,11 +24837,11 @@
           <a:p>
             <a:pPr>
               <a:spcAft>
-                <a:spcPts val="407"/>
+                <a:spcPts val="300"/>
               </a:spcAft>
             </a:pPr>
             <a:r>
-              <a:rPr sz="1900" i="1" b="0">
+              <a:rPr sz="1400" i="1" b="0">
                 <a:solidFill>
                   <a:srgbClr val="6A9955"/>
                 </a:solidFill>
@@ -24455,11 +24853,11 @@
           <a:p>
             <a:pPr>
               <a:spcAft>
-                <a:spcPts val="407"/>
+                <a:spcPts val="300"/>
               </a:spcAft>
             </a:pPr>
             <a:r>
-              <a:rPr sz="1900" i="0" b="0">
+              <a:rPr sz="1400" i="0" b="0">
                 <a:solidFill>
                   <a:srgbClr val="569CD6"/>
                 </a:solidFill>
@@ -24468,7 +24866,7 @@
               <a:t>GRANT</a:t>
             </a:r>
             <a:r>
-              <a:rPr sz="1900" i="0" b="0">
+              <a:rPr sz="1400" i="0" b="0">
                 <a:solidFill>
                   <a:srgbClr val="D4D4D4"/>
                 </a:solidFill>
@@ -24477,7 +24875,7 @@
               <a:t> </a:t>
             </a:r>
             <a:r>
-              <a:rPr sz="1900" i="0" b="0">
+              <a:rPr sz="1400" i="0" b="0">
                 <a:solidFill>
                   <a:srgbClr val="569CD6"/>
                 </a:solidFill>
@@ -24486,7 +24884,7 @@
               <a:t>SELECT</a:t>
             </a:r>
             <a:r>
-              <a:rPr sz="1900" i="0" b="0">
+              <a:rPr sz="1400" i="0" b="0">
                 <a:solidFill>
                   <a:srgbClr val="D4D4D4"/>
                 </a:solidFill>
@@ -24495,7 +24893,7 @@
               <a:t>, </a:t>
             </a:r>
             <a:r>
-              <a:rPr sz="1900" i="0" b="0">
+              <a:rPr sz="1400" i="0" b="0">
                 <a:solidFill>
                   <a:srgbClr val="569CD6"/>
                 </a:solidFill>
@@ -24504,7 +24902,7 @@
               <a:t>INSERT</a:t>
             </a:r>
             <a:r>
-              <a:rPr sz="1900" i="0" b="0">
+              <a:rPr sz="1400" i="0" b="0">
                 <a:solidFill>
                   <a:srgbClr val="D4D4D4"/>
                 </a:solidFill>
@@ -24513,7 +24911,7 @@
               <a:t>, </a:t>
             </a:r>
             <a:r>
-              <a:rPr sz="1900" i="0" b="0">
+              <a:rPr sz="1400" i="0" b="0">
                 <a:solidFill>
                   <a:srgbClr val="569CD6"/>
                 </a:solidFill>
@@ -24522,7 +24920,7 @@
               <a:t>UPDATE</a:t>
             </a:r>
             <a:r>
-              <a:rPr sz="1900" i="0" b="0">
+              <a:rPr sz="1400" i="0" b="0">
                 <a:solidFill>
                   <a:srgbClr val="D4D4D4"/>
                 </a:solidFill>
@@ -24531,7 +24929,7 @@
               <a:t> </a:t>
             </a:r>
             <a:r>
-              <a:rPr sz="1900" i="0" b="0">
+              <a:rPr sz="1400" i="0" b="0">
                 <a:solidFill>
                   <a:srgbClr val="569CD6"/>
                 </a:solidFill>
@@ -24540,7 +24938,7 @@
               <a:t>ON</a:t>
             </a:r>
             <a:r>
-              <a:rPr sz="1900" i="0" b="0">
+              <a:rPr sz="1400" i="0" b="0">
                 <a:solidFill>
                   <a:srgbClr val="D4D4D4"/>
                 </a:solidFill>
@@ -24549,7 +24947,7 @@
               <a:t> </a:t>
             </a:r>
             <a:r>
-              <a:rPr sz="1900" i="0" b="0">
+              <a:rPr sz="1400" i="0" b="0">
                 <a:solidFill>
                   <a:srgbClr val="D4D4D4"/>
                 </a:solidFill>
@@ -24558,7 +24956,7 @@
               <a:t>cita</a:t>
             </a:r>
             <a:r>
-              <a:rPr sz="1900" i="0" b="0">
+              <a:rPr sz="1400" i="0" b="0">
                 <a:solidFill>
                   <a:srgbClr val="D4D4D4"/>
                 </a:solidFill>
@@ -24567,7 +24965,7 @@
               <a:t> </a:t>
             </a:r>
             <a:r>
-              <a:rPr sz="1900" i="0" b="0">
+              <a:rPr sz="1400" i="0" b="0">
                 <a:solidFill>
                   <a:srgbClr val="569CD6"/>
                 </a:solidFill>
@@ -24576,7 +24974,7 @@
               <a:t>TO</a:t>
             </a:r>
             <a:r>
-              <a:rPr sz="1900" i="0" b="0">
+              <a:rPr sz="1400" i="0" b="0">
                 <a:solidFill>
                   <a:srgbClr val="D4D4D4"/>
                 </a:solidFill>
@@ -24585,7 +24983,7 @@
               <a:t> </a:t>
             </a:r>
             <a:r>
-              <a:rPr sz="1900" i="0" b="0">
+              <a:rPr sz="1400" i="0" b="0">
                 <a:solidFill>
                   <a:srgbClr val="D4D4D4"/>
                 </a:solidFill>
@@ -24594,7 +24992,7 @@
               <a:t>recepcion</a:t>
             </a:r>
             <a:r>
-              <a:rPr sz="1900" i="0" b="0">
+              <a:rPr sz="1400" i="0" b="0">
                 <a:solidFill>
                   <a:srgbClr val="D4D4D4"/>
                 </a:solidFill>
@@ -24606,11 +25004,11 @@
           <a:p>
             <a:pPr>
               <a:spcAft>
-                <a:spcPts val="407"/>
+                <a:spcPts val="300"/>
               </a:spcAft>
             </a:pPr>
             <a:r>
-              <a:rPr sz="1900" i="0" b="0">
+              <a:rPr sz="1400" i="0" b="0">
                 <a:solidFill>
                   <a:srgbClr val="569CD6"/>
                 </a:solidFill>
@@ -24619,7 +25017,7 @@
               <a:t>GRANT</a:t>
             </a:r>
             <a:r>
-              <a:rPr sz="1900" i="0" b="0">
+              <a:rPr sz="1400" i="0" b="0">
                 <a:solidFill>
                   <a:srgbClr val="D4D4D4"/>
                 </a:solidFill>
@@ -24628,7 +25026,7 @@
               <a:t> </a:t>
             </a:r>
             <a:r>
-              <a:rPr sz="1900" i="0" b="0">
+              <a:rPr sz="1400" i="0" b="0">
                 <a:solidFill>
                   <a:srgbClr val="569CD6"/>
                 </a:solidFill>
@@ -24637,7 +25035,7 @@
               <a:t>SELECT</a:t>
             </a:r>
             <a:r>
-              <a:rPr sz="1900" i="0" b="0">
+              <a:rPr sz="1400" i="0" b="0">
                 <a:solidFill>
                   <a:srgbClr val="D4D4D4"/>
                 </a:solidFill>
@@ -24646,7 +25044,7 @@
               <a:t> </a:t>
             </a:r>
             <a:r>
-              <a:rPr sz="1900" i="0" b="0">
+              <a:rPr sz="1400" i="0" b="0">
                 <a:solidFill>
                   <a:srgbClr val="569CD6"/>
                 </a:solidFill>
@@ -24655,7 +25053,7 @@
               <a:t>ON</a:t>
             </a:r>
             <a:r>
-              <a:rPr sz="1900" i="0" b="0">
+              <a:rPr sz="1400" i="0" b="0">
                 <a:solidFill>
                   <a:srgbClr val="D4D4D4"/>
                 </a:solidFill>
@@ -24664,7 +25062,7 @@
               <a:t> </a:t>
             </a:r>
             <a:r>
-              <a:rPr sz="1900" i="0" b="0">
+              <a:rPr sz="1400" i="0" b="0">
                 <a:solidFill>
                   <a:srgbClr val="D4D4D4"/>
                 </a:solidFill>
@@ -24673,7 +25071,7 @@
               <a:t>dueno</a:t>
             </a:r>
             <a:r>
-              <a:rPr sz="1900" i="0" b="0">
+              <a:rPr sz="1400" i="0" b="0">
                 <a:solidFill>
                   <a:srgbClr val="D4D4D4"/>
                 </a:solidFill>
@@ -24682,7 +25080,7 @@
               <a:t>, </a:t>
             </a:r>
             <a:r>
-              <a:rPr sz="1900" i="0" b="0">
+              <a:rPr sz="1400" i="0" b="0">
                 <a:solidFill>
                   <a:srgbClr val="D4D4D4"/>
                 </a:solidFill>
@@ -24691,7 +25089,7 @@
               <a:t>mascota</a:t>
             </a:r>
             <a:r>
-              <a:rPr sz="1900" i="0" b="0">
+              <a:rPr sz="1400" i="0" b="0">
                 <a:solidFill>
                   <a:srgbClr val="D4D4D4"/>
                 </a:solidFill>
@@ -24700,7 +25098,7 @@
               <a:t>, </a:t>
             </a:r>
             <a:r>
-              <a:rPr sz="1900" i="0" b="0">
+              <a:rPr sz="1400" i="0" b="0">
                 <a:solidFill>
                   <a:srgbClr val="D4D4D4"/>
                 </a:solidFill>
@@ -24709,7 +25107,7 @@
               <a:t>veterinario</a:t>
             </a:r>
             <a:r>
-              <a:rPr sz="1900" i="0" b="0">
+              <a:rPr sz="1400" i="0" b="0">
                 <a:solidFill>
                   <a:srgbClr val="D4D4D4"/>
                 </a:solidFill>
@@ -24718,7 +25116,7 @@
               <a:t> </a:t>
             </a:r>
             <a:r>
-              <a:rPr sz="1900" i="0" b="0">
+              <a:rPr sz="1400" i="0" b="0">
                 <a:solidFill>
                   <a:srgbClr val="569CD6"/>
                 </a:solidFill>
@@ -24727,7 +25125,7 @@
               <a:t>TO</a:t>
             </a:r>
             <a:r>
-              <a:rPr sz="1900" i="0" b="0">
+              <a:rPr sz="1400" i="0" b="0">
                 <a:solidFill>
                   <a:srgbClr val="D4D4D4"/>
                 </a:solidFill>
@@ -24736,7 +25134,7 @@
               <a:t> </a:t>
             </a:r>
             <a:r>
-              <a:rPr sz="1900" i="0" b="0">
+              <a:rPr sz="1400" i="0" b="0">
                 <a:solidFill>
                   <a:srgbClr val="D4D4D4"/>
                 </a:solidFill>
@@ -24745,7 +25143,7 @@
               <a:t>recepcion</a:t>
             </a:r>
             <a:r>
-              <a:rPr sz="1900" i="0" b="0">
+              <a:rPr sz="1400" i="0" b="0">
                 <a:solidFill>
                   <a:srgbClr val="D4D4D4"/>
                 </a:solidFill>
@@ -24757,11 +25155,11 @@
           <a:p>
             <a:pPr>
               <a:spcAft>
-                <a:spcPts val="407"/>
+                <a:spcPts val="300"/>
               </a:spcAft>
             </a:pPr>
             <a:r>
-              <a:rPr sz="1900" i="0" b="0">
+              <a:rPr sz="1400" i="0" b="0">
                 <a:solidFill>
                   <a:srgbClr val="569CD6"/>
                 </a:solidFill>
@@ -24770,7 +25168,7 @@
               <a:t>GRANT</a:t>
             </a:r>
             <a:r>
-              <a:rPr sz="1900" i="0" b="0">
+              <a:rPr sz="1400" i="0" b="0">
                 <a:solidFill>
                   <a:srgbClr val="D4D4D4"/>
                 </a:solidFill>
@@ -24779,7 +25177,7 @@
               <a:t> </a:t>
             </a:r>
             <a:r>
-              <a:rPr sz="1900" i="0" b="0">
+              <a:rPr sz="1400" i="0" b="0">
                 <a:solidFill>
                   <a:srgbClr val="569CD6"/>
                 </a:solidFill>
@@ -24788,7 +25186,7 @@
               <a:t>USAGE</a:t>
             </a:r>
             <a:r>
-              <a:rPr sz="1900" i="0" b="0">
+              <a:rPr sz="1400" i="0" b="0">
                 <a:solidFill>
                   <a:srgbClr val="D4D4D4"/>
                 </a:solidFill>
@@ -24797,7 +25195,7 @@
               <a:t> </a:t>
             </a:r>
             <a:r>
-              <a:rPr sz="1900" i="0" b="0">
+              <a:rPr sz="1400" i="0" b="0">
                 <a:solidFill>
                   <a:srgbClr val="569CD6"/>
                 </a:solidFill>
@@ -24806,7 +25204,7 @@
               <a:t>ON</a:t>
             </a:r>
             <a:r>
-              <a:rPr sz="1900" i="0" b="0">
+              <a:rPr sz="1400" i="0" b="0">
                 <a:solidFill>
                   <a:srgbClr val="D4D4D4"/>
                 </a:solidFill>
@@ -24815,7 +25213,7 @@
               <a:t> </a:t>
             </a:r>
             <a:r>
-              <a:rPr sz="1900" i="0" b="0">
+              <a:rPr sz="1400" i="0" b="0">
                 <a:solidFill>
                   <a:srgbClr val="569CD6"/>
                 </a:solidFill>
@@ -24824,7 +25222,7 @@
               <a:t>SEQUENCE</a:t>
             </a:r>
             <a:r>
-              <a:rPr sz="1900" i="0" b="0">
+              <a:rPr sz="1400" i="0" b="0">
                 <a:solidFill>
                   <a:srgbClr val="D4D4D4"/>
                 </a:solidFill>
@@ -24833,7 +25231,7 @@
               <a:t> </a:t>
             </a:r>
             <a:r>
-              <a:rPr sz="1900" i="0" b="0">
+              <a:rPr sz="1400" i="0" b="0">
                 <a:solidFill>
                   <a:srgbClr val="D4D4D4"/>
                 </a:solidFill>
@@ -24842,7 +25240,7 @@
               <a:t>cita_id_cita_seq</a:t>
             </a:r>
             <a:r>
-              <a:rPr sz="1900" i="0" b="0">
+              <a:rPr sz="1400" i="0" b="0">
                 <a:solidFill>
                   <a:srgbClr val="D4D4D4"/>
                 </a:solidFill>
@@ -24851,7 +25249,7 @@
               <a:t> </a:t>
             </a:r>
             <a:r>
-              <a:rPr sz="1900" i="0" b="0">
+              <a:rPr sz="1400" i="0" b="0">
                 <a:solidFill>
                   <a:srgbClr val="569CD6"/>
                 </a:solidFill>
@@ -24860,7 +25258,7 @@
               <a:t>TO</a:t>
             </a:r>
             <a:r>
-              <a:rPr sz="1900" i="0" b="0">
+              <a:rPr sz="1400" i="0" b="0">
                 <a:solidFill>
                   <a:srgbClr val="D4D4D4"/>
                 </a:solidFill>
@@ -24869,7 +25267,7 @@
               <a:t> </a:t>
             </a:r>
             <a:r>
-              <a:rPr sz="1900" i="0" b="0">
+              <a:rPr sz="1400" i="0" b="0">
                 <a:solidFill>
                   <a:srgbClr val="D4D4D4"/>
                 </a:solidFill>
@@ -24878,7 +25276,7 @@
               <a:t>recepcion</a:t>
             </a:r>
             <a:r>
-              <a:rPr sz="1900" i="0" b="0">
+              <a:rPr sz="1400" i="0" b="0">
                 <a:solidFill>
                   <a:srgbClr val="D4D4D4"/>
                 </a:solidFill>
@@ -24890,11 +25288,11 @@
           <a:p>
             <a:pPr>
               <a:spcAft>
-                <a:spcPts val="407"/>
+                <a:spcPts val="300"/>
               </a:spcAft>
             </a:pPr>
             <a:r>
-              <a:rPr sz="1900" i="1" b="0">
+              <a:rPr sz="1400" i="1" b="0">
                 <a:solidFill>
                   <a:srgbClr val="6A9955"/>
                 </a:solidFill>
@@ -24907,7 +25305,7 @@
       </p:sp>
       <p:sp>
         <p:nvSpPr>
-          <p:cNvPr id="12" name="TextBox 11"/>
+          <p:cNvPr id="13" name="TextBox 12"/>
           <p:cNvSpPr txBox="1"/>
           <p:nvPr/>
         </p:nvSpPr>

--- a/Bases de Datos II/Clases/Clase 2 - Administracion de bases de datos/Presentacion.pptx
+++ b/Bases de Datos II/Clases/Clase 2 - Administracion de bases de datos/Presentacion.pptx
@@ -1615,7 +1615,7 @@
           <a:lstStyle/>
           <a:p>
             <a:r>
-              <a:t>QUÉ ES (dilo así): Tres REVOKE con propósitos distintos: dejar escrita una decisión, limpiar PUBLIC y deshacer una cadena de reotorgamientos.</a:t>
+              <a:t>QUÉ ES (dilo así): Tres REVOKE con propósitos distintos: dejar escrita una decisión, limpiar PUBLIC y deshacer una cadena de privilegios otorgados a otros.</a:t>
             </a:r>
           </a:p>
           <a:p/>
@@ -1636,13 +1636,13 @@
           </a:p>
           <a:p>
             <a:r>
-              <a:t>  • Líneas 6-10: GRANT ... WITH GRANT OPTION al auditor, y cómo se le quita solo la opción de reotorgar: REVOKE GRANT OPTION FOR SELECT ... CASCADE. El auditor conserva su SELECT; lo que él concedió desaparece.</a:t>
+              <a:t>  • Líneas 6-10: GRANT ... WITH GRANT OPTION al auditor, y cómo se le quita solo la opción de otorgarlo a otros: REVOKE GRANT OPTION FOR SELECT ... CASCADE. El auditor conserva su SELECT; lo que él concedió desaparece.</a:t>
             </a:r>
           </a:p>
           <a:p/>
           <a:p>
             <a:r>
-              <a:t>EJEMPLO: Si el auditor alcanzó a dar SELECT sobre cita a veterinario_rol, el REVOKE sin CASCADE responde «dependent privileges exist»; con CASCADE, veterinario_rol pierde ese SELECT y el auditor queda con el suyo, sin opción de reotorgar.</a:t>
+              <a:t>EJEMPLO: Si el auditor alcanzó a dar SELECT sobre cita a veterinario_rol, el REVOKE sin CASCADE responde «dependent privileges exist»; con CASCADE, veterinario_rol pierde ese SELECT y el auditor queda con el suyo, sin opción de otorgarlo a otros.</a:t>
             </a:r>
           </a:p>
           <a:p/>
@@ -9037,7 +9037,7 @@
                 </a:solidFill>
                 <a:latin typeface="Calibri"/>
               </a:rPr>
-              <a:t> deja que quien recibe un privilegio lo reotorgue, y el control se pierde en cadena.</a:t>
+              <a:t> deja que quien recibe un privilegio lo otorgue a otros, y el control se pierde en cadena.</a:t>
             </a:r>
           </a:p>
           <a:p>
